--- a/LabBook_20.pptx
+++ b/LabBook_20.pptx
@@ -5,10 +5,10 @@
     <p:sldMasterId id="2147483648" r:id="rId1"/>
   </p:sldMasterIdLst>
   <p:notesMasterIdLst>
-    <p:notesMasterId r:id="rId18"/>
+    <p:notesMasterId r:id="rId19"/>
   </p:notesMasterIdLst>
   <p:handoutMasterIdLst>
-    <p:handoutMasterId r:id="rId19"/>
+    <p:handoutMasterId r:id="rId20"/>
   </p:handoutMasterIdLst>
   <p:sldIdLst>
     <p:sldId id="256" r:id="rId2"/>
@@ -16,17 +16,18 @@
     <p:sldId id="295" r:id="rId4"/>
     <p:sldId id="302" r:id="rId5"/>
     <p:sldId id="303" r:id="rId6"/>
-    <p:sldId id="291" r:id="rId7"/>
-    <p:sldId id="296" r:id="rId8"/>
-    <p:sldId id="294" r:id="rId9"/>
-    <p:sldId id="299" r:id="rId10"/>
-    <p:sldId id="300" r:id="rId11"/>
-    <p:sldId id="301" r:id="rId12"/>
-    <p:sldId id="297" r:id="rId13"/>
-    <p:sldId id="290" r:id="rId14"/>
-    <p:sldId id="292" r:id="rId15"/>
-    <p:sldId id="298" r:id="rId16"/>
-    <p:sldId id="288" r:id="rId17"/>
+    <p:sldId id="304" r:id="rId7"/>
+    <p:sldId id="291" r:id="rId8"/>
+    <p:sldId id="296" r:id="rId9"/>
+    <p:sldId id="294" r:id="rId10"/>
+    <p:sldId id="299" r:id="rId11"/>
+    <p:sldId id="300" r:id="rId12"/>
+    <p:sldId id="301" r:id="rId13"/>
+    <p:sldId id="297" r:id="rId14"/>
+    <p:sldId id="290" r:id="rId15"/>
+    <p:sldId id="292" r:id="rId16"/>
+    <p:sldId id="298" r:id="rId17"/>
+    <p:sldId id="288" r:id="rId18"/>
   </p:sldIdLst>
   <p:sldSz cx="12192000" cy="6858000"/>
   <p:notesSz cx="12192000" cy="6858000"/>
@@ -817,7 +818,7 @@
           <a:p>
             <a:fld id="{8438F8DC-35B0-48E6-A86E-42F1F08DD00F}" type="datetimeFigureOut">
               <a:rPr lang="es-ES" smtClean="0"/>
-              <a:t>01/03/2026</a:t>
+              <a:t>02/03/2026</a:t>
             </a:fld>
             <a:endParaRPr lang="es-ES"/>
           </a:p>
@@ -994,7 +995,7 @@
           <a:p>
             <a:fld id="{FACBDC12-F39B-4B97-8F4D-6734F9D366FF}" type="datetimeFigureOut">
               <a:rPr lang="es-ES" smtClean="0"/>
-              <a:t>01/03/2026</a:t>
+              <a:t>02/03/2026</a:t>
             </a:fld>
             <a:endParaRPr lang="es-ES"/>
           </a:p>
@@ -1374,6 +1375,90 @@
   <p:cSld>
     <p:spTree>
       <p:nvGrpSpPr>
+        <p:cNvPr id="1" name=""/>
+        <p:cNvGrpSpPr/>
+        <p:nvPr/>
+      </p:nvGrpSpPr>
+      <p:grpSpPr>
+        <a:xfrm>
+          <a:off x="0" y="0"/>
+          <a:ext cx="0" cy="0"/>
+          <a:chOff x="0" y="0"/>
+          <a:chExt cx="0" cy="0"/>
+        </a:xfrm>
+      </p:grpSpPr>
+      <p:sp>
+        <p:nvSpPr>
+          <p:cNvPr id="2" name="Marcador de imagen de diapositiva 1"/>
+          <p:cNvSpPr>
+            <a:spLocks noGrp="1" noRot="1" noChangeAspect="1"/>
+          </p:cNvSpPr>
+          <p:nvPr>
+            <p:ph type="sldImg"/>
+          </p:nvPr>
+        </p:nvSpPr>
+        <p:spPr/>
+      </p:sp>
+      <p:sp>
+        <p:nvSpPr>
+          <p:cNvPr id="3" name="Marcador de notas 2"/>
+          <p:cNvSpPr>
+            <a:spLocks noGrp="1"/>
+          </p:cNvSpPr>
+          <p:nvPr>
+            <p:ph type="body" idx="1"/>
+          </p:nvPr>
+        </p:nvSpPr>
+        <p:spPr/>
+        <p:txBody>
+          <a:bodyPr/>
+          <a:lstStyle/>
+          <a:p>
+            <a:endParaRPr lang="es-ES" dirty="0"/>
+          </a:p>
+        </p:txBody>
+      </p:sp>
+      <p:sp>
+        <p:nvSpPr>
+          <p:cNvPr id="4" name="Marcador de número de diapositiva 3"/>
+          <p:cNvSpPr>
+            <a:spLocks noGrp="1"/>
+          </p:cNvSpPr>
+          <p:nvPr>
+            <p:ph type="sldNum" sz="quarter" idx="5"/>
+          </p:nvPr>
+        </p:nvSpPr>
+        <p:spPr/>
+        <p:txBody>
+          <a:bodyPr/>
+          <a:lstStyle/>
+          <a:p>
+            <a:fld id="{676223B9-C868-4436-87D9-1A3152E1157A}" type="slidenum">
+              <a:rPr lang="es-ES" smtClean="0"/>
+              <a:t>14</a:t>
+            </a:fld>
+            <a:endParaRPr lang="es-ES"/>
+          </a:p>
+        </p:txBody>
+      </p:sp>
+    </p:spTree>
+    <p:extLst>
+      <p:ext uri="{BB962C8B-B14F-4D97-AF65-F5344CB8AC3E}">
+        <p14:creationId xmlns:p14="http://schemas.microsoft.com/office/powerpoint/2010/main" val="942232946"/>
+      </p:ext>
+    </p:extLst>
+  </p:cSld>
+  <p:clrMapOvr>
+    <a:masterClrMapping/>
+  </p:clrMapOvr>
+</p:notes>
+</file>
+
+<file path=ppt/notesSlides/notesSlide11.xml><?xml version="1.0" encoding="utf-8"?>
+<p:notes xmlns:a="http://schemas.openxmlformats.org/drawingml/2006/main" xmlns:r="http://schemas.openxmlformats.org/officeDocument/2006/relationships" xmlns:p="http://schemas.openxmlformats.org/presentationml/2006/main">
+  <p:cSld>
+    <p:spTree>
+      <p:nvGrpSpPr>
         <p:cNvPr id="1" name="">
           <a:extLst>
             <a:ext uri="{FF2B5EF4-FFF2-40B4-BE49-F238E27FC236}">
@@ -1458,7 +1543,7 @@
           <a:p>
             <a:fld id="{676223B9-C868-4436-87D9-1A3152E1157A}" type="slidenum">
               <a:rPr lang="es-ES" smtClean="0"/>
-              <a:t>14</a:t>
+              <a:t>15</a:t>
             </a:fld>
             <a:endParaRPr lang="es-ES"/>
           </a:p>
@@ -1477,7 +1562,7 @@
 </p:notes>
 </file>
 
-<file path=ppt/notesSlides/notesSlide11.xml><?xml version="1.0" encoding="utf-8"?>
+<file path=ppt/notesSlides/notesSlide12.xml><?xml version="1.0" encoding="utf-8"?>
 <p:notes xmlns:a="http://schemas.openxmlformats.org/drawingml/2006/main" xmlns:r="http://schemas.openxmlformats.org/officeDocument/2006/relationships" xmlns:p="http://schemas.openxmlformats.org/presentationml/2006/main">
   <p:cSld>
     <p:spTree>
@@ -1566,7 +1651,7 @@
           <a:p>
             <a:fld id="{676223B9-C868-4436-87D9-1A3152E1157A}" type="slidenum">
               <a:rPr lang="es-ES" smtClean="0"/>
-              <a:t>15</a:t>
+              <a:t>16</a:t>
             </a:fld>
             <a:endParaRPr lang="es-ES"/>
           </a:p>
@@ -1701,6 +1786,114 @@
         <p:cNvPr id="1" name="">
           <a:extLst>
             <a:ext uri="{FF2B5EF4-FFF2-40B4-BE49-F238E27FC236}">
+              <a16:creationId xmlns:a16="http://schemas.microsoft.com/office/drawing/2014/main" id="{95993BBE-3704-D894-1C10-5488EE611F08}"/>
+            </a:ext>
+          </a:extLst>
+        </p:cNvPr>
+        <p:cNvGrpSpPr/>
+        <p:nvPr/>
+      </p:nvGrpSpPr>
+      <p:grpSpPr>
+        <a:xfrm>
+          <a:off x="0" y="0"/>
+          <a:ext cx="0" cy="0"/>
+          <a:chOff x="0" y="0"/>
+          <a:chExt cx="0" cy="0"/>
+        </a:xfrm>
+      </p:grpSpPr>
+      <p:sp>
+        <p:nvSpPr>
+          <p:cNvPr id="2" name="Marcador de imagen de diapositiva 1">
+            <a:extLst>
+              <a:ext uri="{FF2B5EF4-FFF2-40B4-BE49-F238E27FC236}">
+                <a16:creationId xmlns:a16="http://schemas.microsoft.com/office/drawing/2014/main" id="{19BB04E2-F70F-42F7-9964-3D274C49FB9C}"/>
+              </a:ext>
+            </a:extLst>
+          </p:cNvPr>
+          <p:cNvSpPr>
+            <a:spLocks noGrp="1" noRot="1" noChangeAspect="1"/>
+          </p:cNvSpPr>
+          <p:nvPr>
+            <p:ph type="sldImg"/>
+          </p:nvPr>
+        </p:nvSpPr>
+        <p:spPr/>
+      </p:sp>
+      <p:sp>
+        <p:nvSpPr>
+          <p:cNvPr id="3" name="Marcador de notas 2">
+            <a:extLst>
+              <a:ext uri="{FF2B5EF4-FFF2-40B4-BE49-F238E27FC236}">
+                <a16:creationId xmlns:a16="http://schemas.microsoft.com/office/drawing/2014/main" id="{F6664AEC-7D1D-9DDC-3B94-3AE8450C7E5E}"/>
+              </a:ext>
+            </a:extLst>
+          </p:cNvPr>
+          <p:cNvSpPr>
+            <a:spLocks noGrp="1"/>
+          </p:cNvSpPr>
+          <p:nvPr>
+            <p:ph type="body" idx="1"/>
+          </p:nvPr>
+        </p:nvSpPr>
+        <p:spPr/>
+        <p:txBody>
+          <a:bodyPr/>
+          <a:lstStyle/>
+          <a:p>
+            <a:endParaRPr lang="es-ES" dirty="0"/>
+          </a:p>
+        </p:txBody>
+      </p:sp>
+      <p:sp>
+        <p:nvSpPr>
+          <p:cNvPr id="4" name="Marcador de número de diapositiva 3">
+            <a:extLst>
+              <a:ext uri="{FF2B5EF4-FFF2-40B4-BE49-F238E27FC236}">
+                <a16:creationId xmlns:a16="http://schemas.microsoft.com/office/drawing/2014/main" id="{E8F62EEB-2D30-2026-D252-4267AF688251}"/>
+              </a:ext>
+            </a:extLst>
+          </p:cNvPr>
+          <p:cNvSpPr>
+            <a:spLocks noGrp="1"/>
+          </p:cNvSpPr>
+          <p:nvPr>
+            <p:ph type="sldNum" sz="quarter" idx="5"/>
+          </p:nvPr>
+        </p:nvSpPr>
+        <p:spPr/>
+        <p:txBody>
+          <a:bodyPr/>
+          <a:lstStyle/>
+          <a:p>
+            <a:fld id="{676223B9-C868-4436-87D9-1A3152E1157A}" type="slidenum">
+              <a:rPr lang="es-ES" smtClean="0"/>
+              <a:t>6</a:t>
+            </a:fld>
+            <a:endParaRPr lang="es-ES"/>
+          </a:p>
+        </p:txBody>
+      </p:sp>
+    </p:spTree>
+    <p:extLst>
+      <p:ext uri="{BB962C8B-B14F-4D97-AF65-F5344CB8AC3E}">
+        <p14:creationId xmlns:p14="http://schemas.microsoft.com/office/powerpoint/2010/main" val="3589867912"/>
+      </p:ext>
+    </p:extLst>
+  </p:cSld>
+  <p:clrMapOvr>
+    <a:masterClrMapping/>
+  </p:clrMapOvr>
+</p:notes>
+</file>
+
+<file path=ppt/notesSlides/notesSlide4.xml><?xml version="1.0" encoding="utf-8"?>
+<p:notes xmlns:a="http://schemas.openxmlformats.org/drawingml/2006/main" xmlns:r="http://schemas.openxmlformats.org/officeDocument/2006/relationships" xmlns:p="http://schemas.openxmlformats.org/presentationml/2006/main">
+  <p:cSld>
+    <p:spTree>
+      <p:nvGrpSpPr>
+        <p:cNvPr id="1" name="">
+          <a:extLst>
+            <a:ext uri="{FF2B5EF4-FFF2-40B4-BE49-F238E27FC236}">
               <a16:creationId xmlns:a16="http://schemas.microsoft.com/office/drawing/2014/main" id="{4E3C5711-C157-AA5E-1EA1-9F4C3F40B90E}"/>
             </a:ext>
           </a:extLst>
@@ -1782,7 +1975,7 @@
           <a:p>
             <a:fld id="{676223B9-C868-4436-87D9-1A3152E1157A}" type="slidenum">
               <a:rPr lang="es-ES" smtClean="0"/>
-              <a:t>6</a:t>
+              <a:t>7</a:t>
             </a:fld>
             <a:endParaRPr lang="es-ES"/>
           </a:p>
@@ -1801,7 +1994,7 @@
 </p:notes>
 </file>
 
-<file path=ppt/notesSlides/notesSlide4.xml><?xml version="1.0" encoding="utf-8"?>
+<file path=ppt/notesSlides/notesSlide5.xml><?xml version="1.0" encoding="utf-8"?>
 <p:notes xmlns:a="http://schemas.openxmlformats.org/drawingml/2006/main" xmlns:r="http://schemas.openxmlformats.org/officeDocument/2006/relationships" xmlns:p="http://schemas.openxmlformats.org/presentationml/2006/main">
   <p:cSld>
     <p:spTree>
@@ -1890,7 +2083,7 @@
           <a:p>
             <a:fld id="{676223B9-C868-4436-87D9-1A3152E1157A}" type="slidenum">
               <a:rPr lang="es-ES" smtClean="0"/>
-              <a:t>8</a:t>
+              <a:t>9</a:t>
             </a:fld>
             <a:endParaRPr lang="es-ES"/>
           </a:p>
@@ -1909,7 +2102,7 @@
 </p:notes>
 </file>
 
-<file path=ppt/notesSlides/notesSlide5.xml><?xml version="1.0" encoding="utf-8"?>
+<file path=ppt/notesSlides/notesSlide6.xml><?xml version="1.0" encoding="utf-8"?>
 <p:notes xmlns:a="http://schemas.openxmlformats.org/drawingml/2006/main" xmlns:r="http://schemas.openxmlformats.org/officeDocument/2006/relationships" xmlns:p="http://schemas.openxmlformats.org/presentationml/2006/main">
   <p:cSld>
     <p:spTree>
@@ -1998,7 +2191,7 @@
           <a:p>
             <a:fld id="{676223B9-C868-4436-87D9-1A3152E1157A}" type="slidenum">
               <a:rPr lang="es-ES" smtClean="0"/>
-              <a:t>9</a:t>
+              <a:t>10</a:t>
             </a:fld>
             <a:endParaRPr lang="es-ES"/>
           </a:p>
@@ -2017,7 +2210,7 @@
 </p:notes>
 </file>
 
-<file path=ppt/notesSlides/notesSlide6.xml><?xml version="1.0" encoding="utf-8"?>
+<file path=ppt/notesSlides/notesSlide7.xml><?xml version="1.0" encoding="utf-8"?>
 <p:notes xmlns:a="http://schemas.openxmlformats.org/drawingml/2006/main" xmlns:r="http://schemas.openxmlformats.org/officeDocument/2006/relationships" xmlns:p="http://schemas.openxmlformats.org/presentationml/2006/main">
   <p:cSld>
     <p:spTree>
@@ -2106,7 +2299,7 @@
           <a:p>
             <a:fld id="{676223B9-C868-4436-87D9-1A3152E1157A}" type="slidenum">
               <a:rPr lang="es-ES" smtClean="0"/>
-              <a:t>10</a:t>
+              <a:t>11</a:t>
             </a:fld>
             <a:endParaRPr lang="es-ES"/>
           </a:p>
@@ -2125,7 +2318,7 @@
 </p:notes>
 </file>
 
-<file path=ppt/notesSlides/notesSlide7.xml><?xml version="1.0" encoding="utf-8"?>
+<file path=ppt/notesSlides/notesSlide8.xml><?xml version="1.0" encoding="utf-8"?>
 <p:notes xmlns:a="http://schemas.openxmlformats.org/drawingml/2006/main" xmlns:r="http://schemas.openxmlformats.org/officeDocument/2006/relationships" xmlns:p="http://schemas.openxmlformats.org/presentationml/2006/main">
   <p:cSld>
     <p:spTree>
@@ -2214,7 +2407,7 @@
           <a:p>
             <a:fld id="{676223B9-C868-4436-87D9-1A3152E1157A}" type="slidenum">
               <a:rPr lang="es-ES" smtClean="0"/>
-              <a:t>11</a:t>
+              <a:t>12</a:t>
             </a:fld>
             <a:endParaRPr lang="es-ES"/>
           </a:p>
@@ -2233,7 +2426,7 @@
 </p:notes>
 </file>
 
-<file path=ppt/notesSlides/notesSlide8.xml><?xml version="1.0" encoding="utf-8"?>
+<file path=ppt/notesSlides/notesSlide9.xml><?xml version="1.0" encoding="utf-8"?>
 <p:notes xmlns:a="http://schemas.openxmlformats.org/drawingml/2006/main" xmlns:r="http://schemas.openxmlformats.org/officeDocument/2006/relationships" xmlns:p="http://schemas.openxmlformats.org/presentationml/2006/main">
   <p:cSld>
     <p:spTree>
@@ -2322,7 +2515,7 @@
           <a:p>
             <a:fld id="{676223B9-C868-4436-87D9-1A3152E1157A}" type="slidenum">
               <a:rPr lang="es-ES" smtClean="0"/>
-              <a:t>12</a:t>
+              <a:t>13</a:t>
             </a:fld>
             <a:endParaRPr lang="es-ES"/>
           </a:p>
@@ -2332,90 +2525,6 @@
     <p:extLst>
       <p:ext uri="{BB962C8B-B14F-4D97-AF65-F5344CB8AC3E}">
         <p14:creationId xmlns:p14="http://schemas.microsoft.com/office/powerpoint/2010/main" val="1581859005"/>
-      </p:ext>
-    </p:extLst>
-  </p:cSld>
-  <p:clrMapOvr>
-    <a:masterClrMapping/>
-  </p:clrMapOvr>
-</p:notes>
-</file>
-
-<file path=ppt/notesSlides/notesSlide9.xml><?xml version="1.0" encoding="utf-8"?>
-<p:notes xmlns:a="http://schemas.openxmlformats.org/drawingml/2006/main" xmlns:r="http://schemas.openxmlformats.org/officeDocument/2006/relationships" xmlns:p="http://schemas.openxmlformats.org/presentationml/2006/main">
-  <p:cSld>
-    <p:spTree>
-      <p:nvGrpSpPr>
-        <p:cNvPr id="1" name=""/>
-        <p:cNvGrpSpPr/>
-        <p:nvPr/>
-      </p:nvGrpSpPr>
-      <p:grpSpPr>
-        <a:xfrm>
-          <a:off x="0" y="0"/>
-          <a:ext cx="0" cy="0"/>
-          <a:chOff x="0" y="0"/>
-          <a:chExt cx="0" cy="0"/>
-        </a:xfrm>
-      </p:grpSpPr>
-      <p:sp>
-        <p:nvSpPr>
-          <p:cNvPr id="2" name="Marcador de imagen de diapositiva 1"/>
-          <p:cNvSpPr>
-            <a:spLocks noGrp="1" noRot="1" noChangeAspect="1"/>
-          </p:cNvSpPr>
-          <p:nvPr>
-            <p:ph type="sldImg"/>
-          </p:nvPr>
-        </p:nvSpPr>
-        <p:spPr/>
-      </p:sp>
-      <p:sp>
-        <p:nvSpPr>
-          <p:cNvPr id="3" name="Marcador de notas 2"/>
-          <p:cNvSpPr>
-            <a:spLocks noGrp="1"/>
-          </p:cNvSpPr>
-          <p:nvPr>
-            <p:ph type="body" idx="1"/>
-          </p:nvPr>
-        </p:nvSpPr>
-        <p:spPr/>
-        <p:txBody>
-          <a:bodyPr/>
-          <a:lstStyle/>
-          <a:p>
-            <a:endParaRPr lang="es-ES" dirty="0"/>
-          </a:p>
-        </p:txBody>
-      </p:sp>
-      <p:sp>
-        <p:nvSpPr>
-          <p:cNvPr id="4" name="Marcador de número de diapositiva 3"/>
-          <p:cNvSpPr>
-            <a:spLocks noGrp="1"/>
-          </p:cNvSpPr>
-          <p:nvPr>
-            <p:ph type="sldNum" sz="quarter" idx="5"/>
-          </p:nvPr>
-        </p:nvSpPr>
-        <p:spPr/>
-        <p:txBody>
-          <a:bodyPr/>
-          <a:lstStyle/>
-          <a:p>
-            <a:fld id="{676223B9-C868-4436-87D9-1A3152E1157A}" type="slidenum">
-              <a:rPr lang="es-ES" smtClean="0"/>
-              <a:t>13</a:t>
-            </a:fld>
-            <a:endParaRPr lang="es-ES"/>
-          </a:p>
-        </p:txBody>
-      </p:sp>
-    </p:spTree>
-    <p:extLst>
-      <p:ext uri="{BB962C8B-B14F-4D97-AF65-F5344CB8AC3E}">
-        <p14:creationId xmlns:p14="http://schemas.microsoft.com/office/powerpoint/2010/main" val="942232946"/>
       </p:ext>
     </p:extLst>
   </p:cSld>
@@ -3942,7 +4051,7 @@
                 <a:latin typeface="Arial"/>
                 <a:cs typeface="Arial"/>
               </a:rPr>
-              <a:t>: </a:t>
+              <a:t>: David Alcarria Pedro </a:t>
             </a:r>
             <a:endParaRPr sz="1800" dirty="0">
               <a:latin typeface="Arial"/>
@@ -4025,7 +4134,7 @@
         <p:cNvPr id="1" name="">
           <a:extLst>
             <a:ext uri="{FF2B5EF4-FFF2-40B4-BE49-F238E27FC236}">
-              <a16:creationId xmlns:a16="http://schemas.microsoft.com/office/drawing/2014/main" id="{F32A9819-E058-DC4F-FB99-88F20442D9F4}"/>
+              <a16:creationId xmlns:a16="http://schemas.microsoft.com/office/drawing/2014/main" id="{D1F11DBE-A482-7036-60B2-70B7E2318F46}"/>
             </a:ext>
           </a:extLst>
         </p:cNvPr>
@@ -4045,7 +4154,7 @@
           <p:cNvPr id="16" name="object 16">
             <a:extLst>
               <a:ext uri="{FF2B5EF4-FFF2-40B4-BE49-F238E27FC236}">
-                <a16:creationId xmlns:a16="http://schemas.microsoft.com/office/drawing/2014/main" id="{E1662E38-DE72-ADF3-A38E-08ED40DCC2AD}"/>
+                <a16:creationId xmlns:a16="http://schemas.microsoft.com/office/drawing/2014/main" id="{C096193E-AB86-E3CD-BDAC-0F9156C1A3F0}"/>
               </a:ext>
             </a:extLst>
           </p:cNvPr>
@@ -4081,7 +4190,7 @@
             </a:pPr>
             <a:r>
               <a:rPr lang="en-US" sz="2500" dirty="0"/>
-              <a:t>Learning outcome #4.3 – 2x2 Multimode Interference Coupler – Optimization (II)</a:t>
+              <a:t>Learning outcome #4.2 – 2x2 Multimode Interference Coupler - Optimization</a:t>
             </a:r>
             <a:br>
               <a:rPr lang="en-US" sz="2500" dirty="0"/>
@@ -4110,7 +4219,7 @@
           <p:cNvPr id="83" name="Gráfico 82">
             <a:extLst>
               <a:ext uri="{FF2B5EF4-FFF2-40B4-BE49-F238E27FC236}">
-                <a16:creationId xmlns:a16="http://schemas.microsoft.com/office/drawing/2014/main" id="{1CD4B005-DA76-DF7C-8A51-CA16DFD2CA3A}"/>
+                <a16:creationId xmlns:a16="http://schemas.microsoft.com/office/drawing/2014/main" id="{2D17DCD6-D851-E62D-D95C-A9F9954602DE}"/>
               </a:ext>
             </a:extLst>
           </p:cNvPr>
@@ -4146,7 +4255,7 @@
           <p:cNvPr id="84" name="Marcador de número de diapositiva 83">
             <a:extLst>
               <a:ext uri="{FF2B5EF4-FFF2-40B4-BE49-F238E27FC236}">
-                <a16:creationId xmlns:a16="http://schemas.microsoft.com/office/drawing/2014/main" id="{0B06F952-20FD-3223-6AB8-83339507AFE8}"/>
+                <a16:creationId xmlns:a16="http://schemas.microsoft.com/office/drawing/2014/main" id="{4891046F-11DC-B7FC-54F7-9583E688DC0E}"/>
               </a:ext>
             </a:extLst>
           </p:cNvPr>
@@ -4175,7 +4284,7 @@
           <p:cNvPr id="3" name="Marcador de pie de página 2">
             <a:extLst>
               <a:ext uri="{FF2B5EF4-FFF2-40B4-BE49-F238E27FC236}">
-                <a16:creationId xmlns:a16="http://schemas.microsoft.com/office/drawing/2014/main" id="{8B06152F-2A2C-A19B-581F-494FDFF33752}"/>
+                <a16:creationId xmlns:a16="http://schemas.microsoft.com/office/drawing/2014/main" id="{4C9BAA39-017F-D602-6705-A6CF44830139}"/>
               </a:ext>
             </a:extLst>
           </p:cNvPr>
@@ -4209,7 +4318,7 @@
           <p:cNvPr id="2" name="CuadroTexto 1">
             <a:extLst>
               <a:ext uri="{FF2B5EF4-FFF2-40B4-BE49-F238E27FC236}">
-                <a16:creationId xmlns:a16="http://schemas.microsoft.com/office/drawing/2014/main" id="{EF5B7948-A25A-9043-7061-DD15A9023924}"/>
+                <a16:creationId xmlns:a16="http://schemas.microsoft.com/office/drawing/2014/main" id="{43D7D9E5-DAC3-2BB8-7377-826863CBAD4E}"/>
               </a:ext>
             </a:extLst>
           </p:cNvPr>
@@ -4252,10 +4361,111 @@
           </a:p>
           <a:p>
             <a:pPr algn="just"/>
-            <a:endParaRPr lang="en-US" sz="1200" dirty="0">
-              <a:latin typeface="Arial" panose="020B0604020202020204" pitchFamily="34" charset="0"/>
-              <a:cs typeface="Arial" panose="020B0604020202020204" pitchFamily="34" charset="0"/>
-            </a:endParaRPr>
+            <a:r>
+              <a:rPr lang="en-US" sz="1200" dirty="0">
+                <a:latin typeface="Arial" panose="020B0604020202020204" pitchFamily="34" charset="0"/>
+                <a:cs typeface="Arial" panose="020B0604020202020204" pitchFamily="34" charset="0"/>
+              </a:rPr>
+              <a:t>Con </a:t>
+            </a:r>
+            <a:r>
+              <a:rPr lang="en-US" sz="1200" dirty="0" err="1">
+                <a:latin typeface="Arial" panose="020B0604020202020204" pitchFamily="34" charset="0"/>
+                <a:cs typeface="Arial" panose="020B0604020202020204" pitchFamily="34" charset="0"/>
+              </a:rPr>
+              <a:t>valores</a:t>
+            </a:r>
+            <a:r>
+              <a:rPr lang="en-US" sz="1200" dirty="0">
+                <a:latin typeface="Arial" panose="020B0604020202020204" pitchFamily="34" charset="0"/>
+                <a:cs typeface="Arial" panose="020B0604020202020204" pitchFamily="34" charset="0"/>
+              </a:rPr>
+              <a:t> de </a:t>
+            </a:r>
+            <a:r>
+              <a:rPr lang="en-US" sz="1200" dirty="0" err="1">
+                <a:latin typeface="Arial" panose="020B0604020202020204" pitchFamily="34" charset="0"/>
+                <a:cs typeface="Arial" panose="020B0604020202020204" pitchFamily="34" charset="0"/>
+              </a:rPr>
+              <a:t>dy</a:t>
+            </a:r>
+            <a:r>
+              <a:rPr lang="en-US" sz="1200" dirty="0">
+                <a:latin typeface="Arial" panose="020B0604020202020204" pitchFamily="34" charset="0"/>
+                <a:cs typeface="Arial" panose="020B0604020202020204" pitchFamily="34" charset="0"/>
+              </a:rPr>
+              <a:t> = 0.1 y de </a:t>
+            </a:r>
+            <a:r>
+              <a:rPr lang="en-US" sz="1200" dirty="0" err="1">
+                <a:latin typeface="Arial" panose="020B0604020202020204" pitchFamily="34" charset="0"/>
+                <a:cs typeface="Arial" panose="020B0604020202020204" pitchFamily="34" charset="0"/>
+              </a:rPr>
+              <a:t>dL_MMI</a:t>
+            </a:r>
+            <a:r>
+              <a:rPr lang="en-US" sz="1200" dirty="0">
+                <a:latin typeface="Arial" panose="020B0604020202020204" pitchFamily="34" charset="0"/>
+                <a:cs typeface="Arial" panose="020B0604020202020204" pitchFamily="34" charset="0"/>
+              </a:rPr>
+              <a:t> = -0.5 </a:t>
+            </a:r>
+            <a:r>
+              <a:rPr lang="en-US" sz="1200" dirty="0" err="1">
+                <a:latin typeface="Arial" panose="020B0604020202020204" pitchFamily="34" charset="0"/>
+                <a:cs typeface="Arial" panose="020B0604020202020204" pitchFamily="34" charset="0"/>
+              </a:rPr>
+              <a:t>obtenemos</a:t>
+            </a:r>
+            <a:r>
+              <a:rPr lang="en-US" sz="1200" dirty="0">
+                <a:latin typeface="Arial" panose="020B0604020202020204" pitchFamily="34" charset="0"/>
+                <a:cs typeface="Arial" panose="020B0604020202020204" pitchFamily="34" charset="0"/>
+              </a:rPr>
+              <a:t> </a:t>
+            </a:r>
+            <a:r>
+              <a:rPr lang="en-US" sz="1200" dirty="0" err="1">
+                <a:latin typeface="Arial" panose="020B0604020202020204" pitchFamily="34" charset="0"/>
+                <a:cs typeface="Arial" panose="020B0604020202020204" pitchFamily="34" charset="0"/>
+              </a:rPr>
+              <a:t>unas</a:t>
+            </a:r>
+            <a:r>
+              <a:rPr lang="en-US" sz="1200" dirty="0">
+                <a:latin typeface="Arial" panose="020B0604020202020204" pitchFamily="34" charset="0"/>
+                <a:cs typeface="Arial" panose="020B0604020202020204" pitchFamily="34" charset="0"/>
+              </a:rPr>
+              <a:t> </a:t>
+            </a:r>
+            <a:r>
+              <a:rPr lang="en-US" sz="1200" dirty="0" err="1">
+                <a:latin typeface="Arial" panose="020B0604020202020204" pitchFamily="34" charset="0"/>
+                <a:cs typeface="Arial" panose="020B0604020202020204" pitchFamily="34" charset="0"/>
+              </a:rPr>
+              <a:t>pérdidas</a:t>
+            </a:r>
+            <a:r>
+              <a:rPr lang="en-US" sz="1200" dirty="0">
+                <a:latin typeface="Arial" panose="020B0604020202020204" pitchFamily="34" charset="0"/>
+                <a:cs typeface="Arial" panose="020B0604020202020204" pitchFamily="34" charset="0"/>
+              </a:rPr>
+              <a:t> </a:t>
+            </a:r>
+            <a:r>
+              <a:rPr lang="en-US" sz="1200" dirty="0" err="1">
+                <a:latin typeface="Arial" panose="020B0604020202020204" pitchFamily="34" charset="0"/>
+                <a:cs typeface="Arial" panose="020B0604020202020204" pitchFamily="34" charset="0"/>
+              </a:rPr>
+              <a:t>optimizadas</a:t>
+            </a:r>
+            <a:r>
+              <a:rPr lang="en-US" sz="1200" dirty="0">
+                <a:latin typeface="Arial" panose="020B0604020202020204" pitchFamily="34" charset="0"/>
+                <a:cs typeface="Arial" panose="020B0604020202020204" pitchFamily="34" charset="0"/>
+              </a:rPr>
+              <a:t> de 0.330 dB y un ratio de 0.5055</a:t>
+            </a:r>
           </a:p>
           <a:p>
             <a:pPr algn="just"/>
@@ -4299,7 +4509,7 @@
           <p:cNvPr id="7" name="Rectángulo 6">
             <a:extLst>
               <a:ext uri="{FF2B5EF4-FFF2-40B4-BE49-F238E27FC236}">
-                <a16:creationId xmlns:a16="http://schemas.microsoft.com/office/drawing/2014/main" id="{C8036B97-F577-1F3C-3CE2-BD45F7D1FFC2}"/>
+                <a16:creationId xmlns:a16="http://schemas.microsoft.com/office/drawing/2014/main" id="{9772491E-4FFB-FFC3-C855-72A4B15F3E73}"/>
               </a:ext>
             </a:extLst>
           </p:cNvPr>
@@ -4351,7 +4561,7 @@
           <p:cNvPr id="8" name="CuadroTexto 7">
             <a:extLst>
               <a:ext uri="{FF2B5EF4-FFF2-40B4-BE49-F238E27FC236}">
-                <a16:creationId xmlns:a16="http://schemas.microsoft.com/office/drawing/2014/main" id="{B0CFB20A-64F3-A296-71E8-F4FA17D35314}"/>
+                <a16:creationId xmlns:a16="http://schemas.microsoft.com/office/drawing/2014/main" id="{643565A9-7DB6-D6EE-152F-2852C8BA7986}"/>
               </a:ext>
             </a:extLst>
           </p:cNvPr>
@@ -4411,33 +4621,39 @@
             </a:r>
             <a:r>
               <a:rPr lang="en-US" sz="1600" dirty="0"/>
-              <a:t>: make ratio over outputs 0.5 + excess loss &lt; 0.1 dB</a:t>
+              <a:t>: make equal ratio over outputs (even if not 0.5) and minimize excess loss (even if not 0.0 dB)</a:t>
             </a:r>
           </a:p>
           <a:p>
             <a:pPr algn="r"/>
             <a:r>
               <a:rPr lang="en-US" sz="1600" dirty="0"/>
-              <a:t>With same settings of previous LO, now modify the notebook so I/O waveguides have a different width. </a:t>
+              <a:t>With same settings of previous LO, now adjust try to manually optimize the MMI by changing iteratively:</a:t>
             </a:r>
           </a:p>
           <a:p>
             <a:pPr algn="r"/>
             <a:r>
-              <a:rPr lang="en-US" sz="1600" u="sng" dirty="0"/>
-              <a:t>- The nominal I/O waveguide width you have been using is 1.0 µm, increase it.</a:t>
-            </a:r>
+              <a:rPr lang="en-US" sz="1600" dirty="0"/>
+              <a:t>- Change </a:t>
+            </a:r>
+            <a:r>
+              <a:rPr lang="en-US" sz="1600" dirty="0" err="1"/>
+              <a:t>dL_MMI</a:t>
+            </a:r>
+            <a:endParaRPr lang="en-US" sz="1600" dirty="0"/>
           </a:p>
           <a:p>
             <a:pPr algn="r"/>
             <a:r>
-              <a:rPr lang="en-US" sz="1600" b="1" dirty="0"/>
-              <a:t>(Warning</a:t>
-            </a:r>
-            <a:r>
               <a:rPr lang="en-US" sz="1600" dirty="0"/>
-              <a:t>! Every time you change the I/O waveguide width you have to re-run modes calculation)</a:t>
-            </a:r>
+              <a:t>- Change I/O waveguide position +/- </a:t>
+            </a:r>
+            <a:r>
+              <a:rPr lang="en-US" sz="1600" dirty="0" err="1"/>
+              <a:t>dy</a:t>
+            </a:r>
+            <a:endParaRPr lang="en-US" sz="1600" dirty="0"/>
           </a:p>
           <a:p>
             <a:pPr algn="r"/>
@@ -4452,10 +4668,40 @@
           </a:p>
         </p:txBody>
       </p:sp>
+      <p:pic>
+        <p:nvPicPr>
+          <p:cNvPr id="5" name="Imagen 4">
+            <a:extLst>
+              <a:ext uri="{FF2B5EF4-FFF2-40B4-BE49-F238E27FC236}">
+                <a16:creationId xmlns:a16="http://schemas.microsoft.com/office/drawing/2014/main" id="{C23D9742-E714-4668-8DDB-BFA03AD4E1E6}"/>
+              </a:ext>
+            </a:extLst>
+          </p:cNvPr>
+          <p:cNvPicPr>
+            <a:picLocks noChangeAspect="1"/>
+          </p:cNvPicPr>
+          <p:nvPr/>
+        </p:nvPicPr>
+        <p:blipFill>
+          <a:blip r:embed="rId5"/>
+          <a:stretch>
+            <a:fillRect/>
+          </a:stretch>
+        </p:blipFill>
+        <p:spPr>
+          <a:xfrm>
+            <a:off x="609441" y="1321220"/>
+            <a:ext cx="3925487" cy="3306028"/>
+          </a:xfrm>
+          <a:prstGeom prst="rect">
+            <a:avLst/>
+          </a:prstGeom>
+        </p:spPr>
+      </p:pic>
     </p:spTree>
     <p:extLst>
       <p:ext uri="{BB962C8B-B14F-4D97-AF65-F5344CB8AC3E}">
-        <p14:creationId xmlns:p14="http://schemas.microsoft.com/office/powerpoint/2010/main" val="1023731220"/>
+        <p14:creationId xmlns:p14="http://schemas.microsoft.com/office/powerpoint/2010/main" val="2685215753"/>
       </p:ext>
     </p:extLst>
   </p:cSld>
@@ -4473,7 +4719,7 @@
         <p:cNvPr id="1" name="">
           <a:extLst>
             <a:ext uri="{FF2B5EF4-FFF2-40B4-BE49-F238E27FC236}">
-              <a16:creationId xmlns:a16="http://schemas.microsoft.com/office/drawing/2014/main" id="{200A1363-C83E-82B6-7BDE-AD2801F8B66D}"/>
+              <a16:creationId xmlns:a16="http://schemas.microsoft.com/office/drawing/2014/main" id="{F32A9819-E058-DC4F-FB99-88F20442D9F4}"/>
             </a:ext>
           </a:extLst>
         </p:cNvPr>
@@ -4493,7 +4739,7 @@
           <p:cNvPr id="16" name="object 16">
             <a:extLst>
               <a:ext uri="{FF2B5EF4-FFF2-40B4-BE49-F238E27FC236}">
-                <a16:creationId xmlns:a16="http://schemas.microsoft.com/office/drawing/2014/main" id="{1E256546-3103-104D-A87F-78AEBE5D595E}"/>
+                <a16:creationId xmlns:a16="http://schemas.microsoft.com/office/drawing/2014/main" id="{E1662E38-DE72-ADF3-A38E-08ED40DCC2AD}"/>
               </a:ext>
             </a:extLst>
           </p:cNvPr>
@@ -4529,15 +4775,7 @@
             </a:pPr>
             <a:r>
               <a:rPr lang="en-US" sz="2500" dirty="0"/>
-              <a:t>Learning </a:t>
-            </a:r>
-            <a:r>
-              <a:rPr lang="en-US" sz="2500"/>
-              <a:t>outcome #5 </a:t>
-            </a:r>
-            <a:r>
-              <a:rPr lang="en-US" sz="2500" dirty="0"/>
-              <a:t>– 1x4 Multimode Interference Coupler </a:t>
+              <a:t>Learning outcome #4.3 – 2x2 Multimode Interference Coupler – Optimization (II)</a:t>
             </a:r>
             <a:br>
               <a:rPr lang="en-US" sz="2500" dirty="0"/>
@@ -4552,7 +4790,7 @@
             </a:r>
             <a:r>
               <a:rPr lang="en-US" b="0" dirty="0"/>
-              <a:t> = ? µm</a:t>
+              <a:t> = 6.6 µm</a:t>
             </a:r>
             <a:endParaRPr lang="en-US" sz="2500" b="0" dirty="0">
               <a:latin typeface="+mj-lt"/>
@@ -4566,7 +4804,7 @@
           <p:cNvPr id="83" name="Gráfico 82">
             <a:extLst>
               <a:ext uri="{FF2B5EF4-FFF2-40B4-BE49-F238E27FC236}">
-                <a16:creationId xmlns:a16="http://schemas.microsoft.com/office/drawing/2014/main" id="{4BFCA3D8-29F6-7091-7099-77888A9F863B}"/>
+                <a16:creationId xmlns:a16="http://schemas.microsoft.com/office/drawing/2014/main" id="{1CD4B005-DA76-DF7C-8A51-CA16DFD2CA3A}"/>
               </a:ext>
             </a:extLst>
           </p:cNvPr>
@@ -4602,7 +4840,7 @@
           <p:cNvPr id="84" name="Marcador de número de diapositiva 83">
             <a:extLst>
               <a:ext uri="{FF2B5EF4-FFF2-40B4-BE49-F238E27FC236}">
-                <a16:creationId xmlns:a16="http://schemas.microsoft.com/office/drawing/2014/main" id="{42E75535-0FBC-4C5F-9AC5-7008914FCF56}"/>
+                <a16:creationId xmlns:a16="http://schemas.microsoft.com/office/drawing/2014/main" id="{0B06F952-20FD-3223-6AB8-83339507AFE8}"/>
               </a:ext>
             </a:extLst>
           </p:cNvPr>
@@ -4631,7 +4869,7 @@
           <p:cNvPr id="3" name="Marcador de pie de página 2">
             <a:extLst>
               <a:ext uri="{FF2B5EF4-FFF2-40B4-BE49-F238E27FC236}">
-                <a16:creationId xmlns:a16="http://schemas.microsoft.com/office/drawing/2014/main" id="{07AC2AFF-A7D9-EBCD-7C5A-6CDF61B69366}"/>
+                <a16:creationId xmlns:a16="http://schemas.microsoft.com/office/drawing/2014/main" id="{8B06152F-2A2C-A19B-581F-494FDFF33752}"/>
               </a:ext>
             </a:extLst>
           </p:cNvPr>
@@ -4665,7 +4903,7 @@
           <p:cNvPr id="2" name="CuadroTexto 1">
             <a:extLst>
               <a:ext uri="{FF2B5EF4-FFF2-40B4-BE49-F238E27FC236}">
-                <a16:creationId xmlns:a16="http://schemas.microsoft.com/office/drawing/2014/main" id="{42D73A2E-0E5A-8A39-6B70-F9E94D6DBB70}"/>
+                <a16:creationId xmlns:a16="http://schemas.microsoft.com/office/drawing/2014/main" id="{EF5B7948-A25A-9043-7061-DD15A9023924}"/>
               </a:ext>
             </a:extLst>
           </p:cNvPr>
@@ -4675,7 +4913,7 @@
         <p:spPr>
           <a:xfrm>
             <a:off x="609441" y="4819471"/>
-            <a:ext cx="11199971" cy="1200329"/>
+            <a:ext cx="11199971" cy="1384995"/>
           </a:xfrm>
           <a:prstGeom prst="rect">
             <a:avLst/>
@@ -4703,21 +4941,17 @@
                 <a:latin typeface="Arial" panose="020B0604020202020204" pitchFamily="34" charset="0"/>
                 <a:cs typeface="Arial" panose="020B0604020202020204" pitchFamily="34" charset="0"/>
               </a:rPr>
-              <a:t>Repeat all the design </a:t>
-            </a:r>
-            <a:r>
-              <a:rPr lang="en-US" sz="1200">
-                <a:latin typeface="Arial" panose="020B0604020202020204" pitchFamily="34" charset="0"/>
-                <a:cs typeface="Arial" panose="020B0604020202020204" pitchFamily="34" charset="0"/>
-              </a:rPr>
-              <a:t>process for a </a:t>
-            </a:r>
+              <a:t>Comment results</a:t>
+            </a:r>
+          </a:p>
+          <a:p>
+            <a:pPr algn="just"/>
             <a:r>
               <a:rPr lang="en-US" sz="1200" dirty="0">
                 <a:latin typeface="Arial" panose="020B0604020202020204" pitchFamily="34" charset="0"/>
                 <a:cs typeface="Arial" panose="020B0604020202020204" pitchFamily="34" charset="0"/>
               </a:rPr>
-              <a:t>1x4 MMI Coupler.  </a:t>
+              <a:t>Width de 1.3 um</a:t>
             </a:r>
           </a:p>
           <a:p>
@@ -4762,7 +4996,7 @@
           <p:cNvPr id="7" name="Rectángulo 6">
             <a:extLst>
               <a:ext uri="{FF2B5EF4-FFF2-40B4-BE49-F238E27FC236}">
-                <a16:creationId xmlns:a16="http://schemas.microsoft.com/office/drawing/2014/main" id="{AFB86587-21D4-5A33-7D00-DDF170C919BA}"/>
+                <a16:creationId xmlns:a16="http://schemas.microsoft.com/office/drawing/2014/main" id="{C8036B97-F577-1F3C-3CE2-BD45F7D1FFC2}"/>
               </a:ext>
             </a:extLst>
           </p:cNvPr>
@@ -4814,6 +5048,499 @@
           <p:cNvPr id="8" name="CuadroTexto 7">
             <a:extLst>
               <a:ext uri="{FF2B5EF4-FFF2-40B4-BE49-F238E27FC236}">
+                <a16:creationId xmlns:a16="http://schemas.microsoft.com/office/drawing/2014/main" id="{B0CFB20A-64F3-A296-71E8-F4FA17D35314}"/>
+              </a:ext>
+            </a:extLst>
+          </p:cNvPr>
+          <p:cNvSpPr txBox="1"/>
+          <p:nvPr/>
+        </p:nvSpPr>
+        <p:spPr>
+          <a:xfrm>
+            <a:off x="640245" y="1942909"/>
+            <a:ext cx="11199972" cy="2708434"/>
+          </a:xfrm>
+          <a:prstGeom prst="rect">
+            <a:avLst/>
+          </a:prstGeom>
+          <a:noFill/>
+        </p:spPr>
+        <p:txBody>
+          <a:bodyPr wrap="square" rtlCol="0">
+            <a:spAutoFit/>
+          </a:bodyPr>
+          <a:lstStyle/>
+          <a:p>
+            <a:pPr algn="ctr"/>
+            <a:r>
+              <a:rPr lang="en-US" b="1" dirty="0"/>
+              <a:t>deep</a:t>
+            </a:r>
+            <a:r>
+              <a:rPr lang="en-US" dirty="0"/>
+              <a:t> waveguide</a:t>
+            </a:r>
+          </a:p>
+          <a:p>
+            <a:pPr algn="ctr"/>
+            <a:endParaRPr lang="en-US" dirty="0"/>
+          </a:p>
+          <a:p>
+            <a:pPr algn="ctr"/>
+            <a:r>
+              <a:rPr lang="en-US" dirty="0"/>
+              <a:t>Paste propagation plot and console results</a:t>
+            </a:r>
+          </a:p>
+          <a:p>
+            <a:pPr algn="ctr"/>
+            <a:endParaRPr lang="en-US" dirty="0"/>
+          </a:p>
+          <a:p>
+            <a:pPr algn="ctr"/>
+            <a:endParaRPr lang="en-US" dirty="0"/>
+          </a:p>
+          <a:p>
+            <a:pPr algn="r"/>
+            <a:r>
+              <a:rPr lang="en-US" sz="1600" b="1" dirty="0"/>
+              <a:t>Target</a:t>
+            </a:r>
+            <a:r>
+              <a:rPr lang="en-US" sz="1600" dirty="0"/>
+              <a:t>: make ratio over outputs 0.5 + excess loss &lt; 0.1 dB</a:t>
+            </a:r>
+          </a:p>
+          <a:p>
+            <a:pPr algn="r"/>
+            <a:r>
+              <a:rPr lang="en-US" sz="1600" dirty="0"/>
+              <a:t>With same settings of previous LO, now modify the notebook so I/O waveguides have a different width. </a:t>
+            </a:r>
+          </a:p>
+          <a:p>
+            <a:pPr algn="r"/>
+            <a:r>
+              <a:rPr lang="en-US" sz="1600" u="sng" dirty="0"/>
+              <a:t>- The nominal I/O waveguide width you have been using is 1.0 µm, increase it.</a:t>
+            </a:r>
+          </a:p>
+          <a:p>
+            <a:pPr algn="r"/>
+            <a:r>
+              <a:rPr lang="en-US" sz="1600" b="1" dirty="0"/>
+              <a:t>(Warning</a:t>
+            </a:r>
+            <a:r>
+              <a:rPr lang="en-US" sz="1600" dirty="0"/>
+              <a:t>! Every time you change the I/O waveguide width you have to re-run modes calculation)</a:t>
+            </a:r>
+          </a:p>
+          <a:p>
+            <a:pPr algn="r"/>
+            <a:r>
+              <a:rPr lang="en-US" sz="1600" b="1" dirty="0"/>
+              <a:t>Hints</a:t>
+            </a:r>
+            <a:r>
+              <a:rPr lang="en-US" sz="1600" dirty="0"/>
+              <a:t>: observe the 2D EME propagation results to guide you to the best settings of a) and b).</a:t>
+            </a:r>
+          </a:p>
+        </p:txBody>
+      </p:sp>
+      <p:pic>
+        <p:nvPicPr>
+          <p:cNvPr id="9" name="Imagen 8">
+            <a:extLst>
+              <a:ext uri="{FF2B5EF4-FFF2-40B4-BE49-F238E27FC236}">
+                <a16:creationId xmlns:a16="http://schemas.microsoft.com/office/drawing/2014/main" id="{4E0D97B1-49CF-4987-982D-BF9E9B02DD8F}"/>
+              </a:ext>
+            </a:extLst>
+          </p:cNvPr>
+          <p:cNvPicPr>
+            <a:picLocks noChangeAspect="1"/>
+          </p:cNvPicPr>
+          <p:nvPr/>
+        </p:nvPicPr>
+        <p:blipFill>
+          <a:blip r:embed="rId5"/>
+          <a:stretch>
+            <a:fillRect/>
+          </a:stretch>
+        </p:blipFill>
+        <p:spPr>
+          <a:xfrm>
+            <a:off x="685800" y="1541411"/>
+            <a:ext cx="3551900" cy="2978225"/>
+          </a:xfrm>
+          <a:prstGeom prst="rect">
+            <a:avLst/>
+          </a:prstGeom>
+        </p:spPr>
+      </p:pic>
+    </p:spTree>
+    <p:extLst>
+      <p:ext uri="{BB962C8B-B14F-4D97-AF65-F5344CB8AC3E}">
+        <p14:creationId xmlns:p14="http://schemas.microsoft.com/office/powerpoint/2010/main" val="1023731220"/>
+      </p:ext>
+    </p:extLst>
+  </p:cSld>
+  <p:clrMapOvr>
+    <a:masterClrMapping/>
+  </p:clrMapOvr>
+</p:sld>
+</file>
+
+<file path=ppt/slides/slide12.xml><?xml version="1.0" encoding="utf-8"?>
+<p:sld xmlns:a="http://schemas.openxmlformats.org/drawingml/2006/main" xmlns:r="http://schemas.openxmlformats.org/officeDocument/2006/relationships" xmlns:p="http://schemas.openxmlformats.org/presentationml/2006/main">
+  <p:cSld>
+    <p:spTree>
+      <p:nvGrpSpPr>
+        <p:cNvPr id="1" name="">
+          <a:extLst>
+            <a:ext uri="{FF2B5EF4-FFF2-40B4-BE49-F238E27FC236}">
+              <a16:creationId xmlns:a16="http://schemas.microsoft.com/office/drawing/2014/main" id="{200A1363-C83E-82B6-7BDE-AD2801F8B66D}"/>
+            </a:ext>
+          </a:extLst>
+        </p:cNvPr>
+        <p:cNvGrpSpPr/>
+        <p:nvPr/>
+      </p:nvGrpSpPr>
+      <p:grpSpPr>
+        <a:xfrm>
+          <a:off x="0" y="0"/>
+          <a:ext cx="0" cy="0"/>
+          <a:chOff x="0" y="0"/>
+          <a:chExt cx="0" cy="0"/>
+        </a:xfrm>
+      </p:grpSpPr>
+      <p:sp>
+        <p:nvSpPr>
+          <p:cNvPr id="16" name="object 16">
+            <a:extLst>
+              <a:ext uri="{FF2B5EF4-FFF2-40B4-BE49-F238E27FC236}">
+                <a16:creationId xmlns:a16="http://schemas.microsoft.com/office/drawing/2014/main" id="{1E256546-3103-104D-A87F-78AEBE5D595E}"/>
+              </a:ext>
+            </a:extLst>
+          </p:cNvPr>
+          <p:cNvSpPr txBox="1">
+            <a:spLocks noGrp="1"/>
+          </p:cNvSpPr>
+          <p:nvPr>
+            <p:ph type="title"/>
+          </p:nvPr>
+        </p:nvSpPr>
+        <p:spPr>
+          <a:xfrm>
+            <a:off x="685800" y="408883"/>
+            <a:ext cx="10994410" cy="705321"/>
+          </a:xfrm>
+          <a:prstGeom prst="rect">
+            <a:avLst/>
+          </a:prstGeom>
+        </p:spPr>
+        <p:txBody>
+          <a:bodyPr vert="horz" wrap="square" lIns="0" tIns="12700" rIns="0" bIns="0" rtlCol="0">
+            <a:spAutoFit/>
+          </a:bodyPr>
+          <a:lstStyle/>
+          <a:p>
+            <a:pPr marL="12700">
+              <a:lnSpc>
+                <a:spcPct val="100000"/>
+              </a:lnSpc>
+              <a:spcBef>
+                <a:spcPts val="100"/>
+              </a:spcBef>
+            </a:pPr>
+            <a:r>
+              <a:rPr lang="en-US" sz="2500" dirty="0"/>
+              <a:t>Learning </a:t>
+            </a:r>
+            <a:r>
+              <a:rPr lang="en-US" sz="2500"/>
+              <a:t>outcome #5 </a:t>
+            </a:r>
+            <a:r>
+              <a:rPr lang="en-US" sz="2500" dirty="0"/>
+              <a:t>– 1x4 Multimode Interference Coupler </a:t>
+            </a:r>
+            <a:br>
+              <a:rPr lang="en-US" sz="2500" dirty="0"/>
+            </a:br>
+            <a:r>
+              <a:rPr lang="en-US" b="0" dirty="0"/>
+              <a:t>Wavelength 1.55 µm, </a:t>
+            </a:r>
+            <a:r>
+              <a:rPr lang="en-US" b="0" dirty="0" err="1"/>
+              <a:t>wMMI</a:t>
+            </a:r>
+            <a:r>
+              <a:rPr lang="en-US" b="0" dirty="0"/>
+              <a:t> = ? µm</a:t>
+            </a:r>
+            <a:endParaRPr lang="en-US" sz="2500" b="0" dirty="0">
+              <a:latin typeface="+mj-lt"/>
+              <a:cs typeface="Lucida Sans"/>
+            </a:endParaRPr>
+          </a:p>
+        </p:txBody>
+      </p:sp>
+      <p:pic>
+        <p:nvPicPr>
+          <p:cNvPr id="83" name="Gráfico 82">
+            <a:extLst>
+              <a:ext uri="{FF2B5EF4-FFF2-40B4-BE49-F238E27FC236}">
+                <a16:creationId xmlns:a16="http://schemas.microsoft.com/office/drawing/2014/main" id="{4BFCA3D8-29F6-7091-7099-77888A9F863B}"/>
+              </a:ext>
+            </a:extLst>
+          </p:cNvPr>
+          <p:cNvPicPr>
+            <a:picLocks noChangeAspect="1"/>
+          </p:cNvPicPr>
+          <p:nvPr/>
+        </p:nvPicPr>
+        <p:blipFill>
+          <a:blip r:embed="rId3">
+            <a:extLst>
+              <a:ext uri="{96DAC541-7B7A-43D3-8B79-37D633B846F1}">
+                <asvg:svgBlip xmlns:asvg="http://schemas.microsoft.com/office/drawing/2016/SVG/main" r:embed="rId4"/>
+              </a:ext>
+            </a:extLst>
+          </a:blip>
+          <a:stretch>
+            <a:fillRect/>
+          </a:stretch>
+        </p:blipFill>
+        <p:spPr>
+          <a:xfrm>
+            <a:off x="5045006" y="6356057"/>
+            <a:ext cx="6409575" cy="363174"/>
+          </a:xfrm>
+          <a:prstGeom prst="rect">
+            <a:avLst/>
+          </a:prstGeom>
+        </p:spPr>
+      </p:pic>
+      <p:sp>
+        <p:nvSpPr>
+          <p:cNvPr id="84" name="Marcador de número de diapositiva 83">
+            <a:extLst>
+              <a:ext uri="{FF2B5EF4-FFF2-40B4-BE49-F238E27FC236}">
+                <a16:creationId xmlns:a16="http://schemas.microsoft.com/office/drawing/2014/main" id="{42E75535-0FBC-4C5F-9AC5-7008914FCF56}"/>
+              </a:ext>
+            </a:extLst>
+          </p:cNvPr>
+          <p:cNvSpPr>
+            <a:spLocks noGrp="1"/>
+          </p:cNvSpPr>
+          <p:nvPr>
+            <p:ph type="sldNum" sz="quarter" idx="7"/>
+          </p:nvPr>
+        </p:nvSpPr>
+        <p:spPr/>
+        <p:txBody>
+          <a:bodyPr/>
+          <a:lstStyle/>
+          <a:p>
+            <a:fld id="{B6F15528-21DE-4FAA-801E-634DDDAF4B2B}" type="slidenum">
+              <a:rPr lang="es-ES" smtClean="0"/>
+              <a:t>12</a:t>
+            </a:fld>
+            <a:endParaRPr lang="es-ES"/>
+          </a:p>
+        </p:txBody>
+      </p:sp>
+      <p:sp>
+        <p:nvSpPr>
+          <p:cNvPr id="3" name="Marcador de pie de página 2">
+            <a:extLst>
+              <a:ext uri="{FF2B5EF4-FFF2-40B4-BE49-F238E27FC236}">
+                <a16:creationId xmlns:a16="http://schemas.microsoft.com/office/drawing/2014/main" id="{07AC2AFF-A7D9-EBCD-7C5A-6CDF61B69366}"/>
+              </a:ext>
+            </a:extLst>
+          </p:cNvPr>
+          <p:cNvSpPr>
+            <a:spLocks noGrp="1"/>
+          </p:cNvSpPr>
+          <p:nvPr>
+            <p:ph type="ftr" sz="quarter" idx="5"/>
+          </p:nvPr>
+        </p:nvSpPr>
+        <p:spPr/>
+        <p:txBody>
+          <a:bodyPr/>
+          <a:lstStyle/>
+          <a:p>
+            <a:pPr marL="12700">
+              <a:spcBef>
+                <a:spcPts val="15"/>
+              </a:spcBef>
+            </a:pPr>
+            <a:r>
+              <a:rPr lang="es-ES" spc="-5"/>
+              <a:t>LAB 2.0. COUPLERS</a:t>
+            </a:r>
+            <a:endParaRPr lang="es-ES" spc="-5" dirty="0"/>
+          </a:p>
+        </p:txBody>
+      </p:sp>
+      <p:sp>
+        <p:nvSpPr>
+          <p:cNvPr id="2" name="CuadroTexto 1">
+            <a:extLst>
+              <a:ext uri="{FF2B5EF4-FFF2-40B4-BE49-F238E27FC236}">
+                <a16:creationId xmlns:a16="http://schemas.microsoft.com/office/drawing/2014/main" id="{42D73A2E-0E5A-8A39-6B70-F9E94D6DBB70}"/>
+              </a:ext>
+            </a:extLst>
+          </p:cNvPr>
+          <p:cNvSpPr txBox="1"/>
+          <p:nvPr/>
+        </p:nvSpPr>
+        <p:spPr>
+          <a:xfrm>
+            <a:off x="609441" y="4819471"/>
+            <a:ext cx="11199971" cy="1200329"/>
+          </a:xfrm>
+          <a:prstGeom prst="rect">
+            <a:avLst/>
+          </a:prstGeom>
+          <a:solidFill>
+            <a:schemeClr val="bg1">
+              <a:lumMod val="95000"/>
+            </a:schemeClr>
+          </a:solidFill>
+          <a:ln w="28575">
+            <a:solidFill>
+              <a:srgbClr val="E0700D"/>
+            </a:solidFill>
+          </a:ln>
+        </p:spPr>
+        <p:txBody>
+          <a:bodyPr wrap="square" rtlCol="0">
+            <a:spAutoFit/>
+          </a:bodyPr>
+          <a:lstStyle/>
+          <a:p>
+            <a:pPr algn="just"/>
+            <a:r>
+              <a:rPr lang="en-US" sz="1200" dirty="0">
+                <a:latin typeface="Arial" panose="020B0604020202020204" pitchFamily="34" charset="0"/>
+                <a:cs typeface="Arial" panose="020B0604020202020204" pitchFamily="34" charset="0"/>
+              </a:rPr>
+              <a:t>Repeat all the design </a:t>
+            </a:r>
+            <a:r>
+              <a:rPr lang="en-US" sz="1200">
+                <a:latin typeface="Arial" panose="020B0604020202020204" pitchFamily="34" charset="0"/>
+                <a:cs typeface="Arial" panose="020B0604020202020204" pitchFamily="34" charset="0"/>
+              </a:rPr>
+              <a:t>process for a </a:t>
+            </a:r>
+            <a:r>
+              <a:rPr lang="en-US" sz="1200" dirty="0">
+                <a:latin typeface="Arial" panose="020B0604020202020204" pitchFamily="34" charset="0"/>
+                <a:cs typeface="Arial" panose="020B0604020202020204" pitchFamily="34" charset="0"/>
+              </a:rPr>
+              <a:t>1x4 MMI Coupler.  </a:t>
+            </a:r>
+          </a:p>
+          <a:p>
+            <a:pPr algn="just"/>
+            <a:endParaRPr lang="en-US" sz="1200" dirty="0">
+              <a:latin typeface="Arial" panose="020B0604020202020204" pitchFamily="34" charset="0"/>
+              <a:cs typeface="Arial" panose="020B0604020202020204" pitchFamily="34" charset="0"/>
+            </a:endParaRPr>
+          </a:p>
+          <a:p>
+            <a:pPr algn="just"/>
+            <a:endParaRPr lang="en-US" sz="1200" dirty="0">
+              <a:latin typeface="Arial" panose="020B0604020202020204" pitchFamily="34" charset="0"/>
+              <a:cs typeface="Arial" panose="020B0604020202020204" pitchFamily="34" charset="0"/>
+            </a:endParaRPr>
+          </a:p>
+          <a:p>
+            <a:pPr algn="just"/>
+            <a:endParaRPr lang="en-US" sz="1200" dirty="0">
+              <a:latin typeface="Arial" panose="020B0604020202020204" pitchFamily="34" charset="0"/>
+              <a:cs typeface="Arial" panose="020B0604020202020204" pitchFamily="34" charset="0"/>
+            </a:endParaRPr>
+          </a:p>
+          <a:p>
+            <a:pPr algn="just"/>
+            <a:endParaRPr lang="en-US" sz="1200" dirty="0">
+              <a:latin typeface="Arial" panose="020B0604020202020204" pitchFamily="34" charset="0"/>
+              <a:cs typeface="Arial" panose="020B0604020202020204" pitchFamily="34" charset="0"/>
+            </a:endParaRPr>
+          </a:p>
+          <a:p>
+            <a:pPr algn="just"/>
+            <a:endParaRPr lang="en-US" sz="1200" dirty="0">
+              <a:latin typeface="Arial" panose="020B0604020202020204" pitchFamily="34" charset="0"/>
+              <a:cs typeface="Arial" panose="020B0604020202020204" pitchFamily="34" charset="0"/>
+            </a:endParaRPr>
+          </a:p>
+        </p:txBody>
+      </p:sp>
+      <p:sp>
+        <p:nvSpPr>
+          <p:cNvPr id="7" name="Rectángulo 6">
+            <a:extLst>
+              <a:ext uri="{FF2B5EF4-FFF2-40B4-BE49-F238E27FC236}">
+                <a16:creationId xmlns:a16="http://schemas.microsoft.com/office/drawing/2014/main" id="{AFB86587-21D4-5A33-7D00-DDF170C919BA}"/>
+              </a:ext>
+            </a:extLst>
+          </p:cNvPr>
+          <p:cNvSpPr/>
+          <p:nvPr/>
+        </p:nvSpPr>
+        <p:spPr>
+          <a:xfrm>
+            <a:off x="609441" y="1377510"/>
+            <a:ext cx="11199971" cy="3306028"/>
+          </a:xfrm>
+          <a:prstGeom prst="rect">
+            <a:avLst/>
+          </a:prstGeom>
+          <a:noFill/>
+          <a:ln w="28575">
+            <a:solidFill>
+              <a:srgbClr val="E0700D"/>
+            </a:solidFill>
+          </a:ln>
+        </p:spPr>
+        <p:style>
+          <a:lnRef idx="2">
+            <a:schemeClr val="accent1">
+              <a:shade val="15000"/>
+            </a:schemeClr>
+          </a:lnRef>
+          <a:fillRef idx="1">
+            <a:schemeClr val="accent1"/>
+          </a:fillRef>
+          <a:effectRef idx="0">
+            <a:schemeClr val="accent1"/>
+          </a:effectRef>
+          <a:fontRef idx="minor">
+            <a:schemeClr val="lt1"/>
+          </a:fontRef>
+        </p:style>
+        <p:txBody>
+          <a:bodyPr rtlCol="0" anchor="ctr"/>
+          <a:lstStyle/>
+          <a:p>
+            <a:pPr algn="ctr"/>
+            <a:endParaRPr lang="en-US"/>
+          </a:p>
+        </p:txBody>
+      </p:sp>
+      <p:sp>
+        <p:nvSpPr>
+          <p:cNvPr id="8" name="CuadroTexto 7">
+            <a:extLst>
+              <a:ext uri="{FF2B5EF4-FFF2-40B4-BE49-F238E27FC236}">
                 <a16:creationId xmlns:a16="http://schemas.microsoft.com/office/drawing/2014/main" id="{C3506757-32B7-9151-DA89-AADDB7F7D093}"/>
               </a:ext>
             </a:extLst>
@@ -4873,7 +5600,7 @@
 </p:sld>
 </file>
 
-<file path=ppt/slides/slide12.xml><?xml version="1.0" encoding="utf-8"?>
+<file path=ppt/slides/slide13.xml><?xml version="1.0" encoding="utf-8"?>
 <p:sld xmlns:a="http://schemas.openxmlformats.org/drawingml/2006/main" xmlns:r="http://schemas.openxmlformats.org/officeDocument/2006/relationships" xmlns:p="http://schemas.openxmlformats.org/presentationml/2006/main">
   <p:cSld>
     <p:spTree>
@@ -5029,7 +5756,7 @@
           <a:p>
             <a:fld id="{B6F15528-21DE-4FAA-801E-634DDDAF4B2B}" type="slidenum">
               <a:rPr lang="es-ES" smtClean="0"/>
-              <a:t>12</a:t>
+              <a:t>13</a:t>
             </a:fld>
             <a:endParaRPr lang="es-ES"/>
           </a:p>
@@ -5585,7 +6312,7 @@
 </p:sld>
 </file>
 
-<file path=ppt/slides/slide13.xml><?xml version="1.0" encoding="utf-8"?>
+<file path=ppt/slides/slide14.xml><?xml version="1.0" encoding="utf-8"?>
 <p:sld xmlns:a="http://schemas.openxmlformats.org/drawingml/2006/main" xmlns:r="http://schemas.openxmlformats.org/officeDocument/2006/relationships" xmlns:p="http://schemas.openxmlformats.org/presentationml/2006/main">
   <p:cSld>
     <p:spTree>
@@ -5738,7 +6465,7 @@
           <a:p>
             <a:fld id="{B6F15528-21DE-4FAA-801E-634DDDAF4B2B}" type="slidenum">
               <a:rPr lang="es-ES" smtClean="0"/>
-              <a:t>13</a:t>
+              <a:t>14</a:t>
             </a:fld>
             <a:endParaRPr lang="es-ES"/>
           </a:p>
@@ -6271,7 +6998,7 @@
 </p:sld>
 </file>
 
-<file path=ppt/slides/slide14.xml><?xml version="1.0" encoding="utf-8"?>
+<file path=ppt/slides/slide15.xml><?xml version="1.0" encoding="utf-8"?>
 <p:sld xmlns:a="http://schemas.openxmlformats.org/drawingml/2006/main" xmlns:r="http://schemas.openxmlformats.org/officeDocument/2006/relationships" xmlns:p="http://schemas.openxmlformats.org/presentationml/2006/main">
   <p:cSld>
     <p:spTree>
@@ -6421,7 +7148,7 @@
           <a:p>
             <a:fld id="{B6F15528-21DE-4FAA-801E-634DDDAF4B2B}" type="slidenum">
               <a:rPr lang="es-ES" smtClean="0"/>
-              <a:t>14</a:t>
+              <a:t>15</a:t>
             </a:fld>
             <a:endParaRPr lang="es-ES"/>
           </a:p>
@@ -6977,7 +7704,7 @@
 </p:sld>
 </file>
 
-<file path=ppt/slides/slide15.xml><?xml version="1.0" encoding="utf-8"?>
+<file path=ppt/slides/slide16.xml><?xml version="1.0" encoding="utf-8"?>
 <p:sld xmlns:a="http://schemas.openxmlformats.org/drawingml/2006/main" xmlns:r="http://schemas.openxmlformats.org/officeDocument/2006/relationships" xmlns:p="http://schemas.openxmlformats.org/presentationml/2006/main">
   <p:cSld>
     <p:spTree>
@@ -7127,7 +7854,7 @@
           <a:p>
             <a:fld id="{B6F15528-21DE-4FAA-801E-634DDDAF4B2B}" type="slidenum">
               <a:rPr lang="es-ES" smtClean="0"/>
-              <a:t>15</a:t>
+              <a:t>16</a:t>
             </a:fld>
             <a:endParaRPr lang="es-ES"/>
           </a:p>
@@ -7674,7 +8401,7 @@
 </p:sld>
 </file>
 
-<file path=ppt/slides/slide16.xml><?xml version="1.0" encoding="utf-8"?>
+<file path=ppt/slides/slide17.xml><?xml version="1.0" encoding="utf-8"?>
 <p:sld xmlns:a="http://schemas.openxmlformats.org/drawingml/2006/main" xmlns:r="http://schemas.openxmlformats.org/officeDocument/2006/relationships" xmlns:p="http://schemas.openxmlformats.org/presentationml/2006/main">
   <p:cSld>
     <p:spTree>
@@ -7813,7 +8540,7 @@
           <a:p>
             <a:fld id="{B6F15528-21DE-4FAA-801E-634DDDAF4B2B}" type="slidenum">
               <a:rPr lang="es-ES" smtClean="0"/>
-              <a:t>16</a:t>
+              <a:t>17</a:t>
             </a:fld>
             <a:endParaRPr lang="es-ES"/>
           </a:p>
@@ -10188,7 +10915,7 @@
         <p:spPr>
           <a:xfrm>
             <a:off x="609441" y="4860334"/>
-            <a:ext cx="11199971" cy="1200329"/>
+            <a:ext cx="11199971" cy="1384995"/>
           </a:xfrm>
           <a:prstGeom prst="rect">
             <a:avLst/>
@@ -10228,17 +10955,376 @@
           </a:p>
           <a:p>
             <a:pPr algn="just"/>
-            <a:endParaRPr lang="en-US" sz="1200" dirty="0">
-              <a:latin typeface="Arial" panose="020B0604020202020204" pitchFamily="34" charset="0"/>
-              <a:cs typeface="Arial" panose="020B0604020202020204" pitchFamily="34" charset="0"/>
-            </a:endParaRPr>
+            <a:r>
+              <a:rPr lang="en-US" sz="1200" dirty="0" err="1">
+                <a:latin typeface="Arial" panose="020B0604020202020204" pitchFamily="34" charset="0"/>
+                <a:cs typeface="Arial" panose="020B0604020202020204" pitchFamily="34" charset="0"/>
+              </a:rPr>
+              <a:t>Cuando</a:t>
+            </a:r>
+            <a:r>
+              <a:rPr lang="en-US" sz="1200" dirty="0">
+                <a:latin typeface="Arial" panose="020B0604020202020204" pitchFamily="34" charset="0"/>
+                <a:cs typeface="Arial" panose="020B0604020202020204" pitchFamily="34" charset="0"/>
+              </a:rPr>
+              <a:t> L=m*</a:t>
+            </a:r>
+            <a:r>
+              <a:rPr lang="en-US" sz="1200" dirty="0" err="1">
+                <a:latin typeface="Arial" panose="020B0604020202020204" pitchFamily="34" charset="0"/>
+                <a:cs typeface="Arial" panose="020B0604020202020204" pitchFamily="34" charset="0"/>
+              </a:rPr>
+              <a:t>L_pi</a:t>
+            </a:r>
+            <a:r>
+              <a:rPr lang="en-US" sz="1200" dirty="0">
+                <a:latin typeface="Arial" panose="020B0604020202020204" pitchFamily="34" charset="0"/>
+                <a:cs typeface="Arial" panose="020B0604020202020204" pitchFamily="34" charset="0"/>
+              </a:rPr>
+              <a:t> </a:t>
+            </a:r>
+            <a:r>
+              <a:rPr lang="en-US" sz="1200" dirty="0" err="1">
+                <a:latin typeface="Arial" panose="020B0604020202020204" pitchFamily="34" charset="0"/>
+                <a:cs typeface="Arial" panose="020B0604020202020204" pitchFamily="34" charset="0"/>
+              </a:rPr>
+              <a:t>siendo</a:t>
+            </a:r>
+            <a:r>
+              <a:rPr lang="en-US" sz="1200" dirty="0">
+                <a:latin typeface="Arial" panose="020B0604020202020204" pitchFamily="34" charset="0"/>
+                <a:cs typeface="Arial" panose="020B0604020202020204" pitchFamily="34" charset="0"/>
+              </a:rPr>
+              <a:t> m </a:t>
+            </a:r>
+            <a:r>
+              <a:rPr lang="en-US" sz="1200" dirty="0" err="1">
+                <a:latin typeface="Arial" panose="020B0604020202020204" pitchFamily="34" charset="0"/>
+                <a:cs typeface="Arial" panose="020B0604020202020204" pitchFamily="34" charset="0"/>
+              </a:rPr>
+              <a:t>valores</a:t>
+            </a:r>
+            <a:r>
+              <a:rPr lang="en-US" sz="1200" dirty="0">
+                <a:latin typeface="Arial" panose="020B0604020202020204" pitchFamily="34" charset="0"/>
+                <a:cs typeface="Arial" panose="020B0604020202020204" pitchFamily="34" charset="0"/>
+              </a:rPr>
+              <a:t> </a:t>
+            </a:r>
+            <a:r>
+              <a:rPr lang="en-US" sz="1200" dirty="0" err="1">
+                <a:latin typeface="Arial" panose="020B0604020202020204" pitchFamily="34" charset="0"/>
+                <a:cs typeface="Arial" panose="020B0604020202020204" pitchFamily="34" charset="0"/>
+              </a:rPr>
+              <a:t>enteros</a:t>
+            </a:r>
+            <a:r>
+              <a:rPr lang="en-US" sz="1200" dirty="0">
+                <a:latin typeface="Arial" panose="020B0604020202020204" pitchFamily="34" charset="0"/>
+                <a:cs typeface="Arial" panose="020B0604020202020204" pitchFamily="34" charset="0"/>
+              </a:rPr>
+              <a:t> </a:t>
+            </a:r>
+            <a:r>
+              <a:rPr lang="en-US" sz="1200" dirty="0" err="1">
+                <a:latin typeface="Arial" panose="020B0604020202020204" pitchFamily="34" charset="0"/>
+                <a:cs typeface="Arial" panose="020B0604020202020204" pitchFamily="34" charset="0"/>
+              </a:rPr>
+              <a:t>positivos</a:t>
+            </a:r>
+            <a:r>
+              <a:rPr lang="en-US" sz="1200" dirty="0">
+                <a:latin typeface="Arial" panose="020B0604020202020204" pitchFamily="34" charset="0"/>
+                <a:cs typeface="Arial" panose="020B0604020202020204" pitchFamily="34" charset="0"/>
+              </a:rPr>
+              <a:t> </a:t>
+            </a:r>
+            <a:r>
+              <a:rPr lang="en-US" sz="1200" dirty="0" err="1">
+                <a:latin typeface="Arial" panose="020B0604020202020204" pitchFamily="34" charset="0"/>
+                <a:cs typeface="Arial" panose="020B0604020202020204" pitchFamily="34" charset="0"/>
+              </a:rPr>
+              <a:t>impares</a:t>
+            </a:r>
+            <a:r>
+              <a:rPr lang="en-US" sz="1200" dirty="0">
+                <a:latin typeface="Arial" panose="020B0604020202020204" pitchFamily="34" charset="0"/>
+                <a:cs typeface="Arial" panose="020B0604020202020204" pitchFamily="34" charset="0"/>
+              </a:rPr>
+              <a:t> por 1 </a:t>
+            </a:r>
+            <a:r>
+              <a:rPr lang="en-US" sz="1200" dirty="0" err="1">
+                <a:latin typeface="Arial" panose="020B0604020202020204" pitchFamily="34" charset="0"/>
+                <a:cs typeface="Arial" panose="020B0604020202020204" pitchFamily="34" charset="0"/>
+              </a:rPr>
+              <a:t>obtenemos</a:t>
+            </a:r>
+            <a:r>
+              <a:rPr lang="en-US" sz="1200" dirty="0">
+                <a:latin typeface="Arial" panose="020B0604020202020204" pitchFamily="34" charset="0"/>
+                <a:cs typeface="Arial" panose="020B0604020202020204" pitchFamily="34" charset="0"/>
+              </a:rPr>
+              <a:t> una </a:t>
+            </a:r>
+            <a:r>
+              <a:rPr lang="en-US" sz="1200" dirty="0" err="1">
+                <a:latin typeface="Arial" panose="020B0604020202020204" pitchFamily="34" charset="0"/>
+                <a:cs typeface="Arial" panose="020B0604020202020204" pitchFamily="34" charset="0"/>
+              </a:rPr>
+              <a:t>transferencia</a:t>
+            </a:r>
+            <a:r>
+              <a:rPr lang="en-US" sz="1200" dirty="0">
+                <a:latin typeface="Arial" panose="020B0604020202020204" pitchFamily="34" charset="0"/>
+                <a:cs typeface="Arial" panose="020B0604020202020204" pitchFamily="34" charset="0"/>
+              </a:rPr>
+              <a:t> total de </a:t>
+            </a:r>
+            <a:r>
+              <a:rPr lang="en-US" sz="1200" dirty="0" err="1">
+                <a:latin typeface="Arial" panose="020B0604020202020204" pitchFamily="34" charset="0"/>
+                <a:cs typeface="Arial" panose="020B0604020202020204" pitchFamily="34" charset="0"/>
+              </a:rPr>
+              <a:t>energía</a:t>
+            </a:r>
+            <a:r>
+              <a:rPr lang="en-US" sz="1200" dirty="0">
+                <a:latin typeface="Arial" panose="020B0604020202020204" pitchFamily="34" charset="0"/>
+                <a:cs typeface="Arial" panose="020B0604020202020204" pitchFamily="34" charset="0"/>
+              </a:rPr>
+              <a:t> entre </a:t>
+            </a:r>
+            <a:r>
+              <a:rPr lang="en-US" sz="1200" dirty="0" err="1">
+                <a:latin typeface="Arial" panose="020B0604020202020204" pitchFamily="34" charset="0"/>
+                <a:cs typeface="Arial" panose="020B0604020202020204" pitchFamily="34" charset="0"/>
+              </a:rPr>
+              <a:t>guías</a:t>
+            </a:r>
+            <a:r>
+              <a:rPr lang="en-US" sz="1200" dirty="0">
+                <a:latin typeface="Arial" panose="020B0604020202020204" pitchFamily="34" charset="0"/>
+                <a:cs typeface="Arial" panose="020B0604020202020204" pitchFamily="34" charset="0"/>
+              </a:rPr>
+              <a:t> </a:t>
+            </a:r>
+            <a:r>
+              <a:rPr lang="en-US" sz="1200" dirty="0" err="1">
+                <a:latin typeface="Arial" panose="020B0604020202020204" pitchFamily="34" charset="0"/>
+                <a:cs typeface="Arial" panose="020B0604020202020204" pitchFamily="34" charset="0"/>
+              </a:rPr>
+              <a:t>ya</a:t>
+            </a:r>
+            <a:r>
+              <a:rPr lang="en-US" sz="1200" dirty="0">
+                <a:latin typeface="Arial" panose="020B0604020202020204" pitchFamily="34" charset="0"/>
+                <a:cs typeface="Arial" panose="020B0604020202020204" pitchFamily="34" charset="0"/>
+              </a:rPr>
+              <a:t> que K=1.</a:t>
+            </a:r>
           </a:p>
           <a:p>
             <a:pPr algn="just"/>
-            <a:endParaRPr lang="en-US" sz="1200" dirty="0">
-              <a:latin typeface="Arial" panose="020B0604020202020204" pitchFamily="34" charset="0"/>
-              <a:cs typeface="Arial" panose="020B0604020202020204" pitchFamily="34" charset="0"/>
-            </a:endParaRPr>
+            <a:r>
+              <a:rPr lang="en-US" sz="1200" dirty="0">
+                <a:latin typeface="Arial" panose="020B0604020202020204" pitchFamily="34" charset="0"/>
+                <a:cs typeface="Arial" panose="020B0604020202020204" pitchFamily="34" charset="0"/>
+              </a:rPr>
+              <a:t>Para </a:t>
+            </a:r>
+            <a:r>
+              <a:rPr lang="en-US" sz="1200" dirty="0" err="1">
+                <a:latin typeface="Arial" panose="020B0604020202020204" pitchFamily="34" charset="0"/>
+                <a:cs typeface="Arial" panose="020B0604020202020204" pitchFamily="34" charset="0"/>
+              </a:rPr>
+              <a:t>obtener</a:t>
+            </a:r>
+            <a:r>
+              <a:rPr lang="en-US" sz="1200" dirty="0">
+                <a:latin typeface="Arial" panose="020B0604020202020204" pitchFamily="34" charset="0"/>
+                <a:cs typeface="Arial" panose="020B0604020202020204" pitchFamily="34" charset="0"/>
+              </a:rPr>
+              <a:t> la </a:t>
+            </a:r>
+            <a:r>
+              <a:rPr lang="en-US" sz="1200" dirty="0" err="1">
+                <a:latin typeface="Arial" panose="020B0604020202020204" pitchFamily="34" charset="0"/>
+                <a:cs typeface="Arial" panose="020B0604020202020204" pitchFamily="34" charset="0"/>
+              </a:rPr>
+              <a:t>potencia</a:t>
+            </a:r>
+            <a:r>
+              <a:rPr lang="en-US" sz="1200" dirty="0">
+                <a:latin typeface="Arial" panose="020B0604020202020204" pitchFamily="34" charset="0"/>
+                <a:cs typeface="Arial" panose="020B0604020202020204" pitchFamily="34" charset="0"/>
+              </a:rPr>
+              <a:t> </a:t>
+            </a:r>
+            <a:r>
+              <a:rPr lang="en-US" sz="1200" dirty="0" err="1">
+                <a:latin typeface="Arial" panose="020B0604020202020204" pitchFamily="34" charset="0"/>
+                <a:cs typeface="Arial" panose="020B0604020202020204" pitchFamily="34" charset="0"/>
+              </a:rPr>
+              <a:t>dividida</a:t>
+            </a:r>
+            <a:r>
+              <a:rPr lang="en-US" sz="1200" dirty="0">
+                <a:latin typeface="Arial" panose="020B0604020202020204" pitchFamily="34" charset="0"/>
+                <a:cs typeface="Arial" panose="020B0604020202020204" pitchFamily="34" charset="0"/>
+              </a:rPr>
+              <a:t> entre los dos </a:t>
+            </a:r>
+            <a:r>
+              <a:rPr lang="en-US" sz="1200" dirty="0" err="1">
+                <a:latin typeface="Arial" panose="020B0604020202020204" pitchFamily="34" charset="0"/>
+                <a:cs typeface="Arial" panose="020B0604020202020204" pitchFamily="34" charset="0"/>
+              </a:rPr>
+              <a:t>puertos</a:t>
+            </a:r>
+            <a:r>
+              <a:rPr lang="en-US" sz="1200" dirty="0">
+                <a:latin typeface="Arial" panose="020B0604020202020204" pitchFamily="34" charset="0"/>
+                <a:cs typeface="Arial" panose="020B0604020202020204" pitchFamily="34" charset="0"/>
+              </a:rPr>
+              <a:t> de </a:t>
+            </a:r>
+            <a:r>
+              <a:rPr lang="en-US" sz="1200" dirty="0" err="1">
+                <a:latin typeface="Arial" panose="020B0604020202020204" pitchFamily="34" charset="0"/>
+                <a:cs typeface="Arial" panose="020B0604020202020204" pitchFamily="34" charset="0"/>
+              </a:rPr>
+              <a:t>salida</a:t>
+            </a:r>
+            <a:r>
+              <a:rPr lang="en-US" sz="1200" dirty="0">
+                <a:latin typeface="Arial" panose="020B0604020202020204" pitchFamily="34" charset="0"/>
+                <a:cs typeface="Arial" panose="020B0604020202020204" pitchFamily="34" charset="0"/>
+              </a:rPr>
+              <a:t> L = m*</a:t>
+            </a:r>
+            <a:r>
+              <a:rPr lang="en-US" sz="1200" dirty="0" err="1">
+                <a:latin typeface="Arial" panose="020B0604020202020204" pitchFamily="34" charset="0"/>
+                <a:cs typeface="Arial" panose="020B0604020202020204" pitchFamily="34" charset="0"/>
+              </a:rPr>
+              <a:t>L_pi</a:t>
+            </a:r>
+            <a:r>
+              <a:rPr lang="en-US" sz="1200" dirty="0">
+                <a:latin typeface="Arial" panose="020B0604020202020204" pitchFamily="34" charset="0"/>
+                <a:cs typeface="Arial" panose="020B0604020202020204" pitchFamily="34" charset="0"/>
+              </a:rPr>
+              <a:t>/2 para </a:t>
+            </a:r>
+            <a:r>
+              <a:rPr lang="en-US" sz="1200" dirty="0" err="1">
+                <a:latin typeface="Arial" panose="020B0604020202020204" pitchFamily="34" charset="0"/>
+                <a:cs typeface="Arial" panose="020B0604020202020204" pitchFamily="34" charset="0"/>
+              </a:rPr>
+              <a:t>valores</a:t>
+            </a:r>
+            <a:r>
+              <a:rPr lang="en-US" sz="1200" dirty="0">
+                <a:latin typeface="Arial" panose="020B0604020202020204" pitchFamily="34" charset="0"/>
+                <a:cs typeface="Arial" panose="020B0604020202020204" pitchFamily="34" charset="0"/>
+              </a:rPr>
+              <a:t> de m </a:t>
+            </a:r>
+            <a:r>
+              <a:rPr lang="en-US" sz="1200" dirty="0" err="1">
+                <a:latin typeface="Arial" panose="020B0604020202020204" pitchFamily="34" charset="0"/>
+                <a:cs typeface="Arial" panose="020B0604020202020204" pitchFamily="34" charset="0"/>
+              </a:rPr>
+              <a:t>impares</a:t>
+            </a:r>
+            <a:r>
+              <a:rPr lang="en-US" sz="1200" dirty="0">
+                <a:latin typeface="Arial" panose="020B0604020202020204" pitchFamily="34" charset="0"/>
+                <a:cs typeface="Arial" panose="020B0604020202020204" pitchFamily="34" charset="0"/>
+              </a:rPr>
+              <a:t>.</a:t>
+            </a:r>
+          </a:p>
+          <a:p>
+            <a:pPr algn="just"/>
+            <a:r>
+              <a:rPr lang="en-US" sz="1200" dirty="0">
+                <a:latin typeface="Arial" panose="020B0604020202020204" pitchFamily="34" charset="0"/>
+                <a:cs typeface="Arial" panose="020B0604020202020204" pitchFamily="34" charset="0"/>
+              </a:rPr>
+              <a:t>Por ultimo, para </a:t>
+            </a:r>
+            <a:r>
+              <a:rPr lang="en-US" sz="1200" dirty="0" err="1">
+                <a:latin typeface="Arial" panose="020B0604020202020204" pitchFamily="34" charset="0"/>
+                <a:cs typeface="Arial" panose="020B0604020202020204" pitchFamily="34" charset="0"/>
+              </a:rPr>
+              <a:t>tener</a:t>
+            </a:r>
+            <a:r>
+              <a:rPr lang="en-US" sz="1200" dirty="0">
+                <a:latin typeface="Arial" panose="020B0604020202020204" pitchFamily="34" charset="0"/>
+                <a:cs typeface="Arial" panose="020B0604020202020204" pitchFamily="34" charset="0"/>
+              </a:rPr>
+              <a:t> K=0 </a:t>
+            </a:r>
+            <a:r>
+              <a:rPr lang="en-US" sz="1200" dirty="0" err="1">
+                <a:latin typeface="Arial" panose="020B0604020202020204" pitchFamily="34" charset="0"/>
+                <a:cs typeface="Arial" panose="020B0604020202020204" pitchFamily="34" charset="0"/>
+              </a:rPr>
+              <a:t>hemos</a:t>
+            </a:r>
+            <a:r>
+              <a:rPr lang="en-US" sz="1200" dirty="0">
+                <a:latin typeface="Arial" panose="020B0604020202020204" pitchFamily="34" charset="0"/>
+                <a:cs typeface="Arial" panose="020B0604020202020204" pitchFamily="34" charset="0"/>
+              </a:rPr>
+              <a:t> de </a:t>
+            </a:r>
+            <a:r>
+              <a:rPr lang="en-US" sz="1200" dirty="0" err="1">
+                <a:latin typeface="Arial" panose="020B0604020202020204" pitchFamily="34" charset="0"/>
+                <a:cs typeface="Arial" panose="020B0604020202020204" pitchFamily="34" charset="0"/>
+              </a:rPr>
+              <a:t>poner</a:t>
+            </a:r>
+            <a:r>
+              <a:rPr lang="en-US" sz="1200" dirty="0">
+                <a:latin typeface="Arial" panose="020B0604020202020204" pitchFamily="34" charset="0"/>
+                <a:cs typeface="Arial" panose="020B0604020202020204" pitchFamily="34" charset="0"/>
+              </a:rPr>
+              <a:t> una </a:t>
+            </a:r>
+            <a:r>
+              <a:rPr lang="en-US" sz="1200" dirty="0" err="1">
+                <a:latin typeface="Arial" panose="020B0604020202020204" pitchFamily="34" charset="0"/>
+                <a:cs typeface="Arial" panose="020B0604020202020204" pitchFamily="34" charset="0"/>
+              </a:rPr>
+              <a:t>distancia</a:t>
+            </a:r>
+            <a:r>
+              <a:rPr lang="en-US" sz="1200" dirty="0">
+                <a:latin typeface="Arial" panose="020B0604020202020204" pitchFamily="34" charset="0"/>
+                <a:cs typeface="Arial" panose="020B0604020202020204" pitchFamily="34" charset="0"/>
+              </a:rPr>
+              <a:t> L=m*</a:t>
+            </a:r>
+            <a:r>
+              <a:rPr lang="en-US" sz="1200" dirty="0" err="1">
+                <a:latin typeface="Arial" panose="020B0604020202020204" pitchFamily="34" charset="0"/>
+                <a:cs typeface="Arial" panose="020B0604020202020204" pitchFamily="34" charset="0"/>
+              </a:rPr>
+              <a:t>L_pi</a:t>
+            </a:r>
+            <a:r>
+              <a:rPr lang="en-US" sz="1200" dirty="0">
+                <a:latin typeface="Arial" panose="020B0604020202020204" pitchFamily="34" charset="0"/>
+                <a:cs typeface="Arial" panose="020B0604020202020204" pitchFamily="34" charset="0"/>
+              </a:rPr>
+              <a:t> para m pares.</a:t>
+            </a:r>
           </a:p>
           <a:p>
             <a:pPr algn="just"/>
@@ -10397,6 +11483,36 @@
           <a:xfrm>
             <a:off x="382588" y="1626040"/>
             <a:ext cx="3383313" cy="983682"/>
+          </a:xfrm>
+          <a:prstGeom prst="rect">
+            <a:avLst/>
+          </a:prstGeom>
+        </p:spPr>
+      </p:pic>
+      <p:pic>
+        <p:nvPicPr>
+          <p:cNvPr id="5" name="Imagen 4">
+            <a:extLst>
+              <a:ext uri="{FF2B5EF4-FFF2-40B4-BE49-F238E27FC236}">
+                <a16:creationId xmlns:a16="http://schemas.microsoft.com/office/drawing/2014/main" id="{229B523B-2C9F-48C2-BF4D-869C74BA60A3}"/>
+              </a:ext>
+            </a:extLst>
+          </p:cNvPr>
+          <p:cNvPicPr>
+            <a:picLocks noChangeAspect="1"/>
+          </p:cNvPicPr>
+          <p:nvPr/>
+        </p:nvPicPr>
+        <p:blipFill>
+          <a:blip r:embed="rId6"/>
+          <a:stretch>
+            <a:fillRect/>
+          </a:stretch>
+        </p:blipFill>
+        <p:spPr>
+          <a:xfrm>
+            <a:off x="4144602" y="1554132"/>
+            <a:ext cx="3902796" cy="3131873"/>
           </a:xfrm>
           <a:prstGeom prst="rect">
             <a:avLst/>
@@ -10490,7 +11606,7 @@
             </a:br>
             <a:r>
               <a:rPr lang="en-US" b="0" dirty="0"/>
-              <a:t>Width 0.6 - 1.6 µm (step 0.1 µm) – Wavelength 1.55 µm </a:t>
+              <a:t>Gap 0.6 - 1.6 µm (step 0.1 µm) – Wavelength 1.55 µm </a:t>
             </a:r>
             <a:endParaRPr lang="en-US" sz="2500" b="0" dirty="0">
               <a:latin typeface="+mj-lt"/>
@@ -10613,7 +11729,7 @@
         <p:spPr>
           <a:xfrm>
             <a:off x="609441" y="4860334"/>
-            <a:ext cx="11199971" cy="1200329"/>
+            <a:ext cx="11199971" cy="1384995"/>
           </a:xfrm>
           <a:prstGeom prst="rect">
             <a:avLst/>
@@ -10641,21 +11757,545 @@
                 <a:latin typeface="Arial" panose="020B0604020202020204" pitchFamily="34" charset="0"/>
                 <a:cs typeface="Arial" panose="020B0604020202020204" pitchFamily="34" charset="0"/>
               </a:rPr>
-              <a:t>Comment results (Coupling relationship, </a:t>
-            </a:r>
+              <a:t>GAP = 0.6</a:t>
+            </a:r>
+          </a:p>
+          <a:p>
+            <a:pPr algn="just"/>
             <a:r>
               <a:rPr lang="en-US" sz="1200" dirty="0" err="1">
                 <a:latin typeface="Arial" panose="020B0604020202020204" pitchFamily="34" charset="0"/>
                 <a:cs typeface="Arial" panose="020B0604020202020204" pitchFamily="34" charset="0"/>
               </a:rPr>
-              <a:t>Lpi</a:t>
+              <a:t>En</a:t>
             </a:r>
             <a:r>
               <a:rPr lang="en-US" sz="1200" dirty="0">
                 <a:latin typeface="Arial" panose="020B0604020202020204" pitchFamily="34" charset="0"/>
                 <a:cs typeface="Arial" panose="020B0604020202020204" pitchFamily="34" charset="0"/>
               </a:rPr>
-              <a:t>, losses, … )</a:t>
+              <a:t> </a:t>
+            </a:r>
+            <a:r>
+              <a:rPr lang="en-US" sz="1200" dirty="0" err="1">
+                <a:latin typeface="Arial" panose="020B0604020202020204" pitchFamily="34" charset="0"/>
+                <a:cs typeface="Arial" panose="020B0604020202020204" pitchFamily="34" charset="0"/>
+              </a:rPr>
+              <a:t>el</a:t>
+            </a:r>
+            <a:r>
+              <a:rPr lang="en-US" sz="1200" dirty="0">
+                <a:latin typeface="Arial" panose="020B0604020202020204" pitchFamily="34" charset="0"/>
+                <a:cs typeface="Arial" panose="020B0604020202020204" pitchFamily="34" charset="0"/>
+              </a:rPr>
+              <a:t> </a:t>
+            </a:r>
+            <a:r>
+              <a:rPr lang="en-US" sz="1200" dirty="0" err="1">
+                <a:latin typeface="Arial" panose="020B0604020202020204" pitchFamily="34" charset="0"/>
+                <a:cs typeface="Arial" panose="020B0604020202020204" pitchFamily="34" charset="0"/>
+              </a:rPr>
+              <a:t>caso</a:t>
+            </a:r>
+            <a:r>
+              <a:rPr lang="en-US" sz="1200" dirty="0">
+                <a:latin typeface="Arial" panose="020B0604020202020204" pitchFamily="34" charset="0"/>
+                <a:cs typeface="Arial" panose="020B0604020202020204" pitchFamily="34" charset="0"/>
+              </a:rPr>
+              <a:t> de la </a:t>
+            </a:r>
+            <a:r>
+              <a:rPr lang="en-US" sz="1200" dirty="0" err="1">
+                <a:latin typeface="Arial" panose="020B0604020202020204" pitchFamily="34" charset="0"/>
+                <a:cs typeface="Arial" panose="020B0604020202020204" pitchFamily="34" charset="0"/>
+              </a:rPr>
+              <a:t>izquierda</a:t>
+            </a:r>
+            <a:r>
+              <a:rPr lang="en-US" sz="1200" dirty="0">
+                <a:latin typeface="Arial" panose="020B0604020202020204" pitchFamily="34" charset="0"/>
+                <a:cs typeface="Arial" panose="020B0604020202020204" pitchFamily="34" charset="0"/>
+              </a:rPr>
+              <a:t> L=</a:t>
+            </a:r>
+            <a:r>
+              <a:rPr lang="en-US" sz="1200" dirty="0" err="1">
+                <a:latin typeface="Arial" panose="020B0604020202020204" pitchFamily="34" charset="0"/>
+                <a:cs typeface="Arial" panose="020B0604020202020204" pitchFamily="34" charset="0"/>
+              </a:rPr>
+              <a:t>L_pi</a:t>
+            </a:r>
+            <a:r>
+              <a:rPr lang="en-US" sz="1200" dirty="0">
+                <a:latin typeface="Arial" panose="020B0604020202020204" pitchFamily="34" charset="0"/>
+                <a:cs typeface="Arial" panose="020B0604020202020204" pitchFamily="34" charset="0"/>
+              </a:rPr>
+              <a:t> por tanto se </a:t>
+            </a:r>
+            <a:r>
+              <a:rPr lang="en-US" sz="1200" dirty="0" err="1">
+                <a:latin typeface="Arial" panose="020B0604020202020204" pitchFamily="34" charset="0"/>
+                <a:cs typeface="Arial" panose="020B0604020202020204" pitchFamily="34" charset="0"/>
+              </a:rPr>
+              <a:t>obtiene</a:t>
+            </a:r>
+            <a:r>
+              <a:rPr lang="en-US" sz="1200" dirty="0">
+                <a:latin typeface="Arial" panose="020B0604020202020204" pitchFamily="34" charset="0"/>
+                <a:cs typeface="Arial" panose="020B0604020202020204" pitchFamily="34" charset="0"/>
+              </a:rPr>
+              <a:t> la mayor </a:t>
+            </a:r>
+            <a:r>
+              <a:rPr lang="en-US" sz="1200" dirty="0" err="1">
+                <a:latin typeface="Arial" panose="020B0604020202020204" pitchFamily="34" charset="0"/>
+                <a:cs typeface="Arial" panose="020B0604020202020204" pitchFamily="34" charset="0"/>
+              </a:rPr>
+              <a:t>parte</a:t>
+            </a:r>
+            <a:r>
+              <a:rPr lang="en-US" sz="1200" dirty="0">
+                <a:latin typeface="Arial" panose="020B0604020202020204" pitchFamily="34" charset="0"/>
+                <a:cs typeface="Arial" panose="020B0604020202020204" pitchFamily="34" charset="0"/>
+              </a:rPr>
+              <a:t> de la </a:t>
+            </a:r>
+            <a:r>
+              <a:rPr lang="en-US" sz="1200" dirty="0" err="1">
+                <a:latin typeface="Arial" panose="020B0604020202020204" pitchFamily="34" charset="0"/>
+                <a:cs typeface="Arial" panose="020B0604020202020204" pitchFamily="34" charset="0"/>
+              </a:rPr>
+              <a:t>potencia</a:t>
+            </a:r>
+            <a:r>
+              <a:rPr lang="en-US" sz="1200" dirty="0">
+                <a:latin typeface="Arial" panose="020B0604020202020204" pitchFamily="34" charset="0"/>
+                <a:cs typeface="Arial" panose="020B0604020202020204" pitchFamily="34" charset="0"/>
+              </a:rPr>
+              <a:t> </a:t>
+            </a:r>
+            <a:r>
+              <a:rPr lang="en-US" sz="1200" dirty="0" err="1">
+                <a:latin typeface="Arial" panose="020B0604020202020204" pitchFamily="34" charset="0"/>
+                <a:cs typeface="Arial" panose="020B0604020202020204" pitchFamily="34" charset="0"/>
+              </a:rPr>
+              <a:t>en</a:t>
+            </a:r>
+            <a:r>
+              <a:rPr lang="en-US" sz="1200" dirty="0">
+                <a:latin typeface="Arial" panose="020B0604020202020204" pitchFamily="34" charset="0"/>
+                <a:cs typeface="Arial" panose="020B0604020202020204" pitchFamily="34" charset="0"/>
+              </a:rPr>
+              <a:t> la </a:t>
+            </a:r>
+            <a:r>
+              <a:rPr lang="en-US" sz="1200" dirty="0" err="1">
+                <a:latin typeface="Arial" panose="020B0604020202020204" pitchFamily="34" charset="0"/>
+                <a:cs typeface="Arial" panose="020B0604020202020204" pitchFamily="34" charset="0"/>
+              </a:rPr>
+              <a:t>salida</a:t>
+            </a:r>
+            <a:r>
+              <a:rPr lang="en-US" sz="1200" dirty="0">
+                <a:latin typeface="Arial" panose="020B0604020202020204" pitchFamily="34" charset="0"/>
+                <a:cs typeface="Arial" panose="020B0604020202020204" pitchFamily="34" charset="0"/>
+              </a:rPr>
+              <a:t> </a:t>
+            </a:r>
+            <a:r>
+              <a:rPr lang="en-US" sz="1200" dirty="0" err="1">
+                <a:latin typeface="Arial" panose="020B0604020202020204" pitchFamily="34" charset="0"/>
+                <a:cs typeface="Arial" panose="020B0604020202020204" pitchFamily="34" charset="0"/>
+              </a:rPr>
+              <a:t>contraria</a:t>
+            </a:r>
+            <a:r>
+              <a:rPr lang="en-US" sz="1200" dirty="0">
+                <a:latin typeface="Arial" panose="020B0604020202020204" pitchFamily="34" charset="0"/>
+                <a:cs typeface="Arial" panose="020B0604020202020204" pitchFamily="34" charset="0"/>
+              </a:rPr>
+              <a:t> al </a:t>
+            </a:r>
+            <a:r>
+              <a:rPr lang="en-US" sz="1200" dirty="0" err="1">
+                <a:latin typeface="Arial" panose="020B0604020202020204" pitchFamily="34" charset="0"/>
+                <a:cs typeface="Arial" panose="020B0604020202020204" pitchFamily="34" charset="0"/>
+              </a:rPr>
+              <a:t>puerto</a:t>
+            </a:r>
+            <a:r>
+              <a:rPr lang="en-US" sz="1200" dirty="0">
+                <a:latin typeface="Arial" panose="020B0604020202020204" pitchFamily="34" charset="0"/>
+                <a:cs typeface="Arial" panose="020B0604020202020204" pitchFamily="34" charset="0"/>
+              </a:rPr>
+              <a:t> de entrada </a:t>
+            </a:r>
+            <a:r>
+              <a:rPr lang="en-US" sz="1200" dirty="0" err="1">
+                <a:latin typeface="Arial" panose="020B0604020202020204" pitchFamily="34" charset="0"/>
+                <a:cs typeface="Arial" panose="020B0604020202020204" pitchFamily="34" charset="0"/>
+              </a:rPr>
+              <a:t>como</a:t>
+            </a:r>
+            <a:r>
+              <a:rPr lang="en-US" sz="1200" dirty="0">
+                <a:latin typeface="Arial" panose="020B0604020202020204" pitchFamily="34" charset="0"/>
+                <a:cs typeface="Arial" panose="020B0604020202020204" pitchFamily="34" charset="0"/>
+              </a:rPr>
+              <a:t> se </a:t>
+            </a:r>
+            <a:r>
+              <a:rPr lang="en-US" sz="1200" dirty="0" err="1">
+                <a:latin typeface="Arial" panose="020B0604020202020204" pitchFamily="34" charset="0"/>
+                <a:cs typeface="Arial" panose="020B0604020202020204" pitchFamily="34" charset="0"/>
+              </a:rPr>
+              <a:t>puede</a:t>
+            </a:r>
+            <a:r>
+              <a:rPr lang="en-US" sz="1200" dirty="0">
+                <a:latin typeface="Arial" panose="020B0604020202020204" pitchFamily="34" charset="0"/>
+                <a:cs typeface="Arial" panose="020B0604020202020204" pitchFamily="34" charset="0"/>
+              </a:rPr>
+              <a:t> </a:t>
+            </a:r>
+            <a:r>
+              <a:rPr lang="en-US" sz="1200" dirty="0" err="1">
+                <a:latin typeface="Arial" panose="020B0604020202020204" pitchFamily="34" charset="0"/>
+                <a:cs typeface="Arial" panose="020B0604020202020204" pitchFamily="34" charset="0"/>
+              </a:rPr>
+              <a:t>observar</a:t>
+            </a:r>
+            <a:r>
+              <a:rPr lang="en-US" sz="1200" dirty="0">
+                <a:latin typeface="Arial" panose="020B0604020202020204" pitchFamily="34" charset="0"/>
+                <a:cs typeface="Arial" panose="020B0604020202020204" pitchFamily="34" charset="0"/>
+              </a:rPr>
+              <a:t> </a:t>
+            </a:r>
+            <a:r>
+              <a:rPr lang="en-US" sz="1200" dirty="0" err="1">
+                <a:latin typeface="Arial" panose="020B0604020202020204" pitchFamily="34" charset="0"/>
+                <a:cs typeface="Arial" panose="020B0604020202020204" pitchFamily="34" charset="0"/>
+              </a:rPr>
+              <a:t>en</a:t>
+            </a:r>
+            <a:r>
+              <a:rPr lang="en-US" sz="1200" dirty="0">
+                <a:latin typeface="Arial" panose="020B0604020202020204" pitchFamily="34" charset="0"/>
+                <a:cs typeface="Arial" panose="020B0604020202020204" pitchFamily="34" charset="0"/>
+              </a:rPr>
+              <a:t> los ratios de </a:t>
+            </a:r>
+            <a:r>
+              <a:rPr lang="en-US" sz="1200" dirty="0" err="1">
+                <a:latin typeface="Arial" panose="020B0604020202020204" pitchFamily="34" charset="0"/>
+                <a:cs typeface="Arial" panose="020B0604020202020204" pitchFamily="34" charset="0"/>
+              </a:rPr>
+              <a:t>salida</a:t>
+            </a:r>
+            <a:r>
+              <a:rPr lang="en-US" sz="1200" dirty="0">
+                <a:latin typeface="Arial" panose="020B0604020202020204" pitchFamily="34" charset="0"/>
+                <a:cs typeface="Arial" panose="020B0604020202020204" pitchFamily="34" charset="0"/>
+              </a:rPr>
+              <a:t>.</a:t>
+            </a:r>
+          </a:p>
+          <a:p>
+            <a:pPr algn="just"/>
+            <a:r>
+              <a:rPr lang="en-US" sz="1200" dirty="0" err="1">
+                <a:latin typeface="Arial" panose="020B0604020202020204" pitchFamily="34" charset="0"/>
+                <a:cs typeface="Arial" panose="020B0604020202020204" pitchFamily="34" charset="0"/>
+              </a:rPr>
+              <a:t>En</a:t>
+            </a:r>
+            <a:r>
+              <a:rPr lang="en-US" sz="1200" dirty="0">
+                <a:latin typeface="Arial" panose="020B0604020202020204" pitchFamily="34" charset="0"/>
+                <a:cs typeface="Arial" panose="020B0604020202020204" pitchFamily="34" charset="0"/>
+              </a:rPr>
+              <a:t> </a:t>
+            </a:r>
+            <a:r>
+              <a:rPr lang="en-US" sz="1200" dirty="0" err="1">
+                <a:latin typeface="Arial" panose="020B0604020202020204" pitchFamily="34" charset="0"/>
+                <a:cs typeface="Arial" panose="020B0604020202020204" pitchFamily="34" charset="0"/>
+              </a:rPr>
+              <a:t>el</a:t>
+            </a:r>
+            <a:r>
+              <a:rPr lang="en-US" sz="1200" dirty="0">
+                <a:latin typeface="Arial" panose="020B0604020202020204" pitchFamily="34" charset="0"/>
+                <a:cs typeface="Arial" panose="020B0604020202020204" pitchFamily="34" charset="0"/>
+              </a:rPr>
+              <a:t> </a:t>
+            </a:r>
+            <a:r>
+              <a:rPr lang="en-US" sz="1200" dirty="0" err="1">
+                <a:latin typeface="Arial" panose="020B0604020202020204" pitchFamily="34" charset="0"/>
+                <a:cs typeface="Arial" panose="020B0604020202020204" pitchFamily="34" charset="0"/>
+              </a:rPr>
+              <a:t>caso</a:t>
+            </a:r>
+            <a:r>
+              <a:rPr lang="en-US" sz="1200" dirty="0">
+                <a:latin typeface="Arial" panose="020B0604020202020204" pitchFamily="34" charset="0"/>
+                <a:cs typeface="Arial" panose="020B0604020202020204" pitchFamily="34" charset="0"/>
+              </a:rPr>
+              <a:t> de la </a:t>
+            </a:r>
+            <a:r>
+              <a:rPr lang="en-US" sz="1200" dirty="0" err="1">
+                <a:latin typeface="Arial" panose="020B0604020202020204" pitchFamily="34" charset="0"/>
+                <a:cs typeface="Arial" panose="020B0604020202020204" pitchFamily="34" charset="0"/>
+              </a:rPr>
+              <a:t>derecha</a:t>
+            </a:r>
+            <a:r>
+              <a:rPr lang="en-US" sz="1200" dirty="0">
+                <a:latin typeface="Arial" panose="020B0604020202020204" pitchFamily="34" charset="0"/>
+                <a:cs typeface="Arial" panose="020B0604020202020204" pitchFamily="34" charset="0"/>
+              </a:rPr>
+              <a:t> L=</a:t>
+            </a:r>
+            <a:r>
+              <a:rPr lang="en-US" sz="1200" dirty="0" err="1">
+                <a:latin typeface="Arial" panose="020B0604020202020204" pitchFamily="34" charset="0"/>
+                <a:cs typeface="Arial" panose="020B0604020202020204" pitchFamily="34" charset="0"/>
+              </a:rPr>
+              <a:t>L_pi</a:t>
+            </a:r>
+            <a:r>
+              <a:rPr lang="en-US" sz="1200" dirty="0">
+                <a:latin typeface="Arial" panose="020B0604020202020204" pitchFamily="34" charset="0"/>
+                <a:cs typeface="Arial" panose="020B0604020202020204" pitchFamily="34" charset="0"/>
+              </a:rPr>
+              <a:t>/2 por tanto la </a:t>
+            </a:r>
+            <a:r>
+              <a:rPr lang="en-US" sz="1200" dirty="0" err="1">
+                <a:latin typeface="Arial" panose="020B0604020202020204" pitchFamily="34" charset="0"/>
+                <a:cs typeface="Arial" panose="020B0604020202020204" pitchFamily="34" charset="0"/>
+              </a:rPr>
+              <a:t>potencia</a:t>
+            </a:r>
+            <a:r>
+              <a:rPr lang="en-US" sz="1200" dirty="0">
+                <a:latin typeface="Arial" panose="020B0604020202020204" pitchFamily="34" charset="0"/>
+                <a:cs typeface="Arial" panose="020B0604020202020204" pitchFamily="34" charset="0"/>
+              </a:rPr>
+              <a:t> de entrada se divide a la </a:t>
+            </a:r>
+            <a:r>
+              <a:rPr lang="en-US" sz="1200" dirty="0" err="1">
+                <a:latin typeface="Arial" panose="020B0604020202020204" pitchFamily="34" charset="0"/>
+                <a:cs typeface="Arial" panose="020B0604020202020204" pitchFamily="34" charset="0"/>
+              </a:rPr>
+              <a:t>mitad</a:t>
+            </a:r>
+            <a:r>
+              <a:rPr lang="en-US" sz="1200" dirty="0">
+                <a:latin typeface="Arial" panose="020B0604020202020204" pitchFamily="34" charset="0"/>
+                <a:cs typeface="Arial" panose="020B0604020202020204" pitchFamily="34" charset="0"/>
+              </a:rPr>
+              <a:t> </a:t>
+            </a:r>
+            <a:r>
+              <a:rPr lang="en-US" sz="1200" dirty="0" err="1">
+                <a:latin typeface="Arial" panose="020B0604020202020204" pitchFamily="34" charset="0"/>
+                <a:cs typeface="Arial" panose="020B0604020202020204" pitchFamily="34" charset="0"/>
+              </a:rPr>
+              <a:t>en</a:t>
+            </a:r>
+            <a:r>
+              <a:rPr lang="en-US" sz="1200" dirty="0">
+                <a:latin typeface="Arial" panose="020B0604020202020204" pitchFamily="34" charset="0"/>
+                <a:cs typeface="Arial" panose="020B0604020202020204" pitchFamily="34" charset="0"/>
+              </a:rPr>
+              <a:t> </a:t>
+            </a:r>
+            <a:r>
+              <a:rPr lang="en-US" sz="1200" dirty="0" err="1">
+                <a:latin typeface="Arial" panose="020B0604020202020204" pitchFamily="34" charset="0"/>
+                <a:cs typeface="Arial" panose="020B0604020202020204" pitchFamily="34" charset="0"/>
+              </a:rPr>
+              <a:t>cada</a:t>
+            </a:r>
+            <a:r>
+              <a:rPr lang="en-US" sz="1200" dirty="0">
+                <a:latin typeface="Arial" panose="020B0604020202020204" pitchFamily="34" charset="0"/>
+                <a:cs typeface="Arial" panose="020B0604020202020204" pitchFamily="34" charset="0"/>
+              </a:rPr>
+              <a:t> </a:t>
+            </a:r>
+            <a:r>
+              <a:rPr lang="en-US" sz="1200" dirty="0" err="1">
+                <a:latin typeface="Arial" panose="020B0604020202020204" pitchFamily="34" charset="0"/>
+                <a:cs typeface="Arial" panose="020B0604020202020204" pitchFamily="34" charset="0"/>
+              </a:rPr>
+              <a:t>puerto</a:t>
+            </a:r>
+            <a:r>
+              <a:rPr lang="en-US" sz="1200" dirty="0">
+                <a:latin typeface="Arial" panose="020B0604020202020204" pitchFamily="34" charset="0"/>
+                <a:cs typeface="Arial" panose="020B0604020202020204" pitchFamily="34" charset="0"/>
+              </a:rPr>
+              <a:t> de </a:t>
+            </a:r>
+            <a:r>
+              <a:rPr lang="en-US" sz="1200" dirty="0" err="1">
+                <a:latin typeface="Arial" panose="020B0604020202020204" pitchFamily="34" charset="0"/>
+                <a:cs typeface="Arial" panose="020B0604020202020204" pitchFamily="34" charset="0"/>
+              </a:rPr>
+              <a:t>salida</a:t>
+            </a:r>
+            <a:r>
+              <a:rPr lang="en-US" sz="1200" dirty="0">
+                <a:latin typeface="Arial" panose="020B0604020202020204" pitchFamily="34" charset="0"/>
+                <a:cs typeface="Arial" panose="020B0604020202020204" pitchFamily="34" charset="0"/>
+              </a:rPr>
+              <a:t>. Como se </a:t>
+            </a:r>
+            <a:r>
+              <a:rPr lang="en-US" sz="1200" dirty="0" err="1">
+                <a:latin typeface="Arial" panose="020B0604020202020204" pitchFamily="34" charset="0"/>
+                <a:cs typeface="Arial" panose="020B0604020202020204" pitchFamily="34" charset="0"/>
+              </a:rPr>
+              <a:t>aprecia</a:t>
+            </a:r>
+            <a:r>
+              <a:rPr lang="en-US" sz="1200" dirty="0">
+                <a:latin typeface="Arial" panose="020B0604020202020204" pitchFamily="34" charset="0"/>
+                <a:cs typeface="Arial" panose="020B0604020202020204" pitchFamily="34" charset="0"/>
+              </a:rPr>
+              <a:t> </a:t>
+            </a:r>
+            <a:r>
+              <a:rPr lang="en-US" sz="1200" dirty="0" err="1">
+                <a:latin typeface="Arial" panose="020B0604020202020204" pitchFamily="34" charset="0"/>
+                <a:cs typeface="Arial" panose="020B0604020202020204" pitchFamily="34" charset="0"/>
+              </a:rPr>
+              <a:t>en</a:t>
+            </a:r>
+            <a:r>
+              <a:rPr lang="en-US" sz="1200" dirty="0">
+                <a:latin typeface="Arial" panose="020B0604020202020204" pitchFamily="34" charset="0"/>
+                <a:cs typeface="Arial" panose="020B0604020202020204" pitchFamily="34" charset="0"/>
+              </a:rPr>
+              <a:t> la imagen, los ratios de </a:t>
+            </a:r>
+            <a:r>
+              <a:rPr lang="en-US" sz="1200" dirty="0" err="1">
+                <a:latin typeface="Arial" panose="020B0604020202020204" pitchFamily="34" charset="0"/>
+                <a:cs typeface="Arial" panose="020B0604020202020204" pitchFamily="34" charset="0"/>
+              </a:rPr>
+              <a:t>salida</a:t>
+            </a:r>
+            <a:r>
+              <a:rPr lang="en-US" sz="1200" dirty="0">
+                <a:latin typeface="Arial" panose="020B0604020202020204" pitchFamily="34" charset="0"/>
+                <a:cs typeface="Arial" panose="020B0604020202020204" pitchFamily="34" charset="0"/>
+              </a:rPr>
+              <a:t> son 0.5 </a:t>
+            </a:r>
+            <a:r>
+              <a:rPr lang="en-US" sz="1200" dirty="0" err="1">
+                <a:latin typeface="Arial" panose="020B0604020202020204" pitchFamily="34" charset="0"/>
+                <a:cs typeface="Arial" panose="020B0604020202020204" pitchFamily="34" charset="0"/>
+              </a:rPr>
+              <a:t>en</a:t>
+            </a:r>
+            <a:r>
+              <a:rPr lang="en-US" sz="1200" dirty="0">
+                <a:latin typeface="Arial" panose="020B0604020202020204" pitchFamily="34" charset="0"/>
+                <a:cs typeface="Arial" panose="020B0604020202020204" pitchFamily="34" charset="0"/>
+              </a:rPr>
+              <a:t> </a:t>
+            </a:r>
+            <a:r>
+              <a:rPr lang="en-US" sz="1200" dirty="0" err="1">
+                <a:latin typeface="Arial" panose="020B0604020202020204" pitchFamily="34" charset="0"/>
+                <a:cs typeface="Arial" panose="020B0604020202020204" pitchFamily="34" charset="0"/>
+              </a:rPr>
+              <a:t>el</a:t>
+            </a:r>
+            <a:r>
+              <a:rPr lang="en-US" sz="1200" dirty="0">
+                <a:latin typeface="Arial" panose="020B0604020202020204" pitchFamily="34" charset="0"/>
+                <a:cs typeface="Arial" panose="020B0604020202020204" pitchFamily="34" charset="0"/>
+              </a:rPr>
+              <a:t> </a:t>
+            </a:r>
+            <a:r>
+              <a:rPr lang="en-US" sz="1200" dirty="0" err="1">
+                <a:latin typeface="Arial" panose="020B0604020202020204" pitchFamily="34" charset="0"/>
+                <a:cs typeface="Arial" panose="020B0604020202020204" pitchFamily="34" charset="0"/>
+              </a:rPr>
+              <a:t>puerto</a:t>
+            </a:r>
+            <a:r>
+              <a:rPr lang="en-US" sz="1200" dirty="0">
+                <a:latin typeface="Arial" panose="020B0604020202020204" pitchFamily="34" charset="0"/>
+                <a:cs typeface="Arial" panose="020B0604020202020204" pitchFamily="34" charset="0"/>
+              </a:rPr>
+              <a:t> de </a:t>
+            </a:r>
+            <a:r>
+              <a:rPr lang="en-US" sz="1200" dirty="0" err="1">
+                <a:latin typeface="Arial" panose="020B0604020202020204" pitchFamily="34" charset="0"/>
+                <a:cs typeface="Arial" panose="020B0604020202020204" pitchFamily="34" charset="0"/>
+              </a:rPr>
+              <a:t>arriba</a:t>
+            </a:r>
+            <a:r>
+              <a:rPr lang="en-US" sz="1200" dirty="0">
+                <a:latin typeface="Arial" panose="020B0604020202020204" pitchFamily="34" charset="0"/>
+                <a:cs typeface="Arial" panose="020B0604020202020204" pitchFamily="34" charset="0"/>
+              </a:rPr>
+              <a:t> y 0.5 </a:t>
+            </a:r>
+            <a:r>
+              <a:rPr lang="en-US" sz="1200" dirty="0" err="1">
+                <a:latin typeface="Arial" panose="020B0604020202020204" pitchFamily="34" charset="0"/>
+                <a:cs typeface="Arial" panose="020B0604020202020204" pitchFamily="34" charset="0"/>
+              </a:rPr>
+              <a:t>en</a:t>
+            </a:r>
+            <a:r>
+              <a:rPr lang="en-US" sz="1200" dirty="0">
+                <a:latin typeface="Arial" panose="020B0604020202020204" pitchFamily="34" charset="0"/>
+                <a:cs typeface="Arial" panose="020B0604020202020204" pitchFamily="34" charset="0"/>
+              </a:rPr>
+              <a:t> </a:t>
+            </a:r>
+            <a:r>
+              <a:rPr lang="en-US" sz="1200" dirty="0" err="1">
+                <a:latin typeface="Arial" panose="020B0604020202020204" pitchFamily="34" charset="0"/>
+                <a:cs typeface="Arial" panose="020B0604020202020204" pitchFamily="34" charset="0"/>
+              </a:rPr>
+              <a:t>el</a:t>
+            </a:r>
+            <a:r>
+              <a:rPr lang="en-US" sz="1200" dirty="0">
+                <a:latin typeface="Arial" panose="020B0604020202020204" pitchFamily="34" charset="0"/>
+                <a:cs typeface="Arial" panose="020B0604020202020204" pitchFamily="34" charset="0"/>
+              </a:rPr>
+              <a:t> de </a:t>
+            </a:r>
+            <a:r>
+              <a:rPr lang="en-US" sz="1200" dirty="0" err="1">
+                <a:latin typeface="Arial" panose="020B0604020202020204" pitchFamily="34" charset="0"/>
+                <a:cs typeface="Arial" panose="020B0604020202020204" pitchFamily="34" charset="0"/>
+              </a:rPr>
+              <a:t>abajo</a:t>
+            </a:r>
+            <a:r>
+              <a:rPr lang="en-US" sz="1200" dirty="0">
+                <a:latin typeface="Arial" panose="020B0604020202020204" pitchFamily="34" charset="0"/>
+                <a:cs typeface="Arial" panose="020B0604020202020204" pitchFamily="34" charset="0"/>
+              </a:rPr>
+              <a:t>.</a:t>
             </a:r>
           </a:p>
           <a:p>
@@ -10667,27 +12307,62 @@
           </a:p>
           <a:p>
             <a:pPr algn="just"/>
-            <a:endParaRPr lang="en-US" sz="1200" dirty="0">
-              <a:latin typeface="Arial" panose="020B0604020202020204" pitchFamily="34" charset="0"/>
-              <a:cs typeface="Arial" panose="020B0604020202020204" pitchFamily="34" charset="0"/>
-            </a:endParaRPr>
-          </a:p>
-          <a:p>
-            <a:pPr algn="just"/>
-            <a:endParaRPr lang="en-US" sz="1200" dirty="0">
-              <a:latin typeface="Arial" panose="020B0604020202020204" pitchFamily="34" charset="0"/>
-              <a:cs typeface="Arial" panose="020B0604020202020204" pitchFamily="34" charset="0"/>
-            </a:endParaRPr>
-          </a:p>
-          <a:p>
-            <a:pPr algn="just"/>
-            <a:endParaRPr lang="en-US" sz="1200" dirty="0">
-              <a:latin typeface="Arial" panose="020B0604020202020204" pitchFamily="34" charset="0"/>
-              <a:cs typeface="Arial" panose="020B0604020202020204" pitchFamily="34" charset="0"/>
-            </a:endParaRPr>
-          </a:p>
-          <a:p>
-            <a:pPr algn="just"/>
+            <a:r>
+              <a:rPr lang="en-US" sz="1200" dirty="0">
+                <a:latin typeface="Arial" panose="020B0604020202020204" pitchFamily="34" charset="0"/>
+                <a:cs typeface="Arial" panose="020B0604020202020204" pitchFamily="34" charset="0"/>
+              </a:rPr>
+              <a:t>Ambos </a:t>
+            </a:r>
+            <a:r>
+              <a:rPr lang="en-US" sz="1200" dirty="0" err="1">
+                <a:latin typeface="Arial" panose="020B0604020202020204" pitchFamily="34" charset="0"/>
+                <a:cs typeface="Arial" panose="020B0604020202020204" pitchFamily="34" charset="0"/>
+              </a:rPr>
+              <a:t>casos</a:t>
+            </a:r>
+            <a:r>
+              <a:rPr lang="en-US" sz="1200" dirty="0">
+                <a:latin typeface="Arial" panose="020B0604020202020204" pitchFamily="34" charset="0"/>
+                <a:cs typeface="Arial" panose="020B0604020202020204" pitchFamily="34" charset="0"/>
+              </a:rPr>
+              <a:t> </a:t>
+            </a:r>
+            <a:r>
+              <a:rPr lang="en-US" sz="1200" dirty="0" err="1">
+                <a:latin typeface="Arial" panose="020B0604020202020204" pitchFamily="34" charset="0"/>
+                <a:cs typeface="Arial" panose="020B0604020202020204" pitchFamily="34" charset="0"/>
+              </a:rPr>
+              <a:t>presentan</a:t>
+            </a:r>
+            <a:r>
+              <a:rPr lang="en-US" sz="1200" dirty="0">
+                <a:latin typeface="Arial" panose="020B0604020202020204" pitchFamily="34" charset="0"/>
+                <a:cs typeface="Arial" panose="020B0604020202020204" pitchFamily="34" charset="0"/>
+              </a:rPr>
+              <a:t> una </a:t>
+            </a:r>
+            <a:r>
+              <a:rPr lang="en-US" sz="1200" dirty="0" err="1">
+                <a:latin typeface="Arial" panose="020B0604020202020204" pitchFamily="34" charset="0"/>
+                <a:cs typeface="Arial" panose="020B0604020202020204" pitchFamily="34" charset="0"/>
+              </a:rPr>
+              <a:t>pérdidas</a:t>
+            </a:r>
+            <a:r>
+              <a:rPr lang="en-US" sz="1200" dirty="0">
+                <a:latin typeface="Arial" panose="020B0604020202020204" pitchFamily="34" charset="0"/>
+                <a:cs typeface="Arial" panose="020B0604020202020204" pitchFamily="34" charset="0"/>
+              </a:rPr>
+              <a:t> de 0.18 </a:t>
+            </a:r>
+            <a:r>
+              <a:rPr lang="en-US" sz="1200" dirty="0" err="1">
+                <a:latin typeface="Arial" panose="020B0604020202020204" pitchFamily="34" charset="0"/>
+                <a:cs typeface="Arial" panose="020B0604020202020204" pitchFamily="34" charset="0"/>
+              </a:rPr>
+              <a:t>dB.</a:t>
+            </a:r>
             <a:endParaRPr lang="en-US" sz="1200" dirty="0">
               <a:latin typeface="Arial" panose="020B0604020202020204" pitchFamily="34" charset="0"/>
               <a:cs typeface="Arial" panose="020B0604020202020204" pitchFamily="34" charset="0"/>
@@ -10747,57 +12422,66 @@
           </a:p>
         </p:txBody>
       </p:sp>
-      <p:sp>
-        <p:nvSpPr>
-          <p:cNvPr id="8" name="CuadroTexto 7">
-            <a:extLst>
-              <a:ext uri="{FF2B5EF4-FFF2-40B4-BE49-F238E27FC236}">
-                <a16:creationId xmlns:a16="http://schemas.microsoft.com/office/drawing/2014/main" id="{1EF5BFDA-8EC1-8C73-A932-F36C4DB93C73}"/>
-              </a:ext>
-            </a:extLst>
-          </p:cNvPr>
-          <p:cNvSpPr txBox="1"/>
+      <p:pic>
+        <p:nvPicPr>
+          <p:cNvPr id="5" name="Imagen 4">
+            <a:extLst>
+              <a:ext uri="{FF2B5EF4-FFF2-40B4-BE49-F238E27FC236}">
+                <a16:creationId xmlns:a16="http://schemas.microsoft.com/office/drawing/2014/main" id="{76CC1458-F832-4764-B9E5-21219ACA32F5}"/>
+              </a:ext>
+            </a:extLst>
+          </p:cNvPr>
+          <p:cNvPicPr>
+            <a:picLocks noChangeAspect="1"/>
+          </p:cNvPicPr>
           <p:nvPr/>
-        </p:nvSpPr>
+        </p:nvPicPr>
+        <p:blipFill>
+          <a:blip r:embed="rId5"/>
+          <a:stretch>
+            <a:fillRect/>
+          </a:stretch>
+        </p:blipFill>
         <p:spPr>
           <a:xfrm>
-            <a:off x="2286000" y="2671278"/>
-            <a:ext cx="7718580" cy="923330"/>
+            <a:off x="1063952" y="1659292"/>
+            <a:ext cx="4577696" cy="2905648"/>
           </a:xfrm>
           <a:prstGeom prst="rect">
             <a:avLst/>
           </a:prstGeom>
-          <a:noFill/>
         </p:spPr>
-        <p:txBody>
-          <a:bodyPr wrap="square" rtlCol="0">
-            <a:spAutoFit/>
-          </a:bodyPr>
-          <a:lstStyle/>
-          <a:p>
-            <a:pPr algn="ctr"/>
-            <a:r>
-              <a:rPr lang="en-US" b="1" dirty="0"/>
-              <a:t>deep</a:t>
-            </a:r>
-            <a:r>
-              <a:rPr lang="en-US" dirty="0"/>
-              <a:t> waveguide</a:t>
-            </a:r>
-          </a:p>
-          <a:p>
-            <a:pPr algn="ctr"/>
-            <a:endParaRPr lang="en-US" dirty="0"/>
-          </a:p>
-          <a:p>
-            <a:pPr algn="ctr"/>
-            <a:r>
-              <a:rPr lang="en-US" dirty="0"/>
-              <a:t>Paste propagation plots and output text here</a:t>
-            </a:r>
-          </a:p>
-        </p:txBody>
-      </p:sp>
+      </p:pic>
+      <p:pic>
+        <p:nvPicPr>
+          <p:cNvPr id="9" name="Imagen 8">
+            <a:extLst>
+              <a:ext uri="{FF2B5EF4-FFF2-40B4-BE49-F238E27FC236}">
+                <a16:creationId xmlns:a16="http://schemas.microsoft.com/office/drawing/2014/main" id="{3E29CCFB-E73C-4E0A-A736-9AE15525705B}"/>
+              </a:ext>
+            </a:extLst>
+          </p:cNvPr>
+          <p:cNvPicPr>
+            <a:picLocks noChangeAspect="1"/>
+          </p:cNvPicPr>
+          <p:nvPr/>
+        </p:nvPicPr>
+        <p:blipFill>
+          <a:blip r:embed="rId6"/>
+          <a:stretch>
+            <a:fillRect/>
+          </a:stretch>
+        </p:blipFill>
+        <p:spPr>
+          <a:xfrm>
+            <a:off x="6691764" y="1574023"/>
+            <a:ext cx="4436284" cy="3070168"/>
+          </a:xfrm>
+          <a:prstGeom prst="rect">
+            <a:avLst/>
+          </a:prstGeom>
+        </p:spPr>
+      </p:pic>
     </p:spTree>
     <p:extLst>
       <p:ext uri="{BB962C8B-B14F-4D97-AF65-F5344CB8AC3E}">
@@ -10812,6 +12496,1117 @@
 </file>
 
 <file path=ppt/slides/slide6.xml><?xml version="1.0" encoding="utf-8"?>
+<p:sld xmlns:a="http://schemas.openxmlformats.org/drawingml/2006/main" xmlns:r="http://schemas.openxmlformats.org/officeDocument/2006/relationships" xmlns:p="http://schemas.openxmlformats.org/presentationml/2006/main">
+  <p:cSld>
+    <p:spTree>
+      <p:nvGrpSpPr>
+        <p:cNvPr id="1" name="">
+          <a:extLst>
+            <a:ext uri="{FF2B5EF4-FFF2-40B4-BE49-F238E27FC236}">
+              <a16:creationId xmlns:a16="http://schemas.microsoft.com/office/drawing/2014/main" id="{0D90AC3D-36B7-D786-3825-B4DD6EADD689}"/>
+            </a:ext>
+          </a:extLst>
+        </p:cNvPr>
+        <p:cNvGrpSpPr/>
+        <p:nvPr/>
+      </p:nvGrpSpPr>
+      <p:grpSpPr>
+        <a:xfrm>
+          <a:off x="0" y="0"/>
+          <a:ext cx="0" cy="0"/>
+          <a:chOff x="0" y="0"/>
+          <a:chExt cx="0" cy="0"/>
+        </a:xfrm>
+      </p:grpSpPr>
+      <p:sp>
+        <p:nvSpPr>
+          <p:cNvPr id="16" name="object 16">
+            <a:extLst>
+              <a:ext uri="{FF2B5EF4-FFF2-40B4-BE49-F238E27FC236}">
+                <a16:creationId xmlns:a16="http://schemas.microsoft.com/office/drawing/2014/main" id="{6AA2E789-F7AE-F068-274C-E0F13A22DBCA}"/>
+              </a:ext>
+            </a:extLst>
+          </p:cNvPr>
+          <p:cNvSpPr txBox="1">
+            <a:spLocks noGrp="1"/>
+          </p:cNvSpPr>
+          <p:nvPr>
+            <p:ph type="title"/>
+          </p:nvPr>
+        </p:nvSpPr>
+        <p:spPr>
+          <a:xfrm>
+            <a:off x="685800" y="408883"/>
+            <a:ext cx="10994410" cy="705321"/>
+          </a:xfrm>
+          <a:prstGeom prst="rect">
+            <a:avLst/>
+          </a:prstGeom>
+        </p:spPr>
+        <p:txBody>
+          <a:bodyPr vert="horz" wrap="square" lIns="0" tIns="12700" rIns="0" bIns="0" rtlCol="0">
+            <a:spAutoFit/>
+          </a:bodyPr>
+          <a:lstStyle/>
+          <a:p>
+            <a:pPr marL="12700">
+              <a:lnSpc>
+                <a:spcPct val="100000"/>
+              </a:lnSpc>
+              <a:spcBef>
+                <a:spcPts val="100"/>
+              </a:spcBef>
+            </a:pPr>
+            <a:r>
+              <a:rPr lang="en-US" sz="2500" dirty="0"/>
+              <a:t>Learning outcome #2 – 2x2 Directional Coupler</a:t>
+            </a:r>
+            <a:br>
+              <a:rPr lang="en-US" sz="2500" spc="-5" dirty="0">
+                <a:latin typeface="+mj-lt"/>
+                <a:cs typeface="Lucida Sans"/>
+              </a:rPr>
+            </a:br>
+            <a:r>
+              <a:rPr lang="en-US" b="0" dirty="0"/>
+              <a:t>Gap 0.6 - 1.6 µm (step 0.1 µm) – Wavelength 1.55 µm </a:t>
+            </a:r>
+            <a:endParaRPr lang="en-US" sz="2500" b="0" dirty="0">
+              <a:latin typeface="+mj-lt"/>
+              <a:cs typeface="Lucida Sans"/>
+            </a:endParaRPr>
+          </a:p>
+        </p:txBody>
+      </p:sp>
+      <p:pic>
+        <p:nvPicPr>
+          <p:cNvPr id="83" name="Gráfico 82">
+            <a:extLst>
+              <a:ext uri="{FF2B5EF4-FFF2-40B4-BE49-F238E27FC236}">
+                <a16:creationId xmlns:a16="http://schemas.microsoft.com/office/drawing/2014/main" id="{3AEAD01B-7604-8009-5694-A556497AEF25}"/>
+              </a:ext>
+            </a:extLst>
+          </p:cNvPr>
+          <p:cNvPicPr>
+            <a:picLocks noChangeAspect="1"/>
+          </p:cNvPicPr>
+          <p:nvPr/>
+        </p:nvPicPr>
+        <p:blipFill>
+          <a:blip r:embed="rId3">
+            <a:extLst>
+              <a:ext uri="{96DAC541-7B7A-43D3-8B79-37D633B846F1}">
+                <asvg:svgBlip xmlns:asvg="http://schemas.microsoft.com/office/drawing/2016/SVG/main" r:embed="rId4"/>
+              </a:ext>
+            </a:extLst>
+          </a:blip>
+          <a:stretch>
+            <a:fillRect/>
+          </a:stretch>
+        </p:blipFill>
+        <p:spPr>
+          <a:xfrm>
+            <a:off x="5045006" y="6356057"/>
+            <a:ext cx="6409575" cy="363174"/>
+          </a:xfrm>
+          <a:prstGeom prst="rect">
+            <a:avLst/>
+          </a:prstGeom>
+        </p:spPr>
+      </p:pic>
+      <p:sp>
+        <p:nvSpPr>
+          <p:cNvPr id="84" name="Marcador de número de diapositiva 83">
+            <a:extLst>
+              <a:ext uri="{FF2B5EF4-FFF2-40B4-BE49-F238E27FC236}">
+                <a16:creationId xmlns:a16="http://schemas.microsoft.com/office/drawing/2014/main" id="{696E3846-1BD2-4F23-48AA-C7AF2A1EE6EB}"/>
+              </a:ext>
+            </a:extLst>
+          </p:cNvPr>
+          <p:cNvSpPr>
+            <a:spLocks noGrp="1"/>
+          </p:cNvSpPr>
+          <p:nvPr>
+            <p:ph type="sldNum" sz="quarter" idx="7"/>
+          </p:nvPr>
+        </p:nvSpPr>
+        <p:spPr/>
+        <p:txBody>
+          <a:bodyPr/>
+          <a:lstStyle/>
+          <a:p>
+            <a:fld id="{B6F15528-21DE-4FAA-801E-634DDDAF4B2B}" type="slidenum">
+              <a:rPr lang="es-ES" smtClean="0"/>
+              <a:t>6</a:t>
+            </a:fld>
+            <a:endParaRPr lang="es-ES"/>
+          </a:p>
+        </p:txBody>
+      </p:sp>
+      <p:sp>
+        <p:nvSpPr>
+          <p:cNvPr id="3" name="Marcador de pie de página 2">
+            <a:extLst>
+              <a:ext uri="{FF2B5EF4-FFF2-40B4-BE49-F238E27FC236}">
+                <a16:creationId xmlns:a16="http://schemas.microsoft.com/office/drawing/2014/main" id="{E32C0E2B-75B6-4768-A4C7-F165A264DA0B}"/>
+              </a:ext>
+            </a:extLst>
+          </p:cNvPr>
+          <p:cNvSpPr>
+            <a:spLocks noGrp="1"/>
+          </p:cNvSpPr>
+          <p:nvPr>
+            <p:ph type="ftr" sz="quarter" idx="5"/>
+          </p:nvPr>
+        </p:nvSpPr>
+        <p:spPr/>
+        <p:txBody>
+          <a:bodyPr/>
+          <a:lstStyle/>
+          <a:p>
+            <a:pPr marL="12700">
+              <a:spcBef>
+                <a:spcPts val="15"/>
+              </a:spcBef>
+            </a:pPr>
+            <a:r>
+              <a:rPr lang="es-ES" spc="-5"/>
+              <a:t>LAB 2.0. COUPLERS</a:t>
+            </a:r>
+            <a:endParaRPr lang="es-ES" spc="-5" dirty="0"/>
+          </a:p>
+        </p:txBody>
+      </p:sp>
+      <p:sp>
+        <p:nvSpPr>
+          <p:cNvPr id="2" name="CuadroTexto 1">
+            <a:extLst>
+              <a:ext uri="{FF2B5EF4-FFF2-40B4-BE49-F238E27FC236}">
+                <a16:creationId xmlns:a16="http://schemas.microsoft.com/office/drawing/2014/main" id="{82A62DD6-5488-72A1-9926-0CAEE59089A9}"/>
+              </a:ext>
+            </a:extLst>
+          </p:cNvPr>
+          <p:cNvSpPr txBox="1"/>
+          <p:nvPr/>
+        </p:nvSpPr>
+        <p:spPr>
+          <a:xfrm>
+            <a:off x="609441" y="4860334"/>
+            <a:ext cx="11199971" cy="1569660"/>
+          </a:xfrm>
+          <a:prstGeom prst="rect">
+            <a:avLst/>
+          </a:prstGeom>
+          <a:solidFill>
+            <a:schemeClr val="bg1">
+              <a:lumMod val="95000"/>
+            </a:schemeClr>
+          </a:solidFill>
+          <a:ln w="28575">
+            <a:solidFill>
+              <a:srgbClr val="E0700D"/>
+            </a:solidFill>
+          </a:ln>
+        </p:spPr>
+        <p:txBody>
+          <a:bodyPr wrap="square" rtlCol="0">
+            <a:spAutoFit/>
+          </a:bodyPr>
+          <a:lstStyle/>
+          <a:p>
+            <a:pPr algn="just"/>
+            <a:r>
+              <a:rPr lang="en-US" sz="1200" dirty="0" err="1">
+                <a:latin typeface="Arial" panose="020B0604020202020204" pitchFamily="34" charset="0"/>
+                <a:cs typeface="Arial" panose="020B0604020202020204" pitchFamily="34" charset="0"/>
+              </a:rPr>
+              <a:t>Hace</a:t>
+            </a:r>
+            <a:r>
+              <a:rPr lang="en-US" sz="1200" dirty="0">
+                <a:latin typeface="Arial" panose="020B0604020202020204" pitchFamily="34" charset="0"/>
+                <a:cs typeface="Arial" panose="020B0604020202020204" pitchFamily="34" charset="0"/>
+              </a:rPr>
+              <a:t> </a:t>
+            </a:r>
+            <a:r>
+              <a:rPr lang="en-US" sz="1200" dirty="0" err="1">
+                <a:latin typeface="Arial" panose="020B0604020202020204" pitchFamily="34" charset="0"/>
+                <a:cs typeface="Arial" panose="020B0604020202020204" pitchFamily="34" charset="0"/>
+              </a:rPr>
+              <a:t>todos</a:t>
+            </a:r>
+            <a:r>
+              <a:rPr lang="en-US" sz="1200" dirty="0">
+                <a:latin typeface="Arial" panose="020B0604020202020204" pitchFamily="34" charset="0"/>
+                <a:cs typeface="Arial" panose="020B0604020202020204" pitchFamily="34" charset="0"/>
+              </a:rPr>
+              <a:t> los </a:t>
+            </a:r>
+            <a:r>
+              <a:rPr lang="en-US" sz="1200" dirty="0" err="1">
+                <a:latin typeface="Arial" panose="020B0604020202020204" pitchFamily="34" charset="0"/>
+                <a:cs typeface="Arial" panose="020B0604020202020204" pitchFamily="34" charset="0"/>
+              </a:rPr>
+              <a:t>casos</a:t>
+            </a:r>
+            <a:r>
+              <a:rPr lang="en-US" sz="1200" dirty="0">
+                <a:latin typeface="Arial" panose="020B0604020202020204" pitchFamily="34" charset="0"/>
+                <a:cs typeface="Arial" panose="020B0604020202020204" pitchFamily="34" charset="0"/>
+              </a:rPr>
+              <a:t> y </a:t>
+            </a:r>
+            <a:r>
+              <a:rPr lang="en-US" sz="1200" dirty="0" err="1">
+                <a:latin typeface="Arial" panose="020B0604020202020204" pitchFamily="34" charset="0"/>
+                <a:cs typeface="Arial" panose="020B0604020202020204" pitchFamily="34" charset="0"/>
+              </a:rPr>
+              <a:t>apuntarlos</a:t>
+            </a:r>
+            <a:r>
+              <a:rPr lang="en-US" sz="1200" dirty="0">
+                <a:latin typeface="Arial" panose="020B0604020202020204" pitchFamily="34" charset="0"/>
+                <a:cs typeface="Arial" panose="020B0604020202020204" pitchFamily="34" charset="0"/>
+              </a:rPr>
+              <a:t> </a:t>
+            </a:r>
+            <a:r>
+              <a:rPr lang="en-US" sz="1200" dirty="0" err="1">
+                <a:latin typeface="Arial" panose="020B0604020202020204" pitchFamily="34" charset="0"/>
+                <a:cs typeface="Arial" panose="020B0604020202020204" pitchFamily="34" charset="0"/>
+              </a:rPr>
+              <a:t>en</a:t>
+            </a:r>
+            <a:r>
+              <a:rPr lang="en-US" sz="1200" dirty="0">
+                <a:latin typeface="Arial" panose="020B0604020202020204" pitchFamily="34" charset="0"/>
+                <a:cs typeface="Arial" panose="020B0604020202020204" pitchFamily="34" charset="0"/>
+              </a:rPr>
+              <a:t> la table </a:t>
+            </a:r>
+            <a:r>
+              <a:rPr lang="en-US" sz="1200" dirty="0" err="1">
+                <a:latin typeface="Arial" panose="020B0604020202020204" pitchFamily="34" charset="0"/>
+                <a:cs typeface="Arial" panose="020B0604020202020204" pitchFamily="34" charset="0"/>
+              </a:rPr>
+              <a:t>manuelamente</a:t>
+            </a:r>
+            <a:r>
+              <a:rPr lang="en-US" sz="1200">
+                <a:latin typeface="Arial" panose="020B0604020202020204" pitchFamily="34" charset="0"/>
+                <a:cs typeface="Arial" panose="020B0604020202020204" pitchFamily="34" charset="0"/>
+              </a:rPr>
+              <a:t>.</a:t>
+            </a:r>
+            <a:endParaRPr lang="en-US" sz="1200" dirty="0">
+              <a:latin typeface="Arial" panose="020B0604020202020204" pitchFamily="34" charset="0"/>
+              <a:cs typeface="Arial" panose="020B0604020202020204" pitchFamily="34" charset="0"/>
+            </a:endParaRPr>
+          </a:p>
+          <a:p>
+            <a:pPr algn="just"/>
+            <a:endParaRPr lang="en-US" sz="1200" dirty="0">
+              <a:latin typeface="Arial" panose="020B0604020202020204" pitchFamily="34" charset="0"/>
+              <a:cs typeface="Arial" panose="020B0604020202020204" pitchFamily="34" charset="0"/>
+            </a:endParaRPr>
+          </a:p>
+          <a:p>
+            <a:pPr algn="just"/>
+            <a:endParaRPr lang="en-US" sz="1200" dirty="0">
+              <a:latin typeface="Arial" panose="020B0604020202020204" pitchFamily="34" charset="0"/>
+              <a:cs typeface="Arial" panose="020B0604020202020204" pitchFamily="34" charset="0"/>
+            </a:endParaRPr>
+          </a:p>
+          <a:p>
+            <a:pPr algn="just"/>
+            <a:endParaRPr lang="en-US" sz="1200" dirty="0">
+              <a:latin typeface="Arial" panose="020B0604020202020204" pitchFamily="34" charset="0"/>
+              <a:cs typeface="Arial" panose="020B0604020202020204" pitchFamily="34" charset="0"/>
+            </a:endParaRPr>
+          </a:p>
+          <a:p>
+            <a:pPr algn="just"/>
+            <a:endParaRPr lang="en-US" sz="1200" dirty="0">
+              <a:latin typeface="Arial" panose="020B0604020202020204" pitchFamily="34" charset="0"/>
+              <a:cs typeface="Arial" panose="020B0604020202020204" pitchFamily="34" charset="0"/>
+            </a:endParaRPr>
+          </a:p>
+          <a:p>
+            <a:pPr algn="just"/>
+            <a:endParaRPr lang="en-US" sz="1200" dirty="0">
+              <a:latin typeface="Arial" panose="020B0604020202020204" pitchFamily="34" charset="0"/>
+              <a:cs typeface="Arial" panose="020B0604020202020204" pitchFamily="34" charset="0"/>
+            </a:endParaRPr>
+          </a:p>
+          <a:p>
+            <a:pPr algn="just"/>
+            <a:endParaRPr lang="en-US" sz="1200" dirty="0">
+              <a:latin typeface="Arial" panose="020B0604020202020204" pitchFamily="34" charset="0"/>
+              <a:cs typeface="Arial" panose="020B0604020202020204" pitchFamily="34" charset="0"/>
+            </a:endParaRPr>
+          </a:p>
+          <a:p>
+            <a:pPr algn="just"/>
+            <a:endParaRPr lang="en-US" sz="1200" dirty="0">
+              <a:latin typeface="Arial" panose="020B0604020202020204" pitchFamily="34" charset="0"/>
+              <a:cs typeface="Arial" panose="020B0604020202020204" pitchFamily="34" charset="0"/>
+            </a:endParaRPr>
+          </a:p>
+        </p:txBody>
+      </p:sp>
+      <p:sp>
+        <p:nvSpPr>
+          <p:cNvPr id="7" name="Rectángulo 6">
+            <a:extLst>
+              <a:ext uri="{FF2B5EF4-FFF2-40B4-BE49-F238E27FC236}">
+                <a16:creationId xmlns:a16="http://schemas.microsoft.com/office/drawing/2014/main" id="{FBC7D187-267A-ADD4-764C-D3820B8ED302}"/>
+              </a:ext>
+            </a:extLst>
+          </p:cNvPr>
+          <p:cNvSpPr/>
+          <p:nvPr/>
+        </p:nvSpPr>
+        <p:spPr>
+          <a:xfrm>
+            <a:off x="609441" y="1418373"/>
+            <a:ext cx="11199971" cy="3306028"/>
+          </a:xfrm>
+          <a:prstGeom prst="rect">
+            <a:avLst/>
+          </a:prstGeom>
+          <a:noFill/>
+          <a:ln w="28575">
+            <a:solidFill>
+              <a:srgbClr val="E0700D"/>
+            </a:solidFill>
+          </a:ln>
+        </p:spPr>
+        <p:style>
+          <a:lnRef idx="2">
+            <a:schemeClr val="accent1">
+              <a:shade val="15000"/>
+            </a:schemeClr>
+          </a:lnRef>
+          <a:fillRef idx="1">
+            <a:schemeClr val="accent1"/>
+          </a:fillRef>
+          <a:effectRef idx="0">
+            <a:schemeClr val="accent1"/>
+          </a:effectRef>
+          <a:fontRef idx="minor">
+            <a:schemeClr val="lt1"/>
+          </a:fontRef>
+        </p:style>
+        <p:txBody>
+          <a:bodyPr rtlCol="0" anchor="ctr"/>
+          <a:lstStyle/>
+          <a:p>
+            <a:pPr algn="ctr"/>
+            <a:endParaRPr lang="en-US"/>
+          </a:p>
+        </p:txBody>
+      </p:sp>
+      <p:pic>
+        <p:nvPicPr>
+          <p:cNvPr id="6" name="Imagen 5">
+            <a:extLst>
+              <a:ext uri="{FF2B5EF4-FFF2-40B4-BE49-F238E27FC236}">
+                <a16:creationId xmlns:a16="http://schemas.microsoft.com/office/drawing/2014/main" id="{12EED1A6-47EF-4A41-BFFE-2583DBD8E56C}"/>
+              </a:ext>
+            </a:extLst>
+          </p:cNvPr>
+          <p:cNvPicPr>
+            <a:picLocks noChangeAspect="1"/>
+          </p:cNvPicPr>
+          <p:nvPr/>
+        </p:nvPicPr>
+        <p:blipFill>
+          <a:blip r:embed="rId5"/>
+          <a:stretch>
+            <a:fillRect/>
+          </a:stretch>
+        </p:blipFill>
+        <p:spPr>
+          <a:xfrm>
+            <a:off x="1371600" y="1435306"/>
+            <a:ext cx="2676664" cy="3262981"/>
+          </a:xfrm>
+          <a:prstGeom prst="rect">
+            <a:avLst/>
+          </a:prstGeom>
+        </p:spPr>
+      </p:pic>
+      <p:graphicFrame>
+        <p:nvGraphicFramePr>
+          <p:cNvPr id="11" name="Tabla 11">
+            <a:extLst>
+              <a:ext uri="{FF2B5EF4-FFF2-40B4-BE49-F238E27FC236}">
+                <a16:creationId xmlns:a16="http://schemas.microsoft.com/office/drawing/2014/main" id="{A6BBFF76-AF02-47E2-AA58-6E975A0E8E59}"/>
+              </a:ext>
+            </a:extLst>
+          </p:cNvPr>
+          <p:cNvGraphicFramePr>
+            <a:graphicFrameLocks noGrp="1"/>
+          </p:cNvGraphicFramePr>
+          <p:nvPr>
+            <p:extLst>
+              <p:ext uri="{D42A27DB-BD31-4B8C-83A1-F6EECF244321}">
+                <p14:modId xmlns:p14="http://schemas.microsoft.com/office/powerpoint/2010/main" val="2144816584"/>
+              </p:ext>
+            </p:extLst>
+          </p:nvPr>
+        </p:nvGraphicFramePr>
+        <p:xfrm>
+          <a:off x="6035538" y="60961"/>
+          <a:ext cx="4216400" cy="4663440"/>
+        </p:xfrm>
+        <a:graphic>
+          <a:graphicData uri="http://schemas.openxmlformats.org/drawingml/2006/table">
+            <a:tbl>
+              <a:tblPr firstRow="1" bandRow="1">
+                <a:tableStyleId>{5C22544A-7EE6-4342-B048-85BDC9FD1C3A}</a:tableStyleId>
+              </a:tblPr>
+              <a:tblGrid>
+                <a:gridCol w="1054100">
+                  <a:extLst>
+                    <a:ext uri="{9D8B030D-6E8A-4147-A177-3AD203B41FA5}">
+                      <a16:colId xmlns:a16="http://schemas.microsoft.com/office/drawing/2014/main" val="1940948963"/>
+                    </a:ext>
+                  </a:extLst>
+                </a:gridCol>
+                <a:gridCol w="1054100">
+                  <a:extLst>
+                    <a:ext uri="{9D8B030D-6E8A-4147-A177-3AD203B41FA5}">
+                      <a16:colId xmlns:a16="http://schemas.microsoft.com/office/drawing/2014/main" val="38804044"/>
+                    </a:ext>
+                  </a:extLst>
+                </a:gridCol>
+                <a:gridCol w="1054100">
+                  <a:extLst>
+                    <a:ext uri="{9D8B030D-6E8A-4147-A177-3AD203B41FA5}">
+                      <a16:colId xmlns:a16="http://schemas.microsoft.com/office/drawing/2014/main" val="3236221254"/>
+                    </a:ext>
+                  </a:extLst>
+                </a:gridCol>
+                <a:gridCol w="1054100">
+                  <a:extLst>
+                    <a:ext uri="{9D8B030D-6E8A-4147-A177-3AD203B41FA5}">
+                      <a16:colId xmlns:a16="http://schemas.microsoft.com/office/drawing/2014/main" val="3664213930"/>
+                    </a:ext>
+                  </a:extLst>
+                </a:gridCol>
+              </a:tblGrid>
+              <a:tr h="233962">
+                <a:tc>
+                  <a:txBody>
+                    <a:bodyPr/>
+                    <a:lstStyle/>
+                    <a:p>
+                      <a:r>
+                        <a:rPr lang="es-ES" dirty="0"/>
+                        <a:t>GAP (</a:t>
+                      </a:r>
+                      <a:r>
+                        <a:rPr lang="es-ES" dirty="0" err="1"/>
+                        <a:t>um</a:t>
+                      </a:r>
+                      <a:r>
+                        <a:rPr lang="es-ES" dirty="0"/>
+                        <a:t>)</a:t>
+                      </a:r>
+                    </a:p>
+                  </a:txBody>
+                  <a:tcPr/>
+                </a:tc>
+                <a:tc>
+                  <a:txBody>
+                    <a:bodyPr/>
+                    <a:lstStyle/>
+                    <a:p>
+                      <a:r>
+                        <a:rPr lang="es-ES" dirty="0"/>
+                        <a:t>LOSSES (dB)</a:t>
+                      </a:r>
+                    </a:p>
+                  </a:txBody>
+                  <a:tcPr/>
+                </a:tc>
+                <a:tc>
+                  <a:txBody>
+                    <a:bodyPr/>
+                    <a:lstStyle/>
+                    <a:p>
+                      <a:r>
+                        <a:rPr lang="es-ES" dirty="0" err="1"/>
+                        <a:t>L_pi</a:t>
+                      </a:r>
+                      <a:r>
+                        <a:rPr lang="es-ES" dirty="0"/>
+                        <a:t> RATIO</a:t>
+                      </a:r>
+                    </a:p>
+                  </a:txBody>
+                  <a:tcPr/>
+                </a:tc>
+                <a:tc>
+                  <a:txBody>
+                    <a:bodyPr/>
+                    <a:lstStyle/>
+                    <a:p>
+                      <a:r>
+                        <a:rPr lang="es-ES" dirty="0" err="1"/>
+                        <a:t>L_pi</a:t>
+                      </a:r>
+                      <a:r>
+                        <a:rPr lang="es-ES" dirty="0"/>
+                        <a:t>/2 RATIO</a:t>
+                      </a:r>
+                    </a:p>
+                  </a:txBody>
+                  <a:tcPr/>
+                </a:tc>
+                <a:extLst>
+                  <a:ext uri="{0D108BD9-81ED-4DB2-BD59-A6C34878D82A}">
+                    <a16:rowId xmlns:a16="http://schemas.microsoft.com/office/drawing/2014/main" val="2740672354"/>
+                  </a:ext>
+                </a:extLst>
+              </a:tr>
+              <a:tr h="233962">
+                <a:tc>
+                  <a:txBody>
+                    <a:bodyPr/>
+                    <a:lstStyle/>
+                    <a:p>
+                      <a:endParaRPr lang="es-ES" dirty="0"/>
+                    </a:p>
+                  </a:txBody>
+                  <a:tcPr/>
+                </a:tc>
+                <a:tc>
+                  <a:txBody>
+                    <a:bodyPr/>
+                    <a:lstStyle/>
+                    <a:p>
+                      <a:endParaRPr lang="es-ES"/>
+                    </a:p>
+                  </a:txBody>
+                  <a:tcPr/>
+                </a:tc>
+                <a:tc>
+                  <a:txBody>
+                    <a:bodyPr/>
+                    <a:lstStyle/>
+                    <a:p>
+                      <a:endParaRPr lang="es-ES"/>
+                    </a:p>
+                  </a:txBody>
+                  <a:tcPr/>
+                </a:tc>
+                <a:tc>
+                  <a:txBody>
+                    <a:bodyPr/>
+                    <a:lstStyle/>
+                    <a:p>
+                      <a:endParaRPr lang="es-ES"/>
+                    </a:p>
+                  </a:txBody>
+                  <a:tcPr/>
+                </a:tc>
+                <a:extLst>
+                  <a:ext uri="{0D108BD9-81ED-4DB2-BD59-A6C34878D82A}">
+                    <a16:rowId xmlns:a16="http://schemas.microsoft.com/office/drawing/2014/main" val="1822894246"/>
+                  </a:ext>
+                </a:extLst>
+              </a:tr>
+              <a:tr h="233962">
+                <a:tc>
+                  <a:txBody>
+                    <a:bodyPr/>
+                    <a:lstStyle/>
+                    <a:p>
+                      <a:endParaRPr lang="es-ES"/>
+                    </a:p>
+                  </a:txBody>
+                  <a:tcPr/>
+                </a:tc>
+                <a:tc>
+                  <a:txBody>
+                    <a:bodyPr/>
+                    <a:lstStyle/>
+                    <a:p>
+                      <a:endParaRPr lang="es-ES"/>
+                    </a:p>
+                  </a:txBody>
+                  <a:tcPr/>
+                </a:tc>
+                <a:tc>
+                  <a:txBody>
+                    <a:bodyPr/>
+                    <a:lstStyle/>
+                    <a:p>
+                      <a:endParaRPr lang="es-ES"/>
+                    </a:p>
+                  </a:txBody>
+                  <a:tcPr/>
+                </a:tc>
+                <a:tc>
+                  <a:txBody>
+                    <a:bodyPr/>
+                    <a:lstStyle/>
+                    <a:p>
+                      <a:endParaRPr lang="es-ES"/>
+                    </a:p>
+                  </a:txBody>
+                  <a:tcPr/>
+                </a:tc>
+                <a:extLst>
+                  <a:ext uri="{0D108BD9-81ED-4DB2-BD59-A6C34878D82A}">
+                    <a16:rowId xmlns:a16="http://schemas.microsoft.com/office/drawing/2014/main" val="4160623705"/>
+                  </a:ext>
+                </a:extLst>
+              </a:tr>
+              <a:tr h="233962">
+                <a:tc>
+                  <a:txBody>
+                    <a:bodyPr/>
+                    <a:lstStyle/>
+                    <a:p>
+                      <a:endParaRPr lang="es-ES"/>
+                    </a:p>
+                  </a:txBody>
+                  <a:tcPr/>
+                </a:tc>
+                <a:tc>
+                  <a:txBody>
+                    <a:bodyPr/>
+                    <a:lstStyle/>
+                    <a:p>
+                      <a:endParaRPr lang="es-ES"/>
+                    </a:p>
+                  </a:txBody>
+                  <a:tcPr/>
+                </a:tc>
+                <a:tc>
+                  <a:txBody>
+                    <a:bodyPr/>
+                    <a:lstStyle/>
+                    <a:p>
+                      <a:endParaRPr lang="es-ES"/>
+                    </a:p>
+                  </a:txBody>
+                  <a:tcPr/>
+                </a:tc>
+                <a:tc>
+                  <a:txBody>
+                    <a:bodyPr/>
+                    <a:lstStyle/>
+                    <a:p>
+                      <a:endParaRPr lang="es-ES"/>
+                    </a:p>
+                  </a:txBody>
+                  <a:tcPr/>
+                </a:tc>
+                <a:extLst>
+                  <a:ext uri="{0D108BD9-81ED-4DB2-BD59-A6C34878D82A}">
+                    <a16:rowId xmlns:a16="http://schemas.microsoft.com/office/drawing/2014/main" val="1584186772"/>
+                  </a:ext>
+                </a:extLst>
+              </a:tr>
+              <a:tr h="233962">
+                <a:tc>
+                  <a:txBody>
+                    <a:bodyPr/>
+                    <a:lstStyle/>
+                    <a:p>
+                      <a:endParaRPr lang="es-ES"/>
+                    </a:p>
+                  </a:txBody>
+                  <a:tcPr/>
+                </a:tc>
+                <a:tc>
+                  <a:txBody>
+                    <a:bodyPr/>
+                    <a:lstStyle/>
+                    <a:p>
+                      <a:endParaRPr lang="es-ES"/>
+                    </a:p>
+                  </a:txBody>
+                  <a:tcPr/>
+                </a:tc>
+                <a:tc>
+                  <a:txBody>
+                    <a:bodyPr/>
+                    <a:lstStyle/>
+                    <a:p>
+                      <a:endParaRPr lang="es-ES"/>
+                    </a:p>
+                  </a:txBody>
+                  <a:tcPr/>
+                </a:tc>
+                <a:tc>
+                  <a:txBody>
+                    <a:bodyPr/>
+                    <a:lstStyle/>
+                    <a:p>
+                      <a:endParaRPr lang="es-ES"/>
+                    </a:p>
+                  </a:txBody>
+                  <a:tcPr/>
+                </a:tc>
+                <a:extLst>
+                  <a:ext uri="{0D108BD9-81ED-4DB2-BD59-A6C34878D82A}">
+                    <a16:rowId xmlns:a16="http://schemas.microsoft.com/office/drawing/2014/main" val="835796219"/>
+                  </a:ext>
+                </a:extLst>
+              </a:tr>
+              <a:tr h="233962">
+                <a:tc>
+                  <a:txBody>
+                    <a:bodyPr/>
+                    <a:lstStyle/>
+                    <a:p>
+                      <a:endParaRPr lang="es-ES"/>
+                    </a:p>
+                  </a:txBody>
+                  <a:tcPr/>
+                </a:tc>
+                <a:tc>
+                  <a:txBody>
+                    <a:bodyPr/>
+                    <a:lstStyle/>
+                    <a:p>
+                      <a:endParaRPr lang="es-ES"/>
+                    </a:p>
+                  </a:txBody>
+                  <a:tcPr/>
+                </a:tc>
+                <a:tc>
+                  <a:txBody>
+                    <a:bodyPr/>
+                    <a:lstStyle/>
+                    <a:p>
+                      <a:endParaRPr lang="es-ES"/>
+                    </a:p>
+                  </a:txBody>
+                  <a:tcPr/>
+                </a:tc>
+                <a:tc>
+                  <a:txBody>
+                    <a:bodyPr/>
+                    <a:lstStyle/>
+                    <a:p>
+                      <a:endParaRPr lang="es-ES"/>
+                    </a:p>
+                  </a:txBody>
+                  <a:tcPr/>
+                </a:tc>
+                <a:extLst>
+                  <a:ext uri="{0D108BD9-81ED-4DB2-BD59-A6C34878D82A}">
+                    <a16:rowId xmlns:a16="http://schemas.microsoft.com/office/drawing/2014/main" val="2145988731"/>
+                  </a:ext>
+                </a:extLst>
+              </a:tr>
+              <a:tr h="233962">
+                <a:tc>
+                  <a:txBody>
+                    <a:bodyPr/>
+                    <a:lstStyle/>
+                    <a:p>
+                      <a:endParaRPr lang="es-ES"/>
+                    </a:p>
+                  </a:txBody>
+                  <a:tcPr/>
+                </a:tc>
+                <a:tc>
+                  <a:txBody>
+                    <a:bodyPr/>
+                    <a:lstStyle/>
+                    <a:p>
+                      <a:endParaRPr lang="es-ES"/>
+                    </a:p>
+                  </a:txBody>
+                  <a:tcPr/>
+                </a:tc>
+                <a:tc>
+                  <a:txBody>
+                    <a:bodyPr/>
+                    <a:lstStyle/>
+                    <a:p>
+                      <a:endParaRPr lang="es-ES"/>
+                    </a:p>
+                  </a:txBody>
+                  <a:tcPr/>
+                </a:tc>
+                <a:tc>
+                  <a:txBody>
+                    <a:bodyPr/>
+                    <a:lstStyle/>
+                    <a:p>
+                      <a:endParaRPr lang="es-ES"/>
+                    </a:p>
+                  </a:txBody>
+                  <a:tcPr/>
+                </a:tc>
+                <a:extLst>
+                  <a:ext uri="{0D108BD9-81ED-4DB2-BD59-A6C34878D82A}">
+                    <a16:rowId xmlns:a16="http://schemas.microsoft.com/office/drawing/2014/main" val="2629836775"/>
+                  </a:ext>
+                </a:extLst>
+              </a:tr>
+              <a:tr h="233962">
+                <a:tc>
+                  <a:txBody>
+                    <a:bodyPr/>
+                    <a:lstStyle/>
+                    <a:p>
+                      <a:endParaRPr lang="es-ES"/>
+                    </a:p>
+                  </a:txBody>
+                  <a:tcPr/>
+                </a:tc>
+                <a:tc>
+                  <a:txBody>
+                    <a:bodyPr/>
+                    <a:lstStyle/>
+                    <a:p>
+                      <a:endParaRPr lang="es-ES"/>
+                    </a:p>
+                  </a:txBody>
+                  <a:tcPr/>
+                </a:tc>
+                <a:tc>
+                  <a:txBody>
+                    <a:bodyPr/>
+                    <a:lstStyle/>
+                    <a:p>
+                      <a:endParaRPr lang="es-ES"/>
+                    </a:p>
+                  </a:txBody>
+                  <a:tcPr/>
+                </a:tc>
+                <a:tc>
+                  <a:txBody>
+                    <a:bodyPr/>
+                    <a:lstStyle/>
+                    <a:p>
+                      <a:endParaRPr lang="es-ES"/>
+                    </a:p>
+                  </a:txBody>
+                  <a:tcPr/>
+                </a:tc>
+                <a:extLst>
+                  <a:ext uri="{0D108BD9-81ED-4DB2-BD59-A6C34878D82A}">
+                    <a16:rowId xmlns:a16="http://schemas.microsoft.com/office/drawing/2014/main" val="4281414131"/>
+                  </a:ext>
+                </a:extLst>
+              </a:tr>
+              <a:tr h="233962">
+                <a:tc>
+                  <a:txBody>
+                    <a:bodyPr/>
+                    <a:lstStyle/>
+                    <a:p>
+                      <a:endParaRPr lang="es-ES"/>
+                    </a:p>
+                  </a:txBody>
+                  <a:tcPr/>
+                </a:tc>
+                <a:tc>
+                  <a:txBody>
+                    <a:bodyPr/>
+                    <a:lstStyle/>
+                    <a:p>
+                      <a:endParaRPr lang="es-ES"/>
+                    </a:p>
+                  </a:txBody>
+                  <a:tcPr/>
+                </a:tc>
+                <a:tc>
+                  <a:txBody>
+                    <a:bodyPr/>
+                    <a:lstStyle/>
+                    <a:p>
+                      <a:endParaRPr lang="es-ES"/>
+                    </a:p>
+                  </a:txBody>
+                  <a:tcPr/>
+                </a:tc>
+                <a:tc>
+                  <a:txBody>
+                    <a:bodyPr/>
+                    <a:lstStyle/>
+                    <a:p>
+                      <a:endParaRPr lang="es-ES"/>
+                    </a:p>
+                  </a:txBody>
+                  <a:tcPr/>
+                </a:tc>
+                <a:extLst>
+                  <a:ext uri="{0D108BD9-81ED-4DB2-BD59-A6C34878D82A}">
+                    <a16:rowId xmlns:a16="http://schemas.microsoft.com/office/drawing/2014/main" val="1576985583"/>
+                  </a:ext>
+                </a:extLst>
+              </a:tr>
+              <a:tr h="233962">
+                <a:tc>
+                  <a:txBody>
+                    <a:bodyPr/>
+                    <a:lstStyle/>
+                    <a:p>
+                      <a:endParaRPr lang="es-ES"/>
+                    </a:p>
+                  </a:txBody>
+                  <a:tcPr/>
+                </a:tc>
+                <a:tc>
+                  <a:txBody>
+                    <a:bodyPr/>
+                    <a:lstStyle/>
+                    <a:p>
+                      <a:endParaRPr lang="es-ES"/>
+                    </a:p>
+                  </a:txBody>
+                  <a:tcPr/>
+                </a:tc>
+                <a:tc>
+                  <a:txBody>
+                    <a:bodyPr/>
+                    <a:lstStyle/>
+                    <a:p>
+                      <a:endParaRPr lang="es-ES"/>
+                    </a:p>
+                  </a:txBody>
+                  <a:tcPr/>
+                </a:tc>
+                <a:tc>
+                  <a:txBody>
+                    <a:bodyPr/>
+                    <a:lstStyle/>
+                    <a:p>
+                      <a:endParaRPr lang="es-ES"/>
+                    </a:p>
+                  </a:txBody>
+                  <a:tcPr/>
+                </a:tc>
+                <a:extLst>
+                  <a:ext uri="{0D108BD9-81ED-4DB2-BD59-A6C34878D82A}">
+                    <a16:rowId xmlns:a16="http://schemas.microsoft.com/office/drawing/2014/main" val="1172838679"/>
+                  </a:ext>
+                </a:extLst>
+              </a:tr>
+              <a:tr h="233962">
+                <a:tc>
+                  <a:txBody>
+                    <a:bodyPr/>
+                    <a:lstStyle/>
+                    <a:p>
+                      <a:endParaRPr lang="es-ES"/>
+                    </a:p>
+                  </a:txBody>
+                  <a:tcPr/>
+                </a:tc>
+                <a:tc>
+                  <a:txBody>
+                    <a:bodyPr/>
+                    <a:lstStyle/>
+                    <a:p>
+                      <a:endParaRPr lang="es-ES"/>
+                    </a:p>
+                  </a:txBody>
+                  <a:tcPr/>
+                </a:tc>
+                <a:tc>
+                  <a:txBody>
+                    <a:bodyPr/>
+                    <a:lstStyle/>
+                    <a:p>
+                      <a:endParaRPr lang="es-ES"/>
+                    </a:p>
+                  </a:txBody>
+                  <a:tcPr/>
+                </a:tc>
+                <a:tc>
+                  <a:txBody>
+                    <a:bodyPr/>
+                    <a:lstStyle/>
+                    <a:p>
+                      <a:endParaRPr lang="es-ES"/>
+                    </a:p>
+                  </a:txBody>
+                  <a:tcPr/>
+                </a:tc>
+                <a:extLst>
+                  <a:ext uri="{0D108BD9-81ED-4DB2-BD59-A6C34878D82A}">
+                    <a16:rowId xmlns:a16="http://schemas.microsoft.com/office/drawing/2014/main" val="1231781802"/>
+                  </a:ext>
+                </a:extLst>
+              </a:tr>
+              <a:tr h="233962">
+                <a:tc>
+                  <a:txBody>
+                    <a:bodyPr/>
+                    <a:lstStyle/>
+                    <a:p>
+                      <a:endParaRPr lang="es-ES"/>
+                    </a:p>
+                  </a:txBody>
+                  <a:tcPr/>
+                </a:tc>
+                <a:tc>
+                  <a:txBody>
+                    <a:bodyPr/>
+                    <a:lstStyle/>
+                    <a:p>
+                      <a:endParaRPr lang="es-ES"/>
+                    </a:p>
+                  </a:txBody>
+                  <a:tcPr/>
+                </a:tc>
+                <a:tc>
+                  <a:txBody>
+                    <a:bodyPr/>
+                    <a:lstStyle/>
+                    <a:p>
+                      <a:endParaRPr lang="es-ES"/>
+                    </a:p>
+                  </a:txBody>
+                  <a:tcPr/>
+                </a:tc>
+                <a:tc>
+                  <a:txBody>
+                    <a:bodyPr/>
+                    <a:lstStyle/>
+                    <a:p>
+                      <a:endParaRPr lang="es-ES" dirty="0"/>
+                    </a:p>
+                  </a:txBody>
+                  <a:tcPr/>
+                </a:tc>
+                <a:extLst>
+                  <a:ext uri="{0D108BD9-81ED-4DB2-BD59-A6C34878D82A}">
+                    <a16:rowId xmlns:a16="http://schemas.microsoft.com/office/drawing/2014/main" val="1264315745"/>
+                  </a:ext>
+                </a:extLst>
+              </a:tr>
+            </a:tbl>
+          </a:graphicData>
+        </a:graphic>
+      </p:graphicFrame>
+    </p:spTree>
+    <p:extLst>
+      <p:ext uri="{BB962C8B-B14F-4D97-AF65-F5344CB8AC3E}">
+        <p14:creationId xmlns:p14="http://schemas.microsoft.com/office/powerpoint/2010/main" val="2012096659"/>
+      </p:ext>
+    </p:extLst>
+  </p:cSld>
+  <p:clrMapOvr>
+    <a:masterClrMapping/>
+  </p:clrMapOvr>
+</p:sld>
+</file>
+
+<file path=ppt/slides/slide7.xml><?xml version="1.0" encoding="utf-8"?>
 <p:sld xmlns:a="http://schemas.openxmlformats.org/drawingml/2006/main" xmlns:r="http://schemas.openxmlformats.org/officeDocument/2006/relationships" xmlns:p="http://schemas.openxmlformats.org/presentationml/2006/main">
   <p:cSld>
     <p:spTree>
@@ -10957,7 +13752,7 @@
           <a:p>
             <a:fld id="{B6F15528-21DE-4FAA-801E-634DDDAF4B2B}" type="slidenum">
               <a:rPr lang="es-ES" smtClean="0"/>
-              <a:t>6</a:t>
+              <a:t>7</a:t>
             </a:fld>
             <a:endParaRPr lang="es-ES"/>
           </a:p>
@@ -11481,7 +14276,7 @@
 </p:sld>
 </file>
 
-<file path=ppt/slides/slide7.xml><?xml version="1.0" encoding="utf-8"?>
+<file path=ppt/slides/slide8.xml><?xml version="1.0" encoding="utf-8"?>
 <p:sld xmlns:a="http://schemas.openxmlformats.org/drawingml/2006/main" xmlns:r="http://schemas.openxmlformats.org/officeDocument/2006/relationships" xmlns:p="http://schemas.openxmlformats.org/presentationml/2006/main">
   <p:cSld>
     <p:spTree>
@@ -11561,7 +14356,7 @@
           <a:p>
             <a:fld id="{B6F15528-21DE-4FAA-801E-634DDDAF4B2B}" type="slidenum">
               <a:rPr lang="es-ES" smtClean="0"/>
-              <a:t>7</a:t>
+              <a:t>8</a:t>
             </a:fld>
             <a:endParaRPr lang="es-ES"/>
           </a:p>
@@ -11622,7 +14417,7 @@
 </p:sld>
 </file>
 
-<file path=ppt/slides/slide8.xml><?xml version="1.0" encoding="utf-8"?>
+<file path=ppt/slides/slide9.xml><?xml version="1.0" encoding="utf-8"?>
 <p:sld xmlns:a="http://schemas.openxmlformats.org/drawingml/2006/main" xmlns:r="http://schemas.openxmlformats.org/officeDocument/2006/relationships" xmlns:p="http://schemas.openxmlformats.org/presentationml/2006/main">
   <p:cSld>
     <p:spTree>
@@ -11769,7 +14564,7 @@
           <a:p>
             <a:fld id="{B6F15528-21DE-4FAA-801E-634DDDAF4B2B}" type="slidenum">
               <a:rPr lang="es-ES" smtClean="0"/>
-              <a:t>8</a:t>
+              <a:t>9</a:t>
             </a:fld>
             <a:endParaRPr lang="es-ES"/>
           </a:p>
@@ -11972,7 +14767,7 @@
         </p:nvSpPr>
         <p:spPr>
           <a:xfrm>
-            <a:off x="2286000" y="2630415"/>
+            <a:off x="514280" y="2568859"/>
             <a:ext cx="7718580" cy="923330"/>
           </a:xfrm>
           <a:prstGeom prst="rect">
@@ -12009,113 +14804,12 @@
           </a:p>
         </p:txBody>
       </p:sp>
-    </p:spTree>
-    <p:extLst>
-      <p:ext uri="{BB962C8B-B14F-4D97-AF65-F5344CB8AC3E}">
-        <p14:creationId xmlns:p14="http://schemas.microsoft.com/office/powerpoint/2010/main" val="2815679427"/>
-      </p:ext>
-    </p:extLst>
-  </p:cSld>
-  <p:clrMapOvr>
-    <a:masterClrMapping/>
-  </p:clrMapOvr>
-</p:sld>
-</file>
-
-<file path=ppt/slides/slide9.xml><?xml version="1.0" encoding="utf-8"?>
-<p:sld xmlns:a="http://schemas.openxmlformats.org/drawingml/2006/main" xmlns:r="http://schemas.openxmlformats.org/officeDocument/2006/relationships" xmlns:p="http://schemas.openxmlformats.org/presentationml/2006/main">
-  <p:cSld>
-    <p:spTree>
-      <p:nvGrpSpPr>
-        <p:cNvPr id="1" name="">
-          <a:extLst>
-            <a:ext uri="{FF2B5EF4-FFF2-40B4-BE49-F238E27FC236}">
-              <a16:creationId xmlns:a16="http://schemas.microsoft.com/office/drawing/2014/main" id="{D1F11DBE-A482-7036-60B2-70B7E2318F46}"/>
-            </a:ext>
-          </a:extLst>
-        </p:cNvPr>
-        <p:cNvGrpSpPr/>
-        <p:nvPr/>
-      </p:nvGrpSpPr>
-      <p:grpSpPr>
-        <a:xfrm>
-          <a:off x="0" y="0"/>
-          <a:ext cx="0" cy="0"/>
-          <a:chOff x="0" y="0"/>
-          <a:chExt cx="0" cy="0"/>
-        </a:xfrm>
-      </p:grpSpPr>
-      <p:sp>
-        <p:nvSpPr>
-          <p:cNvPr id="16" name="object 16">
-            <a:extLst>
-              <a:ext uri="{FF2B5EF4-FFF2-40B4-BE49-F238E27FC236}">
-                <a16:creationId xmlns:a16="http://schemas.microsoft.com/office/drawing/2014/main" id="{C096193E-AB86-E3CD-BDAC-0F9156C1A3F0}"/>
-              </a:ext>
-            </a:extLst>
-          </p:cNvPr>
-          <p:cNvSpPr txBox="1">
-            <a:spLocks noGrp="1"/>
-          </p:cNvSpPr>
-          <p:nvPr>
-            <p:ph type="title"/>
-          </p:nvPr>
-        </p:nvSpPr>
-        <p:spPr>
-          <a:xfrm>
-            <a:off x="685800" y="408883"/>
-            <a:ext cx="10994410" cy="705321"/>
-          </a:xfrm>
-          <a:prstGeom prst="rect">
-            <a:avLst/>
-          </a:prstGeom>
-        </p:spPr>
-        <p:txBody>
-          <a:bodyPr vert="horz" wrap="square" lIns="0" tIns="12700" rIns="0" bIns="0" rtlCol="0">
-            <a:spAutoFit/>
-          </a:bodyPr>
-          <a:lstStyle/>
-          <a:p>
-            <a:pPr marL="12700">
-              <a:lnSpc>
-                <a:spcPct val="100000"/>
-              </a:lnSpc>
-              <a:spcBef>
-                <a:spcPts val="100"/>
-              </a:spcBef>
-            </a:pPr>
-            <a:r>
-              <a:rPr lang="en-US" sz="2500" dirty="0"/>
-              <a:t>Learning outcome #4.2 – 2x2 Multimode Interference Coupler - Optimization</a:t>
-            </a:r>
-            <a:br>
-              <a:rPr lang="en-US" sz="2500" dirty="0"/>
-            </a:br>
-            <a:r>
-              <a:rPr lang="en-US" b="0" dirty="0"/>
-              <a:t>Wavelength 1.55 µm, </a:t>
-            </a:r>
-            <a:r>
-              <a:rPr lang="en-US" b="0" dirty="0" err="1"/>
-              <a:t>wMMI</a:t>
-            </a:r>
-            <a:r>
-              <a:rPr lang="en-US" b="0" dirty="0"/>
-              <a:t> = 6.6 µm</a:t>
-            </a:r>
-            <a:endParaRPr lang="en-US" sz="2500" b="0" dirty="0">
-              <a:latin typeface="+mj-lt"/>
-              <a:cs typeface="Lucida Sans"/>
-            </a:endParaRPr>
-          </a:p>
-        </p:txBody>
-      </p:sp>
       <p:pic>
         <p:nvPicPr>
-          <p:cNvPr id="83" name="Gráfico 82">
-            <a:extLst>
-              <a:ext uri="{FF2B5EF4-FFF2-40B4-BE49-F238E27FC236}">
-                <a16:creationId xmlns:a16="http://schemas.microsoft.com/office/drawing/2014/main" id="{2D17DCD6-D851-E62D-D95C-A9F9954602DE}"/>
+          <p:cNvPr id="5" name="Imagen 4">
+            <a:extLst>
+              <a:ext uri="{FF2B5EF4-FFF2-40B4-BE49-F238E27FC236}">
+                <a16:creationId xmlns:a16="http://schemas.microsoft.com/office/drawing/2014/main" id="{0306A81B-1DE7-4993-A6AA-D02ECE945160}"/>
               </a:ext>
             </a:extLst>
           </p:cNvPr>
@@ -12125,348 +14819,25 @@
           <p:nvPr/>
         </p:nvPicPr>
         <p:blipFill>
-          <a:blip r:embed="rId3">
-            <a:extLst>
-              <a:ext uri="{96DAC541-7B7A-43D3-8B79-37D633B846F1}">
-                <asvg:svgBlip xmlns:asvg="http://schemas.microsoft.com/office/drawing/2016/SVG/main" r:embed="rId4"/>
-              </a:ext>
-            </a:extLst>
-          </a:blip>
+          <a:blip r:embed="rId5"/>
           <a:stretch>
             <a:fillRect/>
           </a:stretch>
         </p:blipFill>
         <p:spPr>
           <a:xfrm>
-            <a:off x="5045006" y="6356057"/>
-            <a:ext cx="6409575" cy="363174"/>
+            <a:off x="4252719" y="1484955"/>
+            <a:ext cx="3686562" cy="3091138"/>
           </a:xfrm>
           <a:prstGeom prst="rect">
             <a:avLst/>
           </a:prstGeom>
         </p:spPr>
       </p:pic>
-      <p:sp>
-        <p:nvSpPr>
-          <p:cNvPr id="84" name="Marcador de número de diapositiva 83">
-            <a:extLst>
-              <a:ext uri="{FF2B5EF4-FFF2-40B4-BE49-F238E27FC236}">
-                <a16:creationId xmlns:a16="http://schemas.microsoft.com/office/drawing/2014/main" id="{4891046F-11DC-B7FC-54F7-9583E688DC0E}"/>
-              </a:ext>
-            </a:extLst>
-          </p:cNvPr>
-          <p:cNvSpPr>
-            <a:spLocks noGrp="1"/>
-          </p:cNvSpPr>
-          <p:nvPr>
-            <p:ph type="sldNum" sz="quarter" idx="7"/>
-          </p:nvPr>
-        </p:nvSpPr>
-        <p:spPr/>
-        <p:txBody>
-          <a:bodyPr/>
-          <a:lstStyle/>
-          <a:p>
-            <a:fld id="{B6F15528-21DE-4FAA-801E-634DDDAF4B2B}" type="slidenum">
-              <a:rPr lang="es-ES" smtClean="0"/>
-              <a:t>9</a:t>
-            </a:fld>
-            <a:endParaRPr lang="es-ES"/>
-          </a:p>
-        </p:txBody>
-      </p:sp>
-      <p:sp>
-        <p:nvSpPr>
-          <p:cNvPr id="3" name="Marcador de pie de página 2">
-            <a:extLst>
-              <a:ext uri="{FF2B5EF4-FFF2-40B4-BE49-F238E27FC236}">
-                <a16:creationId xmlns:a16="http://schemas.microsoft.com/office/drawing/2014/main" id="{4C9BAA39-017F-D602-6705-A6CF44830139}"/>
-              </a:ext>
-            </a:extLst>
-          </p:cNvPr>
-          <p:cNvSpPr>
-            <a:spLocks noGrp="1"/>
-          </p:cNvSpPr>
-          <p:nvPr>
-            <p:ph type="ftr" sz="quarter" idx="5"/>
-          </p:nvPr>
-        </p:nvSpPr>
-        <p:spPr/>
-        <p:txBody>
-          <a:bodyPr/>
-          <a:lstStyle/>
-          <a:p>
-            <a:pPr marL="12700">
-              <a:spcBef>
-                <a:spcPts val="15"/>
-              </a:spcBef>
-            </a:pPr>
-            <a:r>
-              <a:rPr lang="es-ES" spc="-5"/>
-              <a:t>LAB 2.0. COUPLERS</a:t>
-            </a:r>
-            <a:endParaRPr lang="es-ES" spc="-5" dirty="0"/>
-          </a:p>
-        </p:txBody>
-      </p:sp>
-      <p:sp>
-        <p:nvSpPr>
-          <p:cNvPr id="2" name="CuadroTexto 1">
-            <a:extLst>
-              <a:ext uri="{FF2B5EF4-FFF2-40B4-BE49-F238E27FC236}">
-                <a16:creationId xmlns:a16="http://schemas.microsoft.com/office/drawing/2014/main" id="{43D7D9E5-DAC3-2BB8-7377-826863CBAD4E}"/>
-              </a:ext>
-            </a:extLst>
-          </p:cNvPr>
-          <p:cNvSpPr txBox="1"/>
-          <p:nvPr/>
-        </p:nvSpPr>
-        <p:spPr>
-          <a:xfrm>
-            <a:off x="609441" y="4819471"/>
-            <a:ext cx="11199971" cy="1384995"/>
-          </a:xfrm>
-          <a:prstGeom prst="rect">
-            <a:avLst/>
-          </a:prstGeom>
-          <a:solidFill>
-            <a:schemeClr val="bg1">
-              <a:lumMod val="95000"/>
-            </a:schemeClr>
-          </a:solidFill>
-          <a:ln w="28575">
-            <a:solidFill>
-              <a:srgbClr val="E0700D"/>
-            </a:solidFill>
-          </a:ln>
-        </p:spPr>
-        <p:txBody>
-          <a:bodyPr wrap="square" rtlCol="0">
-            <a:spAutoFit/>
-          </a:bodyPr>
-          <a:lstStyle/>
-          <a:p>
-            <a:pPr algn="just"/>
-            <a:r>
-              <a:rPr lang="en-US" sz="1200" dirty="0">
-                <a:latin typeface="Arial" panose="020B0604020202020204" pitchFamily="34" charset="0"/>
-                <a:cs typeface="Arial" panose="020B0604020202020204" pitchFamily="34" charset="0"/>
-              </a:rPr>
-              <a:t>Comment results</a:t>
-            </a:r>
-          </a:p>
-          <a:p>
-            <a:pPr algn="just"/>
-            <a:endParaRPr lang="en-US" sz="1200" dirty="0">
-              <a:latin typeface="Arial" panose="020B0604020202020204" pitchFamily="34" charset="0"/>
-              <a:cs typeface="Arial" panose="020B0604020202020204" pitchFamily="34" charset="0"/>
-            </a:endParaRPr>
-          </a:p>
-          <a:p>
-            <a:pPr algn="just"/>
-            <a:endParaRPr lang="en-US" sz="1200" dirty="0">
-              <a:latin typeface="Arial" panose="020B0604020202020204" pitchFamily="34" charset="0"/>
-              <a:cs typeface="Arial" panose="020B0604020202020204" pitchFamily="34" charset="0"/>
-            </a:endParaRPr>
-          </a:p>
-          <a:p>
-            <a:pPr algn="just"/>
-            <a:endParaRPr lang="en-US" sz="1200" dirty="0">
-              <a:latin typeface="Arial" panose="020B0604020202020204" pitchFamily="34" charset="0"/>
-              <a:cs typeface="Arial" panose="020B0604020202020204" pitchFamily="34" charset="0"/>
-            </a:endParaRPr>
-          </a:p>
-          <a:p>
-            <a:pPr algn="just"/>
-            <a:endParaRPr lang="en-US" sz="1200" dirty="0">
-              <a:latin typeface="Arial" panose="020B0604020202020204" pitchFamily="34" charset="0"/>
-              <a:cs typeface="Arial" panose="020B0604020202020204" pitchFamily="34" charset="0"/>
-            </a:endParaRPr>
-          </a:p>
-          <a:p>
-            <a:pPr algn="just"/>
-            <a:endParaRPr lang="en-US" sz="1200" dirty="0">
-              <a:latin typeface="Arial" panose="020B0604020202020204" pitchFamily="34" charset="0"/>
-              <a:cs typeface="Arial" panose="020B0604020202020204" pitchFamily="34" charset="0"/>
-            </a:endParaRPr>
-          </a:p>
-          <a:p>
-            <a:pPr algn="just"/>
-            <a:endParaRPr lang="en-US" sz="1200" dirty="0">
-              <a:latin typeface="Arial" panose="020B0604020202020204" pitchFamily="34" charset="0"/>
-              <a:cs typeface="Arial" panose="020B0604020202020204" pitchFamily="34" charset="0"/>
-            </a:endParaRPr>
-          </a:p>
-        </p:txBody>
-      </p:sp>
-      <p:sp>
-        <p:nvSpPr>
-          <p:cNvPr id="7" name="Rectángulo 6">
-            <a:extLst>
-              <a:ext uri="{FF2B5EF4-FFF2-40B4-BE49-F238E27FC236}">
-                <a16:creationId xmlns:a16="http://schemas.microsoft.com/office/drawing/2014/main" id="{9772491E-4FFB-FFC3-C855-72A4B15F3E73}"/>
-              </a:ext>
-            </a:extLst>
-          </p:cNvPr>
-          <p:cNvSpPr/>
-          <p:nvPr/>
-        </p:nvSpPr>
-        <p:spPr>
-          <a:xfrm>
-            <a:off x="609441" y="1377510"/>
-            <a:ext cx="11199971" cy="3306028"/>
-          </a:xfrm>
-          <a:prstGeom prst="rect">
-            <a:avLst/>
-          </a:prstGeom>
-          <a:noFill/>
-          <a:ln w="28575">
-            <a:solidFill>
-              <a:srgbClr val="E0700D"/>
-            </a:solidFill>
-          </a:ln>
-        </p:spPr>
-        <p:style>
-          <a:lnRef idx="2">
-            <a:schemeClr val="accent1">
-              <a:shade val="15000"/>
-            </a:schemeClr>
-          </a:lnRef>
-          <a:fillRef idx="1">
-            <a:schemeClr val="accent1"/>
-          </a:fillRef>
-          <a:effectRef idx="0">
-            <a:schemeClr val="accent1"/>
-          </a:effectRef>
-          <a:fontRef idx="minor">
-            <a:schemeClr val="lt1"/>
-          </a:fontRef>
-        </p:style>
-        <p:txBody>
-          <a:bodyPr rtlCol="0" anchor="ctr"/>
-          <a:lstStyle/>
-          <a:p>
-            <a:pPr algn="ctr"/>
-            <a:endParaRPr lang="en-US"/>
-          </a:p>
-        </p:txBody>
-      </p:sp>
-      <p:sp>
-        <p:nvSpPr>
-          <p:cNvPr id="8" name="CuadroTexto 7">
-            <a:extLst>
-              <a:ext uri="{FF2B5EF4-FFF2-40B4-BE49-F238E27FC236}">
-                <a16:creationId xmlns:a16="http://schemas.microsoft.com/office/drawing/2014/main" id="{643565A9-7DB6-D6EE-152F-2852C8BA7986}"/>
-              </a:ext>
-            </a:extLst>
-          </p:cNvPr>
-          <p:cNvSpPr txBox="1"/>
-          <p:nvPr/>
-        </p:nvSpPr>
-        <p:spPr>
-          <a:xfrm>
-            <a:off x="640245" y="1942909"/>
-            <a:ext cx="11199972" cy="2708434"/>
-          </a:xfrm>
-          <a:prstGeom prst="rect">
-            <a:avLst/>
-          </a:prstGeom>
-          <a:noFill/>
-        </p:spPr>
-        <p:txBody>
-          <a:bodyPr wrap="square" rtlCol="0">
-            <a:spAutoFit/>
-          </a:bodyPr>
-          <a:lstStyle/>
-          <a:p>
-            <a:pPr algn="ctr"/>
-            <a:r>
-              <a:rPr lang="en-US" b="1" dirty="0"/>
-              <a:t>deep</a:t>
-            </a:r>
-            <a:r>
-              <a:rPr lang="en-US" dirty="0"/>
-              <a:t> waveguide</a:t>
-            </a:r>
-          </a:p>
-          <a:p>
-            <a:pPr algn="ctr"/>
-            <a:endParaRPr lang="en-US" dirty="0"/>
-          </a:p>
-          <a:p>
-            <a:pPr algn="ctr"/>
-            <a:r>
-              <a:rPr lang="en-US" dirty="0"/>
-              <a:t>Paste propagation plot and console results</a:t>
-            </a:r>
-          </a:p>
-          <a:p>
-            <a:pPr algn="ctr"/>
-            <a:endParaRPr lang="en-US" dirty="0"/>
-          </a:p>
-          <a:p>
-            <a:pPr algn="ctr"/>
-            <a:endParaRPr lang="en-US" dirty="0"/>
-          </a:p>
-          <a:p>
-            <a:pPr algn="r"/>
-            <a:r>
-              <a:rPr lang="en-US" sz="1600" b="1" dirty="0"/>
-              <a:t>Target</a:t>
-            </a:r>
-            <a:r>
-              <a:rPr lang="en-US" sz="1600" dirty="0"/>
-              <a:t>: make equal ratio over outputs (even if not 0.5) and minimize excess loss (even if not 0.0 dB)</a:t>
-            </a:r>
-          </a:p>
-          <a:p>
-            <a:pPr algn="r"/>
-            <a:r>
-              <a:rPr lang="en-US" sz="1600" dirty="0"/>
-              <a:t>With same settings of previous LO, now adjust try to manually optimize the MMI by changing iteratively:</a:t>
-            </a:r>
-          </a:p>
-          <a:p>
-            <a:pPr algn="r"/>
-            <a:r>
-              <a:rPr lang="en-US" sz="1600" dirty="0"/>
-              <a:t>- Change </a:t>
-            </a:r>
-            <a:r>
-              <a:rPr lang="en-US" sz="1600" dirty="0" err="1"/>
-              <a:t>dL_MMI</a:t>
-            </a:r>
-            <a:endParaRPr lang="en-US" sz="1600" dirty="0"/>
-          </a:p>
-          <a:p>
-            <a:pPr algn="r"/>
-            <a:r>
-              <a:rPr lang="en-US" sz="1600" dirty="0"/>
-              <a:t>- Change I/O waveguide position +/- </a:t>
-            </a:r>
-            <a:r>
-              <a:rPr lang="en-US" sz="1600" dirty="0" err="1"/>
-              <a:t>dy</a:t>
-            </a:r>
-            <a:endParaRPr lang="en-US" sz="1600" dirty="0"/>
-          </a:p>
-          <a:p>
-            <a:pPr algn="r"/>
-            <a:r>
-              <a:rPr lang="en-US" sz="1600" b="1" dirty="0"/>
-              <a:t>Hints</a:t>
-            </a:r>
-            <a:r>
-              <a:rPr lang="en-US" sz="1600" dirty="0"/>
-              <a:t>: observe the 2D EME propagation results to guide you to the best settings of a) and b).</a:t>
-            </a:r>
-          </a:p>
-        </p:txBody>
-      </p:sp>
     </p:spTree>
     <p:extLst>
       <p:ext uri="{BB962C8B-B14F-4D97-AF65-F5344CB8AC3E}">
-        <p14:creationId xmlns:p14="http://schemas.microsoft.com/office/powerpoint/2010/main" val="2685215753"/>
+        <p14:creationId xmlns:p14="http://schemas.microsoft.com/office/powerpoint/2010/main" val="2815679427"/>
       </p:ext>
     </p:extLst>
   </p:cSld>

--- a/LabBook_20.pptx
+++ b/LabBook_20.pptx
@@ -5,10 +5,10 @@
     <p:sldMasterId id="2147483648" r:id="rId1"/>
   </p:sldMasterIdLst>
   <p:notesMasterIdLst>
-    <p:notesMasterId r:id="rId19"/>
+    <p:notesMasterId r:id="rId20"/>
   </p:notesMasterIdLst>
   <p:handoutMasterIdLst>
-    <p:handoutMasterId r:id="rId20"/>
+    <p:handoutMasterId r:id="rId21"/>
   </p:handoutMasterIdLst>
   <p:sldIdLst>
     <p:sldId id="256" r:id="rId2"/>
@@ -17,17 +17,18 @@
     <p:sldId id="302" r:id="rId5"/>
     <p:sldId id="303" r:id="rId6"/>
     <p:sldId id="304" r:id="rId7"/>
-    <p:sldId id="291" r:id="rId8"/>
-    <p:sldId id="296" r:id="rId9"/>
-    <p:sldId id="294" r:id="rId10"/>
-    <p:sldId id="299" r:id="rId11"/>
-    <p:sldId id="300" r:id="rId12"/>
-    <p:sldId id="301" r:id="rId13"/>
-    <p:sldId id="297" r:id="rId14"/>
-    <p:sldId id="290" r:id="rId15"/>
-    <p:sldId id="292" r:id="rId16"/>
-    <p:sldId id="298" r:id="rId17"/>
-    <p:sldId id="288" r:id="rId18"/>
+    <p:sldId id="305" r:id="rId8"/>
+    <p:sldId id="291" r:id="rId9"/>
+    <p:sldId id="296" r:id="rId10"/>
+    <p:sldId id="294" r:id="rId11"/>
+    <p:sldId id="299" r:id="rId12"/>
+    <p:sldId id="300" r:id="rId13"/>
+    <p:sldId id="301" r:id="rId14"/>
+    <p:sldId id="297" r:id="rId15"/>
+    <p:sldId id="290" r:id="rId16"/>
+    <p:sldId id="292" r:id="rId17"/>
+    <p:sldId id="298" r:id="rId18"/>
+    <p:sldId id="288" r:id="rId19"/>
   </p:sldIdLst>
   <p:sldSz cx="12192000" cy="6858000"/>
   <p:notesSz cx="12192000" cy="6858000"/>
@@ -818,7 +819,7 @@
           <a:p>
             <a:fld id="{8438F8DC-35B0-48E6-A86E-42F1F08DD00F}" type="datetimeFigureOut">
               <a:rPr lang="es-ES" smtClean="0"/>
-              <a:t>02/03/2026</a:t>
+              <a:t>04/03/2026</a:t>
             </a:fld>
             <a:endParaRPr lang="es-ES"/>
           </a:p>
@@ -995,7 +996,7 @@
           <a:p>
             <a:fld id="{FACBDC12-F39B-4B97-8F4D-6734F9D366FF}" type="datetimeFigureOut">
               <a:rPr lang="es-ES" smtClean="0"/>
-              <a:t>02/03/2026</a:t>
+              <a:t>04/03/2026</a:t>
             </a:fld>
             <a:endParaRPr lang="es-ES"/>
           </a:p>
@@ -1375,6 +1376,114 @@
   <p:cSld>
     <p:spTree>
       <p:nvGrpSpPr>
+        <p:cNvPr id="1" name="">
+          <a:extLst>
+            <a:ext uri="{FF2B5EF4-FFF2-40B4-BE49-F238E27FC236}">
+              <a16:creationId xmlns:a16="http://schemas.microsoft.com/office/drawing/2014/main" id="{1AC9112F-7FB7-4F49-F4F6-C1D0DC6ADBEE}"/>
+            </a:ext>
+          </a:extLst>
+        </p:cNvPr>
+        <p:cNvGrpSpPr/>
+        <p:nvPr/>
+      </p:nvGrpSpPr>
+      <p:grpSpPr>
+        <a:xfrm>
+          <a:off x="0" y="0"/>
+          <a:ext cx="0" cy="0"/>
+          <a:chOff x="0" y="0"/>
+          <a:chExt cx="0" cy="0"/>
+        </a:xfrm>
+      </p:grpSpPr>
+      <p:sp>
+        <p:nvSpPr>
+          <p:cNvPr id="2" name="Marcador de imagen de diapositiva 1">
+            <a:extLst>
+              <a:ext uri="{FF2B5EF4-FFF2-40B4-BE49-F238E27FC236}">
+                <a16:creationId xmlns:a16="http://schemas.microsoft.com/office/drawing/2014/main" id="{5190F532-536D-B583-3561-FD0C56234D42}"/>
+              </a:ext>
+            </a:extLst>
+          </p:cNvPr>
+          <p:cNvSpPr>
+            <a:spLocks noGrp="1" noRot="1" noChangeAspect="1"/>
+          </p:cNvSpPr>
+          <p:nvPr>
+            <p:ph type="sldImg"/>
+          </p:nvPr>
+        </p:nvSpPr>
+        <p:spPr/>
+      </p:sp>
+      <p:sp>
+        <p:nvSpPr>
+          <p:cNvPr id="3" name="Marcador de notas 2">
+            <a:extLst>
+              <a:ext uri="{FF2B5EF4-FFF2-40B4-BE49-F238E27FC236}">
+                <a16:creationId xmlns:a16="http://schemas.microsoft.com/office/drawing/2014/main" id="{CC233B1A-142E-BC7B-FE19-6D22CE4082B2}"/>
+              </a:ext>
+            </a:extLst>
+          </p:cNvPr>
+          <p:cNvSpPr>
+            <a:spLocks noGrp="1"/>
+          </p:cNvSpPr>
+          <p:nvPr>
+            <p:ph type="body" idx="1"/>
+          </p:nvPr>
+        </p:nvSpPr>
+        <p:spPr/>
+        <p:txBody>
+          <a:bodyPr/>
+          <a:lstStyle/>
+          <a:p>
+            <a:endParaRPr lang="es-ES" dirty="0"/>
+          </a:p>
+        </p:txBody>
+      </p:sp>
+      <p:sp>
+        <p:nvSpPr>
+          <p:cNvPr id="4" name="Marcador de número de diapositiva 3">
+            <a:extLst>
+              <a:ext uri="{FF2B5EF4-FFF2-40B4-BE49-F238E27FC236}">
+                <a16:creationId xmlns:a16="http://schemas.microsoft.com/office/drawing/2014/main" id="{685087E6-8FC6-B2E3-2D74-B3C5168F5568}"/>
+              </a:ext>
+            </a:extLst>
+          </p:cNvPr>
+          <p:cNvSpPr>
+            <a:spLocks noGrp="1"/>
+          </p:cNvSpPr>
+          <p:nvPr>
+            <p:ph type="sldNum" sz="quarter" idx="5"/>
+          </p:nvPr>
+        </p:nvSpPr>
+        <p:spPr/>
+        <p:txBody>
+          <a:bodyPr/>
+          <a:lstStyle/>
+          <a:p>
+            <a:fld id="{676223B9-C868-4436-87D9-1A3152E1157A}" type="slidenum">
+              <a:rPr lang="es-ES" smtClean="0"/>
+              <a:t>14</a:t>
+            </a:fld>
+            <a:endParaRPr lang="es-ES"/>
+          </a:p>
+        </p:txBody>
+      </p:sp>
+    </p:spTree>
+    <p:extLst>
+      <p:ext uri="{BB962C8B-B14F-4D97-AF65-F5344CB8AC3E}">
+        <p14:creationId xmlns:p14="http://schemas.microsoft.com/office/powerpoint/2010/main" val="1581859005"/>
+      </p:ext>
+    </p:extLst>
+  </p:cSld>
+  <p:clrMapOvr>
+    <a:masterClrMapping/>
+  </p:clrMapOvr>
+</p:notes>
+</file>
+
+<file path=ppt/notesSlides/notesSlide11.xml><?xml version="1.0" encoding="utf-8"?>
+<p:notes xmlns:a="http://schemas.openxmlformats.org/drawingml/2006/main" xmlns:r="http://schemas.openxmlformats.org/officeDocument/2006/relationships" xmlns:p="http://schemas.openxmlformats.org/presentationml/2006/main">
+  <p:cSld>
+    <p:spTree>
+      <p:nvGrpSpPr>
         <p:cNvPr id="1" name=""/>
         <p:cNvGrpSpPr/>
         <p:nvPr/>
@@ -1435,7 +1544,7 @@
           <a:p>
             <a:fld id="{676223B9-C868-4436-87D9-1A3152E1157A}" type="slidenum">
               <a:rPr lang="es-ES" smtClean="0"/>
-              <a:t>14</a:t>
+              <a:t>15</a:t>
             </a:fld>
             <a:endParaRPr lang="es-ES"/>
           </a:p>
@@ -1454,7 +1563,7 @@
 </p:notes>
 </file>
 
-<file path=ppt/notesSlides/notesSlide11.xml><?xml version="1.0" encoding="utf-8"?>
+<file path=ppt/notesSlides/notesSlide12.xml><?xml version="1.0" encoding="utf-8"?>
 <p:notes xmlns:a="http://schemas.openxmlformats.org/drawingml/2006/main" xmlns:r="http://schemas.openxmlformats.org/officeDocument/2006/relationships" xmlns:p="http://schemas.openxmlformats.org/presentationml/2006/main">
   <p:cSld>
     <p:spTree>
@@ -1543,7 +1652,7 @@
           <a:p>
             <a:fld id="{676223B9-C868-4436-87D9-1A3152E1157A}" type="slidenum">
               <a:rPr lang="es-ES" smtClean="0"/>
-              <a:t>15</a:t>
+              <a:t>16</a:t>
             </a:fld>
             <a:endParaRPr lang="es-ES"/>
           </a:p>
@@ -1562,7 +1671,7 @@
 </p:notes>
 </file>
 
-<file path=ppt/notesSlides/notesSlide12.xml><?xml version="1.0" encoding="utf-8"?>
+<file path=ppt/notesSlides/notesSlide13.xml><?xml version="1.0" encoding="utf-8"?>
 <p:notes xmlns:a="http://schemas.openxmlformats.org/drawingml/2006/main" xmlns:r="http://schemas.openxmlformats.org/officeDocument/2006/relationships" xmlns:p="http://schemas.openxmlformats.org/presentationml/2006/main">
   <p:cSld>
     <p:spTree>
@@ -1651,7 +1760,7 @@
           <a:p>
             <a:fld id="{676223B9-C868-4436-87D9-1A3152E1157A}" type="slidenum">
               <a:rPr lang="es-ES" smtClean="0"/>
-              <a:t>16</a:t>
+              <a:t>17</a:t>
             </a:fld>
             <a:endParaRPr lang="es-ES"/>
           </a:p>
@@ -1894,6 +2003,114 @@
         <p:cNvPr id="1" name="">
           <a:extLst>
             <a:ext uri="{FF2B5EF4-FFF2-40B4-BE49-F238E27FC236}">
+              <a16:creationId xmlns:a16="http://schemas.microsoft.com/office/drawing/2014/main" id="{95993BBE-3704-D894-1C10-5488EE611F08}"/>
+            </a:ext>
+          </a:extLst>
+        </p:cNvPr>
+        <p:cNvGrpSpPr/>
+        <p:nvPr/>
+      </p:nvGrpSpPr>
+      <p:grpSpPr>
+        <a:xfrm>
+          <a:off x="0" y="0"/>
+          <a:ext cx="0" cy="0"/>
+          <a:chOff x="0" y="0"/>
+          <a:chExt cx="0" cy="0"/>
+        </a:xfrm>
+      </p:grpSpPr>
+      <p:sp>
+        <p:nvSpPr>
+          <p:cNvPr id="2" name="Marcador de imagen de diapositiva 1">
+            <a:extLst>
+              <a:ext uri="{FF2B5EF4-FFF2-40B4-BE49-F238E27FC236}">
+                <a16:creationId xmlns:a16="http://schemas.microsoft.com/office/drawing/2014/main" id="{19BB04E2-F70F-42F7-9964-3D274C49FB9C}"/>
+              </a:ext>
+            </a:extLst>
+          </p:cNvPr>
+          <p:cNvSpPr>
+            <a:spLocks noGrp="1" noRot="1" noChangeAspect="1"/>
+          </p:cNvSpPr>
+          <p:nvPr>
+            <p:ph type="sldImg"/>
+          </p:nvPr>
+        </p:nvSpPr>
+        <p:spPr/>
+      </p:sp>
+      <p:sp>
+        <p:nvSpPr>
+          <p:cNvPr id="3" name="Marcador de notas 2">
+            <a:extLst>
+              <a:ext uri="{FF2B5EF4-FFF2-40B4-BE49-F238E27FC236}">
+                <a16:creationId xmlns:a16="http://schemas.microsoft.com/office/drawing/2014/main" id="{F6664AEC-7D1D-9DDC-3B94-3AE8450C7E5E}"/>
+              </a:ext>
+            </a:extLst>
+          </p:cNvPr>
+          <p:cNvSpPr>
+            <a:spLocks noGrp="1"/>
+          </p:cNvSpPr>
+          <p:nvPr>
+            <p:ph type="body" idx="1"/>
+          </p:nvPr>
+        </p:nvSpPr>
+        <p:spPr/>
+        <p:txBody>
+          <a:bodyPr/>
+          <a:lstStyle/>
+          <a:p>
+            <a:endParaRPr lang="es-ES" dirty="0"/>
+          </a:p>
+        </p:txBody>
+      </p:sp>
+      <p:sp>
+        <p:nvSpPr>
+          <p:cNvPr id="4" name="Marcador de número de diapositiva 3">
+            <a:extLst>
+              <a:ext uri="{FF2B5EF4-FFF2-40B4-BE49-F238E27FC236}">
+                <a16:creationId xmlns:a16="http://schemas.microsoft.com/office/drawing/2014/main" id="{E8F62EEB-2D30-2026-D252-4267AF688251}"/>
+              </a:ext>
+            </a:extLst>
+          </p:cNvPr>
+          <p:cNvSpPr>
+            <a:spLocks noGrp="1"/>
+          </p:cNvSpPr>
+          <p:nvPr>
+            <p:ph type="sldNum" sz="quarter" idx="5"/>
+          </p:nvPr>
+        </p:nvSpPr>
+        <p:spPr/>
+        <p:txBody>
+          <a:bodyPr/>
+          <a:lstStyle/>
+          <a:p>
+            <a:fld id="{676223B9-C868-4436-87D9-1A3152E1157A}" type="slidenum">
+              <a:rPr lang="es-ES" smtClean="0"/>
+              <a:t>7</a:t>
+            </a:fld>
+            <a:endParaRPr lang="es-ES"/>
+          </a:p>
+        </p:txBody>
+      </p:sp>
+    </p:spTree>
+    <p:extLst>
+      <p:ext uri="{BB962C8B-B14F-4D97-AF65-F5344CB8AC3E}">
+        <p14:creationId xmlns:p14="http://schemas.microsoft.com/office/powerpoint/2010/main" val="4178966083"/>
+      </p:ext>
+    </p:extLst>
+  </p:cSld>
+  <p:clrMapOvr>
+    <a:masterClrMapping/>
+  </p:clrMapOvr>
+</p:notes>
+</file>
+
+<file path=ppt/notesSlides/notesSlide5.xml><?xml version="1.0" encoding="utf-8"?>
+<p:notes xmlns:a="http://schemas.openxmlformats.org/drawingml/2006/main" xmlns:r="http://schemas.openxmlformats.org/officeDocument/2006/relationships" xmlns:p="http://schemas.openxmlformats.org/presentationml/2006/main">
+  <p:cSld>
+    <p:spTree>
+      <p:nvGrpSpPr>
+        <p:cNvPr id="1" name="">
+          <a:extLst>
+            <a:ext uri="{FF2B5EF4-FFF2-40B4-BE49-F238E27FC236}">
               <a16:creationId xmlns:a16="http://schemas.microsoft.com/office/drawing/2014/main" id="{4E3C5711-C157-AA5E-1EA1-9F4C3F40B90E}"/>
             </a:ext>
           </a:extLst>
@@ -1975,7 +2192,7 @@
           <a:p>
             <a:fld id="{676223B9-C868-4436-87D9-1A3152E1157A}" type="slidenum">
               <a:rPr lang="es-ES" smtClean="0"/>
-              <a:t>7</a:t>
+              <a:t>8</a:t>
             </a:fld>
             <a:endParaRPr lang="es-ES"/>
           </a:p>
@@ -1994,7 +2211,7 @@
 </p:notes>
 </file>
 
-<file path=ppt/notesSlides/notesSlide5.xml><?xml version="1.0" encoding="utf-8"?>
+<file path=ppt/notesSlides/notesSlide6.xml><?xml version="1.0" encoding="utf-8"?>
 <p:notes xmlns:a="http://schemas.openxmlformats.org/drawingml/2006/main" xmlns:r="http://schemas.openxmlformats.org/officeDocument/2006/relationships" xmlns:p="http://schemas.openxmlformats.org/presentationml/2006/main">
   <p:cSld>
     <p:spTree>
@@ -2083,7 +2300,7 @@
           <a:p>
             <a:fld id="{676223B9-C868-4436-87D9-1A3152E1157A}" type="slidenum">
               <a:rPr lang="es-ES" smtClean="0"/>
-              <a:t>9</a:t>
+              <a:t>10</a:t>
             </a:fld>
             <a:endParaRPr lang="es-ES"/>
           </a:p>
@@ -2102,7 +2319,7 @@
 </p:notes>
 </file>
 
-<file path=ppt/notesSlides/notesSlide6.xml><?xml version="1.0" encoding="utf-8"?>
+<file path=ppt/notesSlides/notesSlide7.xml><?xml version="1.0" encoding="utf-8"?>
 <p:notes xmlns:a="http://schemas.openxmlformats.org/drawingml/2006/main" xmlns:r="http://schemas.openxmlformats.org/officeDocument/2006/relationships" xmlns:p="http://schemas.openxmlformats.org/presentationml/2006/main">
   <p:cSld>
     <p:spTree>
@@ -2191,7 +2408,7 @@
           <a:p>
             <a:fld id="{676223B9-C868-4436-87D9-1A3152E1157A}" type="slidenum">
               <a:rPr lang="es-ES" smtClean="0"/>
-              <a:t>10</a:t>
+              <a:t>11</a:t>
             </a:fld>
             <a:endParaRPr lang="es-ES"/>
           </a:p>
@@ -2210,7 +2427,7 @@
 </p:notes>
 </file>
 
-<file path=ppt/notesSlides/notesSlide7.xml><?xml version="1.0" encoding="utf-8"?>
+<file path=ppt/notesSlides/notesSlide8.xml><?xml version="1.0" encoding="utf-8"?>
 <p:notes xmlns:a="http://schemas.openxmlformats.org/drawingml/2006/main" xmlns:r="http://schemas.openxmlformats.org/officeDocument/2006/relationships" xmlns:p="http://schemas.openxmlformats.org/presentationml/2006/main">
   <p:cSld>
     <p:spTree>
@@ -2299,7 +2516,7 @@
           <a:p>
             <a:fld id="{676223B9-C868-4436-87D9-1A3152E1157A}" type="slidenum">
               <a:rPr lang="es-ES" smtClean="0"/>
-              <a:t>11</a:t>
+              <a:t>12</a:t>
             </a:fld>
             <a:endParaRPr lang="es-ES"/>
           </a:p>
@@ -2318,7 +2535,7 @@
 </p:notes>
 </file>
 
-<file path=ppt/notesSlides/notesSlide8.xml><?xml version="1.0" encoding="utf-8"?>
+<file path=ppt/notesSlides/notesSlide9.xml><?xml version="1.0" encoding="utf-8"?>
 <p:notes xmlns:a="http://schemas.openxmlformats.org/drawingml/2006/main" xmlns:r="http://schemas.openxmlformats.org/officeDocument/2006/relationships" xmlns:p="http://schemas.openxmlformats.org/presentationml/2006/main">
   <p:cSld>
     <p:spTree>
@@ -2407,7 +2624,7 @@
           <a:p>
             <a:fld id="{676223B9-C868-4436-87D9-1A3152E1157A}" type="slidenum">
               <a:rPr lang="es-ES" smtClean="0"/>
-              <a:t>12</a:t>
+              <a:t>13</a:t>
             </a:fld>
             <a:endParaRPr lang="es-ES"/>
           </a:p>
@@ -2417,114 +2634,6 @@
     <p:extLst>
       <p:ext uri="{BB962C8B-B14F-4D97-AF65-F5344CB8AC3E}">
         <p14:creationId xmlns:p14="http://schemas.microsoft.com/office/powerpoint/2010/main" val="915560842"/>
-      </p:ext>
-    </p:extLst>
-  </p:cSld>
-  <p:clrMapOvr>
-    <a:masterClrMapping/>
-  </p:clrMapOvr>
-</p:notes>
-</file>
-
-<file path=ppt/notesSlides/notesSlide9.xml><?xml version="1.0" encoding="utf-8"?>
-<p:notes xmlns:a="http://schemas.openxmlformats.org/drawingml/2006/main" xmlns:r="http://schemas.openxmlformats.org/officeDocument/2006/relationships" xmlns:p="http://schemas.openxmlformats.org/presentationml/2006/main">
-  <p:cSld>
-    <p:spTree>
-      <p:nvGrpSpPr>
-        <p:cNvPr id="1" name="">
-          <a:extLst>
-            <a:ext uri="{FF2B5EF4-FFF2-40B4-BE49-F238E27FC236}">
-              <a16:creationId xmlns:a16="http://schemas.microsoft.com/office/drawing/2014/main" id="{1AC9112F-7FB7-4F49-F4F6-C1D0DC6ADBEE}"/>
-            </a:ext>
-          </a:extLst>
-        </p:cNvPr>
-        <p:cNvGrpSpPr/>
-        <p:nvPr/>
-      </p:nvGrpSpPr>
-      <p:grpSpPr>
-        <a:xfrm>
-          <a:off x="0" y="0"/>
-          <a:ext cx="0" cy="0"/>
-          <a:chOff x="0" y="0"/>
-          <a:chExt cx="0" cy="0"/>
-        </a:xfrm>
-      </p:grpSpPr>
-      <p:sp>
-        <p:nvSpPr>
-          <p:cNvPr id="2" name="Marcador de imagen de diapositiva 1">
-            <a:extLst>
-              <a:ext uri="{FF2B5EF4-FFF2-40B4-BE49-F238E27FC236}">
-                <a16:creationId xmlns:a16="http://schemas.microsoft.com/office/drawing/2014/main" id="{5190F532-536D-B583-3561-FD0C56234D42}"/>
-              </a:ext>
-            </a:extLst>
-          </p:cNvPr>
-          <p:cNvSpPr>
-            <a:spLocks noGrp="1" noRot="1" noChangeAspect="1"/>
-          </p:cNvSpPr>
-          <p:nvPr>
-            <p:ph type="sldImg"/>
-          </p:nvPr>
-        </p:nvSpPr>
-        <p:spPr/>
-      </p:sp>
-      <p:sp>
-        <p:nvSpPr>
-          <p:cNvPr id="3" name="Marcador de notas 2">
-            <a:extLst>
-              <a:ext uri="{FF2B5EF4-FFF2-40B4-BE49-F238E27FC236}">
-                <a16:creationId xmlns:a16="http://schemas.microsoft.com/office/drawing/2014/main" id="{CC233B1A-142E-BC7B-FE19-6D22CE4082B2}"/>
-              </a:ext>
-            </a:extLst>
-          </p:cNvPr>
-          <p:cNvSpPr>
-            <a:spLocks noGrp="1"/>
-          </p:cNvSpPr>
-          <p:nvPr>
-            <p:ph type="body" idx="1"/>
-          </p:nvPr>
-        </p:nvSpPr>
-        <p:spPr/>
-        <p:txBody>
-          <a:bodyPr/>
-          <a:lstStyle/>
-          <a:p>
-            <a:endParaRPr lang="es-ES" dirty="0"/>
-          </a:p>
-        </p:txBody>
-      </p:sp>
-      <p:sp>
-        <p:nvSpPr>
-          <p:cNvPr id="4" name="Marcador de número de diapositiva 3">
-            <a:extLst>
-              <a:ext uri="{FF2B5EF4-FFF2-40B4-BE49-F238E27FC236}">
-                <a16:creationId xmlns:a16="http://schemas.microsoft.com/office/drawing/2014/main" id="{685087E6-8FC6-B2E3-2D74-B3C5168F5568}"/>
-              </a:ext>
-            </a:extLst>
-          </p:cNvPr>
-          <p:cNvSpPr>
-            <a:spLocks noGrp="1"/>
-          </p:cNvSpPr>
-          <p:nvPr>
-            <p:ph type="sldNum" sz="quarter" idx="5"/>
-          </p:nvPr>
-        </p:nvSpPr>
-        <p:spPr/>
-        <p:txBody>
-          <a:bodyPr/>
-          <a:lstStyle/>
-          <a:p>
-            <a:fld id="{676223B9-C868-4436-87D9-1A3152E1157A}" type="slidenum">
-              <a:rPr lang="es-ES" smtClean="0"/>
-              <a:t>13</a:t>
-            </a:fld>
-            <a:endParaRPr lang="es-ES"/>
-          </a:p>
-        </p:txBody>
-      </p:sp>
-    </p:spTree>
-    <p:extLst>
-      <p:ext uri="{BB962C8B-B14F-4D97-AF65-F5344CB8AC3E}">
-        <p14:creationId xmlns:p14="http://schemas.microsoft.com/office/powerpoint/2010/main" val="1581859005"/>
       </p:ext>
     </p:extLst>
   </p:cSld>
@@ -4134,6 +4243,436 @@
         <p:cNvPr id="1" name="">
           <a:extLst>
             <a:ext uri="{FF2B5EF4-FFF2-40B4-BE49-F238E27FC236}">
+              <a16:creationId xmlns:a16="http://schemas.microsoft.com/office/drawing/2014/main" id="{91BF7C0E-2677-BADF-D636-6F9B71E665FA}"/>
+            </a:ext>
+          </a:extLst>
+        </p:cNvPr>
+        <p:cNvGrpSpPr/>
+        <p:nvPr/>
+      </p:nvGrpSpPr>
+      <p:grpSpPr>
+        <a:xfrm>
+          <a:off x="0" y="0"/>
+          <a:ext cx="0" cy="0"/>
+          <a:chOff x="0" y="0"/>
+          <a:chExt cx="0" cy="0"/>
+        </a:xfrm>
+      </p:grpSpPr>
+      <p:sp>
+        <p:nvSpPr>
+          <p:cNvPr id="16" name="object 16">
+            <a:extLst>
+              <a:ext uri="{FF2B5EF4-FFF2-40B4-BE49-F238E27FC236}">
+                <a16:creationId xmlns:a16="http://schemas.microsoft.com/office/drawing/2014/main" id="{2B8D44BF-A3B5-6BED-C39C-FA8260E83536}"/>
+              </a:ext>
+            </a:extLst>
+          </p:cNvPr>
+          <p:cNvSpPr txBox="1">
+            <a:spLocks noGrp="1"/>
+          </p:cNvSpPr>
+          <p:nvPr>
+            <p:ph type="title"/>
+          </p:nvPr>
+        </p:nvSpPr>
+        <p:spPr>
+          <a:xfrm>
+            <a:off x="685800" y="408883"/>
+            <a:ext cx="10994410" cy="705321"/>
+          </a:xfrm>
+          <a:prstGeom prst="rect">
+            <a:avLst/>
+          </a:prstGeom>
+        </p:spPr>
+        <p:txBody>
+          <a:bodyPr vert="horz" wrap="square" lIns="0" tIns="12700" rIns="0" bIns="0" rtlCol="0">
+            <a:spAutoFit/>
+          </a:bodyPr>
+          <a:lstStyle/>
+          <a:p>
+            <a:pPr marL="12700">
+              <a:lnSpc>
+                <a:spcPct val="100000"/>
+              </a:lnSpc>
+              <a:spcBef>
+                <a:spcPts val="100"/>
+              </a:spcBef>
+            </a:pPr>
+            <a:r>
+              <a:rPr lang="en-US" sz="2500" dirty="0"/>
+              <a:t>Learning outcome #4 – 4.1 2x2 Multimode Interference Coupler </a:t>
+            </a:r>
+            <a:br>
+              <a:rPr lang="en-US" sz="2500" dirty="0"/>
+            </a:br>
+            <a:r>
+              <a:rPr lang="en-US" b="0" dirty="0"/>
+              <a:t>Wavelength 1.55 µm, </a:t>
+            </a:r>
+            <a:r>
+              <a:rPr lang="en-US" b="0" dirty="0" err="1"/>
+              <a:t>wMMI</a:t>
+            </a:r>
+            <a:r>
+              <a:rPr lang="en-US" b="0" dirty="0"/>
+              <a:t> = 6.6 µm</a:t>
+            </a:r>
+            <a:endParaRPr lang="en-US" sz="2500" b="0" dirty="0">
+              <a:latin typeface="+mj-lt"/>
+              <a:cs typeface="Lucida Sans"/>
+            </a:endParaRPr>
+          </a:p>
+        </p:txBody>
+      </p:sp>
+      <p:pic>
+        <p:nvPicPr>
+          <p:cNvPr id="83" name="Gráfico 82">
+            <a:extLst>
+              <a:ext uri="{FF2B5EF4-FFF2-40B4-BE49-F238E27FC236}">
+                <a16:creationId xmlns:a16="http://schemas.microsoft.com/office/drawing/2014/main" id="{5DFCF1AD-6B06-F914-AC0B-80F0ED838EF9}"/>
+              </a:ext>
+            </a:extLst>
+          </p:cNvPr>
+          <p:cNvPicPr>
+            <a:picLocks noChangeAspect="1"/>
+          </p:cNvPicPr>
+          <p:nvPr/>
+        </p:nvPicPr>
+        <p:blipFill>
+          <a:blip r:embed="rId3">
+            <a:extLst>
+              <a:ext uri="{96DAC541-7B7A-43D3-8B79-37D633B846F1}">
+                <asvg:svgBlip xmlns:asvg="http://schemas.microsoft.com/office/drawing/2016/SVG/main" r:embed="rId4"/>
+              </a:ext>
+            </a:extLst>
+          </a:blip>
+          <a:stretch>
+            <a:fillRect/>
+          </a:stretch>
+        </p:blipFill>
+        <p:spPr>
+          <a:xfrm>
+            <a:off x="5045006" y="6356057"/>
+            <a:ext cx="6409575" cy="363174"/>
+          </a:xfrm>
+          <a:prstGeom prst="rect">
+            <a:avLst/>
+          </a:prstGeom>
+        </p:spPr>
+      </p:pic>
+      <p:sp>
+        <p:nvSpPr>
+          <p:cNvPr id="84" name="Marcador de número de diapositiva 83">
+            <a:extLst>
+              <a:ext uri="{FF2B5EF4-FFF2-40B4-BE49-F238E27FC236}">
+                <a16:creationId xmlns:a16="http://schemas.microsoft.com/office/drawing/2014/main" id="{4A656CCE-66E0-EAE0-5C63-DF1315DF6299}"/>
+              </a:ext>
+            </a:extLst>
+          </p:cNvPr>
+          <p:cNvSpPr>
+            <a:spLocks noGrp="1"/>
+          </p:cNvSpPr>
+          <p:nvPr>
+            <p:ph type="sldNum" sz="quarter" idx="7"/>
+          </p:nvPr>
+        </p:nvSpPr>
+        <p:spPr/>
+        <p:txBody>
+          <a:bodyPr/>
+          <a:lstStyle/>
+          <a:p>
+            <a:fld id="{B6F15528-21DE-4FAA-801E-634DDDAF4B2B}" type="slidenum">
+              <a:rPr lang="es-ES" smtClean="0"/>
+              <a:t>10</a:t>
+            </a:fld>
+            <a:endParaRPr lang="es-ES"/>
+          </a:p>
+        </p:txBody>
+      </p:sp>
+      <p:sp>
+        <p:nvSpPr>
+          <p:cNvPr id="3" name="Marcador de pie de página 2">
+            <a:extLst>
+              <a:ext uri="{FF2B5EF4-FFF2-40B4-BE49-F238E27FC236}">
+                <a16:creationId xmlns:a16="http://schemas.microsoft.com/office/drawing/2014/main" id="{D3AB6581-C493-80EB-A67F-5289454DAA28}"/>
+              </a:ext>
+            </a:extLst>
+          </p:cNvPr>
+          <p:cNvSpPr>
+            <a:spLocks noGrp="1"/>
+          </p:cNvSpPr>
+          <p:nvPr>
+            <p:ph type="ftr" sz="quarter" idx="5"/>
+          </p:nvPr>
+        </p:nvSpPr>
+        <p:spPr/>
+        <p:txBody>
+          <a:bodyPr/>
+          <a:lstStyle/>
+          <a:p>
+            <a:pPr marL="12700">
+              <a:spcBef>
+                <a:spcPts val="15"/>
+              </a:spcBef>
+            </a:pPr>
+            <a:r>
+              <a:rPr lang="es-ES" spc="-5"/>
+              <a:t>LAB 2.0. COUPLERS</a:t>
+            </a:r>
+            <a:endParaRPr lang="es-ES" spc="-5" dirty="0"/>
+          </a:p>
+        </p:txBody>
+      </p:sp>
+      <p:sp>
+        <p:nvSpPr>
+          <p:cNvPr id="2" name="CuadroTexto 1">
+            <a:extLst>
+              <a:ext uri="{FF2B5EF4-FFF2-40B4-BE49-F238E27FC236}">
+                <a16:creationId xmlns:a16="http://schemas.microsoft.com/office/drawing/2014/main" id="{B5029729-ADF3-3B30-4FF9-83BE1DB82BD7}"/>
+              </a:ext>
+            </a:extLst>
+          </p:cNvPr>
+          <p:cNvSpPr txBox="1"/>
+          <p:nvPr/>
+        </p:nvSpPr>
+        <p:spPr>
+          <a:xfrm>
+            <a:off x="609441" y="4819471"/>
+            <a:ext cx="11199971" cy="1200329"/>
+          </a:xfrm>
+          <a:prstGeom prst="rect">
+            <a:avLst/>
+          </a:prstGeom>
+          <a:solidFill>
+            <a:schemeClr val="bg1">
+              <a:lumMod val="95000"/>
+            </a:schemeClr>
+          </a:solidFill>
+          <a:ln w="28575">
+            <a:solidFill>
+              <a:srgbClr val="E0700D"/>
+            </a:solidFill>
+          </a:ln>
+        </p:spPr>
+        <p:txBody>
+          <a:bodyPr wrap="square" rtlCol="0">
+            <a:spAutoFit/>
+          </a:bodyPr>
+          <a:lstStyle/>
+          <a:p>
+            <a:pPr algn="just"/>
+            <a:r>
+              <a:rPr lang="en-US" sz="1200" dirty="0">
+                <a:latin typeface="Arial" panose="020B0604020202020204" pitchFamily="34" charset="0"/>
+                <a:cs typeface="Arial" panose="020B0604020202020204" pitchFamily="34" charset="0"/>
+              </a:rPr>
+              <a:t>Comment results (Coupling relationship, </a:t>
+            </a:r>
+            <a:r>
+              <a:rPr lang="en-US" sz="1200" dirty="0" err="1">
+                <a:latin typeface="Arial" panose="020B0604020202020204" pitchFamily="34" charset="0"/>
+                <a:cs typeface="Arial" panose="020B0604020202020204" pitchFamily="34" charset="0"/>
+              </a:rPr>
+              <a:t>Lpi</a:t>
+            </a:r>
+            <a:r>
+              <a:rPr lang="en-US" sz="1200" dirty="0">
+                <a:latin typeface="Arial" panose="020B0604020202020204" pitchFamily="34" charset="0"/>
+                <a:cs typeface="Arial" panose="020B0604020202020204" pitchFamily="34" charset="0"/>
+              </a:rPr>
+              <a:t>,  losses, comparison with Directional Coupler… )</a:t>
+            </a:r>
+          </a:p>
+          <a:p>
+            <a:pPr algn="just"/>
+            <a:endParaRPr lang="en-US" sz="1200" dirty="0">
+              <a:latin typeface="Arial" panose="020B0604020202020204" pitchFamily="34" charset="0"/>
+              <a:cs typeface="Arial" panose="020B0604020202020204" pitchFamily="34" charset="0"/>
+            </a:endParaRPr>
+          </a:p>
+          <a:p>
+            <a:pPr algn="just"/>
+            <a:endParaRPr lang="en-US" sz="1200" dirty="0">
+              <a:latin typeface="Arial" panose="020B0604020202020204" pitchFamily="34" charset="0"/>
+              <a:cs typeface="Arial" panose="020B0604020202020204" pitchFamily="34" charset="0"/>
+            </a:endParaRPr>
+          </a:p>
+          <a:p>
+            <a:pPr algn="just"/>
+            <a:endParaRPr lang="en-US" sz="1200" dirty="0">
+              <a:latin typeface="Arial" panose="020B0604020202020204" pitchFamily="34" charset="0"/>
+              <a:cs typeface="Arial" panose="020B0604020202020204" pitchFamily="34" charset="0"/>
+            </a:endParaRPr>
+          </a:p>
+          <a:p>
+            <a:pPr algn="just"/>
+            <a:endParaRPr lang="en-US" sz="1200" dirty="0">
+              <a:latin typeface="Arial" panose="020B0604020202020204" pitchFamily="34" charset="0"/>
+              <a:cs typeface="Arial" panose="020B0604020202020204" pitchFamily="34" charset="0"/>
+            </a:endParaRPr>
+          </a:p>
+          <a:p>
+            <a:pPr algn="just"/>
+            <a:endParaRPr lang="en-US" sz="1200" dirty="0">
+              <a:latin typeface="Arial" panose="020B0604020202020204" pitchFamily="34" charset="0"/>
+              <a:cs typeface="Arial" panose="020B0604020202020204" pitchFamily="34" charset="0"/>
+            </a:endParaRPr>
+          </a:p>
+        </p:txBody>
+      </p:sp>
+      <p:sp>
+        <p:nvSpPr>
+          <p:cNvPr id="7" name="Rectángulo 6">
+            <a:extLst>
+              <a:ext uri="{FF2B5EF4-FFF2-40B4-BE49-F238E27FC236}">
+                <a16:creationId xmlns:a16="http://schemas.microsoft.com/office/drawing/2014/main" id="{98DE5FDA-4E91-E843-E84A-1467BFAA9986}"/>
+              </a:ext>
+            </a:extLst>
+          </p:cNvPr>
+          <p:cNvSpPr/>
+          <p:nvPr/>
+        </p:nvSpPr>
+        <p:spPr>
+          <a:xfrm>
+            <a:off x="609441" y="1377510"/>
+            <a:ext cx="11199971" cy="3306028"/>
+          </a:xfrm>
+          <a:prstGeom prst="rect">
+            <a:avLst/>
+          </a:prstGeom>
+          <a:noFill/>
+          <a:ln w="28575">
+            <a:solidFill>
+              <a:srgbClr val="E0700D"/>
+            </a:solidFill>
+          </a:ln>
+        </p:spPr>
+        <p:style>
+          <a:lnRef idx="2">
+            <a:schemeClr val="accent1">
+              <a:shade val="15000"/>
+            </a:schemeClr>
+          </a:lnRef>
+          <a:fillRef idx="1">
+            <a:schemeClr val="accent1"/>
+          </a:fillRef>
+          <a:effectRef idx="0">
+            <a:schemeClr val="accent1"/>
+          </a:effectRef>
+          <a:fontRef idx="minor">
+            <a:schemeClr val="lt1"/>
+          </a:fontRef>
+        </p:style>
+        <p:txBody>
+          <a:bodyPr rtlCol="0" anchor="ctr"/>
+          <a:lstStyle/>
+          <a:p>
+            <a:pPr algn="ctr"/>
+            <a:endParaRPr lang="en-US"/>
+          </a:p>
+        </p:txBody>
+      </p:sp>
+      <p:sp>
+        <p:nvSpPr>
+          <p:cNvPr id="8" name="CuadroTexto 7">
+            <a:extLst>
+              <a:ext uri="{FF2B5EF4-FFF2-40B4-BE49-F238E27FC236}">
+                <a16:creationId xmlns:a16="http://schemas.microsoft.com/office/drawing/2014/main" id="{0DA14DBA-172E-DA2C-0573-6A00BF18F4A5}"/>
+              </a:ext>
+            </a:extLst>
+          </p:cNvPr>
+          <p:cNvSpPr txBox="1"/>
+          <p:nvPr/>
+        </p:nvSpPr>
+        <p:spPr>
+          <a:xfrm>
+            <a:off x="514280" y="2568859"/>
+            <a:ext cx="7718580" cy="923330"/>
+          </a:xfrm>
+          <a:prstGeom prst="rect">
+            <a:avLst/>
+          </a:prstGeom>
+          <a:noFill/>
+        </p:spPr>
+        <p:txBody>
+          <a:bodyPr wrap="square" rtlCol="0">
+            <a:spAutoFit/>
+          </a:bodyPr>
+          <a:lstStyle/>
+          <a:p>
+            <a:pPr algn="ctr"/>
+            <a:r>
+              <a:rPr lang="en-US" b="1" dirty="0"/>
+              <a:t>deep</a:t>
+            </a:r>
+            <a:r>
+              <a:rPr lang="en-US" dirty="0"/>
+              <a:t> waveguide</a:t>
+            </a:r>
+          </a:p>
+          <a:p>
+            <a:pPr algn="ctr"/>
+            <a:endParaRPr lang="en-US" dirty="0"/>
+          </a:p>
+          <a:p>
+            <a:pPr algn="ctr"/>
+            <a:r>
+              <a:rPr lang="en-US" dirty="0"/>
+              <a:t>Paste propagation plots and console results</a:t>
+            </a:r>
+          </a:p>
+        </p:txBody>
+      </p:sp>
+      <p:pic>
+        <p:nvPicPr>
+          <p:cNvPr id="5" name="Imagen 4">
+            <a:extLst>
+              <a:ext uri="{FF2B5EF4-FFF2-40B4-BE49-F238E27FC236}">
+                <a16:creationId xmlns:a16="http://schemas.microsoft.com/office/drawing/2014/main" id="{0306A81B-1DE7-4993-A6AA-D02ECE945160}"/>
+              </a:ext>
+            </a:extLst>
+          </p:cNvPr>
+          <p:cNvPicPr>
+            <a:picLocks noChangeAspect="1"/>
+          </p:cNvPicPr>
+          <p:nvPr/>
+        </p:nvPicPr>
+        <p:blipFill>
+          <a:blip r:embed="rId5"/>
+          <a:stretch>
+            <a:fillRect/>
+          </a:stretch>
+        </p:blipFill>
+        <p:spPr>
+          <a:xfrm>
+            <a:off x="4252719" y="1484955"/>
+            <a:ext cx="3686562" cy="3091138"/>
+          </a:xfrm>
+          <a:prstGeom prst="rect">
+            <a:avLst/>
+          </a:prstGeom>
+        </p:spPr>
+      </p:pic>
+    </p:spTree>
+    <p:extLst>
+      <p:ext uri="{BB962C8B-B14F-4D97-AF65-F5344CB8AC3E}">
+        <p14:creationId xmlns:p14="http://schemas.microsoft.com/office/powerpoint/2010/main" val="2815679427"/>
+      </p:ext>
+    </p:extLst>
+  </p:cSld>
+  <p:clrMapOvr>
+    <a:masterClrMapping/>
+  </p:clrMapOvr>
+</p:sld>
+</file>
+
+<file path=ppt/slides/slide11.xml><?xml version="1.0" encoding="utf-8"?>
+<p:sld xmlns:a="http://schemas.openxmlformats.org/drawingml/2006/main" xmlns:r="http://schemas.openxmlformats.org/officeDocument/2006/relationships" xmlns:p="http://schemas.openxmlformats.org/presentationml/2006/main">
+  <p:cSld>
+    <p:spTree>
+      <p:nvGrpSpPr>
+        <p:cNvPr id="1" name="">
+          <a:extLst>
+            <a:ext uri="{FF2B5EF4-FFF2-40B4-BE49-F238E27FC236}">
               <a16:creationId xmlns:a16="http://schemas.microsoft.com/office/drawing/2014/main" id="{D1F11DBE-A482-7036-60B2-70B7E2318F46}"/>
             </a:ext>
           </a:extLst>
@@ -4273,7 +4812,7 @@
           <a:p>
             <a:fld id="{B6F15528-21DE-4FAA-801E-634DDDAF4B2B}" type="slidenum">
               <a:rPr lang="es-ES" smtClean="0"/>
-              <a:t>10</a:t>
+              <a:t>11</a:t>
             </a:fld>
             <a:endParaRPr lang="es-ES"/>
           </a:p>
@@ -4711,7 +5250,7 @@
 </p:sld>
 </file>
 
-<file path=ppt/slides/slide11.xml><?xml version="1.0" encoding="utf-8"?>
+<file path=ppt/slides/slide12.xml><?xml version="1.0" encoding="utf-8"?>
 <p:sld xmlns:a="http://schemas.openxmlformats.org/drawingml/2006/main" xmlns:r="http://schemas.openxmlformats.org/officeDocument/2006/relationships" xmlns:p="http://schemas.openxmlformats.org/presentationml/2006/main">
   <p:cSld>
     <p:spTree>
@@ -4858,7 +5397,7 @@
           <a:p>
             <a:fld id="{B6F15528-21DE-4FAA-801E-634DDDAF4B2B}" type="slidenum">
               <a:rPr lang="es-ES" smtClean="0"/>
-              <a:t>11</a:t>
+              <a:t>12</a:t>
             </a:fld>
             <a:endParaRPr lang="es-ES"/>
           </a:p>
@@ -5192,7 +5731,7 @@
 </p:sld>
 </file>
 
-<file path=ppt/slides/slide12.xml><?xml version="1.0" encoding="utf-8"?>
+<file path=ppt/slides/slide13.xml><?xml version="1.0" encoding="utf-8"?>
 <p:sld xmlns:a="http://schemas.openxmlformats.org/drawingml/2006/main" xmlns:r="http://schemas.openxmlformats.org/officeDocument/2006/relationships" xmlns:p="http://schemas.openxmlformats.org/presentationml/2006/main">
   <p:cSld>
     <p:spTree>
@@ -5347,7 +5886,7 @@
           <a:p>
             <a:fld id="{B6F15528-21DE-4FAA-801E-634DDDAF4B2B}" type="slidenum">
               <a:rPr lang="es-ES" smtClean="0"/>
-              <a:t>12</a:t>
+              <a:t>13</a:t>
             </a:fld>
             <a:endParaRPr lang="es-ES"/>
           </a:p>
@@ -5600,7 +6139,7 @@
 </p:sld>
 </file>
 
-<file path=ppt/slides/slide13.xml><?xml version="1.0" encoding="utf-8"?>
+<file path=ppt/slides/slide14.xml><?xml version="1.0" encoding="utf-8"?>
 <p:sld xmlns:a="http://schemas.openxmlformats.org/drawingml/2006/main" xmlns:r="http://schemas.openxmlformats.org/officeDocument/2006/relationships" xmlns:p="http://schemas.openxmlformats.org/presentationml/2006/main">
   <p:cSld>
     <p:spTree>
@@ -5756,7 +6295,7 @@
           <a:p>
             <a:fld id="{B6F15528-21DE-4FAA-801E-634DDDAF4B2B}" type="slidenum">
               <a:rPr lang="es-ES" smtClean="0"/>
-              <a:t>13</a:t>
+              <a:t>14</a:t>
             </a:fld>
             <a:endParaRPr lang="es-ES"/>
           </a:p>
@@ -6312,7 +6851,7 @@
 </p:sld>
 </file>
 
-<file path=ppt/slides/slide14.xml><?xml version="1.0" encoding="utf-8"?>
+<file path=ppt/slides/slide15.xml><?xml version="1.0" encoding="utf-8"?>
 <p:sld xmlns:a="http://schemas.openxmlformats.org/drawingml/2006/main" xmlns:r="http://schemas.openxmlformats.org/officeDocument/2006/relationships" xmlns:p="http://schemas.openxmlformats.org/presentationml/2006/main">
   <p:cSld>
     <p:spTree>
@@ -6465,7 +7004,7 @@
           <a:p>
             <a:fld id="{B6F15528-21DE-4FAA-801E-634DDDAF4B2B}" type="slidenum">
               <a:rPr lang="es-ES" smtClean="0"/>
-              <a:t>14</a:t>
+              <a:t>15</a:t>
             </a:fld>
             <a:endParaRPr lang="es-ES"/>
           </a:p>
@@ -6998,7 +7537,7 @@
 </p:sld>
 </file>
 
-<file path=ppt/slides/slide15.xml><?xml version="1.0" encoding="utf-8"?>
+<file path=ppt/slides/slide16.xml><?xml version="1.0" encoding="utf-8"?>
 <p:sld xmlns:a="http://schemas.openxmlformats.org/drawingml/2006/main" xmlns:r="http://schemas.openxmlformats.org/officeDocument/2006/relationships" xmlns:p="http://schemas.openxmlformats.org/presentationml/2006/main">
   <p:cSld>
     <p:spTree>
@@ -7148,7 +7687,7 @@
           <a:p>
             <a:fld id="{B6F15528-21DE-4FAA-801E-634DDDAF4B2B}" type="slidenum">
               <a:rPr lang="es-ES" smtClean="0"/>
-              <a:t>15</a:t>
+              <a:t>16</a:t>
             </a:fld>
             <a:endParaRPr lang="es-ES"/>
           </a:p>
@@ -7704,7 +8243,7 @@
 </p:sld>
 </file>
 
-<file path=ppt/slides/slide16.xml><?xml version="1.0" encoding="utf-8"?>
+<file path=ppt/slides/slide17.xml><?xml version="1.0" encoding="utf-8"?>
 <p:sld xmlns:a="http://schemas.openxmlformats.org/drawingml/2006/main" xmlns:r="http://schemas.openxmlformats.org/officeDocument/2006/relationships" xmlns:p="http://schemas.openxmlformats.org/presentationml/2006/main">
   <p:cSld>
     <p:spTree>
@@ -7854,7 +8393,7 @@
           <a:p>
             <a:fld id="{B6F15528-21DE-4FAA-801E-634DDDAF4B2B}" type="slidenum">
               <a:rPr lang="es-ES" smtClean="0"/>
-              <a:t>16</a:t>
+              <a:t>17</a:t>
             </a:fld>
             <a:endParaRPr lang="es-ES"/>
           </a:p>
@@ -8401,7 +8940,7 @@
 </p:sld>
 </file>
 
-<file path=ppt/slides/slide17.xml><?xml version="1.0" encoding="utf-8"?>
+<file path=ppt/slides/slide18.xml><?xml version="1.0" encoding="utf-8"?>
 <p:sld xmlns:a="http://schemas.openxmlformats.org/drawingml/2006/main" xmlns:r="http://schemas.openxmlformats.org/officeDocument/2006/relationships" xmlns:p="http://schemas.openxmlformats.org/presentationml/2006/main">
   <p:cSld>
     <p:spTree>
@@ -8540,7 +9079,7 @@
           <a:p>
             <a:fld id="{B6F15528-21DE-4FAA-801E-634DDDAF4B2B}" type="slidenum">
               <a:rPr lang="es-ES" smtClean="0"/>
-              <a:t>17</a:t>
+              <a:t>18</a:t>
             </a:fld>
             <a:endParaRPr lang="es-ES"/>
           </a:p>
@@ -11729,7 +12268,7 @@
         <p:spPr>
           <a:xfrm>
             <a:off x="609441" y="4860334"/>
-            <a:ext cx="11199971" cy="1384995"/>
+            <a:ext cx="11199971" cy="1200329"/>
           </a:xfrm>
           <a:prstGeom prst="rect">
             <a:avLst/>
@@ -11750,16 +12289,6 @@
             <a:spAutoFit/>
           </a:bodyPr>
           <a:lstStyle/>
-          <a:p>
-            <a:pPr algn="just"/>
-            <a:r>
-              <a:rPr lang="en-US" sz="1200" dirty="0">
-                <a:latin typeface="Arial" panose="020B0604020202020204" pitchFamily="34" charset="0"/>
-                <a:cs typeface="Arial" panose="020B0604020202020204" pitchFamily="34" charset="0"/>
-              </a:rPr>
-              <a:t>GAP = 0.6</a:t>
-            </a:r>
-          </a:p>
           <a:p>
             <a:pPr algn="just"/>
             <a:r>
@@ -12679,198 +13208,20 @@
       </p:sp>
       <p:sp>
         <p:nvSpPr>
-          <p:cNvPr id="2" name="CuadroTexto 1">
-            <a:extLst>
-              <a:ext uri="{FF2B5EF4-FFF2-40B4-BE49-F238E27FC236}">
-                <a16:creationId xmlns:a16="http://schemas.microsoft.com/office/drawing/2014/main" id="{82A62DD6-5488-72A1-9926-0CAEE59089A9}"/>
-              </a:ext>
-            </a:extLst>
-          </p:cNvPr>
-          <p:cNvSpPr txBox="1"/>
+          <p:cNvPr id="7" name="Rectángulo 6">
+            <a:extLst>
+              <a:ext uri="{FF2B5EF4-FFF2-40B4-BE49-F238E27FC236}">
+                <a16:creationId xmlns:a16="http://schemas.microsoft.com/office/drawing/2014/main" id="{FBC7D187-267A-ADD4-764C-D3820B8ED302}"/>
+              </a:ext>
+            </a:extLst>
+          </p:cNvPr>
+          <p:cNvSpPr/>
           <p:nvPr/>
         </p:nvSpPr>
         <p:spPr>
           <a:xfrm>
-            <a:off x="609441" y="4860334"/>
-            <a:ext cx="11199971" cy="1569660"/>
-          </a:xfrm>
-          <a:prstGeom prst="rect">
-            <a:avLst/>
-          </a:prstGeom>
-          <a:solidFill>
-            <a:schemeClr val="bg1">
-              <a:lumMod val="95000"/>
-            </a:schemeClr>
-          </a:solidFill>
-          <a:ln w="28575">
-            <a:solidFill>
-              <a:srgbClr val="E0700D"/>
-            </a:solidFill>
-          </a:ln>
-        </p:spPr>
-        <p:txBody>
-          <a:bodyPr wrap="square" rtlCol="0">
-            <a:spAutoFit/>
-          </a:bodyPr>
-          <a:lstStyle/>
-          <a:p>
-            <a:pPr algn="just"/>
-            <a:r>
-              <a:rPr lang="en-US" sz="1200" dirty="0" err="1">
-                <a:latin typeface="Arial" panose="020B0604020202020204" pitchFamily="34" charset="0"/>
-                <a:cs typeface="Arial" panose="020B0604020202020204" pitchFamily="34" charset="0"/>
-              </a:rPr>
-              <a:t>Hace</a:t>
-            </a:r>
-            <a:r>
-              <a:rPr lang="en-US" sz="1200" dirty="0">
-                <a:latin typeface="Arial" panose="020B0604020202020204" pitchFamily="34" charset="0"/>
-                <a:cs typeface="Arial" panose="020B0604020202020204" pitchFamily="34" charset="0"/>
-              </a:rPr>
-              <a:t> </a:t>
-            </a:r>
-            <a:r>
-              <a:rPr lang="en-US" sz="1200" dirty="0" err="1">
-                <a:latin typeface="Arial" panose="020B0604020202020204" pitchFamily="34" charset="0"/>
-                <a:cs typeface="Arial" panose="020B0604020202020204" pitchFamily="34" charset="0"/>
-              </a:rPr>
-              <a:t>todos</a:t>
-            </a:r>
-            <a:r>
-              <a:rPr lang="en-US" sz="1200" dirty="0">
-                <a:latin typeface="Arial" panose="020B0604020202020204" pitchFamily="34" charset="0"/>
-                <a:cs typeface="Arial" panose="020B0604020202020204" pitchFamily="34" charset="0"/>
-              </a:rPr>
-              <a:t> los </a:t>
-            </a:r>
-            <a:r>
-              <a:rPr lang="en-US" sz="1200" dirty="0" err="1">
-                <a:latin typeface="Arial" panose="020B0604020202020204" pitchFamily="34" charset="0"/>
-                <a:cs typeface="Arial" panose="020B0604020202020204" pitchFamily="34" charset="0"/>
-              </a:rPr>
-              <a:t>casos</a:t>
-            </a:r>
-            <a:r>
-              <a:rPr lang="en-US" sz="1200" dirty="0">
-                <a:latin typeface="Arial" panose="020B0604020202020204" pitchFamily="34" charset="0"/>
-                <a:cs typeface="Arial" panose="020B0604020202020204" pitchFamily="34" charset="0"/>
-              </a:rPr>
-              <a:t> y </a:t>
-            </a:r>
-            <a:r>
-              <a:rPr lang="en-US" sz="1200" dirty="0" err="1">
-                <a:latin typeface="Arial" panose="020B0604020202020204" pitchFamily="34" charset="0"/>
-                <a:cs typeface="Arial" panose="020B0604020202020204" pitchFamily="34" charset="0"/>
-              </a:rPr>
-              <a:t>apuntarlos</a:t>
-            </a:r>
-            <a:r>
-              <a:rPr lang="en-US" sz="1200" dirty="0">
-                <a:latin typeface="Arial" panose="020B0604020202020204" pitchFamily="34" charset="0"/>
-                <a:cs typeface="Arial" panose="020B0604020202020204" pitchFamily="34" charset="0"/>
-              </a:rPr>
-              <a:t> </a:t>
-            </a:r>
-            <a:r>
-              <a:rPr lang="en-US" sz="1200" dirty="0" err="1">
-                <a:latin typeface="Arial" panose="020B0604020202020204" pitchFamily="34" charset="0"/>
-                <a:cs typeface="Arial" panose="020B0604020202020204" pitchFamily="34" charset="0"/>
-              </a:rPr>
-              <a:t>en</a:t>
-            </a:r>
-            <a:r>
-              <a:rPr lang="en-US" sz="1200" dirty="0">
-                <a:latin typeface="Arial" panose="020B0604020202020204" pitchFamily="34" charset="0"/>
-                <a:cs typeface="Arial" panose="020B0604020202020204" pitchFamily="34" charset="0"/>
-              </a:rPr>
-              <a:t> la table </a:t>
-            </a:r>
-            <a:r>
-              <a:rPr lang="en-US" sz="1200" dirty="0" err="1">
-                <a:latin typeface="Arial" panose="020B0604020202020204" pitchFamily="34" charset="0"/>
-                <a:cs typeface="Arial" panose="020B0604020202020204" pitchFamily="34" charset="0"/>
-              </a:rPr>
-              <a:t>manuelamente</a:t>
-            </a:r>
-            <a:r>
-              <a:rPr lang="en-US" sz="1200">
-                <a:latin typeface="Arial" panose="020B0604020202020204" pitchFamily="34" charset="0"/>
-                <a:cs typeface="Arial" panose="020B0604020202020204" pitchFamily="34" charset="0"/>
-              </a:rPr>
-              <a:t>.</a:t>
-            </a:r>
-            <a:endParaRPr lang="en-US" sz="1200" dirty="0">
-              <a:latin typeface="Arial" panose="020B0604020202020204" pitchFamily="34" charset="0"/>
-              <a:cs typeface="Arial" panose="020B0604020202020204" pitchFamily="34" charset="0"/>
-            </a:endParaRPr>
-          </a:p>
-          <a:p>
-            <a:pPr algn="just"/>
-            <a:endParaRPr lang="en-US" sz="1200" dirty="0">
-              <a:latin typeface="Arial" panose="020B0604020202020204" pitchFamily="34" charset="0"/>
-              <a:cs typeface="Arial" panose="020B0604020202020204" pitchFamily="34" charset="0"/>
-            </a:endParaRPr>
-          </a:p>
-          <a:p>
-            <a:pPr algn="just"/>
-            <a:endParaRPr lang="en-US" sz="1200" dirty="0">
-              <a:latin typeface="Arial" panose="020B0604020202020204" pitchFamily="34" charset="0"/>
-              <a:cs typeface="Arial" panose="020B0604020202020204" pitchFamily="34" charset="0"/>
-            </a:endParaRPr>
-          </a:p>
-          <a:p>
-            <a:pPr algn="just"/>
-            <a:endParaRPr lang="en-US" sz="1200" dirty="0">
-              <a:latin typeface="Arial" panose="020B0604020202020204" pitchFamily="34" charset="0"/>
-              <a:cs typeface="Arial" panose="020B0604020202020204" pitchFamily="34" charset="0"/>
-            </a:endParaRPr>
-          </a:p>
-          <a:p>
-            <a:pPr algn="just"/>
-            <a:endParaRPr lang="en-US" sz="1200" dirty="0">
-              <a:latin typeface="Arial" panose="020B0604020202020204" pitchFamily="34" charset="0"/>
-              <a:cs typeface="Arial" panose="020B0604020202020204" pitchFamily="34" charset="0"/>
-            </a:endParaRPr>
-          </a:p>
-          <a:p>
-            <a:pPr algn="just"/>
-            <a:endParaRPr lang="en-US" sz="1200" dirty="0">
-              <a:latin typeface="Arial" panose="020B0604020202020204" pitchFamily="34" charset="0"/>
-              <a:cs typeface="Arial" panose="020B0604020202020204" pitchFamily="34" charset="0"/>
-            </a:endParaRPr>
-          </a:p>
-          <a:p>
-            <a:pPr algn="just"/>
-            <a:endParaRPr lang="en-US" sz="1200" dirty="0">
-              <a:latin typeface="Arial" panose="020B0604020202020204" pitchFamily="34" charset="0"/>
-              <a:cs typeface="Arial" panose="020B0604020202020204" pitchFamily="34" charset="0"/>
-            </a:endParaRPr>
-          </a:p>
-          <a:p>
-            <a:pPr algn="just"/>
-            <a:endParaRPr lang="en-US" sz="1200" dirty="0">
-              <a:latin typeface="Arial" panose="020B0604020202020204" pitchFamily="34" charset="0"/>
-              <a:cs typeface="Arial" panose="020B0604020202020204" pitchFamily="34" charset="0"/>
-            </a:endParaRPr>
-          </a:p>
-        </p:txBody>
-      </p:sp>
-      <p:sp>
-        <p:nvSpPr>
-          <p:cNvPr id="7" name="Rectángulo 6">
-            <a:extLst>
-              <a:ext uri="{FF2B5EF4-FFF2-40B4-BE49-F238E27FC236}">
-                <a16:creationId xmlns:a16="http://schemas.microsoft.com/office/drawing/2014/main" id="{FBC7D187-267A-ADD4-764C-D3820B8ED302}"/>
-              </a:ext>
-            </a:extLst>
-          </p:cNvPr>
-          <p:cNvSpPr/>
-          <p:nvPr/>
-        </p:nvSpPr>
-        <p:spPr>
-          <a:xfrm>
-            <a:off x="609441" y="1418373"/>
-            <a:ext cx="11199971" cy="3306028"/>
+            <a:off x="609441" y="1418372"/>
+            <a:ext cx="11199971" cy="4830027"/>
           </a:xfrm>
           <a:prstGeom prst="rect">
             <a:avLst/>
@@ -12929,8 +13280,8 @@
         </p:blipFill>
         <p:spPr>
           <a:xfrm>
-            <a:off x="1371600" y="1435306"/>
-            <a:ext cx="2676664" cy="3262981"/>
+            <a:off x="1768406" y="1836219"/>
+            <a:ext cx="3276600" cy="3994332"/>
           </a:xfrm>
           <a:prstGeom prst="rect">
             <a:avLst/>
@@ -12952,14 +13303,14 @@
           <p:nvPr>
             <p:extLst>
               <p:ext uri="{D42A27DB-BD31-4B8C-83A1-F6EECF244321}">
-                <p14:modId xmlns:p14="http://schemas.microsoft.com/office/powerpoint/2010/main" val="2144816584"/>
+                <p14:modId xmlns:p14="http://schemas.microsoft.com/office/powerpoint/2010/main" val="1854595833"/>
               </p:ext>
             </p:extLst>
           </p:nvPr>
         </p:nvGraphicFramePr>
         <p:xfrm>
-          <a:off x="6035538" y="60961"/>
-          <a:ext cx="4216400" cy="4663440"/>
+          <a:off x="7562306" y="1501665"/>
+          <a:ext cx="3162300" cy="4663440"/>
         </p:xfrm>
         <a:graphic>
           <a:graphicData uri="http://schemas.openxmlformats.org/drawingml/2006/table">
@@ -12986,13 +13337,6 @@
                   <a:extLst>
                     <a:ext uri="{9D8B030D-6E8A-4147-A177-3AD203B41FA5}">
                       <a16:colId xmlns:a16="http://schemas.microsoft.com/office/drawing/2014/main" val="3236221254"/>
-                    </a:ext>
-                  </a:extLst>
-                </a:gridCol>
-                <a:gridCol w="1054100">
-                  <a:extLst>
-                    <a:ext uri="{9D8B030D-6E8A-4147-A177-3AD203B41FA5}">
-                      <a16:colId xmlns:a16="http://schemas.microsoft.com/office/drawing/2014/main" val="3664213930"/>
                     </a:ext>
                   </a:extLst>
                 </a:gridCol>
@@ -13049,23 +13393,6 @@
                   </a:txBody>
                   <a:tcPr/>
                 </a:tc>
-                <a:tc>
-                  <a:txBody>
-                    <a:bodyPr/>
-                    <a:lstStyle/>
-                    <a:p>
-                      <a:r>
-                        <a:rPr lang="es-ES" dirty="0" err="1"/>
-                        <a:t>L_pi</a:t>
-                      </a:r>
-                      <a:r>
-                        <a:rPr lang="es-ES" dirty="0"/>
-                        <a:t>/2 RATIO</a:t>
-                      </a:r>
-                    </a:p>
-                  </a:txBody>
-                  <a:tcPr/>
-                </a:tc>
                 <a:extLst>
                   <a:ext uri="{0D108BD9-81ED-4DB2-BD59-A6C34878D82A}">
                     <a16:rowId xmlns:a16="http://schemas.microsoft.com/office/drawing/2014/main" val="2740672354"/>
@@ -13078,7 +13405,11 @@
                     <a:bodyPr/>
                     <a:lstStyle/>
                     <a:p>
-                      <a:endParaRPr lang="es-ES" dirty="0"/>
+                      <a:pPr algn="ctr"/>
+                      <a:r>
+                        <a:rPr lang="es-ES" dirty="0"/>
+                        <a:t>0,6</a:t>
+                      </a:r>
                     </a:p>
                   </a:txBody>
                   <a:tcPr/>
@@ -13088,7 +13419,11 @@
                     <a:bodyPr/>
                     <a:lstStyle/>
                     <a:p>
-                      <a:endParaRPr lang="es-ES"/>
+                      <a:pPr algn="ctr"/>
+                      <a:r>
+                        <a:rPr lang="es-ES" dirty="0"/>
+                        <a:t>0.1851</a:t>
+                      </a:r>
                     </a:p>
                   </a:txBody>
                   <a:tcPr/>
@@ -13098,17 +13433,11 @@
                     <a:bodyPr/>
                     <a:lstStyle/>
                     <a:p>
-                      <a:endParaRPr lang="es-ES"/>
-                    </a:p>
-                  </a:txBody>
-                  <a:tcPr/>
-                </a:tc>
-                <a:tc>
-                  <a:txBody>
-                    <a:bodyPr/>
-                    <a:lstStyle/>
-                    <a:p>
-                      <a:endParaRPr lang="es-ES"/>
+                      <a:pPr algn="ctr"/>
+                      <a:r>
+                        <a:rPr lang="es-ES" dirty="0"/>
+                        <a:t>0.9987</a:t>
+                      </a:r>
                     </a:p>
                   </a:txBody>
                   <a:tcPr/>
@@ -13125,7 +13454,11 @@
                     <a:bodyPr/>
                     <a:lstStyle/>
                     <a:p>
-                      <a:endParaRPr lang="es-ES"/>
+                      <a:pPr algn="ctr"/>
+                      <a:r>
+                        <a:rPr lang="es-ES" dirty="0"/>
+                        <a:t>0,7</a:t>
+                      </a:r>
                     </a:p>
                   </a:txBody>
                   <a:tcPr/>
@@ -13135,7 +13468,11 @@
                     <a:bodyPr/>
                     <a:lstStyle/>
                     <a:p>
-                      <a:endParaRPr lang="es-ES"/>
+                      <a:pPr algn="ctr"/>
+                      <a:r>
+                        <a:rPr lang="es-ES" dirty="0"/>
+                        <a:t>0.1161</a:t>
+                      </a:r>
                     </a:p>
                   </a:txBody>
                   <a:tcPr/>
@@ -13145,17 +13482,11 @@
                     <a:bodyPr/>
                     <a:lstStyle/>
                     <a:p>
-                      <a:endParaRPr lang="es-ES"/>
-                    </a:p>
-                  </a:txBody>
-                  <a:tcPr/>
-                </a:tc>
-                <a:tc>
-                  <a:txBody>
-                    <a:bodyPr/>
-                    <a:lstStyle/>
-                    <a:p>
-                      <a:endParaRPr lang="es-ES"/>
+                      <a:pPr algn="ctr"/>
+                      <a:r>
+                        <a:rPr lang="es-ES" dirty="0"/>
+                        <a:t>0.9989</a:t>
+                      </a:r>
                     </a:p>
                   </a:txBody>
                   <a:tcPr/>
@@ -13172,7 +13503,11 @@
                     <a:bodyPr/>
                     <a:lstStyle/>
                     <a:p>
-                      <a:endParaRPr lang="es-ES"/>
+                      <a:pPr algn="ctr"/>
+                      <a:r>
+                        <a:rPr lang="es-ES" dirty="0"/>
+                        <a:t>0,8</a:t>
+                      </a:r>
                     </a:p>
                   </a:txBody>
                   <a:tcPr/>
@@ -13182,7 +13517,11 @@
                     <a:bodyPr/>
                     <a:lstStyle/>
                     <a:p>
-                      <a:endParaRPr lang="es-ES"/>
+                      <a:pPr algn="ctr"/>
+                      <a:r>
+                        <a:rPr lang="es-ES" dirty="0"/>
+                        <a:t>0.0968</a:t>
+                      </a:r>
                     </a:p>
                   </a:txBody>
                   <a:tcPr/>
@@ -13192,17 +13531,11 @@
                     <a:bodyPr/>
                     <a:lstStyle/>
                     <a:p>
-                      <a:endParaRPr lang="es-ES"/>
-                    </a:p>
-                  </a:txBody>
-                  <a:tcPr/>
-                </a:tc>
-                <a:tc>
-                  <a:txBody>
-                    <a:bodyPr/>
-                    <a:lstStyle/>
-                    <a:p>
-                      <a:endParaRPr lang="es-ES"/>
+                      <a:pPr algn="ctr"/>
+                      <a:r>
+                        <a:rPr lang="es-ES" dirty="0"/>
+                        <a:t>0.9990</a:t>
+                      </a:r>
                     </a:p>
                   </a:txBody>
                   <a:tcPr/>
@@ -13219,7 +13552,11 @@
                     <a:bodyPr/>
                     <a:lstStyle/>
                     <a:p>
-                      <a:endParaRPr lang="es-ES"/>
+                      <a:pPr algn="ctr"/>
+                      <a:r>
+                        <a:rPr lang="es-ES" dirty="0"/>
+                        <a:t>0,9</a:t>
+                      </a:r>
                     </a:p>
                   </a:txBody>
                   <a:tcPr/>
@@ -13229,7 +13566,20 @@
                     <a:bodyPr/>
                     <a:lstStyle/>
                     <a:p>
-                      <a:endParaRPr lang="es-ES"/>
+                      <a:pPr algn="ctr"/>
+                      <a:r>
+                        <a:rPr lang="es-ES" b="0" i="0" dirty="0">
+                          <a:solidFill>
+                            <a:schemeClr val="dk1"/>
+                          </a:solidFill>
+                          <a:effectLst/>
+                          <a:latin typeface="+mn-lt"/>
+                          <a:ea typeface="+mn-ea"/>
+                          <a:cs typeface="+mn-cs"/>
+                        </a:rPr>
+                        <a:t>0.1191</a:t>
+                      </a:r>
+                      <a:endParaRPr lang="es-ES" dirty="0"/>
                     </a:p>
                   </a:txBody>
                   <a:tcPr/>
@@ -13239,17 +13589,20 @@
                     <a:bodyPr/>
                     <a:lstStyle/>
                     <a:p>
-                      <a:endParaRPr lang="es-ES"/>
-                    </a:p>
-                  </a:txBody>
-                  <a:tcPr/>
-                </a:tc>
-                <a:tc>
-                  <a:txBody>
-                    <a:bodyPr/>
-                    <a:lstStyle/>
-                    <a:p>
-                      <a:endParaRPr lang="es-ES"/>
+                      <a:pPr algn="ctr"/>
+                      <a:r>
+                        <a:rPr lang="es-ES" b="0" i="0" dirty="0">
+                          <a:solidFill>
+                            <a:schemeClr val="dk1"/>
+                          </a:solidFill>
+                          <a:effectLst/>
+                          <a:latin typeface="+mn-lt"/>
+                          <a:ea typeface="+mn-ea"/>
+                          <a:cs typeface="+mn-cs"/>
+                        </a:rPr>
+                        <a:t>0.9992</a:t>
+                      </a:r>
+                      <a:endParaRPr lang="es-ES" dirty="0"/>
                     </a:p>
                   </a:txBody>
                   <a:tcPr/>
@@ -13266,7 +13619,11 @@
                     <a:bodyPr/>
                     <a:lstStyle/>
                     <a:p>
-                      <a:endParaRPr lang="es-ES"/>
+                      <a:pPr algn="ctr"/>
+                      <a:r>
+                        <a:rPr lang="es-ES" dirty="0"/>
+                        <a:t>1</a:t>
+                      </a:r>
                     </a:p>
                   </a:txBody>
                   <a:tcPr/>
@@ -13276,7 +13633,20 @@
                     <a:bodyPr/>
                     <a:lstStyle/>
                     <a:p>
-                      <a:endParaRPr lang="es-ES"/>
+                      <a:pPr algn="ctr"/>
+                      <a:r>
+                        <a:rPr lang="es-ES" b="0" i="0" dirty="0">
+                          <a:solidFill>
+                            <a:schemeClr val="dk1"/>
+                          </a:solidFill>
+                          <a:effectLst/>
+                          <a:latin typeface="+mn-lt"/>
+                          <a:ea typeface="+mn-ea"/>
+                          <a:cs typeface="+mn-cs"/>
+                        </a:rPr>
+                        <a:t>0.1938</a:t>
+                      </a:r>
+                      <a:endParaRPr lang="es-ES" dirty="0"/>
                     </a:p>
                   </a:txBody>
                   <a:tcPr/>
@@ -13286,17 +13656,20 @@
                     <a:bodyPr/>
                     <a:lstStyle/>
                     <a:p>
-                      <a:endParaRPr lang="es-ES"/>
-                    </a:p>
-                  </a:txBody>
-                  <a:tcPr/>
-                </a:tc>
-                <a:tc>
-                  <a:txBody>
-                    <a:bodyPr/>
-                    <a:lstStyle/>
-                    <a:p>
-                      <a:endParaRPr lang="es-ES"/>
+                      <a:pPr algn="ctr"/>
+                      <a:r>
+                        <a:rPr lang="es-ES" b="0" i="0" dirty="0">
+                          <a:solidFill>
+                            <a:schemeClr val="dk1"/>
+                          </a:solidFill>
+                          <a:effectLst/>
+                          <a:latin typeface="+mn-lt"/>
+                          <a:ea typeface="+mn-ea"/>
+                          <a:cs typeface="+mn-cs"/>
+                        </a:rPr>
+                        <a:t>0.9994</a:t>
+                      </a:r>
+                      <a:endParaRPr lang="es-ES" dirty="0"/>
                     </a:p>
                   </a:txBody>
                   <a:tcPr/>
@@ -13313,7 +13686,11 @@
                     <a:bodyPr/>
                     <a:lstStyle/>
                     <a:p>
-                      <a:endParaRPr lang="es-ES"/>
+                      <a:pPr algn="ctr"/>
+                      <a:r>
+                        <a:rPr lang="es-ES" dirty="0"/>
+                        <a:t>1,1</a:t>
+                      </a:r>
                     </a:p>
                   </a:txBody>
                   <a:tcPr/>
@@ -13323,7 +13700,20 @@
                     <a:bodyPr/>
                     <a:lstStyle/>
                     <a:p>
-                      <a:endParaRPr lang="es-ES"/>
+                      <a:pPr algn="ctr"/>
+                      <a:r>
+                        <a:rPr lang="es-ES" b="0" i="0" dirty="0">
+                          <a:solidFill>
+                            <a:schemeClr val="dk1"/>
+                          </a:solidFill>
+                          <a:effectLst/>
+                          <a:latin typeface="+mn-lt"/>
+                          <a:ea typeface="+mn-ea"/>
+                          <a:cs typeface="+mn-cs"/>
+                        </a:rPr>
+                        <a:t>0.3345</a:t>
+                      </a:r>
+                      <a:endParaRPr lang="es-ES" dirty="0"/>
                     </a:p>
                   </a:txBody>
                   <a:tcPr/>
@@ -13333,17 +13723,20 @@
                     <a:bodyPr/>
                     <a:lstStyle/>
                     <a:p>
-                      <a:endParaRPr lang="es-ES"/>
-                    </a:p>
-                  </a:txBody>
-                  <a:tcPr/>
-                </a:tc>
-                <a:tc>
-                  <a:txBody>
-                    <a:bodyPr/>
-                    <a:lstStyle/>
-                    <a:p>
-                      <a:endParaRPr lang="es-ES"/>
+                      <a:pPr algn="ctr"/>
+                      <a:r>
+                        <a:rPr lang="es-ES" b="0" i="0" dirty="0">
+                          <a:solidFill>
+                            <a:schemeClr val="dk1"/>
+                          </a:solidFill>
+                          <a:effectLst/>
+                          <a:latin typeface="+mn-lt"/>
+                          <a:ea typeface="+mn-ea"/>
+                          <a:cs typeface="+mn-cs"/>
+                        </a:rPr>
+                        <a:t>0.9995</a:t>
+                      </a:r>
+                      <a:endParaRPr lang="es-ES" dirty="0"/>
                     </a:p>
                   </a:txBody>
                   <a:tcPr/>
@@ -13360,7 +13753,11 @@
                     <a:bodyPr/>
                     <a:lstStyle/>
                     <a:p>
-                      <a:endParaRPr lang="es-ES"/>
+                      <a:pPr algn="ctr"/>
+                      <a:r>
+                        <a:rPr lang="es-ES" dirty="0"/>
+                        <a:t>1,2</a:t>
+                      </a:r>
                     </a:p>
                   </a:txBody>
                   <a:tcPr/>
@@ -13370,7 +13767,20 @@
                     <a:bodyPr/>
                     <a:lstStyle/>
                     <a:p>
-                      <a:endParaRPr lang="es-ES"/>
+                      <a:pPr algn="ctr"/>
+                      <a:r>
+                        <a:rPr lang="es-ES" b="0" i="0" dirty="0">
+                          <a:solidFill>
+                            <a:schemeClr val="dk1"/>
+                          </a:solidFill>
+                          <a:effectLst/>
+                          <a:latin typeface="+mn-lt"/>
+                          <a:ea typeface="+mn-ea"/>
+                          <a:cs typeface="+mn-cs"/>
+                        </a:rPr>
+                        <a:t>0.5452</a:t>
+                      </a:r>
+                      <a:endParaRPr lang="es-ES" dirty="0"/>
                     </a:p>
                   </a:txBody>
                   <a:tcPr/>
@@ -13380,17 +13790,20 @@
                     <a:bodyPr/>
                     <a:lstStyle/>
                     <a:p>
-                      <a:endParaRPr lang="es-ES"/>
-                    </a:p>
-                  </a:txBody>
-                  <a:tcPr/>
-                </a:tc>
-                <a:tc>
-                  <a:txBody>
-                    <a:bodyPr/>
-                    <a:lstStyle/>
-                    <a:p>
-                      <a:endParaRPr lang="es-ES"/>
+                      <a:pPr algn="ctr"/>
+                      <a:r>
+                        <a:rPr lang="es-ES" b="0" i="0" dirty="0">
+                          <a:solidFill>
+                            <a:schemeClr val="dk1"/>
+                          </a:solidFill>
+                          <a:effectLst/>
+                          <a:latin typeface="+mn-lt"/>
+                          <a:ea typeface="+mn-ea"/>
+                          <a:cs typeface="+mn-cs"/>
+                        </a:rPr>
+                        <a:t>0.9996</a:t>
+                      </a:r>
+                      <a:endParaRPr lang="es-ES" dirty="0"/>
                     </a:p>
                   </a:txBody>
                   <a:tcPr/>
@@ -13407,7 +13820,11 @@
                     <a:bodyPr/>
                     <a:lstStyle/>
                     <a:p>
-                      <a:endParaRPr lang="es-ES"/>
+                      <a:pPr algn="ctr"/>
+                      <a:r>
+                        <a:rPr lang="es-ES" dirty="0"/>
+                        <a:t>1,3</a:t>
+                      </a:r>
                     </a:p>
                   </a:txBody>
                   <a:tcPr/>
@@ -13417,7 +13834,20 @@
                     <a:bodyPr/>
                     <a:lstStyle/>
                     <a:p>
-                      <a:endParaRPr lang="es-ES"/>
+                      <a:pPr algn="ctr"/>
+                      <a:r>
+                        <a:rPr lang="es-ES" b="0" i="0" dirty="0">
+                          <a:solidFill>
+                            <a:schemeClr val="dk1"/>
+                          </a:solidFill>
+                          <a:effectLst/>
+                          <a:latin typeface="+mn-lt"/>
+                          <a:ea typeface="+mn-ea"/>
+                          <a:cs typeface="+mn-cs"/>
+                        </a:rPr>
+                        <a:t>0.7669</a:t>
+                      </a:r>
+                      <a:endParaRPr lang="es-ES" dirty="0"/>
                     </a:p>
                   </a:txBody>
                   <a:tcPr/>
@@ -13427,17 +13857,20 @@
                     <a:bodyPr/>
                     <a:lstStyle/>
                     <a:p>
-                      <a:endParaRPr lang="es-ES"/>
-                    </a:p>
-                  </a:txBody>
-                  <a:tcPr/>
-                </a:tc>
-                <a:tc>
-                  <a:txBody>
-                    <a:bodyPr/>
-                    <a:lstStyle/>
-                    <a:p>
-                      <a:endParaRPr lang="es-ES"/>
+                      <a:pPr algn="ctr"/>
+                      <a:r>
+                        <a:rPr lang="es-ES" b="0" i="0" dirty="0">
+                          <a:solidFill>
+                            <a:schemeClr val="dk1"/>
+                          </a:solidFill>
+                          <a:effectLst/>
+                          <a:latin typeface="+mn-lt"/>
+                          <a:ea typeface="+mn-ea"/>
+                          <a:cs typeface="+mn-cs"/>
+                        </a:rPr>
+                        <a:t>0.9997</a:t>
+                      </a:r>
+                      <a:endParaRPr lang="es-ES" dirty="0"/>
                     </a:p>
                   </a:txBody>
                   <a:tcPr/>
@@ -13454,7 +13887,11 @@
                     <a:bodyPr/>
                     <a:lstStyle/>
                     <a:p>
-                      <a:endParaRPr lang="es-ES"/>
+                      <a:pPr algn="ctr"/>
+                      <a:r>
+                        <a:rPr lang="es-ES" dirty="0"/>
+                        <a:t>1,4</a:t>
+                      </a:r>
                     </a:p>
                   </a:txBody>
                   <a:tcPr/>
@@ -13464,7 +13901,20 @@
                     <a:bodyPr/>
                     <a:lstStyle/>
                     <a:p>
-                      <a:endParaRPr lang="es-ES"/>
+                      <a:pPr algn="ctr"/>
+                      <a:r>
+                        <a:rPr lang="es-ES" b="0" i="0" dirty="0">
+                          <a:solidFill>
+                            <a:schemeClr val="dk1"/>
+                          </a:solidFill>
+                          <a:effectLst/>
+                          <a:latin typeface="+mn-lt"/>
+                          <a:ea typeface="+mn-ea"/>
+                          <a:cs typeface="+mn-cs"/>
+                        </a:rPr>
+                        <a:t>1.0870</a:t>
+                      </a:r>
+                      <a:endParaRPr lang="es-ES" dirty="0"/>
                     </a:p>
                   </a:txBody>
                   <a:tcPr/>
@@ -13474,17 +13924,20 @@
                     <a:bodyPr/>
                     <a:lstStyle/>
                     <a:p>
-                      <a:endParaRPr lang="es-ES"/>
-                    </a:p>
-                  </a:txBody>
-                  <a:tcPr/>
-                </a:tc>
-                <a:tc>
-                  <a:txBody>
-                    <a:bodyPr/>
-                    <a:lstStyle/>
-                    <a:p>
-                      <a:endParaRPr lang="es-ES"/>
+                      <a:pPr algn="ctr"/>
+                      <a:r>
+                        <a:rPr lang="es-ES" b="0" i="0" dirty="0">
+                          <a:solidFill>
+                            <a:schemeClr val="dk1"/>
+                          </a:solidFill>
+                          <a:effectLst/>
+                          <a:latin typeface="+mn-lt"/>
+                          <a:ea typeface="+mn-ea"/>
+                          <a:cs typeface="+mn-cs"/>
+                        </a:rPr>
+                        <a:t>0.9997</a:t>
+                      </a:r>
+                      <a:endParaRPr lang="es-ES" dirty="0"/>
                     </a:p>
                   </a:txBody>
                   <a:tcPr/>
@@ -13501,7 +13954,11 @@
                     <a:bodyPr/>
                     <a:lstStyle/>
                     <a:p>
-                      <a:endParaRPr lang="es-ES"/>
+                      <a:pPr algn="ctr"/>
+                      <a:r>
+                        <a:rPr lang="es-ES" dirty="0"/>
+                        <a:t>1,5</a:t>
+                      </a:r>
                     </a:p>
                   </a:txBody>
                   <a:tcPr/>
@@ -13511,7 +13968,20 @@
                     <a:bodyPr/>
                     <a:lstStyle/>
                     <a:p>
-                      <a:endParaRPr lang="es-ES"/>
+                      <a:pPr algn="ctr"/>
+                      <a:r>
+                        <a:rPr lang="es-ES" b="0" i="0" dirty="0">
+                          <a:solidFill>
+                            <a:schemeClr val="dk1"/>
+                          </a:solidFill>
+                          <a:effectLst/>
+                          <a:latin typeface="+mn-lt"/>
+                          <a:ea typeface="+mn-ea"/>
+                          <a:cs typeface="+mn-cs"/>
+                        </a:rPr>
+                        <a:t>1.4155</a:t>
+                      </a:r>
+                      <a:endParaRPr lang="es-ES" dirty="0"/>
                     </a:p>
                   </a:txBody>
                   <a:tcPr/>
@@ -13521,17 +13991,20 @@
                     <a:bodyPr/>
                     <a:lstStyle/>
                     <a:p>
-                      <a:endParaRPr lang="es-ES"/>
-                    </a:p>
-                  </a:txBody>
-                  <a:tcPr/>
-                </a:tc>
-                <a:tc>
-                  <a:txBody>
-                    <a:bodyPr/>
-                    <a:lstStyle/>
-                    <a:p>
-                      <a:endParaRPr lang="es-ES"/>
+                      <a:pPr algn="ctr"/>
+                      <a:r>
+                        <a:rPr lang="es-ES" b="0" i="0" dirty="0">
+                          <a:solidFill>
+                            <a:schemeClr val="dk1"/>
+                          </a:solidFill>
+                          <a:effectLst/>
+                          <a:latin typeface="+mn-lt"/>
+                          <a:ea typeface="+mn-ea"/>
+                          <a:cs typeface="+mn-cs"/>
+                        </a:rPr>
+                        <a:t>0.9997</a:t>
+                      </a:r>
+                      <a:endParaRPr lang="es-ES" dirty="0"/>
                     </a:p>
                   </a:txBody>
                   <a:tcPr/>
@@ -13548,7 +14021,11 @@
                     <a:bodyPr/>
                     <a:lstStyle/>
                     <a:p>
-                      <a:endParaRPr lang="es-ES"/>
+                      <a:pPr algn="ctr"/>
+                      <a:r>
+                        <a:rPr lang="es-ES" dirty="0"/>
+                        <a:t>1,6</a:t>
+                      </a:r>
                     </a:p>
                   </a:txBody>
                   <a:tcPr/>
@@ -13558,7 +14035,20 @@
                     <a:bodyPr/>
                     <a:lstStyle/>
                     <a:p>
-                      <a:endParaRPr lang="es-ES"/>
+                      <a:pPr algn="ctr"/>
+                      <a:r>
+                        <a:rPr lang="es-ES" b="0" i="0" dirty="0">
+                          <a:solidFill>
+                            <a:schemeClr val="dk1"/>
+                          </a:solidFill>
+                          <a:effectLst/>
+                          <a:latin typeface="+mn-lt"/>
+                          <a:ea typeface="+mn-ea"/>
+                          <a:cs typeface="+mn-cs"/>
+                        </a:rPr>
+                        <a:t>1.7769</a:t>
+                      </a:r>
+                      <a:endParaRPr lang="es-ES" dirty="0"/>
                     </a:p>
                   </a:txBody>
                   <a:tcPr/>
@@ -13568,16 +14058,19 @@
                     <a:bodyPr/>
                     <a:lstStyle/>
                     <a:p>
-                      <a:endParaRPr lang="es-ES"/>
-                    </a:p>
-                  </a:txBody>
-                  <a:tcPr/>
-                </a:tc>
-                <a:tc>
-                  <a:txBody>
-                    <a:bodyPr/>
-                    <a:lstStyle/>
-                    <a:p>
+                      <a:pPr algn="ctr"/>
+                      <a:r>
+                        <a:rPr lang="es-ES" b="0" i="0" dirty="0">
+                          <a:solidFill>
+                            <a:schemeClr val="dk1"/>
+                          </a:solidFill>
+                          <a:effectLst/>
+                          <a:latin typeface="+mn-lt"/>
+                          <a:ea typeface="+mn-ea"/>
+                          <a:cs typeface="+mn-cs"/>
+                        </a:rPr>
+                        <a:t>0.9999</a:t>
+                      </a:r>
                       <a:endParaRPr lang="es-ES" dirty="0"/>
                     </a:p>
                   </a:txBody>
@@ -13614,6 +14107,746 @@
         <p:cNvPr id="1" name="">
           <a:extLst>
             <a:ext uri="{FF2B5EF4-FFF2-40B4-BE49-F238E27FC236}">
+              <a16:creationId xmlns:a16="http://schemas.microsoft.com/office/drawing/2014/main" id="{0D90AC3D-36B7-D786-3825-B4DD6EADD689}"/>
+            </a:ext>
+          </a:extLst>
+        </p:cNvPr>
+        <p:cNvGrpSpPr/>
+        <p:nvPr/>
+      </p:nvGrpSpPr>
+      <p:grpSpPr>
+        <a:xfrm>
+          <a:off x="0" y="0"/>
+          <a:ext cx="0" cy="0"/>
+          <a:chOff x="0" y="0"/>
+          <a:chExt cx="0" cy="0"/>
+        </a:xfrm>
+      </p:grpSpPr>
+      <p:sp>
+        <p:nvSpPr>
+          <p:cNvPr id="16" name="object 16">
+            <a:extLst>
+              <a:ext uri="{FF2B5EF4-FFF2-40B4-BE49-F238E27FC236}">
+                <a16:creationId xmlns:a16="http://schemas.microsoft.com/office/drawing/2014/main" id="{6AA2E789-F7AE-F068-274C-E0F13A22DBCA}"/>
+              </a:ext>
+            </a:extLst>
+          </p:cNvPr>
+          <p:cNvSpPr txBox="1">
+            <a:spLocks noGrp="1"/>
+          </p:cNvSpPr>
+          <p:nvPr>
+            <p:ph type="title"/>
+          </p:nvPr>
+        </p:nvSpPr>
+        <p:spPr>
+          <a:xfrm>
+            <a:off x="685800" y="408883"/>
+            <a:ext cx="10994410" cy="705321"/>
+          </a:xfrm>
+          <a:prstGeom prst="rect">
+            <a:avLst/>
+          </a:prstGeom>
+        </p:spPr>
+        <p:txBody>
+          <a:bodyPr vert="horz" wrap="square" lIns="0" tIns="12700" rIns="0" bIns="0" rtlCol="0">
+            <a:spAutoFit/>
+          </a:bodyPr>
+          <a:lstStyle/>
+          <a:p>
+            <a:pPr marL="12700">
+              <a:lnSpc>
+                <a:spcPct val="100000"/>
+              </a:lnSpc>
+              <a:spcBef>
+                <a:spcPts val="100"/>
+              </a:spcBef>
+            </a:pPr>
+            <a:r>
+              <a:rPr lang="en-US" sz="2500" dirty="0"/>
+              <a:t>Learning outcome #2 – 2x2 Directional Coupler</a:t>
+            </a:r>
+            <a:br>
+              <a:rPr lang="en-US" sz="2500" spc="-5" dirty="0">
+                <a:latin typeface="+mj-lt"/>
+                <a:cs typeface="Lucida Sans"/>
+              </a:rPr>
+            </a:br>
+            <a:r>
+              <a:rPr lang="en-US" b="0" dirty="0"/>
+              <a:t>Gap 0.6 - 1.6 µm (step 0.1 µm) – Wavelength 1.55 µm </a:t>
+            </a:r>
+            <a:endParaRPr lang="en-US" sz="2500" b="0" dirty="0">
+              <a:latin typeface="+mj-lt"/>
+              <a:cs typeface="Lucida Sans"/>
+            </a:endParaRPr>
+          </a:p>
+        </p:txBody>
+      </p:sp>
+      <p:pic>
+        <p:nvPicPr>
+          <p:cNvPr id="83" name="Gráfico 82">
+            <a:extLst>
+              <a:ext uri="{FF2B5EF4-FFF2-40B4-BE49-F238E27FC236}">
+                <a16:creationId xmlns:a16="http://schemas.microsoft.com/office/drawing/2014/main" id="{3AEAD01B-7604-8009-5694-A556497AEF25}"/>
+              </a:ext>
+            </a:extLst>
+          </p:cNvPr>
+          <p:cNvPicPr>
+            <a:picLocks noChangeAspect="1"/>
+          </p:cNvPicPr>
+          <p:nvPr/>
+        </p:nvPicPr>
+        <p:blipFill>
+          <a:blip r:embed="rId3">
+            <a:extLst>
+              <a:ext uri="{96DAC541-7B7A-43D3-8B79-37D633B846F1}">
+                <asvg:svgBlip xmlns:asvg="http://schemas.microsoft.com/office/drawing/2016/SVG/main" r:embed="rId4"/>
+              </a:ext>
+            </a:extLst>
+          </a:blip>
+          <a:stretch>
+            <a:fillRect/>
+          </a:stretch>
+        </p:blipFill>
+        <p:spPr>
+          <a:xfrm>
+            <a:off x="5045006" y="6356057"/>
+            <a:ext cx="6409575" cy="363174"/>
+          </a:xfrm>
+          <a:prstGeom prst="rect">
+            <a:avLst/>
+          </a:prstGeom>
+        </p:spPr>
+      </p:pic>
+      <p:sp>
+        <p:nvSpPr>
+          <p:cNvPr id="84" name="Marcador de número de diapositiva 83">
+            <a:extLst>
+              <a:ext uri="{FF2B5EF4-FFF2-40B4-BE49-F238E27FC236}">
+                <a16:creationId xmlns:a16="http://schemas.microsoft.com/office/drawing/2014/main" id="{696E3846-1BD2-4F23-48AA-C7AF2A1EE6EB}"/>
+              </a:ext>
+            </a:extLst>
+          </p:cNvPr>
+          <p:cNvSpPr>
+            <a:spLocks noGrp="1"/>
+          </p:cNvSpPr>
+          <p:nvPr>
+            <p:ph type="sldNum" sz="quarter" idx="7"/>
+          </p:nvPr>
+        </p:nvSpPr>
+        <p:spPr/>
+        <p:txBody>
+          <a:bodyPr/>
+          <a:lstStyle/>
+          <a:p>
+            <a:fld id="{B6F15528-21DE-4FAA-801E-634DDDAF4B2B}" type="slidenum">
+              <a:rPr lang="es-ES" smtClean="0"/>
+              <a:t>7</a:t>
+            </a:fld>
+            <a:endParaRPr lang="es-ES"/>
+          </a:p>
+        </p:txBody>
+      </p:sp>
+      <p:sp>
+        <p:nvSpPr>
+          <p:cNvPr id="3" name="Marcador de pie de página 2">
+            <a:extLst>
+              <a:ext uri="{FF2B5EF4-FFF2-40B4-BE49-F238E27FC236}">
+                <a16:creationId xmlns:a16="http://schemas.microsoft.com/office/drawing/2014/main" id="{E32C0E2B-75B6-4768-A4C7-F165A264DA0B}"/>
+              </a:ext>
+            </a:extLst>
+          </p:cNvPr>
+          <p:cNvSpPr>
+            <a:spLocks noGrp="1"/>
+          </p:cNvSpPr>
+          <p:nvPr>
+            <p:ph type="ftr" sz="quarter" idx="5"/>
+          </p:nvPr>
+        </p:nvSpPr>
+        <p:spPr/>
+        <p:txBody>
+          <a:bodyPr/>
+          <a:lstStyle/>
+          <a:p>
+            <a:pPr marL="12700">
+              <a:spcBef>
+                <a:spcPts val="15"/>
+              </a:spcBef>
+            </a:pPr>
+            <a:r>
+              <a:rPr lang="es-ES" spc="-5"/>
+              <a:t>LAB 2.0. COUPLERS</a:t>
+            </a:r>
+            <a:endParaRPr lang="es-ES" spc="-5" dirty="0"/>
+          </a:p>
+        </p:txBody>
+      </p:sp>
+      <p:sp>
+        <p:nvSpPr>
+          <p:cNvPr id="7" name="Rectángulo 6">
+            <a:extLst>
+              <a:ext uri="{FF2B5EF4-FFF2-40B4-BE49-F238E27FC236}">
+                <a16:creationId xmlns:a16="http://schemas.microsoft.com/office/drawing/2014/main" id="{FBC7D187-267A-ADD4-764C-D3820B8ED302}"/>
+              </a:ext>
+            </a:extLst>
+          </p:cNvPr>
+          <p:cNvSpPr/>
+          <p:nvPr/>
+        </p:nvSpPr>
+        <p:spPr>
+          <a:xfrm>
+            <a:off x="609441" y="1418373"/>
+            <a:ext cx="11199971" cy="3229828"/>
+          </a:xfrm>
+          <a:prstGeom prst="rect">
+            <a:avLst/>
+          </a:prstGeom>
+          <a:noFill/>
+          <a:ln w="28575">
+            <a:solidFill>
+              <a:srgbClr val="E0700D"/>
+            </a:solidFill>
+          </a:ln>
+        </p:spPr>
+        <p:style>
+          <a:lnRef idx="2">
+            <a:schemeClr val="accent1">
+              <a:shade val="15000"/>
+            </a:schemeClr>
+          </a:lnRef>
+          <a:fillRef idx="1">
+            <a:schemeClr val="accent1"/>
+          </a:fillRef>
+          <a:effectRef idx="0">
+            <a:schemeClr val="accent1"/>
+          </a:effectRef>
+          <a:fontRef idx="minor">
+            <a:schemeClr val="lt1"/>
+          </a:fontRef>
+        </p:style>
+        <p:txBody>
+          <a:bodyPr rtlCol="0" anchor="ctr"/>
+          <a:lstStyle/>
+          <a:p>
+            <a:pPr algn="ctr"/>
+            <a:endParaRPr lang="en-US"/>
+          </a:p>
+        </p:txBody>
+      </p:sp>
+      <p:pic>
+        <p:nvPicPr>
+          <p:cNvPr id="5" name="Imagen 4">
+            <a:extLst>
+              <a:ext uri="{FF2B5EF4-FFF2-40B4-BE49-F238E27FC236}">
+                <a16:creationId xmlns:a16="http://schemas.microsoft.com/office/drawing/2014/main" id="{0C53809D-89DF-4BA2-B688-935065E7C6A5}"/>
+              </a:ext>
+            </a:extLst>
+          </p:cNvPr>
+          <p:cNvPicPr>
+            <a:picLocks noChangeAspect="1"/>
+          </p:cNvPicPr>
+          <p:nvPr/>
+        </p:nvPicPr>
+        <p:blipFill>
+          <a:blip r:embed="rId5"/>
+          <a:stretch>
+            <a:fillRect/>
+          </a:stretch>
+        </p:blipFill>
+        <p:spPr>
+          <a:xfrm>
+            <a:off x="1530093" y="1680423"/>
+            <a:ext cx="3514913" cy="2776537"/>
+          </a:xfrm>
+          <a:prstGeom prst="rect">
+            <a:avLst/>
+          </a:prstGeom>
+        </p:spPr>
+      </p:pic>
+      <p:pic>
+        <p:nvPicPr>
+          <p:cNvPr id="9" name="Imagen 8">
+            <a:extLst>
+              <a:ext uri="{FF2B5EF4-FFF2-40B4-BE49-F238E27FC236}">
+                <a16:creationId xmlns:a16="http://schemas.microsoft.com/office/drawing/2014/main" id="{EC148AE2-DD69-4B77-8808-2E2EED89045E}"/>
+              </a:ext>
+            </a:extLst>
+          </p:cNvPr>
+          <p:cNvPicPr>
+            <a:picLocks noChangeAspect="1"/>
+          </p:cNvPicPr>
+          <p:nvPr/>
+        </p:nvPicPr>
+        <p:blipFill>
+          <a:blip r:embed="rId6"/>
+          <a:stretch>
+            <a:fillRect/>
+          </a:stretch>
+        </p:blipFill>
+        <p:spPr>
+          <a:xfrm>
+            <a:off x="7146996" y="1658652"/>
+            <a:ext cx="3618652" cy="2776537"/>
+          </a:xfrm>
+          <a:prstGeom prst="rect">
+            <a:avLst/>
+          </a:prstGeom>
+        </p:spPr>
+      </p:pic>
+      <p:sp>
+        <p:nvSpPr>
+          <p:cNvPr id="12" name="CuadroTexto 11">
+            <a:extLst>
+              <a:ext uri="{FF2B5EF4-FFF2-40B4-BE49-F238E27FC236}">
+                <a16:creationId xmlns:a16="http://schemas.microsoft.com/office/drawing/2014/main" id="{77A084EF-8A00-4DF5-BEC3-7DB6425C27B4}"/>
+              </a:ext>
+            </a:extLst>
+          </p:cNvPr>
+          <p:cNvSpPr txBox="1"/>
+          <p:nvPr/>
+        </p:nvSpPr>
+        <p:spPr>
+          <a:xfrm>
+            <a:off x="609441" y="4811862"/>
+            <a:ext cx="11199971" cy="1200329"/>
+          </a:xfrm>
+          <a:prstGeom prst="rect">
+            <a:avLst/>
+          </a:prstGeom>
+          <a:solidFill>
+            <a:schemeClr val="bg1">
+              <a:lumMod val="95000"/>
+            </a:schemeClr>
+          </a:solidFill>
+          <a:ln w="28575">
+            <a:solidFill>
+              <a:srgbClr val="E0700D"/>
+            </a:solidFill>
+          </a:ln>
+        </p:spPr>
+        <p:txBody>
+          <a:bodyPr wrap="square" rtlCol="0">
+            <a:spAutoFit/>
+          </a:bodyPr>
+          <a:lstStyle/>
+          <a:p>
+            <a:pPr algn="just"/>
+            <a:r>
+              <a:rPr lang="en-US" sz="1200" dirty="0" err="1">
+                <a:latin typeface="Arial" panose="020B0604020202020204" pitchFamily="34" charset="0"/>
+                <a:cs typeface="Arial" panose="020B0604020202020204" pitchFamily="34" charset="0"/>
+              </a:rPr>
+              <a:t>Estas</a:t>
+            </a:r>
+            <a:r>
+              <a:rPr lang="en-US" sz="1200" dirty="0">
+                <a:latin typeface="Arial" panose="020B0604020202020204" pitchFamily="34" charset="0"/>
+                <a:cs typeface="Arial" panose="020B0604020202020204" pitchFamily="34" charset="0"/>
+              </a:rPr>
+              <a:t> </a:t>
+            </a:r>
+            <a:r>
+              <a:rPr lang="en-US" sz="1200" dirty="0" err="1">
+                <a:latin typeface="Arial" panose="020B0604020202020204" pitchFamily="34" charset="0"/>
+                <a:cs typeface="Arial" panose="020B0604020202020204" pitchFamily="34" charset="0"/>
+              </a:rPr>
+              <a:t>gráficas</a:t>
+            </a:r>
+            <a:r>
+              <a:rPr lang="en-US" sz="1200" dirty="0">
+                <a:latin typeface="Arial" panose="020B0604020202020204" pitchFamily="34" charset="0"/>
+                <a:cs typeface="Arial" panose="020B0604020202020204" pitchFamily="34" charset="0"/>
+              </a:rPr>
+              <a:t> </a:t>
+            </a:r>
+            <a:r>
+              <a:rPr lang="en-US" sz="1200" dirty="0" err="1">
+                <a:latin typeface="Arial" panose="020B0604020202020204" pitchFamily="34" charset="0"/>
+                <a:cs typeface="Arial" panose="020B0604020202020204" pitchFamily="34" charset="0"/>
+              </a:rPr>
+              <a:t>muestran</a:t>
+            </a:r>
+            <a:r>
+              <a:rPr lang="en-US" sz="1200" dirty="0">
+                <a:latin typeface="Arial" panose="020B0604020202020204" pitchFamily="34" charset="0"/>
+                <a:cs typeface="Arial" panose="020B0604020202020204" pitchFamily="34" charset="0"/>
+              </a:rPr>
+              <a:t> la </a:t>
+            </a:r>
+            <a:r>
+              <a:rPr lang="en-US" sz="1200" dirty="0" err="1">
+                <a:latin typeface="Arial" panose="020B0604020202020204" pitchFamily="34" charset="0"/>
+                <a:cs typeface="Arial" panose="020B0604020202020204" pitchFamily="34" charset="0"/>
+              </a:rPr>
+              <a:t>dependencia</a:t>
+            </a:r>
+            <a:r>
+              <a:rPr lang="en-US" sz="1200" dirty="0">
+                <a:latin typeface="Arial" panose="020B0604020202020204" pitchFamily="34" charset="0"/>
+                <a:cs typeface="Arial" panose="020B0604020202020204" pitchFamily="34" charset="0"/>
+              </a:rPr>
+              <a:t> de las </a:t>
+            </a:r>
+            <a:r>
+              <a:rPr lang="en-US" sz="1200" dirty="0" err="1">
+                <a:latin typeface="Arial" panose="020B0604020202020204" pitchFamily="34" charset="0"/>
+                <a:cs typeface="Arial" panose="020B0604020202020204" pitchFamily="34" charset="0"/>
+              </a:rPr>
+              <a:t>pérdidas</a:t>
+            </a:r>
+            <a:r>
+              <a:rPr lang="en-US" sz="1200" dirty="0">
+                <a:latin typeface="Arial" panose="020B0604020202020204" pitchFamily="34" charset="0"/>
+                <a:cs typeface="Arial" panose="020B0604020202020204" pitchFamily="34" charset="0"/>
+              </a:rPr>
+              <a:t> y </a:t>
+            </a:r>
+            <a:r>
+              <a:rPr lang="en-US" sz="1200" dirty="0" err="1">
+                <a:latin typeface="Arial" panose="020B0604020202020204" pitchFamily="34" charset="0"/>
+                <a:cs typeface="Arial" panose="020B0604020202020204" pitchFamily="34" charset="0"/>
+              </a:rPr>
+              <a:t>el</a:t>
+            </a:r>
+            <a:r>
+              <a:rPr lang="en-US" sz="1200" dirty="0">
+                <a:latin typeface="Arial" panose="020B0604020202020204" pitchFamily="34" charset="0"/>
+                <a:cs typeface="Arial" panose="020B0604020202020204" pitchFamily="34" charset="0"/>
+              </a:rPr>
+              <a:t> ratio </a:t>
+            </a:r>
+            <a:r>
+              <a:rPr lang="en-US" sz="1200" dirty="0" err="1">
+                <a:latin typeface="Arial" panose="020B0604020202020204" pitchFamily="34" charset="0"/>
+                <a:cs typeface="Arial" panose="020B0604020202020204" pitchFamily="34" charset="0"/>
+              </a:rPr>
+              <a:t>en</a:t>
+            </a:r>
+            <a:r>
+              <a:rPr lang="en-US" sz="1200" dirty="0">
+                <a:latin typeface="Arial" panose="020B0604020202020204" pitchFamily="34" charset="0"/>
+                <a:cs typeface="Arial" panose="020B0604020202020204" pitchFamily="34" charset="0"/>
+              </a:rPr>
+              <a:t> los </a:t>
+            </a:r>
+            <a:r>
+              <a:rPr lang="en-US" sz="1200" dirty="0" err="1">
+                <a:latin typeface="Arial" panose="020B0604020202020204" pitchFamily="34" charset="0"/>
+                <a:cs typeface="Arial" panose="020B0604020202020204" pitchFamily="34" charset="0"/>
+              </a:rPr>
+              <a:t>puertos</a:t>
+            </a:r>
+            <a:r>
+              <a:rPr lang="en-US" sz="1200" dirty="0">
+                <a:latin typeface="Arial" panose="020B0604020202020204" pitchFamily="34" charset="0"/>
+                <a:cs typeface="Arial" panose="020B0604020202020204" pitchFamily="34" charset="0"/>
+              </a:rPr>
+              <a:t> de </a:t>
+            </a:r>
+            <a:r>
+              <a:rPr lang="en-US" sz="1200" dirty="0" err="1">
+                <a:latin typeface="Arial" panose="020B0604020202020204" pitchFamily="34" charset="0"/>
+                <a:cs typeface="Arial" panose="020B0604020202020204" pitchFamily="34" charset="0"/>
+              </a:rPr>
+              <a:t>salida</a:t>
+            </a:r>
+            <a:r>
+              <a:rPr lang="en-US" sz="1200" dirty="0">
+                <a:latin typeface="Arial" panose="020B0604020202020204" pitchFamily="34" charset="0"/>
+                <a:cs typeface="Arial" panose="020B0604020202020204" pitchFamily="34" charset="0"/>
+              </a:rPr>
+              <a:t> para </a:t>
+            </a:r>
+            <a:r>
+              <a:rPr lang="en-US" sz="1200" dirty="0" err="1">
+                <a:latin typeface="Arial" panose="020B0604020202020204" pitchFamily="34" charset="0"/>
+                <a:cs typeface="Arial" panose="020B0604020202020204" pitchFamily="34" charset="0"/>
+              </a:rPr>
+              <a:t>cada</a:t>
+            </a:r>
+            <a:r>
+              <a:rPr lang="en-US" sz="1200" dirty="0">
+                <a:latin typeface="Arial" panose="020B0604020202020204" pitchFamily="34" charset="0"/>
+                <a:cs typeface="Arial" panose="020B0604020202020204" pitchFamily="34" charset="0"/>
+              </a:rPr>
+              <a:t> </a:t>
+            </a:r>
+            <a:r>
+              <a:rPr lang="en-US" sz="1200" dirty="0" err="1">
+                <a:latin typeface="Arial" panose="020B0604020202020204" pitchFamily="34" charset="0"/>
+                <a:cs typeface="Arial" panose="020B0604020202020204" pitchFamily="34" charset="0"/>
+              </a:rPr>
+              <a:t>valos</a:t>
+            </a:r>
+            <a:r>
+              <a:rPr lang="en-US" sz="1200" dirty="0">
+                <a:latin typeface="Arial" panose="020B0604020202020204" pitchFamily="34" charset="0"/>
+                <a:cs typeface="Arial" panose="020B0604020202020204" pitchFamily="34" charset="0"/>
+              </a:rPr>
+              <a:t> del gap. Los </a:t>
+            </a:r>
+            <a:r>
+              <a:rPr lang="en-US" sz="1200" dirty="0" err="1">
+                <a:latin typeface="Arial" panose="020B0604020202020204" pitchFamily="34" charset="0"/>
+                <a:cs typeface="Arial" panose="020B0604020202020204" pitchFamily="34" charset="0"/>
+              </a:rPr>
+              <a:t>mejores</a:t>
+            </a:r>
+            <a:r>
+              <a:rPr lang="en-US" sz="1200" dirty="0">
+                <a:latin typeface="Arial" panose="020B0604020202020204" pitchFamily="34" charset="0"/>
+                <a:cs typeface="Arial" panose="020B0604020202020204" pitchFamily="34" charset="0"/>
+              </a:rPr>
+              <a:t> </a:t>
+            </a:r>
+            <a:r>
+              <a:rPr lang="en-US" sz="1200" dirty="0" err="1">
+                <a:latin typeface="Arial" panose="020B0604020202020204" pitchFamily="34" charset="0"/>
+                <a:cs typeface="Arial" panose="020B0604020202020204" pitchFamily="34" charset="0"/>
+              </a:rPr>
+              <a:t>valores</a:t>
+            </a:r>
+            <a:r>
+              <a:rPr lang="en-US" sz="1200" dirty="0">
+                <a:latin typeface="Arial" panose="020B0604020202020204" pitchFamily="34" charset="0"/>
+                <a:cs typeface="Arial" panose="020B0604020202020204" pitchFamily="34" charset="0"/>
+              </a:rPr>
+              <a:t> de gap </a:t>
+            </a:r>
+            <a:r>
+              <a:rPr lang="en-US" sz="1200" dirty="0" err="1">
+                <a:latin typeface="Arial" panose="020B0604020202020204" pitchFamily="34" charset="0"/>
+                <a:cs typeface="Arial" panose="020B0604020202020204" pitchFamily="34" charset="0"/>
+              </a:rPr>
+              <a:t>estarán</a:t>
+            </a:r>
+            <a:r>
+              <a:rPr lang="en-US" sz="1200" dirty="0">
+                <a:latin typeface="Arial" panose="020B0604020202020204" pitchFamily="34" charset="0"/>
+                <a:cs typeface="Arial" panose="020B0604020202020204" pitchFamily="34" charset="0"/>
+              </a:rPr>
+              <a:t> entre [0.7,0.9] </a:t>
+            </a:r>
+            <a:r>
+              <a:rPr lang="en-US" sz="1200" dirty="0" err="1">
+                <a:latin typeface="Arial" panose="020B0604020202020204" pitchFamily="34" charset="0"/>
+                <a:cs typeface="Arial" panose="020B0604020202020204" pitchFamily="34" charset="0"/>
+              </a:rPr>
+              <a:t>ya</a:t>
+            </a:r>
+            <a:r>
+              <a:rPr lang="en-US" sz="1200" dirty="0">
+                <a:latin typeface="Arial" panose="020B0604020202020204" pitchFamily="34" charset="0"/>
+                <a:cs typeface="Arial" panose="020B0604020202020204" pitchFamily="34" charset="0"/>
+              </a:rPr>
+              <a:t> que </a:t>
+            </a:r>
+            <a:r>
+              <a:rPr lang="en-US" sz="1200" dirty="0" err="1">
+                <a:latin typeface="Arial" panose="020B0604020202020204" pitchFamily="34" charset="0"/>
+                <a:cs typeface="Arial" panose="020B0604020202020204" pitchFamily="34" charset="0"/>
+              </a:rPr>
+              <a:t>presentan</a:t>
+            </a:r>
+            <a:r>
+              <a:rPr lang="en-US" sz="1200" dirty="0">
+                <a:latin typeface="Arial" panose="020B0604020202020204" pitchFamily="34" charset="0"/>
+                <a:cs typeface="Arial" panose="020B0604020202020204" pitchFamily="34" charset="0"/>
+              </a:rPr>
+              <a:t> las </a:t>
+            </a:r>
+            <a:r>
+              <a:rPr lang="en-US" sz="1200" dirty="0" err="1">
+                <a:latin typeface="Arial" panose="020B0604020202020204" pitchFamily="34" charset="0"/>
+                <a:cs typeface="Arial" panose="020B0604020202020204" pitchFamily="34" charset="0"/>
+              </a:rPr>
+              <a:t>pérdidas</a:t>
+            </a:r>
+            <a:r>
+              <a:rPr lang="en-US" sz="1200" dirty="0">
+                <a:latin typeface="Arial" panose="020B0604020202020204" pitchFamily="34" charset="0"/>
+                <a:cs typeface="Arial" panose="020B0604020202020204" pitchFamily="34" charset="0"/>
+              </a:rPr>
+              <a:t> </a:t>
+            </a:r>
+            <a:r>
+              <a:rPr lang="en-US" sz="1200" dirty="0" err="1">
+                <a:latin typeface="Arial" panose="020B0604020202020204" pitchFamily="34" charset="0"/>
+                <a:cs typeface="Arial" panose="020B0604020202020204" pitchFamily="34" charset="0"/>
+              </a:rPr>
+              <a:t>más</a:t>
+            </a:r>
+            <a:r>
+              <a:rPr lang="en-US" sz="1200" dirty="0">
+                <a:latin typeface="Arial" panose="020B0604020202020204" pitchFamily="34" charset="0"/>
+                <a:cs typeface="Arial" panose="020B0604020202020204" pitchFamily="34" charset="0"/>
+              </a:rPr>
+              <a:t> </a:t>
+            </a:r>
+            <a:r>
+              <a:rPr lang="en-US" sz="1200" dirty="0" err="1">
+                <a:latin typeface="Arial" panose="020B0604020202020204" pitchFamily="34" charset="0"/>
+                <a:cs typeface="Arial" panose="020B0604020202020204" pitchFamily="34" charset="0"/>
+              </a:rPr>
+              <a:t>bajas</a:t>
+            </a:r>
+            <a:r>
+              <a:rPr lang="en-US" sz="1200" dirty="0">
+                <a:latin typeface="Arial" panose="020B0604020202020204" pitchFamily="34" charset="0"/>
+                <a:cs typeface="Arial" panose="020B0604020202020204" pitchFamily="34" charset="0"/>
+              </a:rPr>
+              <a:t> y a </a:t>
+            </a:r>
+            <a:r>
+              <a:rPr lang="en-US" sz="1200" dirty="0" err="1">
+                <a:latin typeface="Arial" panose="020B0604020202020204" pitchFamily="34" charset="0"/>
+                <a:cs typeface="Arial" panose="020B0604020202020204" pitchFamily="34" charset="0"/>
+              </a:rPr>
+              <a:t>su</a:t>
+            </a:r>
+            <a:r>
+              <a:rPr lang="en-US" sz="1200" dirty="0">
+                <a:latin typeface="Arial" panose="020B0604020202020204" pitchFamily="34" charset="0"/>
+                <a:cs typeface="Arial" panose="020B0604020202020204" pitchFamily="34" charset="0"/>
+              </a:rPr>
+              <a:t> </a:t>
+            </a:r>
+            <a:r>
+              <a:rPr lang="en-US" sz="1200" dirty="0" err="1">
+                <a:latin typeface="Arial" panose="020B0604020202020204" pitchFamily="34" charset="0"/>
+                <a:cs typeface="Arial" panose="020B0604020202020204" pitchFamily="34" charset="0"/>
+              </a:rPr>
+              <a:t>vez</a:t>
+            </a:r>
+            <a:r>
+              <a:rPr lang="en-US" sz="1200" dirty="0">
+                <a:latin typeface="Arial" panose="020B0604020202020204" pitchFamily="34" charset="0"/>
+                <a:cs typeface="Arial" panose="020B0604020202020204" pitchFamily="34" charset="0"/>
+              </a:rPr>
+              <a:t> un ratio de </a:t>
+            </a:r>
+            <a:r>
+              <a:rPr lang="en-US" sz="1200" dirty="0" err="1">
+                <a:latin typeface="Arial" panose="020B0604020202020204" pitchFamily="34" charset="0"/>
+                <a:cs typeface="Arial" panose="020B0604020202020204" pitchFamily="34" charset="0"/>
+              </a:rPr>
+              <a:t>salida</a:t>
+            </a:r>
+            <a:r>
+              <a:rPr lang="en-US" sz="1200" dirty="0">
+                <a:latin typeface="Arial" panose="020B0604020202020204" pitchFamily="34" charset="0"/>
+                <a:cs typeface="Arial" panose="020B0604020202020204" pitchFamily="34" charset="0"/>
+              </a:rPr>
+              <a:t> </a:t>
+            </a:r>
+            <a:r>
+              <a:rPr lang="en-US" sz="1200" dirty="0" err="1">
+                <a:latin typeface="Arial" panose="020B0604020202020204" pitchFamily="34" charset="0"/>
+                <a:cs typeface="Arial" panose="020B0604020202020204" pitchFamily="34" charset="0"/>
+              </a:rPr>
+              <a:t>bastante</a:t>
+            </a:r>
+            <a:r>
+              <a:rPr lang="en-US" sz="1200" dirty="0">
+                <a:latin typeface="Arial" panose="020B0604020202020204" pitchFamily="34" charset="0"/>
+                <a:cs typeface="Arial" panose="020B0604020202020204" pitchFamily="34" charset="0"/>
+              </a:rPr>
+              <a:t> </a:t>
+            </a:r>
+            <a:r>
+              <a:rPr lang="en-US" sz="1200" dirty="0" err="1">
+                <a:latin typeface="Arial" panose="020B0604020202020204" pitchFamily="34" charset="0"/>
+                <a:cs typeface="Arial" panose="020B0604020202020204" pitchFamily="34" charset="0"/>
+              </a:rPr>
+              <a:t>cercano</a:t>
+            </a:r>
+            <a:r>
+              <a:rPr lang="en-US" sz="1200" dirty="0">
+                <a:latin typeface="Arial" panose="020B0604020202020204" pitchFamily="34" charset="0"/>
+                <a:cs typeface="Arial" panose="020B0604020202020204" pitchFamily="34" charset="0"/>
+              </a:rPr>
+              <a:t> a 1 que es </a:t>
+            </a:r>
+            <a:r>
+              <a:rPr lang="en-US" sz="1200" dirty="0" err="1">
+                <a:latin typeface="Arial" panose="020B0604020202020204" pitchFamily="34" charset="0"/>
+                <a:cs typeface="Arial" panose="020B0604020202020204" pitchFamily="34" charset="0"/>
+              </a:rPr>
+              <a:t>el</a:t>
+            </a:r>
+            <a:r>
+              <a:rPr lang="en-US" sz="1200" dirty="0">
+                <a:latin typeface="Arial" panose="020B0604020202020204" pitchFamily="34" charset="0"/>
+                <a:cs typeface="Arial" panose="020B0604020202020204" pitchFamily="34" charset="0"/>
+              </a:rPr>
+              <a:t> </a:t>
+            </a:r>
+            <a:r>
+              <a:rPr lang="en-US" sz="1200" dirty="0" err="1">
+                <a:latin typeface="Arial" panose="020B0604020202020204" pitchFamily="34" charset="0"/>
+                <a:cs typeface="Arial" panose="020B0604020202020204" pitchFamily="34" charset="0"/>
+              </a:rPr>
+              <a:t>caso</a:t>
+            </a:r>
+            <a:r>
+              <a:rPr lang="en-US" sz="1200" dirty="0">
+                <a:latin typeface="Arial" panose="020B0604020202020204" pitchFamily="34" charset="0"/>
+                <a:cs typeface="Arial" panose="020B0604020202020204" pitchFamily="34" charset="0"/>
+              </a:rPr>
+              <a:t> ideal.</a:t>
+            </a:r>
+          </a:p>
+          <a:p>
+            <a:pPr algn="just"/>
+            <a:endParaRPr lang="en-US" sz="1200" dirty="0">
+              <a:latin typeface="Arial" panose="020B0604020202020204" pitchFamily="34" charset="0"/>
+              <a:cs typeface="Arial" panose="020B0604020202020204" pitchFamily="34" charset="0"/>
+            </a:endParaRPr>
+          </a:p>
+          <a:p>
+            <a:pPr algn="just"/>
+            <a:endParaRPr lang="en-US" sz="1200" dirty="0">
+              <a:latin typeface="Arial" panose="020B0604020202020204" pitchFamily="34" charset="0"/>
+              <a:cs typeface="Arial" panose="020B0604020202020204" pitchFamily="34" charset="0"/>
+            </a:endParaRPr>
+          </a:p>
+          <a:p>
+            <a:pPr algn="just"/>
+            <a:endParaRPr lang="en-US" sz="1200" dirty="0">
+              <a:latin typeface="Arial" panose="020B0604020202020204" pitchFamily="34" charset="0"/>
+              <a:cs typeface="Arial" panose="020B0604020202020204" pitchFamily="34" charset="0"/>
+            </a:endParaRPr>
+          </a:p>
+          <a:p>
+            <a:pPr algn="just"/>
+            <a:endParaRPr lang="en-US" sz="1200" dirty="0">
+              <a:latin typeface="Arial" panose="020B0604020202020204" pitchFamily="34" charset="0"/>
+              <a:cs typeface="Arial" panose="020B0604020202020204" pitchFamily="34" charset="0"/>
+            </a:endParaRPr>
+          </a:p>
+        </p:txBody>
+      </p:sp>
+    </p:spTree>
+    <p:extLst>
+      <p:ext uri="{BB962C8B-B14F-4D97-AF65-F5344CB8AC3E}">
+        <p14:creationId xmlns:p14="http://schemas.microsoft.com/office/powerpoint/2010/main" val="3532243534"/>
+      </p:ext>
+    </p:extLst>
+  </p:cSld>
+  <p:clrMapOvr>
+    <a:masterClrMapping/>
+  </p:clrMapOvr>
+</p:sld>
+</file>
+
+<file path=ppt/slides/slide8.xml><?xml version="1.0" encoding="utf-8"?>
+<p:sld xmlns:a="http://schemas.openxmlformats.org/drawingml/2006/main" xmlns:r="http://schemas.openxmlformats.org/officeDocument/2006/relationships" xmlns:p="http://schemas.openxmlformats.org/presentationml/2006/main">
+  <p:cSld>
+    <p:spTree>
+      <p:nvGrpSpPr>
+        <p:cNvPr id="1" name="">
+          <a:extLst>
+            <a:ext uri="{FF2B5EF4-FFF2-40B4-BE49-F238E27FC236}">
               <a16:creationId xmlns:a16="http://schemas.microsoft.com/office/drawing/2014/main" id="{371656EC-E197-239C-60DD-C11F7BA4B44A}"/>
             </a:ext>
           </a:extLst>
@@ -13752,7 +14985,7 @@
           <a:p>
             <a:fld id="{B6F15528-21DE-4FAA-801E-634DDDAF4B2B}" type="slidenum">
               <a:rPr lang="es-ES" smtClean="0"/>
-              <a:t>7</a:t>
+              <a:t>8</a:t>
             </a:fld>
             <a:endParaRPr lang="es-ES"/>
           </a:p>
@@ -13807,7 +15040,7 @@
         <p:spPr>
           <a:xfrm>
             <a:off x="609441" y="4627196"/>
-            <a:ext cx="11199971" cy="2123658"/>
+            <a:ext cx="11199971" cy="1938992"/>
           </a:xfrm>
           <a:prstGeom prst="rect">
             <a:avLst/>
@@ -13831,53 +15064,109 @@
           <a:p>
             <a:pPr algn="just"/>
             <a:r>
-              <a:rPr lang="en-US" sz="1200" b="1" dirty="0">
-                <a:latin typeface="Arial" panose="020B0604020202020204" pitchFamily="34" charset="0"/>
-                <a:cs typeface="Arial" panose="020B0604020202020204" pitchFamily="34" charset="0"/>
-              </a:rPr>
-              <a:t>Hints:</a:t>
+              <a:rPr lang="es-ES" sz="1200" dirty="0">
+                <a:latin typeface="Arial" panose="020B0604020202020204" pitchFamily="34" charset="0"/>
+                <a:cs typeface="Arial" panose="020B0604020202020204" pitchFamily="34" charset="0"/>
+              </a:rPr>
+              <a:t>Para que las guías estén desacopladas, Lπ debe ser mayor que L para minimizar K. Se podrían escoger valores de gap relativamente pequeños que cumplan la condición, pero como K es oscilatorio, en algunos puntos puede acercarse a 0 de manera accidental; sin embargo, las guías no estarán realmente desacopladas.</a:t>
             </a:r>
           </a:p>
           <a:p>
             <a:pPr algn="just"/>
-            <a:r>
-              <a:rPr lang="en-US" sz="1200" dirty="0">
-                <a:latin typeface="Arial" panose="020B0604020202020204" pitchFamily="34" charset="0"/>
-                <a:cs typeface="Arial" panose="020B0604020202020204" pitchFamily="34" charset="0"/>
-              </a:rPr>
-              <a:t>All waveguides running in parallel are coupled somehow. Controlling the degree of coupling is key for those waveguides you don’t want coupling over certain level (i.e. uncoupled waveguides). Uncoupled waveguide definition, we will use K&lt;0.01. Parallel waveguide length = 10 mm (typical length of a chip). Find minimum gap shallow / deep w=1.0µm </a:t>
-            </a:r>
-            <a:r>
-              <a:rPr lang="en-US" sz="1200" dirty="0" err="1">
-                <a:latin typeface="Arial" panose="020B0604020202020204" pitchFamily="34" charset="0"/>
-                <a:cs typeface="Arial" panose="020B0604020202020204" pitchFamily="34" charset="0"/>
-              </a:rPr>
-              <a:t>wvl</a:t>
-            </a:r>
-            <a:r>
-              <a:rPr lang="en-US" sz="1200" dirty="0">
-                <a:latin typeface="Arial" panose="020B0604020202020204" pitchFamily="34" charset="0"/>
-                <a:cs typeface="Arial" panose="020B0604020202020204" pitchFamily="34" charset="0"/>
-              </a:rPr>
-              <a:t> 1.55 µm.</a:t>
-            </a:r>
-          </a:p>
-          <a:p>
-            <a:pPr algn="just"/>
-            <a:endParaRPr lang="en-US" sz="1200" dirty="0">
+            <a:endParaRPr lang="es-ES" sz="1200" dirty="0">
               <a:latin typeface="Arial" panose="020B0604020202020204" pitchFamily="34" charset="0"/>
               <a:cs typeface="Arial" panose="020B0604020202020204" pitchFamily="34" charset="0"/>
             </a:endParaRPr>
           </a:p>
           <a:p>
             <a:pPr algn="just"/>
-            <a:endParaRPr lang="en-US" sz="1200" dirty="0">
+            <a:r>
+              <a:rPr lang="es-ES" sz="1200" dirty="0">
+                <a:latin typeface="Arial" panose="020B0604020202020204" pitchFamily="34" charset="0"/>
+                <a:cs typeface="Arial" panose="020B0604020202020204" pitchFamily="34" charset="0"/>
+              </a:rPr>
+              <a:t>Para el caso </a:t>
+            </a:r>
+            <a:r>
+              <a:rPr lang="es-ES" sz="1200" dirty="0" err="1">
+                <a:latin typeface="Arial" panose="020B0604020202020204" pitchFamily="34" charset="0"/>
+                <a:cs typeface="Arial" panose="020B0604020202020204" pitchFamily="34" charset="0"/>
+              </a:rPr>
+              <a:t>deep</a:t>
+            </a:r>
+            <a:r>
+              <a:rPr lang="es-ES" sz="1200" dirty="0">
+                <a:latin typeface="Arial" panose="020B0604020202020204" pitchFamily="34" charset="0"/>
+                <a:cs typeface="Arial" panose="020B0604020202020204" pitchFamily="34" charset="0"/>
+              </a:rPr>
+              <a:t> obtenemos un gap de 3.6 </a:t>
+            </a:r>
+            <a:r>
+              <a:rPr lang="es-ES" sz="1200" dirty="0" err="1">
+                <a:latin typeface="Arial" panose="020B0604020202020204" pitchFamily="34" charset="0"/>
+                <a:cs typeface="Arial" panose="020B0604020202020204" pitchFamily="34" charset="0"/>
+              </a:rPr>
+              <a:t>um</a:t>
+            </a:r>
+            <a:r>
+              <a:rPr lang="es-ES" sz="1200" dirty="0">
+                <a:latin typeface="Arial" panose="020B0604020202020204" pitchFamily="34" charset="0"/>
+                <a:cs typeface="Arial" panose="020B0604020202020204" pitchFamily="34" charset="0"/>
+              </a:rPr>
+              <a:t> y cumple con que el </a:t>
+            </a:r>
+            <a:r>
+              <a:rPr lang="es-ES" sz="1200" dirty="0" err="1">
+                <a:latin typeface="Arial" panose="020B0604020202020204" pitchFamily="34" charset="0"/>
+                <a:cs typeface="Arial" panose="020B0604020202020204" pitchFamily="34" charset="0"/>
+              </a:rPr>
+              <a:t>Lpi</a:t>
+            </a:r>
+            <a:r>
+              <a:rPr lang="es-ES" sz="1200" dirty="0">
+                <a:latin typeface="Arial" panose="020B0604020202020204" pitchFamily="34" charset="0"/>
+                <a:cs typeface="Arial" panose="020B0604020202020204" pitchFamily="34" charset="0"/>
+              </a:rPr>
+              <a:t> correspondiente (183.91 mm) es mucho mayor que L.</a:t>
+            </a:r>
+          </a:p>
+          <a:p>
+            <a:pPr algn="just"/>
+            <a:endParaRPr lang="es-ES" sz="1200" dirty="0">
               <a:latin typeface="Arial" panose="020B0604020202020204" pitchFamily="34" charset="0"/>
               <a:cs typeface="Arial" panose="020B0604020202020204" pitchFamily="34" charset="0"/>
             </a:endParaRPr>
           </a:p>
           <a:p>
             <a:pPr algn="just"/>
+            <a:r>
+              <a:rPr lang="es-ES" sz="1200" dirty="0">
+                <a:latin typeface="Arial" panose="020B0604020202020204" pitchFamily="34" charset="0"/>
+                <a:cs typeface="Arial" panose="020B0604020202020204" pitchFamily="34" charset="0"/>
+              </a:rPr>
+              <a:t>Para el </a:t>
+            </a:r>
+            <a:r>
+              <a:rPr lang="es-ES" sz="1200" dirty="0" err="1">
+                <a:latin typeface="Arial" panose="020B0604020202020204" pitchFamily="34" charset="0"/>
+                <a:cs typeface="Arial" panose="020B0604020202020204" pitchFamily="34" charset="0"/>
+              </a:rPr>
+              <a:t>shallow</a:t>
+            </a:r>
+            <a:r>
+              <a:rPr lang="es-ES" sz="1200" dirty="0">
+                <a:latin typeface="Arial" panose="020B0604020202020204" pitchFamily="34" charset="0"/>
+                <a:cs typeface="Arial" panose="020B0604020202020204" pitchFamily="34" charset="0"/>
+              </a:rPr>
+              <a:t>, he cambiado la función eme.py porque no calculaba para casos </a:t>
+            </a:r>
+            <a:r>
+              <a:rPr lang="es-ES" sz="1200" dirty="0" err="1">
+                <a:latin typeface="Arial" panose="020B0604020202020204" pitchFamily="34" charset="0"/>
+                <a:cs typeface="Arial" panose="020B0604020202020204" pitchFamily="34" charset="0"/>
+              </a:rPr>
+              <a:t>shallow</a:t>
+            </a:r>
             <a:endParaRPr lang="en-US" sz="1200" dirty="0">
               <a:latin typeface="Arial" panose="020B0604020202020204" pitchFamily="34" charset="0"/>
               <a:cs typeface="Arial" panose="020B0604020202020204" pitchFamily="34" charset="0"/>
@@ -14263,6 +15552,36 @@
           </p:sp>
         </mc:Fallback>
       </mc:AlternateContent>
+      <p:pic>
+        <p:nvPicPr>
+          <p:cNvPr id="11" name="Imagen 10">
+            <a:extLst>
+              <a:ext uri="{FF2B5EF4-FFF2-40B4-BE49-F238E27FC236}">
+                <a16:creationId xmlns:a16="http://schemas.microsoft.com/office/drawing/2014/main" id="{7E247DFD-2CDE-45D3-AEA7-3AB69BC63D90}"/>
+              </a:ext>
+            </a:extLst>
+          </p:cNvPr>
+          <p:cNvPicPr>
+            <a:picLocks noChangeAspect="1"/>
+          </p:cNvPicPr>
+          <p:nvPr/>
+        </p:nvPicPr>
+        <p:blipFill>
+          <a:blip r:embed="rId7"/>
+          <a:stretch>
+            <a:fillRect/>
+          </a:stretch>
+        </p:blipFill>
+        <p:spPr>
+          <a:xfrm>
+            <a:off x="1450567" y="1369645"/>
+            <a:ext cx="3804305" cy="3005137"/>
+          </a:xfrm>
+          <a:prstGeom prst="rect">
+            <a:avLst/>
+          </a:prstGeom>
+        </p:spPr>
+      </p:pic>
     </p:spTree>
     <p:extLst>
       <p:ext uri="{BB962C8B-B14F-4D97-AF65-F5344CB8AC3E}">
@@ -14276,7 +15595,7 @@
 </p:sld>
 </file>
 
-<file path=ppt/slides/slide8.xml><?xml version="1.0" encoding="utf-8"?>
+<file path=ppt/slides/slide9.xml><?xml version="1.0" encoding="utf-8"?>
 <p:sld xmlns:a="http://schemas.openxmlformats.org/drawingml/2006/main" xmlns:r="http://schemas.openxmlformats.org/officeDocument/2006/relationships" xmlns:p="http://schemas.openxmlformats.org/presentationml/2006/main">
   <p:cSld>
     <p:spTree>
@@ -14356,7 +15675,7 @@
           <a:p>
             <a:fld id="{B6F15528-21DE-4FAA-801E-634DDDAF4B2B}" type="slidenum">
               <a:rPr lang="es-ES" smtClean="0"/>
-              <a:t>8</a:t>
+              <a:t>9</a:t>
             </a:fld>
             <a:endParaRPr lang="es-ES"/>
           </a:p>
@@ -14408,436 +15727,6 @@
     <p:extLst>
       <p:ext uri="{BB962C8B-B14F-4D97-AF65-F5344CB8AC3E}">
         <p14:creationId xmlns:p14="http://schemas.microsoft.com/office/powerpoint/2010/main" val="3873318961"/>
-      </p:ext>
-    </p:extLst>
-  </p:cSld>
-  <p:clrMapOvr>
-    <a:masterClrMapping/>
-  </p:clrMapOvr>
-</p:sld>
-</file>
-
-<file path=ppt/slides/slide9.xml><?xml version="1.0" encoding="utf-8"?>
-<p:sld xmlns:a="http://schemas.openxmlformats.org/drawingml/2006/main" xmlns:r="http://schemas.openxmlformats.org/officeDocument/2006/relationships" xmlns:p="http://schemas.openxmlformats.org/presentationml/2006/main">
-  <p:cSld>
-    <p:spTree>
-      <p:nvGrpSpPr>
-        <p:cNvPr id="1" name="">
-          <a:extLst>
-            <a:ext uri="{FF2B5EF4-FFF2-40B4-BE49-F238E27FC236}">
-              <a16:creationId xmlns:a16="http://schemas.microsoft.com/office/drawing/2014/main" id="{91BF7C0E-2677-BADF-D636-6F9B71E665FA}"/>
-            </a:ext>
-          </a:extLst>
-        </p:cNvPr>
-        <p:cNvGrpSpPr/>
-        <p:nvPr/>
-      </p:nvGrpSpPr>
-      <p:grpSpPr>
-        <a:xfrm>
-          <a:off x="0" y="0"/>
-          <a:ext cx="0" cy="0"/>
-          <a:chOff x="0" y="0"/>
-          <a:chExt cx="0" cy="0"/>
-        </a:xfrm>
-      </p:grpSpPr>
-      <p:sp>
-        <p:nvSpPr>
-          <p:cNvPr id="16" name="object 16">
-            <a:extLst>
-              <a:ext uri="{FF2B5EF4-FFF2-40B4-BE49-F238E27FC236}">
-                <a16:creationId xmlns:a16="http://schemas.microsoft.com/office/drawing/2014/main" id="{2B8D44BF-A3B5-6BED-C39C-FA8260E83536}"/>
-              </a:ext>
-            </a:extLst>
-          </p:cNvPr>
-          <p:cNvSpPr txBox="1">
-            <a:spLocks noGrp="1"/>
-          </p:cNvSpPr>
-          <p:nvPr>
-            <p:ph type="title"/>
-          </p:nvPr>
-        </p:nvSpPr>
-        <p:spPr>
-          <a:xfrm>
-            <a:off x="685800" y="408883"/>
-            <a:ext cx="10994410" cy="705321"/>
-          </a:xfrm>
-          <a:prstGeom prst="rect">
-            <a:avLst/>
-          </a:prstGeom>
-        </p:spPr>
-        <p:txBody>
-          <a:bodyPr vert="horz" wrap="square" lIns="0" tIns="12700" rIns="0" bIns="0" rtlCol="0">
-            <a:spAutoFit/>
-          </a:bodyPr>
-          <a:lstStyle/>
-          <a:p>
-            <a:pPr marL="12700">
-              <a:lnSpc>
-                <a:spcPct val="100000"/>
-              </a:lnSpc>
-              <a:spcBef>
-                <a:spcPts val="100"/>
-              </a:spcBef>
-            </a:pPr>
-            <a:r>
-              <a:rPr lang="en-US" sz="2500" dirty="0"/>
-              <a:t>Learning outcome #4 – 4.1 2x2 Multimode Interference Coupler </a:t>
-            </a:r>
-            <a:br>
-              <a:rPr lang="en-US" sz="2500" dirty="0"/>
-            </a:br>
-            <a:r>
-              <a:rPr lang="en-US" b="0" dirty="0"/>
-              <a:t>Wavelength 1.55 µm, </a:t>
-            </a:r>
-            <a:r>
-              <a:rPr lang="en-US" b="0" dirty="0" err="1"/>
-              <a:t>wMMI</a:t>
-            </a:r>
-            <a:r>
-              <a:rPr lang="en-US" b="0" dirty="0"/>
-              <a:t> = 6.6 µm</a:t>
-            </a:r>
-            <a:endParaRPr lang="en-US" sz="2500" b="0" dirty="0">
-              <a:latin typeface="+mj-lt"/>
-              <a:cs typeface="Lucida Sans"/>
-            </a:endParaRPr>
-          </a:p>
-        </p:txBody>
-      </p:sp>
-      <p:pic>
-        <p:nvPicPr>
-          <p:cNvPr id="83" name="Gráfico 82">
-            <a:extLst>
-              <a:ext uri="{FF2B5EF4-FFF2-40B4-BE49-F238E27FC236}">
-                <a16:creationId xmlns:a16="http://schemas.microsoft.com/office/drawing/2014/main" id="{5DFCF1AD-6B06-F914-AC0B-80F0ED838EF9}"/>
-              </a:ext>
-            </a:extLst>
-          </p:cNvPr>
-          <p:cNvPicPr>
-            <a:picLocks noChangeAspect="1"/>
-          </p:cNvPicPr>
-          <p:nvPr/>
-        </p:nvPicPr>
-        <p:blipFill>
-          <a:blip r:embed="rId3">
-            <a:extLst>
-              <a:ext uri="{96DAC541-7B7A-43D3-8B79-37D633B846F1}">
-                <asvg:svgBlip xmlns:asvg="http://schemas.microsoft.com/office/drawing/2016/SVG/main" r:embed="rId4"/>
-              </a:ext>
-            </a:extLst>
-          </a:blip>
-          <a:stretch>
-            <a:fillRect/>
-          </a:stretch>
-        </p:blipFill>
-        <p:spPr>
-          <a:xfrm>
-            <a:off x="5045006" y="6356057"/>
-            <a:ext cx="6409575" cy="363174"/>
-          </a:xfrm>
-          <a:prstGeom prst="rect">
-            <a:avLst/>
-          </a:prstGeom>
-        </p:spPr>
-      </p:pic>
-      <p:sp>
-        <p:nvSpPr>
-          <p:cNvPr id="84" name="Marcador de número de diapositiva 83">
-            <a:extLst>
-              <a:ext uri="{FF2B5EF4-FFF2-40B4-BE49-F238E27FC236}">
-                <a16:creationId xmlns:a16="http://schemas.microsoft.com/office/drawing/2014/main" id="{4A656CCE-66E0-EAE0-5C63-DF1315DF6299}"/>
-              </a:ext>
-            </a:extLst>
-          </p:cNvPr>
-          <p:cNvSpPr>
-            <a:spLocks noGrp="1"/>
-          </p:cNvSpPr>
-          <p:nvPr>
-            <p:ph type="sldNum" sz="quarter" idx="7"/>
-          </p:nvPr>
-        </p:nvSpPr>
-        <p:spPr/>
-        <p:txBody>
-          <a:bodyPr/>
-          <a:lstStyle/>
-          <a:p>
-            <a:fld id="{B6F15528-21DE-4FAA-801E-634DDDAF4B2B}" type="slidenum">
-              <a:rPr lang="es-ES" smtClean="0"/>
-              <a:t>9</a:t>
-            </a:fld>
-            <a:endParaRPr lang="es-ES"/>
-          </a:p>
-        </p:txBody>
-      </p:sp>
-      <p:sp>
-        <p:nvSpPr>
-          <p:cNvPr id="3" name="Marcador de pie de página 2">
-            <a:extLst>
-              <a:ext uri="{FF2B5EF4-FFF2-40B4-BE49-F238E27FC236}">
-                <a16:creationId xmlns:a16="http://schemas.microsoft.com/office/drawing/2014/main" id="{D3AB6581-C493-80EB-A67F-5289454DAA28}"/>
-              </a:ext>
-            </a:extLst>
-          </p:cNvPr>
-          <p:cNvSpPr>
-            <a:spLocks noGrp="1"/>
-          </p:cNvSpPr>
-          <p:nvPr>
-            <p:ph type="ftr" sz="quarter" idx="5"/>
-          </p:nvPr>
-        </p:nvSpPr>
-        <p:spPr/>
-        <p:txBody>
-          <a:bodyPr/>
-          <a:lstStyle/>
-          <a:p>
-            <a:pPr marL="12700">
-              <a:spcBef>
-                <a:spcPts val="15"/>
-              </a:spcBef>
-            </a:pPr>
-            <a:r>
-              <a:rPr lang="es-ES" spc="-5"/>
-              <a:t>LAB 2.0. COUPLERS</a:t>
-            </a:r>
-            <a:endParaRPr lang="es-ES" spc="-5" dirty="0"/>
-          </a:p>
-        </p:txBody>
-      </p:sp>
-      <p:sp>
-        <p:nvSpPr>
-          <p:cNvPr id="2" name="CuadroTexto 1">
-            <a:extLst>
-              <a:ext uri="{FF2B5EF4-FFF2-40B4-BE49-F238E27FC236}">
-                <a16:creationId xmlns:a16="http://schemas.microsoft.com/office/drawing/2014/main" id="{B5029729-ADF3-3B30-4FF9-83BE1DB82BD7}"/>
-              </a:ext>
-            </a:extLst>
-          </p:cNvPr>
-          <p:cNvSpPr txBox="1"/>
-          <p:nvPr/>
-        </p:nvSpPr>
-        <p:spPr>
-          <a:xfrm>
-            <a:off x="609441" y="4819471"/>
-            <a:ext cx="11199971" cy="1200329"/>
-          </a:xfrm>
-          <a:prstGeom prst="rect">
-            <a:avLst/>
-          </a:prstGeom>
-          <a:solidFill>
-            <a:schemeClr val="bg1">
-              <a:lumMod val="95000"/>
-            </a:schemeClr>
-          </a:solidFill>
-          <a:ln w="28575">
-            <a:solidFill>
-              <a:srgbClr val="E0700D"/>
-            </a:solidFill>
-          </a:ln>
-        </p:spPr>
-        <p:txBody>
-          <a:bodyPr wrap="square" rtlCol="0">
-            <a:spAutoFit/>
-          </a:bodyPr>
-          <a:lstStyle/>
-          <a:p>
-            <a:pPr algn="just"/>
-            <a:r>
-              <a:rPr lang="en-US" sz="1200" dirty="0">
-                <a:latin typeface="Arial" panose="020B0604020202020204" pitchFamily="34" charset="0"/>
-                <a:cs typeface="Arial" panose="020B0604020202020204" pitchFamily="34" charset="0"/>
-              </a:rPr>
-              <a:t>Comment results (Coupling relationship, </a:t>
-            </a:r>
-            <a:r>
-              <a:rPr lang="en-US" sz="1200" dirty="0" err="1">
-                <a:latin typeface="Arial" panose="020B0604020202020204" pitchFamily="34" charset="0"/>
-                <a:cs typeface="Arial" panose="020B0604020202020204" pitchFamily="34" charset="0"/>
-              </a:rPr>
-              <a:t>Lpi</a:t>
-            </a:r>
-            <a:r>
-              <a:rPr lang="en-US" sz="1200" dirty="0">
-                <a:latin typeface="Arial" panose="020B0604020202020204" pitchFamily="34" charset="0"/>
-                <a:cs typeface="Arial" panose="020B0604020202020204" pitchFamily="34" charset="0"/>
-              </a:rPr>
-              <a:t>,  losses, comparison with Directional Coupler… )</a:t>
-            </a:r>
-          </a:p>
-          <a:p>
-            <a:pPr algn="just"/>
-            <a:endParaRPr lang="en-US" sz="1200" dirty="0">
-              <a:latin typeface="Arial" panose="020B0604020202020204" pitchFamily="34" charset="0"/>
-              <a:cs typeface="Arial" panose="020B0604020202020204" pitchFamily="34" charset="0"/>
-            </a:endParaRPr>
-          </a:p>
-          <a:p>
-            <a:pPr algn="just"/>
-            <a:endParaRPr lang="en-US" sz="1200" dirty="0">
-              <a:latin typeface="Arial" panose="020B0604020202020204" pitchFamily="34" charset="0"/>
-              <a:cs typeface="Arial" panose="020B0604020202020204" pitchFamily="34" charset="0"/>
-            </a:endParaRPr>
-          </a:p>
-          <a:p>
-            <a:pPr algn="just"/>
-            <a:endParaRPr lang="en-US" sz="1200" dirty="0">
-              <a:latin typeface="Arial" panose="020B0604020202020204" pitchFamily="34" charset="0"/>
-              <a:cs typeface="Arial" panose="020B0604020202020204" pitchFamily="34" charset="0"/>
-            </a:endParaRPr>
-          </a:p>
-          <a:p>
-            <a:pPr algn="just"/>
-            <a:endParaRPr lang="en-US" sz="1200" dirty="0">
-              <a:latin typeface="Arial" panose="020B0604020202020204" pitchFamily="34" charset="0"/>
-              <a:cs typeface="Arial" panose="020B0604020202020204" pitchFamily="34" charset="0"/>
-            </a:endParaRPr>
-          </a:p>
-          <a:p>
-            <a:pPr algn="just"/>
-            <a:endParaRPr lang="en-US" sz="1200" dirty="0">
-              <a:latin typeface="Arial" panose="020B0604020202020204" pitchFamily="34" charset="0"/>
-              <a:cs typeface="Arial" panose="020B0604020202020204" pitchFamily="34" charset="0"/>
-            </a:endParaRPr>
-          </a:p>
-        </p:txBody>
-      </p:sp>
-      <p:sp>
-        <p:nvSpPr>
-          <p:cNvPr id="7" name="Rectángulo 6">
-            <a:extLst>
-              <a:ext uri="{FF2B5EF4-FFF2-40B4-BE49-F238E27FC236}">
-                <a16:creationId xmlns:a16="http://schemas.microsoft.com/office/drawing/2014/main" id="{98DE5FDA-4E91-E843-E84A-1467BFAA9986}"/>
-              </a:ext>
-            </a:extLst>
-          </p:cNvPr>
-          <p:cNvSpPr/>
-          <p:nvPr/>
-        </p:nvSpPr>
-        <p:spPr>
-          <a:xfrm>
-            <a:off x="609441" y="1377510"/>
-            <a:ext cx="11199971" cy="3306028"/>
-          </a:xfrm>
-          <a:prstGeom prst="rect">
-            <a:avLst/>
-          </a:prstGeom>
-          <a:noFill/>
-          <a:ln w="28575">
-            <a:solidFill>
-              <a:srgbClr val="E0700D"/>
-            </a:solidFill>
-          </a:ln>
-        </p:spPr>
-        <p:style>
-          <a:lnRef idx="2">
-            <a:schemeClr val="accent1">
-              <a:shade val="15000"/>
-            </a:schemeClr>
-          </a:lnRef>
-          <a:fillRef idx="1">
-            <a:schemeClr val="accent1"/>
-          </a:fillRef>
-          <a:effectRef idx="0">
-            <a:schemeClr val="accent1"/>
-          </a:effectRef>
-          <a:fontRef idx="minor">
-            <a:schemeClr val="lt1"/>
-          </a:fontRef>
-        </p:style>
-        <p:txBody>
-          <a:bodyPr rtlCol="0" anchor="ctr"/>
-          <a:lstStyle/>
-          <a:p>
-            <a:pPr algn="ctr"/>
-            <a:endParaRPr lang="en-US"/>
-          </a:p>
-        </p:txBody>
-      </p:sp>
-      <p:sp>
-        <p:nvSpPr>
-          <p:cNvPr id="8" name="CuadroTexto 7">
-            <a:extLst>
-              <a:ext uri="{FF2B5EF4-FFF2-40B4-BE49-F238E27FC236}">
-                <a16:creationId xmlns:a16="http://schemas.microsoft.com/office/drawing/2014/main" id="{0DA14DBA-172E-DA2C-0573-6A00BF18F4A5}"/>
-              </a:ext>
-            </a:extLst>
-          </p:cNvPr>
-          <p:cNvSpPr txBox="1"/>
-          <p:nvPr/>
-        </p:nvSpPr>
-        <p:spPr>
-          <a:xfrm>
-            <a:off x="514280" y="2568859"/>
-            <a:ext cx="7718580" cy="923330"/>
-          </a:xfrm>
-          <a:prstGeom prst="rect">
-            <a:avLst/>
-          </a:prstGeom>
-          <a:noFill/>
-        </p:spPr>
-        <p:txBody>
-          <a:bodyPr wrap="square" rtlCol="0">
-            <a:spAutoFit/>
-          </a:bodyPr>
-          <a:lstStyle/>
-          <a:p>
-            <a:pPr algn="ctr"/>
-            <a:r>
-              <a:rPr lang="en-US" b="1" dirty="0"/>
-              <a:t>deep</a:t>
-            </a:r>
-            <a:r>
-              <a:rPr lang="en-US" dirty="0"/>
-              <a:t> waveguide</a:t>
-            </a:r>
-          </a:p>
-          <a:p>
-            <a:pPr algn="ctr"/>
-            <a:endParaRPr lang="en-US" dirty="0"/>
-          </a:p>
-          <a:p>
-            <a:pPr algn="ctr"/>
-            <a:r>
-              <a:rPr lang="en-US" dirty="0"/>
-              <a:t>Paste propagation plots and console results</a:t>
-            </a:r>
-          </a:p>
-        </p:txBody>
-      </p:sp>
-      <p:pic>
-        <p:nvPicPr>
-          <p:cNvPr id="5" name="Imagen 4">
-            <a:extLst>
-              <a:ext uri="{FF2B5EF4-FFF2-40B4-BE49-F238E27FC236}">
-                <a16:creationId xmlns:a16="http://schemas.microsoft.com/office/drawing/2014/main" id="{0306A81B-1DE7-4993-A6AA-D02ECE945160}"/>
-              </a:ext>
-            </a:extLst>
-          </p:cNvPr>
-          <p:cNvPicPr>
-            <a:picLocks noChangeAspect="1"/>
-          </p:cNvPicPr>
-          <p:nvPr/>
-        </p:nvPicPr>
-        <p:blipFill>
-          <a:blip r:embed="rId5"/>
-          <a:stretch>
-            <a:fillRect/>
-          </a:stretch>
-        </p:blipFill>
-        <p:spPr>
-          <a:xfrm>
-            <a:off x="4252719" y="1484955"/>
-            <a:ext cx="3686562" cy="3091138"/>
-          </a:xfrm>
-          <a:prstGeom prst="rect">
-            <a:avLst/>
-          </a:prstGeom>
-        </p:spPr>
-      </p:pic>
-    </p:spTree>
-    <p:extLst>
-      <p:ext uri="{BB962C8B-B14F-4D97-AF65-F5344CB8AC3E}">
-        <p14:creationId xmlns:p14="http://schemas.microsoft.com/office/powerpoint/2010/main" val="2815679427"/>
       </p:ext>
     </p:extLst>
   </p:cSld>

--- a/LabBook_20.pptx
+++ b/LabBook_20.pptx
@@ -4571,57 +4571,6 @@
           </a:p>
         </p:txBody>
       </p:sp>
-      <p:sp>
-        <p:nvSpPr>
-          <p:cNvPr id="8" name="CuadroTexto 7">
-            <a:extLst>
-              <a:ext uri="{FF2B5EF4-FFF2-40B4-BE49-F238E27FC236}">
-                <a16:creationId xmlns:a16="http://schemas.microsoft.com/office/drawing/2014/main" id="{0DA14DBA-172E-DA2C-0573-6A00BF18F4A5}"/>
-              </a:ext>
-            </a:extLst>
-          </p:cNvPr>
-          <p:cNvSpPr txBox="1"/>
-          <p:nvPr/>
-        </p:nvSpPr>
-        <p:spPr>
-          <a:xfrm>
-            <a:off x="514280" y="2568859"/>
-            <a:ext cx="7718580" cy="923330"/>
-          </a:xfrm>
-          <a:prstGeom prst="rect">
-            <a:avLst/>
-          </a:prstGeom>
-          <a:noFill/>
-        </p:spPr>
-        <p:txBody>
-          <a:bodyPr wrap="square" rtlCol="0">
-            <a:spAutoFit/>
-          </a:bodyPr>
-          <a:lstStyle/>
-          <a:p>
-            <a:pPr algn="ctr"/>
-            <a:r>
-              <a:rPr lang="en-US" b="1" dirty="0"/>
-              <a:t>deep</a:t>
-            </a:r>
-            <a:r>
-              <a:rPr lang="en-US" dirty="0"/>
-              <a:t> waveguide</a:t>
-            </a:r>
-          </a:p>
-          <a:p>
-            <a:pPr algn="ctr"/>
-            <a:endParaRPr lang="en-US" dirty="0"/>
-          </a:p>
-          <a:p>
-            <a:pPr algn="ctr"/>
-            <a:r>
-              <a:rPr lang="en-US" dirty="0"/>
-              <a:t>Paste propagation plots and console results</a:t>
-            </a:r>
-          </a:p>
-        </p:txBody>
-      </p:sp>
       <p:pic>
         <p:nvPicPr>
           <p:cNvPr id="5" name="Imagen 4">
@@ -4644,7 +4593,7 @@
         </p:blipFill>
         <p:spPr>
           <a:xfrm>
-            <a:off x="4252719" y="1484955"/>
+            <a:off x="4191000" y="1450461"/>
             <a:ext cx="3686562" cy="3091138"/>
           </a:xfrm>
           <a:prstGeom prst="rect">
@@ -4867,7 +4816,7 @@
         <p:spPr>
           <a:xfrm>
             <a:off x="609441" y="4819471"/>
-            <a:ext cx="11199971" cy="1384995"/>
+            <a:ext cx="11199971" cy="1415772"/>
           </a:xfrm>
           <a:prstGeom prst="rect">
             <a:avLst/>
@@ -5007,28 +4956,57 @@
             </a:r>
           </a:p>
           <a:p>
-            <a:pPr algn="just"/>
-            <a:endParaRPr lang="en-US" sz="1200" dirty="0">
-              <a:latin typeface="Arial" panose="020B0604020202020204" pitchFamily="34" charset="0"/>
-              <a:cs typeface="Arial" panose="020B0604020202020204" pitchFamily="34" charset="0"/>
-            </a:endParaRPr>
-          </a:p>
-          <a:p>
-            <a:pPr algn="just"/>
-            <a:endParaRPr lang="en-US" sz="1200" dirty="0">
-              <a:latin typeface="Arial" panose="020B0604020202020204" pitchFamily="34" charset="0"/>
-              <a:cs typeface="Arial" panose="020B0604020202020204" pitchFamily="34" charset="0"/>
-            </a:endParaRPr>
-          </a:p>
-          <a:p>
-            <a:pPr algn="just"/>
-            <a:endParaRPr lang="en-US" sz="1200" dirty="0">
-              <a:latin typeface="Arial" panose="020B0604020202020204" pitchFamily="34" charset="0"/>
-              <a:cs typeface="Arial" panose="020B0604020202020204" pitchFamily="34" charset="0"/>
-            </a:endParaRPr>
-          </a:p>
-          <a:p>
-            <a:pPr algn="just"/>
+            <a:pPr algn="r"/>
+            <a:r>
+              <a:rPr lang="en-US" sz="1000" b="1" dirty="0"/>
+              <a:t>Target</a:t>
+            </a:r>
+            <a:r>
+              <a:rPr lang="en-US" sz="1000" dirty="0"/>
+              <a:t>: make equal ratio over outputs (even if not 0.5) and minimize excess loss (even if not 0.0 dB)</a:t>
+            </a:r>
+          </a:p>
+          <a:p>
+            <a:pPr algn="r"/>
+            <a:r>
+              <a:rPr lang="en-US" sz="1000" dirty="0"/>
+              <a:t>With same settings of previous LO, now adjust try to manually optimize the MMI by changing iteratively:</a:t>
+            </a:r>
+          </a:p>
+          <a:p>
+            <a:pPr algn="r"/>
+            <a:r>
+              <a:rPr lang="en-US" sz="1000" dirty="0"/>
+              <a:t>- Change </a:t>
+            </a:r>
+            <a:r>
+              <a:rPr lang="en-US" sz="1000" dirty="0" err="1"/>
+              <a:t>dL_MMI</a:t>
+            </a:r>
+            <a:endParaRPr lang="en-US" sz="1000" dirty="0"/>
+          </a:p>
+          <a:p>
+            <a:pPr algn="r"/>
+            <a:r>
+              <a:rPr lang="en-US" sz="1000" dirty="0"/>
+              <a:t>- Change I/O waveguide position +/- </a:t>
+            </a:r>
+            <a:r>
+              <a:rPr lang="en-US" sz="1000" dirty="0" err="1"/>
+              <a:t>dy</a:t>
+            </a:r>
+            <a:endParaRPr lang="en-US" sz="1000" dirty="0"/>
+          </a:p>
+          <a:p>
+            <a:pPr algn="r"/>
+            <a:r>
+              <a:rPr lang="en-US" sz="1000" b="1" dirty="0"/>
+              <a:t>Hints</a:t>
+            </a:r>
+            <a:r>
+              <a:rPr lang="en-US" sz="1000" dirty="0"/>
+              <a:t>: observe the 2D EME propagation results to guide you to the best settings of a) and b).</a:t>
+            </a:r>
             <a:endParaRPr lang="en-US" sz="1200" dirty="0">
               <a:latin typeface="Arial" panose="020B0604020202020204" pitchFamily="34" charset="0"/>
               <a:cs typeface="Arial" panose="020B0604020202020204" pitchFamily="34" charset="0"/>
@@ -5095,118 +5073,6 @@
           </a:p>
         </p:txBody>
       </p:sp>
-      <p:sp>
-        <p:nvSpPr>
-          <p:cNvPr id="8" name="CuadroTexto 7">
-            <a:extLst>
-              <a:ext uri="{FF2B5EF4-FFF2-40B4-BE49-F238E27FC236}">
-                <a16:creationId xmlns:a16="http://schemas.microsoft.com/office/drawing/2014/main" id="{643565A9-7DB6-D6EE-152F-2852C8BA7986}"/>
-              </a:ext>
-            </a:extLst>
-          </p:cNvPr>
-          <p:cNvSpPr txBox="1"/>
-          <p:nvPr/>
-        </p:nvSpPr>
-        <p:spPr>
-          <a:xfrm>
-            <a:off x="640245" y="1942909"/>
-            <a:ext cx="11199972" cy="2708434"/>
-          </a:xfrm>
-          <a:prstGeom prst="rect">
-            <a:avLst/>
-          </a:prstGeom>
-          <a:noFill/>
-        </p:spPr>
-        <p:txBody>
-          <a:bodyPr wrap="square" rtlCol="0">
-            <a:spAutoFit/>
-          </a:bodyPr>
-          <a:lstStyle/>
-          <a:p>
-            <a:pPr algn="ctr"/>
-            <a:r>
-              <a:rPr lang="en-US" b="1" dirty="0"/>
-              <a:t>deep</a:t>
-            </a:r>
-            <a:r>
-              <a:rPr lang="en-US" dirty="0"/>
-              <a:t> waveguide</a:t>
-            </a:r>
-          </a:p>
-          <a:p>
-            <a:pPr algn="ctr"/>
-            <a:endParaRPr lang="en-US" dirty="0"/>
-          </a:p>
-          <a:p>
-            <a:pPr algn="ctr"/>
-            <a:r>
-              <a:rPr lang="en-US" dirty="0"/>
-              <a:t>Paste propagation plot and console results</a:t>
-            </a:r>
-          </a:p>
-          <a:p>
-            <a:pPr algn="ctr"/>
-            <a:endParaRPr lang="en-US" dirty="0"/>
-          </a:p>
-          <a:p>
-            <a:pPr algn="ctr"/>
-            <a:endParaRPr lang="en-US" dirty="0"/>
-          </a:p>
-          <a:p>
-            <a:pPr algn="r"/>
-            <a:r>
-              <a:rPr lang="en-US" sz="1600" b="1" dirty="0"/>
-              <a:t>Target</a:t>
-            </a:r>
-            <a:r>
-              <a:rPr lang="en-US" sz="1600" dirty="0"/>
-              <a:t>: make equal ratio over outputs (even if not 0.5) and minimize excess loss (even if not 0.0 dB)</a:t>
-            </a:r>
-          </a:p>
-          <a:p>
-            <a:pPr algn="r"/>
-            <a:r>
-              <a:rPr lang="en-US" sz="1600" dirty="0"/>
-              <a:t>With same settings of previous LO, now adjust try to manually optimize the MMI by changing iteratively:</a:t>
-            </a:r>
-          </a:p>
-          <a:p>
-            <a:pPr algn="r"/>
-            <a:r>
-              <a:rPr lang="en-US" sz="1600" dirty="0"/>
-              <a:t>- Change </a:t>
-            </a:r>
-            <a:r>
-              <a:rPr lang="en-US" sz="1600" dirty="0" err="1"/>
-              <a:t>dL_MMI</a:t>
-            </a:r>
-            <a:endParaRPr lang="en-US" sz="1600" dirty="0"/>
-          </a:p>
-          <a:p>
-            <a:pPr algn="r"/>
-            <a:r>
-              <a:rPr lang="en-US" sz="1600" dirty="0"/>
-              <a:t>- Change I/O waveguide position +/- </a:t>
-            </a:r>
-            <a:r>
-              <a:rPr lang="en-US" sz="1600" dirty="0" err="1"/>
-              <a:t>dy</a:t>
-            </a:r>
-            <a:endParaRPr lang="en-US" sz="1600" dirty="0"/>
-          </a:p>
-          <a:p>
-            <a:pPr algn="r"/>
-            <a:r>
-              <a:rPr lang="en-US" sz="1600" b="1" dirty="0"/>
-              <a:t>Hints</a:t>
-            </a:r>
-            <a:r>
-              <a:rPr lang="en-US" sz="1600" dirty="0"/>
-              <a:t>: observe the 2D EME propagation results to guide you to the best settings of a) and b).</a:t>
-            </a:r>
-          </a:p>
-        </p:txBody>
-      </p:sp>
       <p:pic>
         <p:nvPicPr>
           <p:cNvPr id="5" name="Imagen 4">
@@ -5229,7 +5095,7 @@
         </p:blipFill>
         <p:spPr>
           <a:xfrm>
-            <a:off x="609441" y="1321220"/>
+            <a:off x="4133256" y="1445477"/>
             <a:ext cx="3925487" cy="3306028"/>
           </a:xfrm>
           <a:prstGeom prst="rect">
@@ -15040,7 +14906,7 @@
         <p:spPr>
           <a:xfrm>
             <a:off x="609441" y="4627196"/>
-            <a:ext cx="11199971" cy="1938992"/>
+            <a:ext cx="11199971" cy="1569660"/>
           </a:xfrm>
           <a:prstGeom prst="rect">
             <a:avLst/>
@@ -15167,20 +15033,6 @@
               </a:rPr>
               <a:t>shallow</a:t>
             </a:r>
-            <a:endParaRPr lang="en-US" sz="1200" dirty="0">
-              <a:latin typeface="Arial" panose="020B0604020202020204" pitchFamily="34" charset="0"/>
-              <a:cs typeface="Arial" panose="020B0604020202020204" pitchFamily="34" charset="0"/>
-            </a:endParaRPr>
-          </a:p>
-          <a:p>
-            <a:pPr algn="just"/>
-            <a:endParaRPr lang="en-US" sz="1200" dirty="0">
-              <a:latin typeface="Arial" panose="020B0604020202020204" pitchFamily="34" charset="0"/>
-              <a:cs typeface="Arial" panose="020B0604020202020204" pitchFamily="34" charset="0"/>
-            </a:endParaRPr>
-          </a:p>
-          <a:p>
-            <a:pPr algn="just"/>
             <a:endParaRPr lang="en-US" sz="1200" dirty="0">
               <a:latin typeface="Arial" panose="020B0604020202020204" pitchFamily="34" charset="0"/>
               <a:cs typeface="Arial" panose="020B0604020202020204" pitchFamily="34" charset="0"/>

--- a/LabBook_20.pptx
+++ b/LabBook_20.pptx
@@ -819,7 +819,7 @@
           <a:p>
             <a:fld id="{8438F8DC-35B0-48E6-A86E-42F1F08DD00F}" type="datetimeFigureOut">
               <a:rPr lang="es-ES" smtClean="0"/>
-              <a:t>04/03/2026</a:t>
+              <a:t>07/03/2026</a:t>
             </a:fld>
             <a:endParaRPr lang="es-ES"/>
           </a:p>
@@ -996,7 +996,7 @@
           <a:p>
             <a:fld id="{FACBDC12-F39B-4B97-8F4D-6734F9D366FF}" type="datetimeFigureOut">
               <a:rPr lang="es-ES" smtClean="0"/>
-              <a:t>04/03/2026</a:t>
+              <a:t>07/03/2026</a:t>
             </a:fld>
             <a:endParaRPr lang="es-ES"/>
           </a:p>
@@ -4491,10 +4491,139 @@
           </a:p>
           <a:p>
             <a:pPr algn="just"/>
-            <a:endParaRPr lang="en-US" sz="1200" dirty="0">
-              <a:latin typeface="Arial" panose="020B0604020202020204" pitchFamily="34" charset="0"/>
-              <a:cs typeface="Arial" panose="020B0604020202020204" pitchFamily="34" charset="0"/>
-            </a:endParaRPr>
+            <a:r>
+              <a:rPr lang="en-US" sz="1200" dirty="0">
+                <a:latin typeface="Arial" panose="020B0604020202020204" pitchFamily="34" charset="0"/>
+                <a:cs typeface="Arial" panose="020B0604020202020204" pitchFamily="34" charset="0"/>
+              </a:rPr>
+              <a:t>Para </a:t>
+            </a:r>
+            <a:r>
+              <a:rPr lang="en-US" sz="1200" dirty="0" err="1">
+                <a:latin typeface="Arial" panose="020B0604020202020204" pitchFamily="34" charset="0"/>
+                <a:cs typeface="Arial" panose="020B0604020202020204" pitchFamily="34" charset="0"/>
+              </a:rPr>
+              <a:t>el</a:t>
+            </a:r>
+            <a:r>
+              <a:rPr lang="en-US" sz="1200" dirty="0">
+                <a:latin typeface="Arial" panose="020B0604020202020204" pitchFamily="34" charset="0"/>
+                <a:cs typeface="Arial" panose="020B0604020202020204" pitchFamily="34" charset="0"/>
+              </a:rPr>
+              <a:t> </a:t>
+            </a:r>
+            <a:r>
+              <a:rPr lang="en-US" sz="1200" dirty="0" err="1">
+                <a:latin typeface="Arial" panose="020B0604020202020204" pitchFamily="34" charset="0"/>
+                <a:cs typeface="Arial" panose="020B0604020202020204" pitchFamily="34" charset="0"/>
+              </a:rPr>
+              <a:t>caso</a:t>
+            </a:r>
+            <a:r>
+              <a:rPr lang="en-US" sz="1200" dirty="0">
+                <a:latin typeface="Arial" panose="020B0604020202020204" pitchFamily="34" charset="0"/>
+                <a:cs typeface="Arial" panose="020B0604020202020204" pitchFamily="34" charset="0"/>
+              </a:rPr>
+              <a:t> de </a:t>
+            </a:r>
+            <a:r>
+              <a:rPr lang="en-US" sz="1200" dirty="0" err="1">
+                <a:latin typeface="Arial" panose="020B0604020202020204" pitchFamily="34" charset="0"/>
+                <a:cs typeface="Arial" panose="020B0604020202020204" pitchFamily="34" charset="0"/>
+              </a:rPr>
+              <a:t>Lpi</a:t>
+            </a:r>
+            <a:r>
+              <a:rPr lang="en-US" sz="1200" dirty="0">
+                <a:latin typeface="Arial" panose="020B0604020202020204" pitchFamily="34" charset="0"/>
+                <a:cs typeface="Arial" panose="020B0604020202020204" pitchFamily="34" charset="0"/>
+              </a:rPr>
+              <a:t>/2, </a:t>
+            </a:r>
+            <a:r>
+              <a:rPr lang="en-US" sz="1200" dirty="0" err="1">
+                <a:latin typeface="Arial" panose="020B0604020202020204" pitchFamily="34" charset="0"/>
+                <a:cs typeface="Arial" panose="020B0604020202020204" pitchFamily="34" charset="0"/>
+              </a:rPr>
+              <a:t>obtenemos</a:t>
+            </a:r>
+            <a:r>
+              <a:rPr lang="en-US" sz="1200" dirty="0">
+                <a:latin typeface="Arial" panose="020B0604020202020204" pitchFamily="34" charset="0"/>
+                <a:cs typeface="Arial" panose="020B0604020202020204" pitchFamily="34" charset="0"/>
+              </a:rPr>
+              <a:t> </a:t>
+            </a:r>
+            <a:r>
+              <a:rPr lang="en-US" sz="1200" dirty="0" err="1">
+                <a:latin typeface="Arial" panose="020B0604020202020204" pitchFamily="34" charset="0"/>
+                <a:cs typeface="Arial" panose="020B0604020202020204" pitchFamily="34" charset="0"/>
+              </a:rPr>
+              <a:t>unas</a:t>
+            </a:r>
+            <a:r>
+              <a:rPr lang="en-US" sz="1200" dirty="0">
+                <a:latin typeface="Arial" panose="020B0604020202020204" pitchFamily="34" charset="0"/>
+                <a:cs typeface="Arial" panose="020B0604020202020204" pitchFamily="34" charset="0"/>
+              </a:rPr>
+              <a:t> </a:t>
+            </a:r>
+            <a:r>
+              <a:rPr lang="en-US" sz="1200" dirty="0" err="1">
+                <a:latin typeface="Arial" panose="020B0604020202020204" pitchFamily="34" charset="0"/>
+                <a:cs typeface="Arial" panose="020B0604020202020204" pitchFamily="34" charset="0"/>
+              </a:rPr>
+              <a:t>pérdidas</a:t>
+            </a:r>
+            <a:r>
+              <a:rPr lang="en-US" sz="1200" dirty="0">
+                <a:latin typeface="Arial" panose="020B0604020202020204" pitchFamily="34" charset="0"/>
+                <a:cs typeface="Arial" panose="020B0604020202020204" pitchFamily="34" charset="0"/>
+              </a:rPr>
+              <a:t> de 0.4217 dB y un ratio de </a:t>
+            </a:r>
+            <a:r>
+              <a:rPr lang="en-US" sz="1200" dirty="0" err="1">
+                <a:latin typeface="Arial" panose="020B0604020202020204" pitchFamily="34" charset="0"/>
+                <a:cs typeface="Arial" panose="020B0604020202020204" pitchFamily="34" charset="0"/>
+              </a:rPr>
+              <a:t>salida</a:t>
+            </a:r>
+            <a:r>
+              <a:rPr lang="en-US" sz="1200" dirty="0">
+                <a:latin typeface="Arial" panose="020B0604020202020204" pitchFamily="34" charset="0"/>
+                <a:cs typeface="Arial" panose="020B0604020202020204" pitchFamily="34" charset="0"/>
+              </a:rPr>
+              <a:t> </a:t>
+            </a:r>
+            <a:r>
+              <a:rPr lang="en-US" sz="1200" dirty="0" err="1">
+                <a:latin typeface="Arial" panose="020B0604020202020204" pitchFamily="34" charset="0"/>
+                <a:cs typeface="Arial" panose="020B0604020202020204" pitchFamily="34" charset="0"/>
+              </a:rPr>
+              <a:t>cercano</a:t>
+            </a:r>
+            <a:r>
+              <a:rPr lang="en-US" sz="1200" dirty="0">
+                <a:latin typeface="Arial" panose="020B0604020202020204" pitchFamily="34" charset="0"/>
+                <a:cs typeface="Arial" panose="020B0604020202020204" pitchFamily="34" charset="0"/>
+              </a:rPr>
+              <a:t> al 50/50 </a:t>
+            </a:r>
+            <a:r>
+              <a:rPr lang="en-US" sz="1200" dirty="0" err="1">
+                <a:latin typeface="Arial" panose="020B0604020202020204" pitchFamily="34" charset="0"/>
+                <a:cs typeface="Arial" panose="020B0604020202020204" pitchFamily="34" charset="0"/>
+              </a:rPr>
+              <a:t>esperado</a:t>
+            </a:r>
+            <a:r>
+              <a:rPr lang="en-US" sz="1200" dirty="0">
+                <a:latin typeface="Arial" panose="020B0604020202020204" pitchFamily="34" charset="0"/>
+                <a:cs typeface="Arial" panose="020B0604020202020204" pitchFamily="34" charset="0"/>
+              </a:rPr>
+              <a:t> (0.5152 y 0.4848)</a:t>
+            </a:r>
           </a:p>
           <a:p>
             <a:pPr algn="just"/>
@@ -4952,7 +5081,7 @@
                 <a:latin typeface="Arial" panose="020B0604020202020204" pitchFamily="34" charset="0"/>
                 <a:cs typeface="Arial" panose="020B0604020202020204" pitchFamily="34" charset="0"/>
               </a:rPr>
-              <a:t> de 0.330 dB y un ratio de 0.5055</a:t>
+              <a:t> de 0.330 dB y un ratio de 0.5055 y 0.4945</a:t>
             </a:r>
           </a:p>
           <a:p>
@@ -5356,7 +5485,133 @@
                 <a:latin typeface="Arial" panose="020B0604020202020204" pitchFamily="34" charset="0"/>
                 <a:cs typeface="Arial" panose="020B0604020202020204" pitchFamily="34" charset="0"/>
               </a:rPr>
-              <a:t>Width de 1.3 um</a:t>
+              <a:t>Para un width de 1.3 um </a:t>
+            </a:r>
+            <a:r>
+              <a:rPr lang="en-US" sz="1200" dirty="0" err="1">
+                <a:latin typeface="Arial" panose="020B0604020202020204" pitchFamily="34" charset="0"/>
+                <a:cs typeface="Arial" panose="020B0604020202020204" pitchFamily="34" charset="0"/>
+              </a:rPr>
+              <a:t>obtenemos</a:t>
+            </a:r>
+            <a:r>
+              <a:rPr lang="en-US" sz="1200" dirty="0">
+                <a:latin typeface="Arial" panose="020B0604020202020204" pitchFamily="34" charset="0"/>
+                <a:cs typeface="Arial" panose="020B0604020202020204" pitchFamily="34" charset="0"/>
+              </a:rPr>
+              <a:t> </a:t>
+            </a:r>
+            <a:r>
+              <a:rPr lang="en-US" sz="1200" dirty="0" err="1">
+                <a:latin typeface="Arial" panose="020B0604020202020204" pitchFamily="34" charset="0"/>
+                <a:cs typeface="Arial" panose="020B0604020202020204" pitchFamily="34" charset="0"/>
+              </a:rPr>
+              <a:t>muy</a:t>
+            </a:r>
+            <a:r>
+              <a:rPr lang="en-US" sz="1200" dirty="0">
+                <a:latin typeface="Arial" panose="020B0604020202020204" pitchFamily="34" charset="0"/>
+                <a:cs typeface="Arial" panose="020B0604020202020204" pitchFamily="34" charset="0"/>
+              </a:rPr>
+              <a:t> </a:t>
+            </a:r>
+            <a:r>
+              <a:rPr lang="en-US" sz="1200" dirty="0" err="1">
+                <a:latin typeface="Arial" panose="020B0604020202020204" pitchFamily="34" charset="0"/>
+                <a:cs typeface="Arial" panose="020B0604020202020204" pitchFamily="34" charset="0"/>
+              </a:rPr>
+              <a:t>buenas</a:t>
+            </a:r>
+            <a:r>
+              <a:rPr lang="en-US" sz="1200" dirty="0">
+                <a:latin typeface="Arial" panose="020B0604020202020204" pitchFamily="34" charset="0"/>
+                <a:cs typeface="Arial" panose="020B0604020202020204" pitchFamily="34" charset="0"/>
+              </a:rPr>
+              <a:t> </a:t>
+            </a:r>
+            <a:r>
+              <a:rPr lang="en-US" sz="1200" dirty="0" err="1">
+                <a:latin typeface="Arial" panose="020B0604020202020204" pitchFamily="34" charset="0"/>
+                <a:cs typeface="Arial" panose="020B0604020202020204" pitchFamily="34" charset="0"/>
+              </a:rPr>
+              <a:t>pérdidas</a:t>
+            </a:r>
+            <a:r>
+              <a:rPr lang="en-US" sz="1200" dirty="0">
+                <a:latin typeface="Arial" panose="020B0604020202020204" pitchFamily="34" charset="0"/>
+                <a:cs typeface="Arial" panose="020B0604020202020204" pitchFamily="34" charset="0"/>
+              </a:rPr>
+              <a:t> (0.0159 dB) </a:t>
+            </a:r>
+            <a:r>
+              <a:rPr lang="en-US" sz="1200" dirty="0" err="1">
+                <a:latin typeface="Arial" panose="020B0604020202020204" pitchFamily="34" charset="0"/>
+                <a:cs typeface="Arial" panose="020B0604020202020204" pitchFamily="34" charset="0"/>
+              </a:rPr>
+              <a:t>aunque</a:t>
+            </a:r>
+            <a:r>
+              <a:rPr lang="en-US" sz="1200" dirty="0">
+                <a:latin typeface="Arial" panose="020B0604020202020204" pitchFamily="34" charset="0"/>
+                <a:cs typeface="Arial" panose="020B0604020202020204" pitchFamily="34" charset="0"/>
+              </a:rPr>
+              <a:t> no </a:t>
+            </a:r>
+            <a:r>
+              <a:rPr lang="en-US" sz="1200" dirty="0" err="1">
+                <a:latin typeface="Arial" panose="020B0604020202020204" pitchFamily="34" charset="0"/>
+                <a:cs typeface="Arial" panose="020B0604020202020204" pitchFamily="34" charset="0"/>
+              </a:rPr>
+              <a:t>llegue</a:t>
+            </a:r>
+            <a:r>
+              <a:rPr lang="en-US" sz="1200" dirty="0">
+                <a:latin typeface="Arial" panose="020B0604020202020204" pitchFamily="34" charset="0"/>
+                <a:cs typeface="Arial" panose="020B0604020202020204" pitchFamily="34" charset="0"/>
+              </a:rPr>
+              <a:t> a </a:t>
+            </a:r>
+            <a:r>
+              <a:rPr lang="en-US" sz="1200" dirty="0" err="1">
+                <a:latin typeface="Arial" panose="020B0604020202020204" pitchFamily="34" charset="0"/>
+                <a:cs typeface="Arial" panose="020B0604020202020204" pitchFamily="34" charset="0"/>
+              </a:rPr>
+              <a:t>bajar</a:t>
+            </a:r>
+            <a:r>
+              <a:rPr lang="en-US" sz="1200" dirty="0">
+                <a:latin typeface="Arial" panose="020B0604020202020204" pitchFamily="34" charset="0"/>
+                <a:cs typeface="Arial" panose="020B0604020202020204" pitchFamily="34" charset="0"/>
+              </a:rPr>
+              <a:t> de los 0.1 dB y </a:t>
+            </a:r>
+            <a:r>
+              <a:rPr lang="en-US" sz="1200" dirty="0" err="1">
+                <a:latin typeface="Arial" panose="020B0604020202020204" pitchFamily="34" charset="0"/>
+                <a:cs typeface="Arial" panose="020B0604020202020204" pitchFamily="34" charset="0"/>
+              </a:rPr>
+              <a:t>unos</a:t>
+            </a:r>
+            <a:r>
+              <a:rPr lang="en-US" sz="1200" dirty="0">
+                <a:latin typeface="Arial" panose="020B0604020202020204" pitchFamily="34" charset="0"/>
+                <a:cs typeface="Arial" panose="020B0604020202020204" pitchFamily="34" charset="0"/>
+              </a:rPr>
+              <a:t> ratios no tan </a:t>
+            </a:r>
+            <a:r>
+              <a:rPr lang="en-US" sz="1200" dirty="0" err="1">
+                <a:latin typeface="Arial" panose="020B0604020202020204" pitchFamily="34" charset="0"/>
+                <a:cs typeface="Arial" panose="020B0604020202020204" pitchFamily="34" charset="0"/>
+              </a:rPr>
+              <a:t>cercanos</a:t>
+            </a:r>
+            <a:r>
+              <a:rPr lang="en-US" sz="1200" dirty="0">
+                <a:latin typeface="Arial" panose="020B0604020202020204" pitchFamily="34" charset="0"/>
+                <a:cs typeface="Arial" panose="020B0604020202020204" pitchFamily="34" charset="0"/>
+              </a:rPr>
+              <a:t> al 50/50.</a:t>
             </a:r>
           </a:p>
           <a:p>
@@ -5807,7 +6062,7 @@
         <p:spPr>
           <a:xfrm>
             <a:off x="609441" y="4819471"/>
-            <a:ext cx="11199971" cy="1200329"/>
+            <a:ext cx="11199971" cy="1384995"/>
           </a:xfrm>
           <a:prstGeom prst="rect">
             <a:avLst/>
@@ -5835,29 +6090,344 @@
                 <a:latin typeface="Arial" panose="020B0604020202020204" pitchFamily="34" charset="0"/>
                 <a:cs typeface="Arial" panose="020B0604020202020204" pitchFamily="34" charset="0"/>
               </a:rPr>
-              <a:t>Repeat all the design </a:t>
-            </a:r>
-            <a:r>
-              <a:rPr lang="en-US" sz="1200">
-                <a:latin typeface="Arial" panose="020B0604020202020204" pitchFamily="34" charset="0"/>
-                <a:cs typeface="Arial" panose="020B0604020202020204" pitchFamily="34" charset="0"/>
-              </a:rPr>
-              <a:t>process for a </a:t>
+              <a:t>Width  = 12 um. Primera imagen sin optimizer y para 3*</a:t>
+            </a:r>
+            <a:r>
+              <a:rPr lang="en-US" sz="1200" dirty="0" err="1">
+                <a:latin typeface="Arial" panose="020B0604020202020204" pitchFamily="34" charset="0"/>
+                <a:cs typeface="Arial" panose="020B0604020202020204" pitchFamily="34" charset="0"/>
+              </a:rPr>
+              <a:t>Lpi</a:t>
             </a:r>
             <a:r>
               <a:rPr lang="en-US" sz="1200" dirty="0">
                 <a:latin typeface="Arial" panose="020B0604020202020204" pitchFamily="34" charset="0"/>
                 <a:cs typeface="Arial" panose="020B0604020202020204" pitchFamily="34" charset="0"/>
               </a:rPr>
-              <a:t>1x4 MMI Coupler.  </a:t>
-            </a:r>
-          </a:p>
-          <a:p>
-            <a:pPr algn="just"/>
-            <a:endParaRPr lang="en-US" sz="1200" dirty="0">
-              <a:latin typeface="Arial" panose="020B0604020202020204" pitchFamily="34" charset="0"/>
-              <a:cs typeface="Arial" panose="020B0604020202020204" pitchFamily="34" charset="0"/>
-            </a:endParaRPr>
+              <a:t>/16. Para la </a:t>
+            </a:r>
+            <a:r>
+              <a:rPr lang="en-US" sz="1200" dirty="0" err="1">
+                <a:latin typeface="Arial" panose="020B0604020202020204" pitchFamily="34" charset="0"/>
+                <a:cs typeface="Arial" panose="020B0604020202020204" pitchFamily="34" charset="0"/>
+              </a:rPr>
+              <a:t>segunda</a:t>
+            </a:r>
+            <a:r>
+              <a:rPr lang="en-US" sz="1200" dirty="0">
+                <a:latin typeface="Arial" panose="020B0604020202020204" pitchFamily="34" charset="0"/>
+                <a:cs typeface="Arial" panose="020B0604020202020204" pitchFamily="34" charset="0"/>
+              </a:rPr>
+              <a:t> </a:t>
+            </a:r>
+            <a:r>
+              <a:rPr lang="en-US" sz="1200" dirty="0" err="1">
+                <a:latin typeface="Arial" panose="020B0604020202020204" pitchFamily="34" charset="0"/>
+                <a:cs typeface="Arial" panose="020B0604020202020204" pitchFamily="34" charset="0"/>
+              </a:rPr>
+              <a:t>gráfica</a:t>
+            </a:r>
+            <a:r>
+              <a:rPr lang="en-US" sz="1200" dirty="0">
+                <a:latin typeface="Arial" panose="020B0604020202020204" pitchFamily="34" charset="0"/>
+                <a:cs typeface="Arial" panose="020B0604020202020204" pitchFamily="34" charset="0"/>
+              </a:rPr>
+              <a:t> </a:t>
+            </a:r>
+            <a:r>
+              <a:rPr lang="en-US" sz="1200" dirty="0" err="1">
+                <a:latin typeface="Arial" panose="020B0604020202020204" pitchFamily="34" charset="0"/>
+                <a:cs typeface="Arial" panose="020B0604020202020204" pitchFamily="34" charset="0"/>
+              </a:rPr>
+              <a:t>hemos</a:t>
+            </a:r>
+            <a:r>
+              <a:rPr lang="en-US" sz="1200" dirty="0">
+                <a:latin typeface="Arial" panose="020B0604020202020204" pitchFamily="34" charset="0"/>
+                <a:cs typeface="Arial" panose="020B0604020202020204" pitchFamily="34" charset="0"/>
+              </a:rPr>
+              <a:t> </a:t>
+            </a:r>
+            <a:r>
+              <a:rPr lang="en-US" sz="1200" dirty="0" err="1">
+                <a:latin typeface="Arial" panose="020B0604020202020204" pitchFamily="34" charset="0"/>
+                <a:cs typeface="Arial" panose="020B0604020202020204" pitchFamily="34" charset="0"/>
+              </a:rPr>
+              <a:t>realizado</a:t>
+            </a:r>
+            <a:r>
+              <a:rPr lang="en-US" sz="1200" dirty="0">
+                <a:latin typeface="Arial" panose="020B0604020202020204" pitchFamily="34" charset="0"/>
+                <a:cs typeface="Arial" panose="020B0604020202020204" pitchFamily="34" charset="0"/>
+              </a:rPr>
+              <a:t> la </a:t>
+            </a:r>
+            <a:r>
+              <a:rPr lang="en-US" sz="1200" dirty="0" err="1">
+                <a:latin typeface="Arial" panose="020B0604020202020204" pitchFamily="34" charset="0"/>
+                <a:cs typeface="Arial" panose="020B0604020202020204" pitchFamily="34" charset="0"/>
+              </a:rPr>
+              <a:t>primera</a:t>
+            </a:r>
+            <a:r>
+              <a:rPr lang="en-US" sz="1200" dirty="0">
+                <a:latin typeface="Arial" panose="020B0604020202020204" pitchFamily="34" charset="0"/>
+                <a:cs typeface="Arial" panose="020B0604020202020204" pitchFamily="34" charset="0"/>
+              </a:rPr>
+              <a:t> </a:t>
+            </a:r>
+            <a:r>
+              <a:rPr lang="en-US" sz="1200" dirty="0" err="1">
+                <a:latin typeface="Arial" panose="020B0604020202020204" pitchFamily="34" charset="0"/>
+                <a:cs typeface="Arial" panose="020B0604020202020204" pitchFamily="34" charset="0"/>
+              </a:rPr>
+              <a:t>optimización</a:t>
+            </a:r>
+            <a:r>
+              <a:rPr lang="en-US" sz="1200" dirty="0">
+                <a:latin typeface="Arial" panose="020B0604020202020204" pitchFamily="34" charset="0"/>
+                <a:cs typeface="Arial" panose="020B0604020202020204" pitchFamily="34" charset="0"/>
+              </a:rPr>
+              <a:t> con </a:t>
+            </a:r>
+            <a:r>
+              <a:rPr lang="en-US" sz="1200" dirty="0" err="1">
+                <a:latin typeface="Arial" panose="020B0604020202020204" pitchFamily="34" charset="0"/>
+                <a:cs typeface="Arial" panose="020B0604020202020204" pitchFamily="34" charset="0"/>
+              </a:rPr>
+              <a:t>dy</a:t>
+            </a:r>
+            <a:r>
+              <a:rPr lang="en-US" sz="1200" dirty="0">
+                <a:latin typeface="Arial" panose="020B0604020202020204" pitchFamily="34" charset="0"/>
+                <a:cs typeface="Arial" panose="020B0604020202020204" pitchFamily="34" charset="0"/>
+              </a:rPr>
+              <a:t> = 0.1 y dL = -1.2. Para </a:t>
+            </a:r>
+            <a:r>
+              <a:rPr lang="en-US" sz="1200" dirty="0" err="1">
+                <a:latin typeface="Arial" panose="020B0604020202020204" pitchFamily="34" charset="0"/>
+                <a:cs typeface="Arial" panose="020B0604020202020204" pitchFamily="34" charset="0"/>
+              </a:rPr>
+              <a:t>este</a:t>
+            </a:r>
+            <a:r>
+              <a:rPr lang="en-US" sz="1200" dirty="0">
+                <a:latin typeface="Arial" panose="020B0604020202020204" pitchFamily="34" charset="0"/>
+                <a:cs typeface="Arial" panose="020B0604020202020204" pitchFamily="34" charset="0"/>
+              </a:rPr>
+              <a:t> </a:t>
+            </a:r>
+            <a:r>
+              <a:rPr lang="en-US" sz="1200" dirty="0" err="1">
+                <a:latin typeface="Arial" panose="020B0604020202020204" pitchFamily="34" charset="0"/>
+                <a:cs typeface="Arial" panose="020B0604020202020204" pitchFamily="34" charset="0"/>
+              </a:rPr>
+              <a:t>caso</a:t>
+            </a:r>
+            <a:r>
+              <a:rPr lang="en-US" sz="1200" dirty="0">
+                <a:latin typeface="Arial" panose="020B0604020202020204" pitchFamily="34" charset="0"/>
+                <a:cs typeface="Arial" panose="020B0604020202020204" pitchFamily="34" charset="0"/>
+              </a:rPr>
+              <a:t> </a:t>
+            </a:r>
+            <a:r>
+              <a:rPr lang="en-US" sz="1200" dirty="0" err="1">
+                <a:latin typeface="Arial" panose="020B0604020202020204" pitchFamily="34" charset="0"/>
+                <a:cs typeface="Arial" panose="020B0604020202020204" pitchFamily="34" charset="0"/>
+              </a:rPr>
+              <a:t>mejoramos</a:t>
+            </a:r>
+            <a:r>
+              <a:rPr lang="en-US" sz="1200" dirty="0">
+                <a:latin typeface="Arial" panose="020B0604020202020204" pitchFamily="34" charset="0"/>
+                <a:cs typeface="Arial" panose="020B0604020202020204" pitchFamily="34" charset="0"/>
+              </a:rPr>
+              <a:t> las </a:t>
+            </a:r>
+            <a:r>
+              <a:rPr lang="en-US" sz="1200" dirty="0" err="1">
+                <a:latin typeface="Arial" panose="020B0604020202020204" pitchFamily="34" charset="0"/>
+                <a:cs typeface="Arial" panose="020B0604020202020204" pitchFamily="34" charset="0"/>
+              </a:rPr>
+              <a:t>pérdidas</a:t>
+            </a:r>
+            <a:r>
+              <a:rPr lang="en-US" sz="1200" dirty="0">
+                <a:latin typeface="Arial" panose="020B0604020202020204" pitchFamily="34" charset="0"/>
+                <a:cs typeface="Arial" panose="020B0604020202020204" pitchFamily="34" charset="0"/>
+              </a:rPr>
+              <a:t> </a:t>
+            </a:r>
+            <a:r>
+              <a:rPr lang="en-US" sz="1200" dirty="0" err="1">
+                <a:latin typeface="Arial" panose="020B0604020202020204" pitchFamily="34" charset="0"/>
+                <a:cs typeface="Arial" panose="020B0604020202020204" pitchFamily="34" charset="0"/>
+              </a:rPr>
+              <a:t>pero</a:t>
+            </a:r>
+            <a:r>
+              <a:rPr lang="en-US" sz="1200" dirty="0">
+                <a:latin typeface="Arial" panose="020B0604020202020204" pitchFamily="34" charset="0"/>
+                <a:cs typeface="Arial" panose="020B0604020202020204" pitchFamily="34" charset="0"/>
+              </a:rPr>
+              <a:t> los ratios son </a:t>
+            </a:r>
+            <a:r>
+              <a:rPr lang="en-US" sz="1200" dirty="0" err="1">
+                <a:latin typeface="Arial" panose="020B0604020202020204" pitchFamily="34" charset="0"/>
+                <a:cs typeface="Arial" panose="020B0604020202020204" pitchFamily="34" charset="0"/>
+              </a:rPr>
+              <a:t>peores</a:t>
+            </a:r>
+            <a:r>
+              <a:rPr lang="en-US" sz="1200" dirty="0">
+                <a:latin typeface="Arial" panose="020B0604020202020204" pitchFamily="34" charset="0"/>
+                <a:cs typeface="Arial" panose="020B0604020202020204" pitchFamily="34" charset="0"/>
+              </a:rPr>
+              <a:t>.  </a:t>
+            </a:r>
+            <a:r>
+              <a:rPr lang="en-US" sz="1200" dirty="0" err="1">
+                <a:latin typeface="Arial" panose="020B0604020202020204" pitchFamily="34" charset="0"/>
+                <a:cs typeface="Arial" panose="020B0604020202020204" pitchFamily="34" charset="0"/>
+              </a:rPr>
+              <a:t>Después</a:t>
+            </a:r>
+            <a:r>
+              <a:rPr lang="en-US" sz="1200" dirty="0">
+                <a:latin typeface="Arial" panose="020B0604020202020204" pitchFamily="34" charset="0"/>
+                <a:cs typeface="Arial" panose="020B0604020202020204" pitchFamily="34" charset="0"/>
+              </a:rPr>
+              <a:t> de la </a:t>
+            </a:r>
+            <a:r>
+              <a:rPr lang="en-US" sz="1200" dirty="0" err="1">
+                <a:latin typeface="Arial" panose="020B0604020202020204" pitchFamily="34" charset="0"/>
+                <a:cs typeface="Arial" panose="020B0604020202020204" pitchFamily="34" charset="0"/>
+              </a:rPr>
+              <a:t>segunda</a:t>
+            </a:r>
+            <a:r>
+              <a:rPr lang="en-US" sz="1200" dirty="0">
+                <a:latin typeface="Arial" panose="020B0604020202020204" pitchFamily="34" charset="0"/>
+                <a:cs typeface="Arial" panose="020B0604020202020204" pitchFamily="34" charset="0"/>
+              </a:rPr>
+              <a:t> </a:t>
+            </a:r>
+            <a:r>
+              <a:rPr lang="en-US" sz="1200" dirty="0" err="1">
+                <a:latin typeface="Arial" panose="020B0604020202020204" pitchFamily="34" charset="0"/>
+                <a:cs typeface="Arial" panose="020B0604020202020204" pitchFamily="34" charset="0"/>
+              </a:rPr>
+              <a:t>optimización</a:t>
+            </a:r>
+            <a:r>
+              <a:rPr lang="en-US" sz="1200" dirty="0">
+                <a:latin typeface="Arial" panose="020B0604020202020204" pitchFamily="34" charset="0"/>
+                <a:cs typeface="Arial" panose="020B0604020202020204" pitchFamily="34" charset="0"/>
+              </a:rPr>
+              <a:t> con un width de 2 um, </a:t>
+            </a:r>
+            <a:r>
+              <a:rPr lang="en-US" sz="1200" dirty="0" err="1">
+                <a:latin typeface="Arial" panose="020B0604020202020204" pitchFamily="34" charset="0"/>
+                <a:cs typeface="Arial" panose="020B0604020202020204" pitchFamily="34" charset="0"/>
+              </a:rPr>
+              <a:t>obtenemos</a:t>
+            </a:r>
+            <a:r>
+              <a:rPr lang="en-US" sz="1200" dirty="0">
+                <a:latin typeface="Arial" panose="020B0604020202020204" pitchFamily="34" charset="0"/>
+                <a:cs typeface="Arial" panose="020B0604020202020204" pitchFamily="34" charset="0"/>
+              </a:rPr>
+              <a:t> </a:t>
+            </a:r>
+            <a:r>
+              <a:rPr lang="en-US" sz="1200" dirty="0" err="1">
+                <a:latin typeface="Arial" panose="020B0604020202020204" pitchFamily="34" charset="0"/>
+                <a:cs typeface="Arial" panose="020B0604020202020204" pitchFamily="34" charset="0"/>
+              </a:rPr>
+              <a:t>unas</a:t>
+            </a:r>
+            <a:r>
+              <a:rPr lang="en-US" sz="1200" dirty="0">
+                <a:latin typeface="Arial" panose="020B0604020202020204" pitchFamily="34" charset="0"/>
+                <a:cs typeface="Arial" panose="020B0604020202020204" pitchFamily="34" charset="0"/>
+              </a:rPr>
+              <a:t> </a:t>
+            </a:r>
+            <a:r>
+              <a:rPr lang="en-US" sz="1200" dirty="0" err="1">
+                <a:latin typeface="Arial" panose="020B0604020202020204" pitchFamily="34" charset="0"/>
+                <a:cs typeface="Arial" panose="020B0604020202020204" pitchFamily="34" charset="0"/>
+              </a:rPr>
+              <a:t>muy</a:t>
+            </a:r>
+            <a:r>
+              <a:rPr lang="en-US" sz="1200" dirty="0">
+                <a:latin typeface="Arial" panose="020B0604020202020204" pitchFamily="34" charset="0"/>
+                <a:cs typeface="Arial" panose="020B0604020202020204" pitchFamily="34" charset="0"/>
+              </a:rPr>
+              <a:t> </a:t>
+            </a:r>
+            <a:r>
+              <a:rPr lang="en-US" sz="1200" dirty="0" err="1">
+                <a:latin typeface="Arial" panose="020B0604020202020204" pitchFamily="34" charset="0"/>
+                <a:cs typeface="Arial" panose="020B0604020202020204" pitchFamily="34" charset="0"/>
+              </a:rPr>
+              <a:t>buenas</a:t>
+            </a:r>
+            <a:r>
+              <a:rPr lang="en-US" sz="1200" dirty="0">
+                <a:latin typeface="Arial" panose="020B0604020202020204" pitchFamily="34" charset="0"/>
+                <a:cs typeface="Arial" panose="020B0604020202020204" pitchFamily="34" charset="0"/>
+              </a:rPr>
+              <a:t> </a:t>
+            </a:r>
+            <a:r>
+              <a:rPr lang="en-US" sz="1200" dirty="0" err="1">
+                <a:latin typeface="Arial" panose="020B0604020202020204" pitchFamily="34" charset="0"/>
+                <a:cs typeface="Arial" panose="020B0604020202020204" pitchFamily="34" charset="0"/>
+              </a:rPr>
+              <a:t>pérdidas</a:t>
+            </a:r>
+            <a:r>
+              <a:rPr lang="en-US" sz="1200" dirty="0">
+                <a:latin typeface="Arial" panose="020B0604020202020204" pitchFamily="34" charset="0"/>
+                <a:cs typeface="Arial" panose="020B0604020202020204" pitchFamily="34" charset="0"/>
+              </a:rPr>
+              <a:t> (0.0015 dB) </a:t>
+            </a:r>
+            <a:r>
+              <a:rPr lang="en-US" sz="1200" dirty="0" err="1">
+                <a:latin typeface="Arial" panose="020B0604020202020204" pitchFamily="34" charset="0"/>
+                <a:cs typeface="Arial" panose="020B0604020202020204" pitchFamily="34" charset="0"/>
+              </a:rPr>
+              <a:t>pero</a:t>
+            </a:r>
+            <a:r>
+              <a:rPr lang="en-US" sz="1200" dirty="0">
+                <a:latin typeface="Arial" panose="020B0604020202020204" pitchFamily="34" charset="0"/>
+                <a:cs typeface="Arial" panose="020B0604020202020204" pitchFamily="34" charset="0"/>
+              </a:rPr>
+              <a:t> no tan buenos ratios de </a:t>
+            </a:r>
+            <a:r>
+              <a:rPr lang="en-US" sz="1200" dirty="0" err="1">
+                <a:latin typeface="Arial" panose="020B0604020202020204" pitchFamily="34" charset="0"/>
+                <a:cs typeface="Arial" panose="020B0604020202020204" pitchFamily="34" charset="0"/>
+              </a:rPr>
+              <a:t>salidas</a:t>
+            </a:r>
+            <a:r>
+              <a:rPr lang="en-US" sz="1200" dirty="0">
+                <a:latin typeface="Arial" panose="020B0604020202020204" pitchFamily="34" charset="0"/>
+                <a:cs typeface="Arial" panose="020B0604020202020204" pitchFamily="34" charset="0"/>
+              </a:rPr>
+              <a:t>.</a:t>
+            </a:r>
           </a:p>
           <a:p>
             <a:pPr algn="just"/>
@@ -5941,57 +6511,96 @@
           </a:p>
         </p:txBody>
       </p:sp>
-      <p:sp>
-        <p:nvSpPr>
-          <p:cNvPr id="8" name="CuadroTexto 7">
-            <a:extLst>
-              <a:ext uri="{FF2B5EF4-FFF2-40B4-BE49-F238E27FC236}">
-                <a16:creationId xmlns:a16="http://schemas.microsoft.com/office/drawing/2014/main" id="{C3506757-32B7-9151-DA89-AADDB7F7D093}"/>
-              </a:ext>
-            </a:extLst>
-          </p:cNvPr>
-          <p:cNvSpPr txBox="1"/>
+      <p:pic>
+        <p:nvPicPr>
+          <p:cNvPr id="5" name="Imagen 4">
+            <a:extLst>
+              <a:ext uri="{FF2B5EF4-FFF2-40B4-BE49-F238E27FC236}">
+                <a16:creationId xmlns:a16="http://schemas.microsoft.com/office/drawing/2014/main" id="{83C0AB92-4075-479B-B592-8AD5FD6C24C2}"/>
+              </a:ext>
+            </a:extLst>
+          </p:cNvPr>
+          <p:cNvPicPr>
+            <a:picLocks noChangeAspect="1"/>
+          </p:cNvPicPr>
           <p:nvPr/>
-        </p:nvSpPr>
+        </p:nvPicPr>
+        <p:blipFill>
+          <a:blip r:embed="rId5"/>
+          <a:stretch>
+            <a:fillRect/>
+          </a:stretch>
+        </p:blipFill>
         <p:spPr>
           <a:xfrm>
-            <a:off x="2286000" y="2630415"/>
-            <a:ext cx="7718580" cy="923330"/>
+            <a:off x="762000" y="1495973"/>
+            <a:ext cx="3514870" cy="3069101"/>
           </a:xfrm>
           <a:prstGeom prst="rect">
             <a:avLst/>
           </a:prstGeom>
-          <a:noFill/>
         </p:spPr>
-        <p:txBody>
-          <a:bodyPr wrap="square" rtlCol="0">
-            <a:spAutoFit/>
-          </a:bodyPr>
-          <a:lstStyle/>
-          <a:p>
-            <a:pPr algn="ctr"/>
-            <a:r>
-              <a:rPr lang="en-US" b="1" dirty="0"/>
-              <a:t>deep</a:t>
-            </a:r>
-            <a:r>
-              <a:rPr lang="en-US" dirty="0"/>
-              <a:t> waveguide</a:t>
-            </a:r>
-          </a:p>
-          <a:p>
-            <a:pPr algn="ctr"/>
-            <a:endParaRPr lang="en-US" dirty="0"/>
-          </a:p>
-          <a:p>
-            <a:pPr algn="ctr"/>
-            <a:r>
-              <a:rPr lang="en-US" dirty="0"/>
-              <a:t>Paste propagation plots and console results</a:t>
-            </a:r>
-          </a:p>
-        </p:txBody>
-      </p:sp>
+      </p:pic>
+      <p:pic>
+        <p:nvPicPr>
+          <p:cNvPr id="9" name="Imagen 8">
+            <a:extLst>
+              <a:ext uri="{FF2B5EF4-FFF2-40B4-BE49-F238E27FC236}">
+                <a16:creationId xmlns:a16="http://schemas.microsoft.com/office/drawing/2014/main" id="{397D9907-830C-42C7-82B2-BF0D9CDE0E41}"/>
+              </a:ext>
+            </a:extLst>
+          </p:cNvPr>
+          <p:cNvPicPr>
+            <a:picLocks noChangeAspect="1"/>
+          </p:cNvPicPr>
+          <p:nvPr/>
+        </p:nvPicPr>
+        <p:blipFill>
+          <a:blip r:embed="rId6"/>
+          <a:stretch>
+            <a:fillRect/>
+          </a:stretch>
+        </p:blipFill>
+        <p:spPr>
+          <a:xfrm>
+            <a:off x="4507882" y="1505228"/>
+            <a:ext cx="3532715" cy="3071234"/>
+          </a:xfrm>
+          <a:prstGeom prst="rect">
+            <a:avLst/>
+          </a:prstGeom>
+        </p:spPr>
+      </p:pic>
+      <p:pic>
+        <p:nvPicPr>
+          <p:cNvPr id="11" name="Imagen 10">
+            <a:extLst>
+              <a:ext uri="{FF2B5EF4-FFF2-40B4-BE49-F238E27FC236}">
+                <a16:creationId xmlns:a16="http://schemas.microsoft.com/office/drawing/2014/main" id="{584ED37E-FEAF-4781-852E-2D9DA23DA9AD}"/>
+              </a:ext>
+            </a:extLst>
+          </p:cNvPr>
+          <p:cNvPicPr>
+            <a:picLocks noChangeAspect="1"/>
+          </p:cNvPicPr>
+          <p:nvPr/>
+        </p:nvPicPr>
+        <p:blipFill>
+          <a:blip r:embed="rId7"/>
+          <a:stretch>
+            <a:fillRect/>
+          </a:stretch>
+        </p:blipFill>
+        <p:spPr>
+          <a:xfrm>
+            <a:off x="8242428" y="1493840"/>
+            <a:ext cx="3505470" cy="3071234"/>
+          </a:xfrm>
+          <a:prstGeom prst="rect">
+            <a:avLst/>
+          </a:prstGeom>
+        </p:spPr>
+      </p:pic>
     </p:spTree>
     <p:extLst>
       <p:ext uri="{BB962C8B-B14F-4D97-AF65-F5344CB8AC3E}">
@@ -6424,286 +7033,66 @@
           </a:p>
         </p:txBody>
       </p:sp>
-      <mc:AlternateContent xmlns:mc="http://schemas.openxmlformats.org/markup-compatibility/2006" xmlns:a14="http://schemas.microsoft.com/office/drawing/2010/main">
-        <mc:Choice Requires="a14">
-          <p:sp>
-            <p:nvSpPr>
-              <p:cNvPr id="8" name="CuadroTexto 7">
-                <a:extLst>
-                  <a:ext uri="{FF2B5EF4-FFF2-40B4-BE49-F238E27FC236}">
-                    <a16:creationId xmlns:a16="http://schemas.microsoft.com/office/drawing/2014/main" id="{B08C2240-8810-4E0A-7DCF-E62A8271EA2E}"/>
-                  </a:ext>
-                </a:extLst>
-              </p:cNvPr>
-              <p:cNvSpPr txBox="1"/>
-              <p:nvPr/>
-            </p:nvSpPr>
-            <p:spPr>
-              <a:xfrm>
-                <a:off x="1079403" y="2709096"/>
-                <a:ext cx="4546634" cy="923330"/>
-              </a:xfrm>
-              <a:prstGeom prst="rect">
-                <a:avLst/>
-              </a:prstGeom>
-              <a:noFill/>
-            </p:spPr>
-            <p:txBody>
-              <a:bodyPr wrap="square" rtlCol="0">
-                <a:spAutoFit/>
-              </a:bodyPr>
-              <a:lstStyle/>
-              <a:p>
-                <a:pPr algn="ctr"/>
-                <a:r>
-                  <a:rPr lang="en-US" b="1" dirty="0"/>
-                  <a:t>deep</a:t>
-                </a:r>
-                <a:r>
-                  <a:rPr lang="en-US" dirty="0"/>
-                  <a:t> waveguide</a:t>
-                </a:r>
-              </a:p>
-              <a:p>
-                <a:pPr algn="ctr"/>
-                <a:endParaRPr lang="en-US" dirty="0"/>
-              </a:p>
-              <a:p>
-                <a:pPr algn="ctr"/>
-                <a:r>
-                  <a:rPr lang="en-US" dirty="0"/>
-                  <a:t>Paste </a:t>
-                </a:r>
-                <a14:m>
-                  <m:oMath xmlns:m="http://schemas.openxmlformats.org/officeDocument/2006/math">
-                    <m:sSub>
-                      <m:sSubPr>
-                        <m:ctrlPr>
-                          <a:rPr lang="es-ES" sz="1800" b="0" i="1" smtClean="0">
-                            <a:latin typeface="Cambria Math" panose="02040503050406030204" pitchFamily="18" charset="0"/>
-                          </a:rPr>
-                        </m:ctrlPr>
-                      </m:sSubPr>
-                      <m:e>
-                        <m:r>
-                          <a:rPr lang="es-ES" sz="1800" b="0" i="1" smtClean="0">
-                            <a:latin typeface="Cambria Math" panose="02040503050406030204" pitchFamily="18" charset="0"/>
-                          </a:rPr>
-                          <m:t>𝐿</m:t>
-                        </m:r>
-                      </m:e>
-                      <m:sub>
-                        <m:r>
-                          <a:rPr lang="es-ES" sz="1800" b="0" i="1" smtClean="0">
-                            <a:latin typeface="Cambria Math" panose="02040503050406030204" pitchFamily="18" charset="0"/>
-                          </a:rPr>
-                          <m:t>𝜋</m:t>
-                        </m:r>
-                      </m:sub>
-                    </m:sSub>
-                  </m:oMath>
-                </a14:m>
-                <a:r>
-                  <a:rPr lang="en-US" dirty="0"/>
-                  <a:t> vs </a:t>
-                </a:r>
-                <a:r>
-                  <a:rPr lang="en-US" dirty="0" err="1"/>
-                  <a:t>wvl</a:t>
-                </a:r>
-                <a:r>
-                  <a:rPr lang="en-US" dirty="0"/>
-                  <a:t> for TE and TM plot here</a:t>
-                </a:r>
-              </a:p>
-            </p:txBody>
-          </p:sp>
-        </mc:Choice>
-        <mc:Fallback xmlns="">
-          <p:sp>
-            <p:nvSpPr>
-              <p:cNvPr id="8" name="CuadroTexto 7">
-                <a:extLst>
-                  <a:ext uri="{FF2B5EF4-FFF2-40B4-BE49-F238E27FC236}">
-                    <a16:creationId xmlns:a16="http://schemas.microsoft.com/office/drawing/2014/main" id="{B08C2240-8810-4E0A-7DCF-E62A8271EA2E}"/>
-                  </a:ext>
-                </a:extLst>
-              </p:cNvPr>
-              <p:cNvSpPr txBox="1">
-                <a:spLocks noRot="1" noChangeAspect="1" noMove="1" noResize="1" noEditPoints="1" noAdjustHandles="1" noChangeArrowheads="1" noChangeShapeType="1" noTextEdit="1"/>
-              </p:cNvSpPr>
-              <p:nvPr/>
-            </p:nvSpPr>
-            <p:spPr>
-              <a:xfrm>
-                <a:off x="1079403" y="2709096"/>
-                <a:ext cx="4546634" cy="923330"/>
-              </a:xfrm>
-              <a:prstGeom prst="rect">
-                <a:avLst/>
-              </a:prstGeom>
-              <a:blipFill>
-                <a:blip r:embed="rId5"/>
-                <a:stretch>
-                  <a:fillRect t="-3289" b="-9211"/>
-                </a:stretch>
-              </a:blipFill>
-            </p:spPr>
-            <p:txBody>
-              <a:bodyPr/>
-              <a:lstStyle/>
-              <a:p>
-                <a:r>
-                  <a:rPr lang="es-ES">
-                    <a:noFill/>
-                  </a:rPr>
-                  <a:t> </a:t>
-                </a:r>
-              </a:p>
-            </p:txBody>
-          </p:sp>
-        </mc:Fallback>
-      </mc:AlternateContent>
-      <mc:AlternateContent xmlns:mc="http://schemas.openxmlformats.org/markup-compatibility/2006" xmlns:a14="http://schemas.microsoft.com/office/drawing/2010/main">
-        <mc:Choice Requires="a14">
-          <p:sp>
-            <p:nvSpPr>
-              <p:cNvPr id="9" name="CuadroTexto 8">
-                <a:extLst>
-                  <a:ext uri="{FF2B5EF4-FFF2-40B4-BE49-F238E27FC236}">
-                    <a16:creationId xmlns:a16="http://schemas.microsoft.com/office/drawing/2014/main" id="{BBDDC809-0F06-CBE2-4D1A-3A2FA36C33A8}"/>
-                  </a:ext>
-                </a:extLst>
-              </p:cNvPr>
-              <p:cNvSpPr txBox="1"/>
-              <p:nvPr/>
-            </p:nvSpPr>
-            <p:spPr>
-              <a:xfrm>
-                <a:off x="6883366" y="2709096"/>
-                <a:ext cx="4546634" cy="923330"/>
-              </a:xfrm>
-              <a:prstGeom prst="rect">
-                <a:avLst/>
-              </a:prstGeom>
-              <a:noFill/>
-            </p:spPr>
-            <p:txBody>
-              <a:bodyPr wrap="square" rtlCol="0">
-                <a:spAutoFit/>
-              </a:bodyPr>
-              <a:lstStyle/>
-              <a:p>
-                <a:pPr algn="ctr"/>
-                <a:r>
-                  <a:rPr lang="en-US" b="1" dirty="0"/>
-                  <a:t>shallow</a:t>
-                </a:r>
-                <a:r>
-                  <a:rPr lang="en-US" dirty="0"/>
-                  <a:t> waveguide</a:t>
-                </a:r>
-              </a:p>
-              <a:p>
-                <a:pPr algn="ctr"/>
-                <a:endParaRPr lang="en-US" dirty="0"/>
-              </a:p>
-              <a:p>
-                <a:pPr algn="ctr"/>
-                <a:r>
-                  <a:rPr lang="en-US" dirty="0"/>
-                  <a:t>Paste </a:t>
-                </a:r>
-                <a14:m>
-                  <m:oMath xmlns:m="http://schemas.openxmlformats.org/officeDocument/2006/math">
-                    <m:sSub>
-                      <m:sSubPr>
-                        <m:ctrlPr>
-                          <a:rPr lang="es-ES" sz="1800" b="0" i="1" smtClean="0">
-                            <a:latin typeface="Cambria Math" panose="02040503050406030204" pitchFamily="18" charset="0"/>
-                          </a:rPr>
-                        </m:ctrlPr>
-                      </m:sSubPr>
-                      <m:e>
-                        <m:r>
-                          <a:rPr lang="es-ES" sz="1800" b="0" i="1" smtClean="0">
-                            <a:latin typeface="Cambria Math" panose="02040503050406030204" pitchFamily="18" charset="0"/>
-                          </a:rPr>
-                          <m:t>𝐿</m:t>
-                        </m:r>
-                      </m:e>
-                      <m:sub>
-                        <m:r>
-                          <a:rPr lang="es-ES" sz="1800" b="0" i="1" smtClean="0">
-                            <a:latin typeface="Cambria Math" panose="02040503050406030204" pitchFamily="18" charset="0"/>
-                          </a:rPr>
-                          <m:t>𝜋</m:t>
-                        </m:r>
-                      </m:sub>
-                    </m:sSub>
-                  </m:oMath>
-                </a14:m>
-                <a:r>
-                  <a:rPr lang="en-US" dirty="0"/>
-                  <a:t> vs </a:t>
-                </a:r>
-                <a:r>
-                  <a:rPr lang="en-US" dirty="0" err="1"/>
-                  <a:t>wvl</a:t>
-                </a:r>
-                <a:r>
-                  <a:rPr lang="en-US" dirty="0"/>
-                  <a:t> for TE and TM plot here</a:t>
-                </a:r>
-              </a:p>
-            </p:txBody>
-          </p:sp>
-        </mc:Choice>
-        <mc:Fallback xmlns="">
-          <p:sp>
-            <p:nvSpPr>
-              <p:cNvPr id="9" name="CuadroTexto 8">
-                <a:extLst>
-                  <a:ext uri="{FF2B5EF4-FFF2-40B4-BE49-F238E27FC236}">
-                    <a16:creationId xmlns:a16="http://schemas.microsoft.com/office/drawing/2014/main" id="{BBDDC809-0F06-CBE2-4D1A-3A2FA36C33A8}"/>
-                  </a:ext>
-                </a:extLst>
-              </p:cNvPr>
-              <p:cNvSpPr txBox="1">
-                <a:spLocks noRot="1" noChangeAspect="1" noMove="1" noResize="1" noEditPoints="1" noAdjustHandles="1" noChangeArrowheads="1" noChangeShapeType="1" noTextEdit="1"/>
-              </p:cNvSpPr>
-              <p:nvPr/>
-            </p:nvSpPr>
-            <p:spPr>
-              <a:xfrm>
-                <a:off x="6883366" y="2709096"/>
-                <a:ext cx="4546634" cy="923330"/>
-              </a:xfrm>
-              <a:prstGeom prst="rect">
-                <a:avLst/>
-              </a:prstGeom>
-              <a:blipFill>
-                <a:blip r:embed="rId6"/>
-                <a:stretch>
-                  <a:fillRect t="-3289" b="-9211"/>
-                </a:stretch>
-              </a:blipFill>
-            </p:spPr>
-            <p:txBody>
-              <a:bodyPr/>
-              <a:lstStyle/>
-              <a:p>
-                <a:r>
-                  <a:rPr lang="es-ES">
-                    <a:noFill/>
-                  </a:rPr>
-                  <a:t> </a:t>
-                </a:r>
-              </a:p>
-            </p:txBody>
-          </p:sp>
-        </mc:Fallback>
-      </mc:AlternateContent>
+      <p:pic>
+        <p:nvPicPr>
+          <p:cNvPr id="10" name="Imagen 9">
+            <a:extLst>
+              <a:ext uri="{FF2B5EF4-FFF2-40B4-BE49-F238E27FC236}">
+                <a16:creationId xmlns:a16="http://schemas.microsoft.com/office/drawing/2014/main" id="{842246AD-E019-41EE-9917-5733CB297D21}"/>
+              </a:ext>
+            </a:extLst>
+          </p:cNvPr>
+          <p:cNvPicPr>
+            <a:picLocks noChangeAspect="1"/>
+          </p:cNvPicPr>
+          <p:nvPr/>
+        </p:nvPicPr>
+        <p:blipFill>
+          <a:blip r:embed="rId5"/>
+          <a:stretch>
+            <a:fillRect/>
+          </a:stretch>
+        </p:blipFill>
+        <p:spPr>
+          <a:xfrm>
+            <a:off x="1694980" y="1773176"/>
+            <a:ext cx="3315480" cy="2679473"/>
+          </a:xfrm>
+          <a:prstGeom prst="rect">
+            <a:avLst/>
+          </a:prstGeom>
+        </p:spPr>
+      </p:pic>
+      <p:pic>
+        <p:nvPicPr>
+          <p:cNvPr id="15" name="Imagen 14">
+            <a:extLst>
+              <a:ext uri="{FF2B5EF4-FFF2-40B4-BE49-F238E27FC236}">
+                <a16:creationId xmlns:a16="http://schemas.microsoft.com/office/drawing/2014/main" id="{2AEBC067-D925-4DC1-90D0-CB681548F0E9}"/>
+              </a:ext>
+            </a:extLst>
+          </p:cNvPr>
+          <p:cNvPicPr>
+            <a:picLocks noChangeAspect="1"/>
+          </p:cNvPicPr>
+          <p:nvPr/>
+        </p:nvPicPr>
+        <p:blipFill>
+          <a:blip r:embed="rId6"/>
+          <a:stretch>
+            <a:fillRect/>
+          </a:stretch>
+        </p:blipFill>
+        <p:spPr>
+          <a:xfrm>
+            <a:off x="7466045" y="1838020"/>
+            <a:ext cx="3148793" cy="2544762"/>
+          </a:xfrm>
+          <a:prstGeom prst="rect">
+            <a:avLst/>
+          </a:prstGeom>
+        </p:spPr>
+      </p:pic>
     </p:spTree>
     <p:extLst>
       <p:ext uri="{BB962C8B-B14F-4D97-AF65-F5344CB8AC3E}">
@@ -7126,138 +7515,6 @@
           </a:p>
         </p:txBody>
       </p:sp>
-      <mc:AlternateContent xmlns:mc="http://schemas.openxmlformats.org/markup-compatibility/2006" xmlns:a14="http://schemas.microsoft.com/office/drawing/2010/main">
-        <mc:Choice Requires="a14">
-          <p:sp>
-            <p:nvSpPr>
-              <p:cNvPr id="8" name="CuadroTexto 7">
-                <a:extLst>
-                  <a:ext uri="{FF2B5EF4-FFF2-40B4-BE49-F238E27FC236}">
-                    <a16:creationId xmlns:a16="http://schemas.microsoft.com/office/drawing/2014/main" id="{E9BD6C85-02F1-7B54-41E3-E3D9883786D8}"/>
-                  </a:ext>
-                </a:extLst>
-              </p:cNvPr>
-              <p:cNvSpPr txBox="1"/>
-              <p:nvPr/>
-            </p:nvSpPr>
-            <p:spPr>
-              <a:xfrm>
-                <a:off x="1079403" y="2709096"/>
-                <a:ext cx="4546634" cy="923330"/>
-              </a:xfrm>
-              <a:prstGeom prst="rect">
-                <a:avLst/>
-              </a:prstGeom>
-              <a:noFill/>
-            </p:spPr>
-            <p:txBody>
-              <a:bodyPr wrap="square" rtlCol="0">
-                <a:spAutoFit/>
-              </a:bodyPr>
-              <a:lstStyle/>
-              <a:p>
-                <a:pPr algn="ctr"/>
-                <a:r>
-                  <a:rPr lang="en-US" b="1" dirty="0"/>
-                  <a:t>deep</a:t>
-                </a:r>
-                <a:r>
-                  <a:rPr lang="en-US" dirty="0"/>
-                  <a:t> waveguide</a:t>
-                </a:r>
-              </a:p>
-              <a:p>
-                <a:pPr algn="ctr"/>
-                <a:endParaRPr lang="en-US" dirty="0"/>
-              </a:p>
-              <a:p>
-                <a:pPr algn="ctr"/>
-                <a:r>
-                  <a:rPr lang="en-US" dirty="0"/>
-                  <a:t>Paste </a:t>
-                </a:r>
-                <a14:m>
-                  <m:oMath xmlns:m="http://schemas.openxmlformats.org/officeDocument/2006/math">
-                    <m:sSub>
-                      <m:sSubPr>
-                        <m:ctrlPr>
-                          <a:rPr lang="es-ES" sz="1800" b="0" i="1" smtClean="0">
-                            <a:latin typeface="Cambria Math" panose="02040503050406030204" pitchFamily="18" charset="0"/>
-                          </a:rPr>
-                        </m:ctrlPr>
-                      </m:sSubPr>
-                      <m:e>
-                        <m:r>
-                          <a:rPr lang="es-ES" sz="1800" b="0" i="1" smtClean="0">
-                            <a:latin typeface="Cambria Math" panose="02040503050406030204" pitchFamily="18" charset="0"/>
-                          </a:rPr>
-                          <m:t>𝐿</m:t>
-                        </m:r>
-                      </m:e>
-                      <m:sub>
-                        <m:r>
-                          <a:rPr lang="es-ES" sz="1800" b="0" i="1" smtClean="0">
-                            <a:latin typeface="Cambria Math" panose="02040503050406030204" pitchFamily="18" charset="0"/>
-                          </a:rPr>
-                          <m:t>𝜋</m:t>
-                        </m:r>
-                      </m:sub>
-                    </m:sSub>
-                  </m:oMath>
-                </a14:m>
-                <a:r>
-                  <a:rPr lang="en-US" dirty="0"/>
-                  <a:t> vs gap for TE and TM plot here</a:t>
-                </a:r>
-              </a:p>
-            </p:txBody>
-          </p:sp>
-        </mc:Choice>
-        <mc:Fallback xmlns="">
-          <p:sp>
-            <p:nvSpPr>
-              <p:cNvPr id="8" name="CuadroTexto 7">
-                <a:extLst>
-                  <a:ext uri="{FF2B5EF4-FFF2-40B4-BE49-F238E27FC236}">
-                    <a16:creationId xmlns:a16="http://schemas.microsoft.com/office/drawing/2014/main" id="{E9BD6C85-02F1-7B54-41E3-E3D9883786D8}"/>
-                  </a:ext>
-                </a:extLst>
-              </p:cNvPr>
-              <p:cNvSpPr txBox="1">
-                <a:spLocks noRot="1" noChangeAspect="1" noMove="1" noResize="1" noEditPoints="1" noAdjustHandles="1" noChangeArrowheads="1" noChangeShapeType="1" noTextEdit="1"/>
-              </p:cNvSpPr>
-              <p:nvPr/>
-            </p:nvSpPr>
-            <p:spPr>
-              <a:xfrm>
-                <a:off x="1079403" y="2709096"/>
-                <a:ext cx="4546634" cy="923330"/>
-              </a:xfrm>
-              <a:prstGeom prst="rect">
-                <a:avLst/>
-              </a:prstGeom>
-              <a:blipFill>
-                <a:blip r:embed="rId5"/>
-                <a:stretch>
-                  <a:fillRect t="-3289" b="-9211"/>
-                </a:stretch>
-              </a:blipFill>
-            </p:spPr>
-            <p:txBody>
-              <a:bodyPr/>
-              <a:lstStyle/>
-              <a:p>
-                <a:r>
-                  <a:rPr lang="es-ES">
-                    <a:noFill/>
-                  </a:rPr>
-                  <a:t> </a:t>
-                </a:r>
-              </a:p>
-            </p:txBody>
-          </p:sp>
-        </mc:Fallback>
-      </mc:AlternateContent>
       <mc:AlternateContent xmlns:mc="http://schemas.openxmlformats.org/markup-compatibility/2006" xmlns:a14="http://schemas.microsoft.com/office/drawing/2010/main">
         <mc:Choice Requires="a14">
           <p:sp>
@@ -7390,6 +7647,36 @@
           </p:sp>
         </mc:Fallback>
       </mc:AlternateContent>
+      <p:pic>
+        <p:nvPicPr>
+          <p:cNvPr id="10" name="Imagen 9">
+            <a:extLst>
+              <a:ext uri="{FF2B5EF4-FFF2-40B4-BE49-F238E27FC236}">
+                <a16:creationId xmlns:a16="http://schemas.microsoft.com/office/drawing/2014/main" id="{1BB2D542-2A79-4625-AA39-53A879379E0E}"/>
+              </a:ext>
+            </a:extLst>
+          </p:cNvPr>
+          <p:cNvPicPr>
+            <a:picLocks noChangeAspect="1"/>
+          </p:cNvPicPr>
+          <p:nvPr/>
+        </p:nvPicPr>
+        <p:blipFill>
+          <a:blip r:embed="rId7"/>
+          <a:stretch>
+            <a:fillRect/>
+          </a:stretch>
+        </p:blipFill>
+        <p:spPr>
+          <a:xfrm>
+            <a:off x="963432" y="1775348"/>
+            <a:ext cx="4778576" cy="2790825"/>
+          </a:xfrm>
+          <a:prstGeom prst="rect">
+            <a:avLst/>
+          </a:prstGeom>
+        </p:spPr>
+      </p:pic>
     </p:spTree>
     <p:extLst>
       <p:ext uri="{BB962C8B-B14F-4D97-AF65-F5344CB8AC3E}">

--- a/LabBook_20.pptx
+++ b/LabBook_20.pptx
@@ -819,7 +819,7 @@
           <a:p>
             <a:fld id="{8438F8DC-35B0-48E6-A86E-42F1F08DD00F}" type="datetimeFigureOut">
               <a:rPr lang="es-ES" smtClean="0"/>
-              <a:t>07/03/2026</a:t>
+              <a:t>09/03/2026</a:t>
             </a:fld>
             <a:endParaRPr lang="es-ES"/>
           </a:p>
@@ -996,7 +996,7 @@
           <a:p>
             <a:fld id="{FACBDC12-F39B-4B97-8F4D-6734F9D366FF}" type="datetimeFigureOut">
               <a:rPr lang="es-ES" smtClean="0"/>
-              <a:t>07/03/2026</a:t>
+              <a:t>09/03/2026</a:t>
             </a:fld>
             <a:endParaRPr lang="es-ES"/>
           </a:p>
@@ -7515,144 +7515,12 @@
           </a:p>
         </p:txBody>
       </p:sp>
-      <mc:AlternateContent xmlns:mc="http://schemas.openxmlformats.org/markup-compatibility/2006" xmlns:a14="http://schemas.microsoft.com/office/drawing/2010/main">
-        <mc:Choice Requires="a14">
-          <p:sp>
-            <p:nvSpPr>
-              <p:cNvPr id="9" name="CuadroTexto 8">
-                <a:extLst>
-                  <a:ext uri="{FF2B5EF4-FFF2-40B4-BE49-F238E27FC236}">
-                    <a16:creationId xmlns:a16="http://schemas.microsoft.com/office/drawing/2014/main" id="{7431A41C-EEB3-44D0-4622-A915E258C8F0}"/>
-                  </a:ext>
-                </a:extLst>
-              </p:cNvPr>
-              <p:cNvSpPr txBox="1"/>
-              <p:nvPr/>
-            </p:nvSpPr>
-            <p:spPr>
-              <a:xfrm>
-                <a:off x="6883366" y="2709096"/>
-                <a:ext cx="4546634" cy="923330"/>
-              </a:xfrm>
-              <a:prstGeom prst="rect">
-                <a:avLst/>
-              </a:prstGeom>
-              <a:noFill/>
-            </p:spPr>
-            <p:txBody>
-              <a:bodyPr wrap="square" rtlCol="0">
-                <a:spAutoFit/>
-              </a:bodyPr>
-              <a:lstStyle/>
-              <a:p>
-                <a:pPr algn="ctr"/>
-                <a:r>
-                  <a:rPr lang="en-US" b="1" dirty="0"/>
-                  <a:t>shallow</a:t>
-                </a:r>
-                <a:r>
-                  <a:rPr lang="en-US" dirty="0"/>
-                  <a:t> waveguide</a:t>
-                </a:r>
-              </a:p>
-              <a:p>
-                <a:pPr algn="ctr"/>
-                <a:endParaRPr lang="en-US" dirty="0"/>
-              </a:p>
-              <a:p>
-                <a:pPr algn="ctr"/>
-                <a:r>
-                  <a:rPr lang="en-US" dirty="0"/>
-                  <a:t>Paste </a:t>
-                </a:r>
-                <a14:m>
-                  <m:oMath xmlns:m="http://schemas.openxmlformats.org/officeDocument/2006/math">
-                    <m:sSub>
-                      <m:sSubPr>
-                        <m:ctrlPr>
-                          <a:rPr lang="es-ES" sz="1800" b="0" i="1" smtClean="0">
-                            <a:latin typeface="Cambria Math" panose="02040503050406030204" pitchFamily="18" charset="0"/>
-                          </a:rPr>
-                        </m:ctrlPr>
-                      </m:sSubPr>
-                      <m:e>
-                        <m:r>
-                          <a:rPr lang="es-ES" sz="1800" b="0" i="1" smtClean="0">
-                            <a:latin typeface="Cambria Math" panose="02040503050406030204" pitchFamily="18" charset="0"/>
-                          </a:rPr>
-                          <m:t>𝐿</m:t>
-                        </m:r>
-                      </m:e>
-                      <m:sub>
-                        <m:r>
-                          <a:rPr lang="es-ES" sz="1800" b="0" i="1" smtClean="0">
-                            <a:latin typeface="Cambria Math" panose="02040503050406030204" pitchFamily="18" charset="0"/>
-                          </a:rPr>
-                          <m:t>𝜋</m:t>
-                        </m:r>
-                      </m:sub>
-                    </m:sSub>
-                  </m:oMath>
-                </a14:m>
-                <a:r>
-                  <a:rPr lang="en-US" dirty="0"/>
-                  <a:t> vs gap for TE and TM plot here</a:t>
-                </a:r>
-              </a:p>
-            </p:txBody>
-          </p:sp>
-        </mc:Choice>
-        <mc:Fallback xmlns="">
-          <p:sp>
-            <p:nvSpPr>
-              <p:cNvPr id="9" name="CuadroTexto 8">
-                <a:extLst>
-                  <a:ext uri="{FF2B5EF4-FFF2-40B4-BE49-F238E27FC236}">
-                    <a16:creationId xmlns:a16="http://schemas.microsoft.com/office/drawing/2014/main" id="{7431A41C-EEB3-44D0-4622-A915E258C8F0}"/>
-                  </a:ext>
-                </a:extLst>
-              </p:cNvPr>
-              <p:cNvSpPr txBox="1">
-                <a:spLocks noRot="1" noChangeAspect="1" noMove="1" noResize="1" noEditPoints="1" noAdjustHandles="1" noChangeArrowheads="1" noChangeShapeType="1" noTextEdit="1"/>
-              </p:cNvSpPr>
-              <p:nvPr/>
-            </p:nvSpPr>
-            <p:spPr>
-              <a:xfrm>
-                <a:off x="6883366" y="2709096"/>
-                <a:ext cx="4546634" cy="923330"/>
-              </a:xfrm>
-              <a:prstGeom prst="rect">
-                <a:avLst/>
-              </a:prstGeom>
-              <a:blipFill>
-                <a:blip r:embed="rId6"/>
-                <a:stretch>
-                  <a:fillRect t="-3289" b="-9211"/>
-                </a:stretch>
-              </a:blipFill>
-            </p:spPr>
-            <p:txBody>
-              <a:bodyPr/>
-              <a:lstStyle/>
-              <a:p>
-                <a:r>
-                  <a:rPr lang="es-ES">
-                    <a:noFill/>
-                  </a:rPr>
-                  <a:t> </a:t>
-                </a:r>
-              </a:p>
-            </p:txBody>
-          </p:sp>
-        </mc:Fallback>
-      </mc:AlternateContent>
       <p:pic>
         <p:nvPicPr>
-          <p:cNvPr id="10" name="Imagen 9">
-            <a:extLst>
-              <a:ext uri="{FF2B5EF4-FFF2-40B4-BE49-F238E27FC236}">
-                <a16:creationId xmlns:a16="http://schemas.microsoft.com/office/drawing/2014/main" id="{1BB2D542-2A79-4625-AA39-53A879379E0E}"/>
+          <p:cNvPr id="8" name="Imagen 7">
+            <a:extLst>
+              <a:ext uri="{FF2B5EF4-FFF2-40B4-BE49-F238E27FC236}">
+                <a16:creationId xmlns:a16="http://schemas.microsoft.com/office/drawing/2014/main" id="{0F2BDCA1-6DAE-4B85-9FD7-F39B88CF2096}"/>
               </a:ext>
             </a:extLst>
           </p:cNvPr>
@@ -7662,15 +7530,45 @@
           <p:nvPr/>
         </p:nvPicPr>
         <p:blipFill>
-          <a:blip r:embed="rId7"/>
+          <a:blip r:embed="rId5"/>
           <a:stretch>
             <a:fillRect/>
           </a:stretch>
         </p:blipFill>
         <p:spPr>
           <a:xfrm>
-            <a:off x="963432" y="1775348"/>
-            <a:ext cx="4778576" cy="2790825"/>
+            <a:off x="1143000" y="1755989"/>
+            <a:ext cx="4605337" cy="2689649"/>
+          </a:xfrm>
+          <a:prstGeom prst="rect">
+            <a:avLst/>
+          </a:prstGeom>
+        </p:spPr>
+      </p:pic>
+      <p:pic>
+        <p:nvPicPr>
+          <p:cNvPr id="12" name="Imagen 11">
+            <a:extLst>
+              <a:ext uri="{FF2B5EF4-FFF2-40B4-BE49-F238E27FC236}">
+                <a16:creationId xmlns:a16="http://schemas.microsoft.com/office/drawing/2014/main" id="{D24767B5-B140-40D6-ADC5-E470E4BA6DCE}"/>
+              </a:ext>
+            </a:extLst>
+          </p:cNvPr>
+          <p:cNvPicPr>
+            <a:picLocks noChangeAspect="1"/>
+          </p:cNvPicPr>
+          <p:nvPr/>
+        </p:nvPicPr>
+        <p:blipFill>
+          <a:blip r:embed="rId6"/>
+          <a:stretch>
+            <a:fillRect/>
+          </a:stretch>
+        </p:blipFill>
+        <p:spPr>
+          <a:xfrm>
+            <a:off x="7005715" y="1924536"/>
+            <a:ext cx="4117976" cy="2405016"/>
           </a:xfrm>
           <a:prstGeom prst="rect">
             <a:avLst/>
@@ -8103,286 +8001,66 @@
           </a:p>
         </p:txBody>
       </p:sp>
-      <mc:AlternateContent xmlns:mc="http://schemas.openxmlformats.org/markup-compatibility/2006" xmlns:a14="http://schemas.microsoft.com/office/drawing/2010/main">
-        <mc:Choice Requires="a14">
-          <p:sp>
-            <p:nvSpPr>
-              <p:cNvPr id="9" name="CuadroTexto 8">
-                <a:extLst>
-                  <a:ext uri="{FF2B5EF4-FFF2-40B4-BE49-F238E27FC236}">
-                    <a16:creationId xmlns:a16="http://schemas.microsoft.com/office/drawing/2014/main" id="{075D03BE-0D6A-89E5-3C68-D7BD97B4676E}"/>
-                  </a:ext>
-                </a:extLst>
-              </p:cNvPr>
-              <p:cNvSpPr txBox="1"/>
-              <p:nvPr/>
-            </p:nvSpPr>
-            <p:spPr>
-              <a:xfrm>
-                <a:off x="1079403" y="2709096"/>
-                <a:ext cx="4546634" cy="923330"/>
-              </a:xfrm>
-              <a:prstGeom prst="rect">
-                <a:avLst/>
-              </a:prstGeom>
-              <a:noFill/>
-            </p:spPr>
-            <p:txBody>
-              <a:bodyPr wrap="square" rtlCol="0">
-                <a:spAutoFit/>
-              </a:bodyPr>
-              <a:lstStyle/>
-              <a:p>
-                <a:pPr algn="ctr"/>
-                <a:r>
-                  <a:rPr lang="en-US" b="1" dirty="0"/>
-                  <a:t>deep</a:t>
-                </a:r>
-                <a:r>
-                  <a:rPr lang="en-US" dirty="0"/>
-                  <a:t> waveguide</a:t>
-                </a:r>
-              </a:p>
-              <a:p>
-                <a:pPr algn="ctr"/>
-                <a:endParaRPr lang="en-US" dirty="0"/>
-              </a:p>
-              <a:p>
-                <a:pPr algn="ctr"/>
-                <a:r>
-                  <a:rPr lang="en-US" dirty="0"/>
-                  <a:t>Paste </a:t>
-                </a:r>
-                <a14:m>
-                  <m:oMath xmlns:m="http://schemas.openxmlformats.org/officeDocument/2006/math">
-                    <m:sSub>
-                      <m:sSubPr>
-                        <m:ctrlPr>
-                          <a:rPr lang="es-ES" sz="1800" b="0" i="1" smtClean="0">
-                            <a:latin typeface="Cambria Math" panose="02040503050406030204" pitchFamily="18" charset="0"/>
-                          </a:rPr>
-                        </m:ctrlPr>
-                      </m:sSubPr>
-                      <m:e>
-                        <m:r>
-                          <a:rPr lang="es-ES" sz="1800" b="0" i="1" smtClean="0">
-                            <a:latin typeface="Cambria Math" panose="02040503050406030204" pitchFamily="18" charset="0"/>
-                          </a:rPr>
-                          <m:t>𝐿</m:t>
-                        </m:r>
-                      </m:e>
-                      <m:sub>
-                        <m:r>
-                          <a:rPr lang="es-ES" sz="1800" b="0" i="1" smtClean="0">
-                            <a:latin typeface="Cambria Math" panose="02040503050406030204" pitchFamily="18" charset="0"/>
-                          </a:rPr>
-                          <m:t>𝜋</m:t>
-                        </m:r>
-                      </m:sub>
-                    </m:sSub>
-                  </m:oMath>
-                </a14:m>
-                <a:r>
-                  <a:rPr lang="en-US" dirty="0"/>
-                  <a:t> vs </a:t>
-                </a:r>
-                <a:r>
-                  <a:rPr lang="en-US" dirty="0" err="1"/>
-                  <a:t>wvl</a:t>
-                </a:r>
-                <a:r>
-                  <a:rPr lang="en-US" dirty="0"/>
-                  <a:t> for TE and TM plot here</a:t>
-                </a:r>
-              </a:p>
-            </p:txBody>
-          </p:sp>
-        </mc:Choice>
-        <mc:Fallback xmlns="">
-          <p:sp>
-            <p:nvSpPr>
-              <p:cNvPr id="9" name="CuadroTexto 8">
-                <a:extLst>
-                  <a:ext uri="{FF2B5EF4-FFF2-40B4-BE49-F238E27FC236}">
-                    <a16:creationId xmlns:a16="http://schemas.microsoft.com/office/drawing/2014/main" id="{075D03BE-0D6A-89E5-3C68-D7BD97B4676E}"/>
-                  </a:ext>
-                </a:extLst>
-              </p:cNvPr>
-              <p:cNvSpPr txBox="1">
-                <a:spLocks noRot="1" noChangeAspect="1" noMove="1" noResize="1" noEditPoints="1" noAdjustHandles="1" noChangeArrowheads="1" noChangeShapeType="1" noTextEdit="1"/>
-              </p:cNvSpPr>
-              <p:nvPr/>
-            </p:nvSpPr>
-            <p:spPr>
-              <a:xfrm>
-                <a:off x="1079403" y="2709096"/>
-                <a:ext cx="4546634" cy="923330"/>
-              </a:xfrm>
-              <a:prstGeom prst="rect">
-                <a:avLst/>
-              </a:prstGeom>
-              <a:blipFill>
-                <a:blip r:embed="rId5"/>
-                <a:stretch>
-                  <a:fillRect t="-3289" b="-9211"/>
-                </a:stretch>
-              </a:blipFill>
-            </p:spPr>
-            <p:txBody>
-              <a:bodyPr/>
-              <a:lstStyle/>
-              <a:p>
-                <a:r>
-                  <a:rPr lang="es-ES">
-                    <a:noFill/>
-                  </a:rPr>
-                  <a:t> </a:t>
-                </a:r>
-              </a:p>
-            </p:txBody>
-          </p:sp>
-        </mc:Fallback>
-      </mc:AlternateContent>
-      <mc:AlternateContent xmlns:mc="http://schemas.openxmlformats.org/markup-compatibility/2006" xmlns:a14="http://schemas.microsoft.com/office/drawing/2010/main">
-        <mc:Choice Requires="a14">
-          <p:sp>
-            <p:nvSpPr>
-              <p:cNvPr id="10" name="CuadroTexto 9">
-                <a:extLst>
-                  <a:ext uri="{FF2B5EF4-FFF2-40B4-BE49-F238E27FC236}">
-                    <a16:creationId xmlns:a16="http://schemas.microsoft.com/office/drawing/2014/main" id="{AC01EDEE-71CC-C570-700B-076F03FCF7E1}"/>
-                  </a:ext>
-                </a:extLst>
-              </p:cNvPr>
-              <p:cNvSpPr txBox="1"/>
-              <p:nvPr/>
-            </p:nvSpPr>
-            <p:spPr>
-              <a:xfrm>
-                <a:off x="6883366" y="2709096"/>
-                <a:ext cx="4546634" cy="923330"/>
-              </a:xfrm>
-              <a:prstGeom prst="rect">
-                <a:avLst/>
-              </a:prstGeom>
-              <a:noFill/>
-            </p:spPr>
-            <p:txBody>
-              <a:bodyPr wrap="square" rtlCol="0">
-                <a:spAutoFit/>
-              </a:bodyPr>
-              <a:lstStyle/>
-              <a:p>
-                <a:pPr algn="ctr"/>
-                <a:r>
-                  <a:rPr lang="en-US" b="1" dirty="0"/>
-                  <a:t>shallow</a:t>
-                </a:r>
-                <a:r>
-                  <a:rPr lang="en-US" dirty="0"/>
-                  <a:t> waveguide</a:t>
-                </a:r>
-              </a:p>
-              <a:p>
-                <a:pPr algn="ctr"/>
-                <a:endParaRPr lang="en-US" dirty="0"/>
-              </a:p>
-              <a:p>
-                <a:pPr algn="ctr"/>
-                <a:r>
-                  <a:rPr lang="en-US" dirty="0"/>
-                  <a:t>Paste </a:t>
-                </a:r>
-                <a14:m>
-                  <m:oMath xmlns:m="http://schemas.openxmlformats.org/officeDocument/2006/math">
-                    <m:sSub>
-                      <m:sSubPr>
-                        <m:ctrlPr>
-                          <a:rPr lang="es-ES" sz="1800" b="0" i="1" smtClean="0">
-                            <a:latin typeface="Cambria Math" panose="02040503050406030204" pitchFamily="18" charset="0"/>
-                          </a:rPr>
-                        </m:ctrlPr>
-                      </m:sSubPr>
-                      <m:e>
-                        <m:r>
-                          <a:rPr lang="es-ES" sz="1800" b="0" i="1" smtClean="0">
-                            <a:latin typeface="Cambria Math" panose="02040503050406030204" pitchFamily="18" charset="0"/>
-                          </a:rPr>
-                          <m:t>𝐿</m:t>
-                        </m:r>
-                      </m:e>
-                      <m:sub>
-                        <m:r>
-                          <a:rPr lang="es-ES" sz="1800" b="0" i="1" smtClean="0">
-                            <a:latin typeface="Cambria Math" panose="02040503050406030204" pitchFamily="18" charset="0"/>
-                          </a:rPr>
-                          <m:t>𝜋</m:t>
-                        </m:r>
-                      </m:sub>
-                    </m:sSub>
-                  </m:oMath>
-                </a14:m>
-                <a:r>
-                  <a:rPr lang="en-US" dirty="0"/>
-                  <a:t> vs </a:t>
-                </a:r>
-                <a:r>
-                  <a:rPr lang="en-US" dirty="0" err="1"/>
-                  <a:t>wvl</a:t>
-                </a:r>
-                <a:r>
-                  <a:rPr lang="en-US" dirty="0"/>
-                  <a:t> for TE and TM plot here</a:t>
-                </a:r>
-              </a:p>
-            </p:txBody>
-          </p:sp>
-        </mc:Choice>
-        <mc:Fallback xmlns="">
-          <p:sp>
-            <p:nvSpPr>
-              <p:cNvPr id="10" name="CuadroTexto 9">
-                <a:extLst>
-                  <a:ext uri="{FF2B5EF4-FFF2-40B4-BE49-F238E27FC236}">
-                    <a16:creationId xmlns:a16="http://schemas.microsoft.com/office/drawing/2014/main" id="{AC01EDEE-71CC-C570-700B-076F03FCF7E1}"/>
-                  </a:ext>
-                </a:extLst>
-              </p:cNvPr>
-              <p:cNvSpPr txBox="1">
-                <a:spLocks noRot="1" noChangeAspect="1" noMove="1" noResize="1" noEditPoints="1" noAdjustHandles="1" noChangeArrowheads="1" noChangeShapeType="1" noTextEdit="1"/>
-              </p:cNvSpPr>
-              <p:nvPr/>
-            </p:nvSpPr>
-            <p:spPr>
-              <a:xfrm>
-                <a:off x="6883366" y="2709096"/>
-                <a:ext cx="4546634" cy="923330"/>
-              </a:xfrm>
-              <a:prstGeom prst="rect">
-                <a:avLst/>
-              </a:prstGeom>
-              <a:blipFill>
-                <a:blip r:embed="rId6"/>
-                <a:stretch>
-                  <a:fillRect t="-3289" b="-9211"/>
-                </a:stretch>
-              </a:blipFill>
-            </p:spPr>
-            <p:txBody>
-              <a:bodyPr/>
-              <a:lstStyle/>
-              <a:p>
-                <a:r>
-                  <a:rPr lang="es-ES">
-                    <a:noFill/>
-                  </a:rPr>
-                  <a:t> </a:t>
-                </a:r>
-              </a:p>
-            </p:txBody>
-          </p:sp>
-        </mc:Fallback>
-      </mc:AlternateContent>
+      <p:pic>
+        <p:nvPicPr>
+          <p:cNvPr id="8" name="Imagen 7">
+            <a:extLst>
+              <a:ext uri="{FF2B5EF4-FFF2-40B4-BE49-F238E27FC236}">
+                <a16:creationId xmlns:a16="http://schemas.microsoft.com/office/drawing/2014/main" id="{AC5B9220-00F9-4646-8B41-A9D8773B5DF2}"/>
+              </a:ext>
+            </a:extLst>
+          </p:cNvPr>
+          <p:cNvPicPr>
+            <a:picLocks noChangeAspect="1"/>
+          </p:cNvPicPr>
+          <p:nvPr/>
+        </p:nvPicPr>
+        <p:blipFill>
+          <a:blip r:embed="rId5"/>
+          <a:stretch>
+            <a:fillRect/>
+          </a:stretch>
+        </p:blipFill>
+        <p:spPr>
+          <a:xfrm>
+            <a:off x="1480148" y="1684666"/>
+            <a:ext cx="3745304" cy="3026844"/>
+          </a:xfrm>
+          <a:prstGeom prst="rect">
+            <a:avLst/>
+          </a:prstGeom>
+        </p:spPr>
+      </p:pic>
+      <p:pic>
+        <p:nvPicPr>
+          <p:cNvPr id="12" name="Imagen 11">
+            <a:extLst>
+              <a:ext uri="{FF2B5EF4-FFF2-40B4-BE49-F238E27FC236}">
+                <a16:creationId xmlns:a16="http://schemas.microsoft.com/office/drawing/2014/main" id="{65422317-38E4-45FD-9E81-3E257AE4D478}"/>
+              </a:ext>
+            </a:extLst>
+          </p:cNvPr>
+          <p:cNvPicPr>
+            <a:picLocks noChangeAspect="1"/>
+          </p:cNvPicPr>
+          <p:nvPr/>
+        </p:nvPicPr>
+        <p:blipFill>
+          <a:blip r:embed="rId6"/>
+          <a:stretch>
+            <a:fillRect/>
+          </a:stretch>
+        </p:blipFill>
+        <p:spPr>
+          <a:xfrm>
+            <a:off x="7261370" y="1601338"/>
+            <a:ext cx="3606666" cy="2914801"/>
+          </a:xfrm>
+          <a:prstGeom prst="rect">
+            <a:avLst/>
+          </a:prstGeom>
+        </p:spPr>
+      </p:pic>
     </p:spTree>
     <p:extLst>
       <p:ext uri="{BB962C8B-B14F-4D97-AF65-F5344CB8AC3E}">
@@ -8816,270 +8494,66 @@
           </a:p>
         </p:txBody>
       </p:sp>
-      <mc:AlternateContent xmlns:mc="http://schemas.openxmlformats.org/markup-compatibility/2006" xmlns:a14="http://schemas.microsoft.com/office/drawing/2010/main">
-        <mc:Choice Requires="a14">
-          <p:sp>
-            <p:nvSpPr>
-              <p:cNvPr id="9" name="CuadroTexto 8">
-                <a:extLst>
-                  <a:ext uri="{FF2B5EF4-FFF2-40B4-BE49-F238E27FC236}">
-                    <a16:creationId xmlns:a16="http://schemas.microsoft.com/office/drawing/2014/main" id="{2BDFECD2-156D-6697-CFBF-8CD783F9B986}"/>
-                  </a:ext>
-                </a:extLst>
-              </p:cNvPr>
-              <p:cNvSpPr txBox="1"/>
-              <p:nvPr/>
-            </p:nvSpPr>
-            <p:spPr>
-              <a:xfrm>
-                <a:off x="1079403" y="2709096"/>
-                <a:ext cx="4546634" cy="923330"/>
-              </a:xfrm>
-              <a:prstGeom prst="rect">
-                <a:avLst/>
-              </a:prstGeom>
-              <a:noFill/>
-            </p:spPr>
-            <p:txBody>
-              <a:bodyPr wrap="square" rtlCol="0">
-                <a:spAutoFit/>
-              </a:bodyPr>
-              <a:lstStyle/>
-              <a:p>
-                <a:pPr algn="ctr"/>
-                <a:r>
-                  <a:rPr lang="en-US" b="1" dirty="0"/>
-                  <a:t>deep</a:t>
-                </a:r>
-                <a:r>
-                  <a:rPr lang="en-US" dirty="0"/>
-                  <a:t> waveguide</a:t>
-                </a:r>
-              </a:p>
-              <a:p>
-                <a:pPr algn="ctr"/>
-                <a:endParaRPr lang="en-US" dirty="0"/>
-              </a:p>
-              <a:p>
-                <a:pPr algn="ctr"/>
-                <a:r>
-                  <a:rPr lang="en-US" dirty="0"/>
-                  <a:t>Paste </a:t>
-                </a:r>
-                <a14:m>
-                  <m:oMath xmlns:m="http://schemas.openxmlformats.org/officeDocument/2006/math">
-                    <m:sSub>
-                      <m:sSubPr>
-                        <m:ctrlPr>
-                          <a:rPr lang="es-ES" sz="1800" b="0" i="1" smtClean="0">
-                            <a:latin typeface="Cambria Math" panose="02040503050406030204" pitchFamily="18" charset="0"/>
-                          </a:rPr>
-                        </m:ctrlPr>
-                      </m:sSubPr>
-                      <m:e>
-                        <m:r>
-                          <a:rPr lang="es-ES" sz="1800" b="0" i="1" smtClean="0">
-                            <a:latin typeface="Cambria Math" panose="02040503050406030204" pitchFamily="18" charset="0"/>
-                          </a:rPr>
-                          <m:t>𝐿</m:t>
-                        </m:r>
-                      </m:e>
-                      <m:sub>
-                        <m:r>
-                          <a:rPr lang="es-ES" sz="1800" b="0" i="1" smtClean="0">
-                            <a:latin typeface="Cambria Math" panose="02040503050406030204" pitchFamily="18" charset="0"/>
-                          </a:rPr>
-                          <m:t>𝜋</m:t>
-                        </m:r>
-                      </m:sub>
-                    </m:sSub>
-                  </m:oMath>
-                </a14:m>
-                <a:r>
-                  <a:rPr lang="en-US" dirty="0"/>
-                  <a:t> vs width for TE and TM plot here</a:t>
-                </a:r>
-              </a:p>
-            </p:txBody>
-          </p:sp>
-        </mc:Choice>
-        <mc:Fallback xmlns="">
-          <p:sp>
-            <p:nvSpPr>
-              <p:cNvPr id="9" name="CuadroTexto 8">
-                <a:extLst>
-                  <a:ext uri="{FF2B5EF4-FFF2-40B4-BE49-F238E27FC236}">
-                    <a16:creationId xmlns:a16="http://schemas.microsoft.com/office/drawing/2014/main" id="{2BDFECD2-156D-6697-CFBF-8CD783F9B986}"/>
-                  </a:ext>
-                </a:extLst>
-              </p:cNvPr>
-              <p:cNvSpPr txBox="1">
-                <a:spLocks noRot="1" noChangeAspect="1" noMove="1" noResize="1" noEditPoints="1" noAdjustHandles="1" noChangeArrowheads="1" noChangeShapeType="1" noTextEdit="1"/>
-              </p:cNvSpPr>
-              <p:nvPr/>
-            </p:nvSpPr>
-            <p:spPr>
-              <a:xfrm>
-                <a:off x="1079403" y="2709096"/>
-                <a:ext cx="4546634" cy="923330"/>
-              </a:xfrm>
-              <a:prstGeom prst="rect">
-                <a:avLst/>
-              </a:prstGeom>
-              <a:blipFill>
-                <a:blip r:embed="rId5"/>
-                <a:stretch>
-                  <a:fillRect t="-3289" b="-9211"/>
-                </a:stretch>
-              </a:blipFill>
-            </p:spPr>
-            <p:txBody>
-              <a:bodyPr/>
-              <a:lstStyle/>
-              <a:p>
-                <a:r>
-                  <a:rPr lang="es-ES">
-                    <a:noFill/>
-                  </a:rPr>
-                  <a:t> </a:t>
-                </a:r>
-              </a:p>
-            </p:txBody>
-          </p:sp>
-        </mc:Fallback>
-      </mc:AlternateContent>
-      <mc:AlternateContent xmlns:mc="http://schemas.openxmlformats.org/markup-compatibility/2006" xmlns:a14="http://schemas.microsoft.com/office/drawing/2010/main">
-        <mc:Choice Requires="a14">
-          <p:sp>
-            <p:nvSpPr>
-              <p:cNvPr id="10" name="CuadroTexto 9">
-                <a:extLst>
-                  <a:ext uri="{FF2B5EF4-FFF2-40B4-BE49-F238E27FC236}">
-                    <a16:creationId xmlns:a16="http://schemas.microsoft.com/office/drawing/2014/main" id="{3BFC64CA-DE35-A528-CF09-36A26DB3DEE4}"/>
-                  </a:ext>
-                </a:extLst>
-              </p:cNvPr>
-              <p:cNvSpPr txBox="1"/>
-              <p:nvPr/>
-            </p:nvSpPr>
-            <p:spPr>
-              <a:xfrm>
-                <a:off x="6883366" y="2709096"/>
-                <a:ext cx="4546634" cy="923330"/>
-              </a:xfrm>
-              <a:prstGeom prst="rect">
-                <a:avLst/>
-              </a:prstGeom>
-              <a:noFill/>
-            </p:spPr>
-            <p:txBody>
-              <a:bodyPr wrap="square" rtlCol="0">
-                <a:spAutoFit/>
-              </a:bodyPr>
-              <a:lstStyle/>
-              <a:p>
-                <a:pPr algn="ctr"/>
-                <a:r>
-                  <a:rPr lang="en-US" b="1" dirty="0"/>
-                  <a:t>shallow</a:t>
-                </a:r>
-                <a:r>
-                  <a:rPr lang="en-US" dirty="0"/>
-                  <a:t> waveguide</a:t>
-                </a:r>
-              </a:p>
-              <a:p>
-                <a:pPr algn="ctr"/>
-                <a:endParaRPr lang="en-US" dirty="0"/>
-              </a:p>
-              <a:p>
-                <a:pPr algn="ctr"/>
-                <a:r>
-                  <a:rPr lang="en-US" dirty="0"/>
-                  <a:t>Paste </a:t>
-                </a:r>
-                <a14:m>
-                  <m:oMath xmlns:m="http://schemas.openxmlformats.org/officeDocument/2006/math">
-                    <m:sSub>
-                      <m:sSubPr>
-                        <m:ctrlPr>
-                          <a:rPr lang="es-ES" sz="1800" b="0" i="1" smtClean="0">
-                            <a:latin typeface="Cambria Math" panose="02040503050406030204" pitchFamily="18" charset="0"/>
-                          </a:rPr>
-                        </m:ctrlPr>
-                      </m:sSubPr>
-                      <m:e>
-                        <m:r>
-                          <a:rPr lang="es-ES" sz="1800" b="0" i="1" smtClean="0">
-                            <a:latin typeface="Cambria Math" panose="02040503050406030204" pitchFamily="18" charset="0"/>
-                          </a:rPr>
-                          <m:t>𝐿</m:t>
-                        </m:r>
-                      </m:e>
-                      <m:sub>
-                        <m:r>
-                          <a:rPr lang="es-ES" sz="1800" b="0" i="1" smtClean="0">
-                            <a:latin typeface="Cambria Math" panose="02040503050406030204" pitchFamily="18" charset="0"/>
-                          </a:rPr>
-                          <m:t>𝜋</m:t>
-                        </m:r>
-                      </m:sub>
-                    </m:sSub>
-                  </m:oMath>
-                </a14:m>
-                <a:r>
-                  <a:rPr lang="en-US" dirty="0"/>
-                  <a:t> vs width for TE and TM plot here</a:t>
-                </a:r>
-              </a:p>
-            </p:txBody>
-          </p:sp>
-        </mc:Choice>
-        <mc:Fallback xmlns="">
-          <p:sp>
-            <p:nvSpPr>
-              <p:cNvPr id="10" name="CuadroTexto 9">
-                <a:extLst>
-                  <a:ext uri="{FF2B5EF4-FFF2-40B4-BE49-F238E27FC236}">
-                    <a16:creationId xmlns:a16="http://schemas.microsoft.com/office/drawing/2014/main" id="{3BFC64CA-DE35-A528-CF09-36A26DB3DEE4}"/>
-                  </a:ext>
-                </a:extLst>
-              </p:cNvPr>
-              <p:cNvSpPr txBox="1">
-                <a:spLocks noRot="1" noChangeAspect="1" noMove="1" noResize="1" noEditPoints="1" noAdjustHandles="1" noChangeArrowheads="1" noChangeShapeType="1" noTextEdit="1"/>
-              </p:cNvSpPr>
-              <p:nvPr/>
-            </p:nvSpPr>
-            <p:spPr>
-              <a:xfrm>
-                <a:off x="6883366" y="2709096"/>
-                <a:ext cx="4546634" cy="923330"/>
-              </a:xfrm>
-              <a:prstGeom prst="rect">
-                <a:avLst/>
-              </a:prstGeom>
-              <a:blipFill>
-                <a:blip r:embed="rId6"/>
-                <a:stretch>
-                  <a:fillRect t="-3289" b="-9211"/>
-                </a:stretch>
-              </a:blipFill>
-            </p:spPr>
-            <p:txBody>
-              <a:bodyPr/>
-              <a:lstStyle/>
-              <a:p>
-                <a:r>
-                  <a:rPr lang="es-ES">
-                    <a:noFill/>
-                  </a:rPr>
-                  <a:t> </a:t>
-                </a:r>
-              </a:p>
-            </p:txBody>
-          </p:sp>
-        </mc:Fallback>
-      </mc:AlternateContent>
+      <p:pic>
+        <p:nvPicPr>
+          <p:cNvPr id="8" name="Imagen 7">
+            <a:extLst>
+              <a:ext uri="{FF2B5EF4-FFF2-40B4-BE49-F238E27FC236}">
+                <a16:creationId xmlns:a16="http://schemas.microsoft.com/office/drawing/2014/main" id="{B273895C-AFFE-4778-B2E7-0F8686DBAEBA}"/>
+              </a:ext>
+            </a:extLst>
+          </p:cNvPr>
+          <p:cNvPicPr>
+            <a:picLocks noChangeAspect="1"/>
+          </p:cNvPicPr>
+          <p:nvPr/>
+        </p:nvPicPr>
+        <p:blipFill>
+          <a:blip r:embed="rId5"/>
+          <a:stretch>
+            <a:fillRect/>
+          </a:stretch>
+        </p:blipFill>
+        <p:spPr>
+          <a:xfrm>
+            <a:off x="1600200" y="1677685"/>
+            <a:ext cx="3747456" cy="2986151"/>
+          </a:xfrm>
+          <a:prstGeom prst="rect">
+            <a:avLst/>
+          </a:prstGeom>
+        </p:spPr>
+      </p:pic>
+      <p:pic>
+        <p:nvPicPr>
+          <p:cNvPr id="14" name="Imagen 13">
+            <a:extLst>
+              <a:ext uri="{FF2B5EF4-FFF2-40B4-BE49-F238E27FC236}">
+                <a16:creationId xmlns:a16="http://schemas.microsoft.com/office/drawing/2014/main" id="{D2122AF8-D6F1-4D6C-96F0-0FEA13AB06F9}"/>
+              </a:ext>
+            </a:extLst>
+          </p:cNvPr>
+          <p:cNvPicPr>
+            <a:picLocks noChangeAspect="1"/>
+          </p:cNvPicPr>
+          <p:nvPr/>
+        </p:nvPicPr>
+        <p:blipFill>
+          <a:blip r:embed="rId6"/>
+          <a:stretch>
+            <a:fillRect/>
+          </a:stretch>
+        </p:blipFill>
+        <p:spPr>
+          <a:xfrm>
+            <a:off x="7269480" y="1777122"/>
+            <a:ext cx="3322320" cy="2647383"/>
+          </a:xfrm>
+          <a:prstGeom prst="rect">
+            <a:avLst/>
+          </a:prstGeom>
+        </p:spPr>
+      </p:pic>
     </p:spTree>
     <p:extLst>
       <p:ext uri="{BB962C8B-B14F-4D97-AF65-F5344CB8AC3E}">

--- a/LabBook_20.pptx
+++ b/LabBook_20.pptx
@@ -5,10 +5,10 @@
     <p:sldMasterId id="2147483648" r:id="rId1"/>
   </p:sldMasterIdLst>
   <p:notesMasterIdLst>
-    <p:notesMasterId r:id="rId19"/>
+    <p:notesMasterId r:id="rId20"/>
   </p:notesMasterIdLst>
   <p:handoutMasterIdLst>
-    <p:handoutMasterId r:id="rId20"/>
+    <p:handoutMasterId r:id="rId21"/>
   </p:handoutMasterIdLst>
   <p:sldIdLst>
     <p:sldId id="256" r:id="rId2"/>
@@ -17,17 +17,18 @@
     <p:sldId id="302" r:id="rId5"/>
     <p:sldId id="303" r:id="rId6"/>
     <p:sldId id="304" r:id="rId7"/>
-    <p:sldId id="291" r:id="rId8"/>
-    <p:sldId id="296" r:id="rId9"/>
-    <p:sldId id="294" r:id="rId10"/>
-    <p:sldId id="299" r:id="rId11"/>
-    <p:sldId id="300" r:id="rId12"/>
-    <p:sldId id="301" r:id="rId13"/>
-    <p:sldId id="297" r:id="rId14"/>
-    <p:sldId id="290" r:id="rId15"/>
-    <p:sldId id="292" r:id="rId16"/>
-    <p:sldId id="298" r:id="rId17"/>
-    <p:sldId id="288" r:id="rId18"/>
+    <p:sldId id="305" r:id="rId8"/>
+    <p:sldId id="291" r:id="rId9"/>
+    <p:sldId id="296" r:id="rId10"/>
+    <p:sldId id="294" r:id="rId11"/>
+    <p:sldId id="299" r:id="rId12"/>
+    <p:sldId id="300" r:id="rId13"/>
+    <p:sldId id="301" r:id="rId14"/>
+    <p:sldId id="297" r:id="rId15"/>
+    <p:sldId id="290" r:id="rId16"/>
+    <p:sldId id="292" r:id="rId17"/>
+    <p:sldId id="298" r:id="rId18"/>
+    <p:sldId id="288" r:id="rId19"/>
   </p:sldIdLst>
   <p:sldSz cx="12192000" cy="6858000"/>
   <p:notesSz cx="12192000" cy="6858000"/>
@@ -818,7 +819,7 @@
           <a:p>
             <a:fld id="{8438F8DC-35B0-48E6-A86E-42F1F08DD00F}" type="datetimeFigureOut">
               <a:rPr lang="es-ES" smtClean="0"/>
-              <a:t>02/03/2026</a:t>
+              <a:t>10/03/2026</a:t>
             </a:fld>
             <a:endParaRPr lang="es-ES"/>
           </a:p>
@@ -995,7 +996,7 @@
           <a:p>
             <a:fld id="{FACBDC12-F39B-4B97-8F4D-6734F9D366FF}" type="datetimeFigureOut">
               <a:rPr lang="es-ES" smtClean="0"/>
-              <a:t>02/03/2026</a:t>
+              <a:t>10/03/2026</a:t>
             </a:fld>
             <a:endParaRPr lang="es-ES"/>
           </a:p>
@@ -1375,6 +1376,114 @@
   <p:cSld>
     <p:spTree>
       <p:nvGrpSpPr>
+        <p:cNvPr id="1" name="">
+          <a:extLst>
+            <a:ext uri="{FF2B5EF4-FFF2-40B4-BE49-F238E27FC236}">
+              <a16:creationId xmlns:a16="http://schemas.microsoft.com/office/drawing/2014/main" id="{1AC9112F-7FB7-4F49-F4F6-C1D0DC6ADBEE}"/>
+            </a:ext>
+          </a:extLst>
+        </p:cNvPr>
+        <p:cNvGrpSpPr/>
+        <p:nvPr/>
+      </p:nvGrpSpPr>
+      <p:grpSpPr>
+        <a:xfrm>
+          <a:off x="0" y="0"/>
+          <a:ext cx="0" cy="0"/>
+          <a:chOff x="0" y="0"/>
+          <a:chExt cx="0" cy="0"/>
+        </a:xfrm>
+      </p:grpSpPr>
+      <p:sp>
+        <p:nvSpPr>
+          <p:cNvPr id="2" name="Marcador de imagen de diapositiva 1">
+            <a:extLst>
+              <a:ext uri="{FF2B5EF4-FFF2-40B4-BE49-F238E27FC236}">
+                <a16:creationId xmlns:a16="http://schemas.microsoft.com/office/drawing/2014/main" id="{5190F532-536D-B583-3561-FD0C56234D42}"/>
+              </a:ext>
+            </a:extLst>
+          </p:cNvPr>
+          <p:cNvSpPr>
+            <a:spLocks noGrp="1" noRot="1" noChangeAspect="1"/>
+          </p:cNvSpPr>
+          <p:nvPr>
+            <p:ph type="sldImg"/>
+          </p:nvPr>
+        </p:nvSpPr>
+        <p:spPr/>
+      </p:sp>
+      <p:sp>
+        <p:nvSpPr>
+          <p:cNvPr id="3" name="Marcador de notas 2">
+            <a:extLst>
+              <a:ext uri="{FF2B5EF4-FFF2-40B4-BE49-F238E27FC236}">
+                <a16:creationId xmlns:a16="http://schemas.microsoft.com/office/drawing/2014/main" id="{CC233B1A-142E-BC7B-FE19-6D22CE4082B2}"/>
+              </a:ext>
+            </a:extLst>
+          </p:cNvPr>
+          <p:cNvSpPr>
+            <a:spLocks noGrp="1"/>
+          </p:cNvSpPr>
+          <p:nvPr>
+            <p:ph type="body" idx="1"/>
+          </p:nvPr>
+        </p:nvSpPr>
+        <p:spPr/>
+        <p:txBody>
+          <a:bodyPr/>
+          <a:lstStyle/>
+          <a:p>
+            <a:endParaRPr lang="es-ES" dirty="0"/>
+          </a:p>
+        </p:txBody>
+      </p:sp>
+      <p:sp>
+        <p:nvSpPr>
+          <p:cNvPr id="4" name="Marcador de número de diapositiva 3">
+            <a:extLst>
+              <a:ext uri="{FF2B5EF4-FFF2-40B4-BE49-F238E27FC236}">
+                <a16:creationId xmlns:a16="http://schemas.microsoft.com/office/drawing/2014/main" id="{685087E6-8FC6-B2E3-2D74-B3C5168F5568}"/>
+              </a:ext>
+            </a:extLst>
+          </p:cNvPr>
+          <p:cNvSpPr>
+            <a:spLocks noGrp="1"/>
+          </p:cNvSpPr>
+          <p:nvPr>
+            <p:ph type="sldNum" sz="quarter" idx="5"/>
+          </p:nvPr>
+        </p:nvSpPr>
+        <p:spPr/>
+        <p:txBody>
+          <a:bodyPr/>
+          <a:lstStyle/>
+          <a:p>
+            <a:fld id="{676223B9-C868-4436-87D9-1A3152E1157A}" type="slidenum">
+              <a:rPr lang="es-ES" smtClean="0"/>
+              <a:t>14</a:t>
+            </a:fld>
+            <a:endParaRPr lang="es-ES"/>
+          </a:p>
+        </p:txBody>
+      </p:sp>
+    </p:spTree>
+    <p:extLst>
+      <p:ext uri="{BB962C8B-B14F-4D97-AF65-F5344CB8AC3E}">
+        <p14:creationId xmlns:p14="http://schemas.microsoft.com/office/powerpoint/2010/main" val="1581859005"/>
+      </p:ext>
+    </p:extLst>
+  </p:cSld>
+  <p:clrMapOvr>
+    <a:masterClrMapping/>
+  </p:clrMapOvr>
+</p:notes>
+</file>
+
+<file path=ppt/notesSlides/notesSlide11.xml><?xml version="1.0" encoding="utf-8"?>
+<p:notes xmlns:a="http://schemas.openxmlformats.org/drawingml/2006/main" xmlns:r="http://schemas.openxmlformats.org/officeDocument/2006/relationships" xmlns:p="http://schemas.openxmlformats.org/presentationml/2006/main">
+  <p:cSld>
+    <p:spTree>
+      <p:nvGrpSpPr>
         <p:cNvPr id="1" name=""/>
         <p:cNvGrpSpPr/>
         <p:nvPr/>
@@ -1435,7 +1544,7 @@
           <a:p>
             <a:fld id="{676223B9-C868-4436-87D9-1A3152E1157A}" type="slidenum">
               <a:rPr lang="es-ES" smtClean="0"/>
-              <a:t>14</a:t>
+              <a:t>15</a:t>
             </a:fld>
             <a:endParaRPr lang="es-ES"/>
           </a:p>
@@ -1454,7 +1563,7 @@
 </p:notes>
 </file>
 
-<file path=ppt/notesSlides/notesSlide11.xml><?xml version="1.0" encoding="utf-8"?>
+<file path=ppt/notesSlides/notesSlide12.xml><?xml version="1.0" encoding="utf-8"?>
 <p:notes xmlns:a="http://schemas.openxmlformats.org/drawingml/2006/main" xmlns:r="http://schemas.openxmlformats.org/officeDocument/2006/relationships" xmlns:p="http://schemas.openxmlformats.org/presentationml/2006/main">
   <p:cSld>
     <p:spTree>
@@ -1543,7 +1652,7 @@
           <a:p>
             <a:fld id="{676223B9-C868-4436-87D9-1A3152E1157A}" type="slidenum">
               <a:rPr lang="es-ES" smtClean="0"/>
-              <a:t>15</a:t>
+              <a:t>16</a:t>
             </a:fld>
             <a:endParaRPr lang="es-ES"/>
           </a:p>
@@ -1562,7 +1671,7 @@
 </p:notes>
 </file>
 
-<file path=ppt/notesSlides/notesSlide12.xml><?xml version="1.0" encoding="utf-8"?>
+<file path=ppt/notesSlides/notesSlide13.xml><?xml version="1.0" encoding="utf-8"?>
 <p:notes xmlns:a="http://schemas.openxmlformats.org/drawingml/2006/main" xmlns:r="http://schemas.openxmlformats.org/officeDocument/2006/relationships" xmlns:p="http://schemas.openxmlformats.org/presentationml/2006/main">
   <p:cSld>
     <p:spTree>
@@ -1651,7 +1760,7 @@
           <a:p>
             <a:fld id="{676223B9-C868-4436-87D9-1A3152E1157A}" type="slidenum">
               <a:rPr lang="es-ES" smtClean="0"/>
-              <a:t>16</a:t>
+              <a:t>17</a:t>
             </a:fld>
             <a:endParaRPr lang="es-ES"/>
           </a:p>
@@ -1894,6 +2003,114 @@
         <p:cNvPr id="1" name="">
           <a:extLst>
             <a:ext uri="{FF2B5EF4-FFF2-40B4-BE49-F238E27FC236}">
+              <a16:creationId xmlns:a16="http://schemas.microsoft.com/office/drawing/2014/main" id="{95993BBE-3704-D894-1C10-5488EE611F08}"/>
+            </a:ext>
+          </a:extLst>
+        </p:cNvPr>
+        <p:cNvGrpSpPr/>
+        <p:nvPr/>
+      </p:nvGrpSpPr>
+      <p:grpSpPr>
+        <a:xfrm>
+          <a:off x="0" y="0"/>
+          <a:ext cx="0" cy="0"/>
+          <a:chOff x="0" y="0"/>
+          <a:chExt cx="0" cy="0"/>
+        </a:xfrm>
+      </p:grpSpPr>
+      <p:sp>
+        <p:nvSpPr>
+          <p:cNvPr id="2" name="Marcador de imagen de diapositiva 1">
+            <a:extLst>
+              <a:ext uri="{FF2B5EF4-FFF2-40B4-BE49-F238E27FC236}">
+                <a16:creationId xmlns:a16="http://schemas.microsoft.com/office/drawing/2014/main" id="{19BB04E2-F70F-42F7-9964-3D274C49FB9C}"/>
+              </a:ext>
+            </a:extLst>
+          </p:cNvPr>
+          <p:cNvSpPr>
+            <a:spLocks noGrp="1" noRot="1" noChangeAspect="1"/>
+          </p:cNvSpPr>
+          <p:nvPr>
+            <p:ph type="sldImg"/>
+          </p:nvPr>
+        </p:nvSpPr>
+        <p:spPr/>
+      </p:sp>
+      <p:sp>
+        <p:nvSpPr>
+          <p:cNvPr id="3" name="Marcador de notas 2">
+            <a:extLst>
+              <a:ext uri="{FF2B5EF4-FFF2-40B4-BE49-F238E27FC236}">
+                <a16:creationId xmlns:a16="http://schemas.microsoft.com/office/drawing/2014/main" id="{F6664AEC-7D1D-9DDC-3B94-3AE8450C7E5E}"/>
+              </a:ext>
+            </a:extLst>
+          </p:cNvPr>
+          <p:cNvSpPr>
+            <a:spLocks noGrp="1"/>
+          </p:cNvSpPr>
+          <p:nvPr>
+            <p:ph type="body" idx="1"/>
+          </p:nvPr>
+        </p:nvSpPr>
+        <p:spPr/>
+        <p:txBody>
+          <a:bodyPr/>
+          <a:lstStyle/>
+          <a:p>
+            <a:endParaRPr lang="es-ES" dirty="0"/>
+          </a:p>
+        </p:txBody>
+      </p:sp>
+      <p:sp>
+        <p:nvSpPr>
+          <p:cNvPr id="4" name="Marcador de número de diapositiva 3">
+            <a:extLst>
+              <a:ext uri="{FF2B5EF4-FFF2-40B4-BE49-F238E27FC236}">
+                <a16:creationId xmlns:a16="http://schemas.microsoft.com/office/drawing/2014/main" id="{E8F62EEB-2D30-2026-D252-4267AF688251}"/>
+              </a:ext>
+            </a:extLst>
+          </p:cNvPr>
+          <p:cNvSpPr>
+            <a:spLocks noGrp="1"/>
+          </p:cNvSpPr>
+          <p:nvPr>
+            <p:ph type="sldNum" sz="quarter" idx="5"/>
+          </p:nvPr>
+        </p:nvSpPr>
+        <p:spPr/>
+        <p:txBody>
+          <a:bodyPr/>
+          <a:lstStyle/>
+          <a:p>
+            <a:fld id="{676223B9-C868-4436-87D9-1A3152E1157A}" type="slidenum">
+              <a:rPr lang="es-ES" smtClean="0"/>
+              <a:t>7</a:t>
+            </a:fld>
+            <a:endParaRPr lang="es-ES"/>
+          </a:p>
+        </p:txBody>
+      </p:sp>
+    </p:spTree>
+    <p:extLst>
+      <p:ext uri="{BB962C8B-B14F-4D97-AF65-F5344CB8AC3E}">
+        <p14:creationId xmlns:p14="http://schemas.microsoft.com/office/powerpoint/2010/main" val="4178966083"/>
+      </p:ext>
+    </p:extLst>
+  </p:cSld>
+  <p:clrMapOvr>
+    <a:masterClrMapping/>
+  </p:clrMapOvr>
+</p:notes>
+</file>
+
+<file path=ppt/notesSlides/notesSlide5.xml><?xml version="1.0" encoding="utf-8"?>
+<p:notes xmlns:a="http://schemas.openxmlformats.org/drawingml/2006/main" xmlns:r="http://schemas.openxmlformats.org/officeDocument/2006/relationships" xmlns:p="http://schemas.openxmlformats.org/presentationml/2006/main">
+  <p:cSld>
+    <p:spTree>
+      <p:nvGrpSpPr>
+        <p:cNvPr id="1" name="">
+          <a:extLst>
+            <a:ext uri="{FF2B5EF4-FFF2-40B4-BE49-F238E27FC236}">
               <a16:creationId xmlns:a16="http://schemas.microsoft.com/office/drawing/2014/main" id="{4E3C5711-C157-AA5E-1EA1-9F4C3F40B90E}"/>
             </a:ext>
           </a:extLst>
@@ -1975,7 +2192,7 @@
           <a:p>
             <a:fld id="{676223B9-C868-4436-87D9-1A3152E1157A}" type="slidenum">
               <a:rPr lang="es-ES" smtClean="0"/>
-              <a:t>7</a:t>
+              <a:t>8</a:t>
             </a:fld>
             <a:endParaRPr lang="es-ES"/>
           </a:p>
@@ -1994,7 +2211,7 @@
 </p:notes>
 </file>
 
-<file path=ppt/notesSlides/notesSlide5.xml><?xml version="1.0" encoding="utf-8"?>
+<file path=ppt/notesSlides/notesSlide6.xml><?xml version="1.0" encoding="utf-8"?>
 <p:notes xmlns:a="http://schemas.openxmlformats.org/drawingml/2006/main" xmlns:r="http://schemas.openxmlformats.org/officeDocument/2006/relationships" xmlns:p="http://schemas.openxmlformats.org/presentationml/2006/main">
   <p:cSld>
     <p:spTree>
@@ -2083,7 +2300,7 @@
           <a:p>
             <a:fld id="{676223B9-C868-4436-87D9-1A3152E1157A}" type="slidenum">
               <a:rPr lang="es-ES" smtClean="0"/>
-              <a:t>9</a:t>
+              <a:t>10</a:t>
             </a:fld>
             <a:endParaRPr lang="es-ES"/>
           </a:p>
@@ -2102,7 +2319,7 @@
 </p:notes>
 </file>
 
-<file path=ppt/notesSlides/notesSlide6.xml><?xml version="1.0" encoding="utf-8"?>
+<file path=ppt/notesSlides/notesSlide7.xml><?xml version="1.0" encoding="utf-8"?>
 <p:notes xmlns:a="http://schemas.openxmlformats.org/drawingml/2006/main" xmlns:r="http://schemas.openxmlformats.org/officeDocument/2006/relationships" xmlns:p="http://schemas.openxmlformats.org/presentationml/2006/main">
   <p:cSld>
     <p:spTree>
@@ -2191,7 +2408,7 @@
           <a:p>
             <a:fld id="{676223B9-C868-4436-87D9-1A3152E1157A}" type="slidenum">
               <a:rPr lang="es-ES" smtClean="0"/>
-              <a:t>10</a:t>
+              <a:t>11</a:t>
             </a:fld>
             <a:endParaRPr lang="es-ES"/>
           </a:p>
@@ -2210,7 +2427,7 @@
 </p:notes>
 </file>
 
-<file path=ppt/notesSlides/notesSlide7.xml><?xml version="1.0" encoding="utf-8"?>
+<file path=ppt/notesSlides/notesSlide8.xml><?xml version="1.0" encoding="utf-8"?>
 <p:notes xmlns:a="http://schemas.openxmlformats.org/drawingml/2006/main" xmlns:r="http://schemas.openxmlformats.org/officeDocument/2006/relationships" xmlns:p="http://schemas.openxmlformats.org/presentationml/2006/main">
   <p:cSld>
     <p:spTree>
@@ -2299,7 +2516,7 @@
           <a:p>
             <a:fld id="{676223B9-C868-4436-87D9-1A3152E1157A}" type="slidenum">
               <a:rPr lang="es-ES" smtClean="0"/>
-              <a:t>11</a:t>
+              <a:t>12</a:t>
             </a:fld>
             <a:endParaRPr lang="es-ES"/>
           </a:p>
@@ -2318,7 +2535,7 @@
 </p:notes>
 </file>
 
-<file path=ppt/notesSlides/notesSlide8.xml><?xml version="1.0" encoding="utf-8"?>
+<file path=ppt/notesSlides/notesSlide9.xml><?xml version="1.0" encoding="utf-8"?>
 <p:notes xmlns:a="http://schemas.openxmlformats.org/drawingml/2006/main" xmlns:r="http://schemas.openxmlformats.org/officeDocument/2006/relationships" xmlns:p="http://schemas.openxmlformats.org/presentationml/2006/main">
   <p:cSld>
     <p:spTree>
@@ -2407,7 +2624,7 @@
           <a:p>
             <a:fld id="{676223B9-C868-4436-87D9-1A3152E1157A}" type="slidenum">
               <a:rPr lang="es-ES" smtClean="0"/>
-              <a:t>12</a:t>
+              <a:t>13</a:t>
             </a:fld>
             <a:endParaRPr lang="es-ES"/>
           </a:p>
@@ -2417,114 +2634,6 @@
     <p:extLst>
       <p:ext uri="{BB962C8B-B14F-4D97-AF65-F5344CB8AC3E}">
         <p14:creationId xmlns:p14="http://schemas.microsoft.com/office/powerpoint/2010/main" val="915560842"/>
-      </p:ext>
-    </p:extLst>
-  </p:cSld>
-  <p:clrMapOvr>
-    <a:masterClrMapping/>
-  </p:clrMapOvr>
-</p:notes>
-</file>
-
-<file path=ppt/notesSlides/notesSlide9.xml><?xml version="1.0" encoding="utf-8"?>
-<p:notes xmlns:a="http://schemas.openxmlformats.org/drawingml/2006/main" xmlns:r="http://schemas.openxmlformats.org/officeDocument/2006/relationships" xmlns:p="http://schemas.openxmlformats.org/presentationml/2006/main">
-  <p:cSld>
-    <p:spTree>
-      <p:nvGrpSpPr>
-        <p:cNvPr id="1" name="">
-          <a:extLst>
-            <a:ext uri="{FF2B5EF4-FFF2-40B4-BE49-F238E27FC236}">
-              <a16:creationId xmlns:a16="http://schemas.microsoft.com/office/drawing/2014/main" id="{1AC9112F-7FB7-4F49-F4F6-C1D0DC6ADBEE}"/>
-            </a:ext>
-          </a:extLst>
-        </p:cNvPr>
-        <p:cNvGrpSpPr/>
-        <p:nvPr/>
-      </p:nvGrpSpPr>
-      <p:grpSpPr>
-        <a:xfrm>
-          <a:off x="0" y="0"/>
-          <a:ext cx="0" cy="0"/>
-          <a:chOff x="0" y="0"/>
-          <a:chExt cx="0" cy="0"/>
-        </a:xfrm>
-      </p:grpSpPr>
-      <p:sp>
-        <p:nvSpPr>
-          <p:cNvPr id="2" name="Marcador de imagen de diapositiva 1">
-            <a:extLst>
-              <a:ext uri="{FF2B5EF4-FFF2-40B4-BE49-F238E27FC236}">
-                <a16:creationId xmlns:a16="http://schemas.microsoft.com/office/drawing/2014/main" id="{5190F532-536D-B583-3561-FD0C56234D42}"/>
-              </a:ext>
-            </a:extLst>
-          </p:cNvPr>
-          <p:cNvSpPr>
-            <a:spLocks noGrp="1" noRot="1" noChangeAspect="1"/>
-          </p:cNvSpPr>
-          <p:nvPr>
-            <p:ph type="sldImg"/>
-          </p:nvPr>
-        </p:nvSpPr>
-        <p:spPr/>
-      </p:sp>
-      <p:sp>
-        <p:nvSpPr>
-          <p:cNvPr id="3" name="Marcador de notas 2">
-            <a:extLst>
-              <a:ext uri="{FF2B5EF4-FFF2-40B4-BE49-F238E27FC236}">
-                <a16:creationId xmlns:a16="http://schemas.microsoft.com/office/drawing/2014/main" id="{CC233B1A-142E-BC7B-FE19-6D22CE4082B2}"/>
-              </a:ext>
-            </a:extLst>
-          </p:cNvPr>
-          <p:cNvSpPr>
-            <a:spLocks noGrp="1"/>
-          </p:cNvSpPr>
-          <p:nvPr>
-            <p:ph type="body" idx="1"/>
-          </p:nvPr>
-        </p:nvSpPr>
-        <p:spPr/>
-        <p:txBody>
-          <a:bodyPr/>
-          <a:lstStyle/>
-          <a:p>
-            <a:endParaRPr lang="es-ES" dirty="0"/>
-          </a:p>
-        </p:txBody>
-      </p:sp>
-      <p:sp>
-        <p:nvSpPr>
-          <p:cNvPr id="4" name="Marcador de número de diapositiva 3">
-            <a:extLst>
-              <a:ext uri="{FF2B5EF4-FFF2-40B4-BE49-F238E27FC236}">
-                <a16:creationId xmlns:a16="http://schemas.microsoft.com/office/drawing/2014/main" id="{685087E6-8FC6-B2E3-2D74-B3C5168F5568}"/>
-              </a:ext>
-            </a:extLst>
-          </p:cNvPr>
-          <p:cNvSpPr>
-            <a:spLocks noGrp="1"/>
-          </p:cNvSpPr>
-          <p:nvPr>
-            <p:ph type="sldNum" sz="quarter" idx="5"/>
-          </p:nvPr>
-        </p:nvSpPr>
-        <p:spPr/>
-        <p:txBody>
-          <a:bodyPr/>
-          <a:lstStyle/>
-          <a:p>
-            <a:fld id="{676223B9-C868-4436-87D9-1A3152E1157A}" type="slidenum">
-              <a:rPr lang="es-ES" smtClean="0"/>
-              <a:t>13</a:t>
-            </a:fld>
-            <a:endParaRPr lang="es-ES"/>
-          </a:p>
-        </p:txBody>
-      </p:sp>
-    </p:spTree>
-    <p:extLst>
-      <p:ext uri="{BB962C8B-B14F-4D97-AF65-F5344CB8AC3E}">
-        <p14:creationId xmlns:p14="http://schemas.microsoft.com/office/powerpoint/2010/main" val="1581859005"/>
       </p:ext>
     </p:extLst>
   </p:cSld>
@@ -4134,7 +4243,7 @@
         <p:cNvPr id="1" name="">
           <a:extLst>
             <a:ext uri="{FF2B5EF4-FFF2-40B4-BE49-F238E27FC236}">
-              <a16:creationId xmlns:a16="http://schemas.microsoft.com/office/drawing/2014/main" id="{D1F11DBE-A482-7036-60B2-70B7E2318F46}"/>
+              <a16:creationId xmlns:a16="http://schemas.microsoft.com/office/drawing/2014/main" id="{91BF7C0E-2677-BADF-D636-6F9B71E665FA}"/>
             </a:ext>
           </a:extLst>
         </p:cNvPr>
@@ -4154,7 +4263,7 @@
           <p:cNvPr id="16" name="object 16">
             <a:extLst>
               <a:ext uri="{FF2B5EF4-FFF2-40B4-BE49-F238E27FC236}">
-                <a16:creationId xmlns:a16="http://schemas.microsoft.com/office/drawing/2014/main" id="{C096193E-AB86-E3CD-BDAC-0F9156C1A3F0}"/>
+                <a16:creationId xmlns:a16="http://schemas.microsoft.com/office/drawing/2014/main" id="{2B8D44BF-A3B5-6BED-C39C-FA8260E83536}"/>
               </a:ext>
             </a:extLst>
           </p:cNvPr>
@@ -4190,7 +4299,7 @@
             </a:pPr>
             <a:r>
               <a:rPr lang="en-US" sz="2500" dirty="0"/>
-              <a:t>Learning outcome #4.2 – 2x2 Multimode Interference Coupler - Optimization</a:t>
+              <a:t>Learning outcome #4 – 4.1 2x2 Multimode Interference Coupler </a:t>
             </a:r>
             <a:br>
               <a:rPr lang="en-US" sz="2500" dirty="0"/>
@@ -4219,7 +4328,7 @@
           <p:cNvPr id="83" name="Gráfico 82">
             <a:extLst>
               <a:ext uri="{FF2B5EF4-FFF2-40B4-BE49-F238E27FC236}">
-                <a16:creationId xmlns:a16="http://schemas.microsoft.com/office/drawing/2014/main" id="{2D17DCD6-D851-E62D-D95C-A9F9954602DE}"/>
+                <a16:creationId xmlns:a16="http://schemas.microsoft.com/office/drawing/2014/main" id="{5DFCF1AD-6B06-F914-AC0B-80F0ED838EF9}"/>
               </a:ext>
             </a:extLst>
           </p:cNvPr>
@@ -4255,7 +4364,7 @@
           <p:cNvPr id="84" name="Marcador de número de diapositiva 83">
             <a:extLst>
               <a:ext uri="{FF2B5EF4-FFF2-40B4-BE49-F238E27FC236}">
-                <a16:creationId xmlns:a16="http://schemas.microsoft.com/office/drawing/2014/main" id="{4891046F-11DC-B7FC-54F7-9583E688DC0E}"/>
+                <a16:creationId xmlns:a16="http://schemas.microsoft.com/office/drawing/2014/main" id="{4A656CCE-66E0-EAE0-5C63-DF1315DF6299}"/>
               </a:ext>
             </a:extLst>
           </p:cNvPr>
@@ -4284,7 +4393,7 @@
           <p:cNvPr id="3" name="Marcador de pie de página 2">
             <a:extLst>
               <a:ext uri="{FF2B5EF4-FFF2-40B4-BE49-F238E27FC236}">
-                <a16:creationId xmlns:a16="http://schemas.microsoft.com/office/drawing/2014/main" id="{4C9BAA39-017F-D602-6705-A6CF44830139}"/>
+                <a16:creationId xmlns:a16="http://schemas.microsoft.com/office/drawing/2014/main" id="{D3AB6581-C493-80EB-A67F-5289454DAA28}"/>
               </a:ext>
             </a:extLst>
           </p:cNvPr>
@@ -4318,7 +4427,7 @@
           <p:cNvPr id="2" name="CuadroTexto 1">
             <a:extLst>
               <a:ext uri="{FF2B5EF4-FFF2-40B4-BE49-F238E27FC236}">
-                <a16:creationId xmlns:a16="http://schemas.microsoft.com/office/drawing/2014/main" id="{43D7D9E5-DAC3-2BB8-7377-826863CBAD4E}"/>
+                <a16:creationId xmlns:a16="http://schemas.microsoft.com/office/drawing/2014/main" id="{B5029729-ADF3-3B30-4FF9-83BE1DB82BD7}"/>
               </a:ext>
             </a:extLst>
           </p:cNvPr>
@@ -4328,7 +4437,7 @@
         <p:spPr>
           <a:xfrm>
             <a:off x="609441" y="4819471"/>
-            <a:ext cx="11199971" cy="1384995"/>
+            <a:ext cx="11199971" cy="1200329"/>
           </a:xfrm>
           <a:prstGeom prst="rect">
             <a:avLst/>
@@ -4356,115 +4465,21 @@
                 <a:latin typeface="Arial" panose="020B0604020202020204" pitchFamily="34" charset="0"/>
                 <a:cs typeface="Arial" panose="020B0604020202020204" pitchFamily="34" charset="0"/>
               </a:rPr>
-              <a:t>Comment results</a:t>
-            </a:r>
-          </a:p>
-          <a:p>
-            <a:pPr algn="just"/>
+              <a:t>Comment results (Coupling relationship, </a:t>
+            </a:r>
+            <a:r>
+              <a:rPr lang="en-US" sz="1200" dirty="0" err="1">
+                <a:latin typeface="Arial" panose="020B0604020202020204" pitchFamily="34" charset="0"/>
+                <a:cs typeface="Arial" panose="020B0604020202020204" pitchFamily="34" charset="0"/>
+              </a:rPr>
+              <a:t>Lpi</a:t>
+            </a:r>
             <a:r>
               <a:rPr lang="en-US" sz="1200" dirty="0">
                 <a:latin typeface="Arial" panose="020B0604020202020204" pitchFamily="34" charset="0"/>
                 <a:cs typeface="Arial" panose="020B0604020202020204" pitchFamily="34" charset="0"/>
               </a:rPr>
-              <a:t>Con </a:t>
-            </a:r>
-            <a:r>
-              <a:rPr lang="en-US" sz="1200" dirty="0" err="1">
-                <a:latin typeface="Arial" panose="020B0604020202020204" pitchFamily="34" charset="0"/>
-                <a:cs typeface="Arial" panose="020B0604020202020204" pitchFamily="34" charset="0"/>
-              </a:rPr>
-              <a:t>valores</a:t>
-            </a:r>
-            <a:r>
-              <a:rPr lang="en-US" sz="1200" dirty="0">
-                <a:latin typeface="Arial" panose="020B0604020202020204" pitchFamily="34" charset="0"/>
-                <a:cs typeface="Arial" panose="020B0604020202020204" pitchFamily="34" charset="0"/>
-              </a:rPr>
-              <a:t> de </a:t>
-            </a:r>
-            <a:r>
-              <a:rPr lang="en-US" sz="1200" dirty="0" err="1">
-                <a:latin typeface="Arial" panose="020B0604020202020204" pitchFamily="34" charset="0"/>
-                <a:cs typeface="Arial" panose="020B0604020202020204" pitchFamily="34" charset="0"/>
-              </a:rPr>
-              <a:t>dy</a:t>
-            </a:r>
-            <a:r>
-              <a:rPr lang="en-US" sz="1200" dirty="0">
-                <a:latin typeface="Arial" panose="020B0604020202020204" pitchFamily="34" charset="0"/>
-                <a:cs typeface="Arial" panose="020B0604020202020204" pitchFamily="34" charset="0"/>
-              </a:rPr>
-              <a:t> = 0.1 y de </a:t>
-            </a:r>
-            <a:r>
-              <a:rPr lang="en-US" sz="1200" dirty="0" err="1">
-                <a:latin typeface="Arial" panose="020B0604020202020204" pitchFamily="34" charset="0"/>
-                <a:cs typeface="Arial" panose="020B0604020202020204" pitchFamily="34" charset="0"/>
-              </a:rPr>
-              <a:t>dL_MMI</a:t>
-            </a:r>
-            <a:r>
-              <a:rPr lang="en-US" sz="1200" dirty="0">
-                <a:latin typeface="Arial" panose="020B0604020202020204" pitchFamily="34" charset="0"/>
-                <a:cs typeface="Arial" panose="020B0604020202020204" pitchFamily="34" charset="0"/>
-              </a:rPr>
-              <a:t> = -0.5 </a:t>
-            </a:r>
-            <a:r>
-              <a:rPr lang="en-US" sz="1200" dirty="0" err="1">
-                <a:latin typeface="Arial" panose="020B0604020202020204" pitchFamily="34" charset="0"/>
-                <a:cs typeface="Arial" panose="020B0604020202020204" pitchFamily="34" charset="0"/>
-              </a:rPr>
-              <a:t>obtenemos</a:t>
-            </a:r>
-            <a:r>
-              <a:rPr lang="en-US" sz="1200" dirty="0">
-                <a:latin typeface="Arial" panose="020B0604020202020204" pitchFamily="34" charset="0"/>
-                <a:cs typeface="Arial" panose="020B0604020202020204" pitchFamily="34" charset="0"/>
-              </a:rPr>
-              <a:t> </a:t>
-            </a:r>
-            <a:r>
-              <a:rPr lang="en-US" sz="1200" dirty="0" err="1">
-                <a:latin typeface="Arial" panose="020B0604020202020204" pitchFamily="34" charset="0"/>
-                <a:cs typeface="Arial" panose="020B0604020202020204" pitchFamily="34" charset="0"/>
-              </a:rPr>
-              <a:t>unas</a:t>
-            </a:r>
-            <a:r>
-              <a:rPr lang="en-US" sz="1200" dirty="0">
-                <a:latin typeface="Arial" panose="020B0604020202020204" pitchFamily="34" charset="0"/>
-                <a:cs typeface="Arial" panose="020B0604020202020204" pitchFamily="34" charset="0"/>
-              </a:rPr>
-              <a:t> </a:t>
-            </a:r>
-            <a:r>
-              <a:rPr lang="en-US" sz="1200" dirty="0" err="1">
-                <a:latin typeface="Arial" panose="020B0604020202020204" pitchFamily="34" charset="0"/>
-                <a:cs typeface="Arial" panose="020B0604020202020204" pitchFamily="34" charset="0"/>
-              </a:rPr>
-              <a:t>pérdidas</a:t>
-            </a:r>
-            <a:r>
-              <a:rPr lang="en-US" sz="1200" dirty="0">
-                <a:latin typeface="Arial" panose="020B0604020202020204" pitchFamily="34" charset="0"/>
-                <a:cs typeface="Arial" panose="020B0604020202020204" pitchFamily="34" charset="0"/>
-              </a:rPr>
-              <a:t> </a:t>
-            </a:r>
-            <a:r>
-              <a:rPr lang="en-US" sz="1200" dirty="0" err="1">
-                <a:latin typeface="Arial" panose="020B0604020202020204" pitchFamily="34" charset="0"/>
-                <a:cs typeface="Arial" panose="020B0604020202020204" pitchFamily="34" charset="0"/>
-              </a:rPr>
-              <a:t>optimizadas</a:t>
-            </a:r>
-            <a:r>
-              <a:rPr lang="en-US" sz="1200" dirty="0">
-                <a:latin typeface="Arial" panose="020B0604020202020204" pitchFamily="34" charset="0"/>
-                <a:cs typeface="Arial" panose="020B0604020202020204" pitchFamily="34" charset="0"/>
-              </a:rPr>
-              <a:t> de 0.330 dB y un ratio de 0.5055</a:t>
+              <a:t>,  losses, comparison with Directional Coupler… )</a:t>
             </a:r>
           </a:p>
           <a:p>
@@ -4476,10 +4491,139 @@
           </a:p>
           <a:p>
             <a:pPr algn="just"/>
-            <a:endParaRPr lang="en-US" sz="1200" dirty="0">
-              <a:latin typeface="Arial" panose="020B0604020202020204" pitchFamily="34" charset="0"/>
-              <a:cs typeface="Arial" panose="020B0604020202020204" pitchFamily="34" charset="0"/>
-            </a:endParaRPr>
+            <a:r>
+              <a:rPr lang="en-US" sz="1200" dirty="0">
+                <a:latin typeface="Arial" panose="020B0604020202020204" pitchFamily="34" charset="0"/>
+                <a:cs typeface="Arial" panose="020B0604020202020204" pitchFamily="34" charset="0"/>
+              </a:rPr>
+              <a:t>Para </a:t>
+            </a:r>
+            <a:r>
+              <a:rPr lang="en-US" sz="1200" dirty="0" err="1">
+                <a:latin typeface="Arial" panose="020B0604020202020204" pitchFamily="34" charset="0"/>
+                <a:cs typeface="Arial" panose="020B0604020202020204" pitchFamily="34" charset="0"/>
+              </a:rPr>
+              <a:t>el</a:t>
+            </a:r>
+            <a:r>
+              <a:rPr lang="en-US" sz="1200" dirty="0">
+                <a:latin typeface="Arial" panose="020B0604020202020204" pitchFamily="34" charset="0"/>
+                <a:cs typeface="Arial" panose="020B0604020202020204" pitchFamily="34" charset="0"/>
+              </a:rPr>
+              <a:t> </a:t>
+            </a:r>
+            <a:r>
+              <a:rPr lang="en-US" sz="1200" dirty="0" err="1">
+                <a:latin typeface="Arial" panose="020B0604020202020204" pitchFamily="34" charset="0"/>
+                <a:cs typeface="Arial" panose="020B0604020202020204" pitchFamily="34" charset="0"/>
+              </a:rPr>
+              <a:t>caso</a:t>
+            </a:r>
+            <a:r>
+              <a:rPr lang="en-US" sz="1200" dirty="0">
+                <a:latin typeface="Arial" panose="020B0604020202020204" pitchFamily="34" charset="0"/>
+                <a:cs typeface="Arial" panose="020B0604020202020204" pitchFamily="34" charset="0"/>
+              </a:rPr>
+              <a:t> de </a:t>
+            </a:r>
+            <a:r>
+              <a:rPr lang="en-US" sz="1200" dirty="0" err="1">
+                <a:latin typeface="Arial" panose="020B0604020202020204" pitchFamily="34" charset="0"/>
+                <a:cs typeface="Arial" panose="020B0604020202020204" pitchFamily="34" charset="0"/>
+              </a:rPr>
+              <a:t>Lpi</a:t>
+            </a:r>
+            <a:r>
+              <a:rPr lang="en-US" sz="1200" dirty="0">
+                <a:latin typeface="Arial" panose="020B0604020202020204" pitchFamily="34" charset="0"/>
+                <a:cs typeface="Arial" panose="020B0604020202020204" pitchFamily="34" charset="0"/>
+              </a:rPr>
+              <a:t>/2, </a:t>
+            </a:r>
+            <a:r>
+              <a:rPr lang="en-US" sz="1200" dirty="0" err="1">
+                <a:latin typeface="Arial" panose="020B0604020202020204" pitchFamily="34" charset="0"/>
+                <a:cs typeface="Arial" panose="020B0604020202020204" pitchFamily="34" charset="0"/>
+              </a:rPr>
+              <a:t>obtenemos</a:t>
+            </a:r>
+            <a:r>
+              <a:rPr lang="en-US" sz="1200" dirty="0">
+                <a:latin typeface="Arial" panose="020B0604020202020204" pitchFamily="34" charset="0"/>
+                <a:cs typeface="Arial" panose="020B0604020202020204" pitchFamily="34" charset="0"/>
+              </a:rPr>
+              <a:t> </a:t>
+            </a:r>
+            <a:r>
+              <a:rPr lang="en-US" sz="1200" dirty="0" err="1">
+                <a:latin typeface="Arial" panose="020B0604020202020204" pitchFamily="34" charset="0"/>
+                <a:cs typeface="Arial" panose="020B0604020202020204" pitchFamily="34" charset="0"/>
+              </a:rPr>
+              <a:t>unas</a:t>
+            </a:r>
+            <a:r>
+              <a:rPr lang="en-US" sz="1200" dirty="0">
+                <a:latin typeface="Arial" panose="020B0604020202020204" pitchFamily="34" charset="0"/>
+                <a:cs typeface="Arial" panose="020B0604020202020204" pitchFamily="34" charset="0"/>
+              </a:rPr>
+              <a:t> </a:t>
+            </a:r>
+            <a:r>
+              <a:rPr lang="en-US" sz="1200" dirty="0" err="1">
+                <a:latin typeface="Arial" panose="020B0604020202020204" pitchFamily="34" charset="0"/>
+                <a:cs typeface="Arial" panose="020B0604020202020204" pitchFamily="34" charset="0"/>
+              </a:rPr>
+              <a:t>pérdidas</a:t>
+            </a:r>
+            <a:r>
+              <a:rPr lang="en-US" sz="1200" dirty="0">
+                <a:latin typeface="Arial" panose="020B0604020202020204" pitchFamily="34" charset="0"/>
+                <a:cs typeface="Arial" panose="020B0604020202020204" pitchFamily="34" charset="0"/>
+              </a:rPr>
+              <a:t> de 0.4217 dB y un ratio de </a:t>
+            </a:r>
+            <a:r>
+              <a:rPr lang="en-US" sz="1200" dirty="0" err="1">
+                <a:latin typeface="Arial" panose="020B0604020202020204" pitchFamily="34" charset="0"/>
+                <a:cs typeface="Arial" panose="020B0604020202020204" pitchFamily="34" charset="0"/>
+              </a:rPr>
+              <a:t>salida</a:t>
+            </a:r>
+            <a:r>
+              <a:rPr lang="en-US" sz="1200" dirty="0">
+                <a:latin typeface="Arial" panose="020B0604020202020204" pitchFamily="34" charset="0"/>
+                <a:cs typeface="Arial" panose="020B0604020202020204" pitchFamily="34" charset="0"/>
+              </a:rPr>
+              <a:t> </a:t>
+            </a:r>
+            <a:r>
+              <a:rPr lang="en-US" sz="1200" dirty="0" err="1">
+                <a:latin typeface="Arial" panose="020B0604020202020204" pitchFamily="34" charset="0"/>
+                <a:cs typeface="Arial" panose="020B0604020202020204" pitchFamily="34" charset="0"/>
+              </a:rPr>
+              <a:t>cercano</a:t>
+            </a:r>
+            <a:r>
+              <a:rPr lang="en-US" sz="1200" dirty="0">
+                <a:latin typeface="Arial" panose="020B0604020202020204" pitchFamily="34" charset="0"/>
+                <a:cs typeface="Arial" panose="020B0604020202020204" pitchFamily="34" charset="0"/>
+              </a:rPr>
+              <a:t> al 50/50 </a:t>
+            </a:r>
+            <a:r>
+              <a:rPr lang="en-US" sz="1200" dirty="0" err="1">
+                <a:latin typeface="Arial" panose="020B0604020202020204" pitchFamily="34" charset="0"/>
+                <a:cs typeface="Arial" panose="020B0604020202020204" pitchFamily="34" charset="0"/>
+              </a:rPr>
+              <a:t>esperado</a:t>
+            </a:r>
+            <a:r>
+              <a:rPr lang="en-US" sz="1200" dirty="0">
+                <a:latin typeface="Arial" panose="020B0604020202020204" pitchFamily="34" charset="0"/>
+                <a:cs typeface="Arial" panose="020B0604020202020204" pitchFamily="34" charset="0"/>
+              </a:rPr>
+              <a:t> (0.5152 y 0.4848)</a:t>
+            </a:r>
           </a:p>
           <a:p>
             <a:pPr algn="just"/>
@@ -4509,7 +4653,7 @@
           <p:cNvPr id="7" name="Rectángulo 6">
             <a:extLst>
               <a:ext uri="{FF2B5EF4-FFF2-40B4-BE49-F238E27FC236}">
-                <a16:creationId xmlns:a16="http://schemas.microsoft.com/office/drawing/2014/main" id="{9772491E-4FFB-FFC3-C855-72A4B15F3E73}"/>
+                <a16:creationId xmlns:a16="http://schemas.microsoft.com/office/drawing/2014/main" id="{98DE5FDA-4E91-E843-E84A-1467BFAA9986}"/>
               </a:ext>
             </a:extLst>
           </p:cNvPr>
@@ -4556,124 +4700,12 @@
           </a:p>
         </p:txBody>
       </p:sp>
-      <p:sp>
-        <p:nvSpPr>
-          <p:cNvPr id="8" name="CuadroTexto 7">
-            <a:extLst>
-              <a:ext uri="{FF2B5EF4-FFF2-40B4-BE49-F238E27FC236}">
-                <a16:creationId xmlns:a16="http://schemas.microsoft.com/office/drawing/2014/main" id="{643565A9-7DB6-D6EE-152F-2852C8BA7986}"/>
-              </a:ext>
-            </a:extLst>
-          </p:cNvPr>
-          <p:cNvSpPr txBox="1"/>
-          <p:nvPr/>
-        </p:nvSpPr>
-        <p:spPr>
-          <a:xfrm>
-            <a:off x="640245" y="1942909"/>
-            <a:ext cx="11199972" cy="2708434"/>
-          </a:xfrm>
-          <a:prstGeom prst="rect">
-            <a:avLst/>
-          </a:prstGeom>
-          <a:noFill/>
-        </p:spPr>
-        <p:txBody>
-          <a:bodyPr wrap="square" rtlCol="0">
-            <a:spAutoFit/>
-          </a:bodyPr>
-          <a:lstStyle/>
-          <a:p>
-            <a:pPr algn="ctr"/>
-            <a:r>
-              <a:rPr lang="en-US" b="1" dirty="0"/>
-              <a:t>deep</a:t>
-            </a:r>
-            <a:r>
-              <a:rPr lang="en-US" dirty="0"/>
-              <a:t> waveguide</a:t>
-            </a:r>
-          </a:p>
-          <a:p>
-            <a:pPr algn="ctr"/>
-            <a:endParaRPr lang="en-US" dirty="0"/>
-          </a:p>
-          <a:p>
-            <a:pPr algn="ctr"/>
-            <a:r>
-              <a:rPr lang="en-US" dirty="0"/>
-              <a:t>Paste propagation plot and console results</a:t>
-            </a:r>
-          </a:p>
-          <a:p>
-            <a:pPr algn="ctr"/>
-            <a:endParaRPr lang="en-US" dirty="0"/>
-          </a:p>
-          <a:p>
-            <a:pPr algn="ctr"/>
-            <a:endParaRPr lang="en-US" dirty="0"/>
-          </a:p>
-          <a:p>
-            <a:pPr algn="r"/>
-            <a:r>
-              <a:rPr lang="en-US" sz="1600" b="1" dirty="0"/>
-              <a:t>Target</a:t>
-            </a:r>
-            <a:r>
-              <a:rPr lang="en-US" sz="1600" dirty="0"/>
-              <a:t>: make equal ratio over outputs (even if not 0.5) and minimize excess loss (even if not 0.0 dB)</a:t>
-            </a:r>
-          </a:p>
-          <a:p>
-            <a:pPr algn="r"/>
-            <a:r>
-              <a:rPr lang="en-US" sz="1600" dirty="0"/>
-              <a:t>With same settings of previous LO, now adjust try to manually optimize the MMI by changing iteratively:</a:t>
-            </a:r>
-          </a:p>
-          <a:p>
-            <a:pPr algn="r"/>
-            <a:r>
-              <a:rPr lang="en-US" sz="1600" dirty="0"/>
-              <a:t>- Change </a:t>
-            </a:r>
-            <a:r>
-              <a:rPr lang="en-US" sz="1600" dirty="0" err="1"/>
-              <a:t>dL_MMI</a:t>
-            </a:r>
-            <a:endParaRPr lang="en-US" sz="1600" dirty="0"/>
-          </a:p>
-          <a:p>
-            <a:pPr algn="r"/>
-            <a:r>
-              <a:rPr lang="en-US" sz="1600" dirty="0"/>
-              <a:t>- Change I/O waveguide position +/- </a:t>
-            </a:r>
-            <a:r>
-              <a:rPr lang="en-US" sz="1600" dirty="0" err="1"/>
-              <a:t>dy</a:t>
-            </a:r>
-            <a:endParaRPr lang="en-US" sz="1600" dirty="0"/>
-          </a:p>
-          <a:p>
-            <a:pPr algn="r"/>
-            <a:r>
-              <a:rPr lang="en-US" sz="1600" b="1" dirty="0"/>
-              <a:t>Hints</a:t>
-            </a:r>
-            <a:r>
-              <a:rPr lang="en-US" sz="1600" dirty="0"/>
-              <a:t>: observe the 2D EME propagation results to guide you to the best settings of a) and b).</a:t>
-            </a:r>
-          </a:p>
-        </p:txBody>
-      </p:sp>
       <p:pic>
         <p:nvPicPr>
           <p:cNvPr id="5" name="Imagen 4">
             <a:extLst>
               <a:ext uri="{FF2B5EF4-FFF2-40B4-BE49-F238E27FC236}">
-                <a16:creationId xmlns:a16="http://schemas.microsoft.com/office/drawing/2014/main" id="{C23D9742-E714-4668-8DDB-BFA03AD4E1E6}"/>
+                <a16:creationId xmlns:a16="http://schemas.microsoft.com/office/drawing/2014/main" id="{0306A81B-1DE7-4993-A6AA-D02ECE945160}"/>
               </a:ext>
             </a:extLst>
           </p:cNvPr>
@@ -4690,7 +4722,509 @@
         </p:blipFill>
         <p:spPr>
           <a:xfrm>
-            <a:off x="609441" y="1321220"/>
+            <a:off x="4191000" y="1450461"/>
+            <a:ext cx="3686562" cy="3091138"/>
+          </a:xfrm>
+          <a:prstGeom prst="rect">
+            <a:avLst/>
+          </a:prstGeom>
+        </p:spPr>
+      </p:pic>
+    </p:spTree>
+    <p:extLst>
+      <p:ext uri="{BB962C8B-B14F-4D97-AF65-F5344CB8AC3E}">
+        <p14:creationId xmlns:p14="http://schemas.microsoft.com/office/powerpoint/2010/main" val="2815679427"/>
+      </p:ext>
+    </p:extLst>
+  </p:cSld>
+  <p:clrMapOvr>
+    <a:masterClrMapping/>
+  </p:clrMapOvr>
+</p:sld>
+</file>
+
+<file path=ppt/slides/slide11.xml><?xml version="1.0" encoding="utf-8"?>
+<p:sld xmlns:a="http://schemas.openxmlformats.org/drawingml/2006/main" xmlns:r="http://schemas.openxmlformats.org/officeDocument/2006/relationships" xmlns:p="http://schemas.openxmlformats.org/presentationml/2006/main">
+  <p:cSld>
+    <p:spTree>
+      <p:nvGrpSpPr>
+        <p:cNvPr id="1" name="">
+          <a:extLst>
+            <a:ext uri="{FF2B5EF4-FFF2-40B4-BE49-F238E27FC236}">
+              <a16:creationId xmlns:a16="http://schemas.microsoft.com/office/drawing/2014/main" id="{D1F11DBE-A482-7036-60B2-70B7E2318F46}"/>
+            </a:ext>
+          </a:extLst>
+        </p:cNvPr>
+        <p:cNvGrpSpPr/>
+        <p:nvPr/>
+      </p:nvGrpSpPr>
+      <p:grpSpPr>
+        <a:xfrm>
+          <a:off x="0" y="0"/>
+          <a:ext cx="0" cy="0"/>
+          <a:chOff x="0" y="0"/>
+          <a:chExt cx="0" cy="0"/>
+        </a:xfrm>
+      </p:grpSpPr>
+      <p:sp>
+        <p:nvSpPr>
+          <p:cNvPr id="16" name="object 16">
+            <a:extLst>
+              <a:ext uri="{FF2B5EF4-FFF2-40B4-BE49-F238E27FC236}">
+                <a16:creationId xmlns:a16="http://schemas.microsoft.com/office/drawing/2014/main" id="{C096193E-AB86-E3CD-BDAC-0F9156C1A3F0}"/>
+              </a:ext>
+            </a:extLst>
+          </p:cNvPr>
+          <p:cNvSpPr txBox="1">
+            <a:spLocks noGrp="1"/>
+          </p:cNvSpPr>
+          <p:nvPr>
+            <p:ph type="title"/>
+          </p:nvPr>
+        </p:nvSpPr>
+        <p:spPr>
+          <a:xfrm>
+            <a:off x="685800" y="408883"/>
+            <a:ext cx="10994410" cy="705321"/>
+          </a:xfrm>
+          <a:prstGeom prst="rect">
+            <a:avLst/>
+          </a:prstGeom>
+        </p:spPr>
+        <p:txBody>
+          <a:bodyPr vert="horz" wrap="square" lIns="0" tIns="12700" rIns="0" bIns="0" rtlCol="0">
+            <a:spAutoFit/>
+          </a:bodyPr>
+          <a:lstStyle/>
+          <a:p>
+            <a:pPr marL="12700">
+              <a:lnSpc>
+                <a:spcPct val="100000"/>
+              </a:lnSpc>
+              <a:spcBef>
+                <a:spcPts val="100"/>
+              </a:spcBef>
+            </a:pPr>
+            <a:r>
+              <a:rPr lang="en-US" sz="2500" dirty="0"/>
+              <a:t>Learning outcome #4.2 – 2x2 Multimode Interference Coupler - Optimization</a:t>
+            </a:r>
+            <a:br>
+              <a:rPr lang="en-US" sz="2500" dirty="0"/>
+            </a:br>
+            <a:r>
+              <a:rPr lang="en-US" b="0" dirty="0"/>
+              <a:t>Wavelength 1.55 µm, </a:t>
+            </a:r>
+            <a:r>
+              <a:rPr lang="en-US" b="0" dirty="0" err="1"/>
+              <a:t>wMMI</a:t>
+            </a:r>
+            <a:r>
+              <a:rPr lang="en-US" b="0" dirty="0"/>
+              <a:t> = 6.6 µm</a:t>
+            </a:r>
+            <a:endParaRPr lang="en-US" sz="2500" b="0" dirty="0">
+              <a:latin typeface="+mj-lt"/>
+              <a:cs typeface="Lucida Sans"/>
+            </a:endParaRPr>
+          </a:p>
+        </p:txBody>
+      </p:sp>
+      <p:pic>
+        <p:nvPicPr>
+          <p:cNvPr id="83" name="Gráfico 82">
+            <a:extLst>
+              <a:ext uri="{FF2B5EF4-FFF2-40B4-BE49-F238E27FC236}">
+                <a16:creationId xmlns:a16="http://schemas.microsoft.com/office/drawing/2014/main" id="{2D17DCD6-D851-E62D-D95C-A9F9954602DE}"/>
+              </a:ext>
+            </a:extLst>
+          </p:cNvPr>
+          <p:cNvPicPr>
+            <a:picLocks noChangeAspect="1"/>
+          </p:cNvPicPr>
+          <p:nvPr/>
+        </p:nvPicPr>
+        <p:blipFill>
+          <a:blip r:embed="rId3">
+            <a:extLst>
+              <a:ext uri="{96DAC541-7B7A-43D3-8B79-37D633B846F1}">
+                <asvg:svgBlip xmlns:asvg="http://schemas.microsoft.com/office/drawing/2016/SVG/main" r:embed="rId4"/>
+              </a:ext>
+            </a:extLst>
+          </a:blip>
+          <a:stretch>
+            <a:fillRect/>
+          </a:stretch>
+        </p:blipFill>
+        <p:spPr>
+          <a:xfrm>
+            <a:off x="5045006" y="6356057"/>
+            <a:ext cx="6409575" cy="363174"/>
+          </a:xfrm>
+          <a:prstGeom prst="rect">
+            <a:avLst/>
+          </a:prstGeom>
+        </p:spPr>
+      </p:pic>
+      <p:sp>
+        <p:nvSpPr>
+          <p:cNvPr id="84" name="Marcador de número de diapositiva 83">
+            <a:extLst>
+              <a:ext uri="{FF2B5EF4-FFF2-40B4-BE49-F238E27FC236}">
+                <a16:creationId xmlns:a16="http://schemas.microsoft.com/office/drawing/2014/main" id="{4891046F-11DC-B7FC-54F7-9583E688DC0E}"/>
+              </a:ext>
+            </a:extLst>
+          </p:cNvPr>
+          <p:cNvSpPr>
+            <a:spLocks noGrp="1"/>
+          </p:cNvSpPr>
+          <p:nvPr>
+            <p:ph type="sldNum" sz="quarter" idx="7"/>
+          </p:nvPr>
+        </p:nvSpPr>
+        <p:spPr/>
+        <p:txBody>
+          <a:bodyPr/>
+          <a:lstStyle/>
+          <a:p>
+            <a:fld id="{B6F15528-21DE-4FAA-801E-634DDDAF4B2B}" type="slidenum">
+              <a:rPr lang="es-ES" smtClean="0"/>
+              <a:t>11</a:t>
+            </a:fld>
+            <a:endParaRPr lang="es-ES"/>
+          </a:p>
+        </p:txBody>
+      </p:sp>
+      <p:sp>
+        <p:nvSpPr>
+          <p:cNvPr id="3" name="Marcador de pie de página 2">
+            <a:extLst>
+              <a:ext uri="{FF2B5EF4-FFF2-40B4-BE49-F238E27FC236}">
+                <a16:creationId xmlns:a16="http://schemas.microsoft.com/office/drawing/2014/main" id="{4C9BAA39-017F-D602-6705-A6CF44830139}"/>
+              </a:ext>
+            </a:extLst>
+          </p:cNvPr>
+          <p:cNvSpPr>
+            <a:spLocks noGrp="1"/>
+          </p:cNvSpPr>
+          <p:nvPr>
+            <p:ph type="ftr" sz="quarter" idx="5"/>
+          </p:nvPr>
+        </p:nvSpPr>
+        <p:spPr/>
+        <p:txBody>
+          <a:bodyPr/>
+          <a:lstStyle/>
+          <a:p>
+            <a:pPr marL="12700">
+              <a:spcBef>
+                <a:spcPts val="15"/>
+              </a:spcBef>
+            </a:pPr>
+            <a:r>
+              <a:rPr lang="es-ES" spc="-5"/>
+              <a:t>LAB 2.0. COUPLERS</a:t>
+            </a:r>
+            <a:endParaRPr lang="es-ES" spc="-5" dirty="0"/>
+          </a:p>
+        </p:txBody>
+      </p:sp>
+      <p:sp>
+        <p:nvSpPr>
+          <p:cNvPr id="2" name="CuadroTexto 1">
+            <a:extLst>
+              <a:ext uri="{FF2B5EF4-FFF2-40B4-BE49-F238E27FC236}">
+                <a16:creationId xmlns:a16="http://schemas.microsoft.com/office/drawing/2014/main" id="{43D7D9E5-DAC3-2BB8-7377-826863CBAD4E}"/>
+              </a:ext>
+            </a:extLst>
+          </p:cNvPr>
+          <p:cNvSpPr txBox="1"/>
+          <p:nvPr/>
+        </p:nvSpPr>
+        <p:spPr>
+          <a:xfrm>
+            <a:off x="609441" y="4819471"/>
+            <a:ext cx="11199971" cy="1415772"/>
+          </a:xfrm>
+          <a:prstGeom prst="rect">
+            <a:avLst/>
+          </a:prstGeom>
+          <a:solidFill>
+            <a:schemeClr val="bg1">
+              <a:lumMod val="95000"/>
+            </a:schemeClr>
+          </a:solidFill>
+          <a:ln w="28575">
+            <a:solidFill>
+              <a:srgbClr val="E0700D"/>
+            </a:solidFill>
+          </a:ln>
+        </p:spPr>
+        <p:txBody>
+          <a:bodyPr wrap="square" rtlCol="0">
+            <a:spAutoFit/>
+          </a:bodyPr>
+          <a:lstStyle/>
+          <a:p>
+            <a:pPr algn="just"/>
+            <a:r>
+              <a:rPr lang="en-US" sz="1200" dirty="0">
+                <a:latin typeface="Arial" panose="020B0604020202020204" pitchFamily="34" charset="0"/>
+                <a:cs typeface="Arial" panose="020B0604020202020204" pitchFamily="34" charset="0"/>
+              </a:rPr>
+              <a:t>Comment results</a:t>
+            </a:r>
+          </a:p>
+          <a:p>
+            <a:pPr algn="just"/>
+            <a:r>
+              <a:rPr lang="en-US" sz="1200" dirty="0">
+                <a:latin typeface="Arial" panose="020B0604020202020204" pitchFamily="34" charset="0"/>
+                <a:cs typeface="Arial" panose="020B0604020202020204" pitchFamily="34" charset="0"/>
+              </a:rPr>
+              <a:t>Con </a:t>
+            </a:r>
+            <a:r>
+              <a:rPr lang="en-US" sz="1200" dirty="0" err="1">
+                <a:latin typeface="Arial" panose="020B0604020202020204" pitchFamily="34" charset="0"/>
+                <a:cs typeface="Arial" panose="020B0604020202020204" pitchFamily="34" charset="0"/>
+              </a:rPr>
+              <a:t>valores</a:t>
+            </a:r>
+            <a:r>
+              <a:rPr lang="en-US" sz="1200" dirty="0">
+                <a:latin typeface="Arial" panose="020B0604020202020204" pitchFamily="34" charset="0"/>
+                <a:cs typeface="Arial" panose="020B0604020202020204" pitchFamily="34" charset="0"/>
+              </a:rPr>
+              <a:t> de </a:t>
+            </a:r>
+            <a:r>
+              <a:rPr lang="en-US" sz="1200" dirty="0" err="1">
+                <a:latin typeface="Arial" panose="020B0604020202020204" pitchFamily="34" charset="0"/>
+                <a:cs typeface="Arial" panose="020B0604020202020204" pitchFamily="34" charset="0"/>
+              </a:rPr>
+              <a:t>dy</a:t>
+            </a:r>
+            <a:r>
+              <a:rPr lang="en-US" sz="1200" dirty="0">
+                <a:latin typeface="Arial" panose="020B0604020202020204" pitchFamily="34" charset="0"/>
+                <a:cs typeface="Arial" panose="020B0604020202020204" pitchFamily="34" charset="0"/>
+              </a:rPr>
+              <a:t> = 0.1 y de </a:t>
+            </a:r>
+            <a:r>
+              <a:rPr lang="en-US" sz="1200" dirty="0" err="1">
+                <a:latin typeface="Arial" panose="020B0604020202020204" pitchFamily="34" charset="0"/>
+                <a:cs typeface="Arial" panose="020B0604020202020204" pitchFamily="34" charset="0"/>
+              </a:rPr>
+              <a:t>dL_MMI</a:t>
+            </a:r>
+            <a:r>
+              <a:rPr lang="en-US" sz="1200" dirty="0">
+                <a:latin typeface="Arial" panose="020B0604020202020204" pitchFamily="34" charset="0"/>
+                <a:cs typeface="Arial" panose="020B0604020202020204" pitchFamily="34" charset="0"/>
+              </a:rPr>
+              <a:t> = -0.5 </a:t>
+            </a:r>
+            <a:r>
+              <a:rPr lang="en-US" sz="1200" dirty="0" err="1">
+                <a:latin typeface="Arial" panose="020B0604020202020204" pitchFamily="34" charset="0"/>
+                <a:cs typeface="Arial" panose="020B0604020202020204" pitchFamily="34" charset="0"/>
+              </a:rPr>
+              <a:t>obtenemos</a:t>
+            </a:r>
+            <a:r>
+              <a:rPr lang="en-US" sz="1200" dirty="0">
+                <a:latin typeface="Arial" panose="020B0604020202020204" pitchFamily="34" charset="0"/>
+                <a:cs typeface="Arial" panose="020B0604020202020204" pitchFamily="34" charset="0"/>
+              </a:rPr>
+              <a:t> </a:t>
+            </a:r>
+            <a:r>
+              <a:rPr lang="en-US" sz="1200" dirty="0" err="1">
+                <a:latin typeface="Arial" panose="020B0604020202020204" pitchFamily="34" charset="0"/>
+                <a:cs typeface="Arial" panose="020B0604020202020204" pitchFamily="34" charset="0"/>
+              </a:rPr>
+              <a:t>unas</a:t>
+            </a:r>
+            <a:r>
+              <a:rPr lang="en-US" sz="1200" dirty="0">
+                <a:latin typeface="Arial" panose="020B0604020202020204" pitchFamily="34" charset="0"/>
+                <a:cs typeface="Arial" panose="020B0604020202020204" pitchFamily="34" charset="0"/>
+              </a:rPr>
+              <a:t> </a:t>
+            </a:r>
+            <a:r>
+              <a:rPr lang="en-US" sz="1200" dirty="0" err="1">
+                <a:latin typeface="Arial" panose="020B0604020202020204" pitchFamily="34" charset="0"/>
+                <a:cs typeface="Arial" panose="020B0604020202020204" pitchFamily="34" charset="0"/>
+              </a:rPr>
+              <a:t>pérdidas</a:t>
+            </a:r>
+            <a:r>
+              <a:rPr lang="en-US" sz="1200" dirty="0">
+                <a:latin typeface="Arial" panose="020B0604020202020204" pitchFamily="34" charset="0"/>
+                <a:cs typeface="Arial" panose="020B0604020202020204" pitchFamily="34" charset="0"/>
+              </a:rPr>
+              <a:t> </a:t>
+            </a:r>
+            <a:r>
+              <a:rPr lang="en-US" sz="1200" dirty="0" err="1">
+                <a:latin typeface="Arial" panose="020B0604020202020204" pitchFamily="34" charset="0"/>
+                <a:cs typeface="Arial" panose="020B0604020202020204" pitchFamily="34" charset="0"/>
+              </a:rPr>
+              <a:t>optimizadas</a:t>
+            </a:r>
+            <a:r>
+              <a:rPr lang="en-US" sz="1200" dirty="0">
+                <a:latin typeface="Arial" panose="020B0604020202020204" pitchFamily="34" charset="0"/>
+                <a:cs typeface="Arial" panose="020B0604020202020204" pitchFamily="34" charset="0"/>
+              </a:rPr>
+              <a:t> de 0.330 dB y un ratio de 0.5055 y 0.4945</a:t>
+            </a:r>
+          </a:p>
+          <a:p>
+            <a:pPr algn="r"/>
+            <a:r>
+              <a:rPr lang="en-US" sz="1000" b="1" dirty="0"/>
+              <a:t>Target</a:t>
+            </a:r>
+            <a:r>
+              <a:rPr lang="en-US" sz="1000" dirty="0"/>
+              <a:t>: make equal ratio over outputs (even if not 0.5) and minimize excess loss (even if not 0.0 dB)</a:t>
+            </a:r>
+          </a:p>
+          <a:p>
+            <a:pPr algn="r"/>
+            <a:r>
+              <a:rPr lang="en-US" sz="1000" dirty="0"/>
+              <a:t>With same settings of previous LO, now adjust try to manually optimize the MMI by changing iteratively:</a:t>
+            </a:r>
+          </a:p>
+          <a:p>
+            <a:pPr algn="r"/>
+            <a:r>
+              <a:rPr lang="en-US" sz="1000" dirty="0"/>
+              <a:t>- Change </a:t>
+            </a:r>
+            <a:r>
+              <a:rPr lang="en-US" sz="1000" dirty="0" err="1"/>
+              <a:t>dL_MMI</a:t>
+            </a:r>
+            <a:endParaRPr lang="en-US" sz="1000" dirty="0"/>
+          </a:p>
+          <a:p>
+            <a:pPr algn="r"/>
+            <a:r>
+              <a:rPr lang="en-US" sz="1000" dirty="0"/>
+              <a:t>- Change I/O waveguide position +/- </a:t>
+            </a:r>
+            <a:r>
+              <a:rPr lang="en-US" sz="1000" dirty="0" err="1"/>
+              <a:t>dy</a:t>
+            </a:r>
+            <a:endParaRPr lang="en-US" sz="1000" dirty="0"/>
+          </a:p>
+          <a:p>
+            <a:pPr algn="r"/>
+            <a:r>
+              <a:rPr lang="en-US" sz="1000" b="1" dirty="0"/>
+              <a:t>Hints</a:t>
+            </a:r>
+            <a:r>
+              <a:rPr lang="en-US" sz="1000" dirty="0"/>
+              <a:t>: observe the 2D EME propagation results to guide you to the best settings of a) and b).</a:t>
+            </a:r>
+            <a:endParaRPr lang="en-US" sz="1200" dirty="0">
+              <a:latin typeface="Arial" panose="020B0604020202020204" pitchFamily="34" charset="0"/>
+              <a:cs typeface="Arial" panose="020B0604020202020204" pitchFamily="34" charset="0"/>
+            </a:endParaRPr>
+          </a:p>
+          <a:p>
+            <a:pPr algn="just"/>
+            <a:endParaRPr lang="en-US" sz="1200" dirty="0">
+              <a:latin typeface="Arial" panose="020B0604020202020204" pitchFamily="34" charset="0"/>
+              <a:cs typeface="Arial" panose="020B0604020202020204" pitchFamily="34" charset="0"/>
+            </a:endParaRPr>
+          </a:p>
+        </p:txBody>
+      </p:sp>
+      <p:sp>
+        <p:nvSpPr>
+          <p:cNvPr id="7" name="Rectángulo 6">
+            <a:extLst>
+              <a:ext uri="{FF2B5EF4-FFF2-40B4-BE49-F238E27FC236}">
+                <a16:creationId xmlns:a16="http://schemas.microsoft.com/office/drawing/2014/main" id="{9772491E-4FFB-FFC3-C855-72A4B15F3E73}"/>
+              </a:ext>
+            </a:extLst>
+          </p:cNvPr>
+          <p:cNvSpPr/>
+          <p:nvPr/>
+        </p:nvSpPr>
+        <p:spPr>
+          <a:xfrm>
+            <a:off x="609441" y="1377510"/>
+            <a:ext cx="11199971" cy="3306028"/>
+          </a:xfrm>
+          <a:prstGeom prst="rect">
+            <a:avLst/>
+          </a:prstGeom>
+          <a:noFill/>
+          <a:ln w="28575">
+            <a:solidFill>
+              <a:srgbClr val="E0700D"/>
+            </a:solidFill>
+          </a:ln>
+        </p:spPr>
+        <p:style>
+          <a:lnRef idx="2">
+            <a:schemeClr val="accent1">
+              <a:shade val="15000"/>
+            </a:schemeClr>
+          </a:lnRef>
+          <a:fillRef idx="1">
+            <a:schemeClr val="accent1"/>
+          </a:fillRef>
+          <a:effectRef idx="0">
+            <a:schemeClr val="accent1"/>
+          </a:effectRef>
+          <a:fontRef idx="minor">
+            <a:schemeClr val="lt1"/>
+          </a:fontRef>
+        </p:style>
+        <p:txBody>
+          <a:bodyPr rtlCol="0" anchor="ctr"/>
+          <a:lstStyle/>
+          <a:p>
+            <a:pPr algn="ctr"/>
+            <a:endParaRPr lang="en-US"/>
+          </a:p>
+        </p:txBody>
+      </p:sp>
+      <p:pic>
+        <p:nvPicPr>
+          <p:cNvPr id="5" name="Imagen 4">
+            <a:extLst>
+              <a:ext uri="{FF2B5EF4-FFF2-40B4-BE49-F238E27FC236}">
+                <a16:creationId xmlns:a16="http://schemas.microsoft.com/office/drawing/2014/main" id="{C23D9742-E714-4668-8DDB-BFA03AD4E1E6}"/>
+              </a:ext>
+            </a:extLst>
+          </p:cNvPr>
+          <p:cNvPicPr>
+            <a:picLocks noChangeAspect="1"/>
+          </p:cNvPicPr>
+          <p:nvPr/>
+        </p:nvPicPr>
+        <p:blipFill>
+          <a:blip r:embed="rId5"/>
+          <a:stretch>
+            <a:fillRect/>
+          </a:stretch>
+        </p:blipFill>
+        <p:spPr>
+          <a:xfrm>
+            <a:off x="4133256" y="1445477"/>
             <a:ext cx="3925487" cy="3306028"/>
           </a:xfrm>
           <a:prstGeom prst="rect">
@@ -4711,7 +5245,7 @@
 </p:sld>
 </file>
 
-<file path=ppt/slides/slide11.xml><?xml version="1.0" encoding="utf-8"?>
+<file path=ppt/slides/slide12.xml><?xml version="1.0" encoding="utf-8"?>
 <p:sld xmlns:a="http://schemas.openxmlformats.org/drawingml/2006/main" xmlns:r="http://schemas.openxmlformats.org/officeDocument/2006/relationships" xmlns:p="http://schemas.openxmlformats.org/presentationml/2006/main">
   <p:cSld>
     <p:spTree>
@@ -4858,7 +5392,7 @@
           <a:p>
             <a:fld id="{B6F15528-21DE-4FAA-801E-634DDDAF4B2B}" type="slidenum">
               <a:rPr lang="es-ES" smtClean="0"/>
-              <a:t>11</a:t>
+              <a:t>12</a:t>
             </a:fld>
             <a:endParaRPr lang="es-ES"/>
           </a:p>
@@ -4951,7 +5485,133 @@
                 <a:latin typeface="Arial" panose="020B0604020202020204" pitchFamily="34" charset="0"/>
                 <a:cs typeface="Arial" panose="020B0604020202020204" pitchFamily="34" charset="0"/>
               </a:rPr>
-              <a:t>Width de 1.3 um</a:t>
+              <a:t>Para un width de 1.3 um </a:t>
+            </a:r>
+            <a:r>
+              <a:rPr lang="en-US" sz="1200" dirty="0" err="1">
+                <a:latin typeface="Arial" panose="020B0604020202020204" pitchFamily="34" charset="0"/>
+                <a:cs typeface="Arial" panose="020B0604020202020204" pitchFamily="34" charset="0"/>
+              </a:rPr>
+              <a:t>obtenemos</a:t>
+            </a:r>
+            <a:r>
+              <a:rPr lang="en-US" sz="1200" dirty="0">
+                <a:latin typeface="Arial" panose="020B0604020202020204" pitchFamily="34" charset="0"/>
+                <a:cs typeface="Arial" panose="020B0604020202020204" pitchFamily="34" charset="0"/>
+              </a:rPr>
+              <a:t> </a:t>
+            </a:r>
+            <a:r>
+              <a:rPr lang="en-US" sz="1200" dirty="0" err="1">
+                <a:latin typeface="Arial" panose="020B0604020202020204" pitchFamily="34" charset="0"/>
+                <a:cs typeface="Arial" panose="020B0604020202020204" pitchFamily="34" charset="0"/>
+              </a:rPr>
+              <a:t>muy</a:t>
+            </a:r>
+            <a:r>
+              <a:rPr lang="en-US" sz="1200" dirty="0">
+                <a:latin typeface="Arial" panose="020B0604020202020204" pitchFamily="34" charset="0"/>
+                <a:cs typeface="Arial" panose="020B0604020202020204" pitchFamily="34" charset="0"/>
+              </a:rPr>
+              <a:t> </a:t>
+            </a:r>
+            <a:r>
+              <a:rPr lang="en-US" sz="1200" dirty="0" err="1">
+                <a:latin typeface="Arial" panose="020B0604020202020204" pitchFamily="34" charset="0"/>
+                <a:cs typeface="Arial" panose="020B0604020202020204" pitchFamily="34" charset="0"/>
+              </a:rPr>
+              <a:t>buenas</a:t>
+            </a:r>
+            <a:r>
+              <a:rPr lang="en-US" sz="1200" dirty="0">
+                <a:latin typeface="Arial" panose="020B0604020202020204" pitchFamily="34" charset="0"/>
+                <a:cs typeface="Arial" panose="020B0604020202020204" pitchFamily="34" charset="0"/>
+              </a:rPr>
+              <a:t> </a:t>
+            </a:r>
+            <a:r>
+              <a:rPr lang="en-US" sz="1200" dirty="0" err="1">
+                <a:latin typeface="Arial" panose="020B0604020202020204" pitchFamily="34" charset="0"/>
+                <a:cs typeface="Arial" panose="020B0604020202020204" pitchFamily="34" charset="0"/>
+              </a:rPr>
+              <a:t>pérdidas</a:t>
+            </a:r>
+            <a:r>
+              <a:rPr lang="en-US" sz="1200" dirty="0">
+                <a:latin typeface="Arial" panose="020B0604020202020204" pitchFamily="34" charset="0"/>
+                <a:cs typeface="Arial" panose="020B0604020202020204" pitchFamily="34" charset="0"/>
+              </a:rPr>
+              <a:t> (0.0159 dB) </a:t>
+            </a:r>
+            <a:r>
+              <a:rPr lang="en-US" sz="1200" dirty="0" err="1">
+                <a:latin typeface="Arial" panose="020B0604020202020204" pitchFamily="34" charset="0"/>
+                <a:cs typeface="Arial" panose="020B0604020202020204" pitchFamily="34" charset="0"/>
+              </a:rPr>
+              <a:t>aunque</a:t>
+            </a:r>
+            <a:r>
+              <a:rPr lang="en-US" sz="1200" dirty="0">
+                <a:latin typeface="Arial" panose="020B0604020202020204" pitchFamily="34" charset="0"/>
+                <a:cs typeface="Arial" panose="020B0604020202020204" pitchFamily="34" charset="0"/>
+              </a:rPr>
+              <a:t> no </a:t>
+            </a:r>
+            <a:r>
+              <a:rPr lang="en-US" sz="1200" dirty="0" err="1">
+                <a:latin typeface="Arial" panose="020B0604020202020204" pitchFamily="34" charset="0"/>
+                <a:cs typeface="Arial" panose="020B0604020202020204" pitchFamily="34" charset="0"/>
+              </a:rPr>
+              <a:t>llegue</a:t>
+            </a:r>
+            <a:r>
+              <a:rPr lang="en-US" sz="1200" dirty="0">
+                <a:latin typeface="Arial" panose="020B0604020202020204" pitchFamily="34" charset="0"/>
+                <a:cs typeface="Arial" panose="020B0604020202020204" pitchFamily="34" charset="0"/>
+              </a:rPr>
+              <a:t> a </a:t>
+            </a:r>
+            <a:r>
+              <a:rPr lang="en-US" sz="1200" dirty="0" err="1">
+                <a:latin typeface="Arial" panose="020B0604020202020204" pitchFamily="34" charset="0"/>
+                <a:cs typeface="Arial" panose="020B0604020202020204" pitchFamily="34" charset="0"/>
+              </a:rPr>
+              <a:t>bajar</a:t>
+            </a:r>
+            <a:r>
+              <a:rPr lang="en-US" sz="1200" dirty="0">
+                <a:latin typeface="Arial" panose="020B0604020202020204" pitchFamily="34" charset="0"/>
+                <a:cs typeface="Arial" panose="020B0604020202020204" pitchFamily="34" charset="0"/>
+              </a:rPr>
+              <a:t> de los 0.1 dB y </a:t>
+            </a:r>
+            <a:r>
+              <a:rPr lang="en-US" sz="1200" dirty="0" err="1">
+                <a:latin typeface="Arial" panose="020B0604020202020204" pitchFamily="34" charset="0"/>
+                <a:cs typeface="Arial" panose="020B0604020202020204" pitchFamily="34" charset="0"/>
+              </a:rPr>
+              <a:t>unos</a:t>
+            </a:r>
+            <a:r>
+              <a:rPr lang="en-US" sz="1200" dirty="0">
+                <a:latin typeface="Arial" panose="020B0604020202020204" pitchFamily="34" charset="0"/>
+                <a:cs typeface="Arial" panose="020B0604020202020204" pitchFamily="34" charset="0"/>
+              </a:rPr>
+              <a:t> ratios no tan </a:t>
+            </a:r>
+            <a:r>
+              <a:rPr lang="en-US" sz="1200" dirty="0" err="1">
+                <a:latin typeface="Arial" panose="020B0604020202020204" pitchFamily="34" charset="0"/>
+                <a:cs typeface="Arial" panose="020B0604020202020204" pitchFamily="34" charset="0"/>
+              </a:rPr>
+              <a:t>cercanos</a:t>
+            </a:r>
+            <a:r>
+              <a:rPr lang="en-US" sz="1200" dirty="0">
+                <a:latin typeface="Arial" panose="020B0604020202020204" pitchFamily="34" charset="0"/>
+                <a:cs typeface="Arial" panose="020B0604020202020204" pitchFamily="34" charset="0"/>
+              </a:rPr>
+              <a:t> al 50/50.</a:t>
             </a:r>
           </a:p>
           <a:p>
@@ -5192,7 +5852,7 @@
 </p:sld>
 </file>
 
-<file path=ppt/slides/slide12.xml><?xml version="1.0" encoding="utf-8"?>
+<file path=ppt/slides/slide13.xml><?xml version="1.0" encoding="utf-8"?>
 <p:sld xmlns:a="http://schemas.openxmlformats.org/drawingml/2006/main" xmlns:r="http://schemas.openxmlformats.org/officeDocument/2006/relationships" xmlns:p="http://schemas.openxmlformats.org/presentationml/2006/main">
   <p:cSld>
     <p:spTree>
@@ -5347,7 +6007,7 @@
           <a:p>
             <a:fld id="{B6F15528-21DE-4FAA-801E-634DDDAF4B2B}" type="slidenum">
               <a:rPr lang="es-ES" smtClean="0"/>
-              <a:t>12</a:t>
+              <a:t>13</a:t>
             </a:fld>
             <a:endParaRPr lang="es-ES"/>
           </a:p>
@@ -5402,7 +6062,7 @@
         <p:spPr>
           <a:xfrm>
             <a:off x="609441" y="4819471"/>
-            <a:ext cx="11199971" cy="1200329"/>
+            <a:ext cx="11199971" cy="1384995"/>
           </a:xfrm>
           <a:prstGeom prst="rect">
             <a:avLst/>
@@ -5430,29 +6090,344 @@
                 <a:latin typeface="Arial" panose="020B0604020202020204" pitchFamily="34" charset="0"/>
                 <a:cs typeface="Arial" panose="020B0604020202020204" pitchFamily="34" charset="0"/>
               </a:rPr>
-              <a:t>Repeat all the design </a:t>
-            </a:r>
-            <a:r>
-              <a:rPr lang="en-US" sz="1200">
-                <a:latin typeface="Arial" panose="020B0604020202020204" pitchFamily="34" charset="0"/>
-                <a:cs typeface="Arial" panose="020B0604020202020204" pitchFamily="34" charset="0"/>
-              </a:rPr>
-              <a:t>process for a </a:t>
+              <a:t>Width  = 12 um. Primera imagen sin optimizer y para 3*</a:t>
+            </a:r>
+            <a:r>
+              <a:rPr lang="en-US" sz="1200" dirty="0" err="1">
+                <a:latin typeface="Arial" panose="020B0604020202020204" pitchFamily="34" charset="0"/>
+                <a:cs typeface="Arial" panose="020B0604020202020204" pitchFamily="34" charset="0"/>
+              </a:rPr>
+              <a:t>Lpi</a:t>
             </a:r>
             <a:r>
               <a:rPr lang="en-US" sz="1200" dirty="0">
                 <a:latin typeface="Arial" panose="020B0604020202020204" pitchFamily="34" charset="0"/>
                 <a:cs typeface="Arial" panose="020B0604020202020204" pitchFamily="34" charset="0"/>
               </a:rPr>
-              <a:t>1x4 MMI Coupler.  </a:t>
-            </a:r>
-          </a:p>
-          <a:p>
-            <a:pPr algn="just"/>
-            <a:endParaRPr lang="en-US" sz="1200" dirty="0">
-              <a:latin typeface="Arial" panose="020B0604020202020204" pitchFamily="34" charset="0"/>
-              <a:cs typeface="Arial" panose="020B0604020202020204" pitchFamily="34" charset="0"/>
-            </a:endParaRPr>
+              <a:t>/16. Para la </a:t>
+            </a:r>
+            <a:r>
+              <a:rPr lang="en-US" sz="1200" dirty="0" err="1">
+                <a:latin typeface="Arial" panose="020B0604020202020204" pitchFamily="34" charset="0"/>
+                <a:cs typeface="Arial" panose="020B0604020202020204" pitchFamily="34" charset="0"/>
+              </a:rPr>
+              <a:t>segunda</a:t>
+            </a:r>
+            <a:r>
+              <a:rPr lang="en-US" sz="1200" dirty="0">
+                <a:latin typeface="Arial" panose="020B0604020202020204" pitchFamily="34" charset="0"/>
+                <a:cs typeface="Arial" panose="020B0604020202020204" pitchFamily="34" charset="0"/>
+              </a:rPr>
+              <a:t> </a:t>
+            </a:r>
+            <a:r>
+              <a:rPr lang="en-US" sz="1200" dirty="0" err="1">
+                <a:latin typeface="Arial" panose="020B0604020202020204" pitchFamily="34" charset="0"/>
+                <a:cs typeface="Arial" panose="020B0604020202020204" pitchFamily="34" charset="0"/>
+              </a:rPr>
+              <a:t>gráfica</a:t>
+            </a:r>
+            <a:r>
+              <a:rPr lang="en-US" sz="1200" dirty="0">
+                <a:latin typeface="Arial" panose="020B0604020202020204" pitchFamily="34" charset="0"/>
+                <a:cs typeface="Arial" panose="020B0604020202020204" pitchFamily="34" charset="0"/>
+              </a:rPr>
+              <a:t> </a:t>
+            </a:r>
+            <a:r>
+              <a:rPr lang="en-US" sz="1200" dirty="0" err="1">
+                <a:latin typeface="Arial" panose="020B0604020202020204" pitchFamily="34" charset="0"/>
+                <a:cs typeface="Arial" panose="020B0604020202020204" pitchFamily="34" charset="0"/>
+              </a:rPr>
+              <a:t>hemos</a:t>
+            </a:r>
+            <a:r>
+              <a:rPr lang="en-US" sz="1200" dirty="0">
+                <a:latin typeface="Arial" panose="020B0604020202020204" pitchFamily="34" charset="0"/>
+                <a:cs typeface="Arial" panose="020B0604020202020204" pitchFamily="34" charset="0"/>
+              </a:rPr>
+              <a:t> </a:t>
+            </a:r>
+            <a:r>
+              <a:rPr lang="en-US" sz="1200" dirty="0" err="1">
+                <a:latin typeface="Arial" panose="020B0604020202020204" pitchFamily="34" charset="0"/>
+                <a:cs typeface="Arial" panose="020B0604020202020204" pitchFamily="34" charset="0"/>
+              </a:rPr>
+              <a:t>realizado</a:t>
+            </a:r>
+            <a:r>
+              <a:rPr lang="en-US" sz="1200" dirty="0">
+                <a:latin typeface="Arial" panose="020B0604020202020204" pitchFamily="34" charset="0"/>
+                <a:cs typeface="Arial" panose="020B0604020202020204" pitchFamily="34" charset="0"/>
+              </a:rPr>
+              <a:t> la </a:t>
+            </a:r>
+            <a:r>
+              <a:rPr lang="en-US" sz="1200" dirty="0" err="1">
+                <a:latin typeface="Arial" panose="020B0604020202020204" pitchFamily="34" charset="0"/>
+                <a:cs typeface="Arial" panose="020B0604020202020204" pitchFamily="34" charset="0"/>
+              </a:rPr>
+              <a:t>primera</a:t>
+            </a:r>
+            <a:r>
+              <a:rPr lang="en-US" sz="1200" dirty="0">
+                <a:latin typeface="Arial" panose="020B0604020202020204" pitchFamily="34" charset="0"/>
+                <a:cs typeface="Arial" panose="020B0604020202020204" pitchFamily="34" charset="0"/>
+              </a:rPr>
+              <a:t> </a:t>
+            </a:r>
+            <a:r>
+              <a:rPr lang="en-US" sz="1200" dirty="0" err="1">
+                <a:latin typeface="Arial" panose="020B0604020202020204" pitchFamily="34" charset="0"/>
+                <a:cs typeface="Arial" panose="020B0604020202020204" pitchFamily="34" charset="0"/>
+              </a:rPr>
+              <a:t>optimización</a:t>
+            </a:r>
+            <a:r>
+              <a:rPr lang="en-US" sz="1200" dirty="0">
+                <a:latin typeface="Arial" panose="020B0604020202020204" pitchFamily="34" charset="0"/>
+                <a:cs typeface="Arial" panose="020B0604020202020204" pitchFamily="34" charset="0"/>
+              </a:rPr>
+              <a:t> con </a:t>
+            </a:r>
+            <a:r>
+              <a:rPr lang="en-US" sz="1200" dirty="0" err="1">
+                <a:latin typeface="Arial" panose="020B0604020202020204" pitchFamily="34" charset="0"/>
+                <a:cs typeface="Arial" panose="020B0604020202020204" pitchFamily="34" charset="0"/>
+              </a:rPr>
+              <a:t>dy</a:t>
+            </a:r>
+            <a:r>
+              <a:rPr lang="en-US" sz="1200" dirty="0">
+                <a:latin typeface="Arial" panose="020B0604020202020204" pitchFamily="34" charset="0"/>
+                <a:cs typeface="Arial" panose="020B0604020202020204" pitchFamily="34" charset="0"/>
+              </a:rPr>
+              <a:t> = 0.1 y dL = -1.2. Para </a:t>
+            </a:r>
+            <a:r>
+              <a:rPr lang="en-US" sz="1200" dirty="0" err="1">
+                <a:latin typeface="Arial" panose="020B0604020202020204" pitchFamily="34" charset="0"/>
+                <a:cs typeface="Arial" panose="020B0604020202020204" pitchFamily="34" charset="0"/>
+              </a:rPr>
+              <a:t>este</a:t>
+            </a:r>
+            <a:r>
+              <a:rPr lang="en-US" sz="1200" dirty="0">
+                <a:latin typeface="Arial" panose="020B0604020202020204" pitchFamily="34" charset="0"/>
+                <a:cs typeface="Arial" panose="020B0604020202020204" pitchFamily="34" charset="0"/>
+              </a:rPr>
+              <a:t> </a:t>
+            </a:r>
+            <a:r>
+              <a:rPr lang="en-US" sz="1200" dirty="0" err="1">
+                <a:latin typeface="Arial" panose="020B0604020202020204" pitchFamily="34" charset="0"/>
+                <a:cs typeface="Arial" panose="020B0604020202020204" pitchFamily="34" charset="0"/>
+              </a:rPr>
+              <a:t>caso</a:t>
+            </a:r>
+            <a:r>
+              <a:rPr lang="en-US" sz="1200" dirty="0">
+                <a:latin typeface="Arial" panose="020B0604020202020204" pitchFamily="34" charset="0"/>
+                <a:cs typeface="Arial" panose="020B0604020202020204" pitchFamily="34" charset="0"/>
+              </a:rPr>
+              <a:t> </a:t>
+            </a:r>
+            <a:r>
+              <a:rPr lang="en-US" sz="1200" dirty="0" err="1">
+                <a:latin typeface="Arial" panose="020B0604020202020204" pitchFamily="34" charset="0"/>
+                <a:cs typeface="Arial" panose="020B0604020202020204" pitchFamily="34" charset="0"/>
+              </a:rPr>
+              <a:t>mejoramos</a:t>
+            </a:r>
+            <a:r>
+              <a:rPr lang="en-US" sz="1200" dirty="0">
+                <a:latin typeface="Arial" panose="020B0604020202020204" pitchFamily="34" charset="0"/>
+                <a:cs typeface="Arial" panose="020B0604020202020204" pitchFamily="34" charset="0"/>
+              </a:rPr>
+              <a:t> las </a:t>
+            </a:r>
+            <a:r>
+              <a:rPr lang="en-US" sz="1200" dirty="0" err="1">
+                <a:latin typeface="Arial" panose="020B0604020202020204" pitchFamily="34" charset="0"/>
+                <a:cs typeface="Arial" panose="020B0604020202020204" pitchFamily="34" charset="0"/>
+              </a:rPr>
+              <a:t>pérdidas</a:t>
+            </a:r>
+            <a:r>
+              <a:rPr lang="en-US" sz="1200" dirty="0">
+                <a:latin typeface="Arial" panose="020B0604020202020204" pitchFamily="34" charset="0"/>
+                <a:cs typeface="Arial" panose="020B0604020202020204" pitchFamily="34" charset="0"/>
+              </a:rPr>
+              <a:t> </a:t>
+            </a:r>
+            <a:r>
+              <a:rPr lang="en-US" sz="1200" dirty="0" err="1">
+                <a:latin typeface="Arial" panose="020B0604020202020204" pitchFamily="34" charset="0"/>
+                <a:cs typeface="Arial" panose="020B0604020202020204" pitchFamily="34" charset="0"/>
+              </a:rPr>
+              <a:t>pero</a:t>
+            </a:r>
+            <a:r>
+              <a:rPr lang="en-US" sz="1200" dirty="0">
+                <a:latin typeface="Arial" panose="020B0604020202020204" pitchFamily="34" charset="0"/>
+                <a:cs typeface="Arial" panose="020B0604020202020204" pitchFamily="34" charset="0"/>
+              </a:rPr>
+              <a:t> los ratios son </a:t>
+            </a:r>
+            <a:r>
+              <a:rPr lang="en-US" sz="1200" dirty="0" err="1">
+                <a:latin typeface="Arial" panose="020B0604020202020204" pitchFamily="34" charset="0"/>
+                <a:cs typeface="Arial" panose="020B0604020202020204" pitchFamily="34" charset="0"/>
+              </a:rPr>
+              <a:t>peores</a:t>
+            </a:r>
+            <a:r>
+              <a:rPr lang="en-US" sz="1200" dirty="0">
+                <a:latin typeface="Arial" panose="020B0604020202020204" pitchFamily="34" charset="0"/>
+                <a:cs typeface="Arial" panose="020B0604020202020204" pitchFamily="34" charset="0"/>
+              </a:rPr>
+              <a:t>.  </a:t>
+            </a:r>
+            <a:r>
+              <a:rPr lang="en-US" sz="1200" dirty="0" err="1">
+                <a:latin typeface="Arial" panose="020B0604020202020204" pitchFamily="34" charset="0"/>
+                <a:cs typeface="Arial" panose="020B0604020202020204" pitchFamily="34" charset="0"/>
+              </a:rPr>
+              <a:t>Después</a:t>
+            </a:r>
+            <a:r>
+              <a:rPr lang="en-US" sz="1200" dirty="0">
+                <a:latin typeface="Arial" panose="020B0604020202020204" pitchFamily="34" charset="0"/>
+                <a:cs typeface="Arial" panose="020B0604020202020204" pitchFamily="34" charset="0"/>
+              </a:rPr>
+              <a:t> de la </a:t>
+            </a:r>
+            <a:r>
+              <a:rPr lang="en-US" sz="1200" dirty="0" err="1">
+                <a:latin typeface="Arial" panose="020B0604020202020204" pitchFamily="34" charset="0"/>
+                <a:cs typeface="Arial" panose="020B0604020202020204" pitchFamily="34" charset="0"/>
+              </a:rPr>
+              <a:t>segunda</a:t>
+            </a:r>
+            <a:r>
+              <a:rPr lang="en-US" sz="1200" dirty="0">
+                <a:latin typeface="Arial" panose="020B0604020202020204" pitchFamily="34" charset="0"/>
+                <a:cs typeface="Arial" panose="020B0604020202020204" pitchFamily="34" charset="0"/>
+              </a:rPr>
+              <a:t> </a:t>
+            </a:r>
+            <a:r>
+              <a:rPr lang="en-US" sz="1200" dirty="0" err="1">
+                <a:latin typeface="Arial" panose="020B0604020202020204" pitchFamily="34" charset="0"/>
+                <a:cs typeface="Arial" panose="020B0604020202020204" pitchFamily="34" charset="0"/>
+              </a:rPr>
+              <a:t>optimización</a:t>
+            </a:r>
+            <a:r>
+              <a:rPr lang="en-US" sz="1200" dirty="0">
+                <a:latin typeface="Arial" panose="020B0604020202020204" pitchFamily="34" charset="0"/>
+                <a:cs typeface="Arial" panose="020B0604020202020204" pitchFamily="34" charset="0"/>
+              </a:rPr>
+              <a:t> con un width de 2 um, </a:t>
+            </a:r>
+            <a:r>
+              <a:rPr lang="en-US" sz="1200" dirty="0" err="1">
+                <a:latin typeface="Arial" panose="020B0604020202020204" pitchFamily="34" charset="0"/>
+                <a:cs typeface="Arial" panose="020B0604020202020204" pitchFamily="34" charset="0"/>
+              </a:rPr>
+              <a:t>obtenemos</a:t>
+            </a:r>
+            <a:r>
+              <a:rPr lang="en-US" sz="1200" dirty="0">
+                <a:latin typeface="Arial" panose="020B0604020202020204" pitchFamily="34" charset="0"/>
+                <a:cs typeface="Arial" panose="020B0604020202020204" pitchFamily="34" charset="0"/>
+              </a:rPr>
+              <a:t> </a:t>
+            </a:r>
+            <a:r>
+              <a:rPr lang="en-US" sz="1200" dirty="0" err="1">
+                <a:latin typeface="Arial" panose="020B0604020202020204" pitchFamily="34" charset="0"/>
+                <a:cs typeface="Arial" panose="020B0604020202020204" pitchFamily="34" charset="0"/>
+              </a:rPr>
+              <a:t>unas</a:t>
+            </a:r>
+            <a:r>
+              <a:rPr lang="en-US" sz="1200" dirty="0">
+                <a:latin typeface="Arial" panose="020B0604020202020204" pitchFamily="34" charset="0"/>
+                <a:cs typeface="Arial" panose="020B0604020202020204" pitchFamily="34" charset="0"/>
+              </a:rPr>
+              <a:t> </a:t>
+            </a:r>
+            <a:r>
+              <a:rPr lang="en-US" sz="1200" dirty="0" err="1">
+                <a:latin typeface="Arial" panose="020B0604020202020204" pitchFamily="34" charset="0"/>
+                <a:cs typeface="Arial" panose="020B0604020202020204" pitchFamily="34" charset="0"/>
+              </a:rPr>
+              <a:t>muy</a:t>
+            </a:r>
+            <a:r>
+              <a:rPr lang="en-US" sz="1200" dirty="0">
+                <a:latin typeface="Arial" panose="020B0604020202020204" pitchFamily="34" charset="0"/>
+                <a:cs typeface="Arial" panose="020B0604020202020204" pitchFamily="34" charset="0"/>
+              </a:rPr>
+              <a:t> </a:t>
+            </a:r>
+            <a:r>
+              <a:rPr lang="en-US" sz="1200" dirty="0" err="1">
+                <a:latin typeface="Arial" panose="020B0604020202020204" pitchFamily="34" charset="0"/>
+                <a:cs typeface="Arial" panose="020B0604020202020204" pitchFamily="34" charset="0"/>
+              </a:rPr>
+              <a:t>buenas</a:t>
+            </a:r>
+            <a:r>
+              <a:rPr lang="en-US" sz="1200" dirty="0">
+                <a:latin typeface="Arial" panose="020B0604020202020204" pitchFamily="34" charset="0"/>
+                <a:cs typeface="Arial" panose="020B0604020202020204" pitchFamily="34" charset="0"/>
+              </a:rPr>
+              <a:t> </a:t>
+            </a:r>
+            <a:r>
+              <a:rPr lang="en-US" sz="1200" dirty="0" err="1">
+                <a:latin typeface="Arial" panose="020B0604020202020204" pitchFamily="34" charset="0"/>
+                <a:cs typeface="Arial" panose="020B0604020202020204" pitchFamily="34" charset="0"/>
+              </a:rPr>
+              <a:t>pérdidas</a:t>
+            </a:r>
+            <a:r>
+              <a:rPr lang="en-US" sz="1200" dirty="0">
+                <a:latin typeface="Arial" panose="020B0604020202020204" pitchFamily="34" charset="0"/>
+                <a:cs typeface="Arial" panose="020B0604020202020204" pitchFamily="34" charset="0"/>
+              </a:rPr>
+              <a:t> (0.0015 dB) </a:t>
+            </a:r>
+            <a:r>
+              <a:rPr lang="en-US" sz="1200" dirty="0" err="1">
+                <a:latin typeface="Arial" panose="020B0604020202020204" pitchFamily="34" charset="0"/>
+                <a:cs typeface="Arial" panose="020B0604020202020204" pitchFamily="34" charset="0"/>
+              </a:rPr>
+              <a:t>pero</a:t>
+            </a:r>
+            <a:r>
+              <a:rPr lang="en-US" sz="1200" dirty="0">
+                <a:latin typeface="Arial" panose="020B0604020202020204" pitchFamily="34" charset="0"/>
+                <a:cs typeface="Arial" panose="020B0604020202020204" pitchFamily="34" charset="0"/>
+              </a:rPr>
+              <a:t> no tan buenos ratios de </a:t>
+            </a:r>
+            <a:r>
+              <a:rPr lang="en-US" sz="1200" dirty="0" err="1">
+                <a:latin typeface="Arial" panose="020B0604020202020204" pitchFamily="34" charset="0"/>
+                <a:cs typeface="Arial" panose="020B0604020202020204" pitchFamily="34" charset="0"/>
+              </a:rPr>
+              <a:t>salidas</a:t>
+            </a:r>
+            <a:r>
+              <a:rPr lang="en-US" sz="1200" dirty="0">
+                <a:latin typeface="Arial" panose="020B0604020202020204" pitchFamily="34" charset="0"/>
+                <a:cs typeface="Arial" panose="020B0604020202020204" pitchFamily="34" charset="0"/>
+              </a:rPr>
+              <a:t>.</a:t>
+            </a:r>
           </a:p>
           <a:p>
             <a:pPr algn="just"/>
@@ -5536,57 +6511,96 @@
           </a:p>
         </p:txBody>
       </p:sp>
-      <p:sp>
-        <p:nvSpPr>
-          <p:cNvPr id="8" name="CuadroTexto 7">
-            <a:extLst>
-              <a:ext uri="{FF2B5EF4-FFF2-40B4-BE49-F238E27FC236}">
-                <a16:creationId xmlns:a16="http://schemas.microsoft.com/office/drawing/2014/main" id="{C3506757-32B7-9151-DA89-AADDB7F7D093}"/>
-              </a:ext>
-            </a:extLst>
-          </p:cNvPr>
-          <p:cNvSpPr txBox="1"/>
+      <p:pic>
+        <p:nvPicPr>
+          <p:cNvPr id="5" name="Imagen 4">
+            <a:extLst>
+              <a:ext uri="{FF2B5EF4-FFF2-40B4-BE49-F238E27FC236}">
+                <a16:creationId xmlns:a16="http://schemas.microsoft.com/office/drawing/2014/main" id="{83C0AB92-4075-479B-B592-8AD5FD6C24C2}"/>
+              </a:ext>
+            </a:extLst>
+          </p:cNvPr>
+          <p:cNvPicPr>
+            <a:picLocks noChangeAspect="1"/>
+          </p:cNvPicPr>
           <p:nvPr/>
-        </p:nvSpPr>
+        </p:nvPicPr>
+        <p:blipFill>
+          <a:blip r:embed="rId5"/>
+          <a:stretch>
+            <a:fillRect/>
+          </a:stretch>
+        </p:blipFill>
         <p:spPr>
           <a:xfrm>
-            <a:off x="2286000" y="2630415"/>
-            <a:ext cx="7718580" cy="923330"/>
+            <a:off x="762000" y="1495973"/>
+            <a:ext cx="3514870" cy="3069101"/>
           </a:xfrm>
           <a:prstGeom prst="rect">
             <a:avLst/>
           </a:prstGeom>
-          <a:noFill/>
         </p:spPr>
-        <p:txBody>
-          <a:bodyPr wrap="square" rtlCol="0">
-            <a:spAutoFit/>
-          </a:bodyPr>
-          <a:lstStyle/>
-          <a:p>
-            <a:pPr algn="ctr"/>
-            <a:r>
-              <a:rPr lang="en-US" b="1" dirty="0"/>
-              <a:t>deep</a:t>
-            </a:r>
-            <a:r>
-              <a:rPr lang="en-US" dirty="0"/>
-              <a:t> waveguide</a:t>
-            </a:r>
-          </a:p>
-          <a:p>
-            <a:pPr algn="ctr"/>
-            <a:endParaRPr lang="en-US" dirty="0"/>
-          </a:p>
-          <a:p>
-            <a:pPr algn="ctr"/>
-            <a:r>
-              <a:rPr lang="en-US" dirty="0"/>
-              <a:t>Paste propagation plots and console results</a:t>
-            </a:r>
-          </a:p>
-        </p:txBody>
-      </p:sp>
+      </p:pic>
+      <p:pic>
+        <p:nvPicPr>
+          <p:cNvPr id="9" name="Imagen 8">
+            <a:extLst>
+              <a:ext uri="{FF2B5EF4-FFF2-40B4-BE49-F238E27FC236}">
+                <a16:creationId xmlns:a16="http://schemas.microsoft.com/office/drawing/2014/main" id="{397D9907-830C-42C7-82B2-BF0D9CDE0E41}"/>
+              </a:ext>
+            </a:extLst>
+          </p:cNvPr>
+          <p:cNvPicPr>
+            <a:picLocks noChangeAspect="1"/>
+          </p:cNvPicPr>
+          <p:nvPr/>
+        </p:nvPicPr>
+        <p:blipFill>
+          <a:blip r:embed="rId6"/>
+          <a:stretch>
+            <a:fillRect/>
+          </a:stretch>
+        </p:blipFill>
+        <p:spPr>
+          <a:xfrm>
+            <a:off x="4507882" y="1505228"/>
+            <a:ext cx="3532715" cy="3071234"/>
+          </a:xfrm>
+          <a:prstGeom prst="rect">
+            <a:avLst/>
+          </a:prstGeom>
+        </p:spPr>
+      </p:pic>
+      <p:pic>
+        <p:nvPicPr>
+          <p:cNvPr id="11" name="Imagen 10">
+            <a:extLst>
+              <a:ext uri="{FF2B5EF4-FFF2-40B4-BE49-F238E27FC236}">
+                <a16:creationId xmlns:a16="http://schemas.microsoft.com/office/drawing/2014/main" id="{584ED37E-FEAF-4781-852E-2D9DA23DA9AD}"/>
+              </a:ext>
+            </a:extLst>
+          </p:cNvPr>
+          <p:cNvPicPr>
+            <a:picLocks noChangeAspect="1"/>
+          </p:cNvPicPr>
+          <p:nvPr/>
+        </p:nvPicPr>
+        <p:blipFill>
+          <a:blip r:embed="rId7"/>
+          <a:stretch>
+            <a:fillRect/>
+          </a:stretch>
+        </p:blipFill>
+        <p:spPr>
+          <a:xfrm>
+            <a:off x="8242428" y="1493840"/>
+            <a:ext cx="3505470" cy="3071234"/>
+          </a:xfrm>
+          <a:prstGeom prst="rect">
+            <a:avLst/>
+          </a:prstGeom>
+        </p:spPr>
+      </p:pic>
     </p:spTree>
     <p:extLst>
       <p:ext uri="{BB962C8B-B14F-4D97-AF65-F5344CB8AC3E}">
@@ -5600,7 +6614,7 @@
 </p:sld>
 </file>
 
-<file path=ppt/slides/slide13.xml><?xml version="1.0" encoding="utf-8"?>
+<file path=ppt/slides/slide14.xml><?xml version="1.0" encoding="utf-8"?>
 <p:sld xmlns:a="http://schemas.openxmlformats.org/drawingml/2006/main" xmlns:r="http://schemas.openxmlformats.org/officeDocument/2006/relationships" xmlns:p="http://schemas.openxmlformats.org/presentationml/2006/main">
   <p:cSld>
     <p:spTree>
@@ -5756,7 +6770,7 @@
           <a:p>
             <a:fld id="{B6F15528-21DE-4FAA-801E-634DDDAF4B2B}" type="slidenum">
               <a:rPr lang="es-ES" smtClean="0"/>
-              <a:t>13</a:t>
+              <a:t>14</a:t>
             </a:fld>
             <a:endParaRPr lang="es-ES"/>
           </a:p>
@@ -6019,286 +7033,66 @@
           </a:p>
         </p:txBody>
       </p:sp>
-      <mc:AlternateContent xmlns:mc="http://schemas.openxmlformats.org/markup-compatibility/2006" xmlns:a14="http://schemas.microsoft.com/office/drawing/2010/main">
-        <mc:Choice Requires="a14">
-          <p:sp>
-            <p:nvSpPr>
-              <p:cNvPr id="8" name="CuadroTexto 7">
-                <a:extLst>
-                  <a:ext uri="{FF2B5EF4-FFF2-40B4-BE49-F238E27FC236}">
-                    <a16:creationId xmlns:a16="http://schemas.microsoft.com/office/drawing/2014/main" id="{B08C2240-8810-4E0A-7DCF-E62A8271EA2E}"/>
-                  </a:ext>
-                </a:extLst>
-              </p:cNvPr>
-              <p:cNvSpPr txBox="1"/>
-              <p:nvPr/>
-            </p:nvSpPr>
-            <p:spPr>
-              <a:xfrm>
-                <a:off x="1079403" y="2709096"/>
-                <a:ext cx="4546634" cy="923330"/>
-              </a:xfrm>
-              <a:prstGeom prst="rect">
-                <a:avLst/>
-              </a:prstGeom>
-              <a:noFill/>
-            </p:spPr>
-            <p:txBody>
-              <a:bodyPr wrap="square" rtlCol="0">
-                <a:spAutoFit/>
-              </a:bodyPr>
-              <a:lstStyle/>
-              <a:p>
-                <a:pPr algn="ctr"/>
-                <a:r>
-                  <a:rPr lang="en-US" b="1" dirty="0"/>
-                  <a:t>deep</a:t>
-                </a:r>
-                <a:r>
-                  <a:rPr lang="en-US" dirty="0"/>
-                  <a:t> waveguide</a:t>
-                </a:r>
-              </a:p>
-              <a:p>
-                <a:pPr algn="ctr"/>
-                <a:endParaRPr lang="en-US" dirty="0"/>
-              </a:p>
-              <a:p>
-                <a:pPr algn="ctr"/>
-                <a:r>
-                  <a:rPr lang="en-US" dirty="0"/>
-                  <a:t>Paste </a:t>
-                </a:r>
-                <a14:m>
-                  <m:oMath xmlns:m="http://schemas.openxmlformats.org/officeDocument/2006/math">
-                    <m:sSub>
-                      <m:sSubPr>
-                        <m:ctrlPr>
-                          <a:rPr lang="es-ES" sz="1800" b="0" i="1" smtClean="0">
-                            <a:latin typeface="Cambria Math" panose="02040503050406030204" pitchFamily="18" charset="0"/>
-                          </a:rPr>
-                        </m:ctrlPr>
-                      </m:sSubPr>
-                      <m:e>
-                        <m:r>
-                          <a:rPr lang="es-ES" sz="1800" b="0" i="1" smtClean="0">
-                            <a:latin typeface="Cambria Math" panose="02040503050406030204" pitchFamily="18" charset="0"/>
-                          </a:rPr>
-                          <m:t>𝐿</m:t>
-                        </m:r>
-                      </m:e>
-                      <m:sub>
-                        <m:r>
-                          <a:rPr lang="es-ES" sz="1800" b="0" i="1" smtClean="0">
-                            <a:latin typeface="Cambria Math" panose="02040503050406030204" pitchFamily="18" charset="0"/>
-                          </a:rPr>
-                          <m:t>𝜋</m:t>
-                        </m:r>
-                      </m:sub>
-                    </m:sSub>
-                  </m:oMath>
-                </a14:m>
-                <a:r>
-                  <a:rPr lang="en-US" dirty="0"/>
-                  <a:t> vs </a:t>
-                </a:r>
-                <a:r>
-                  <a:rPr lang="en-US" dirty="0" err="1"/>
-                  <a:t>wvl</a:t>
-                </a:r>
-                <a:r>
-                  <a:rPr lang="en-US" dirty="0"/>
-                  <a:t> for TE and TM plot here</a:t>
-                </a:r>
-              </a:p>
-            </p:txBody>
-          </p:sp>
-        </mc:Choice>
-        <mc:Fallback xmlns="">
-          <p:sp>
-            <p:nvSpPr>
-              <p:cNvPr id="8" name="CuadroTexto 7">
-                <a:extLst>
-                  <a:ext uri="{FF2B5EF4-FFF2-40B4-BE49-F238E27FC236}">
-                    <a16:creationId xmlns:a16="http://schemas.microsoft.com/office/drawing/2014/main" id="{B08C2240-8810-4E0A-7DCF-E62A8271EA2E}"/>
-                  </a:ext>
-                </a:extLst>
-              </p:cNvPr>
-              <p:cNvSpPr txBox="1">
-                <a:spLocks noRot="1" noChangeAspect="1" noMove="1" noResize="1" noEditPoints="1" noAdjustHandles="1" noChangeArrowheads="1" noChangeShapeType="1" noTextEdit="1"/>
-              </p:cNvSpPr>
-              <p:nvPr/>
-            </p:nvSpPr>
-            <p:spPr>
-              <a:xfrm>
-                <a:off x="1079403" y="2709096"/>
-                <a:ext cx="4546634" cy="923330"/>
-              </a:xfrm>
-              <a:prstGeom prst="rect">
-                <a:avLst/>
-              </a:prstGeom>
-              <a:blipFill>
-                <a:blip r:embed="rId5"/>
-                <a:stretch>
-                  <a:fillRect t="-3289" b="-9211"/>
-                </a:stretch>
-              </a:blipFill>
-            </p:spPr>
-            <p:txBody>
-              <a:bodyPr/>
-              <a:lstStyle/>
-              <a:p>
-                <a:r>
-                  <a:rPr lang="es-ES">
-                    <a:noFill/>
-                  </a:rPr>
-                  <a:t> </a:t>
-                </a:r>
-              </a:p>
-            </p:txBody>
-          </p:sp>
-        </mc:Fallback>
-      </mc:AlternateContent>
-      <mc:AlternateContent xmlns:mc="http://schemas.openxmlformats.org/markup-compatibility/2006" xmlns:a14="http://schemas.microsoft.com/office/drawing/2010/main">
-        <mc:Choice Requires="a14">
-          <p:sp>
-            <p:nvSpPr>
-              <p:cNvPr id="9" name="CuadroTexto 8">
-                <a:extLst>
-                  <a:ext uri="{FF2B5EF4-FFF2-40B4-BE49-F238E27FC236}">
-                    <a16:creationId xmlns:a16="http://schemas.microsoft.com/office/drawing/2014/main" id="{BBDDC809-0F06-CBE2-4D1A-3A2FA36C33A8}"/>
-                  </a:ext>
-                </a:extLst>
-              </p:cNvPr>
-              <p:cNvSpPr txBox="1"/>
-              <p:nvPr/>
-            </p:nvSpPr>
-            <p:spPr>
-              <a:xfrm>
-                <a:off x="6883366" y="2709096"/>
-                <a:ext cx="4546634" cy="923330"/>
-              </a:xfrm>
-              <a:prstGeom prst="rect">
-                <a:avLst/>
-              </a:prstGeom>
-              <a:noFill/>
-            </p:spPr>
-            <p:txBody>
-              <a:bodyPr wrap="square" rtlCol="0">
-                <a:spAutoFit/>
-              </a:bodyPr>
-              <a:lstStyle/>
-              <a:p>
-                <a:pPr algn="ctr"/>
-                <a:r>
-                  <a:rPr lang="en-US" b="1" dirty="0"/>
-                  <a:t>shallow</a:t>
-                </a:r>
-                <a:r>
-                  <a:rPr lang="en-US" dirty="0"/>
-                  <a:t> waveguide</a:t>
-                </a:r>
-              </a:p>
-              <a:p>
-                <a:pPr algn="ctr"/>
-                <a:endParaRPr lang="en-US" dirty="0"/>
-              </a:p>
-              <a:p>
-                <a:pPr algn="ctr"/>
-                <a:r>
-                  <a:rPr lang="en-US" dirty="0"/>
-                  <a:t>Paste </a:t>
-                </a:r>
-                <a14:m>
-                  <m:oMath xmlns:m="http://schemas.openxmlformats.org/officeDocument/2006/math">
-                    <m:sSub>
-                      <m:sSubPr>
-                        <m:ctrlPr>
-                          <a:rPr lang="es-ES" sz="1800" b="0" i="1" smtClean="0">
-                            <a:latin typeface="Cambria Math" panose="02040503050406030204" pitchFamily="18" charset="0"/>
-                          </a:rPr>
-                        </m:ctrlPr>
-                      </m:sSubPr>
-                      <m:e>
-                        <m:r>
-                          <a:rPr lang="es-ES" sz="1800" b="0" i="1" smtClean="0">
-                            <a:latin typeface="Cambria Math" panose="02040503050406030204" pitchFamily="18" charset="0"/>
-                          </a:rPr>
-                          <m:t>𝐿</m:t>
-                        </m:r>
-                      </m:e>
-                      <m:sub>
-                        <m:r>
-                          <a:rPr lang="es-ES" sz="1800" b="0" i="1" smtClean="0">
-                            <a:latin typeface="Cambria Math" panose="02040503050406030204" pitchFamily="18" charset="0"/>
-                          </a:rPr>
-                          <m:t>𝜋</m:t>
-                        </m:r>
-                      </m:sub>
-                    </m:sSub>
-                  </m:oMath>
-                </a14:m>
-                <a:r>
-                  <a:rPr lang="en-US" dirty="0"/>
-                  <a:t> vs </a:t>
-                </a:r>
-                <a:r>
-                  <a:rPr lang="en-US" dirty="0" err="1"/>
-                  <a:t>wvl</a:t>
-                </a:r>
-                <a:r>
-                  <a:rPr lang="en-US" dirty="0"/>
-                  <a:t> for TE and TM plot here</a:t>
-                </a:r>
-              </a:p>
-            </p:txBody>
-          </p:sp>
-        </mc:Choice>
-        <mc:Fallback xmlns="">
-          <p:sp>
-            <p:nvSpPr>
-              <p:cNvPr id="9" name="CuadroTexto 8">
-                <a:extLst>
-                  <a:ext uri="{FF2B5EF4-FFF2-40B4-BE49-F238E27FC236}">
-                    <a16:creationId xmlns:a16="http://schemas.microsoft.com/office/drawing/2014/main" id="{BBDDC809-0F06-CBE2-4D1A-3A2FA36C33A8}"/>
-                  </a:ext>
-                </a:extLst>
-              </p:cNvPr>
-              <p:cNvSpPr txBox="1">
-                <a:spLocks noRot="1" noChangeAspect="1" noMove="1" noResize="1" noEditPoints="1" noAdjustHandles="1" noChangeArrowheads="1" noChangeShapeType="1" noTextEdit="1"/>
-              </p:cNvSpPr>
-              <p:nvPr/>
-            </p:nvSpPr>
-            <p:spPr>
-              <a:xfrm>
-                <a:off x="6883366" y="2709096"/>
-                <a:ext cx="4546634" cy="923330"/>
-              </a:xfrm>
-              <a:prstGeom prst="rect">
-                <a:avLst/>
-              </a:prstGeom>
-              <a:blipFill>
-                <a:blip r:embed="rId6"/>
-                <a:stretch>
-                  <a:fillRect t="-3289" b="-9211"/>
-                </a:stretch>
-              </a:blipFill>
-            </p:spPr>
-            <p:txBody>
-              <a:bodyPr/>
-              <a:lstStyle/>
-              <a:p>
-                <a:r>
-                  <a:rPr lang="es-ES">
-                    <a:noFill/>
-                  </a:rPr>
-                  <a:t> </a:t>
-                </a:r>
-              </a:p>
-            </p:txBody>
-          </p:sp>
-        </mc:Fallback>
-      </mc:AlternateContent>
+      <p:pic>
+        <p:nvPicPr>
+          <p:cNvPr id="10" name="Imagen 9">
+            <a:extLst>
+              <a:ext uri="{FF2B5EF4-FFF2-40B4-BE49-F238E27FC236}">
+                <a16:creationId xmlns:a16="http://schemas.microsoft.com/office/drawing/2014/main" id="{842246AD-E019-41EE-9917-5733CB297D21}"/>
+              </a:ext>
+            </a:extLst>
+          </p:cNvPr>
+          <p:cNvPicPr>
+            <a:picLocks noChangeAspect="1"/>
+          </p:cNvPicPr>
+          <p:nvPr/>
+        </p:nvPicPr>
+        <p:blipFill>
+          <a:blip r:embed="rId5"/>
+          <a:stretch>
+            <a:fillRect/>
+          </a:stretch>
+        </p:blipFill>
+        <p:spPr>
+          <a:xfrm>
+            <a:off x="1694980" y="1773176"/>
+            <a:ext cx="3315480" cy="2679473"/>
+          </a:xfrm>
+          <a:prstGeom prst="rect">
+            <a:avLst/>
+          </a:prstGeom>
+        </p:spPr>
+      </p:pic>
+      <p:pic>
+        <p:nvPicPr>
+          <p:cNvPr id="15" name="Imagen 14">
+            <a:extLst>
+              <a:ext uri="{FF2B5EF4-FFF2-40B4-BE49-F238E27FC236}">
+                <a16:creationId xmlns:a16="http://schemas.microsoft.com/office/drawing/2014/main" id="{2AEBC067-D925-4DC1-90D0-CB681548F0E9}"/>
+              </a:ext>
+            </a:extLst>
+          </p:cNvPr>
+          <p:cNvPicPr>
+            <a:picLocks noChangeAspect="1"/>
+          </p:cNvPicPr>
+          <p:nvPr/>
+        </p:nvPicPr>
+        <p:blipFill>
+          <a:blip r:embed="rId6"/>
+          <a:stretch>
+            <a:fillRect/>
+          </a:stretch>
+        </p:blipFill>
+        <p:spPr>
+          <a:xfrm>
+            <a:off x="7466045" y="1838020"/>
+            <a:ext cx="3148793" cy="2544762"/>
+          </a:xfrm>
+          <a:prstGeom prst="rect">
+            <a:avLst/>
+          </a:prstGeom>
+        </p:spPr>
+      </p:pic>
     </p:spTree>
     <p:extLst>
       <p:ext uri="{BB962C8B-B14F-4D97-AF65-F5344CB8AC3E}">
@@ -6312,7 +7106,7 @@
 </p:sld>
 </file>
 
-<file path=ppt/slides/slide14.xml><?xml version="1.0" encoding="utf-8"?>
+<file path=ppt/slides/slide15.xml><?xml version="1.0" encoding="utf-8"?>
 <p:sld xmlns:a="http://schemas.openxmlformats.org/drawingml/2006/main" xmlns:r="http://schemas.openxmlformats.org/officeDocument/2006/relationships" xmlns:p="http://schemas.openxmlformats.org/presentationml/2006/main">
   <p:cSld>
     <p:spTree>
@@ -6465,7 +7259,7 @@
           <a:p>
             <a:fld id="{B6F15528-21DE-4FAA-801E-634DDDAF4B2B}" type="slidenum">
               <a:rPr lang="es-ES" smtClean="0"/>
-              <a:t>14</a:t>
+              <a:t>15</a:t>
             </a:fld>
             <a:endParaRPr lang="es-ES"/>
           </a:p>
@@ -6721,270 +7515,66 @@
           </a:p>
         </p:txBody>
       </p:sp>
-      <mc:AlternateContent xmlns:mc="http://schemas.openxmlformats.org/markup-compatibility/2006" xmlns:a14="http://schemas.microsoft.com/office/drawing/2010/main">
-        <mc:Choice Requires="a14">
-          <p:sp>
-            <p:nvSpPr>
-              <p:cNvPr id="8" name="CuadroTexto 7">
-                <a:extLst>
-                  <a:ext uri="{FF2B5EF4-FFF2-40B4-BE49-F238E27FC236}">
-                    <a16:creationId xmlns:a16="http://schemas.microsoft.com/office/drawing/2014/main" id="{E9BD6C85-02F1-7B54-41E3-E3D9883786D8}"/>
-                  </a:ext>
-                </a:extLst>
-              </p:cNvPr>
-              <p:cNvSpPr txBox="1"/>
-              <p:nvPr/>
-            </p:nvSpPr>
-            <p:spPr>
-              <a:xfrm>
-                <a:off x="1079403" y="2709096"/>
-                <a:ext cx="4546634" cy="923330"/>
-              </a:xfrm>
-              <a:prstGeom prst="rect">
-                <a:avLst/>
-              </a:prstGeom>
-              <a:noFill/>
-            </p:spPr>
-            <p:txBody>
-              <a:bodyPr wrap="square" rtlCol="0">
-                <a:spAutoFit/>
-              </a:bodyPr>
-              <a:lstStyle/>
-              <a:p>
-                <a:pPr algn="ctr"/>
-                <a:r>
-                  <a:rPr lang="en-US" b="1" dirty="0"/>
-                  <a:t>deep</a:t>
-                </a:r>
-                <a:r>
-                  <a:rPr lang="en-US" dirty="0"/>
-                  <a:t> waveguide</a:t>
-                </a:r>
-              </a:p>
-              <a:p>
-                <a:pPr algn="ctr"/>
-                <a:endParaRPr lang="en-US" dirty="0"/>
-              </a:p>
-              <a:p>
-                <a:pPr algn="ctr"/>
-                <a:r>
-                  <a:rPr lang="en-US" dirty="0"/>
-                  <a:t>Paste </a:t>
-                </a:r>
-                <a14:m>
-                  <m:oMath xmlns:m="http://schemas.openxmlformats.org/officeDocument/2006/math">
-                    <m:sSub>
-                      <m:sSubPr>
-                        <m:ctrlPr>
-                          <a:rPr lang="es-ES" sz="1800" b="0" i="1" smtClean="0">
-                            <a:latin typeface="Cambria Math" panose="02040503050406030204" pitchFamily="18" charset="0"/>
-                          </a:rPr>
-                        </m:ctrlPr>
-                      </m:sSubPr>
-                      <m:e>
-                        <m:r>
-                          <a:rPr lang="es-ES" sz="1800" b="0" i="1" smtClean="0">
-                            <a:latin typeface="Cambria Math" panose="02040503050406030204" pitchFamily="18" charset="0"/>
-                          </a:rPr>
-                          <m:t>𝐿</m:t>
-                        </m:r>
-                      </m:e>
-                      <m:sub>
-                        <m:r>
-                          <a:rPr lang="es-ES" sz="1800" b="0" i="1" smtClean="0">
-                            <a:latin typeface="Cambria Math" panose="02040503050406030204" pitchFamily="18" charset="0"/>
-                          </a:rPr>
-                          <m:t>𝜋</m:t>
-                        </m:r>
-                      </m:sub>
-                    </m:sSub>
-                  </m:oMath>
-                </a14:m>
-                <a:r>
-                  <a:rPr lang="en-US" dirty="0"/>
-                  <a:t> vs gap for TE and TM plot here</a:t>
-                </a:r>
-              </a:p>
-            </p:txBody>
-          </p:sp>
-        </mc:Choice>
-        <mc:Fallback xmlns="">
-          <p:sp>
-            <p:nvSpPr>
-              <p:cNvPr id="8" name="CuadroTexto 7">
-                <a:extLst>
-                  <a:ext uri="{FF2B5EF4-FFF2-40B4-BE49-F238E27FC236}">
-                    <a16:creationId xmlns:a16="http://schemas.microsoft.com/office/drawing/2014/main" id="{E9BD6C85-02F1-7B54-41E3-E3D9883786D8}"/>
-                  </a:ext>
-                </a:extLst>
-              </p:cNvPr>
-              <p:cNvSpPr txBox="1">
-                <a:spLocks noRot="1" noChangeAspect="1" noMove="1" noResize="1" noEditPoints="1" noAdjustHandles="1" noChangeArrowheads="1" noChangeShapeType="1" noTextEdit="1"/>
-              </p:cNvSpPr>
-              <p:nvPr/>
-            </p:nvSpPr>
-            <p:spPr>
-              <a:xfrm>
-                <a:off x="1079403" y="2709096"/>
-                <a:ext cx="4546634" cy="923330"/>
-              </a:xfrm>
-              <a:prstGeom prst="rect">
-                <a:avLst/>
-              </a:prstGeom>
-              <a:blipFill>
-                <a:blip r:embed="rId5"/>
-                <a:stretch>
-                  <a:fillRect t="-3289" b="-9211"/>
-                </a:stretch>
-              </a:blipFill>
-            </p:spPr>
-            <p:txBody>
-              <a:bodyPr/>
-              <a:lstStyle/>
-              <a:p>
-                <a:r>
-                  <a:rPr lang="es-ES">
-                    <a:noFill/>
-                  </a:rPr>
-                  <a:t> </a:t>
-                </a:r>
-              </a:p>
-            </p:txBody>
-          </p:sp>
-        </mc:Fallback>
-      </mc:AlternateContent>
-      <mc:AlternateContent xmlns:mc="http://schemas.openxmlformats.org/markup-compatibility/2006" xmlns:a14="http://schemas.microsoft.com/office/drawing/2010/main">
-        <mc:Choice Requires="a14">
-          <p:sp>
-            <p:nvSpPr>
-              <p:cNvPr id="9" name="CuadroTexto 8">
-                <a:extLst>
-                  <a:ext uri="{FF2B5EF4-FFF2-40B4-BE49-F238E27FC236}">
-                    <a16:creationId xmlns:a16="http://schemas.microsoft.com/office/drawing/2014/main" id="{7431A41C-EEB3-44D0-4622-A915E258C8F0}"/>
-                  </a:ext>
-                </a:extLst>
-              </p:cNvPr>
-              <p:cNvSpPr txBox="1"/>
-              <p:nvPr/>
-            </p:nvSpPr>
-            <p:spPr>
-              <a:xfrm>
-                <a:off x="6883366" y="2709096"/>
-                <a:ext cx="4546634" cy="923330"/>
-              </a:xfrm>
-              <a:prstGeom prst="rect">
-                <a:avLst/>
-              </a:prstGeom>
-              <a:noFill/>
-            </p:spPr>
-            <p:txBody>
-              <a:bodyPr wrap="square" rtlCol="0">
-                <a:spAutoFit/>
-              </a:bodyPr>
-              <a:lstStyle/>
-              <a:p>
-                <a:pPr algn="ctr"/>
-                <a:r>
-                  <a:rPr lang="en-US" b="1" dirty="0"/>
-                  <a:t>shallow</a:t>
-                </a:r>
-                <a:r>
-                  <a:rPr lang="en-US" dirty="0"/>
-                  <a:t> waveguide</a:t>
-                </a:r>
-              </a:p>
-              <a:p>
-                <a:pPr algn="ctr"/>
-                <a:endParaRPr lang="en-US" dirty="0"/>
-              </a:p>
-              <a:p>
-                <a:pPr algn="ctr"/>
-                <a:r>
-                  <a:rPr lang="en-US" dirty="0"/>
-                  <a:t>Paste </a:t>
-                </a:r>
-                <a14:m>
-                  <m:oMath xmlns:m="http://schemas.openxmlformats.org/officeDocument/2006/math">
-                    <m:sSub>
-                      <m:sSubPr>
-                        <m:ctrlPr>
-                          <a:rPr lang="es-ES" sz="1800" b="0" i="1" smtClean="0">
-                            <a:latin typeface="Cambria Math" panose="02040503050406030204" pitchFamily="18" charset="0"/>
-                          </a:rPr>
-                        </m:ctrlPr>
-                      </m:sSubPr>
-                      <m:e>
-                        <m:r>
-                          <a:rPr lang="es-ES" sz="1800" b="0" i="1" smtClean="0">
-                            <a:latin typeface="Cambria Math" panose="02040503050406030204" pitchFamily="18" charset="0"/>
-                          </a:rPr>
-                          <m:t>𝐿</m:t>
-                        </m:r>
-                      </m:e>
-                      <m:sub>
-                        <m:r>
-                          <a:rPr lang="es-ES" sz="1800" b="0" i="1" smtClean="0">
-                            <a:latin typeface="Cambria Math" panose="02040503050406030204" pitchFamily="18" charset="0"/>
-                          </a:rPr>
-                          <m:t>𝜋</m:t>
-                        </m:r>
-                      </m:sub>
-                    </m:sSub>
-                  </m:oMath>
-                </a14:m>
-                <a:r>
-                  <a:rPr lang="en-US" dirty="0"/>
-                  <a:t> vs gap for TE and TM plot here</a:t>
-                </a:r>
-              </a:p>
-            </p:txBody>
-          </p:sp>
-        </mc:Choice>
-        <mc:Fallback xmlns="">
-          <p:sp>
-            <p:nvSpPr>
-              <p:cNvPr id="9" name="CuadroTexto 8">
-                <a:extLst>
-                  <a:ext uri="{FF2B5EF4-FFF2-40B4-BE49-F238E27FC236}">
-                    <a16:creationId xmlns:a16="http://schemas.microsoft.com/office/drawing/2014/main" id="{7431A41C-EEB3-44D0-4622-A915E258C8F0}"/>
-                  </a:ext>
-                </a:extLst>
-              </p:cNvPr>
-              <p:cNvSpPr txBox="1">
-                <a:spLocks noRot="1" noChangeAspect="1" noMove="1" noResize="1" noEditPoints="1" noAdjustHandles="1" noChangeArrowheads="1" noChangeShapeType="1" noTextEdit="1"/>
-              </p:cNvSpPr>
-              <p:nvPr/>
-            </p:nvSpPr>
-            <p:spPr>
-              <a:xfrm>
-                <a:off x="6883366" y="2709096"/>
-                <a:ext cx="4546634" cy="923330"/>
-              </a:xfrm>
-              <a:prstGeom prst="rect">
-                <a:avLst/>
-              </a:prstGeom>
-              <a:blipFill>
-                <a:blip r:embed="rId6"/>
-                <a:stretch>
-                  <a:fillRect t="-3289" b="-9211"/>
-                </a:stretch>
-              </a:blipFill>
-            </p:spPr>
-            <p:txBody>
-              <a:bodyPr/>
-              <a:lstStyle/>
-              <a:p>
-                <a:r>
-                  <a:rPr lang="es-ES">
-                    <a:noFill/>
-                  </a:rPr>
-                  <a:t> </a:t>
-                </a:r>
-              </a:p>
-            </p:txBody>
-          </p:sp>
-        </mc:Fallback>
-      </mc:AlternateContent>
+      <p:pic>
+        <p:nvPicPr>
+          <p:cNvPr id="8" name="Imagen 7">
+            <a:extLst>
+              <a:ext uri="{FF2B5EF4-FFF2-40B4-BE49-F238E27FC236}">
+                <a16:creationId xmlns:a16="http://schemas.microsoft.com/office/drawing/2014/main" id="{0F2BDCA1-6DAE-4B85-9FD7-F39B88CF2096}"/>
+              </a:ext>
+            </a:extLst>
+          </p:cNvPr>
+          <p:cNvPicPr>
+            <a:picLocks noChangeAspect="1"/>
+          </p:cNvPicPr>
+          <p:nvPr/>
+        </p:nvPicPr>
+        <p:blipFill>
+          <a:blip r:embed="rId5"/>
+          <a:stretch>
+            <a:fillRect/>
+          </a:stretch>
+        </p:blipFill>
+        <p:spPr>
+          <a:xfrm>
+            <a:off x="1143000" y="1755989"/>
+            <a:ext cx="4605337" cy="2689649"/>
+          </a:xfrm>
+          <a:prstGeom prst="rect">
+            <a:avLst/>
+          </a:prstGeom>
+        </p:spPr>
+      </p:pic>
+      <p:pic>
+        <p:nvPicPr>
+          <p:cNvPr id="12" name="Imagen 11">
+            <a:extLst>
+              <a:ext uri="{FF2B5EF4-FFF2-40B4-BE49-F238E27FC236}">
+                <a16:creationId xmlns:a16="http://schemas.microsoft.com/office/drawing/2014/main" id="{D24767B5-B140-40D6-ADC5-E470E4BA6DCE}"/>
+              </a:ext>
+            </a:extLst>
+          </p:cNvPr>
+          <p:cNvPicPr>
+            <a:picLocks noChangeAspect="1"/>
+          </p:cNvPicPr>
+          <p:nvPr/>
+        </p:nvPicPr>
+        <p:blipFill>
+          <a:blip r:embed="rId6"/>
+          <a:stretch>
+            <a:fillRect/>
+          </a:stretch>
+        </p:blipFill>
+        <p:spPr>
+          <a:xfrm>
+            <a:off x="7005715" y="1924536"/>
+            <a:ext cx="4117976" cy="2405016"/>
+          </a:xfrm>
+          <a:prstGeom prst="rect">
+            <a:avLst/>
+          </a:prstGeom>
+        </p:spPr>
+      </p:pic>
     </p:spTree>
     <p:extLst>
       <p:ext uri="{BB962C8B-B14F-4D97-AF65-F5344CB8AC3E}">
@@ -6998,7 +7588,7 @@
 </p:sld>
 </file>
 
-<file path=ppt/slides/slide15.xml><?xml version="1.0" encoding="utf-8"?>
+<file path=ppt/slides/slide16.xml><?xml version="1.0" encoding="utf-8"?>
 <p:sld xmlns:a="http://schemas.openxmlformats.org/drawingml/2006/main" xmlns:r="http://schemas.openxmlformats.org/officeDocument/2006/relationships" xmlns:p="http://schemas.openxmlformats.org/presentationml/2006/main">
   <p:cSld>
     <p:spTree>
@@ -7148,7 +7738,7 @@
           <a:p>
             <a:fld id="{B6F15528-21DE-4FAA-801E-634DDDAF4B2B}" type="slidenum">
               <a:rPr lang="es-ES" smtClean="0"/>
-              <a:t>15</a:t>
+              <a:t>16</a:t>
             </a:fld>
             <a:endParaRPr lang="es-ES"/>
           </a:p>
@@ -7411,286 +8001,66 @@
           </a:p>
         </p:txBody>
       </p:sp>
-      <mc:AlternateContent xmlns:mc="http://schemas.openxmlformats.org/markup-compatibility/2006" xmlns:a14="http://schemas.microsoft.com/office/drawing/2010/main">
-        <mc:Choice Requires="a14">
-          <p:sp>
-            <p:nvSpPr>
-              <p:cNvPr id="9" name="CuadroTexto 8">
-                <a:extLst>
-                  <a:ext uri="{FF2B5EF4-FFF2-40B4-BE49-F238E27FC236}">
-                    <a16:creationId xmlns:a16="http://schemas.microsoft.com/office/drawing/2014/main" id="{075D03BE-0D6A-89E5-3C68-D7BD97B4676E}"/>
-                  </a:ext>
-                </a:extLst>
-              </p:cNvPr>
-              <p:cNvSpPr txBox="1"/>
-              <p:nvPr/>
-            </p:nvSpPr>
-            <p:spPr>
-              <a:xfrm>
-                <a:off x="1079403" y="2709096"/>
-                <a:ext cx="4546634" cy="923330"/>
-              </a:xfrm>
-              <a:prstGeom prst="rect">
-                <a:avLst/>
-              </a:prstGeom>
-              <a:noFill/>
-            </p:spPr>
-            <p:txBody>
-              <a:bodyPr wrap="square" rtlCol="0">
-                <a:spAutoFit/>
-              </a:bodyPr>
-              <a:lstStyle/>
-              <a:p>
-                <a:pPr algn="ctr"/>
-                <a:r>
-                  <a:rPr lang="en-US" b="1" dirty="0"/>
-                  <a:t>deep</a:t>
-                </a:r>
-                <a:r>
-                  <a:rPr lang="en-US" dirty="0"/>
-                  <a:t> waveguide</a:t>
-                </a:r>
-              </a:p>
-              <a:p>
-                <a:pPr algn="ctr"/>
-                <a:endParaRPr lang="en-US" dirty="0"/>
-              </a:p>
-              <a:p>
-                <a:pPr algn="ctr"/>
-                <a:r>
-                  <a:rPr lang="en-US" dirty="0"/>
-                  <a:t>Paste </a:t>
-                </a:r>
-                <a14:m>
-                  <m:oMath xmlns:m="http://schemas.openxmlformats.org/officeDocument/2006/math">
-                    <m:sSub>
-                      <m:sSubPr>
-                        <m:ctrlPr>
-                          <a:rPr lang="es-ES" sz="1800" b="0" i="1" smtClean="0">
-                            <a:latin typeface="Cambria Math" panose="02040503050406030204" pitchFamily="18" charset="0"/>
-                          </a:rPr>
-                        </m:ctrlPr>
-                      </m:sSubPr>
-                      <m:e>
-                        <m:r>
-                          <a:rPr lang="es-ES" sz="1800" b="0" i="1" smtClean="0">
-                            <a:latin typeface="Cambria Math" panose="02040503050406030204" pitchFamily="18" charset="0"/>
-                          </a:rPr>
-                          <m:t>𝐿</m:t>
-                        </m:r>
-                      </m:e>
-                      <m:sub>
-                        <m:r>
-                          <a:rPr lang="es-ES" sz="1800" b="0" i="1" smtClean="0">
-                            <a:latin typeface="Cambria Math" panose="02040503050406030204" pitchFamily="18" charset="0"/>
-                          </a:rPr>
-                          <m:t>𝜋</m:t>
-                        </m:r>
-                      </m:sub>
-                    </m:sSub>
-                  </m:oMath>
-                </a14:m>
-                <a:r>
-                  <a:rPr lang="en-US" dirty="0"/>
-                  <a:t> vs </a:t>
-                </a:r>
-                <a:r>
-                  <a:rPr lang="en-US" dirty="0" err="1"/>
-                  <a:t>wvl</a:t>
-                </a:r>
-                <a:r>
-                  <a:rPr lang="en-US" dirty="0"/>
-                  <a:t> for TE and TM plot here</a:t>
-                </a:r>
-              </a:p>
-            </p:txBody>
-          </p:sp>
-        </mc:Choice>
-        <mc:Fallback xmlns="">
-          <p:sp>
-            <p:nvSpPr>
-              <p:cNvPr id="9" name="CuadroTexto 8">
-                <a:extLst>
-                  <a:ext uri="{FF2B5EF4-FFF2-40B4-BE49-F238E27FC236}">
-                    <a16:creationId xmlns:a16="http://schemas.microsoft.com/office/drawing/2014/main" id="{075D03BE-0D6A-89E5-3C68-D7BD97B4676E}"/>
-                  </a:ext>
-                </a:extLst>
-              </p:cNvPr>
-              <p:cNvSpPr txBox="1">
-                <a:spLocks noRot="1" noChangeAspect="1" noMove="1" noResize="1" noEditPoints="1" noAdjustHandles="1" noChangeArrowheads="1" noChangeShapeType="1" noTextEdit="1"/>
-              </p:cNvSpPr>
-              <p:nvPr/>
-            </p:nvSpPr>
-            <p:spPr>
-              <a:xfrm>
-                <a:off x="1079403" y="2709096"/>
-                <a:ext cx="4546634" cy="923330"/>
-              </a:xfrm>
-              <a:prstGeom prst="rect">
-                <a:avLst/>
-              </a:prstGeom>
-              <a:blipFill>
-                <a:blip r:embed="rId5"/>
-                <a:stretch>
-                  <a:fillRect t="-3289" b="-9211"/>
-                </a:stretch>
-              </a:blipFill>
-            </p:spPr>
-            <p:txBody>
-              <a:bodyPr/>
-              <a:lstStyle/>
-              <a:p>
-                <a:r>
-                  <a:rPr lang="es-ES">
-                    <a:noFill/>
-                  </a:rPr>
-                  <a:t> </a:t>
-                </a:r>
-              </a:p>
-            </p:txBody>
-          </p:sp>
-        </mc:Fallback>
-      </mc:AlternateContent>
-      <mc:AlternateContent xmlns:mc="http://schemas.openxmlformats.org/markup-compatibility/2006" xmlns:a14="http://schemas.microsoft.com/office/drawing/2010/main">
-        <mc:Choice Requires="a14">
-          <p:sp>
-            <p:nvSpPr>
-              <p:cNvPr id="10" name="CuadroTexto 9">
-                <a:extLst>
-                  <a:ext uri="{FF2B5EF4-FFF2-40B4-BE49-F238E27FC236}">
-                    <a16:creationId xmlns:a16="http://schemas.microsoft.com/office/drawing/2014/main" id="{AC01EDEE-71CC-C570-700B-076F03FCF7E1}"/>
-                  </a:ext>
-                </a:extLst>
-              </p:cNvPr>
-              <p:cNvSpPr txBox="1"/>
-              <p:nvPr/>
-            </p:nvSpPr>
-            <p:spPr>
-              <a:xfrm>
-                <a:off x="6883366" y="2709096"/>
-                <a:ext cx="4546634" cy="923330"/>
-              </a:xfrm>
-              <a:prstGeom prst="rect">
-                <a:avLst/>
-              </a:prstGeom>
-              <a:noFill/>
-            </p:spPr>
-            <p:txBody>
-              <a:bodyPr wrap="square" rtlCol="0">
-                <a:spAutoFit/>
-              </a:bodyPr>
-              <a:lstStyle/>
-              <a:p>
-                <a:pPr algn="ctr"/>
-                <a:r>
-                  <a:rPr lang="en-US" b="1" dirty="0"/>
-                  <a:t>shallow</a:t>
-                </a:r>
-                <a:r>
-                  <a:rPr lang="en-US" dirty="0"/>
-                  <a:t> waveguide</a:t>
-                </a:r>
-              </a:p>
-              <a:p>
-                <a:pPr algn="ctr"/>
-                <a:endParaRPr lang="en-US" dirty="0"/>
-              </a:p>
-              <a:p>
-                <a:pPr algn="ctr"/>
-                <a:r>
-                  <a:rPr lang="en-US" dirty="0"/>
-                  <a:t>Paste </a:t>
-                </a:r>
-                <a14:m>
-                  <m:oMath xmlns:m="http://schemas.openxmlformats.org/officeDocument/2006/math">
-                    <m:sSub>
-                      <m:sSubPr>
-                        <m:ctrlPr>
-                          <a:rPr lang="es-ES" sz="1800" b="0" i="1" smtClean="0">
-                            <a:latin typeface="Cambria Math" panose="02040503050406030204" pitchFamily="18" charset="0"/>
-                          </a:rPr>
-                        </m:ctrlPr>
-                      </m:sSubPr>
-                      <m:e>
-                        <m:r>
-                          <a:rPr lang="es-ES" sz="1800" b="0" i="1" smtClean="0">
-                            <a:latin typeface="Cambria Math" panose="02040503050406030204" pitchFamily="18" charset="0"/>
-                          </a:rPr>
-                          <m:t>𝐿</m:t>
-                        </m:r>
-                      </m:e>
-                      <m:sub>
-                        <m:r>
-                          <a:rPr lang="es-ES" sz="1800" b="0" i="1" smtClean="0">
-                            <a:latin typeface="Cambria Math" panose="02040503050406030204" pitchFamily="18" charset="0"/>
-                          </a:rPr>
-                          <m:t>𝜋</m:t>
-                        </m:r>
-                      </m:sub>
-                    </m:sSub>
-                  </m:oMath>
-                </a14:m>
-                <a:r>
-                  <a:rPr lang="en-US" dirty="0"/>
-                  <a:t> vs </a:t>
-                </a:r>
-                <a:r>
-                  <a:rPr lang="en-US" dirty="0" err="1"/>
-                  <a:t>wvl</a:t>
-                </a:r>
-                <a:r>
-                  <a:rPr lang="en-US" dirty="0"/>
-                  <a:t> for TE and TM plot here</a:t>
-                </a:r>
-              </a:p>
-            </p:txBody>
-          </p:sp>
-        </mc:Choice>
-        <mc:Fallback xmlns="">
-          <p:sp>
-            <p:nvSpPr>
-              <p:cNvPr id="10" name="CuadroTexto 9">
-                <a:extLst>
-                  <a:ext uri="{FF2B5EF4-FFF2-40B4-BE49-F238E27FC236}">
-                    <a16:creationId xmlns:a16="http://schemas.microsoft.com/office/drawing/2014/main" id="{AC01EDEE-71CC-C570-700B-076F03FCF7E1}"/>
-                  </a:ext>
-                </a:extLst>
-              </p:cNvPr>
-              <p:cNvSpPr txBox="1">
-                <a:spLocks noRot="1" noChangeAspect="1" noMove="1" noResize="1" noEditPoints="1" noAdjustHandles="1" noChangeArrowheads="1" noChangeShapeType="1" noTextEdit="1"/>
-              </p:cNvSpPr>
-              <p:nvPr/>
-            </p:nvSpPr>
-            <p:spPr>
-              <a:xfrm>
-                <a:off x="6883366" y="2709096"/>
-                <a:ext cx="4546634" cy="923330"/>
-              </a:xfrm>
-              <a:prstGeom prst="rect">
-                <a:avLst/>
-              </a:prstGeom>
-              <a:blipFill>
-                <a:blip r:embed="rId6"/>
-                <a:stretch>
-                  <a:fillRect t="-3289" b="-9211"/>
-                </a:stretch>
-              </a:blipFill>
-            </p:spPr>
-            <p:txBody>
-              <a:bodyPr/>
-              <a:lstStyle/>
-              <a:p>
-                <a:r>
-                  <a:rPr lang="es-ES">
-                    <a:noFill/>
-                  </a:rPr>
-                  <a:t> </a:t>
-                </a:r>
-              </a:p>
-            </p:txBody>
-          </p:sp>
-        </mc:Fallback>
-      </mc:AlternateContent>
+      <p:pic>
+        <p:nvPicPr>
+          <p:cNvPr id="8" name="Imagen 7">
+            <a:extLst>
+              <a:ext uri="{FF2B5EF4-FFF2-40B4-BE49-F238E27FC236}">
+                <a16:creationId xmlns:a16="http://schemas.microsoft.com/office/drawing/2014/main" id="{AC5B9220-00F9-4646-8B41-A9D8773B5DF2}"/>
+              </a:ext>
+            </a:extLst>
+          </p:cNvPr>
+          <p:cNvPicPr>
+            <a:picLocks noChangeAspect="1"/>
+          </p:cNvPicPr>
+          <p:nvPr/>
+        </p:nvPicPr>
+        <p:blipFill>
+          <a:blip r:embed="rId5"/>
+          <a:stretch>
+            <a:fillRect/>
+          </a:stretch>
+        </p:blipFill>
+        <p:spPr>
+          <a:xfrm>
+            <a:off x="1480148" y="1684666"/>
+            <a:ext cx="3745304" cy="3026844"/>
+          </a:xfrm>
+          <a:prstGeom prst="rect">
+            <a:avLst/>
+          </a:prstGeom>
+        </p:spPr>
+      </p:pic>
+      <p:pic>
+        <p:nvPicPr>
+          <p:cNvPr id="12" name="Imagen 11">
+            <a:extLst>
+              <a:ext uri="{FF2B5EF4-FFF2-40B4-BE49-F238E27FC236}">
+                <a16:creationId xmlns:a16="http://schemas.microsoft.com/office/drawing/2014/main" id="{65422317-38E4-45FD-9E81-3E257AE4D478}"/>
+              </a:ext>
+            </a:extLst>
+          </p:cNvPr>
+          <p:cNvPicPr>
+            <a:picLocks noChangeAspect="1"/>
+          </p:cNvPicPr>
+          <p:nvPr/>
+        </p:nvPicPr>
+        <p:blipFill>
+          <a:blip r:embed="rId6"/>
+          <a:stretch>
+            <a:fillRect/>
+          </a:stretch>
+        </p:blipFill>
+        <p:spPr>
+          <a:xfrm>
+            <a:off x="7261370" y="1601338"/>
+            <a:ext cx="3606666" cy="2914801"/>
+          </a:xfrm>
+          <a:prstGeom prst="rect">
+            <a:avLst/>
+          </a:prstGeom>
+        </p:spPr>
+      </p:pic>
     </p:spTree>
     <p:extLst>
       <p:ext uri="{BB962C8B-B14F-4D97-AF65-F5344CB8AC3E}">
@@ -7704,7 +8074,7 @@
 </p:sld>
 </file>
 
-<file path=ppt/slides/slide16.xml><?xml version="1.0" encoding="utf-8"?>
+<file path=ppt/slides/slide17.xml><?xml version="1.0" encoding="utf-8"?>
 <p:sld xmlns:a="http://schemas.openxmlformats.org/drawingml/2006/main" xmlns:r="http://schemas.openxmlformats.org/officeDocument/2006/relationships" xmlns:p="http://schemas.openxmlformats.org/presentationml/2006/main">
   <p:cSld>
     <p:spTree>
@@ -7854,7 +8224,7 @@
           <a:p>
             <a:fld id="{B6F15528-21DE-4FAA-801E-634DDDAF4B2B}" type="slidenum">
               <a:rPr lang="es-ES" smtClean="0"/>
-              <a:t>16</a:t>
+              <a:t>17</a:t>
             </a:fld>
             <a:endParaRPr lang="es-ES"/>
           </a:p>
@@ -8124,270 +8494,66 @@
           </a:p>
         </p:txBody>
       </p:sp>
-      <mc:AlternateContent xmlns:mc="http://schemas.openxmlformats.org/markup-compatibility/2006" xmlns:a14="http://schemas.microsoft.com/office/drawing/2010/main">
-        <mc:Choice Requires="a14">
-          <p:sp>
-            <p:nvSpPr>
-              <p:cNvPr id="9" name="CuadroTexto 8">
-                <a:extLst>
-                  <a:ext uri="{FF2B5EF4-FFF2-40B4-BE49-F238E27FC236}">
-                    <a16:creationId xmlns:a16="http://schemas.microsoft.com/office/drawing/2014/main" id="{2BDFECD2-156D-6697-CFBF-8CD783F9B986}"/>
-                  </a:ext>
-                </a:extLst>
-              </p:cNvPr>
-              <p:cNvSpPr txBox="1"/>
-              <p:nvPr/>
-            </p:nvSpPr>
-            <p:spPr>
-              <a:xfrm>
-                <a:off x="1079403" y="2709096"/>
-                <a:ext cx="4546634" cy="923330"/>
-              </a:xfrm>
-              <a:prstGeom prst="rect">
-                <a:avLst/>
-              </a:prstGeom>
-              <a:noFill/>
-            </p:spPr>
-            <p:txBody>
-              <a:bodyPr wrap="square" rtlCol="0">
-                <a:spAutoFit/>
-              </a:bodyPr>
-              <a:lstStyle/>
-              <a:p>
-                <a:pPr algn="ctr"/>
-                <a:r>
-                  <a:rPr lang="en-US" b="1" dirty="0"/>
-                  <a:t>deep</a:t>
-                </a:r>
-                <a:r>
-                  <a:rPr lang="en-US" dirty="0"/>
-                  <a:t> waveguide</a:t>
-                </a:r>
-              </a:p>
-              <a:p>
-                <a:pPr algn="ctr"/>
-                <a:endParaRPr lang="en-US" dirty="0"/>
-              </a:p>
-              <a:p>
-                <a:pPr algn="ctr"/>
-                <a:r>
-                  <a:rPr lang="en-US" dirty="0"/>
-                  <a:t>Paste </a:t>
-                </a:r>
-                <a14:m>
-                  <m:oMath xmlns:m="http://schemas.openxmlformats.org/officeDocument/2006/math">
-                    <m:sSub>
-                      <m:sSubPr>
-                        <m:ctrlPr>
-                          <a:rPr lang="es-ES" sz="1800" b="0" i="1" smtClean="0">
-                            <a:latin typeface="Cambria Math" panose="02040503050406030204" pitchFamily="18" charset="0"/>
-                          </a:rPr>
-                        </m:ctrlPr>
-                      </m:sSubPr>
-                      <m:e>
-                        <m:r>
-                          <a:rPr lang="es-ES" sz="1800" b="0" i="1" smtClean="0">
-                            <a:latin typeface="Cambria Math" panose="02040503050406030204" pitchFamily="18" charset="0"/>
-                          </a:rPr>
-                          <m:t>𝐿</m:t>
-                        </m:r>
-                      </m:e>
-                      <m:sub>
-                        <m:r>
-                          <a:rPr lang="es-ES" sz="1800" b="0" i="1" smtClean="0">
-                            <a:latin typeface="Cambria Math" panose="02040503050406030204" pitchFamily="18" charset="0"/>
-                          </a:rPr>
-                          <m:t>𝜋</m:t>
-                        </m:r>
-                      </m:sub>
-                    </m:sSub>
-                  </m:oMath>
-                </a14:m>
-                <a:r>
-                  <a:rPr lang="en-US" dirty="0"/>
-                  <a:t> vs width for TE and TM plot here</a:t>
-                </a:r>
-              </a:p>
-            </p:txBody>
-          </p:sp>
-        </mc:Choice>
-        <mc:Fallback xmlns="">
-          <p:sp>
-            <p:nvSpPr>
-              <p:cNvPr id="9" name="CuadroTexto 8">
-                <a:extLst>
-                  <a:ext uri="{FF2B5EF4-FFF2-40B4-BE49-F238E27FC236}">
-                    <a16:creationId xmlns:a16="http://schemas.microsoft.com/office/drawing/2014/main" id="{2BDFECD2-156D-6697-CFBF-8CD783F9B986}"/>
-                  </a:ext>
-                </a:extLst>
-              </p:cNvPr>
-              <p:cNvSpPr txBox="1">
-                <a:spLocks noRot="1" noChangeAspect="1" noMove="1" noResize="1" noEditPoints="1" noAdjustHandles="1" noChangeArrowheads="1" noChangeShapeType="1" noTextEdit="1"/>
-              </p:cNvSpPr>
-              <p:nvPr/>
-            </p:nvSpPr>
-            <p:spPr>
-              <a:xfrm>
-                <a:off x="1079403" y="2709096"/>
-                <a:ext cx="4546634" cy="923330"/>
-              </a:xfrm>
-              <a:prstGeom prst="rect">
-                <a:avLst/>
-              </a:prstGeom>
-              <a:blipFill>
-                <a:blip r:embed="rId5"/>
-                <a:stretch>
-                  <a:fillRect t="-3289" b="-9211"/>
-                </a:stretch>
-              </a:blipFill>
-            </p:spPr>
-            <p:txBody>
-              <a:bodyPr/>
-              <a:lstStyle/>
-              <a:p>
-                <a:r>
-                  <a:rPr lang="es-ES">
-                    <a:noFill/>
-                  </a:rPr>
-                  <a:t> </a:t>
-                </a:r>
-              </a:p>
-            </p:txBody>
-          </p:sp>
-        </mc:Fallback>
-      </mc:AlternateContent>
-      <mc:AlternateContent xmlns:mc="http://schemas.openxmlformats.org/markup-compatibility/2006" xmlns:a14="http://schemas.microsoft.com/office/drawing/2010/main">
-        <mc:Choice Requires="a14">
-          <p:sp>
-            <p:nvSpPr>
-              <p:cNvPr id="10" name="CuadroTexto 9">
-                <a:extLst>
-                  <a:ext uri="{FF2B5EF4-FFF2-40B4-BE49-F238E27FC236}">
-                    <a16:creationId xmlns:a16="http://schemas.microsoft.com/office/drawing/2014/main" id="{3BFC64CA-DE35-A528-CF09-36A26DB3DEE4}"/>
-                  </a:ext>
-                </a:extLst>
-              </p:cNvPr>
-              <p:cNvSpPr txBox="1"/>
-              <p:nvPr/>
-            </p:nvSpPr>
-            <p:spPr>
-              <a:xfrm>
-                <a:off x="6883366" y="2709096"/>
-                <a:ext cx="4546634" cy="923330"/>
-              </a:xfrm>
-              <a:prstGeom prst="rect">
-                <a:avLst/>
-              </a:prstGeom>
-              <a:noFill/>
-            </p:spPr>
-            <p:txBody>
-              <a:bodyPr wrap="square" rtlCol="0">
-                <a:spAutoFit/>
-              </a:bodyPr>
-              <a:lstStyle/>
-              <a:p>
-                <a:pPr algn="ctr"/>
-                <a:r>
-                  <a:rPr lang="en-US" b="1" dirty="0"/>
-                  <a:t>shallow</a:t>
-                </a:r>
-                <a:r>
-                  <a:rPr lang="en-US" dirty="0"/>
-                  <a:t> waveguide</a:t>
-                </a:r>
-              </a:p>
-              <a:p>
-                <a:pPr algn="ctr"/>
-                <a:endParaRPr lang="en-US" dirty="0"/>
-              </a:p>
-              <a:p>
-                <a:pPr algn="ctr"/>
-                <a:r>
-                  <a:rPr lang="en-US" dirty="0"/>
-                  <a:t>Paste </a:t>
-                </a:r>
-                <a14:m>
-                  <m:oMath xmlns:m="http://schemas.openxmlformats.org/officeDocument/2006/math">
-                    <m:sSub>
-                      <m:sSubPr>
-                        <m:ctrlPr>
-                          <a:rPr lang="es-ES" sz="1800" b="0" i="1" smtClean="0">
-                            <a:latin typeface="Cambria Math" panose="02040503050406030204" pitchFamily="18" charset="0"/>
-                          </a:rPr>
-                        </m:ctrlPr>
-                      </m:sSubPr>
-                      <m:e>
-                        <m:r>
-                          <a:rPr lang="es-ES" sz="1800" b="0" i="1" smtClean="0">
-                            <a:latin typeface="Cambria Math" panose="02040503050406030204" pitchFamily="18" charset="0"/>
-                          </a:rPr>
-                          <m:t>𝐿</m:t>
-                        </m:r>
-                      </m:e>
-                      <m:sub>
-                        <m:r>
-                          <a:rPr lang="es-ES" sz="1800" b="0" i="1" smtClean="0">
-                            <a:latin typeface="Cambria Math" panose="02040503050406030204" pitchFamily="18" charset="0"/>
-                          </a:rPr>
-                          <m:t>𝜋</m:t>
-                        </m:r>
-                      </m:sub>
-                    </m:sSub>
-                  </m:oMath>
-                </a14:m>
-                <a:r>
-                  <a:rPr lang="en-US" dirty="0"/>
-                  <a:t> vs width for TE and TM plot here</a:t>
-                </a:r>
-              </a:p>
-            </p:txBody>
-          </p:sp>
-        </mc:Choice>
-        <mc:Fallback xmlns="">
-          <p:sp>
-            <p:nvSpPr>
-              <p:cNvPr id="10" name="CuadroTexto 9">
-                <a:extLst>
-                  <a:ext uri="{FF2B5EF4-FFF2-40B4-BE49-F238E27FC236}">
-                    <a16:creationId xmlns:a16="http://schemas.microsoft.com/office/drawing/2014/main" id="{3BFC64CA-DE35-A528-CF09-36A26DB3DEE4}"/>
-                  </a:ext>
-                </a:extLst>
-              </p:cNvPr>
-              <p:cNvSpPr txBox="1">
-                <a:spLocks noRot="1" noChangeAspect="1" noMove="1" noResize="1" noEditPoints="1" noAdjustHandles="1" noChangeArrowheads="1" noChangeShapeType="1" noTextEdit="1"/>
-              </p:cNvSpPr>
-              <p:nvPr/>
-            </p:nvSpPr>
-            <p:spPr>
-              <a:xfrm>
-                <a:off x="6883366" y="2709096"/>
-                <a:ext cx="4546634" cy="923330"/>
-              </a:xfrm>
-              <a:prstGeom prst="rect">
-                <a:avLst/>
-              </a:prstGeom>
-              <a:blipFill>
-                <a:blip r:embed="rId6"/>
-                <a:stretch>
-                  <a:fillRect t="-3289" b="-9211"/>
-                </a:stretch>
-              </a:blipFill>
-            </p:spPr>
-            <p:txBody>
-              <a:bodyPr/>
-              <a:lstStyle/>
-              <a:p>
-                <a:r>
-                  <a:rPr lang="es-ES">
-                    <a:noFill/>
-                  </a:rPr>
-                  <a:t> </a:t>
-                </a:r>
-              </a:p>
-            </p:txBody>
-          </p:sp>
-        </mc:Fallback>
-      </mc:AlternateContent>
+      <p:pic>
+        <p:nvPicPr>
+          <p:cNvPr id="8" name="Imagen 7">
+            <a:extLst>
+              <a:ext uri="{FF2B5EF4-FFF2-40B4-BE49-F238E27FC236}">
+                <a16:creationId xmlns:a16="http://schemas.microsoft.com/office/drawing/2014/main" id="{B273895C-AFFE-4778-B2E7-0F8686DBAEBA}"/>
+              </a:ext>
+            </a:extLst>
+          </p:cNvPr>
+          <p:cNvPicPr>
+            <a:picLocks noChangeAspect="1"/>
+          </p:cNvPicPr>
+          <p:nvPr/>
+        </p:nvPicPr>
+        <p:blipFill>
+          <a:blip r:embed="rId5"/>
+          <a:stretch>
+            <a:fillRect/>
+          </a:stretch>
+        </p:blipFill>
+        <p:spPr>
+          <a:xfrm>
+            <a:off x="1600200" y="1677685"/>
+            <a:ext cx="3747456" cy="2986151"/>
+          </a:xfrm>
+          <a:prstGeom prst="rect">
+            <a:avLst/>
+          </a:prstGeom>
+        </p:spPr>
+      </p:pic>
+      <p:pic>
+        <p:nvPicPr>
+          <p:cNvPr id="14" name="Imagen 13">
+            <a:extLst>
+              <a:ext uri="{FF2B5EF4-FFF2-40B4-BE49-F238E27FC236}">
+                <a16:creationId xmlns:a16="http://schemas.microsoft.com/office/drawing/2014/main" id="{D2122AF8-D6F1-4D6C-96F0-0FEA13AB06F9}"/>
+              </a:ext>
+            </a:extLst>
+          </p:cNvPr>
+          <p:cNvPicPr>
+            <a:picLocks noChangeAspect="1"/>
+          </p:cNvPicPr>
+          <p:nvPr/>
+        </p:nvPicPr>
+        <p:blipFill>
+          <a:blip r:embed="rId6"/>
+          <a:stretch>
+            <a:fillRect/>
+          </a:stretch>
+        </p:blipFill>
+        <p:spPr>
+          <a:xfrm>
+            <a:off x="7269480" y="1777122"/>
+            <a:ext cx="3322320" cy="2647383"/>
+          </a:xfrm>
+          <a:prstGeom prst="rect">
+            <a:avLst/>
+          </a:prstGeom>
+        </p:spPr>
+      </p:pic>
     </p:spTree>
     <p:extLst>
       <p:ext uri="{BB962C8B-B14F-4D97-AF65-F5344CB8AC3E}">
@@ -8401,7 +8567,7 @@
 </p:sld>
 </file>
 
-<file path=ppt/slides/slide17.xml><?xml version="1.0" encoding="utf-8"?>
+<file path=ppt/slides/slide18.xml><?xml version="1.0" encoding="utf-8"?>
 <p:sld xmlns:a="http://schemas.openxmlformats.org/drawingml/2006/main" xmlns:r="http://schemas.openxmlformats.org/officeDocument/2006/relationships" xmlns:p="http://schemas.openxmlformats.org/presentationml/2006/main">
   <p:cSld>
     <p:spTree>
@@ -8540,7 +8706,7 @@
           <a:p>
             <a:fld id="{B6F15528-21DE-4FAA-801E-634DDDAF4B2B}" type="slidenum">
               <a:rPr lang="es-ES" smtClean="0"/>
-              <a:t>17</a:t>
+              <a:t>18</a:t>
             </a:fld>
             <a:endParaRPr lang="es-ES"/>
           </a:p>
@@ -11729,7 +11895,7 @@
         <p:spPr>
           <a:xfrm>
             <a:off x="609441" y="4860334"/>
-            <a:ext cx="11199971" cy="1384995"/>
+            <a:ext cx="11199971" cy="1200329"/>
           </a:xfrm>
           <a:prstGeom prst="rect">
             <a:avLst/>
@@ -11750,16 +11916,6 @@
             <a:spAutoFit/>
           </a:bodyPr>
           <a:lstStyle/>
-          <a:p>
-            <a:pPr algn="just"/>
-            <a:r>
-              <a:rPr lang="en-US" sz="1200" dirty="0">
-                <a:latin typeface="Arial" panose="020B0604020202020204" pitchFamily="34" charset="0"/>
-                <a:cs typeface="Arial" panose="020B0604020202020204" pitchFamily="34" charset="0"/>
-              </a:rPr>
-              <a:t>GAP = 0.6</a:t>
-            </a:r>
-          </a:p>
           <a:p>
             <a:pPr algn="just"/>
             <a:r>
@@ -12679,198 +12835,20 @@
       </p:sp>
       <p:sp>
         <p:nvSpPr>
-          <p:cNvPr id="2" name="CuadroTexto 1">
-            <a:extLst>
-              <a:ext uri="{FF2B5EF4-FFF2-40B4-BE49-F238E27FC236}">
-                <a16:creationId xmlns:a16="http://schemas.microsoft.com/office/drawing/2014/main" id="{82A62DD6-5488-72A1-9926-0CAEE59089A9}"/>
-              </a:ext>
-            </a:extLst>
-          </p:cNvPr>
-          <p:cNvSpPr txBox="1"/>
+          <p:cNvPr id="7" name="Rectángulo 6">
+            <a:extLst>
+              <a:ext uri="{FF2B5EF4-FFF2-40B4-BE49-F238E27FC236}">
+                <a16:creationId xmlns:a16="http://schemas.microsoft.com/office/drawing/2014/main" id="{FBC7D187-267A-ADD4-764C-D3820B8ED302}"/>
+              </a:ext>
+            </a:extLst>
+          </p:cNvPr>
+          <p:cNvSpPr/>
           <p:nvPr/>
         </p:nvSpPr>
         <p:spPr>
           <a:xfrm>
-            <a:off x="609441" y="4860334"/>
-            <a:ext cx="11199971" cy="1569660"/>
-          </a:xfrm>
-          <a:prstGeom prst="rect">
-            <a:avLst/>
-          </a:prstGeom>
-          <a:solidFill>
-            <a:schemeClr val="bg1">
-              <a:lumMod val="95000"/>
-            </a:schemeClr>
-          </a:solidFill>
-          <a:ln w="28575">
-            <a:solidFill>
-              <a:srgbClr val="E0700D"/>
-            </a:solidFill>
-          </a:ln>
-        </p:spPr>
-        <p:txBody>
-          <a:bodyPr wrap="square" rtlCol="0">
-            <a:spAutoFit/>
-          </a:bodyPr>
-          <a:lstStyle/>
-          <a:p>
-            <a:pPr algn="just"/>
-            <a:r>
-              <a:rPr lang="en-US" sz="1200" dirty="0" err="1">
-                <a:latin typeface="Arial" panose="020B0604020202020204" pitchFamily="34" charset="0"/>
-                <a:cs typeface="Arial" panose="020B0604020202020204" pitchFamily="34" charset="0"/>
-              </a:rPr>
-              <a:t>Hace</a:t>
-            </a:r>
-            <a:r>
-              <a:rPr lang="en-US" sz="1200" dirty="0">
-                <a:latin typeface="Arial" panose="020B0604020202020204" pitchFamily="34" charset="0"/>
-                <a:cs typeface="Arial" panose="020B0604020202020204" pitchFamily="34" charset="0"/>
-              </a:rPr>
-              <a:t> </a:t>
-            </a:r>
-            <a:r>
-              <a:rPr lang="en-US" sz="1200" dirty="0" err="1">
-                <a:latin typeface="Arial" panose="020B0604020202020204" pitchFamily="34" charset="0"/>
-                <a:cs typeface="Arial" panose="020B0604020202020204" pitchFamily="34" charset="0"/>
-              </a:rPr>
-              <a:t>todos</a:t>
-            </a:r>
-            <a:r>
-              <a:rPr lang="en-US" sz="1200" dirty="0">
-                <a:latin typeface="Arial" panose="020B0604020202020204" pitchFamily="34" charset="0"/>
-                <a:cs typeface="Arial" panose="020B0604020202020204" pitchFamily="34" charset="0"/>
-              </a:rPr>
-              <a:t> los </a:t>
-            </a:r>
-            <a:r>
-              <a:rPr lang="en-US" sz="1200" dirty="0" err="1">
-                <a:latin typeface="Arial" panose="020B0604020202020204" pitchFamily="34" charset="0"/>
-                <a:cs typeface="Arial" panose="020B0604020202020204" pitchFamily="34" charset="0"/>
-              </a:rPr>
-              <a:t>casos</a:t>
-            </a:r>
-            <a:r>
-              <a:rPr lang="en-US" sz="1200" dirty="0">
-                <a:latin typeface="Arial" panose="020B0604020202020204" pitchFamily="34" charset="0"/>
-                <a:cs typeface="Arial" panose="020B0604020202020204" pitchFamily="34" charset="0"/>
-              </a:rPr>
-              <a:t> y </a:t>
-            </a:r>
-            <a:r>
-              <a:rPr lang="en-US" sz="1200" dirty="0" err="1">
-                <a:latin typeface="Arial" panose="020B0604020202020204" pitchFamily="34" charset="0"/>
-                <a:cs typeface="Arial" panose="020B0604020202020204" pitchFamily="34" charset="0"/>
-              </a:rPr>
-              <a:t>apuntarlos</a:t>
-            </a:r>
-            <a:r>
-              <a:rPr lang="en-US" sz="1200" dirty="0">
-                <a:latin typeface="Arial" panose="020B0604020202020204" pitchFamily="34" charset="0"/>
-                <a:cs typeface="Arial" panose="020B0604020202020204" pitchFamily="34" charset="0"/>
-              </a:rPr>
-              <a:t> </a:t>
-            </a:r>
-            <a:r>
-              <a:rPr lang="en-US" sz="1200" dirty="0" err="1">
-                <a:latin typeface="Arial" panose="020B0604020202020204" pitchFamily="34" charset="0"/>
-                <a:cs typeface="Arial" panose="020B0604020202020204" pitchFamily="34" charset="0"/>
-              </a:rPr>
-              <a:t>en</a:t>
-            </a:r>
-            <a:r>
-              <a:rPr lang="en-US" sz="1200" dirty="0">
-                <a:latin typeface="Arial" panose="020B0604020202020204" pitchFamily="34" charset="0"/>
-                <a:cs typeface="Arial" panose="020B0604020202020204" pitchFamily="34" charset="0"/>
-              </a:rPr>
-              <a:t> la table </a:t>
-            </a:r>
-            <a:r>
-              <a:rPr lang="en-US" sz="1200" dirty="0" err="1">
-                <a:latin typeface="Arial" panose="020B0604020202020204" pitchFamily="34" charset="0"/>
-                <a:cs typeface="Arial" panose="020B0604020202020204" pitchFamily="34" charset="0"/>
-              </a:rPr>
-              <a:t>manuelamente</a:t>
-            </a:r>
-            <a:r>
-              <a:rPr lang="en-US" sz="1200">
-                <a:latin typeface="Arial" panose="020B0604020202020204" pitchFamily="34" charset="0"/>
-                <a:cs typeface="Arial" panose="020B0604020202020204" pitchFamily="34" charset="0"/>
-              </a:rPr>
-              <a:t>.</a:t>
-            </a:r>
-            <a:endParaRPr lang="en-US" sz="1200" dirty="0">
-              <a:latin typeface="Arial" panose="020B0604020202020204" pitchFamily="34" charset="0"/>
-              <a:cs typeface="Arial" panose="020B0604020202020204" pitchFamily="34" charset="0"/>
-            </a:endParaRPr>
-          </a:p>
-          <a:p>
-            <a:pPr algn="just"/>
-            <a:endParaRPr lang="en-US" sz="1200" dirty="0">
-              <a:latin typeface="Arial" panose="020B0604020202020204" pitchFamily="34" charset="0"/>
-              <a:cs typeface="Arial" panose="020B0604020202020204" pitchFamily="34" charset="0"/>
-            </a:endParaRPr>
-          </a:p>
-          <a:p>
-            <a:pPr algn="just"/>
-            <a:endParaRPr lang="en-US" sz="1200" dirty="0">
-              <a:latin typeface="Arial" panose="020B0604020202020204" pitchFamily="34" charset="0"/>
-              <a:cs typeface="Arial" panose="020B0604020202020204" pitchFamily="34" charset="0"/>
-            </a:endParaRPr>
-          </a:p>
-          <a:p>
-            <a:pPr algn="just"/>
-            <a:endParaRPr lang="en-US" sz="1200" dirty="0">
-              <a:latin typeface="Arial" panose="020B0604020202020204" pitchFamily="34" charset="0"/>
-              <a:cs typeface="Arial" panose="020B0604020202020204" pitchFamily="34" charset="0"/>
-            </a:endParaRPr>
-          </a:p>
-          <a:p>
-            <a:pPr algn="just"/>
-            <a:endParaRPr lang="en-US" sz="1200" dirty="0">
-              <a:latin typeface="Arial" panose="020B0604020202020204" pitchFamily="34" charset="0"/>
-              <a:cs typeface="Arial" panose="020B0604020202020204" pitchFamily="34" charset="0"/>
-            </a:endParaRPr>
-          </a:p>
-          <a:p>
-            <a:pPr algn="just"/>
-            <a:endParaRPr lang="en-US" sz="1200" dirty="0">
-              <a:latin typeface="Arial" panose="020B0604020202020204" pitchFamily="34" charset="0"/>
-              <a:cs typeface="Arial" panose="020B0604020202020204" pitchFamily="34" charset="0"/>
-            </a:endParaRPr>
-          </a:p>
-          <a:p>
-            <a:pPr algn="just"/>
-            <a:endParaRPr lang="en-US" sz="1200" dirty="0">
-              <a:latin typeface="Arial" panose="020B0604020202020204" pitchFamily="34" charset="0"/>
-              <a:cs typeface="Arial" panose="020B0604020202020204" pitchFamily="34" charset="0"/>
-            </a:endParaRPr>
-          </a:p>
-          <a:p>
-            <a:pPr algn="just"/>
-            <a:endParaRPr lang="en-US" sz="1200" dirty="0">
-              <a:latin typeface="Arial" panose="020B0604020202020204" pitchFamily="34" charset="0"/>
-              <a:cs typeface="Arial" panose="020B0604020202020204" pitchFamily="34" charset="0"/>
-            </a:endParaRPr>
-          </a:p>
-        </p:txBody>
-      </p:sp>
-      <p:sp>
-        <p:nvSpPr>
-          <p:cNvPr id="7" name="Rectángulo 6">
-            <a:extLst>
-              <a:ext uri="{FF2B5EF4-FFF2-40B4-BE49-F238E27FC236}">
-                <a16:creationId xmlns:a16="http://schemas.microsoft.com/office/drawing/2014/main" id="{FBC7D187-267A-ADD4-764C-D3820B8ED302}"/>
-              </a:ext>
-            </a:extLst>
-          </p:cNvPr>
-          <p:cNvSpPr/>
-          <p:nvPr/>
-        </p:nvSpPr>
-        <p:spPr>
-          <a:xfrm>
-            <a:off x="609441" y="1418373"/>
-            <a:ext cx="11199971" cy="3306028"/>
+            <a:off x="609441" y="1418372"/>
+            <a:ext cx="11199971" cy="4830027"/>
           </a:xfrm>
           <a:prstGeom prst="rect">
             <a:avLst/>
@@ -12929,8 +12907,8 @@
         </p:blipFill>
         <p:spPr>
           <a:xfrm>
-            <a:off x="1371600" y="1435306"/>
-            <a:ext cx="2676664" cy="3262981"/>
+            <a:off x="1768406" y="1836219"/>
+            <a:ext cx="3276600" cy="3994332"/>
           </a:xfrm>
           <a:prstGeom prst="rect">
             <a:avLst/>
@@ -12952,14 +12930,14 @@
           <p:nvPr>
             <p:extLst>
               <p:ext uri="{D42A27DB-BD31-4B8C-83A1-F6EECF244321}">
-                <p14:modId xmlns:p14="http://schemas.microsoft.com/office/powerpoint/2010/main" val="2144816584"/>
+                <p14:modId xmlns:p14="http://schemas.microsoft.com/office/powerpoint/2010/main" val="1854595833"/>
               </p:ext>
             </p:extLst>
           </p:nvPr>
         </p:nvGraphicFramePr>
         <p:xfrm>
-          <a:off x="6035538" y="60961"/>
-          <a:ext cx="4216400" cy="4663440"/>
+          <a:off x="7562306" y="1501665"/>
+          <a:ext cx="3162300" cy="4663440"/>
         </p:xfrm>
         <a:graphic>
           <a:graphicData uri="http://schemas.openxmlformats.org/drawingml/2006/table">
@@ -12986,13 +12964,6 @@
                   <a:extLst>
                     <a:ext uri="{9D8B030D-6E8A-4147-A177-3AD203B41FA5}">
                       <a16:colId xmlns:a16="http://schemas.microsoft.com/office/drawing/2014/main" val="3236221254"/>
-                    </a:ext>
-                  </a:extLst>
-                </a:gridCol>
-                <a:gridCol w="1054100">
-                  <a:extLst>
-                    <a:ext uri="{9D8B030D-6E8A-4147-A177-3AD203B41FA5}">
-                      <a16:colId xmlns:a16="http://schemas.microsoft.com/office/drawing/2014/main" val="3664213930"/>
                     </a:ext>
                   </a:extLst>
                 </a:gridCol>
@@ -13049,23 +13020,6 @@
                   </a:txBody>
                   <a:tcPr/>
                 </a:tc>
-                <a:tc>
-                  <a:txBody>
-                    <a:bodyPr/>
-                    <a:lstStyle/>
-                    <a:p>
-                      <a:r>
-                        <a:rPr lang="es-ES" dirty="0" err="1"/>
-                        <a:t>L_pi</a:t>
-                      </a:r>
-                      <a:r>
-                        <a:rPr lang="es-ES" dirty="0"/>
-                        <a:t>/2 RATIO</a:t>
-                      </a:r>
-                    </a:p>
-                  </a:txBody>
-                  <a:tcPr/>
-                </a:tc>
                 <a:extLst>
                   <a:ext uri="{0D108BD9-81ED-4DB2-BD59-A6C34878D82A}">
                     <a16:rowId xmlns:a16="http://schemas.microsoft.com/office/drawing/2014/main" val="2740672354"/>
@@ -13078,7 +13032,11 @@
                     <a:bodyPr/>
                     <a:lstStyle/>
                     <a:p>
-                      <a:endParaRPr lang="es-ES" dirty="0"/>
+                      <a:pPr algn="ctr"/>
+                      <a:r>
+                        <a:rPr lang="es-ES" dirty="0"/>
+                        <a:t>0,6</a:t>
+                      </a:r>
                     </a:p>
                   </a:txBody>
                   <a:tcPr/>
@@ -13088,7 +13046,11 @@
                     <a:bodyPr/>
                     <a:lstStyle/>
                     <a:p>
-                      <a:endParaRPr lang="es-ES"/>
+                      <a:pPr algn="ctr"/>
+                      <a:r>
+                        <a:rPr lang="es-ES" dirty="0"/>
+                        <a:t>0.1851</a:t>
+                      </a:r>
                     </a:p>
                   </a:txBody>
                   <a:tcPr/>
@@ -13098,17 +13060,11 @@
                     <a:bodyPr/>
                     <a:lstStyle/>
                     <a:p>
-                      <a:endParaRPr lang="es-ES"/>
-                    </a:p>
-                  </a:txBody>
-                  <a:tcPr/>
-                </a:tc>
-                <a:tc>
-                  <a:txBody>
-                    <a:bodyPr/>
-                    <a:lstStyle/>
-                    <a:p>
-                      <a:endParaRPr lang="es-ES"/>
+                      <a:pPr algn="ctr"/>
+                      <a:r>
+                        <a:rPr lang="es-ES" dirty="0"/>
+                        <a:t>0.9987</a:t>
+                      </a:r>
                     </a:p>
                   </a:txBody>
                   <a:tcPr/>
@@ -13125,7 +13081,11 @@
                     <a:bodyPr/>
                     <a:lstStyle/>
                     <a:p>
-                      <a:endParaRPr lang="es-ES"/>
+                      <a:pPr algn="ctr"/>
+                      <a:r>
+                        <a:rPr lang="es-ES" dirty="0"/>
+                        <a:t>0,7</a:t>
+                      </a:r>
                     </a:p>
                   </a:txBody>
                   <a:tcPr/>
@@ -13135,7 +13095,11 @@
                     <a:bodyPr/>
                     <a:lstStyle/>
                     <a:p>
-                      <a:endParaRPr lang="es-ES"/>
+                      <a:pPr algn="ctr"/>
+                      <a:r>
+                        <a:rPr lang="es-ES" dirty="0"/>
+                        <a:t>0.1161</a:t>
+                      </a:r>
                     </a:p>
                   </a:txBody>
                   <a:tcPr/>
@@ -13145,17 +13109,11 @@
                     <a:bodyPr/>
                     <a:lstStyle/>
                     <a:p>
-                      <a:endParaRPr lang="es-ES"/>
-                    </a:p>
-                  </a:txBody>
-                  <a:tcPr/>
-                </a:tc>
-                <a:tc>
-                  <a:txBody>
-                    <a:bodyPr/>
-                    <a:lstStyle/>
-                    <a:p>
-                      <a:endParaRPr lang="es-ES"/>
+                      <a:pPr algn="ctr"/>
+                      <a:r>
+                        <a:rPr lang="es-ES" dirty="0"/>
+                        <a:t>0.9989</a:t>
+                      </a:r>
                     </a:p>
                   </a:txBody>
                   <a:tcPr/>
@@ -13172,7 +13130,11 @@
                     <a:bodyPr/>
                     <a:lstStyle/>
                     <a:p>
-                      <a:endParaRPr lang="es-ES"/>
+                      <a:pPr algn="ctr"/>
+                      <a:r>
+                        <a:rPr lang="es-ES" dirty="0"/>
+                        <a:t>0,8</a:t>
+                      </a:r>
                     </a:p>
                   </a:txBody>
                   <a:tcPr/>
@@ -13182,7 +13144,11 @@
                     <a:bodyPr/>
                     <a:lstStyle/>
                     <a:p>
-                      <a:endParaRPr lang="es-ES"/>
+                      <a:pPr algn="ctr"/>
+                      <a:r>
+                        <a:rPr lang="es-ES" dirty="0"/>
+                        <a:t>0.0968</a:t>
+                      </a:r>
                     </a:p>
                   </a:txBody>
                   <a:tcPr/>
@@ -13192,17 +13158,11 @@
                     <a:bodyPr/>
                     <a:lstStyle/>
                     <a:p>
-                      <a:endParaRPr lang="es-ES"/>
-                    </a:p>
-                  </a:txBody>
-                  <a:tcPr/>
-                </a:tc>
-                <a:tc>
-                  <a:txBody>
-                    <a:bodyPr/>
-                    <a:lstStyle/>
-                    <a:p>
-                      <a:endParaRPr lang="es-ES"/>
+                      <a:pPr algn="ctr"/>
+                      <a:r>
+                        <a:rPr lang="es-ES" dirty="0"/>
+                        <a:t>0.9990</a:t>
+                      </a:r>
                     </a:p>
                   </a:txBody>
                   <a:tcPr/>
@@ -13219,7 +13179,11 @@
                     <a:bodyPr/>
                     <a:lstStyle/>
                     <a:p>
-                      <a:endParaRPr lang="es-ES"/>
+                      <a:pPr algn="ctr"/>
+                      <a:r>
+                        <a:rPr lang="es-ES" dirty="0"/>
+                        <a:t>0,9</a:t>
+                      </a:r>
                     </a:p>
                   </a:txBody>
                   <a:tcPr/>
@@ -13229,7 +13193,20 @@
                     <a:bodyPr/>
                     <a:lstStyle/>
                     <a:p>
-                      <a:endParaRPr lang="es-ES"/>
+                      <a:pPr algn="ctr"/>
+                      <a:r>
+                        <a:rPr lang="es-ES" b="0" i="0" dirty="0">
+                          <a:solidFill>
+                            <a:schemeClr val="dk1"/>
+                          </a:solidFill>
+                          <a:effectLst/>
+                          <a:latin typeface="+mn-lt"/>
+                          <a:ea typeface="+mn-ea"/>
+                          <a:cs typeface="+mn-cs"/>
+                        </a:rPr>
+                        <a:t>0.1191</a:t>
+                      </a:r>
+                      <a:endParaRPr lang="es-ES" dirty="0"/>
                     </a:p>
                   </a:txBody>
                   <a:tcPr/>
@@ -13239,17 +13216,20 @@
                     <a:bodyPr/>
                     <a:lstStyle/>
                     <a:p>
-                      <a:endParaRPr lang="es-ES"/>
-                    </a:p>
-                  </a:txBody>
-                  <a:tcPr/>
-                </a:tc>
-                <a:tc>
-                  <a:txBody>
-                    <a:bodyPr/>
-                    <a:lstStyle/>
-                    <a:p>
-                      <a:endParaRPr lang="es-ES"/>
+                      <a:pPr algn="ctr"/>
+                      <a:r>
+                        <a:rPr lang="es-ES" b="0" i="0" dirty="0">
+                          <a:solidFill>
+                            <a:schemeClr val="dk1"/>
+                          </a:solidFill>
+                          <a:effectLst/>
+                          <a:latin typeface="+mn-lt"/>
+                          <a:ea typeface="+mn-ea"/>
+                          <a:cs typeface="+mn-cs"/>
+                        </a:rPr>
+                        <a:t>0.9992</a:t>
+                      </a:r>
+                      <a:endParaRPr lang="es-ES" dirty="0"/>
                     </a:p>
                   </a:txBody>
                   <a:tcPr/>
@@ -13266,7 +13246,11 @@
                     <a:bodyPr/>
                     <a:lstStyle/>
                     <a:p>
-                      <a:endParaRPr lang="es-ES"/>
+                      <a:pPr algn="ctr"/>
+                      <a:r>
+                        <a:rPr lang="es-ES" dirty="0"/>
+                        <a:t>1</a:t>
+                      </a:r>
                     </a:p>
                   </a:txBody>
                   <a:tcPr/>
@@ -13276,7 +13260,20 @@
                     <a:bodyPr/>
                     <a:lstStyle/>
                     <a:p>
-                      <a:endParaRPr lang="es-ES"/>
+                      <a:pPr algn="ctr"/>
+                      <a:r>
+                        <a:rPr lang="es-ES" b="0" i="0" dirty="0">
+                          <a:solidFill>
+                            <a:schemeClr val="dk1"/>
+                          </a:solidFill>
+                          <a:effectLst/>
+                          <a:latin typeface="+mn-lt"/>
+                          <a:ea typeface="+mn-ea"/>
+                          <a:cs typeface="+mn-cs"/>
+                        </a:rPr>
+                        <a:t>0.1938</a:t>
+                      </a:r>
+                      <a:endParaRPr lang="es-ES" dirty="0"/>
                     </a:p>
                   </a:txBody>
                   <a:tcPr/>
@@ -13286,17 +13283,20 @@
                     <a:bodyPr/>
                     <a:lstStyle/>
                     <a:p>
-                      <a:endParaRPr lang="es-ES"/>
-                    </a:p>
-                  </a:txBody>
-                  <a:tcPr/>
-                </a:tc>
-                <a:tc>
-                  <a:txBody>
-                    <a:bodyPr/>
-                    <a:lstStyle/>
-                    <a:p>
-                      <a:endParaRPr lang="es-ES"/>
+                      <a:pPr algn="ctr"/>
+                      <a:r>
+                        <a:rPr lang="es-ES" b="0" i="0" dirty="0">
+                          <a:solidFill>
+                            <a:schemeClr val="dk1"/>
+                          </a:solidFill>
+                          <a:effectLst/>
+                          <a:latin typeface="+mn-lt"/>
+                          <a:ea typeface="+mn-ea"/>
+                          <a:cs typeface="+mn-cs"/>
+                        </a:rPr>
+                        <a:t>0.9994</a:t>
+                      </a:r>
+                      <a:endParaRPr lang="es-ES" dirty="0"/>
                     </a:p>
                   </a:txBody>
                   <a:tcPr/>
@@ -13313,7 +13313,11 @@
                     <a:bodyPr/>
                     <a:lstStyle/>
                     <a:p>
-                      <a:endParaRPr lang="es-ES"/>
+                      <a:pPr algn="ctr"/>
+                      <a:r>
+                        <a:rPr lang="es-ES" dirty="0"/>
+                        <a:t>1,1</a:t>
+                      </a:r>
                     </a:p>
                   </a:txBody>
                   <a:tcPr/>
@@ -13323,7 +13327,20 @@
                     <a:bodyPr/>
                     <a:lstStyle/>
                     <a:p>
-                      <a:endParaRPr lang="es-ES"/>
+                      <a:pPr algn="ctr"/>
+                      <a:r>
+                        <a:rPr lang="es-ES" b="0" i="0" dirty="0">
+                          <a:solidFill>
+                            <a:schemeClr val="dk1"/>
+                          </a:solidFill>
+                          <a:effectLst/>
+                          <a:latin typeface="+mn-lt"/>
+                          <a:ea typeface="+mn-ea"/>
+                          <a:cs typeface="+mn-cs"/>
+                        </a:rPr>
+                        <a:t>0.3345</a:t>
+                      </a:r>
+                      <a:endParaRPr lang="es-ES" dirty="0"/>
                     </a:p>
                   </a:txBody>
                   <a:tcPr/>
@@ -13333,17 +13350,20 @@
                     <a:bodyPr/>
                     <a:lstStyle/>
                     <a:p>
-                      <a:endParaRPr lang="es-ES"/>
-                    </a:p>
-                  </a:txBody>
-                  <a:tcPr/>
-                </a:tc>
-                <a:tc>
-                  <a:txBody>
-                    <a:bodyPr/>
-                    <a:lstStyle/>
-                    <a:p>
-                      <a:endParaRPr lang="es-ES"/>
+                      <a:pPr algn="ctr"/>
+                      <a:r>
+                        <a:rPr lang="es-ES" b="0" i="0" dirty="0">
+                          <a:solidFill>
+                            <a:schemeClr val="dk1"/>
+                          </a:solidFill>
+                          <a:effectLst/>
+                          <a:latin typeface="+mn-lt"/>
+                          <a:ea typeface="+mn-ea"/>
+                          <a:cs typeface="+mn-cs"/>
+                        </a:rPr>
+                        <a:t>0.9995</a:t>
+                      </a:r>
+                      <a:endParaRPr lang="es-ES" dirty="0"/>
                     </a:p>
                   </a:txBody>
                   <a:tcPr/>
@@ -13360,7 +13380,11 @@
                     <a:bodyPr/>
                     <a:lstStyle/>
                     <a:p>
-                      <a:endParaRPr lang="es-ES"/>
+                      <a:pPr algn="ctr"/>
+                      <a:r>
+                        <a:rPr lang="es-ES" dirty="0"/>
+                        <a:t>1,2</a:t>
+                      </a:r>
                     </a:p>
                   </a:txBody>
                   <a:tcPr/>
@@ -13370,7 +13394,20 @@
                     <a:bodyPr/>
                     <a:lstStyle/>
                     <a:p>
-                      <a:endParaRPr lang="es-ES"/>
+                      <a:pPr algn="ctr"/>
+                      <a:r>
+                        <a:rPr lang="es-ES" b="0" i="0" dirty="0">
+                          <a:solidFill>
+                            <a:schemeClr val="dk1"/>
+                          </a:solidFill>
+                          <a:effectLst/>
+                          <a:latin typeface="+mn-lt"/>
+                          <a:ea typeface="+mn-ea"/>
+                          <a:cs typeface="+mn-cs"/>
+                        </a:rPr>
+                        <a:t>0.5452</a:t>
+                      </a:r>
+                      <a:endParaRPr lang="es-ES" dirty="0"/>
                     </a:p>
                   </a:txBody>
                   <a:tcPr/>
@@ -13380,17 +13417,20 @@
                     <a:bodyPr/>
                     <a:lstStyle/>
                     <a:p>
-                      <a:endParaRPr lang="es-ES"/>
-                    </a:p>
-                  </a:txBody>
-                  <a:tcPr/>
-                </a:tc>
-                <a:tc>
-                  <a:txBody>
-                    <a:bodyPr/>
-                    <a:lstStyle/>
-                    <a:p>
-                      <a:endParaRPr lang="es-ES"/>
+                      <a:pPr algn="ctr"/>
+                      <a:r>
+                        <a:rPr lang="es-ES" b="0" i="0" dirty="0">
+                          <a:solidFill>
+                            <a:schemeClr val="dk1"/>
+                          </a:solidFill>
+                          <a:effectLst/>
+                          <a:latin typeface="+mn-lt"/>
+                          <a:ea typeface="+mn-ea"/>
+                          <a:cs typeface="+mn-cs"/>
+                        </a:rPr>
+                        <a:t>0.9996</a:t>
+                      </a:r>
+                      <a:endParaRPr lang="es-ES" dirty="0"/>
                     </a:p>
                   </a:txBody>
                   <a:tcPr/>
@@ -13407,7 +13447,11 @@
                     <a:bodyPr/>
                     <a:lstStyle/>
                     <a:p>
-                      <a:endParaRPr lang="es-ES"/>
+                      <a:pPr algn="ctr"/>
+                      <a:r>
+                        <a:rPr lang="es-ES" dirty="0"/>
+                        <a:t>1,3</a:t>
+                      </a:r>
                     </a:p>
                   </a:txBody>
                   <a:tcPr/>
@@ -13417,7 +13461,20 @@
                     <a:bodyPr/>
                     <a:lstStyle/>
                     <a:p>
-                      <a:endParaRPr lang="es-ES"/>
+                      <a:pPr algn="ctr"/>
+                      <a:r>
+                        <a:rPr lang="es-ES" b="0" i="0" dirty="0">
+                          <a:solidFill>
+                            <a:schemeClr val="dk1"/>
+                          </a:solidFill>
+                          <a:effectLst/>
+                          <a:latin typeface="+mn-lt"/>
+                          <a:ea typeface="+mn-ea"/>
+                          <a:cs typeface="+mn-cs"/>
+                        </a:rPr>
+                        <a:t>0.7669</a:t>
+                      </a:r>
+                      <a:endParaRPr lang="es-ES" dirty="0"/>
                     </a:p>
                   </a:txBody>
                   <a:tcPr/>
@@ -13427,17 +13484,20 @@
                     <a:bodyPr/>
                     <a:lstStyle/>
                     <a:p>
-                      <a:endParaRPr lang="es-ES"/>
-                    </a:p>
-                  </a:txBody>
-                  <a:tcPr/>
-                </a:tc>
-                <a:tc>
-                  <a:txBody>
-                    <a:bodyPr/>
-                    <a:lstStyle/>
-                    <a:p>
-                      <a:endParaRPr lang="es-ES"/>
+                      <a:pPr algn="ctr"/>
+                      <a:r>
+                        <a:rPr lang="es-ES" b="0" i="0" dirty="0">
+                          <a:solidFill>
+                            <a:schemeClr val="dk1"/>
+                          </a:solidFill>
+                          <a:effectLst/>
+                          <a:latin typeface="+mn-lt"/>
+                          <a:ea typeface="+mn-ea"/>
+                          <a:cs typeface="+mn-cs"/>
+                        </a:rPr>
+                        <a:t>0.9997</a:t>
+                      </a:r>
+                      <a:endParaRPr lang="es-ES" dirty="0"/>
                     </a:p>
                   </a:txBody>
                   <a:tcPr/>
@@ -13454,7 +13514,11 @@
                     <a:bodyPr/>
                     <a:lstStyle/>
                     <a:p>
-                      <a:endParaRPr lang="es-ES"/>
+                      <a:pPr algn="ctr"/>
+                      <a:r>
+                        <a:rPr lang="es-ES" dirty="0"/>
+                        <a:t>1,4</a:t>
+                      </a:r>
                     </a:p>
                   </a:txBody>
                   <a:tcPr/>
@@ -13464,7 +13528,20 @@
                     <a:bodyPr/>
                     <a:lstStyle/>
                     <a:p>
-                      <a:endParaRPr lang="es-ES"/>
+                      <a:pPr algn="ctr"/>
+                      <a:r>
+                        <a:rPr lang="es-ES" b="0" i="0" dirty="0">
+                          <a:solidFill>
+                            <a:schemeClr val="dk1"/>
+                          </a:solidFill>
+                          <a:effectLst/>
+                          <a:latin typeface="+mn-lt"/>
+                          <a:ea typeface="+mn-ea"/>
+                          <a:cs typeface="+mn-cs"/>
+                        </a:rPr>
+                        <a:t>1.0870</a:t>
+                      </a:r>
+                      <a:endParaRPr lang="es-ES" dirty="0"/>
                     </a:p>
                   </a:txBody>
                   <a:tcPr/>
@@ -13474,17 +13551,20 @@
                     <a:bodyPr/>
                     <a:lstStyle/>
                     <a:p>
-                      <a:endParaRPr lang="es-ES"/>
-                    </a:p>
-                  </a:txBody>
-                  <a:tcPr/>
-                </a:tc>
-                <a:tc>
-                  <a:txBody>
-                    <a:bodyPr/>
-                    <a:lstStyle/>
-                    <a:p>
-                      <a:endParaRPr lang="es-ES"/>
+                      <a:pPr algn="ctr"/>
+                      <a:r>
+                        <a:rPr lang="es-ES" b="0" i="0" dirty="0">
+                          <a:solidFill>
+                            <a:schemeClr val="dk1"/>
+                          </a:solidFill>
+                          <a:effectLst/>
+                          <a:latin typeface="+mn-lt"/>
+                          <a:ea typeface="+mn-ea"/>
+                          <a:cs typeface="+mn-cs"/>
+                        </a:rPr>
+                        <a:t>0.9997</a:t>
+                      </a:r>
+                      <a:endParaRPr lang="es-ES" dirty="0"/>
                     </a:p>
                   </a:txBody>
                   <a:tcPr/>
@@ -13501,7 +13581,11 @@
                     <a:bodyPr/>
                     <a:lstStyle/>
                     <a:p>
-                      <a:endParaRPr lang="es-ES"/>
+                      <a:pPr algn="ctr"/>
+                      <a:r>
+                        <a:rPr lang="es-ES" dirty="0"/>
+                        <a:t>1,5</a:t>
+                      </a:r>
                     </a:p>
                   </a:txBody>
                   <a:tcPr/>
@@ -13511,7 +13595,20 @@
                     <a:bodyPr/>
                     <a:lstStyle/>
                     <a:p>
-                      <a:endParaRPr lang="es-ES"/>
+                      <a:pPr algn="ctr"/>
+                      <a:r>
+                        <a:rPr lang="es-ES" b="0" i="0" dirty="0">
+                          <a:solidFill>
+                            <a:schemeClr val="dk1"/>
+                          </a:solidFill>
+                          <a:effectLst/>
+                          <a:latin typeface="+mn-lt"/>
+                          <a:ea typeface="+mn-ea"/>
+                          <a:cs typeface="+mn-cs"/>
+                        </a:rPr>
+                        <a:t>1.4155</a:t>
+                      </a:r>
+                      <a:endParaRPr lang="es-ES" dirty="0"/>
                     </a:p>
                   </a:txBody>
                   <a:tcPr/>
@@ -13521,17 +13618,20 @@
                     <a:bodyPr/>
                     <a:lstStyle/>
                     <a:p>
-                      <a:endParaRPr lang="es-ES"/>
-                    </a:p>
-                  </a:txBody>
-                  <a:tcPr/>
-                </a:tc>
-                <a:tc>
-                  <a:txBody>
-                    <a:bodyPr/>
-                    <a:lstStyle/>
-                    <a:p>
-                      <a:endParaRPr lang="es-ES"/>
+                      <a:pPr algn="ctr"/>
+                      <a:r>
+                        <a:rPr lang="es-ES" b="0" i="0" dirty="0">
+                          <a:solidFill>
+                            <a:schemeClr val="dk1"/>
+                          </a:solidFill>
+                          <a:effectLst/>
+                          <a:latin typeface="+mn-lt"/>
+                          <a:ea typeface="+mn-ea"/>
+                          <a:cs typeface="+mn-cs"/>
+                        </a:rPr>
+                        <a:t>0.9997</a:t>
+                      </a:r>
+                      <a:endParaRPr lang="es-ES" dirty="0"/>
                     </a:p>
                   </a:txBody>
                   <a:tcPr/>
@@ -13548,7 +13648,11 @@
                     <a:bodyPr/>
                     <a:lstStyle/>
                     <a:p>
-                      <a:endParaRPr lang="es-ES"/>
+                      <a:pPr algn="ctr"/>
+                      <a:r>
+                        <a:rPr lang="es-ES" dirty="0"/>
+                        <a:t>1,6</a:t>
+                      </a:r>
                     </a:p>
                   </a:txBody>
                   <a:tcPr/>
@@ -13558,7 +13662,20 @@
                     <a:bodyPr/>
                     <a:lstStyle/>
                     <a:p>
-                      <a:endParaRPr lang="es-ES"/>
+                      <a:pPr algn="ctr"/>
+                      <a:r>
+                        <a:rPr lang="es-ES" b="0" i="0" dirty="0">
+                          <a:solidFill>
+                            <a:schemeClr val="dk1"/>
+                          </a:solidFill>
+                          <a:effectLst/>
+                          <a:latin typeface="+mn-lt"/>
+                          <a:ea typeface="+mn-ea"/>
+                          <a:cs typeface="+mn-cs"/>
+                        </a:rPr>
+                        <a:t>1.7769</a:t>
+                      </a:r>
+                      <a:endParaRPr lang="es-ES" dirty="0"/>
                     </a:p>
                   </a:txBody>
                   <a:tcPr/>
@@ -13568,16 +13685,19 @@
                     <a:bodyPr/>
                     <a:lstStyle/>
                     <a:p>
-                      <a:endParaRPr lang="es-ES"/>
-                    </a:p>
-                  </a:txBody>
-                  <a:tcPr/>
-                </a:tc>
-                <a:tc>
-                  <a:txBody>
-                    <a:bodyPr/>
-                    <a:lstStyle/>
-                    <a:p>
+                      <a:pPr algn="ctr"/>
+                      <a:r>
+                        <a:rPr lang="es-ES" b="0" i="0" dirty="0">
+                          <a:solidFill>
+                            <a:schemeClr val="dk1"/>
+                          </a:solidFill>
+                          <a:effectLst/>
+                          <a:latin typeface="+mn-lt"/>
+                          <a:ea typeface="+mn-ea"/>
+                          <a:cs typeface="+mn-cs"/>
+                        </a:rPr>
+                        <a:t>0.9999</a:t>
+                      </a:r>
                       <a:endParaRPr lang="es-ES" dirty="0"/>
                     </a:p>
                   </a:txBody>
@@ -13614,6 +13734,746 @@
         <p:cNvPr id="1" name="">
           <a:extLst>
             <a:ext uri="{FF2B5EF4-FFF2-40B4-BE49-F238E27FC236}">
+              <a16:creationId xmlns:a16="http://schemas.microsoft.com/office/drawing/2014/main" id="{0D90AC3D-36B7-D786-3825-B4DD6EADD689}"/>
+            </a:ext>
+          </a:extLst>
+        </p:cNvPr>
+        <p:cNvGrpSpPr/>
+        <p:nvPr/>
+      </p:nvGrpSpPr>
+      <p:grpSpPr>
+        <a:xfrm>
+          <a:off x="0" y="0"/>
+          <a:ext cx="0" cy="0"/>
+          <a:chOff x="0" y="0"/>
+          <a:chExt cx="0" cy="0"/>
+        </a:xfrm>
+      </p:grpSpPr>
+      <p:sp>
+        <p:nvSpPr>
+          <p:cNvPr id="16" name="object 16">
+            <a:extLst>
+              <a:ext uri="{FF2B5EF4-FFF2-40B4-BE49-F238E27FC236}">
+                <a16:creationId xmlns:a16="http://schemas.microsoft.com/office/drawing/2014/main" id="{6AA2E789-F7AE-F068-274C-E0F13A22DBCA}"/>
+              </a:ext>
+            </a:extLst>
+          </p:cNvPr>
+          <p:cNvSpPr txBox="1">
+            <a:spLocks noGrp="1"/>
+          </p:cNvSpPr>
+          <p:nvPr>
+            <p:ph type="title"/>
+          </p:nvPr>
+        </p:nvSpPr>
+        <p:spPr>
+          <a:xfrm>
+            <a:off x="685800" y="408883"/>
+            <a:ext cx="10994410" cy="705321"/>
+          </a:xfrm>
+          <a:prstGeom prst="rect">
+            <a:avLst/>
+          </a:prstGeom>
+        </p:spPr>
+        <p:txBody>
+          <a:bodyPr vert="horz" wrap="square" lIns="0" tIns="12700" rIns="0" bIns="0" rtlCol="0">
+            <a:spAutoFit/>
+          </a:bodyPr>
+          <a:lstStyle/>
+          <a:p>
+            <a:pPr marL="12700">
+              <a:lnSpc>
+                <a:spcPct val="100000"/>
+              </a:lnSpc>
+              <a:spcBef>
+                <a:spcPts val="100"/>
+              </a:spcBef>
+            </a:pPr>
+            <a:r>
+              <a:rPr lang="en-US" sz="2500" dirty="0"/>
+              <a:t>Learning outcome #2 – 2x2 Directional Coupler</a:t>
+            </a:r>
+            <a:br>
+              <a:rPr lang="en-US" sz="2500" spc="-5" dirty="0">
+                <a:latin typeface="+mj-lt"/>
+                <a:cs typeface="Lucida Sans"/>
+              </a:rPr>
+            </a:br>
+            <a:r>
+              <a:rPr lang="en-US" b="0" dirty="0"/>
+              <a:t>Gap 0.6 - 1.6 µm (step 0.1 µm) – Wavelength 1.55 µm </a:t>
+            </a:r>
+            <a:endParaRPr lang="en-US" sz="2500" b="0" dirty="0">
+              <a:latin typeface="+mj-lt"/>
+              <a:cs typeface="Lucida Sans"/>
+            </a:endParaRPr>
+          </a:p>
+        </p:txBody>
+      </p:sp>
+      <p:pic>
+        <p:nvPicPr>
+          <p:cNvPr id="83" name="Gráfico 82">
+            <a:extLst>
+              <a:ext uri="{FF2B5EF4-FFF2-40B4-BE49-F238E27FC236}">
+                <a16:creationId xmlns:a16="http://schemas.microsoft.com/office/drawing/2014/main" id="{3AEAD01B-7604-8009-5694-A556497AEF25}"/>
+              </a:ext>
+            </a:extLst>
+          </p:cNvPr>
+          <p:cNvPicPr>
+            <a:picLocks noChangeAspect="1"/>
+          </p:cNvPicPr>
+          <p:nvPr/>
+        </p:nvPicPr>
+        <p:blipFill>
+          <a:blip r:embed="rId3">
+            <a:extLst>
+              <a:ext uri="{96DAC541-7B7A-43D3-8B79-37D633B846F1}">
+                <asvg:svgBlip xmlns:asvg="http://schemas.microsoft.com/office/drawing/2016/SVG/main" r:embed="rId4"/>
+              </a:ext>
+            </a:extLst>
+          </a:blip>
+          <a:stretch>
+            <a:fillRect/>
+          </a:stretch>
+        </p:blipFill>
+        <p:spPr>
+          <a:xfrm>
+            <a:off x="5045006" y="6356057"/>
+            <a:ext cx="6409575" cy="363174"/>
+          </a:xfrm>
+          <a:prstGeom prst="rect">
+            <a:avLst/>
+          </a:prstGeom>
+        </p:spPr>
+      </p:pic>
+      <p:sp>
+        <p:nvSpPr>
+          <p:cNvPr id="84" name="Marcador de número de diapositiva 83">
+            <a:extLst>
+              <a:ext uri="{FF2B5EF4-FFF2-40B4-BE49-F238E27FC236}">
+                <a16:creationId xmlns:a16="http://schemas.microsoft.com/office/drawing/2014/main" id="{696E3846-1BD2-4F23-48AA-C7AF2A1EE6EB}"/>
+              </a:ext>
+            </a:extLst>
+          </p:cNvPr>
+          <p:cNvSpPr>
+            <a:spLocks noGrp="1"/>
+          </p:cNvSpPr>
+          <p:nvPr>
+            <p:ph type="sldNum" sz="quarter" idx="7"/>
+          </p:nvPr>
+        </p:nvSpPr>
+        <p:spPr/>
+        <p:txBody>
+          <a:bodyPr/>
+          <a:lstStyle/>
+          <a:p>
+            <a:fld id="{B6F15528-21DE-4FAA-801E-634DDDAF4B2B}" type="slidenum">
+              <a:rPr lang="es-ES" smtClean="0"/>
+              <a:t>7</a:t>
+            </a:fld>
+            <a:endParaRPr lang="es-ES"/>
+          </a:p>
+        </p:txBody>
+      </p:sp>
+      <p:sp>
+        <p:nvSpPr>
+          <p:cNvPr id="3" name="Marcador de pie de página 2">
+            <a:extLst>
+              <a:ext uri="{FF2B5EF4-FFF2-40B4-BE49-F238E27FC236}">
+                <a16:creationId xmlns:a16="http://schemas.microsoft.com/office/drawing/2014/main" id="{E32C0E2B-75B6-4768-A4C7-F165A264DA0B}"/>
+              </a:ext>
+            </a:extLst>
+          </p:cNvPr>
+          <p:cNvSpPr>
+            <a:spLocks noGrp="1"/>
+          </p:cNvSpPr>
+          <p:nvPr>
+            <p:ph type="ftr" sz="quarter" idx="5"/>
+          </p:nvPr>
+        </p:nvSpPr>
+        <p:spPr/>
+        <p:txBody>
+          <a:bodyPr/>
+          <a:lstStyle/>
+          <a:p>
+            <a:pPr marL="12700">
+              <a:spcBef>
+                <a:spcPts val="15"/>
+              </a:spcBef>
+            </a:pPr>
+            <a:r>
+              <a:rPr lang="es-ES" spc="-5"/>
+              <a:t>LAB 2.0. COUPLERS</a:t>
+            </a:r>
+            <a:endParaRPr lang="es-ES" spc="-5" dirty="0"/>
+          </a:p>
+        </p:txBody>
+      </p:sp>
+      <p:sp>
+        <p:nvSpPr>
+          <p:cNvPr id="7" name="Rectángulo 6">
+            <a:extLst>
+              <a:ext uri="{FF2B5EF4-FFF2-40B4-BE49-F238E27FC236}">
+                <a16:creationId xmlns:a16="http://schemas.microsoft.com/office/drawing/2014/main" id="{FBC7D187-267A-ADD4-764C-D3820B8ED302}"/>
+              </a:ext>
+            </a:extLst>
+          </p:cNvPr>
+          <p:cNvSpPr/>
+          <p:nvPr/>
+        </p:nvSpPr>
+        <p:spPr>
+          <a:xfrm>
+            <a:off x="609441" y="1418373"/>
+            <a:ext cx="11199971" cy="3229828"/>
+          </a:xfrm>
+          <a:prstGeom prst="rect">
+            <a:avLst/>
+          </a:prstGeom>
+          <a:noFill/>
+          <a:ln w="28575">
+            <a:solidFill>
+              <a:srgbClr val="E0700D"/>
+            </a:solidFill>
+          </a:ln>
+        </p:spPr>
+        <p:style>
+          <a:lnRef idx="2">
+            <a:schemeClr val="accent1">
+              <a:shade val="15000"/>
+            </a:schemeClr>
+          </a:lnRef>
+          <a:fillRef idx="1">
+            <a:schemeClr val="accent1"/>
+          </a:fillRef>
+          <a:effectRef idx="0">
+            <a:schemeClr val="accent1"/>
+          </a:effectRef>
+          <a:fontRef idx="minor">
+            <a:schemeClr val="lt1"/>
+          </a:fontRef>
+        </p:style>
+        <p:txBody>
+          <a:bodyPr rtlCol="0" anchor="ctr"/>
+          <a:lstStyle/>
+          <a:p>
+            <a:pPr algn="ctr"/>
+            <a:endParaRPr lang="en-US"/>
+          </a:p>
+        </p:txBody>
+      </p:sp>
+      <p:pic>
+        <p:nvPicPr>
+          <p:cNvPr id="5" name="Imagen 4">
+            <a:extLst>
+              <a:ext uri="{FF2B5EF4-FFF2-40B4-BE49-F238E27FC236}">
+                <a16:creationId xmlns:a16="http://schemas.microsoft.com/office/drawing/2014/main" id="{0C53809D-89DF-4BA2-B688-935065E7C6A5}"/>
+              </a:ext>
+            </a:extLst>
+          </p:cNvPr>
+          <p:cNvPicPr>
+            <a:picLocks noChangeAspect="1"/>
+          </p:cNvPicPr>
+          <p:nvPr/>
+        </p:nvPicPr>
+        <p:blipFill>
+          <a:blip r:embed="rId5"/>
+          <a:stretch>
+            <a:fillRect/>
+          </a:stretch>
+        </p:blipFill>
+        <p:spPr>
+          <a:xfrm>
+            <a:off x="1530093" y="1680423"/>
+            <a:ext cx="3514913" cy="2776537"/>
+          </a:xfrm>
+          <a:prstGeom prst="rect">
+            <a:avLst/>
+          </a:prstGeom>
+        </p:spPr>
+      </p:pic>
+      <p:pic>
+        <p:nvPicPr>
+          <p:cNvPr id="9" name="Imagen 8">
+            <a:extLst>
+              <a:ext uri="{FF2B5EF4-FFF2-40B4-BE49-F238E27FC236}">
+                <a16:creationId xmlns:a16="http://schemas.microsoft.com/office/drawing/2014/main" id="{EC148AE2-DD69-4B77-8808-2E2EED89045E}"/>
+              </a:ext>
+            </a:extLst>
+          </p:cNvPr>
+          <p:cNvPicPr>
+            <a:picLocks noChangeAspect="1"/>
+          </p:cNvPicPr>
+          <p:nvPr/>
+        </p:nvPicPr>
+        <p:blipFill>
+          <a:blip r:embed="rId6"/>
+          <a:stretch>
+            <a:fillRect/>
+          </a:stretch>
+        </p:blipFill>
+        <p:spPr>
+          <a:xfrm>
+            <a:off x="7146996" y="1658652"/>
+            <a:ext cx="3618652" cy="2776537"/>
+          </a:xfrm>
+          <a:prstGeom prst="rect">
+            <a:avLst/>
+          </a:prstGeom>
+        </p:spPr>
+      </p:pic>
+      <p:sp>
+        <p:nvSpPr>
+          <p:cNvPr id="12" name="CuadroTexto 11">
+            <a:extLst>
+              <a:ext uri="{FF2B5EF4-FFF2-40B4-BE49-F238E27FC236}">
+                <a16:creationId xmlns:a16="http://schemas.microsoft.com/office/drawing/2014/main" id="{77A084EF-8A00-4DF5-BEC3-7DB6425C27B4}"/>
+              </a:ext>
+            </a:extLst>
+          </p:cNvPr>
+          <p:cNvSpPr txBox="1"/>
+          <p:nvPr/>
+        </p:nvSpPr>
+        <p:spPr>
+          <a:xfrm>
+            <a:off x="609441" y="4811862"/>
+            <a:ext cx="11199971" cy="1200329"/>
+          </a:xfrm>
+          <a:prstGeom prst="rect">
+            <a:avLst/>
+          </a:prstGeom>
+          <a:solidFill>
+            <a:schemeClr val="bg1">
+              <a:lumMod val="95000"/>
+            </a:schemeClr>
+          </a:solidFill>
+          <a:ln w="28575">
+            <a:solidFill>
+              <a:srgbClr val="E0700D"/>
+            </a:solidFill>
+          </a:ln>
+        </p:spPr>
+        <p:txBody>
+          <a:bodyPr wrap="square" rtlCol="0">
+            <a:spAutoFit/>
+          </a:bodyPr>
+          <a:lstStyle/>
+          <a:p>
+            <a:pPr algn="just"/>
+            <a:r>
+              <a:rPr lang="en-US" sz="1200" dirty="0" err="1">
+                <a:latin typeface="Arial" panose="020B0604020202020204" pitchFamily="34" charset="0"/>
+                <a:cs typeface="Arial" panose="020B0604020202020204" pitchFamily="34" charset="0"/>
+              </a:rPr>
+              <a:t>Estas</a:t>
+            </a:r>
+            <a:r>
+              <a:rPr lang="en-US" sz="1200" dirty="0">
+                <a:latin typeface="Arial" panose="020B0604020202020204" pitchFamily="34" charset="0"/>
+                <a:cs typeface="Arial" panose="020B0604020202020204" pitchFamily="34" charset="0"/>
+              </a:rPr>
+              <a:t> </a:t>
+            </a:r>
+            <a:r>
+              <a:rPr lang="en-US" sz="1200" dirty="0" err="1">
+                <a:latin typeface="Arial" panose="020B0604020202020204" pitchFamily="34" charset="0"/>
+                <a:cs typeface="Arial" panose="020B0604020202020204" pitchFamily="34" charset="0"/>
+              </a:rPr>
+              <a:t>gráficas</a:t>
+            </a:r>
+            <a:r>
+              <a:rPr lang="en-US" sz="1200" dirty="0">
+                <a:latin typeface="Arial" panose="020B0604020202020204" pitchFamily="34" charset="0"/>
+                <a:cs typeface="Arial" panose="020B0604020202020204" pitchFamily="34" charset="0"/>
+              </a:rPr>
+              <a:t> </a:t>
+            </a:r>
+            <a:r>
+              <a:rPr lang="en-US" sz="1200" dirty="0" err="1">
+                <a:latin typeface="Arial" panose="020B0604020202020204" pitchFamily="34" charset="0"/>
+                <a:cs typeface="Arial" panose="020B0604020202020204" pitchFamily="34" charset="0"/>
+              </a:rPr>
+              <a:t>muestran</a:t>
+            </a:r>
+            <a:r>
+              <a:rPr lang="en-US" sz="1200" dirty="0">
+                <a:latin typeface="Arial" panose="020B0604020202020204" pitchFamily="34" charset="0"/>
+                <a:cs typeface="Arial" panose="020B0604020202020204" pitchFamily="34" charset="0"/>
+              </a:rPr>
+              <a:t> la </a:t>
+            </a:r>
+            <a:r>
+              <a:rPr lang="en-US" sz="1200" dirty="0" err="1">
+                <a:latin typeface="Arial" panose="020B0604020202020204" pitchFamily="34" charset="0"/>
+                <a:cs typeface="Arial" panose="020B0604020202020204" pitchFamily="34" charset="0"/>
+              </a:rPr>
+              <a:t>dependencia</a:t>
+            </a:r>
+            <a:r>
+              <a:rPr lang="en-US" sz="1200" dirty="0">
+                <a:latin typeface="Arial" panose="020B0604020202020204" pitchFamily="34" charset="0"/>
+                <a:cs typeface="Arial" panose="020B0604020202020204" pitchFamily="34" charset="0"/>
+              </a:rPr>
+              <a:t> de las </a:t>
+            </a:r>
+            <a:r>
+              <a:rPr lang="en-US" sz="1200" dirty="0" err="1">
+                <a:latin typeface="Arial" panose="020B0604020202020204" pitchFamily="34" charset="0"/>
+                <a:cs typeface="Arial" panose="020B0604020202020204" pitchFamily="34" charset="0"/>
+              </a:rPr>
+              <a:t>pérdidas</a:t>
+            </a:r>
+            <a:r>
+              <a:rPr lang="en-US" sz="1200" dirty="0">
+                <a:latin typeface="Arial" panose="020B0604020202020204" pitchFamily="34" charset="0"/>
+                <a:cs typeface="Arial" panose="020B0604020202020204" pitchFamily="34" charset="0"/>
+              </a:rPr>
+              <a:t> y </a:t>
+            </a:r>
+            <a:r>
+              <a:rPr lang="en-US" sz="1200" dirty="0" err="1">
+                <a:latin typeface="Arial" panose="020B0604020202020204" pitchFamily="34" charset="0"/>
+                <a:cs typeface="Arial" panose="020B0604020202020204" pitchFamily="34" charset="0"/>
+              </a:rPr>
+              <a:t>el</a:t>
+            </a:r>
+            <a:r>
+              <a:rPr lang="en-US" sz="1200" dirty="0">
+                <a:latin typeface="Arial" panose="020B0604020202020204" pitchFamily="34" charset="0"/>
+                <a:cs typeface="Arial" panose="020B0604020202020204" pitchFamily="34" charset="0"/>
+              </a:rPr>
+              <a:t> ratio </a:t>
+            </a:r>
+            <a:r>
+              <a:rPr lang="en-US" sz="1200" dirty="0" err="1">
+                <a:latin typeface="Arial" panose="020B0604020202020204" pitchFamily="34" charset="0"/>
+                <a:cs typeface="Arial" panose="020B0604020202020204" pitchFamily="34" charset="0"/>
+              </a:rPr>
+              <a:t>en</a:t>
+            </a:r>
+            <a:r>
+              <a:rPr lang="en-US" sz="1200" dirty="0">
+                <a:latin typeface="Arial" panose="020B0604020202020204" pitchFamily="34" charset="0"/>
+                <a:cs typeface="Arial" panose="020B0604020202020204" pitchFamily="34" charset="0"/>
+              </a:rPr>
+              <a:t> los </a:t>
+            </a:r>
+            <a:r>
+              <a:rPr lang="en-US" sz="1200" dirty="0" err="1">
+                <a:latin typeface="Arial" panose="020B0604020202020204" pitchFamily="34" charset="0"/>
+                <a:cs typeface="Arial" panose="020B0604020202020204" pitchFamily="34" charset="0"/>
+              </a:rPr>
+              <a:t>puertos</a:t>
+            </a:r>
+            <a:r>
+              <a:rPr lang="en-US" sz="1200" dirty="0">
+                <a:latin typeface="Arial" panose="020B0604020202020204" pitchFamily="34" charset="0"/>
+                <a:cs typeface="Arial" panose="020B0604020202020204" pitchFamily="34" charset="0"/>
+              </a:rPr>
+              <a:t> de </a:t>
+            </a:r>
+            <a:r>
+              <a:rPr lang="en-US" sz="1200" dirty="0" err="1">
+                <a:latin typeface="Arial" panose="020B0604020202020204" pitchFamily="34" charset="0"/>
+                <a:cs typeface="Arial" panose="020B0604020202020204" pitchFamily="34" charset="0"/>
+              </a:rPr>
+              <a:t>salida</a:t>
+            </a:r>
+            <a:r>
+              <a:rPr lang="en-US" sz="1200" dirty="0">
+                <a:latin typeface="Arial" panose="020B0604020202020204" pitchFamily="34" charset="0"/>
+                <a:cs typeface="Arial" panose="020B0604020202020204" pitchFamily="34" charset="0"/>
+              </a:rPr>
+              <a:t> para </a:t>
+            </a:r>
+            <a:r>
+              <a:rPr lang="en-US" sz="1200" dirty="0" err="1">
+                <a:latin typeface="Arial" panose="020B0604020202020204" pitchFamily="34" charset="0"/>
+                <a:cs typeface="Arial" panose="020B0604020202020204" pitchFamily="34" charset="0"/>
+              </a:rPr>
+              <a:t>cada</a:t>
+            </a:r>
+            <a:r>
+              <a:rPr lang="en-US" sz="1200" dirty="0">
+                <a:latin typeface="Arial" panose="020B0604020202020204" pitchFamily="34" charset="0"/>
+                <a:cs typeface="Arial" panose="020B0604020202020204" pitchFamily="34" charset="0"/>
+              </a:rPr>
+              <a:t> </a:t>
+            </a:r>
+            <a:r>
+              <a:rPr lang="en-US" sz="1200" dirty="0" err="1">
+                <a:latin typeface="Arial" panose="020B0604020202020204" pitchFamily="34" charset="0"/>
+                <a:cs typeface="Arial" panose="020B0604020202020204" pitchFamily="34" charset="0"/>
+              </a:rPr>
+              <a:t>valos</a:t>
+            </a:r>
+            <a:r>
+              <a:rPr lang="en-US" sz="1200" dirty="0">
+                <a:latin typeface="Arial" panose="020B0604020202020204" pitchFamily="34" charset="0"/>
+                <a:cs typeface="Arial" panose="020B0604020202020204" pitchFamily="34" charset="0"/>
+              </a:rPr>
+              <a:t> del gap. Los </a:t>
+            </a:r>
+            <a:r>
+              <a:rPr lang="en-US" sz="1200" dirty="0" err="1">
+                <a:latin typeface="Arial" panose="020B0604020202020204" pitchFamily="34" charset="0"/>
+                <a:cs typeface="Arial" panose="020B0604020202020204" pitchFamily="34" charset="0"/>
+              </a:rPr>
+              <a:t>mejores</a:t>
+            </a:r>
+            <a:r>
+              <a:rPr lang="en-US" sz="1200" dirty="0">
+                <a:latin typeface="Arial" panose="020B0604020202020204" pitchFamily="34" charset="0"/>
+                <a:cs typeface="Arial" panose="020B0604020202020204" pitchFamily="34" charset="0"/>
+              </a:rPr>
+              <a:t> </a:t>
+            </a:r>
+            <a:r>
+              <a:rPr lang="en-US" sz="1200" dirty="0" err="1">
+                <a:latin typeface="Arial" panose="020B0604020202020204" pitchFamily="34" charset="0"/>
+                <a:cs typeface="Arial" panose="020B0604020202020204" pitchFamily="34" charset="0"/>
+              </a:rPr>
+              <a:t>valores</a:t>
+            </a:r>
+            <a:r>
+              <a:rPr lang="en-US" sz="1200" dirty="0">
+                <a:latin typeface="Arial" panose="020B0604020202020204" pitchFamily="34" charset="0"/>
+                <a:cs typeface="Arial" panose="020B0604020202020204" pitchFamily="34" charset="0"/>
+              </a:rPr>
+              <a:t> de gap </a:t>
+            </a:r>
+            <a:r>
+              <a:rPr lang="en-US" sz="1200" dirty="0" err="1">
+                <a:latin typeface="Arial" panose="020B0604020202020204" pitchFamily="34" charset="0"/>
+                <a:cs typeface="Arial" panose="020B0604020202020204" pitchFamily="34" charset="0"/>
+              </a:rPr>
+              <a:t>estarán</a:t>
+            </a:r>
+            <a:r>
+              <a:rPr lang="en-US" sz="1200" dirty="0">
+                <a:latin typeface="Arial" panose="020B0604020202020204" pitchFamily="34" charset="0"/>
+                <a:cs typeface="Arial" panose="020B0604020202020204" pitchFamily="34" charset="0"/>
+              </a:rPr>
+              <a:t> entre [0.7,0.9] </a:t>
+            </a:r>
+            <a:r>
+              <a:rPr lang="en-US" sz="1200" dirty="0" err="1">
+                <a:latin typeface="Arial" panose="020B0604020202020204" pitchFamily="34" charset="0"/>
+                <a:cs typeface="Arial" panose="020B0604020202020204" pitchFamily="34" charset="0"/>
+              </a:rPr>
+              <a:t>ya</a:t>
+            </a:r>
+            <a:r>
+              <a:rPr lang="en-US" sz="1200" dirty="0">
+                <a:latin typeface="Arial" panose="020B0604020202020204" pitchFamily="34" charset="0"/>
+                <a:cs typeface="Arial" panose="020B0604020202020204" pitchFamily="34" charset="0"/>
+              </a:rPr>
+              <a:t> que </a:t>
+            </a:r>
+            <a:r>
+              <a:rPr lang="en-US" sz="1200" dirty="0" err="1">
+                <a:latin typeface="Arial" panose="020B0604020202020204" pitchFamily="34" charset="0"/>
+                <a:cs typeface="Arial" panose="020B0604020202020204" pitchFamily="34" charset="0"/>
+              </a:rPr>
+              <a:t>presentan</a:t>
+            </a:r>
+            <a:r>
+              <a:rPr lang="en-US" sz="1200" dirty="0">
+                <a:latin typeface="Arial" panose="020B0604020202020204" pitchFamily="34" charset="0"/>
+                <a:cs typeface="Arial" panose="020B0604020202020204" pitchFamily="34" charset="0"/>
+              </a:rPr>
+              <a:t> las </a:t>
+            </a:r>
+            <a:r>
+              <a:rPr lang="en-US" sz="1200" dirty="0" err="1">
+                <a:latin typeface="Arial" panose="020B0604020202020204" pitchFamily="34" charset="0"/>
+                <a:cs typeface="Arial" panose="020B0604020202020204" pitchFamily="34" charset="0"/>
+              </a:rPr>
+              <a:t>pérdidas</a:t>
+            </a:r>
+            <a:r>
+              <a:rPr lang="en-US" sz="1200" dirty="0">
+                <a:latin typeface="Arial" panose="020B0604020202020204" pitchFamily="34" charset="0"/>
+                <a:cs typeface="Arial" panose="020B0604020202020204" pitchFamily="34" charset="0"/>
+              </a:rPr>
+              <a:t> </a:t>
+            </a:r>
+            <a:r>
+              <a:rPr lang="en-US" sz="1200" dirty="0" err="1">
+                <a:latin typeface="Arial" panose="020B0604020202020204" pitchFamily="34" charset="0"/>
+                <a:cs typeface="Arial" panose="020B0604020202020204" pitchFamily="34" charset="0"/>
+              </a:rPr>
+              <a:t>más</a:t>
+            </a:r>
+            <a:r>
+              <a:rPr lang="en-US" sz="1200" dirty="0">
+                <a:latin typeface="Arial" panose="020B0604020202020204" pitchFamily="34" charset="0"/>
+                <a:cs typeface="Arial" panose="020B0604020202020204" pitchFamily="34" charset="0"/>
+              </a:rPr>
+              <a:t> </a:t>
+            </a:r>
+            <a:r>
+              <a:rPr lang="en-US" sz="1200" dirty="0" err="1">
+                <a:latin typeface="Arial" panose="020B0604020202020204" pitchFamily="34" charset="0"/>
+                <a:cs typeface="Arial" panose="020B0604020202020204" pitchFamily="34" charset="0"/>
+              </a:rPr>
+              <a:t>bajas</a:t>
+            </a:r>
+            <a:r>
+              <a:rPr lang="en-US" sz="1200" dirty="0">
+                <a:latin typeface="Arial" panose="020B0604020202020204" pitchFamily="34" charset="0"/>
+                <a:cs typeface="Arial" panose="020B0604020202020204" pitchFamily="34" charset="0"/>
+              </a:rPr>
+              <a:t> y a </a:t>
+            </a:r>
+            <a:r>
+              <a:rPr lang="en-US" sz="1200" dirty="0" err="1">
+                <a:latin typeface="Arial" panose="020B0604020202020204" pitchFamily="34" charset="0"/>
+                <a:cs typeface="Arial" panose="020B0604020202020204" pitchFamily="34" charset="0"/>
+              </a:rPr>
+              <a:t>su</a:t>
+            </a:r>
+            <a:r>
+              <a:rPr lang="en-US" sz="1200" dirty="0">
+                <a:latin typeface="Arial" panose="020B0604020202020204" pitchFamily="34" charset="0"/>
+                <a:cs typeface="Arial" panose="020B0604020202020204" pitchFamily="34" charset="0"/>
+              </a:rPr>
+              <a:t> </a:t>
+            </a:r>
+            <a:r>
+              <a:rPr lang="en-US" sz="1200" dirty="0" err="1">
+                <a:latin typeface="Arial" panose="020B0604020202020204" pitchFamily="34" charset="0"/>
+                <a:cs typeface="Arial" panose="020B0604020202020204" pitchFamily="34" charset="0"/>
+              </a:rPr>
+              <a:t>vez</a:t>
+            </a:r>
+            <a:r>
+              <a:rPr lang="en-US" sz="1200" dirty="0">
+                <a:latin typeface="Arial" panose="020B0604020202020204" pitchFamily="34" charset="0"/>
+                <a:cs typeface="Arial" panose="020B0604020202020204" pitchFamily="34" charset="0"/>
+              </a:rPr>
+              <a:t> un ratio de </a:t>
+            </a:r>
+            <a:r>
+              <a:rPr lang="en-US" sz="1200" dirty="0" err="1">
+                <a:latin typeface="Arial" panose="020B0604020202020204" pitchFamily="34" charset="0"/>
+                <a:cs typeface="Arial" panose="020B0604020202020204" pitchFamily="34" charset="0"/>
+              </a:rPr>
+              <a:t>salida</a:t>
+            </a:r>
+            <a:r>
+              <a:rPr lang="en-US" sz="1200" dirty="0">
+                <a:latin typeface="Arial" panose="020B0604020202020204" pitchFamily="34" charset="0"/>
+                <a:cs typeface="Arial" panose="020B0604020202020204" pitchFamily="34" charset="0"/>
+              </a:rPr>
+              <a:t> </a:t>
+            </a:r>
+            <a:r>
+              <a:rPr lang="en-US" sz="1200" dirty="0" err="1">
+                <a:latin typeface="Arial" panose="020B0604020202020204" pitchFamily="34" charset="0"/>
+                <a:cs typeface="Arial" panose="020B0604020202020204" pitchFamily="34" charset="0"/>
+              </a:rPr>
+              <a:t>bastante</a:t>
+            </a:r>
+            <a:r>
+              <a:rPr lang="en-US" sz="1200" dirty="0">
+                <a:latin typeface="Arial" panose="020B0604020202020204" pitchFamily="34" charset="0"/>
+                <a:cs typeface="Arial" panose="020B0604020202020204" pitchFamily="34" charset="0"/>
+              </a:rPr>
+              <a:t> </a:t>
+            </a:r>
+            <a:r>
+              <a:rPr lang="en-US" sz="1200" dirty="0" err="1">
+                <a:latin typeface="Arial" panose="020B0604020202020204" pitchFamily="34" charset="0"/>
+                <a:cs typeface="Arial" panose="020B0604020202020204" pitchFamily="34" charset="0"/>
+              </a:rPr>
+              <a:t>cercano</a:t>
+            </a:r>
+            <a:r>
+              <a:rPr lang="en-US" sz="1200" dirty="0">
+                <a:latin typeface="Arial" panose="020B0604020202020204" pitchFamily="34" charset="0"/>
+                <a:cs typeface="Arial" panose="020B0604020202020204" pitchFamily="34" charset="0"/>
+              </a:rPr>
+              <a:t> a 1 que es </a:t>
+            </a:r>
+            <a:r>
+              <a:rPr lang="en-US" sz="1200" dirty="0" err="1">
+                <a:latin typeface="Arial" panose="020B0604020202020204" pitchFamily="34" charset="0"/>
+                <a:cs typeface="Arial" panose="020B0604020202020204" pitchFamily="34" charset="0"/>
+              </a:rPr>
+              <a:t>el</a:t>
+            </a:r>
+            <a:r>
+              <a:rPr lang="en-US" sz="1200" dirty="0">
+                <a:latin typeface="Arial" panose="020B0604020202020204" pitchFamily="34" charset="0"/>
+                <a:cs typeface="Arial" panose="020B0604020202020204" pitchFamily="34" charset="0"/>
+              </a:rPr>
+              <a:t> </a:t>
+            </a:r>
+            <a:r>
+              <a:rPr lang="en-US" sz="1200" dirty="0" err="1">
+                <a:latin typeface="Arial" panose="020B0604020202020204" pitchFamily="34" charset="0"/>
+                <a:cs typeface="Arial" panose="020B0604020202020204" pitchFamily="34" charset="0"/>
+              </a:rPr>
+              <a:t>caso</a:t>
+            </a:r>
+            <a:r>
+              <a:rPr lang="en-US" sz="1200" dirty="0">
+                <a:latin typeface="Arial" panose="020B0604020202020204" pitchFamily="34" charset="0"/>
+                <a:cs typeface="Arial" panose="020B0604020202020204" pitchFamily="34" charset="0"/>
+              </a:rPr>
+              <a:t> ideal.</a:t>
+            </a:r>
+          </a:p>
+          <a:p>
+            <a:pPr algn="just"/>
+            <a:endParaRPr lang="en-US" sz="1200" dirty="0">
+              <a:latin typeface="Arial" panose="020B0604020202020204" pitchFamily="34" charset="0"/>
+              <a:cs typeface="Arial" panose="020B0604020202020204" pitchFamily="34" charset="0"/>
+            </a:endParaRPr>
+          </a:p>
+          <a:p>
+            <a:pPr algn="just"/>
+            <a:endParaRPr lang="en-US" sz="1200" dirty="0">
+              <a:latin typeface="Arial" panose="020B0604020202020204" pitchFamily="34" charset="0"/>
+              <a:cs typeface="Arial" panose="020B0604020202020204" pitchFamily="34" charset="0"/>
+            </a:endParaRPr>
+          </a:p>
+          <a:p>
+            <a:pPr algn="just"/>
+            <a:endParaRPr lang="en-US" sz="1200" dirty="0">
+              <a:latin typeface="Arial" panose="020B0604020202020204" pitchFamily="34" charset="0"/>
+              <a:cs typeface="Arial" panose="020B0604020202020204" pitchFamily="34" charset="0"/>
+            </a:endParaRPr>
+          </a:p>
+          <a:p>
+            <a:pPr algn="just"/>
+            <a:endParaRPr lang="en-US" sz="1200" dirty="0">
+              <a:latin typeface="Arial" panose="020B0604020202020204" pitchFamily="34" charset="0"/>
+              <a:cs typeface="Arial" panose="020B0604020202020204" pitchFamily="34" charset="0"/>
+            </a:endParaRPr>
+          </a:p>
+        </p:txBody>
+      </p:sp>
+    </p:spTree>
+    <p:extLst>
+      <p:ext uri="{BB962C8B-B14F-4D97-AF65-F5344CB8AC3E}">
+        <p14:creationId xmlns:p14="http://schemas.microsoft.com/office/powerpoint/2010/main" val="3532243534"/>
+      </p:ext>
+    </p:extLst>
+  </p:cSld>
+  <p:clrMapOvr>
+    <a:masterClrMapping/>
+  </p:clrMapOvr>
+</p:sld>
+</file>
+
+<file path=ppt/slides/slide8.xml><?xml version="1.0" encoding="utf-8"?>
+<p:sld xmlns:a="http://schemas.openxmlformats.org/drawingml/2006/main" xmlns:r="http://schemas.openxmlformats.org/officeDocument/2006/relationships" xmlns:p="http://schemas.openxmlformats.org/presentationml/2006/main">
+  <p:cSld>
+    <p:spTree>
+      <p:nvGrpSpPr>
+        <p:cNvPr id="1" name="">
+          <a:extLst>
+            <a:ext uri="{FF2B5EF4-FFF2-40B4-BE49-F238E27FC236}">
               <a16:creationId xmlns:a16="http://schemas.microsoft.com/office/drawing/2014/main" id="{371656EC-E197-239C-60DD-C11F7BA4B44A}"/>
             </a:ext>
           </a:extLst>
@@ -13752,7 +14612,7 @@
           <a:p>
             <a:fld id="{B6F15528-21DE-4FAA-801E-634DDDAF4B2B}" type="slidenum">
               <a:rPr lang="es-ES" smtClean="0"/>
-              <a:t>7</a:t>
+              <a:t>8</a:t>
             </a:fld>
             <a:endParaRPr lang="es-ES"/>
           </a:p>
@@ -13807,7 +14667,7 @@
         <p:spPr>
           <a:xfrm>
             <a:off x="609441" y="4627196"/>
-            <a:ext cx="11199971" cy="2123658"/>
+            <a:ext cx="11199971" cy="1569660"/>
           </a:xfrm>
           <a:prstGeom prst="rect">
             <a:avLst/>
@@ -13831,67 +14691,109 @@
           <a:p>
             <a:pPr algn="just"/>
             <a:r>
-              <a:rPr lang="en-US" sz="1200" b="1" dirty="0">
-                <a:latin typeface="Arial" panose="020B0604020202020204" pitchFamily="34" charset="0"/>
-                <a:cs typeface="Arial" panose="020B0604020202020204" pitchFamily="34" charset="0"/>
-              </a:rPr>
-              <a:t>Hints:</a:t>
+              <a:rPr lang="es-ES" sz="1200" dirty="0">
+                <a:latin typeface="Arial" panose="020B0604020202020204" pitchFamily="34" charset="0"/>
+                <a:cs typeface="Arial" panose="020B0604020202020204" pitchFamily="34" charset="0"/>
+              </a:rPr>
+              <a:t>Para que las guías estén desacopladas, Lπ debe ser mayor que L para minimizar K. Se podrían escoger valores de gap relativamente pequeños que cumplan la condición, pero como K es oscilatorio, en algunos puntos puede acercarse a 0 de manera accidental; sin embargo, las guías no estarán realmente desacopladas.</a:t>
             </a:r>
           </a:p>
           <a:p>
             <a:pPr algn="just"/>
-            <a:r>
-              <a:rPr lang="en-US" sz="1200" dirty="0">
-                <a:latin typeface="Arial" panose="020B0604020202020204" pitchFamily="34" charset="0"/>
-                <a:cs typeface="Arial" panose="020B0604020202020204" pitchFamily="34" charset="0"/>
-              </a:rPr>
-              <a:t>All waveguides running in parallel are coupled somehow. Controlling the degree of coupling is key for those waveguides you don’t want coupling over certain level (i.e. uncoupled waveguides). Uncoupled waveguide definition, we will use K&lt;0.01. Parallel waveguide length = 10 mm (typical length of a chip). Find minimum gap shallow / deep w=1.0µm </a:t>
-            </a:r>
-            <a:r>
-              <a:rPr lang="en-US" sz="1200" dirty="0" err="1">
-                <a:latin typeface="Arial" panose="020B0604020202020204" pitchFamily="34" charset="0"/>
-                <a:cs typeface="Arial" panose="020B0604020202020204" pitchFamily="34" charset="0"/>
-              </a:rPr>
-              <a:t>wvl</a:t>
-            </a:r>
-            <a:r>
-              <a:rPr lang="en-US" sz="1200" dirty="0">
-                <a:latin typeface="Arial" panose="020B0604020202020204" pitchFamily="34" charset="0"/>
-                <a:cs typeface="Arial" panose="020B0604020202020204" pitchFamily="34" charset="0"/>
-              </a:rPr>
-              <a:t> 1.55 µm.</a:t>
-            </a:r>
-          </a:p>
-          <a:p>
-            <a:pPr algn="just"/>
-            <a:endParaRPr lang="en-US" sz="1200" dirty="0">
+            <a:endParaRPr lang="es-ES" sz="1200" dirty="0">
               <a:latin typeface="Arial" panose="020B0604020202020204" pitchFamily="34" charset="0"/>
               <a:cs typeface="Arial" panose="020B0604020202020204" pitchFamily="34" charset="0"/>
             </a:endParaRPr>
           </a:p>
           <a:p>
             <a:pPr algn="just"/>
-            <a:endParaRPr lang="en-US" sz="1200" dirty="0">
+            <a:r>
+              <a:rPr lang="es-ES" sz="1200" dirty="0">
+                <a:latin typeface="Arial" panose="020B0604020202020204" pitchFamily="34" charset="0"/>
+                <a:cs typeface="Arial" panose="020B0604020202020204" pitchFamily="34" charset="0"/>
+              </a:rPr>
+              <a:t>Para el caso </a:t>
+            </a:r>
+            <a:r>
+              <a:rPr lang="es-ES" sz="1200" dirty="0" err="1">
+                <a:latin typeface="Arial" panose="020B0604020202020204" pitchFamily="34" charset="0"/>
+                <a:cs typeface="Arial" panose="020B0604020202020204" pitchFamily="34" charset="0"/>
+              </a:rPr>
+              <a:t>deep</a:t>
+            </a:r>
+            <a:r>
+              <a:rPr lang="es-ES" sz="1200" dirty="0">
+                <a:latin typeface="Arial" panose="020B0604020202020204" pitchFamily="34" charset="0"/>
+                <a:cs typeface="Arial" panose="020B0604020202020204" pitchFamily="34" charset="0"/>
+              </a:rPr>
+              <a:t> obtenemos un gap de 3.6 </a:t>
+            </a:r>
+            <a:r>
+              <a:rPr lang="es-ES" sz="1200" dirty="0" err="1">
+                <a:latin typeface="Arial" panose="020B0604020202020204" pitchFamily="34" charset="0"/>
+                <a:cs typeface="Arial" panose="020B0604020202020204" pitchFamily="34" charset="0"/>
+              </a:rPr>
+              <a:t>um</a:t>
+            </a:r>
+            <a:r>
+              <a:rPr lang="es-ES" sz="1200" dirty="0">
+                <a:latin typeface="Arial" panose="020B0604020202020204" pitchFamily="34" charset="0"/>
+                <a:cs typeface="Arial" panose="020B0604020202020204" pitchFamily="34" charset="0"/>
+              </a:rPr>
+              <a:t> y cumple con que el </a:t>
+            </a:r>
+            <a:r>
+              <a:rPr lang="es-ES" sz="1200" dirty="0" err="1">
+                <a:latin typeface="Arial" panose="020B0604020202020204" pitchFamily="34" charset="0"/>
+                <a:cs typeface="Arial" panose="020B0604020202020204" pitchFamily="34" charset="0"/>
+              </a:rPr>
+              <a:t>Lpi</a:t>
+            </a:r>
+            <a:r>
+              <a:rPr lang="es-ES" sz="1200" dirty="0">
+                <a:latin typeface="Arial" panose="020B0604020202020204" pitchFamily="34" charset="0"/>
+                <a:cs typeface="Arial" panose="020B0604020202020204" pitchFamily="34" charset="0"/>
+              </a:rPr>
+              <a:t> correspondiente (183.91 mm) es mucho mayor que L.</a:t>
+            </a:r>
+          </a:p>
+          <a:p>
+            <a:pPr algn="just"/>
+            <a:endParaRPr lang="es-ES" sz="1200" dirty="0">
               <a:latin typeface="Arial" panose="020B0604020202020204" pitchFamily="34" charset="0"/>
               <a:cs typeface="Arial" panose="020B0604020202020204" pitchFamily="34" charset="0"/>
             </a:endParaRPr>
           </a:p>
           <a:p>
             <a:pPr algn="just"/>
-            <a:endParaRPr lang="en-US" sz="1200" dirty="0">
-              <a:latin typeface="Arial" panose="020B0604020202020204" pitchFamily="34" charset="0"/>
-              <a:cs typeface="Arial" panose="020B0604020202020204" pitchFamily="34" charset="0"/>
-            </a:endParaRPr>
-          </a:p>
-          <a:p>
-            <a:pPr algn="just"/>
-            <a:endParaRPr lang="en-US" sz="1200" dirty="0">
-              <a:latin typeface="Arial" panose="020B0604020202020204" pitchFamily="34" charset="0"/>
-              <a:cs typeface="Arial" panose="020B0604020202020204" pitchFamily="34" charset="0"/>
-            </a:endParaRPr>
-          </a:p>
-          <a:p>
-            <a:pPr algn="just"/>
+            <a:r>
+              <a:rPr lang="es-ES" sz="1200" dirty="0">
+                <a:latin typeface="Arial" panose="020B0604020202020204" pitchFamily="34" charset="0"/>
+                <a:cs typeface="Arial" panose="020B0604020202020204" pitchFamily="34" charset="0"/>
+              </a:rPr>
+              <a:t>Para el </a:t>
+            </a:r>
+            <a:r>
+              <a:rPr lang="es-ES" sz="1200" dirty="0" err="1">
+                <a:latin typeface="Arial" panose="020B0604020202020204" pitchFamily="34" charset="0"/>
+                <a:cs typeface="Arial" panose="020B0604020202020204" pitchFamily="34" charset="0"/>
+              </a:rPr>
+              <a:t>shallow</a:t>
+            </a:r>
+            <a:r>
+              <a:rPr lang="es-ES" sz="1200" dirty="0">
+                <a:latin typeface="Arial" panose="020B0604020202020204" pitchFamily="34" charset="0"/>
+                <a:cs typeface="Arial" panose="020B0604020202020204" pitchFamily="34" charset="0"/>
+              </a:rPr>
+              <a:t>, he cambiado la función eme.py porque no calculaba para casos </a:t>
+            </a:r>
+            <a:r>
+              <a:rPr lang="es-ES" sz="1200" dirty="0" err="1">
+                <a:latin typeface="Arial" panose="020B0604020202020204" pitchFamily="34" charset="0"/>
+                <a:cs typeface="Arial" panose="020B0604020202020204" pitchFamily="34" charset="0"/>
+              </a:rPr>
+              <a:t>shallow</a:t>
+            </a:r>
             <a:endParaRPr lang="en-US" sz="1200" dirty="0">
               <a:latin typeface="Arial" panose="020B0604020202020204" pitchFamily="34" charset="0"/>
               <a:cs typeface="Arial" panose="020B0604020202020204" pitchFamily="34" charset="0"/>
@@ -14263,6 +15165,36 @@
           </p:sp>
         </mc:Fallback>
       </mc:AlternateContent>
+      <p:pic>
+        <p:nvPicPr>
+          <p:cNvPr id="11" name="Imagen 10">
+            <a:extLst>
+              <a:ext uri="{FF2B5EF4-FFF2-40B4-BE49-F238E27FC236}">
+                <a16:creationId xmlns:a16="http://schemas.microsoft.com/office/drawing/2014/main" id="{7E247DFD-2CDE-45D3-AEA7-3AB69BC63D90}"/>
+              </a:ext>
+            </a:extLst>
+          </p:cNvPr>
+          <p:cNvPicPr>
+            <a:picLocks noChangeAspect="1"/>
+          </p:cNvPicPr>
+          <p:nvPr/>
+        </p:nvPicPr>
+        <p:blipFill>
+          <a:blip r:embed="rId7"/>
+          <a:stretch>
+            <a:fillRect/>
+          </a:stretch>
+        </p:blipFill>
+        <p:spPr>
+          <a:xfrm>
+            <a:off x="1450567" y="1369645"/>
+            <a:ext cx="3804305" cy="3005137"/>
+          </a:xfrm>
+          <a:prstGeom prst="rect">
+            <a:avLst/>
+          </a:prstGeom>
+        </p:spPr>
+      </p:pic>
     </p:spTree>
     <p:extLst>
       <p:ext uri="{BB962C8B-B14F-4D97-AF65-F5344CB8AC3E}">
@@ -14276,7 +15208,7 @@
 </p:sld>
 </file>
 
-<file path=ppt/slides/slide8.xml><?xml version="1.0" encoding="utf-8"?>
+<file path=ppt/slides/slide9.xml><?xml version="1.0" encoding="utf-8"?>
 <p:sld xmlns:a="http://schemas.openxmlformats.org/drawingml/2006/main" xmlns:r="http://schemas.openxmlformats.org/officeDocument/2006/relationships" xmlns:p="http://schemas.openxmlformats.org/presentationml/2006/main">
   <p:cSld>
     <p:spTree>
@@ -14356,7 +15288,7 @@
           <a:p>
             <a:fld id="{B6F15528-21DE-4FAA-801E-634DDDAF4B2B}" type="slidenum">
               <a:rPr lang="es-ES" smtClean="0"/>
-              <a:t>8</a:t>
+              <a:t>9</a:t>
             </a:fld>
             <a:endParaRPr lang="es-ES"/>
           </a:p>
@@ -14408,436 +15340,6 @@
     <p:extLst>
       <p:ext uri="{BB962C8B-B14F-4D97-AF65-F5344CB8AC3E}">
         <p14:creationId xmlns:p14="http://schemas.microsoft.com/office/powerpoint/2010/main" val="3873318961"/>
-      </p:ext>
-    </p:extLst>
-  </p:cSld>
-  <p:clrMapOvr>
-    <a:masterClrMapping/>
-  </p:clrMapOvr>
-</p:sld>
-</file>
-
-<file path=ppt/slides/slide9.xml><?xml version="1.0" encoding="utf-8"?>
-<p:sld xmlns:a="http://schemas.openxmlformats.org/drawingml/2006/main" xmlns:r="http://schemas.openxmlformats.org/officeDocument/2006/relationships" xmlns:p="http://schemas.openxmlformats.org/presentationml/2006/main">
-  <p:cSld>
-    <p:spTree>
-      <p:nvGrpSpPr>
-        <p:cNvPr id="1" name="">
-          <a:extLst>
-            <a:ext uri="{FF2B5EF4-FFF2-40B4-BE49-F238E27FC236}">
-              <a16:creationId xmlns:a16="http://schemas.microsoft.com/office/drawing/2014/main" id="{91BF7C0E-2677-BADF-D636-6F9B71E665FA}"/>
-            </a:ext>
-          </a:extLst>
-        </p:cNvPr>
-        <p:cNvGrpSpPr/>
-        <p:nvPr/>
-      </p:nvGrpSpPr>
-      <p:grpSpPr>
-        <a:xfrm>
-          <a:off x="0" y="0"/>
-          <a:ext cx="0" cy="0"/>
-          <a:chOff x="0" y="0"/>
-          <a:chExt cx="0" cy="0"/>
-        </a:xfrm>
-      </p:grpSpPr>
-      <p:sp>
-        <p:nvSpPr>
-          <p:cNvPr id="16" name="object 16">
-            <a:extLst>
-              <a:ext uri="{FF2B5EF4-FFF2-40B4-BE49-F238E27FC236}">
-                <a16:creationId xmlns:a16="http://schemas.microsoft.com/office/drawing/2014/main" id="{2B8D44BF-A3B5-6BED-C39C-FA8260E83536}"/>
-              </a:ext>
-            </a:extLst>
-          </p:cNvPr>
-          <p:cNvSpPr txBox="1">
-            <a:spLocks noGrp="1"/>
-          </p:cNvSpPr>
-          <p:nvPr>
-            <p:ph type="title"/>
-          </p:nvPr>
-        </p:nvSpPr>
-        <p:spPr>
-          <a:xfrm>
-            <a:off x="685800" y="408883"/>
-            <a:ext cx="10994410" cy="705321"/>
-          </a:xfrm>
-          <a:prstGeom prst="rect">
-            <a:avLst/>
-          </a:prstGeom>
-        </p:spPr>
-        <p:txBody>
-          <a:bodyPr vert="horz" wrap="square" lIns="0" tIns="12700" rIns="0" bIns="0" rtlCol="0">
-            <a:spAutoFit/>
-          </a:bodyPr>
-          <a:lstStyle/>
-          <a:p>
-            <a:pPr marL="12700">
-              <a:lnSpc>
-                <a:spcPct val="100000"/>
-              </a:lnSpc>
-              <a:spcBef>
-                <a:spcPts val="100"/>
-              </a:spcBef>
-            </a:pPr>
-            <a:r>
-              <a:rPr lang="en-US" sz="2500" dirty="0"/>
-              <a:t>Learning outcome #4 – 4.1 2x2 Multimode Interference Coupler </a:t>
-            </a:r>
-            <a:br>
-              <a:rPr lang="en-US" sz="2500" dirty="0"/>
-            </a:br>
-            <a:r>
-              <a:rPr lang="en-US" b="0" dirty="0"/>
-              <a:t>Wavelength 1.55 µm, </a:t>
-            </a:r>
-            <a:r>
-              <a:rPr lang="en-US" b="0" dirty="0" err="1"/>
-              <a:t>wMMI</a:t>
-            </a:r>
-            <a:r>
-              <a:rPr lang="en-US" b="0" dirty="0"/>
-              <a:t> = 6.6 µm</a:t>
-            </a:r>
-            <a:endParaRPr lang="en-US" sz="2500" b="0" dirty="0">
-              <a:latin typeface="+mj-lt"/>
-              <a:cs typeface="Lucida Sans"/>
-            </a:endParaRPr>
-          </a:p>
-        </p:txBody>
-      </p:sp>
-      <p:pic>
-        <p:nvPicPr>
-          <p:cNvPr id="83" name="Gráfico 82">
-            <a:extLst>
-              <a:ext uri="{FF2B5EF4-FFF2-40B4-BE49-F238E27FC236}">
-                <a16:creationId xmlns:a16="http://schemas.microsoft.com/office/drawing/2014/main" id="{5DFCF1AD-6B06-F914-AC0B-80F0ED838EF9}"/>
-              </a:ext>
-            </a:extLst>
-          </p:cNvPr>
-          <p:cNvPicPr>
-            <a:picLocks noChangeAspect="1"/>
-          </p:cNvPicPr>
-          <p:nvPr/>
-        </p:nvPicPr>
-        <p:blipFill>
-          <a:blip r:embed="rId3">
-            <a:extLst>
-              <a:ext uri="{96DAC541-7B7A-43D3-8B79-37D633B846F1}">
-                <asvg:svgBlip xmlns:asvg="http://schemas.microsoft.com/office/drawing/2016/SVG/main" r:embed="rId4"/>
-              </a:ext>
-            </a:extLst>
-          </a:blip>
-          <a:stretch>
-            <a:fillRect/>
-          </a:stretch>
-        </p:blipFill>
-        <p:spPr>
-          <a:xfrm>
-            <a:off x="5045006" y="6356057"/>
-            <a:ext cx="6409575" cy="363174"/>
-          </a:xfrm>
-          <a:prstGeom prst="rect">
-            <a:avLst/>
-          </a:prstGeom>
-        </p:spPr>
-      </p:pic>
-      <p:sp>
-        <p:nvSpPr>
-          <p:cNvPr id="84" name="Marcador de número de diapositiva 83">
-            <a:extLst>
-              <a:ext uri="{FF2B5EF4-FFF2-40B4-BE49-F238E27FC236}">
-                <a16:creationId xmlns:a16="http://schemas.microsoft.com/office/drawing/2014/main" id="{4A656CCE-66E0-EAE0-5C63-DF1315DF6299}"/>
-              </a:ext>
-            </a:extLst>
-          </p:cNvPr>
-          <p:cNvSpPr>
-            <a:spLocks noGrp="1"/>
-          </p:cNvSpPr>
-          <p:nvPr>
-            <p:ph type="sldNum" sz="quarter" idx="7"/>
-          </p:nvPr>
-        </p:nvSpPr>
-        <p:spPr/>
-        <p:txBody>
-          <a:bodyPr/>
-          <a:lstStyle/>
-          <a:p>
-            <a:fld id="{B6F15528-21DE-4FAA-801E-634DDDAF4B2B}" type="slidenum">
-              <a:rPr lang="es-ES" smtClean="0"/>
-              <a:t>9</a:t>
-            </a:fld>
-            <a:endParaRPr lang="es-ES"/>
-          </a:p>
-        </p:txBody>
-      </p:sp>
-      <p:sp>
-        <p:nvSpPr>
-          <p:cNvPr id="3" name="Marcador de pie de página 2">
-            <a:extLst>
-              <a:ext uri="{FF2B5EF4-FFF2-40B4-BE49-F238E27FC236}">
-                <a16:creationId xmlns:a16="http://schemas.microsoft.com/office/drawing/2014/main" id="{D3AB6581-C493-80EB-A67F-5289454DAA28}"/>
-              </a:ext>
-            </a:extLst>
-          </p:cNvPr>
-          <p:cNvSpPr>
-            <a:spLocks noGrp="1"/>
-          </p:cNvSpPr>
-          <p:nvPr>
-            <p:ph type="ftr" sz="quarter" idx="5"/>
-          </p:nvPr>
-        </p:nvSpPr>
-        <p:spPr/>
-        <p:txBody>
-          <a:bodyPr/>
-          <a:lstStyle/>
-          <a:p>
-            <a:pPr marL="12700">
-              <a:spcBef>
-                <a:spcPts val="15"/>
-              </a:spcBef>
-            </a:pPr>
-            <a:r>
-              <a:rPr lang="es-ES" spc="-5"/>
-              <a:t>LAB 2.0. COUPLERS</a:t>
-            </a:r>
-            <a:endParaRPr lang="es-ES" spc="-5" dirty="0"/>
-          </a:p>
-        </p:txBody>
-      </p:sp>
-      <p:sp>
-        <p:nvSpPr>
-          <p:cNvPr id="2" name="CuadroTexto 1">
-            <a:extLst>
-              <a:ext uri="{FF2B5EF4-FFF2-40B4-BE49-F238E27FC236}">
-                <a16:creationId xmlns:a16="http://schemas.microsoft.com/office/drawing/2014/main" id="{B5029729-ADF3-3B30-4FF9-83BE1DB82BD7}"/>
-              </a:ext>
-            </a:extLst>
-          </p:cNvPr>
-          <p:cNvSpPr txBox="1"/>
-          <p:nvPr/>
-        </p:nvSpPr>
-        <p:spPr>
-          <a:xfrm>
-            <a:off x="609441" y="4819471"/>
-            <a:ext cx="11199971" cy="1200329"/>
-          </a:xfrm>
-          <a:prstGeom prst="rect">
-            <a:avLst/>
-          </a:prstGeom>
-          <a:solidFill>
-            <a:schemeClr val="bg1">
-              <a:lumMod val="95000"/>
-            </a:schemeClr>
-          </a:solidFill>
-          <a:ln w="28575">
-            <a:solidFill>
-              <a:srgbClr val="E0700D"/>
-            </a:solidFill>
-          </a:ln>
-        </p:spPr>
-        <p:txBody>
-          <a:bodyPr wrap="square" rtlCol="0">
-            <a:spAutoFit/>
-          </a:bodyPr>
-          <a:lstStyle/>
-          <a:p>
-            <a:pPr algn="just"/>
-            <a:r>
-              <a:rPr lang="en-US" sz="1200" dirty="0">
-                <a:latin typeface="Arial" panose="020B0604020202020204" pitchFamily="34" charset="0"/>
-                <a:cs typeface="Arial" panose="020B0604020202020204" pitchFamily="34" charset="0"/>
-              </a:rPr>
-              <a:t>Comment results (Coupling relationship, </a:t>
-            </a:r>
-            <a:r>
-              <a:rPr lang="en-US" sz="1200" dirty="0" err="1">
-                <a:latin typeface="Arial" panose="020B0604020202020204" pitchFamily="34" charset="0"/>
-                <a:cs typeface="Arial" panose="020B0604020202020204" pitchFamily="34" charset="0"/>
-              </a:rPr>
-              <a:t>Lpi</a:t>
-            </a:r>
-            <a:r>
-              <a:rPr lang="en-US" sz="1200" dirty="0">
-                <a:latin typeface="Arial" panose="020B0604020202020204" pitchFamily="34" charset="0"/>
-                <a:cs typeface="Arial" panose="020B0604020202020204" pitchFamily="34" charset="0"/>
-              </a:rPr>
-              <a:t>,  losses, comparison with Directional Coupler… )</a:t>
-            </a:r>
-          </a:p>
-          <a:p>
-            <a:pPr algn="just"/>
-            <a:endParaRPr lang="en-US" sz="1200" dirty="0">
-              <a:latin typeface="Arial" panose="020B0604020202020204" pitchFamily="34" charset="0"/>
-              <a:cs typeface="Arial" panose="020B0604020202020204" pitchFamily="34" charset="0"/>
-            </a:endParaRPr>
-          </a:p>
-          <a:p>
-            <a:pPr algn="just"/>
-            <a:endParaRPr lang="en-US" sz="1200" dirty="0">
-              <a:latin typeface="Arial" panose="020B0604020202020204" pitchFamily="34" charset="0"/>
-              <a:cs typeface="Arial" panose="020B0604020202020204" pitchFamily="34" charset="0"/>
-            </a:endParaRPr>
-          </a:p>
-          <a:p>
-            <a:pPr algn="just"/>
-            <a:endParaRPr lang="en-US" sz="1200" dirty="0">
-              <a:latin typeface="Arial" panose="020B0604020202020204" pitchFamily="34" charset="0"/>
-              <a:cs typeface="Arial" panose="020B0604020202020204" pitchFamily="34" charset="0"/>
-            </a:endParaRPr>
-          </a:p>
-          <a:p>
-            <a:pPr algn="just"/>
-            <a:endParaRPr lang="en-US" sz="1200" dirty="0">
-              <a:latin typeface="Arial" panose="020B0604020202020204" pitchFamily="34" charset="0"/>
-              <a:cs typeface="Arial" panose="020B0604020202020204" pitchFamily="34" charset="0"/>
-            </a:endParaRPr>
-          </a:p>
-          <a:p>
-            <a:pPr algn="just"/>
-            <a:endParaRPr lang="en-US" sz="1200" dirty="0">
-              <a:latin typeface="Arial" panose="020B0604020202020204" pitchFamily="34" charset="0"/>
-              <a:cs typeface="Arial" panose="020B0604020202020204" pitchFamily="34" charset="0"/>
-            </a:endParaRPr>
-          </a:p>
-        </p:txBody>
-      </p:sp>
-      <p:sp>
-        <p:nvSpPr>
-          <p:cNvPr id="7" name="Rectángulo 6">
-            <a:extLst>
-              <a:ext uri="{FF2B5EF4-FFF2-40B4-BE49-F238E27FC236}">
-                <a16:creationId xmlns:a16="http://schemas.microsoft.com/office/drawing/2014/main" id="{98DE5FDA-4E91-E843-E84A-1467BFAA9986}"/>
-              </a:ext>
-            </a:extLst>
-          </p:cNvPr>
-          <p:cNvSpPr/>
-          <p:nvPr/>
-        </p:nvSpPr>
-        <p:spPr>
-          <a:xfrm>
-            <a:off x="609441" y="1377510"/>
-            <a:ext cx="11199971" cy="3306028"/>
-          </a:xfrm>
-          <a:prstGeom prst="rect">
-            <a:avLst/>
-          </a:prstGeom>
-          <a:noFill/>
-          <a:ln w="28575">
-            <a:solidFill>
-              <a:srgbClr val="E0700D"/>
-            </a:solidFill>
-          </a:ln>
-        </p:spPr>
-        <p:style>
-          <a:lnRef idx="2">
-            <a:schemeClr val="accent1">
-              <a:shade val="15000"/>
-            </a:schemeClr>
-          </a:lnRef>
-          <a:fillRef idx="1">
-            <a:schemeClr val="accent1"/>
-          </a:fillRef>
-          <a:effectRef idx="0">
-            <a:schemeClr val="accent1"/>
-          </a:effectRef>
-          <a:fontRef idx="minor">
-            <a:schemeClr val="lt1"/>
-          </a:fontRef>
-        </p:style>
-        <p:txBody>
-          <a:bodyPr rtlCol="0" anchor="ctr"/>
-          <a:lstStyle/>
-          <a:p>
-            <a:pPr algn="ctr"/>
-            <a:endParaRPr lang="en-US"/>
-          </a:p>
-        </p:txBody>
-      </p:sp>
-      <p:sp>
-        <p:nvSpPr>
-          <p:cNvPr id="8" name="CuadroTexto 7">
-            <a:extLst>
-              <a:ext uri="{FF2B5EF4-FFF2-40B4-BE49-F238E27FC236}">
-                <a16:creationId xmlns:a16="http://schemas.microsoft.com/office/drawing/2014/main" id="{0DA14DBA-172E-DA2C-0573-6A00BF18F4A5}"/>
-              </a:ext>
-            </a:extLst>
-          </p:cNvPr>
-          <p:cNvSpPr txBox="1"/>
-          <p:nvPr/>
-        </p:nvSpPr>
-        <p:spPr>
-          <a:xfrm>
-            <a:off x="514280" y="2568859"/>
-            <a:ext cx="7718580" cy="923330"/>
-          </a:xfrm>
-          <a:prstGeom prst="rect">
-            <a:avLst/>
-          </a:prstGeom>
-          <a:noFill/>
-        </p:spPr>
-        <p:txBody>
-          <a:bodyPr wrap="square" rtlCol="0">
-            <a:spAutoFit/>
-          </a:bodyPr>
-          <a:lstStyle/>
-          <a:p>
-            <a:pPr algn="ctr"/>
-            <a:r>
-              <a:rPr lang="en-US" b="1" dirty="0"/>
-              <a:t>deep</a:t>
-            </a:r>
-            <a:r>
-              <a:rPr lang="en-US" dirty="0"/>
-              <a:t> waveguide</a:t>
-            </a:r>
-          </a:p>
-          <a:p>
-            <a:pPr algn="ctr"/>
-            <a:endParaRPr lang="en-US" dirty="0"/>
-          </a:p>
-          <a:p>
-            <a:pPr algn="ctr"/>
-            <a:r>
-              <a:rPr lang="en-US" dirty="0"/>
-              <a:t>Paste propagation plots and console results</a:t>
-            </a:r>
-          </a:p>
-        </p:txBody>
-      </p:sp>
-      <p:pic>
-        <p:nvPicPr>
-          <p:cNvPr id="5" name="Imagen 4">
-            <a:extLst>
-              <a:ext uri="{FF2B5EF4-FFF2-40B4-BE49-F238E27FC236}">
-                <a16:creationId xmlns:a16="http://schemas.microsoft.com/office/drawing/2014/main" id="{0306A81B-1DE7-4993-A6AA-D02ECE945160}"/>
-              </a:ext>
-            </a:extLst>
-          </p:cNvPr>
-          <p:cNvPicPr>
-            <a:picLocks noChangeAspect="1"/>
-          </p:cNvPicPr>
-          <p:nvPr/>
-        </p:nvPicPr>
-        <p:blipFill>
-          <a:blip r:embed="rId5"/>
-          <a:stretch>
-            <a:fillRect/>
-          </a:stretch>
-        </p:blipFill>
-        <p:spPr>
-          <a:xfrm>
-            <a:off x="4252719" y="1484955"/>
-            <a:ext cx="3686562" cy="3091138"/>
-          </a:xfrm>
-          <a:prstGeom prst="rect">
-            <a:avLst/>
-          </a:prstGeom>
-        </p:spPr>
-      </p:pic>
-    </p:spTree>
-    <p:extLst>
-      <p:ext uri="{BB962C8B-B14F-4D97-AF65-F5344CB8AC3E}">
-        <p14:creationId xmlns:p14="http://schemas.microsoft.com/office/powerpoint/2010/main" val="2815679427"/>
       </p:ext>
     </p:extLst>
   </p:cSld>

--- a/LabBook_20.pptx
+++ b/LabBook_20.pptx
@@ -4437,7 +4437,7 @@
         <p:spPr>
           <a:xfrm>
             <a:off x="609441" y="4819471"/>
-            <a:ext cx="11199971" cy="1200329"/>
+            <a:ext cx="11199971" cy="1384995"/>
           </a:xfrm>
           <a:prstGeom prst="rect">
             <a:avLst/>
@@ -4580,13 +4580,27 @@
                 <a:latin typeface="Arial" panose="020B0604020202020204" pitchFamily="34" charset="0"/>
                 <a:cs typeface="Arial" panose="020B0604020202020204" pitchFamily="34" charset="0"/>
               </a:rPr>
-              <a:t> de 0.4217 dB y un ratio de </a:t>
+              <a:t> </a:t>
             </a:r>
             <a:r>
               <a:rPr lang="en-US" sz="1200" dirty="0" err="1">
                 <a:latin typeface="Arial" panose="020B0604020202020204" pitchFamily="34" charset="0"/>
                 <a:cs typeface="Arial" panose="020B0604020202020204" pitchFamily="34" charset="0"/>
               </a:rPr>
+              <a:t>sobre</a:t>
+            </a:r>
+            <a:r>
+              <a:rPr lang="en-US" sz="1200" dirty="0">
+                <a:latin typeface="Arial" panose="020B0604020202020204" pitchFamily="34" charset="0"/>
+                <a:cs typeface="Arial" panose="020B0604020202020204" pitchFamily="34" charset="0"/>
+              </a:rPr>
+              <a:t> 0.42 dB y un ratio de </a:t>
+            </a:r>
+            <a:r>
+              <a:rPr lang="en-US" sz="1200" dirty="0" err="1">
+                <a:latin typeface="Arial" panose="020B0604020202020204" pitchFamily="34" charset="0"/>
+                <a:cs typeface="Arial" panose="020B0604020202020204" pitchFamily="34" charset="0"/>
+              </a:rPr>
               <a:t>salida</a:t>
             </a:r>
             <a:r>
@@ -4622,7 +4636,63 @@
                 <a:latin typeface="Arial" panose="020B0604020202020204" pitchFamily="34" charset="0"/>
                 <a:cs typeface="Arial" panose="020B0604020202020204" pitchFamily="34" charset="0"/>
               </a:rPr>
-              <a:t> (0.5152 y 0.4848)</a:t>
+              <a:t> (0.5152 y 0.4848). Buena </a:t>
+            </a:r>
+            <a:r>
+              <a:rPr lang="en-US" sz="1200" dirty="0" err="1">
+                <a:latin typeface="Arial" panose="020B0604020202020204" pitchFamily="34" charset="0"/>
+                <a:cs typeface="Arial" panose="020B0604020202020204" pitchFamily="34" charset="0"/>
+              </a:rPr>
+              <a:t>aproximación</a:t>
+            </a:r>
+            <a:r>
+              <a:rPr lang="en-US" sz="1200" dirty="0">
+                <a:latin typeface="Arial" panose="020B0604020202020204" pitchFamily="34" charset="0"/>
+                <a:cs typeface="Arial" panose="020B0604020202020204" pitchFamily="34" charset="0"/>
+              </a:rPr>
+              <a:t> </a:t>
+            </a:r>
+            <a:r>
+              <a:rPr lang="en-US" sz="1200" dirty="0" err="1">
+                <a:latin typeface="Arial" panose="020B0604020202020204" pitchFamily="34" charset="0"/>
+                <a:cs typeface="Arial" panose="020B0604020202020204" pitchFamily="34" charset="0"/>
+              </a:rPr>
+              <a:t>pero</a:t>
+            </a:r>
+            <a:r>
+              <a:rPr lang="en-US" sz="1200" dirty="0">
+                <a:latin typeface="Arial" panose="020B0604020202020204" pitchFamily="34" charset="0"/>
+                <a:cs typeface="Arial" panose="020B0604020202020204" pitchFamily="34" charset="0"/>
+              </a:rPr>
+              <a:t> </a:t>
+            </a:r>
+            <a:r>
+              <a:rPr lang="en-US" sz="1200" dirty="0" err="1">
+                <a:latin typeface="Arial" panose="020B0604020202020204" pitchFamily="34" charset="0"/>
+                <a:cs typeface="Arial" panose="020B0604020202020204" pitchFamily="34" charset="0"/>
+              </a:rPr>
+              <a:t>falta</a:t>
+            </a:r>
+            <a:r>
+              <a:rPr lang="en-US" sz="1200" dirty="0">
+                <a:latin typeface="Arial" panose="020B0604020202020204" pitchFamily="34" charset="0"/>
+                <a:cs typeface="Arial" panose="020B0604020202020204" pitchFamily="34" charset="0"/>
+              </a:rPr>
+              <a:t> </a:t>
+            </a:r>
+            <a:r>
+              <a:rPr lang="en-US" sz="1200" dirty="0" err="1">
+                <a:latin typeface="Arial" panose="020B0604020202020204" pitchFamily="34" charset="0"/>
+                <a:cs typeface="Arial" panose="020B0604020202020204" pitchFamily="34" charset="0"/>
+              </a:rPr>
+              <a:t>optimizarlo</a:t>
+            </a:r>
+            <a:r>
+              <a:rPr lang="en-US" sz="1200" dirty="0">
+                <a:latin typeface="Arial" panose="020B0604020202020204" pitchFamily="34" charset="0"/>
+                <a:cs typeface="Arial" panose="020B0604020202020204" pitchFamily="34" charset="0"/>
+              </a:rPr>
+              <a:t>.</a:t>
             </a:r>
           </a:p>
           <a:p>
@@ -4945,7 +5015,7 @@
         <p:spPr>
           <a:xfrm>
             <a:off x="609441" y="4819471"/>
-            <a:ext cx="11199971" cy="1415772"/>
+            <a:ext cx="11199971" cy="1200329"/>
           </a:xfrm>
           <a:prstGeom prst="rect">
             <a:avLst/>
@@ -5081,61 +5151,161 @@
                 <a:latin typeface="Arial" panose="020B0604020202020204" pitchFamily="34" charset="0"/>
                 <a:cs typeface="Arial" panose="020B0604020202020204" pitchFamily="34" charset="0"/>
               </a:rPr>
-              <a:t> de 0.330 dB y un ratio de 0.5055 y 0.4945</a:t>
-            </a:r>
-          </a:p>
-          <a:p>
-            <a:pPr algn="r"/>
-            <a:r>
-              <a:rPr lang="en-US" sz="1000" b="1" dirty="0"/>
-              <a:t>Target</a:t>
-            </a:r>
-            <a:r>
-              <a:rPr lang="en-US" sz="1000" dirty="0"/>
-              <a:t>: make equal ratio over outputs (even if not 0.5) and minimize excess loss (even if not 0.0 dB)</a:t>
-            </a:r>
-          </a:p>
-          <a:p>
-            <a:pPr algn="r"/>
-            <a:r>
-              <a:rPr lang="en-US" sz="1000" dirty="0"/>
-              <a:t>With same settings of previous LO, now adjust try to manually optimize the MMI by changing iteratively:</a:t>
-            </a:r>
-          </a:p>
-          <a:p>
-            <a:pPr algn="r"/>
-            <a:r>
-              <a:rPr lang="en-US" sz="1000" dirty="0"/>
-              <a:t>- Change </a:t>
-            </a:r>
-            <a:r>
-              <a:rPr lang="en-US" sz="1000" dirty="0" err="1"/>
-              <a:t>dL_MMI</a:t>
-            </a:r>
-            <a:endParaRPr lang="en-US" sz="1000" dirty="0"/>
-          </a:p>
-          <a:p>
-            <a:pPr algn="r"/>
-            <a:r>
-              <a:rPr lang="en-US" sz="1000" dirty="0"/>
-              <a:t>- Change I/O waveguide position +/- </a:t>
-            </a:r>
-            <a:r>
-              <a:rPr lang="en-US" sz="1000" dirty="0" err="1"/>
-              <a:t>dy</a:t>
-            </a:r>
-            <a:endParaRPr lang="en-US" sz="1000" dirty="0"/>
-          </a:p>
-          <a:p>
-            <a:pPr algn="r"/>
-            <a:r>
-              <a:rPr lang="en-US" sz="1000" b="1" dirty="0"/>
-              <a:t>Hints</a:t>
-            </a:r>
-            <a:r>
-              <a:rPr lang="en-US" sz="1000" dirty="0"/>
-              <a:t>: observe the 2D EME propagation results to guide you to the best settings of a) and b).</a:t>
-            </a:r>
+              <a:t> de 0.330 dB y un ratio de 0.5055 y 0.4945.</a:t>
+            </a:r>
+          </a:p>
+          <a:p>
+            <a:pPr algn="just"/>
+            <a:endParaRPr lang="en-US" sz="1200" dirty="0">
+              <a:latin typeface="Arial" panose="020B0604020202020204" pitchFamily="34" charset="0"/>
+              <a:cs typeface="Arial" panose="020B0604020202020204" pitchFamily="34" charset="0"/>
+            </a:endParaRPr>
+          </a:p>
+          <a:p>
+            <a:pPr algn="just"/>
+            <a:r>
+              <a:rPr lang="en-US" sz="1200" dirty="0" err="1">
+                <a:latin typeface="Arial" panose="020B0604020202020204" pitchFamily="34" charset="0"/>
+                <a:cs typeface="Arial" panose="020B0604020202020204" pitchFamily="34" charset="0"/>
+              </a:rPr>
+              <a:t>Estos</a:t>
+            </a:r>
+            <a:r>
+              <a:rPr lang="en-US" sz="1200" dirty="0">
+                <a:latin typeface="Arial" panose="020B0604020202020204" pitchFamily="34" charset="0"/>
+                <a:cs typeface="Arial" panose="020B0604020202020204" pitchFamily="34" charset="0"/>
+              </a:rPr>
+              <a:t> </a:t>
+            </a:r>
+            <a:r>
+              <a:rPr lang="en-US" sz="1200" dirty="0" err="1">
+                <a:latin typeface="Arial" panose="020B0604020202020204" pitchFamily="34" charset="0"/>
+                <a:cs typeface="Arial" panose="020B0604020202020204" pitchFamily="34" charset="0"/>
+              </a:rPr>
+              <a:t>valores</a:t>
+            </a:r>
+            <a:r>
+              <a:rPr lang="en-US" sz="1200" dirty="0">
+                <a:latin typeface="Arial" panose="020B0604020202020204" pitchFamily="34" charset="0"/>
+                <a:cs typeface="Arial" panose="020B0604020202020204" pitchFamily="34" charset="0"/>
+              </a:rPr>
+              <a:t> </a:t>
+            </a:r>
+            <a:r>
+              <a:rPr lang="en-US" sz="1200" dirty="0" err="1">
+                <a:latin typeface="Arial" panose="020B0604020202020204" pitchFamily="34" charset="0"/>
+                <a:cs typeface="Arial" panose="020B0604020202020204" pitchFamily="34" charset="0"/>
+              </a:rPr>
+              <a:t>mejoran</a:t>
+            </a:r>
+            <a:r>
+              <a:rPr lang="en-US" sz="1200" dirty="0">
+                <a:latin typeface="Arial" panose="020B0604020202020204" pitchFamily="34" charset="0"/>
+                <a:cs typeface="Arial" panose="020B0604020202020204" pitchFamily="34" charset="0"/>
+              </a:rPr>
+              <a:t> los </a:t>
+            </a:r>
+            <a:r>
+              <a:rPr lang="en-US" sz="1200" dirty="0" err="1">
+                <a:latin typeface="Arial" panose="020B0604020202020204" pitchFamily="34" charset="0"/>
+                <a:cs typeface="Arial" panose="020B0604020202020204" pitchFamily="34" charset="0"/>
+              </a:rPr>
+              <a:t>valores</a:t>
+            </a:r>
+            <a:r>
+              <a:rPr lang="en-US" sz="1200" dirty="0">
+                <a:latin typeface="Arial" panose="020B0604020202020204" pitchFamily="34" charset="0"/>
+                <a:cs typeface="Arial" panose="020B0604020202020204" pitchFamily="34" charset="0"/>
+              </a:rPr>
+              <a:t> </a:t>
+            </a:r>
+            <a:r>
+              <a:rPr lang="en-US" sz="1200" dirty="0" err="1">
+                <a:latin typeface="Arial" panose="020B0604020202020204" pitchFamily="34" charset="0"/>
+                <a:cs typeface="Arial" panose="020B0604020202020204" pitchFamily="34" charset="0"/>
+              </a:rPr>
+              <a:t>anteriores</a:t>
+            </a:r>
+            <a:r>
+              <a:rPr lang="en-US" sz="1200" dirty="0">
+                <a:latin typeface="Arial" panose="020B0604020202020204" pitchFamily="34" charset="0"/>
+                <a:cs typeface="Arial" panose="020B0604020202020204" pitchFamily="34" charset="0"/>
+              </a:rPr>
+              <a:t> </a:t>
+            </a:r>
+            <a:r>
+              <a:rPr lang="en-US" sz="1200" dirty="0" err="1">
+                <a:latin typeface="Arial" panose="020B0604020202020204" pitchFamily="34" charset="0"/>
+                <a:cs typeface="Arial" panose="020B0604020202020204" pitchFamily="34" charset="0"/>
+              </a:rPr>
+              <a:t>pero</a:t>
+            </a:r>
+            <a:r>
+              <a:rPr lang="en-US" sz="1200" dirty="0">
+                <a:latin typeface="Arial" panose="020B0604020202020204" pitchFamily="34" charset="0"/>
+                <a:cs typeface="Arial" panose="020B0604020202020204" pitchFamily="34" charset="0"/>
+              </a:rPr>
+              <a:t> </a:t>
+            </a:r>
+            <a:r>
+              <a:rPr lang="en-US" sz="1200" dirty="0" err="1">
+                <a:latin typeface="Arial" panose="020B0604020202020204" pitchFamily="34" charset="0"/>
+                <a:cs typeface="Arial" panose="020B0604020202020204" pitchFamily="34" charset="0"/>
+              </a:rPr>
+              <a:t>aún</a:t>
+            </a:r>
+            <a:r>
+              <a:rPr lang="en-US" sz="1200" dirty="0">
+                <a:latin typeface="Arial" panose="020B0604020202020204" pitchFamily="34" charset="0"/>
+                <a:cs typeface="Arial" panose="020B0604020202020204" pitchFamily="34" charset="0"/>
+              </a:rPr>
+              <a:t> se require </a:t>
+            </a:r>
+            <a:r>
+              <a:rPr lang="en-US" sz="1200" dirty="0" err="1">
+                <a:latin typeface="Arial" panose="020B0604020202020204" pitchFamily="34" charset="0"/>
+                <a:cs typeface="Arial" panose="020B0604020202020204" pitchFamily="34" charset="0"/>
+              </a:rPr>
+              <a:t>bajar</a:t>
+            </a:r>
+            <a:r>
+              <a:rPr lang="en-US" sz="1200" dirty="0">
+                <a:latin typeface="Arial" panose="020B0604020202020204" pitchFamily="34" charset="0"/>
+                <a:cs typeface="Arial" panose="020B0604020202020204" pitchFamily="34" charset="0"/>
+              </a:rPr>
+              <a:t> </a:t>
+            </a:r>
+            <a:r>
+              <a:rPr lang="en-US" sz="1200" dirty="0" err="1">
+                <a:latin typeface="Arial" panose="020B0604020202020204" pitchFamily="34" charset="0"/>
+                <a:cs typeface="Arial" panose="020B0604020202020204" pitchFamily="34" charset="0"/>
+              </a:rPr>
+              <a:t>más</a:t>
+            </a:r>
+            <a:r>
+              <a:rPr lang="en-US" sz="1200" dirty="0">
+                <a:latin typeface="Arial" panose="020B0604020202020204" pitchFamily="34" charset="0"/>
+                <a:cs typeface="Arial" panose="020B0604020202020204" pitchFamily="34" charset="0"/>
+              </a:rPr>
+              <a:t> las </a:t>
+            </a:r>
+            <a:r>
+              <a:rPr lang="en-US" sz="1200" dirty="0" err="1">
+                <a:latin typeface="Arial" panose="020B0604020202020204" pitchFamily="34" charset="0"/>
+                <a:cs typeface="Arial" panose="020B0604020202020204" pitchFamily="34" charset="0"/>
+              </a:rPr>
+              <a:t>pérdidas</a:t>
+            </a:r>
+            <a:r>
+              <a:rPr lang="en-US" sz="1200" dirty="0">
+                <a:latin typeface="Arial" panose="020B0604020202020204" pitchFamily="34" charset="0"/>
+                <a:cs typeface="Arial" panose="020B0604020202020204" pitchFamily="34" charset="0"/>
+              </a:rPr>
+              <a:t>.</a:t>
+            </a:r>
+          </a:p>
+          <a:p>
+            <a:pPr algn="just"/>
             <a:endParaRPr lang="en-US" sz="1200" dirty="0">
               <a:latin typeface="Arial" panose="020B0604020202020204" pitchFamily="34" charset="0"/>
               <a:cs typeface="Arial" panose="020B0604020202020204" pitchFamily="34" charset="0"/>
@@ -5224,8 +5394,8 @@
         </p:blipFill>
         <p:spPr>
           <a:xfrm>
-            <a:off x="4133256" y="1445477"/>
-            <a:ext cx="3925487" cy="3306028"/>
+            <a:off x="4200228" y="1450461"/>
+            <a:ext cx="3791543" cy="3193221"/>
           </a:xfrm>
           <a:prstGeom prst="rect">
             <a:avLst/>
@@ -5590,6 +5760,20 @@
                 <a:latin typeface="Arial" panose="020B0604020202020204" pitchFamily="34" charset="0"/>
                 <a:cs typeface="Arial" panose="020B0604020202020204" pitchFamily="34" charset="0"/>
               </a:rPr>
+              <a:t>conseguimos</a:t>
+            </a:r>
+            <a:r>
+              <a:rPr lang="en-US" sz="1200" dirty="0">
+                <a:latin typeface="Arial" panose="020B0604020202020204" pitchFamily="34" charset="0"/>
+                <a:cs typeface="Arial" panose="020B0604020202020204" pitchFamily="34" charset="0"/>
+              </a:rPr>
+              <a:t> </a:t>
+            </a:r>
+            <a:r>
+              <a:rPr lang="en-US" sz="1200" dirty="0" err="1">
+                <a:latin typeface="Arial" panose="020B0604020202020204" pitchFamily="34" charset="0"/>
+                <a:cs typeface="Arial" panose="020B0604020202020204" pitchFamily="34" charset="0"/>
+              </a:rPr>
               <a:t>unos</a:t>
             </a:r>
             <a:r>
@@ -5703,112 +5887,6 @@
           </a:p>
         </p:txBody>
       </p:sp>
-      <p:sp>
-        <p:nvSpPr>
-          <p:cNvPr id="8" name="CuadroTexto 7">
-            <a:extLst>
-              <a:ext uri="{FF2B5EF4-FFF2-40B4-BE49-F238E27FC236}">
-                <a16:creationId xmlns:a16="http://schemas.microsoft.com/office/drawing/2014/main" id="{B0CFB20A-64F3-A296-71E8-F4FA17D35314}"/>
-              </a:ext>
-            </a:extLst>
-          </p:cNvPr>
-          <p:cNvSpPr txBox="1"/>
-          <p:nvPr/>
-        </p:nvSpPr>
-        <p:spPr>
-          <a:xfrm>
-            <a:off x="640245" y="1942909"/>
-            <a:ext cx="11199972" cy="2708434"/>
-          </a:xfrm>
-          <a:prstGeom prst="rect">
-            <a:avLst/>
-          </a:prstGeom>
-          <a:noFill/>
-        </p:spPr>
-        <p:txBody>
-          <a:bodyPr wrap="square" rtlCol="0">
-            <a:spAutoFit/>
-          </a:bodyPr>
-          <a:lstStyle/>
-          <a:p>
-            <a:pPr algn="ctr"/>
-            <a:r>
-              <a:rPr lang="en-US" b="1" dirty="0"/>
-              <a:t>deep</a:t>
-            </a:r>
-            <a:r>
-              <a:rPr lang="en-US" dirty="0"/>
-              <a:t> waveguide</a:t>
-            </a:r>
-          </a:p>
-          <a:p>
-            <a:pPr algn="ctr"/>
-            <a:endParaRPr lang="en-US" dirty="0"/>
-          </a:p>
-          <a:p>
-            <a:pPr algn="ctr"/>
-            <a:r>
-              <a:rPr lang="en-US" dirty="0"/>
-              <a:t>Paste propagation plot and console results</a:t>
-            </a:r>
-          </a:p>
-          <a:p>
-            <a:pPr algn="ctr"/>
-            <a:endParaRPr lang="en-US" dirty="0"/>
-          </a:p>
-          <a:p>
-            <a:pPr algn="ctr"/>
-            <a:endParaRPr lang="en-US" dirty="0"/>
-          </a:p>
-          <a:p>
-            <a:pPr algn="r"/>
-            <a:r>
-              <a:rPr lang="en-US" sz="1600" b="1" dirty="0"/>
-              <a:t>Target</a:t>
-            </a:r>
-            <a:r>
-              <a:rPr lang="en-US" sz="1600" dirty="0"/>
-              <a:t>: make ratio over outputs 0.5 + excess loss &lt; 0.1 dB</a:t>
-            </a:r>
-          </a:p>
-          <a:p>
-            <a:pPr algn="r"/>
-            <a:r>
-              <a:rPr lang="en-US" sz="1600" dirty="0"/>
-              <a:t>With same settings of previous LO, now modify the notebook so I/O waveguides have a different width. </a:t>
-            </a:r>
-          </a:p>
-          <a:p>
-            <a:pPr algn="r"/>
-            <a:r>
-              <a:rPr lang="en-US" sz="1600" u="sng" dirty="0"/>
-              <a:t>- The nominal I/O waveguide width you have been using is 1.0 µm, increase it.</a:t>
-            </a:r>
-          </a:p>
-          <a:p>
-            <a:pPr algn="r"/>
-            <a:r>
-              <a:rPr lang="en-US" sz="1600" b="1" dirty="0"/>
-              <a:t>(Warning</a:t>
-            </a:r>
-            <a:r>
-              <a:rPr lang="en-US" sz="1600" dirty="0"/>
-              <a:t>! Every time you change the I/O waveguide width you have to re-run modes calculation)</a:t>
-            </a:r>
-          </a:p>
-          <a:p>
-            <a:pPr algn="r"/>
-            <a:r>
-              <a:rPr lang="en-US" sz="1600" b="1" dirty="0"/>
-              <a:t>Hints</a:t>
-            </a:r>
-            <a:r>
-              <a:rPr lang="en-US" sz="1600" dirty="0"/>
-              <a:t>: observe the 2D EME propagation results to guide you to the best settings of a) and b).</a:t>
-            </a:r>
-          </a:p>
-        </p:txBody>
-      </p:sp>
       <p:pic>
         <p:nvPicPr>
           <p:cNvPr id="9" name="Imagen 8">
@@ -5831,7 +5909,7 @@
         </p:blipFill>
         <p:spPr>
           <a:xfrm>
-            <a:off x="685800" y="1541411"/>
+            <a:off x="3962400" y="1541411"/>
             <a:ext cx="3551900" cy="2978225"/>
           </a:xfrm>
           <a:prstGeom prst="rect">
@@ -6090,13 +6168,27 @@
                 <a:latin typeface="Arial" panose="020B0604020202020204" pitchFamily="34" charset="0"/>
                 <a:cs typeface="Arial" panose="020B0604020202020204" pitchFamily="34" charset="0"/>
               </a:rPr>
-              <a:t>Width  = 12 um. Primera imagen sin optimizer y para 3*</a:t>
+              <a:t>Width  = 12 um. Primera imagen sin </a:t>
             </a:r>
             <a:r>
               <a:rPr lang="en-US" sz="1200" dirty="0" err="1">
                 <a:latin typeface="Arial" panose="020B0604020202020204" pitchFamily="34" charset="0"/>
                 <a:cs typeface="Arial" panose="020B0604020202020204" pitchFamily="34" charset="0"/>
               </a:rPr>
+              <a:t>optimizar</a:t>
+            </a:r>
+            <a:r>
+              <a:rPr lang="en-US" sz="1200" dirty="0">
+                <a:latin typeface="Arial" panose="020B0604020202020204" pitchFamily="34" charset="0"/>
+                <a:cs typeface="Arial" panose="020B0604020202020204" pitchFamily="34" charset="0"/>
+              </a:rPr>
+              <a:t> y para 3*</a:t>
+            </a:r>
+            <a:r>
+              <a:rPr lang="en-US" sz="1200" dirty="0" err="1">
+                <a:latin typeface="Arial" panose="020B0604020202020204" pitchFamily="34" charset="0"/>
+                <a:cs typeface="Arial" panose="020B0604020202020204" pitchFamily="34" charset="0"/>
+              </a:rPr>
               <a:t>Lpi</a:t>
             </a:r>
             <a:r>
@@ -6104,329 +6196,7 @@
                 <a:latin typeface="Arial" panose="020B0604020202020204" pitchFamily="34" charset="0"/>
                 <a:cs typeface="Arial" panose="020B0604020202020204" pitchFamily="34" charset="0"/>
               </a:rPr>
-              <a:t>/16. Para la </a:t>
-            </a:r>
-            <a:r>
-              <a:rPr lang="en-US" sz="1200" dirty="0" err="1">
-                <a:latin typeface="Arial" panose="020B0604020202020204" pitchFamily="34" charset="0"/>
-                <a:cs typeface="Arial" panose="020B0604020202020204" pitchFamily="34" charset="0"/>
-              </a:rPr>
-              <a:t>segunda</a:t>
-            </a:r>
-            <a:r>
-              <a:rPr lang="en-US" sz="1200" dirty="0">
-                <a:latin typeface="Arial" panose="020B0604020202020204" pitchFamily="34" charset="0"/>
-                <a:cs typeface="Arial" panose="020B0604020202020204" pitchFamily="34" charset="0"/>
-              </a:rPr>
-              <a:t> </a:t>
-            </a:r>
-            <a:r>
-              <a:rPr lang="en-US" sz="1200" dirty="0" err="1">
-                <a:latin typeface="Arial" panose="020B0604020202020204" pitchFamily="34" charset="0"/>
-                <a:cs typeface="Arial" panose="020B0604020202020204" pitchFamily="34" charset="0"/>
-              </a:rPr>
-              <a:t>gráfica</a:t>
-            </a:r>
-            <a:r>
-              <a:rPr lang="en-US" sz="1200" dirty="0">
-                <a:latin typeface="Arial" panose="020B0604020202020204" pitchFamily="34" charset="0"/>
-                <a:cs typeface="Arial" panose="020B0604020202020204" pitchFamily="34" charset="0"/>
-              </a:rPr>
-              <a:t> </a:t>
-            </a:r>
-            <a:r>
-              <a:rPr lang="en-US" sz="1200" dirty="0" err="1">
-                <a:latin typeface="Arial" panose="020B0604020202020204" pitchFamily="34" charset="0"/>
-                <a:cs typeface="Arial" panose="020B0604020202020204" pitchFamily="34" charset="0"/>
-              </a:rPr>
-              <a:t>hemos</a:t>
-            </a:r>
-            <a:r>
-              <a:rPr lang="en-US" sz="1200" dirty="0">
-                <a:latin typeface="Arial" panose="020B0604020202020204" pitchFamily="34" charset="0"/>
-                <a:cs typeface="Arial" panose="020B0604020202020204" pitchFamily="34" charset="0"/>
-              </a:rPr>
-              <a:t> </a:t>
-            </a:r>
-            <a:r>
-              <a:rPr lang="en-US" sz="1200" dirty="0" err="1">
-                <a:latin typeface="Arial" panose="020B0604020202020204" pitchFamily="34" charset="0"/>
-                <a:cs typeface="Arial" panose="020B0604020202020204" pitchFamily="34" charset="0"/>
-              </a:rPr>
-              <a:t>realizado</a:t>
-            </a:r>
-            <a:r>
-              <a:rPr lang="en-US" sz="1200" dirty="0">
-                <a:latin typeface="Arial" panose="020B0604020202020204" pitchFamily="34" charset="0"/>
-                <a:cs typeface="Arial" panose="020B0604020202020204" pitchFamily="34" charset="0"/>
-              </a:rPr>
-              <a:t> la </a:t>
-            </a:r>
-            <a:r>
-              <a:rPr lang="en-US" sz="1200" dirty="0" err="1">
-                <a:latin typeface="Arial" panose="020B0604020202020204" pitchFamily="34" charset="0"/>
-                <a:cs typeface="Arial" panose="020B0604020202020204" pitchFamily="34" charset="0"/>
-              </a:rPr>
-              <a:t>primera</a:t>
-            </a:r>
-            <a:r>
-              <a:rPr lang="en-US" sz="1200" dirty="0">
-                <a:latin typeface="Arial" panose="020B0604020202020204" pitchFamily="34" charset="0"/>
-                <a:cs typeface="Arial" panose="020B0604020202020204" pitchFamily="34" charset="0"/>
-              </a:rPr>
-              <a:t> </a:t>
-            </a:r>
-            <a:r>
-              <a:rPr lang="en-US" sz="1200" dirty="0" err="1">
-                <a:latin typeface="Arial" panose="020B0604020202020204" pitchFamily="34" charset="0"/>
-                <a:cs typeface="Arial" panose="020B0604020202020204" pitchFamily="34" charset="0"/>
-              </a:rPr>
-              <a:t>optimización</a:t>
-            </a:r>
-            <a:r>
-              <a:rPr lang="en-US" sz="1200" dirty="0">
-                <a:latin typeface="Arial" panose="020B0604020202020204" pitchFamily="34" charset="0"/>
-                <a:cs typeface="Arial" panose="020B0604020202020204" pitchFamily="34" charset="0"/>
-              </a:rPr>
-              <a:t> con </a:t>
-            </a:r>
-            <a:r>
-              <a:rPr lang="en-US" sz="1200" dirty="0" err="1">
-                <a:latin typeface="Arial" panose="020B0604020202020204" pitchFamily="34" charset="0"/>
-                <a:cs typeface="Arial" panose="020B0604020202020204" pitchFamily="34" charset="0"/>
-              </a:rPr>
-              <a:t>dy</a:t>
-            </a:r>
-            <a:r>
-              <a:rPr lang="en-US" sz="1200" dirty="0">
-                <a:latin typeface="Arial" panose="020B0604020202020204" pitchFamily="34" charset="0"/>
-                <a:cs typeface="Arial" panose="020B0604020202020204" pitchFamily="34" charset="0"/>
-              </a:rPr>
-              <a:t> = 0.1 y dL = -1.2. Para </a:t>
-            </a:r>
-            <a:r>
-              <a:rPr lang="en-US" sz="1200" dirty="0" err="1">
-                <a:latin typeface="Arial" panose="020B0604020202020204" pitchFamily="34" charset="0"/>
-                <a:cs typeface="Arial" panose="020B0604020202020204" pitchFamily="34" charset="0"/>
-              </a:rPr>
-              <a:t>este</a:t>
-            </a:r>
-            <a:r>
-              <a:rPr lang="en-US" sz="1200" dirty="0">
-                <a:latin typeface="Arial" panose="020B0604020202020204" pitchFamily="34" charset="0"/>
-                <a:cs typeface="Arial" panose="020B0604020202020204" pitchFamily="34" charset="0"/>
-              </a:rPr>
-              <a:t> </a:t>
-            </a:r>
-            <a:r>
-              <a:rPr lang="en-US" sz="1200" dirty="0" err="1">
-                <a:latin typeface="Arial" panose="020B0604020202020204" pitchFamily="34" charset="0"/>
-                <a:cs typeface="Arial" panose="020B0604020202020204" pitchFamily="34" charset="0"/>
-              </a:rPr>
-              <a:t>caso</a:t>
-            </a:r>
-            <a:r>
-              <a:rPr lang="en-US" sz="1200" dirty="0">
-                <a:latin typeface="Arial" panose="020B0604020202020204" pitchFamily="34" charset="0"/>
-                <a:cs typeface="Arial" panose="020B0604020202020204" pitchFamily="34" charset="0"/>
-              </a:rPr>
-              <a:t> </a:t>
-            </a:r>
-            <a:r>
-              <a:rPr lang="en-US" sz="1200" dirty="0" err="1">
-                <a:latin typeface="Arial" panose="020B0604020202020204" pitchFamily="34" charset="0"/>
-                <a:cs typeface="Arial" panose="020B0604020202020204" pitchFamily="34" charset="0"/>
-              </a:rPr>
-              <a:t>mejoramos</a:t>
-            </a:r>
-            <a:r>
-              <a:rPr lang="en-US" sz="1200" dirty="0">
-                <a:latin typeface="Arial" panose="020B0604020202020204" pitchFamily="34" charset="0"/>
-                <a:cs typeface="Arial" panose="020B0604020202020204" pitchFamily="34" charset="0"/>
-              </a:rPr>
-              <a:t> las </a:t>
-            </a:r>
-            <a:r>
-              <a:rPr lang="en-US" sz="1200" dirty="0" err="1">
-                <a:latin typeface="Arial" panose="020B0604020202020204" pitchFamily="34" charset="0"/>
-                <a:cs typeface="Arial" panose="020B0604020202020204" pitchFamily="34" charset="0"/>
-              </a:rPr>
-              <a:t>pérdidas</a:t>
-            </a:r>
-            <a:r>
-              <a:rPr lang="en-US" sz="1200" dirty="0">
-                <a:latin typeface="Arial" panose="020B0604020202020204" pitchFamily="34" charset="0"/>
-                <a:cs typeface="Arial" panose="020B0604020202020204" pitchFamily="34" charset="0"/>
-              </a:rPr>
-              <a:t> </a:t>
-            </a:r>
-            <a:r>
-              <a:rPr lang="en-US" sz="1200" dirty="0" err="1">
-                <a:latin typeface="Arial" panose="020B0604020202020204" pitchFamily="34" charset="0"/>
-                <a:cs typeface="Arial" panose="020B0604020202020204" pitchFamily="34" charset="0"/>
-              </a:rPr>
-              <a:t>pero</a:t>
-            </a:r>
-            <a:r>
-              <a:rPr lang="en-US" sz="1200" dirty="0">
-                <a:latin typeface="Arial" panose="020B0604020202020204" pitchFamily="34" charset="0"/>
-                <a:cs typeface="Arial" panose="020B0604020202020204" pitchFamily="34" charset="0"/>
-              </a:rPr>
-              <a:t> los ratios son </a:t>
-            </a:r>
-            <a:r>
-              <a:rPr lang="en-US" sz="1200" dirty="0" err="1">
-                <a:latin typeface="Arial" panose="020B0604020202020204" pitchFamily="34" charset="0"/>
-                <a:cs typeface="Arial" panose="020B0604020202020204" pitchFamily="34" charset="0"/>
-              </a:rPr>
-              <a:t>peores</a:t>
-            </a:r>
-            <a:r>
-              <a:rPr lang="en-US" sz="1200" dirty="0">
-                <a:latin typeface="Arial" panose="020B0604020202020204" pitchFamily="34" charset="0"/>
-                <a:cs typeface="Arial" panose="020B0604020202020204" pitchFamily="34" charset="0"/>
-              </a:rPr>
-              <a:t>.  </a:t>
-            </a:r>
-            <a:r>
-              <a:rPr lang="en-US" sz="1200" dirty="0" err="1">
-                <a:latin typeface="Arial" panose="020B0604020202020204" pitchFamily="34" charset="0"/>
-                <a:cs typeface="Arial" panose="020B0604020202020204" pitchFamily="34" charset="0"/>
-              </a:rPr>
-              <a:t>Después</a:t>
-            </a:r>
-            <a:r>
-              <a:rPr lang="en-US" sz="1200" dirty="0">
-                <a:latin typeface="Arial" panose="020B0604020202020204" pitchFamily="34" charset="0"/>
-                <a:cs typeface="Arial" panose="020B0604020202020204" pitchFamily="34" charset="0"/>
-              </a:rPr>
-              <a:t> de la </a:t>
-            </a:r>
-            <a:r>
-              <a:rPr lang="en-US" sz="1200" dirty="0" err="1">
-                <a:latin typeface="Arial" panose="020B0604020202020204" pitchFamily="34" charset="0"/>
-                <a:cs typeface="Arial" panose="020B0604020202020204" pitchFamily="34" charset="0"/>
-              </a:rPr>
-              <a:t>segunda</a:t>
-            </a:r>
-            <a:r>
-              <a:rPr lang="en-US" sz="1200" dirty="0">
-                <a:latin typeface="Arial" panose="020B0604020202020204" pitchFamily="34" charset="0"/>
-                <a:cs typeface="Arial" panose="020B0604020202020204" pitchFamily="34" charset="0"/>
-              </a:rPr>
-              <a:t> </a:t>
-            </a:r>
-            <a:r>
-              <a:rPr lang="en-US" sz="1200" dirty="0" err="1">
-                <a:latin typeface="Arial" panose="020B0604020202020204" pitchFamily="34" charset="0"/>
-                <a:cs typeface="Arial" panose="020B0604020202020204" pitchFamily="34" charset="0"/>
-              </a:rPr>
-              <a:t>optimización</a:t>
-            </a:r>
-            <a:r>
-              <a:rPr lang="en-US" sz="1200" dirty="0">
-                <a:latin typeface="Arial" panose="020B0604020202020204" pitchFamily="34" charset="0"/>
-                <a:cs typeface="Arial" panose="020B0604020202020204" pitchFamily="34" charset="0"/>
-              </a:rPr>
-              <a:t> con un width de 2 um, </a:t>
-            </a:r>
-            <a:r>
-              <a:rPr lang="en-US" sz="1200" dirty="0" err="1">
-                <a:latin typeface="Arial" panose="020B0604020202020204" pitchFamily="34" charset="0"/>
-                <a:cs typeface="Arial" panose="020B0604020202020204" pitchFamily="34" charset="0"/>
-              </a:rPr>
-              <a:t>obtenemos</a:t>
-            </a:r>
-            <a:r>
-              <a:rPr lang="en-US" sz="1200" dirty="0">
-                <a:latin typeface="Arial" panose="020B0604020202020204" pitchFamily="34" charset="0"/>
-                <a:cs typeface="Arial" panose="020B0604020202020204" pitchFamily="34" charset="0"/>
-              </a:rPr>
-              <a:t> </a:t>
-            </a:r>
-            <a:r>
-              <a:rPr lang="en-US" sz="1200" dirty="0" err="1">
-                <a:latin typeface="Arial" panose="020B0604020202020204" pitchFamily="34" charset="0"/>
-                <a:cs typeface="Arial" panose="020B0604020202020204" pitchFamily="34" charset="0"/>
-              </a:rPr>
-              <a:t>unas</a:t>
-            </a:r>
-            <a:r>
-              <a:rPr lang="en-US" sz="1200" dirty="0">
-                <a:latin typeface="Arial" panose="020B0604020202020204" pitchFamily="34" charset="0"/>
-                <a:cs typeface="Arial" panose="020B0604020202020204" pitchFamily="34" charset="0"/>
-              </a:rPr>
-              <a:t> </a:t>
-            </a:r>
-            <a:r>
-              <a:rPr lang="en-US" sz="1200" dirty="0" err="1">
-                <a:latin typeface="Arial" panose="020B0604020202020204" pitchFamily="34" charset="0"/>
-                <a:cs typeface="Arial" panose="020B0604020202020204" pitchFamily="34" charset="0"/>
-              </a:rPr>
-              <a:t>muy</a:t>
-            </a:r>
-            <a:r>
-              <a:rPr lang="en-US" sz="1200" dirty="0">
-                <a:latin typeface="Arial" panose="020B0604020202020204" pitchFamily="34" charset="0"/>
-                <a:cs typeface="Arial" panose="020B0604020202020204" pitchFamily="34" charset="0"/>
-              </a:rPr>
-              <a:t> </a:t>
-            </a:r>
-            <a:r>
-              <a:rPr lang="en-US" sz="1200" dirty="0" err="1">
-                <a:latin typeface="Arial" panose="020B0604020202020204" pitchFamily="34" charset="0"/>
-                <a:cs typeface="Arial" panose="020B0604020202020204" pitchFamily="34" charset="0"/>
-              </a:rPr>
-              <a:t>buenas</a:t>
-            </a:r>
-            <a:r>
-              <a:rPr lang="en-US" sz="1200" dirty="0">
-                <a:latin typeface="Arial" panose="020B0604020202020204" pitchFamily="34" charset="0"/>
-                <a:cs typeface="Arial" panose="020B0604020202020204" pitchFamily="34" charset="0"/>
-              </a:rPr>
-              <a:t> </a:t>
-            </a:r>
-            <a:r>
-              <a:rPr lang="en-US" sz="1200" dirty="0" err="1">
-                <a:latin typeface="Arial" panose="020B0604020202020204" pitchFamily="34" charset="0"/>
-                <a:cs typeface="Arial" panose="020B0604020202020204" pitchFamily="34" charset="0"/>
-              </a:rPr>
-              <a:t>pérdidas</a:t>
-            </a:r>
-            <a:r>
-              <a:rPr lang="en-US" sz="1200" dirty="0">
-                <a:latin typeface="Arial" panose="020B0604020202020204" pitchFamily="34" charset="0"/>
-                <a:cs typeface="Arial" panose="020B0604020202020204" pitchFamily="34" charset="0"/>
-              </a:rPr>
-              <a:t> (0.0015 dB) </a:t>
-            </a:r>
-            <a:r>
-              <a:rPr lang="en-US" sz="1200" dirty="0" err="1">
-                <a:latin typeface="Arial" panose="020B0604020202020204" pitchFamily="34" charset="0"/>
-                <a:cs typeface="Arial" panose="020B0604020202020204" pitchFamily="34" charset="0"/>
-              </a:rPr>
-              <a:t>pero</a:t>
-            </a:r>
-            <a:r>
-              <a:rPr lang="en-US" sz="1200" dirty="0">
-                <a:latin typeface="Arial" panose="020B0604020202020204" pitchFamily="34" charset="0"/>
-                <a:cs typeface="Arial" panose="020B0604020202020204" pitchFamily="34" charset="0"/>
-              </a:rPr>
-              <a:t> no tan buenos ratios de </a:t>
-            </a:r>
-            <a:r>
-              <a:rPr lang="en-US" sz="1200" dirty="0" err="1">
-                <a:latin typeface="Arial" panose="020B0604020202020204" pitchFamily="34" charset="0"/>
-                <a:cs typeface="Arial" panose="020B0604020202020204" pitchFamily="34" charset="0"/>
-              </a:rPr>
-              <a:t>salidas</a:t>
-            </a:r>
-            <a:r>
-              <a:rPr lang="en-US" sz="1200" dirty="0">
-                <a:latin typeface="Arial" panose="020B0604020202020204" pitchFamily="34" charset="0"/>
-                <a:cs typeface="Arial" panose="020B0604020202020204" pitchFamily="34" charset="0"/>
-              </a:rPr>
-              <a:t>.</a:t>
+              <a:t>/16. </a:t>
             </a:r>
           </a:p>
           <a:p>
@@ -6438,10 +6208,345 @@
           </a:p>
           <a:p>
             <a:pPr algn="just"/>
+            <a:r>
+              <a:rPr lang="en-US" sz="1200" dirty="0">
+                <a:latin typeface="Arial" panose="020B0604020202020204" pitchFamily="34" charset="0"/>
+                <a:cs typeface="Arial" panose="020B0604020202020204" pitchFamily="34" charset="0"/>
+              </a:rPr>
+              <a:t>Para la </a:t>
+            </a:r>
+            <a:r>
+              <a:rPr lang="en-US" sz="1200" dirty="0" err="1">
+                <a:latin typeface="Arial" panose="020B0604020202020204" pitchFamily="34" charset="0"/>
+                <a:cs typeface="Arial" panose="020B0604020202020204" pitchFamily="34" charset="0"/>
+              </a:rPr>
+              <a:t>segunda</a:t>
+            </a:r>
+            <a:r>
+              <a:rPr lang="en-US" sz="1200" dirty="0">
+                <a:latin typeface="Arial" panose="020B0604020202020204" pitchFamily="34" charset="0"/>
+                <a:cs typeface="Arial" panose="020B0604020202020204" pitchFamily="34" charset="0"/>
+              </a:rPr>
+              <a:t> </a:t>
+            </a:r>
+            <a:r>
+              <a:rPr lang="en-US" sz="1200" dirty="0" err="1">
+                <a:latin typeface="Arial" panose="020B0604020202020204" pitchFamily="34" charset="0"/>
+                <a:cs typeface="Arial" panose="020B0604020202020204" pitchFamily="34" charset="0"/>
+              </a:rPr>
+              <a:t>gráfica</a:t>
+            </a:r>
+            <a:r>
+              <a:rPr lang="en-US" sz="1200" dirty="0">
+                <a:latin typeface="Arial" panose="020B0604020202020204" pitchFamily="34" charset="0"/>
+                <a:cs typeface="Arial" panose="020B0604020202020204" pitchFamily="34" charset="0"/>
+              </a:rPr>
+              <a:t> </a:t>
+            </a:r>
+            <a:r>
+              <a:rPr lang="en-US" sz="1200" dirty="0" err="1">
+                <a:latin typeface="Arial" panose="020B0604020202020204" pitchFamily="34" charset="0"/>
+                <a:cs typeface="Arial" panose="020B0604020202020204" pitchFamily="34" charset="0"/>
+              </a:rPr>
+              <a:t>hemos</a:t>
+            </a:r>
+            <a:r>
+              <a:rPr lang="en-US" sz="1200" dirty="0">
+                <a:latin typeface="Arial" panose="020B0604020202020204" pitchFamily="34" charset="0"/>
+                <a:cs typeface="Arial" panose="020B0604020202020204" pitchFamily="34" charset="0"/>
+              </a:rPr>
+              <a:t> </a:t>
+            </a:r>
+            <a:r>
+              <a:rPr lang="en-US" sz="1200" dirty="0" err="1">
+                <a:latin typeface="Arial" panose="020B0604020202020204" pitchFamily="34" charset="0"/>
+                <a:cs typeface="Arial" panose="020B0604020202020204" pitchFamily="34" charset="0"/>
+              </a:rPr>
+              <a:t>realizado</a:t>
+            </a:r>
+            <a:r>
+              <a:rPr lang="en-US" sz="1200" dirty="0">
+                <a:latin typeface="Arial" panose="020B0604020202020204" pitchFamily="34" charset="0"/>
+                <a:cs typeface="Arial" panose="020B0604020202020204" pitchFamily="34" charset="0"/>
+              </a:rPr>
+              <a:t> la </a:t>
+            </a:r>
+            <a:r>
+              <a:rPr lang="en-US" sz="1200" dirty="0" err="1">
+                <a:latin typeface="Arial" panose="020B0604020202020204" pitchFamily="34" charset="0"/>
+                <a:cs typeface="Arial" panose="020B0604020202020204" pitchFamily="34" charset="0"/>
+              </a:rPr>
+              <a:t>primera</a:t>
+            </a:r>
+            <a:r>
+              <a:rPr lang="en-US" sz="1200" dirty="0">
+                <a:latin typeface="Arial" panose="020B0604020202020204" pitchFamily="34" charset="0"/>
+                <a:cs typeface="Arial" panose="020B0604020202020204" pitchFamily="34" charset="0"/>
+              </a:rPr>
+              <a:t> </a:t>
+            </a:r>
+            <a:r>
+              <a:rPr lang="en-US" sz="1200" dirty="0" err="1">
+                <a:latin typeface="Arial" panose="020B0604020202020204" pitchFamily="34" charset="0"/>
+                <a:cs typeface="Arial" panose="020B0604020202020204" pitchFamily="34" charset="0"/>
+              </a:rPr>
+              <a:t>optimización</a:t>
+            </a:r>
+            <a:r>
+              <a:rPr lang="en-US" sz="1200" dirty="0">
+                <a:latin typeface="Arial" panose="020B0604020202020204" pitchFamily="34" charset="0"/>
+                <a:cs typeface="Arial" panose="020B0604020202020204" pitchFamily="34" charset="0"/>
+              </a:rPr>
+              <a:t> con </a:t>
+            </a:r>
+            <a:r>
+              <a:rPr lang="en-US" sz="1200" dirty="0" err="1">
+                <a:latin typeface="Arial" panose="020B0604020202020204" pitchFamily="34" charset="0"/>
+                <a:cs typeface="Arial" panose="020B0604020202020204" pitchFamily="34" charset="0"/>
+              </a:rPr>
+              <a:t>dy</a:t>
+            </a:r>
+            <a:r>
+              <a:rPr lang="en-US" sz="1200" dirty="0">
+                <a:latin typeface="Arial" panose="020B0604020202020204" pitchFamily="34" charset="0"/>
+                <a:cs typeface="Arial" panose="020B0604020202020204" pitchFamily="34" charset="0"/>
+              </a:rPr>
+              <a:t> = 0.1 y dL = -1.2. Para </a:t>
+            </a:r>
+            <a:r>
+              <a:rPr lang="en-US" sz="1200" dirty="0" err="1">
+                <a:latin typeface="Arial" panose="020B0604020202020204" pitchFamily="34" charset="0"/>
+                <a:cs typeface="Arial" panose="020B0604020202020204" pitchFamily="34" charset="0"/>
+              </a:rPr>
+              <a:t>este</a:t>
+            </a:r>
+            <a:r>
+              <a:rPr lang="en-US" sz="1200" dirty="0">
+                <a:latin typeface="Arial" panose="020B0604020202020204" pitchFamily="34" charset="0"/>
+                <a:cs typeface="Arial" panose="020B0604020202020204" pitchFamily="34" charset="0"/>
+              </a:rPr>
+              <a:t> </a:t>
+            </a:r>
+            <a:r>
+              <a:rPr lang="en-US" sz="1200" dirty="0" err="1">
+                <a:latin typeface="Arial" panose="020B0604020202020204" pitchFamily="34" charset="0"/>
+                <a:cs typeface="Arial" panose="020B0604020202020204" pitchFamily="34" charset="0"/>
+              </a:rPr>
+              <a:t>caso</a:t>
+            </a:r>
+            <a:r>
+              <a:rPr lang="en-US" sz="1200" dirty="0">
+                <a:latin typeface="Arial" panose="020B0604020202020204" pitchFamily="34" charset="0"/>
+                <a:cs typeface="Arial" panose="020B0604020202020204" pitchFamily="34" charset="0"/>
+              </a:rPr>
+              <a:t> </a:t>
+            </a:r>
+            <a:r>
+              <a:rPr lang="en-US" sz="1200" dirty="0" err="1">
+                <a:latin typeface="Arial" panose="020B0604020202020204" pitchFamily="34" charset="0"/>
+                <a:cs typeface="Arial" panose="020B0604020202020204" pitchFamily="34" charset="0"/>
+              </a:rPr>
+              <a:t>mejoramos</a:t>
+            </a:r>
+            <a:r>
+              <a:rPr lang="en-US" sz="1200" dirty="0">
+                <a:latin typeface="Arial" panose="020B0604020202020204" pitchFamily="34" charset="0"/>
+                <a:cs typeface="Arial" panose="020B0604020202020204" pitchFamily="34" charset="0"/>
+              </a:rPr>
+              <a:t> las </a:t>
+            </a:r>
+            <a:r>
+              <a:rPr lang="en-US" sz="1200" dirty="0" err="1">
+                <a:latin typeface="Arial" panose="020B0604020202020204" pitchFamily="34" charset="0"/>
+                <a:cs typeface="Arial" panose="020B0604020202020204" pitchFamily="34" charset="0"/>
+              </a:rPr>
+              <a:t>pérdidas</a:t>
+            </a:r>
+            <a:r>
+              <a:rPr lang="en-US" sz="1200" dirty="0">
+                <a:latin typeface="Arial" panose="020B0604020202020204" pitchFamily="34" charset="0"/>
+                <a:cs typeface="Arial" panose="020B0604020202020204" pitchFamily="34" charset="0"/>
+              </a:rPr>
+              <a:t> </a:t>
+            </a:r>
+            <a:r>
+              <a:rPr lang="en-US" sz="1200" dirty="0" err="1">
+                <a:latin typeface="Arial" panose="020B0604020202020204" pitchFamily="34" charset="0"/>
+                <a:cs typeface="Arial" panose="020B0604020202020204" pitchFamily="34" charset="0"/>
+              </a:rPr>
+              <a:t>pero</a:t>
+            </a:r>
+            <a:r>
+              <a:rPr lang="en-US" sz="1200" dirty="0">
+                <a:latin typeface="Arial" panose="020B0604020202020204" pitchFamily="34" charset="0"/>
+                <a:cs typeface="Arial" panose="020B0604020202020204" pitchFamily="34" charset="0"/>
+              </a:rPr>
+              <a:t> los ratios son </a:t>
+            </a:r>
+            <a:r>
+              <a:rPr lang="en-US" sz="1200" dirty="0" err="1">
+                <a:latin typeface="Arial" panose="020B0604020202020204" pitchFamily="34" charset="0"/>
+                <a:cs typeface="Arial" panose="020B0604020202020204" pitchFamily="34" charset="0"/>
+              </a:rPr>
+              <a:t>peores</a:t>
+            </a:r>
+            <a:r>
+              <a:rPr lang="en-US" sz="1200" dirty="0">
+                <a:latin typeface="Arial" panose="020B0604020202020204" pitchFamily="34" charset="0"/>
+                <a:cs typeface="Arial" panose="020B0604020202020204" pitchFamily="34" charset="0"/>
+              </a:rPr>
+              <a:t>.</a:t>
+            </a:r>
+          </a:p>
+          <a:p>
+            <a:pPr algn="just"/>
             <a:endParaRPr lang="en-US" sz="1200" dirty="0">
               <a:latin typeface="Arial" panose="020B0604020202020204" pitchFamily="34" charset="0"/>
               <a:cs typeface="Arial" panose="020B0604020202020204" pitchFamily="34" charset="0"/>
             </a:endParaRPr>
+          </a:p>
+          <a:p>
+            <a:pPr algn="just"/>
+            <a:r>
+              <a:rPr lang="en-US" sz="1200" dirty="0" err="1">
+                <a:latin typeface="Arial" panose="020B0604020202020204" pitchFamily="34" charset="0"/>
+                <a:cs typeface="Arial" panose="020B0604020202020204" pitchFamily="34" charset="0"/>
+              </a:rPr>
+              <a:t>Después</a:t>
+            </a:r>
+            <a:r>
+              <a:rPr lang="en-US" sz="1200" dirty="0">
+                <a:latin typeface="Arial" panose="020B0604020202020204" pitchFamily="34" charset="0"/>
+                <a:cs typeface="Arial" panose="020B0604020202020204" pitchFamily="34" charset="0"/>
+              </a:rPr>
+              <a:t> de la </a:t>
+            </a:r>
+            <a:r>
+              <a:rPr lang="en-US" sz="1200" dirty="0" err="1">
+                <a:latin typeface="Arial" panose="020B0604020202020204" pitchFamily="34" charset="0"/>
+                <a:cs typeface="Arial" panose="020B0604020202020204" pitchFamily="34" charset="0"/>
+              </a:rPr>
+              <a:t>segunda</a:t>
+            </a:r>
+            <a:r>
+              <a:rPr lang="en-US" sz="1200" dirty="0">
+                <a:latin typeface="Arial" panose="020B0604020202020204" pitchFamily="34" charset="0"/>
+                <a:cs typeface="Arial" panose="020B0604020202020204" pitchFamily="34" charset="0"/>
+              </a:rPr>
+              <a:t> </a:t>
+            </a:r>
+            <a:r>
+              <a:rPr lang="en-US" sz="1200" dirty="0" err="1">
+                <a:latin typeface="Arial" panose="020B0604020202020204" pitchFamily="34" charset="0"/>
+                <a:cs typeface="Arial" panose="020B0604020202020204" pitchFamily="34" charset="0"/>
+              </a:rPr>
+              <a:t>optimización</a:t>
+            </a:r>
+            <a:r>
+              <a:rPr lang="en-US" sz="1200" dirty="0">
+                <a:latin typeface="Arial" panose="020B0604020202020204" pitchFamily="34" charset="0"/>
+                <a:cs typeface="Arial" panose="020B0604020202020204" pitchFamily="34" charset="0"/>
+              </a:rPr>
+              <a:t> con un width de 2 um, </a:t>
+            </a:r>
+            <a:r>
+              <a:rPr lang="en-US" sz="1200" dirty="0" err="1">
+                <a:latin typeface="Arial" panose="020B0604020202020204" pitchFamily="34" charset="0"/>
+                <a:cs typeface="Arial" panose="020B0604020202020204" pitchFamily="34" charset="0"/>
+              </a:rPr>
+              <a:t>obtenemos</a:t>
+            </a:r>
+            <a:r>
+              <a:rPr lang="en-US" sz="1200" dirty="0">
+                <a:latin typeface="Arial" panose="020B0604020202020204" pitchFamily="34" charset="0"/>
+                <a:cs typeface="Arial" panose="020B0604020202020204" pitchFamily="34" charset="0"/>
+              </a:rPr>
+              <a:t> </a:t>
+            </a:r>
+            <a:r>
+              <a:rPr lang="en-US" sz="1200" dirty="0" err="1">
+                <a:latin typeface="Arial" panose="020B0604020202020204" pitchFamily="34" charset="0"/>
+                <a:cs typeface="Arial" panose="020B0604020202020204" pitchFamily="34" charset="0"/>
+              </a:rPr>
+              <a:t>unas</a:t>
+            </a:r>
+            <a:r>
+              <a:rPr lang="en-US" sz="1200" dirty="0">
+                <a:latin typeface="Arial" panose="020B0604020202020204" pitchFamily="34" charset="0"/>
+                <a:cs typeface="Arial" panose="020B0604020202020204" pitchFamily="34" charset="0"/>
+              </a:rPr>
+              <a:t> </a:t>
+            </a:r>
+            <a:r>
+              <a:rPr lang="en-US" sz="1200" dirty="0" err="1">
+                <a:latin typeface="Arial" panose="020B0604020202020204" pitchFamily="34" charset="0"/>
+                <a:cs typeface="Arial" panose="020B0604020202020204" pitchFamily="34" charset="0"/>
+              </a:rPr>
+              <a:t>muy</a:t>
+            </a:r>
+            <a:r>
+              <a:rPr lang="en-US" sz="1200" dirty="0">
+                <a:latin typeface="Arial" panose="020B0604020202020204" pitchFamily="34" charset="0"/>
+                <a:cs typeface="Arial" panose="020B0604020202020204" pitchFamily="34" charset="0"/>
+              </a:rPr>
+              <a:t> </a:t>
+            </a:r>
+            <a:r>
+              <a:rPr lang="en-US" sz="1200" dirty="0" err="1">
+                <a:latin typeface="Arial" panose="020B0604020202020204" pitchFamily="34" charset="0"/>
+                <a:cs typeface="Arial" panose="020B0604020202020204" pitchFamily="34" charset="0"/>
+              </a:rPr>
+              <a:t>buenas</a:t>
+            </a:r>
+            <a:r>
+              <a:rPr lang="en-US" sz="1200" dirty="0">
+                <a:latin typeface="Arial" panose="020B0604020202020204" pitchFamily="34" charset="0"/>
+                <a:cs typeface="Arial" panose="020B0604020202020204" pitchFamily="34" charset="0"/>
+              </a:rPr>
+              <a:t> </a:t>
+            </a:r>
+            <a:r>
+              <a:rPr lang="en-US" sz="1200" dirty="0" err="1">
+                <a:latin typeface="Arial" panose="020B0604020202020204" pitchFamily="34" charset="0"/>
+                <a:cs typeface="Arial" panose="020B0604020202020204" pitchFamily="34" charset="0"/>
+              </a:rPr>
+              <a:t>pérdidas</a:t>
+            </a:r>
+            <a:r>
+              <a:rPr lang="en-US" sz="1200" dirty="0">
+                <a:latin typeface="Arial" panose="020B0604020202020204" pitchFamily="34" charset="0"/>
+                <a:cs typeface="Arial" panose="020B0604020202020204" pitchFamily="34" charset="0"/>
+              </a:rPr>
+              <a:t> (0.0015 dB) </a:t>
+            </a:r>
+            <a:r>
+              <a:rPr lang="en-US" sz="1200" dirty="0" err="1">
+                <a:latin typeface="Arial" panose="020B0604020202020204" pitchFamily="34" charset="0"/>
+                <a:cs typeface="Arial" panose="020B0604020202020204" pitchFamily="34" charset="0"/>
+              </a:rPr>
+              <a:t>pero</a:t>
+            </a:r>
+            <a:r>
+              <a:rPr lang="en-US" sz="1200" dirty="0">
+                <a:latin typeface="Arial" panose="020B0604020202020204" pitchFamily="34" charset="0"/>
+                <a:cs typeface="Arial" panose="020B0604020202020204" pitchFamily="34" charset="0"/>
+              </a:rPr>
+              <a:t> no tan buenos ratios de </a:t>
+            </a:r>
+            <a:r>
+              <a:rPr lang="en-US" sz="1200" dirty="0" err="1">
+                <a:latin typeface="Arial" panose="020B0604020202020204" pitchFamily="34" charset="0"/>
+                <a:cs typeface="Arial" panose="020B0604020202020204" pitchFamily="34" charset="0"/>
+              </a:rPr>
+              <a:t>salidas</a:t>
+            </a:r>
+            <a:r>
+              <a:rPr lang="en-US" sz="1200" dirty="0">
+                <a:latin typeface="Arial" panose="020B0604020202020204" pitchFamily="34" charset="0"/>
+                <a:cs typeface="Arial" panose="020B0604020202020204" pitchFamily="34" charset="0"/>
+              </a:rPr>
+              <a:t>.</a:t>
+            </a:r>
           </a:p>
           <a:p>
             <a:pPr algn="just"/>
@@ -6825,7 +6930,7 @@
         <p:spPr>
           <a:xfrm>
             <a:off x="609441" y="4860334"/>
-            <a:ext cx="11199971" cy="1200329"/>
+            <a:ext cx="11199971" cy="1569660"/>
           </a:xfrm>
           <a:prstGeom prst="rect">
             <a:avLst/>
@@ -6858,10 +6963,167 @@
           </a:p>
           <a:p>
             <a:pPr algn="just"/>
-            <a:endParaRPr lang="en-US" sz="1200" dirty="0">
-              <a:latin typeface="Arial" panose="020B0604020202020204" pitchFamily="34" charset="0"/>
-              <a:cs typeface="Arial" panose="020B0604020202020204" pitchFamily="34" charset="0"/>
-            </a:endParaRPr>
+            <a:r>
+              <a:rPr lang="en-US" sz="1200" dirty="0">
+                <a:latin typeface="Arial" panose="020B0604020202020204" pitchFamily="34" charset="0"/>
+                <a:cs typeface="Arial" panose="020B0604020202020204" pitchFamily="34" charset="0"/>
+              </a:rPr>
+              <a:t>Caso deep: los </a:t>
+            </a:r>
+            <a:r>
+              <a:rPr lang="en-US" sz="1200" dirty="0" err="1">
+                <a:latin typeface="Arial" panose="020B0604020202020204" pitchFamily="34" charset="0"/>
+                <a:cs typeface="Arial" panose="020B0604020202020204" pitchFamily="34" charset="0"/>
+              </a:rPr>
+              <a:t>valores</a:t>
+            </a:r>
+            <a:r>
+              <a:rPr lang="en-US" sz="1200" dirty="0">
+                <a:latin typeface="Arial" panose="020B0604020202020204" pitchFamily="34" charset="0"/>
+                <a:cs typeface="Arial" panose="020B0604020202020204" pitchFamily="34" charset="0"/>
+              </a:rPr>
+              <a:t> de </a:t>
+            </a:r>
+            <a:r>
+              <a:rPr lang="en-US" sz="1200" dirty="0" err="1">
+                <a:latin typeface="Arial" panose="020B0604020202020204" pitchFamily="34" charset="0"/>
+                <a:cs typeface="Arial" panose="020B0604020202020204" pitchFamily="34" charset="0"/>
+              </a:rPr>
+              <a:t>Lpi</a:t>
+            </a:r>
+            <a:r>
+              <a:rPr lang="en-US" sz="1200" dirty="0">
+                <a:latin typeface="Arial" panose="020B0604020202020204" pitchFamily="34" charset="0"/>
+                <a:cs typeface="Arial" panose="020B0604020202020204" pitchFamily="34" charset="0"/>
+              </a:rPr>
+              <a:t> </a:t>
+            </a:r>
+            <a:r>
+              <a:rPr lang="en-US" sz="1200" dirty="0" err="1">
+                <a:latin typeface="Arial" panose="020B0604020202020204" pitchFamily="34" charset="0"/>
+                <a:cs typeface="Arial" panose="020B0604020202020204" pitchFamily="34" charset="0"/>
+              </a:rPr>
+              <a:t>aumentan</a:t>
+            </a:r>
+            <a:r>
+              <a:rPr lang="en-US" sz="1200" dirty="0">
+                <a:latin typeface="Arial" panose="020B0604020202020204" pitchFamily="34" charset="0"/>
+                <a:cs typeface="Arial" panose="020B0604020202020204" pitchFamily="34" charset="0"/>
+              </a:rPr>
+              <a:t> con </a:t>
+            </a:r>
+            <a:r>
+              <a:rPr lang="en-US" sz="1200" dirty="0" err="1">
+                <a:latin typeface="Arial" panose="020B0604020202020204" pitchFamily="34" charset="0"/>
+                <a:cs typeface="Arial" panose="020B0604020202020204" pitchFamily="34" charset="0"/>
+              </a:rPr>
+              <a:t>el</a:t>
+            </a:r>
+            <a:r>
+              <a:rPr lang="en-US" sz="1200" dirty="0">
+                <a:latin typeface="Arial" panose="020B0604020202020204" pitchFamily="34" charset="0"/>
+                <a:cs typeface="Arial" panose="020B0604020202020204" pitchFamily="34" charset="0"/>
+              </a:rPr>
+              <a:t> wavelength </a:t>
+            </a:r>
+            <a:r>
+              <a:rPr lang="en-US" sz="1200" dirty="0" err="1">
+                <a:latin typeface="Arial" panose="020B0604020202020204" pitchFamily="34" charset="0"/>
+                <a:cs typeface="Arial" panose="020B0604020202020204" pitchFamily="34" charset="0"/>
+              </a:rPr>
+              <a:t>como</a:t>
+            </a:r>
+            <a:r>
+              <a:rPr lang="en-US" sz="1200" dirty="0">
+                <a:latin typeface="Arial" panose="020B0604020202020204" pitchFamily="34" charset="0"/>
+                <a:cs typeface="Arial" panose="020B0604020202020204" pitchFamily="34" charset="0"/>
+              </a:rPr>
+              <a:t> es de </a:t>
+            </a:r>
+            <a:r>
+              <a:rPr lang="en-US" sz="1200" dirty="0" err="1">
+                <a:latin typeface="Arial" panose="020B0604020202020204" pitchFamily="34" charset="0"/>
+                <a:cs typeface="Arial" panose="020B0604020202020204" pitchFamily="34" charset="0"/>
+              </a:rPr>
+              <a:t>esperar</a:t>
+            </a:r>
+            <a:r>
+              <a:rPr lang="en-US" sz="1200" dirty="0">
+                <a:latin typeface="Arial" panose="020B0604020202020204" pitchFamily="34" charset="0"/>
+                <a:cs typeface="Arial" panose="020B0604020202020204" pitchFamily="34" charset="0"/>
+              </a:rPr>
+              <a:t>. Los </a:t>
+            </a:r>
+            <a:r>
+              <a:rPr lang="en-US" sz="1200" dirty="0" err="1">
+                <a:latin typeface="Arial" panose="020B0604020202020204" pitchFamily="34" charset="0"/>
+                <a:cs typeface="Arial" panose="020B0604020202020204" pitchFamily="34" charset="0"/>
+              </a:rPr>
+              <a:t>modos</a:t>
+            </a:r>
+            <a:r>
+              <a:rPr lang="en-US" sz="1200" dirty="0">
+                <a:latin typeface="Arial" panose="020B0604020202020204" pitchFamily="34" charset="0"/>
+                <a:cs typeface="Arial" panose="020B0604020202020204" pitchFamily="34" charset="0"/>
+              </a:rPr>
+              <a:t> TE </a:t>
+            </a:r>
+            <a:r>
+              <a:rPr lang="en-US" sz="1200" dirty="0" err="1">
+                <a:latin typeface="Arial" panose="020B0604020202020204" pitchFamily="34" charset="0"/>
+                <a:cs typeface="Arial" panose="020B0604020202020204" pitchFamily="34" charset="0"/>
+              </a:rPr>
+              <a:t>presentan</a:t>
+            </a:r>
+            <a:r>
+              <a:rPr lang="en-US" sz="1200" dirty="0">
+                <a:latin typeface="Arial" panose="020B0604020202020204" pitchFamily="34" charset="0"/>
+                <a:cs typeface="Arial" panose="020B0604020202020204" pitchFamily="34" charset="0"/>
+              </a:rPr>
+              <a:t> </a:t>
+            </a:r>
+            <a:r>
+              <a:rPr lang="en-US" sz="1200" dirty="0" err="1">
+                <a:latin typeface="Arial" panose="020B0604020202020204" pitchFamily="34" charset="0"/>
+                <a:cs typeface="Arial" panose="020B0604020202020204" pitchFamily="34" charset="0"/>
+              </a:rPr>
+              <a:t>mayores</a:t>
+            </a:r>
+            <a:r>
+              <a:rPr lang="en-US" sz="1200" dirty="0">
+                <a:latin typeface="Arial" panose="020B0604020202020204" pitchFamily="34" charset="0"/>
+                <a:cs typeface="Arial" panose="020B0604020202020204" pitchFamily="34" charset="0"/>
+              </a:rPr>
+              <a:t> </a:t>
+            </a:r>
+            <a:r>
+              <a:rPr lang="en-US" sz="1200" dirty="0" err="1">
+                <a:latin typeface="Arial" panose="020B0604020202020204" pitchFamily="34" charset="0"/>
+                <a:cs typeface="Arial" panose="020B0604020202020204" pitchFamily="34" charset="0"/>
+              </a:rPr>
+              <a:t>Lpi</a:t>
+            </a:r>
+            <a:r>
+              <a:rPr lang="en-US" sz="1200" dirty="0">
+                <a:latin typeface="Arial" panose="020B0604020202020204" pitchFamily="34" charset="0"/>
+                <a:cs typeface="Arial" panose="020B0604020202020204" pitchFamily="34" charset="0"/>
+              </a:rPr>
+              <a:t> que los </a:t>
+            </a:r>
+            <a:r>
+              <a:rPr lang="en-US" sz="1200" dirty="0" err="1">
+                <a:latin typeface="Arial" panose="020B0604020202020204" pitchFamily="34" charset="0"/>
+                <a:cs typeface="Arial" panose="020B0604020202020204" pitchFamily="34" charset="0"/>
+              </a:rPr>
+              <a:t>modos</a:t>
+            </a:r>
+            <a:r>
+              <a:rPr lang="en-US" sz="1200" dirty="0">
+                <a:latin typeface="Arial" panose="020B0604020202020204" pitchFamily="34" charset="0"/>
+                <a:cs typeface="Arial" panose="020B0604020202020204" pitchFamily="34" charset="0"/>
+              </a:rPr>
+              <a:t> TM</a:t>
+            </a:r>
           </a:p>
           <a:p>
             <a:pPr algn="just"/>
@@ -6872,10 +7134,181 @@
           </a:p>
           <a:p>
             <a:pPr algn="just"/>
-            <a:endParaRPr lang="en-US" sz="1200" dirty="0">
-              <a:latin typeface="Arial" panose="020B0604020202020204" pitchFamily="34" charset="0"/>
-              <a:cs typeface="Arial" panose="020B0604020202020204" pitchFamily="34" charset="0"/>
-            </a:endParaRPr>
+            <a:r>
+              <a:rPr lang="en-US" sz="1200" dirty="0">
+                <a:latin typeface="Arial" panose="020B0604020202020204" pitchFamily="34" charset="0"/>
+                <a:cs typeface="Arial" panose="020B0604020202020204" pitchFamily="34" charset="0"/>
+              </a:rPr>
+              <a:t>Caso shallow: los </a:t>
+            </a:r>
+            <a:r>
+              <a:rPr lang="en-US" sz="1200" dirty="0" err="1">
+                <a:latin typeface="Arial" panose="020B0604020202020204" pitchFamily="34" charset="0"/>
+                <a:cs typeface="Arial" panose="020B0604020202020204" pitchFamily="34" charset="0"/>
+              </a:rPr>
+              <a:t>valores</a:t>
+            </a:r>
+            <a:r>
+              <a:rPr lang="en-US" sz="1200" dirty="0">
+                <a:latin typeface="Arial" panose="020B0604020202020204" pitchFamily="34" charset="0"/>
+                <a:cs typeface="Arial" panose="020B0604020202020204" pitchFamily="34" charset="0"/>
+              </a:rPr>
+              <a:t> de </a:t>
+            </a:r>
+            <a:r>
+              <a:rPr lang="en-US" sz="1200" dirty="0" err="1">
+                <a:latin typeface="Arial" panose="020B0604020202020204" pitchFamily="34" charset="0"/>
+                <a:cs typeface="Arial" panose="020B0604020202020204" pitchFamily="34" charset="0"/>
+              </a:rPr>
+              <a:t>Lpi</a:t>
+            </a:r>
+            <a:r>
+              <a:rPr lang="en-US" sz="1200" dirty="0">
+                <a:latin typeface="Arial" panose="020B0604020202020204" pitchFamily="34" charset="0"/>
+                <a:cs typeface="Arial" panose="020B0604020202020204" pitchFamily="34" charset="0"/>
+              </a:rPr>
+              <a:t> </a:t>
+            </a:r>
+            <a:r>
+              <a:rPr lang="en-US" sz="1200" dirty="0" err="1">
+                <a:latin typeface="Arial" panose="020B0604020202020204" pitchFamily="34" charset="0"/>
+                <a:cs typeface="Arial" panose="020B0604020202020204" pitchFamily="34" charset="0"/>
+              </a:rPr>
+              <a:t>aumentan</a:t>
+            </a:r>
+            <a:r>
+              <a:rPr lang="en-US" sz="1200" dirty="0">
+                <a:latin typeface="Arial" panose="020B0604020202020204" pitchFamily="34" charset="0"/>
+                <a:cs typeface="Arial" panose="020B0604020202020204" pitchFamily="34" charset="0"/>
+              </a:rPr>
+              <a:t> sus </a:t>
+            </a:r>
+            <a:r>
+              <a:rPr lang="en-US" sz="1200" dirty="0" err="1">
+                <a:latin typeface="Arial" panose="020B0604020202020204" pitchFamily="34" charset="0"/>
+                <a:cs typeface="Arial" panose="020B0604020202020204" pitchFamily="34" charset="0"/>
+              </a:rPr>
+              <a:t>valores</a:t>
+            </a:r>
+            <a:r>
+              <a:rPr lang="en-US" sz="1200" dirty="0">
+                <a:latin typeface="Arial" panose="020B0604020202020204" pitchFamily="34" charset="0"/>
+                <a:cs typeface="Arial" panose="020B0604020202020204" pitchFamily="34" charset="0"/>
+              </a:rPr>
+              <a:t> con respect al </a:t>
+            </a:r>
+            <a:r>
+              <a:rPr lang="en-US" sz="1200" dirty="0" err="1">
+                <a:latin typeface="Arial" panose="020B0604020202020204" pitchFamily="34" charset="0"/>
+                <a:cs typeface="Arial" panose="020B0604020202020204" pitchFamily="34" charset="0"/>
+              </a:rPr>
+              <a:t>caso</a:t>
+            </a:r>
+            <a:r>
+              <a:rPr lang="en-US" sz="1200" dirty="0">
+                <a:latin typeface="Arial" panose="020B0604020202020204" pitchFamily="34" charset="0"/>
+                <a:cs typeface="Arial" panose="020B0604020202020204" pitchFamily="34" charset="0"/>
+              </a:rPr>
+              <a:t> deep y </a:t>
+            </a:r>
+            <a:r>
+              <a:rPr lang="en-US" sz="1200" dirty="0" err="1">
+                <a:latin typeface="Arial" panose="020B0604020202020204" pitchFamily="34" charset="0"/>
+                <a:cs typeface="Arial" panose="020B0604020202020204" pitchFamily="34" charset="0"/>
+              </a:rPr>
+              <a:t>en</a:t>
+            </a:r>
+            <a:r>
+              <a:rPr lang="en-US" sz="1200" dirty="0">
+                <a:latin typeface="Arial" panose="020B0604020202020204" pitchFamily="34" charset="0"/>
+                <a:cs typeface="Arial" panose="020B0604020202020204" pitchFamily="34" charset="0"/>
+              </a:rPr>
+              <a:t> </a:t>
+            </a:r>
+            <a:r>
+              <a:rPr lang="en-US" sz="1200" dirty="0" err="1">
+                <a:latin typeface="Arial" panose="020B0604020202020204" pitchFamily="34" charset="0"/>
+                <a:cs typeface="Arial" panose="020B0604020202020204" pitchFamily="34" charset="0"/>
+              </a:rPr>
+              <a:t>este</a:t>
+            </a:r>
+            <a:r>
+              <a:rPr lang="en-US" sz="1200" dirty="0">
+                <a:latin typeface="Arial" panose="020B0604020202020204" pitchFamily="34" charset="0"/>
+                <a:cs typeface="Arial" panose="020B0604020202020204" pitchFamily="34" charset="0"/>
+              </a:rPr>
+              <a:t> </a:t>
+            </a:r>
+            <a:r>
+              <a:rPr lang="en-US" sz="1200" dirty="0" err="1">
+                <a:latin typeface="Arial" panose="020B0604020202020204" pitchFamily="34" charset="0"/>
+                <a:cs typeface="Arial" panose="020B0604020202020204" pitchFamily="34" charset="0"/>
+              </a:rPr>
+              <a:t>caso</a:t>
+            </a:r>
+            <a:r>
+              <a:rPr lang="en-US" sz="1200" dirty="0">
+                <a:latin typeface="Arial" panose="020B0604020202020204" pitchFamily="34" charset="0"/>
+                <a:cs typeface="Arial" panose="020B0604020202020204" pitchFamily="34" charset="0"/>
+              </a:rPr>
+              <a:t> los </a:t>
+            </a:r>
+            <a:r>
+              <a:rPr lang="en-US" sz="1200" dirty="0" err="1">
+                <a:latin typeface="Arial" panose="020B0604020202020204" pitchFamily="34" charset="0"/>
+                <a:cs typeface="Arial" panose="020B0604020202020204" pitchFamily="34" charset="0"/>
+              </a:rPr>
+              <a:t>modos</a:t>
+            </a:r>
+            <a:r>
+              <a:rPr lang="en-US" sz="1200" dirty="0">
+                <a:latin typeface="Arial" panose="020B0604020202020204" pitchFamily="34" charset="0"/>
+                <a:cs typeface="Arial" panose="020B0604020202020204" pitchFamily="34" charset="0"/>
+              </a:rPr>
+              <a:t> TM </a:t>
+            </a:r>
+            <a:r>
+              <a:rPr lang="en-US" sz="1200" dirty="0" err="1">
+                <a:latin typeface="Arial" panose="020B0604020202020204" pitchFamily="34" charset="0"/>
+                <a:cs typeface="Arial" panose="020B0604020202020204" pitchFamily="34" charset="0"/>
+              </a:rPr>
+              <a:t>tienen</a:t>
+            </a:r>
+            <a:r>
+              <a:rPr lang="en-US" sz="1200" dirty="0">
+                <a:latin typeface="Arial" panose="020B0604020202020204" pitchFamily="34" charset="0"/>
+                <a:cs typeface="Arial" panose="020B0604020202020204" pitchFamily="34" charset="0"/>
+              </a:rPr>
+              <a:t> </a:t>
+            </a:r>
+            <a:r>
+              <a:rPr lang="en-US" sz="1200" dirty="0" err="1">
+                <a:latin typeface="Arial" panose="020B0604020202020204" pitchFamily="34" charset="0"/>
+                <a:cs typeface="Arial" panose="020B0604020202020204" pitchFamily="34" charset="0"/>
+              </a:rPr>
+              <a:t>Lpi</a:t>
+            </a:r>
+            <a:r>
+              <a:rPr lang="en-US" sz="1200" dirty="0">
+                <a:latin typeface="Arial" panose="020B0604020202020204" pitchFamily="34" charset="0"/>
+                <a:cs typeface="Arial" panose="020B0604020202020204" pitchFamily="34" charset="0"/>
+              </a:rPr>
+              <a:t> </a:t>
+            </a:r>
+            <a:r>
+              <a:rPr lang="en-US" sz="1200" dirty="0" err="1">
+                <a:latin typeface="Arial" panose="020B0604020202020204" pitchFamily="34" charset="0"/>
+                <a:cs typeface="Arial" panose="020B0604020202020204" pitchFamily="34" charset="0"/>
+              </a:rPr>
+              <a:t>mayores</a:t>
+            </a:r>
+            <a:r>
+              <a:rPr lang="en-US" sz="1200" dirty="0">
+                <a:latin typeface="Arial" panose="020B0604020202020204" pitchFamily="34" charset="0"/>
+                <a:cs typeface="Arial" panose="020B0604020202020204" pitchFamily="34" charset="0"/>
+              </a:rPr>
+              <a:t> que los TE.</a:t>
+            </a:r>
           </a:p>
           <a:p>
             <a:pPr algn="just"/>
@@ -6885,11 +7318,64 @@
             </a:endParaRPr>
           </a:p>
           <a:p>
-            <a:pPr algn="just"/>
-            <a:endParaRPr lang="en-US" sz="1200" dirty="0">
-              <a:latin typeface="Arial" panose="020B0604020202020204" pitchFamily="34" charset="0"/>
-              <a:cs typeface="Arial" panose="020B0604020202020204" pitchFamily="34" charset="0"/>
-            </a:endParaRPr>
+            <a:r>
+              <a:rPr lang="es-ES" sz="1200" dirty="0">
+                <a:latin typeface="Arial" panose="020B0604020202020204" pitchFamily="34" charset="0"/>
+                <a:cs typeface="Arial" panose="020B0604020202020204" pitchFamily="34" charset="0"/>
+              </a:rPr>
+              <a:t>En el caso </a:t>
+            </a:r>
+            <a:r>
+              <a:rPr lang="es-ES" sz="1200" dirty="0" err="1">
+                <a:latin typeface="Arial" panose="020B0604020202020204" pitchFamily="34" charset="0"/>
+                <a:cs typeface="Arial" panose="020B0604020202020204" pitchFamily="34" charset="0"/>
+              </a:rPr>
+              <a:t>shallow</a:t>
+            </a:r>
+            <a:r>
+              <a:rPr lang="es-ES" sz="1200" dirty="0">
+                <a:latin typeface="Arial" panose="020B0604020202020204" pitchFamily="34" charset="0"/>
+                <a:cs typeface="Arial" panose="020B0604020202020204" pitchFamily="34" charset="0"/>
+              </a:rPr>
+              <a:t>, el confinamiento del modo en la guía de onda es más débil que en el caso </a:t>
+            </a:r>
+            <a:r>
+              <a:rPr lang="es-ES" sz="1200" dirty="0" err="1">
+                <a:latin typeface="Arial" panose="020B0604020202020204" pitchFamily="34" charset="0"/>
+                <a:cs typeface="Arial" panose="020B0604020202020204" pitchFamily="34" charset="0"/>
+              </a:rPr>
+              <a:t>deep</a:t>
+            </a:r>
+            <a:r>
+              <a:rPr lang="es-ES" sz="1200" dirty="0">
+                <a:latin typeface="Arial" panose="020B0604020202020204" pitchFamily="34" charset="0"/>
+                <a:cs typeface="Arial" panose="020B0604020202020204" pitchFamily="34" charset="0"/>
+              </a:rPr>
+              <a:t>. Como consecuencia, el acoplamiento entre las dos guías es menor.</a:t>
+            </a:r>
+          </a:p>
+          <a:p>
+            <a:r>
+              <a:rPr lang="es-ES" sz="1200" dirty="0">
+                <a:latin typeface="Arial" panose="020B0604020202020204" pitchFamily="34" charset="0"/>
+                <a:cs typeface="Arial" panose="020B0604020202020204" pitchFamily="34" charset="0"/>
+              </a:rPr>
+              <a:t>Cuando el acoplamiento es menor, la distancia necesaria para transferir completamente la potencia entre guías aumenta, por lo que el </a:t>
+            </a:r>
+            <a:r>
+              <a:rPr lang="es-ES" sz="1200" dirty="0" err="1">
+                <a:latin typeface="Arial" panose="020B0604020202020204" pitchFamily="34" charset="0"/>
+                <a:cs typeface="Arial" panose="020B0604020202020204" pitchFamily="34" charset="0"/>
+              </a:rPr>
+              <a:t>Lpi</a:t>
+            </a:r>
+            <a:r>
+              <a:rPr lang="es-ES" sz="1200" dirty="0">
+                <a:latin typeface="Arial" panose="020B0604020202020204" pitchFamily="34" charset="0"/>
+                <a:cs typeface="Arial" panose="020B0604020202020204" pitchFamily="34" charset="0"/>
+              </a:rPr>
+              <a:t>​ aumenta.</a:t>
+            </a:r>
           </a:p>
         </p:txBody>
       </p:sp>
@@ -7314,7 +7800,7 @@
         <p:spPr>
           <a:xfrm>
             <a:off x="609441" y="4860334"/>
-            <a:ext cx="11199971" cy="1015663"/>
+            <a:ext cx="11199971" cy="1200329"/>
           </a:xfrm>
           <a:prstGeom prst="rect">
             <a:avLst/>
@@ -7347,20 +7833,198 @@
           </a:p>
           <a:p>
             <a:pPr algn="just"/>
-            <a:endParaRPr lang="en-US" sz="1200" dirty="0">
+            <a:r>
+              <a:rPr lang="en-US" sz="1200" dirty="0">
+                <a:latin typeface="Arial" panose="020B0604020202020204" pitchFamily="34" charset="0"/>
+                <a:cs typeface="Arial" panose="020B0604020202020204" pitchFamily="34" charset="0"/>
+              </a:rPr>
+              <a:t>Caso deep: al </a:t>
+            </a:r>
+            <a:r>
+              <a:rPr lang="en-US" sz="1200" dirty="0" err="1">
+                <a:latin typeface="Arial" panose="020B0604020202020204" pitchFamily="34" charset="0"/>
+                <a:cs typeface="Arial" panose="020B0604020202020204" pitchFamily="34" charset="0"/>
+              </a:rPr>
+              <a:t>aumentar</a:t>
+            </a:r>
+            <a:r>
+              <a:rPr lang="en-US" sz="1200" dirty="0">
+                <a:latin typeface="Arial" panose="020B0604020202020204" pitchFamily="34" charset="0"/>
+                <a:cs typeface="Arial" panose="020B0604020202020204" pitchFamily="34" charset="0"/>
+              </a:rPr>
+              <a:t> </a:t>
+            </a:r>
+            <a:r>
+              <a:rPr lang="en-US" sz="1200" dirty="0" err="1">
+                <a:latin typeface="Arial" panose="020B0604020202020204" pitchFamily="34" charset="0"/>
+                <a:cs typeface="Arial" panose="020B0604020202020204" pitchFamily="34" charset="0"/>
+              </a:rPr>
+              <a:t>el</a:t>
+            </a:r>
+            <a:r>
+              <a:rPr lang="en-US" sz="1200" dirty="0">
+                <a:latin typeface="Arial" panose="020B0604020202020204" pitchFamily="34" charset="0"/>
+                <a:cs typeface="Arial" panose="020B0604020202020204" pitchFamily="34" charset="0"/>
+              </a:rPr>
+              <a:t> gap entre </a:t>
+            </a:r>
+            <a:r>
+              <a:rPr lang="en-US" sz="1200" dirty="0" err="1">
+                <a:latin typeface="Arial" panose="020B0604020202020204" pitchFamily="34" charset="0"/>
+                <a:cs typeface="Arial" panose="020B0604020202020204" pitchFamily="34" charset="0"/>
+              </a:rPr>
+              <a:t>guías</a:t>
+            </a:r>
+            <a:r>
+              <a:rPr lang="en-US" sz="1200" dirty="0">
+                <a:latin typeface="Arial" panose="020B0604020202020204" pitchFamily="34" charset="0"/>
+                <a:cs typeface="Arial" panose="020B0604020202020204" pitchFamily="34" charset="0"/>
+              </a:rPr>
+              <a:t>, </a:t>
+            </a:r>
+            <a:r>
+              <a:rPr lang="en-US" sz="1200" dirty="0" err="1">
+                <a:latin typeface="Arial" panose="020B0604020202020204" pitchFamily="34" charset="0"/>
+                <a:cs typeface="Arial" panose="020B0604020202020204" pitchFamily="34" charset="0"/>
+              </a:rPr>
+              <a:t>disminuye</a:t>
+            </a:r>
+            <a:r>
+              <a:rPr lang="en-US" sz="1200" dirty="0">
+                <a:latin typeface="Arial" panose="020B0604020202020204" pitchFamily="34" charset="0"/>
+                <a:cs typeface="Arial" panose="020B0604020202020204" pitchFamily="34" charset="0"/>
+              </a:rPr>
+              <a:t> </a:t>
+            </a:r>
+            <a:r>
+              <a:rPr lang="en-US" sz="1200" dirty="0" err="1">
+                <a:latin typeface="Arial" panose="020B0604020202020204" pitchFamily="34" charset="0"/>
+                <a:cs typeface="Arial" panose="020B0604020202020204" pitchFamily="34" charset="0"/>
+              </a:rPr>
+              <a:t>el</a:t>
+            </a:r>
+            <a:r>
+              <a:rPr lang="en-US" sz="1200" dirty="0">
+                <a:latin typeface="Arial" panose="020B0604020202020204" pitchFamily="34" charset="0"/>
+                <a:cs typeface="Arial" panose="020B0604020202020204" pitchFamily="34" charset="0"/>
+              </a:rPr>
+              <a:t> </a:t>
+            </a:r>
+            <a:r>
+              <a:rPr lang="es-ES" sz="1200" b="1" dirty="0">
+                <a:latin typeface="Arial" panose="020B0604020202020204" pitchFamily="34" charset="0"/>
+                <a:cs typeface="Arial" panose="020B0604020202020204" pitchFamily="34" charset="0"/>
+              </a:rPr>
+              <a:t>acoplamiento</a:t>
+            </a:r>
+            <a:r>
+              <a:rPr lang="es-ES" sz="1200" dirty="0">
+                <a:latin typeface="Arial" panose="020B0604020202020204" pitchFamily="34" charset="0"/>
+                <a:cs typeface="Arial" panose="020B0604020202020204" pitchFamily="34" charset="0"/>
+              </a:rPr>
+              <a:t> entre modos, por tanto necesitamos más distancia para transferir la potencia y </a:t>
+            </a:r>
+            <a:r>
+              <a:rPr lang="es-ES" sz="1200" dirty="0" err="1">
+                <a:latin typeface="Arial" panose="020B0604020202020204" pitchFamily="34" charset="0"/>
+                <a:cs typeface="Arial" panose="020B0604020202020204" pitchFamily="34" charset="0"/>
+              </a:rPr>
+              <a:t>Lpi</a:t>
+            </a:r>
+            <a:r>
+              <a:rPr lang="es-ES" sz="1200" dirty="0">
+                <a:latin typeface="Arial" panose="020B0604020202020204" pitchFamily="34" charset="0"/>
+                <a:cs typeface="Arial" panose="020B0604020202020204" pitchFamily="34" charset="0"/>
+              </a:rPr>
+              <a:t> aumenta. Para el caso de 2 </a:t>
+            </a:r>
+            <a:r>
+              <a:rPr lang="es-ES" sz="1200" dirty="0" err="1">
+                <a:latin typeface="Arial" panose="020B0604020202020204" pitchFamily="34" charset="0"/>
+                <a:cs typeface="Arial" panose="020B0604020202020204" pitchFamily="34" charset="0"/>
+              </a:rPr>
+              <a:t>um</a:t>
+            </a:r>
+            <a:r>
+              <a:rPr lang="es-ES" sz="1200" dirty="0">
+                <a:latin typeface="Arial" panose="020B0604020202020204" pitchFamily="34" charset="0"/>
+                <a:cs typeface="Arial" panose="020B0604020202020204" pitchFamily="34" charset="0"/>
+              </a:rPr>
+              <a:t> en adelante ya están suficientemente lejos pero el </a:t>
+            </a:r>
+            <a:r>
+              <a:rPr lang="es-ES" sz="1200" dirty="0" err="1">
+                <a:latin typeface="Arial" panose="020B0604020202020204" pitchFamily="34" charset="0"/>
+                <a:cs typeface="Arial" panose="020B0604020202020204" pitchFamily="34" charset="0"/>
+              </a:rPr>
+              <a:t>solver</a:t>
+            </a:r>
+            <a:r>
+              <a:rPr lang="es-ES" sz="1200" dirty="0">
+                <a:latin typeface="Arial" panose="020B0604020202020204" pitchFamily="34" charset="0"/>
+                <a:cs typeface="Arial" panose="020B0604020202020204" pitchFamily="34" charset="0"/>
+              </a:rPr>
+              <a:t> lo calcula igualmente. Modo TM aumenta pero más suave</a:t>
+            </a:r>
+          </a:p>
+          <a:p>
+            <a:pPr algn="just"/>
+            <a:endParaRPr lang="es-ES" sz="1200" dirty="0">
               <a:latin typeface="Arial" panose="020B0604020202020204" pitchFamily="34" charset="0"/>
               <a:cs typeface="Arial" panose="020B0604020202020204" pitchFamily="34" charset="0"/>
             </a:endParaRPr>
           </a:p>
           <a:p>
             <a:pPr algn="just"/>
-            <a:endParaRPr lang="en-US" sz="1200" dirty="0">
-              <a:latin typeface="Arial" panose="020B0604020202020204" pitchFamily="34" charset="0"/>
-              <a:cs typeface="Arial" panose="020B0604020202020204" pitchFamily="34" charset="0"/>
-            </a:endParaRPr>
-          </a:p>
-          <a:p>
-            <a:pPr algn="just"/>
+            <a:r>
+              <a:rPr lang="es-ES" sz="1200" dirty="0">
+                <a:latin typeface="Arial" panose="020B0604020202020204" pitchFamily="34" charset="0"/>
+                <a:cs typeface="Arial" panose="020B0604020202020204" pitchFamily="34" charset="0"/>
+              </a:rPr>
+              <a:t>Caso </a:t>
+            </a:r>
+            <a:r>
+              <a:rPr lang="es-ES" sz="1200" dirty="0" err="1">
+                <a:latin typeface="Arial" panose="020B0604020202020204" pitchFamily="34" charset="0"/>
+                <a:cs typeface="Arial" panose="020B0604020202020204" pitchFamily="34" charset="0"/>
+              </a:rPr>
+              <a:t>shallow</a:t>
+            </a:r>
+            <a:r>
+              <a:rPr lang="es-ES" sz="1200" dirty="0">
+                <a:latin typeface="Arial" panose="020B0604020202020204" pitchFamily="34" charset="0"/>
+                <a:cs typeface="Arial" panose="020B0604020202020204" pitchFamily="34" charset="0"/>
+              </a:rPr>
+              <a:t>: presenta mismo comportamiento. He ajustado el </a:t>
+            </a:r>
+            <a:r>
+              <a:rPr lang="es-ES" sz="1200" dirty="0" err="1">
+                <a:latin typeface="Arial" panose="020B0604020202020204" pitchFamily="34" charset="0"/>
+                <a:cs typeface="Arial" panose="020B0604020202020204" pitchFamily="34" charset="0"/>
+              </a:rPr>
+              <a:t>max_grid_scaling</a:t>
+            </a:r>
+            <a:r>
+              <a:rPr lang="es-ES" sz="1200" dirty="0">
+                <a:latin typeface="Arial" panose="020B0604020202020204" pitchFamily="34" charset="0"/>
+                <a:cs typeface="Arial" panose="020B0604020202020204" pitchFamily="34" charset="0"/>
+              </a:rPr>
+              <a:t> y el </a:t>
+            </a:r>
+            <a:r>
+              <a:rPr lang="es-ES" sz="1200" dirty="0" err="1">
+                <a:latin typeface="Arial" panose="020B0604020202020204" pitchFamily="34" charset="0"/>
+                <a:cs typeface="Arial" panose="020B0604020202020204" pitchFamily="34" charset="0"/>
+              </a:rPr>
+              <a:t>grid_resolution</a:t>
+            </a:r>
+            <a:r>
+              <a:rPr lang="es-ES" sz="1200" dirty="0">
+                <a:latin typeface="Arial" panose="020B0604020202020204" pitchFamily="34" charset="0"/>
+                <a:cs typeface="Arial" panose="020B0604020202020204" pitchFamily="34" charset="0"/>
+              </a:rPr>
+              <a:t> pero no mejora la gráfica.</a:t>
+            </a:r>
             <a:endParaRPr lang="en-US" sz="1200" dirty="0">
               <a:latin typeface="Arial" panose="020B0604020202020204" pitchFamily="34" charset="0"/>
               <a:cs typeface="Arial" panose="020B0604020202020204" pitchFamily="34" charset="0"/>
@@ -7826,24 +8490,370 @@
           </a:p>
           <a:p>
             <a:pPr algn="just"/>
-            <a:endParaRPr lang="en-US" sz="1200" dirty="0">
-              <a:latin typeface="Arial" panose="020B0604020202020204" pitchFamily="34" charset="0"/>
-              <a:cs typeface="Arial" panose="020B0604020202020204" pitchFamily="34" charset="0"/>
-            </a:endParaRPr>
-          </a:p>
-          <a:p>
-            <a:pPr algn="just"/>
-            <a:endParaRPr lang="en-US" sz="1200" dirty="0">
-              <a:latin typeface="Arial" panose="020B0604020202020204" pitchFamily="34" charset="0"/>
-              <a:cs typeface="Arial" panose="020B0604020202020204" pitchFamily="34" charset="0"/>
-            </a:endParaRPr>
-          </a:p>
-          <a:p>
-            <a:pPr algn="just"/>
-            <a:endParaRPr lang="en-US" sz="1200" dirty="0">
-              <a:latin typeface="Arial" panose="020B0604020202020204" pitchFamily="34" charset="0"/>
-              <a:cs typeface="Arial" panose="020B0604020202020204" pitchFamily="34" charset="0"/>
-            </a:endParaRPr>
+            <a:r>
+              <a:rPr lang="en-US" sz="1200" dirty="0" err="1">
+                <a:latin typeface="Arial" panose="020B0604020202020204" pitchFamily="34" charset="0"/>
+                <a:cs typeface="Arial" panose="020B0604020202020204" pitchFamily="34" charset="0"/>
+              </a:rPr>
+              <a:t>En</a:t>
+            </a:r>
+            <a:r>
+              <a:rPr lang="en-US" sz="1200" dirty="0">
+                <a:latin typeface="Arial" panose="020B0604020202020204" pitchFamily="34" charset="0"/>
+                <a:cs typeface="Arial" panose="020B0604020202020204" pitchFamily="34" charset="0"/>
+              </a:rPr>
+              <a:t> MMI, </a:t>
+            </a:r>
+            <a:r>
+              <a:rPr lang="en-US" sz="1200" dirty="0" err="1">
+                <a:latin typeface="Arial" panose="020B0604020202020204" pitchFamily="34" charset="0"/>
+                <a:cs typeface="Arial" panose="020B0604020202020204" pitchFamily="34" charset="0"/>
+              </a:rPr>
+              <a:t>siempre</a:t>
+            </a:r>
+            <a:r>
+              <a:rPr lang="en-US" sz="1200" dirty="0">
+                <a:latin typeface="Arial" panose="020B0604020202020204" pitchFamily="34" charset="0"/>
+                <a:cs typeface="Arial" panose="020B0604020202020204" pitchFamily="34" charset="0"/>
+              </a:rPr>
+              <a:t> los </a:t>
+            </a:r>
+            <a:r>
+              <a:rPr lang="en-US" sz="1200" dirty="0" err="1">
+                <a:latin typeface="Arial" panose="020B0604020202020204" pitchFamily="34" charset="0"/>
+                <a:cs typeface="Arial" panose="020B0604020202020204" pitchFamily="34" charset="0"/>
+              </a:rPr>
+              <a:t>Lpi</a:t>
+            </a:r>
+            <a:r>
+              <a:rPr lang="en-US" sz="1200" dirty="0">
+                <a:latin typeface="Arial" panose="020B0604020202020204" pitchFamily="34" charset="0"/>
+                <a:cs typeface="Arial" panose="020B0604020202020204" pitchFamily="34" charset="0"/>
+              </a:rPr>
+              <a:t> de TM &gt; </a:t>
+            </a:r>
+            <a:r>
+              <a:rPr lang="en-US" sz="1200" dirty="0" err="1">
+                <a:latin typeface="Arial" panose="020B0604020202020204" pitchFamily="34" charset="0"/>
+                <a:cs typeface="Arial" panose="020B0604020202020204" pitchFamily="34" charset="0"/>
+              </a:rPr>
+              <a:t>Lpi</a:t>
+            </a:r>
+            <a:r>
+              <a:rPr lang="en-US" sz="1200" dirty="0">
+                <a:latin typeface="Arial" panose="020B0604020202020204" pitchFamily="34" charset="0"/>
+                <a:cs typeface="Arial" panose="020B0604020202020204" pitchFamily="34" charset="0"/>
+              </a:rPr>
+              <a:t> de TE. </a:t>
+            </a:r>
+            <a:r>
+              <a:rPr lang="en-US" sz="1200" dirty="0" err="1">
+                <a:latin typeface="Arial" panose="020B0604020202020204" pitchFamily="34" charset="0"/>
+                <a:cs typeface="Arial" panose="020B0604020202020204" pitchFamily="34" charset="0"/>
+              </a:rPr>
+              <a:t>También</a:t>
+            </a:r>
+            <a:r>
+              <a:rPr lang="en-US" sz="1200" dirty="0">
+                <a:latin typeface="Arial" panose="020B0604020202020204" pitchFamily="34" charset="0"/>
+                <a:cs typeface="Arial" panose="020B0604020202020204" pitchFamily="34" charset="0"/>
+              </a:rPr>
+              <a:t> </a:t>
+            </a:r>
+            <a:r>
+              <a:rPr lang="en-US" sz="1200" dirty="0" err="1">
+                <a:latin typeface="Arial" panose="020B0604020202020204" pitchFamily="34" charset="0"/>
+                <a:cs typeface="Arial" panose="020B0604020202020204" pitchFamily="34" charset="0"/>
+              </a:rPr>
+              <a:t>presentan</a:t>
+            </a:r>
+            <a:r>
+              <a:rPr lang="en-US" sz="1200" dirty="0">
+                <a:latin typeface="Arial" panose="020B0604020202020204" pitchFamily="34" charset="0"/>
+                <a:cs typeface="Arial" panose="020B0604020202020204" pitchFamily="34" charset="0"/>
+              </a:rPr>
+              <a:t> </a:t>
+            </a:r>
+            <a:r>
+              <a:rPr lang="en-US" sz="1200" dirty="0" err="1">
+                <a:latin typeface="Arial" panose="020B0604020202020204" pitchFamily="34" charset="0"/>
+                <a:cs typeface="Arial" panose="020B0604020202020204" pitchFamily="34" charset="0"/>
+              </a:rPr>
+              <a:t>valores</a:t>
+            </a:r>
+            <a:r>
+              <a:rPr lang="en-US" sz="1200" dirty="0">
+                <a:latin typeface="Arial" panose="020B0604020202020204" pitchFamily="34" charset="0"/>
+                <a:cs typeface="Arial" panose="020B0604020202020204" pitchFamily="34" charset="0"/>
+              </a:rPr>
+              <a:t> de </a:t>
+            </a:r>
+            <a:r>
+              <a:rPr lang="en-US" sz="1200" dirty="0" err="1">
+                <a:latin typeface="Arial" panose="020B0604020202020204" pitchFamily="34" charset="0"/>
+                <a:cs typeface="Arial" panose="020B0604020202020204" pitchFamily="34" charset="0"/>
+              </a:rPr>
+              <a:t>Lpi</a:t>
+            </a:r>
+            <a:r>
+              <a:rPr lang="en-US" sz="1200" dirty="0">
+                <a:latin typeface="Arial" panose="020B0604020202020204" pitchFamily="34" charset="0"/>
+                <a:cs typeface="Arial" panose="020B0604020202020204" pitchFamily="34" charset="0"/>
+              </a:rPr>
+              <a:t> </a:t>
+            </a:r>
+            <a:r>
+              <a:rPr lang="en-US" sz="1200" dirty="0" err="1">
+                <a:latin typeface="Arial" panose="020B0604020202020204" pitchFamily="34" charset="0"/>
+                <a:cs typeface="Arial" panose="020B0604020202020204" pitchFamily="34" charset="0"/>
+              </a:rPr>
+              <a:t>mayores</a:t>
+            </a:r>
+            <a:r>
+              <a:rPr lang="en-US" sz="1200" dirty="0">
+                <a:latin typeface="Arial" panose="020B0604020202020204" pitchFamily="34" charset="0"/>
+                <a:cs typeface="Arial" panose="020B0604020202020204" pitchFamily="34" charset="0"/>
+              </a:rPr>
+              <a:t> que </a:t>
+            </a:r>
+            <a:r>
+              <a:rPr lang="en-US" sz="1200" dirty="0" err="1">
+                <a:latin typeface="Arial" panose="020B0604020202020204" pitchFamily="34" charset="0"/>
+                <a:cs typeface="Arial" panose="020B0604020202020204" pitchFamily="34" charset="0"/>
+              </a:rPr>
+              <a:t>en</a:t>
+            </a:r>
+            <a:r>
+              <a:rPr lang="en-US" sz="1200" dirty="0">
+                <a:latin typeface="Arial" panose="020B0604020202020204" pitchFamily="34" charset="0"/>
+                <a:cs typeface="Arial" panose="020B0604020202020204" pitchFamily="34" charset="0"/>
+              </a:rPr>
+              <a:t> un DC. </a:t>
+            </a:r>
+            <a:r>
+              <a:rPr lang="en-US" sz="1200" dirty="0" err="1">
+                <a:latin typeface="Arial" panose="020B0604020202020204" pitchFamily="34" charset="0"/>
+                <a:cs typeface="Arial" panose="020B0604020202020204" pitchFamily="34" charset="0"/>
+              </a:rPr>
+              <a:t>Esto</a:t>
+            </a:r>
+            <a:r>
+              <a:rPr lang="en-US" sz="1200" dirty="0">
+                <a:latin typeface="Arial" panose="020B0604020202020204" pitchFamily="34" charset="0"/>
+                <a:cs typeface="Arial" panose="020B0604020202020204" pitchFamily="34" charset="0"/>
+              </a:rPr>
+              <a:t> se debe a la </a:t>
+            </a:r>
+            <a:r>
+              <a:rPr lang="en-US" sz="1200" dirty="0" err="1">
+                <a:latin typeface="Arial" panose="020B0604020202020204" pitchFamily="34" charset="0"/>
+                <a:cs typeface="Arial" panose="020B0604020202020204" pitchFamily="34" charset="0"/>
+              </a:rPr>
+              <a:t>propia</a:t>
+            </a:r>
+            <a:r>
+              <a:rPr lang="en-US" sz="1200" dirty="0">
+                <a:latin typeface="Arial" panose="020B0604020202020204" pitchFamily="34" charset="0"/>
+                <a:cs typeface="Arial" panose="020B0604020202020204" pitchFamily="34" charset="0"/>
+              </a:rPr>
+              <a:t> </a:t>
+            </a:r>
+            <a:r>
+              <a:rPr lang="en-US" sz="1200" dirty="0" err="1">
+                <a:latin typeface="Arial" panose="020B0604020202020204" pitchFamily="34" charset="0"/>
+                <a:cs typeface="Arial" panose="020B0604020202020204" pitchFamily="34" charset="0"/>
+              </a:rPr>
+              <a:t>naturaleza</a:t>
+            </a:r>
+            <a:r>
+              <a:rPr lang="en-US" sz="1200" dirty="0">
+                <a:latin typeface="Arial" panose="020B0604020202020204" pitchFamily="34" charset="0"/>
+                <a:cs typeface="Arial" panose="020B0604020202020204" pitchFamily="34" charset="0"/>
+              </a:rPr>
+              <a:t> del MMI que se </a:t>
+            </a:r>
+            <a:r>
+              <a:rPr lang="en-US" sz="1200" dirty="0" err="1">
+                <a:latin typeface="Arial" panose="020B0604020202020204" pitchFamily="34" charset="0"/>
+                <a:cs typeface="Arial" panose="020B0604020202020204" pitchFamily="34" charset="0"/>
+              </a:rPr>
+              <a:t>basa</a:t>
+            </a:r>
+            <a:r>
+              <a:rPr lang="en-US" sz="1200" dirty="0">
+                <a:latin typeface="Arial" panose="020B0604020202020204" pitchFamily="34" charset="0"/>
+                <a:cs typeface="Arial" panose="020B0604020202020204" pitchFamily="34" charset="0"/>
+              </a:rPr>
+              <a:t> </a:t>
+            </a:r>
+            <a:r>
+              <a:rPr lang="en-US" sz="1200" dirty="0" err="1">
+                <a:latin typeface="Arial" panose="020B0604020202020204" pitchFamily="34" charset="0"/>
+                <a:cs typeface="Arial" panose="020B0604020202020204" pitchFamily="34" charset="0"/>
+              </a:rPr>
+              <a:t>en</a:t>
+            </a:r>
+            <a:r>
+              <a:rPr lang="en-US" sz="1200" dirty="0">
+                <a:latin typeface="Arial" panose="020B0604020202020204" pitchFamily="34" charset="0"/>
+                <a:cs typeface="Arial" panose="020B0604020202020204" pitchFamily="34" charset="0"/>
+              </a:rPr>
+              <a:t> </a:t>
+            </a:r>
+            <a:r>
+              <a:rPr lang="en-US" sz="1200" dirty="0" err="1">
+                <a:latin typeface="Arial" panose="020B0604020202020204" pitchFamily="34" charset="0"/>
+                <a:cs typeface="Arial" panose="020B0604020202020204" pitchFamily="34" charset="0"/>
+              </a:rPr>
+              <a:t>interferencias</a:t>
+            </a:r>
+            <a:r>
+              <a:rPr lang="en-US" sz="1200" dirty="0">
+                <a:latin typeface="Arial" panose="020B0604020202020204" pitchFamily="34" charset="0"/>
+                <a:cs typeface="Arial" panose="020B0604020202020204" pitchFamily="34" charset="0"/>
+              </a:rPr>
+              <a:t> </a:t>
+            </a:r>
+            <a:r>
+              <a:rPr lang="en-US" sz="1200" dirty="0" err="1">
+                <a:latin typeface="Arial" panose="020B0604020202020204" pitchFamily="34" charset="0"/>
+                <a:cs typeface="Arial" panose="020B0604020202020204" pitchFamily="34" charset="0"/>
+              </a:rPr>
+              <a:t>entonces</a:t>
+            </a:r>
+            <a:r>
+              <a:rPr lang="en-US" sz="1200" dirty="0">
+                <a:latin typeface="Arial" panose="020B0604020202020204" pitchFamily="34" charset="0"/>
+                <a:cs typeface="Arial" panose="020B0604020202020204" pitchFamily="34" charset="0"/>
+              </a:rPr>
+              <a:t> se require mayor longitude de </a:t>
+            </a:r>
+            <a:r>
+              <a:rPr lang="en-US" sz="1200" dirty="0" err="1">
+                <a:latin typeface="Arial" panose="020B0604020202020204" pitchFamily="34" charset="0"/>
+                <a:cs typeface="Arial" panose="020B0604020202020204" pitchFamily="34" charset="0"/>
+              </a:rPr>
+              <a:t>propagación</a:t>
+            </a:r>
+            <a:r>
+              <a:rPr lang="en-US" sz="1200" dirty="0">
+                <a:latin typeface="Arial" panose="020B0604020202020204" pitchFamily="34" charset="0"/>
+                <a:cs typeface="Arial" panose="020B0604020202020204" pitchFamily="34" charset="0"/>
+              </a:rPr>
+              <a:t>. </a:t>
+            </a:r>
+            <a:r>
+              <a:rPr lang="en-US" sz="1200" dirty="0" err="1">
+                <a:latin typeface="Arial" panose="020B0604020202020204" pitchFamily="34" charset="0"/>
+                <a:cs typeface="Arial" panose="020B0604020202020204" pitchFamily="34" charset="0"/>
+              </a:rPr>
+              <a:t>En</a:t>
+            </a:r>
+            <a:r>
+              <a:rPr lang="en-US" sz="1200" dirty="0">
+                <a:latin typeface="Arial" panose="020B0604020202020204" pitchFamily="34" charset="0"/>
+                <a:cs typeface="Arial" panose="020B0604020202020204" pitchFamily="34" charset="0"/>
+              </a:rPr>
+              <a:t> </a:t>
+            </a:r>
+            <a:r>
+              <a:rPr lang="en-US" sz="1200" dirty="0" err="1">
+                <a:latin typeface="Arial" panose="020B0604020202020204" pitchFamily="34" charset="0"/>
+                <a:cs typeface="Arial" panose="020B0604020202020204" pitchFamily="34" charset="0"/>
+              </a:rPr>
+              <a:t>cambio</a:t>
+            </a:r>
+            <a:r>
+              <a:rPr lang="en-US" sz="1200" dirty="0">
+                <a:latin typeface="Arial" panose="020B0604020202020204" pitchFamily="34" charset="0"/>
+                <a:cs typeface="Arial" panose="020B0604020202020204" pitchFamily="34" charset="0"/>
+              </a:rPr>
+              <a:t>, los DC </a:t>
+            </a:r>
+            <a:r>
+              <a:rPr lang="en-US" sz="1200" dirty="0" err="1">
+                <a:latin typeface="Arial" panose="020B0604020202020204" pitchFamily="34" charset="0"/>
+                <a:cs typeface="Arial" panose="020B0604020202020204" pitchFamily="34" charset="0"/>
+              </a:rPr>
+              <a:t>funcionan</a:t>
+            </a:r>
+            <a:r>
+              <a:rPr lang="en-US" sz="1200" dirty="0">
+                <a:latin typeface="Arial" panose="020B0604020202020204" pitchFamily="34" charset="0"/>
+                <a:cs typeface="Arial" panose="020B0604020202020204" pitchFamily="34" charset="0"/>
+              </a:rPr>
+              <a:t> por </a:t>
+            </a:r>
+            <a:r>
+              <a:rPr lang="en-US" sz="1200" dirty="0" err="1">
+                <a:latin typeface="Arial" panose="020B0604020202020204" pitchFamily="34" charset="0"/>
+                <a:cs typeface="Arial" panose="020B0604020202020204" pitchFamily="34" charset="0"/>
+              </a:rPr>
+              <a:t>acoplamiento</a:t>
+            </a:r>
+            <a:r>
+              <a:rPr lang="en-US" sz="1200" dirty="0">
+                <a:latin typeface="Arial" panose="020B0604020202020204" pitchFamily="34" charset="0"/>
+                <a:cs typeface="Arial" panose="020B0604020202020204" pitchFamily="34" charset="0"/>
+              </a:rPr>
+              <a:t> de campo </a:t>
+            </a:r>
+            <a:r>
+              <a:rPr lang="en-US" sz="1200" dirty="0" err="1">
+                <a:latin typeface="Arial" panose="020B0604020202020204" pitchFamily="34" charset="0"/>
+                <a:cs typeface="Arial" panose="020B0604020202020204" pitchFamily="34" charset="0"/>
+              </a:rPr>
+              <a:t>evanescente</a:t>
+            </a:r>
+            <a:r>
+              <a:rPr lang="en-US" sz="1200" dirty="0">
+                <a:latin typeface="Arial" panose="020B0604020202020204" pitchFamily="34" charset="0"/>
+                <a:cs typeface="Arial" panose="020B0604020202020204" pitchFamily="34" charset="0"/>
+              </a:rPr>
+              <a:t> por lo que </a:t>
+            </a:r>
+            <a:r>
+              <a:rPr lang="en-US" sz="1200" dirty="0" err="1">
+                <a:latin typeface="Arial" panose="020B0604020202020204" pitchFamily="34" charset="0"/>
+                <a:cs typeface="Arial" panose="020B0604020202020204" pitchFamily="34" charset="0"/>
+              </a:rPr>
+              <a:t>necesita</a:t>
+            </a:r>
+            <a:r>
+              <a:rPr lang="en-US" sz="1200" dirty="0">
+                <a:latin typeface="Arial" panose="020B0604020202020204" pitchFamily="34" charset="0"/>
+                <a:cs typeface="Arial" panose="020B0604020202020204" pitchFamily="34" charset="0"/>
+              </a:rPr>
+              <a:t> </a:t>
+            </a:r>
+            <a:r>
+              <a:rPr lang="en-US" sz="1200" dirty="0" err="1">
+                <a:latin typeface="Arial" panose="020B0604020202020204" pitchFamily="34" charset="0"/>
+                <a:cs typeface="Arial" panose="020B0604020202020204" pitchFamily="34" charset="0"/>
+              </a:rPr>
+              <a:t>distancias</a:t>
+            </a:r>
+            <a:r>
+              <a:rPr lang="en-US" sz="1200" dirty="0">
+                <a:latin typeface="Arial" panose="020B0604020202020204" pitchFamily="34" charset="0"/>
+                <a:cs typeface="Arial" panose="020B0604020202020204" pitchFamily="34" charset="0"/>
+              </a:rPr>
+              <a:t> </a:t>
+            </a:r>
+            <a:r>
+              <a:rPr lang="en-US" sz="1200" dirty="0" err="1">
+                <a:latin typeface="Arial" panose="020B0604020202020204" pitchFamily="34" charset="0"/>
+                <a:cs typeface="Arial" panose="020B0604020202020204" pitchFamily="34" charset="0"/>
+              </a:rPr>
+              <a:t>cortas</a:t>
+            </a:r>
+            <a:r>
+              <a:rPr lang="en-US" sz="1200" dirty="0">
+                <a:latin typeface="Arial" panose="020B0604020202020204" pitchFamily="34" charset="0"/>
+                <a:cs typeface="Arial" panose="020B0604020202020204" pitchFamily="34" charset="0"/>
+              </a:rPr>
+              <a:t>.</a:t>
+            </a:r>
           </a:p>
           <a:p>
             <a:pPr algn="just"/>
@@ -8279,7 +9289,7 @@
         <p:spPr>
           <a:xfrm>
             <a:off x="609441" y="4860334"/>
-            <a:ext cx="11199971" cy="1384995"/>
+            <a:ext cx="11199971" cy="1200329"/>
           </a:xfrm>
           <a:prstGeom prst="rect">
             <a:avLst/>
@@ -8312,13 +9322,111 @@
           </a:p>
           <a:p>
             <a:pPr algn="just"/>
-            <a:endParaRPr lang="en-US" sz="1200" dirty="0">
-              <a:latin typeface="Arial" panose="020B0604020202020204" pitchFamily="34" charset="0"/>
-              <a:cs typeface="Arial" panose="020B0604020202020204" pitchFamily="34" charset="0"/>
-            </a:endParaRPr>
-          </a:p>
-          <a:p>
-            <a:pPr algn="just"/>
+            <a:r>
+              <a:rPr lang="en-US" sz="1200" dirty="0" err="1">
+                <a:latin typeface="Arial" panose="020B0604020202020204" pitchFamily="34" charset="0"/>
+                <a:cs typeface="Arial" panose="020B0604020202020204" pitchFamily="34" charset="0"/>
+              </a:rPr>
+              <a:t>Sí</a:t>
+            </a:r>
+            <a:r>
+              <a:rPr lang="en-US" sz="1200" dirty="0">
+                <a:latin typeface="Arial" panose="020B0604020202020204" pitchFamily="34" charset="0"/>
+                <a:cs typeface="Arial" panose="020B0604020202020204" pitchFamily="34" charset="0"/>
+              </a:rPr>
+              <a:t>, para </a:t>
+            </a:r>
+            <a:r>
+              <a:rPr lang="en-US" sz="1200" dirty="0" err="1">
+                <a:latin typeface="Arial" panose="020B0604020202020204" pitchFamily="34" charset="0"/>
+                <a:cs typeface="Arial" panose="020B0604020202020204" pitchFamily="34" charset="0"/>
+              </a:rPr>
+              <a:t>el</a:t>
+            </a:r>
+            <a:r>
+              <a:rPr lang="en-US" sz="1200" dirty="0">
+                <a:latin typeface="Arial" panose="020B0604020202020204" pitchFamily="34" charset="0"/>
+                <a:cs typeface="Arial" panose="020B0604020202020204" pitchFamily="34" charset="0"/>
+              </a:rPr>
+              <a:t> </a:t>
+            </a:r>
+            <a:r>
+              <a:rPr lang="en-US" sz="1200" dirty="0" err="1">
+                <a:latin typeface="Arial" panose="020B0604020202020204" pitchFamily="34" charset="0"/>
+                <a:cs typeface="Arial" panose="020B0604020202020204" pitchFamily="34" charset="0"/>
+              </a:rPr>
+              <a:t>caso</a:t>
+            </a:r>
+            <a:r>
+              <a:rPr lang="en-US" sz="1200" dirty="0">
+                <a:latin typeface="Arial" panose="020B0604020202020204" pitchFamily="34" charset="0"/>
+                <a:cs typeface="Arial" panose="020B0604020202020204" pitchFamily="34" charset="0"/>
+              </a:rPr>
+              <a:t> shallow se </a:t>
+            </a:r>
+            <a:r>
+              <a:rPr lang="en-US" sz="1200" dirty="0" err="1">
+                <a:latin typeface="Arial" panose="020B0604020202020204" pitchFamily="34" charset="0"/>
+                <a:cs typeface="Arial" panose="020B0604020202020204" pitchFamily="34" charset="0"/>
+              </a:rPr>
+              <a:t>observa</a:t>
+            </a:r>
+            <a:r>
+              <a:rPr lang="en-US" sz="1200" dirty="0">
+                <a:latin typeface="Arial" panose="020B0604020202020204" pitchFamily="34" charset="0"/>
+                <a:cs typeface="Arial" panose="020B0604020202020204" pitchFamily="34" charset="0"/>
+              </a:rPr>
+              <a:t> que a </a:t>
+            </a:r>
+            <a:r>
+              <a:rPr lang="en-US" sz="1200" dirty="0" err="1">
+                <a:latin typeface="Arial" panose="020B0604020202020204" pitchFamily="34" charset="0"/>
+                <a:cs typeface="Arial" panose="020B0604020202020204" pitchFamily="34" charset="0"/>
+              </a:rPr>
+              <a:t>partir</a:t>
+            </a:r>
+            <a:r>
+              <a:rPr lang="en-US" sz="1200" dirty="0">
+                <a:latin typeface="Arial" panose="020B0604020202020204" pitchFamily="34" charset="0"/>
+                <a:cs typeface="Arial" panose="020B0604020202020204" pitchFamily="34" charset="0"/>
+              </a:rPr>
+              <a:t> de 8 um, </a:t>
+            </a:r>
+            <a:r>
+              <a:rPr lang="en-US" sz="1200" dirty="0" err="1">
+                <a:latin typeface="Arial" panose="020B0604020202020204" pitchFamily="34" charset="0"/>
+                <a:cs typeface="Arial" panose="020B0604020202020204" pitchFamily="34" charset="0"/>
+              </a:rPr>
+              <a:t>Lpi</a:t>
+            </a:r>
+            <a:r>
+              <a:rPr lang="en-US" sz="1200" dirty="0">
+                <a:latin typeface="Arial" panose="020B0604020202020204" pitchFamily="34" charset="0"/>
+                <a:cs typeface="Arial" panose="020B0604020202020204" pitchFamily="34" charset="0"/>
+              </a:rPr>
+              <a:t> TE = </a:t>
+            </a:r>
+            <a:r>
+              <a:rPr lang="en-US" sz="1200" dirty="0" err="1">
+                <a:latin typeface="Arial" panose="020B0604020202020204" pitchFamily="34" charset="0"/>
+                <a:cs typeface="Arial" panose="020B0604020202020204" pitchFamily="34" charset="0"/>
+              </a:rPr>
+              <a:t>Lpi</a:t>
+            </a:r>
+            <a:r>
+              <a:rPr lang="en-US" sz="1200" dirty="0">
+                <a:latin typeface="Arial" panose="020B0604020202020204" pitchFamily="34" charset="0"/>
+                <a:cs typeface="Arial" panose="020B0604020202020204" pitchFamily="34" charset="0"/>
+              </a:rPr>
+              <a:t> TM </a:t>
+            </a:r>
+            <a:r>
+              <a:rPr lang="es-ES" sz="1200" dirty="0">
+                <a:latin typeface="Arial" panose="020B0604020202020204" pitchFamily="34" charset="0"/>
+                <a:cs typeface="Arial" panose="020B0604020202020204" pitchFamily="34" charset="0"/>
+              </a:rPr>
+              <a:t>lo que permite que el dispositivo funcione de forma idéntica para ambas polarizaciones. </a:t>
+            </a:r>
             <a:endParaRPr lang="en-US" sz="1200" dirty="0">
               <a:latin typeface="Arial" panose="020B0604020202020204" pitchFamily="34" charset="0"/>
               <a:cs typeface="Arial" panose="020B0604020202020204" pitchFamily="34" charset="0"/>
@@ -11081,7 +12189,7 @@
         <p:spPr>
           <a:xfrm>
             <a:off x="609441" y="4860334"/>
-            <a:ext cx="11199971" cy="1384995"/>
+            <a:ext cx="11199971" cy="1200329"/>
           </a:xfrm>
           <a:prstGeom prst="rect">
             <a:avLst/>
@@ -11120,380 +12228,142 @@
             </a:endParaRPr>
           </a:p>
           <a:p>
-            <a:pPr algn="just"/>
-            <a:r>
-              <a:rPr lang="en-US" sz="1200" dirty="0" err="1">
-                <a:latin typeface="Arial" panose="020B0604020202020204" pitchFamily="34" charset="0"/>
-                <a:cs typeface="Arial" panose="020B0604020202020204" pitchFamily="34" charset="0"/>
-              </a:rPr>
-              <a:t>Cuando</a:t>
-            </a:r>
-            <a:r>
-              <a:rPr lang="en-US" sz="1200" dirty="0">
-                <a:latin typeface="Arial" panose="020B0604020202020204" pitchFamily="34" charset="0"/>
-                <a:cs typeface="Arial" panose="020B0604020202020204" pitchFamily="34" charset="0"/>
-              </a:rPr>
-              <a:t> L=m*</a:t>
-            </a:r>
-            <a:r>
-              <a:rPr lang="en-US" sz="1200" dirty="0" err="1">
-                <a:latin typeface="Arial" panose="020B0604020202020204" pitchFamily="34" charset="0"/>
-                <a:cs typeface="Arial" panose="020B0604020202020204" pitchFamily="34" charset="0"/>
-              </a:rPr>
-              <a:t>L_pi</a:t>
-            </a:r>
-            <a:r>
-              <a:rPr lang="en-US" sz="1200" dirty="0">
-                <a:latin typeface="Arial" panose="020B0604020202020204" pitchFamily="34" charset="0"/>
-                <a:cs typeface="Arial" panose="020B0604020202020204" pitchFamily="34" charset="0"/>
-              </a:rPr>
-              <a:t> </a:t>
-            </a:r>
-            <a:r>
-              <a:rPr lang="en-US" sz="1200" dirty="0" err="1">
-                <a:latin typeface="Arial" panose="020B0604020202020204" pitchFamily="34" charset="0"/>
-                <a:cs typeface="Arial" panose="020B0604020202020204" pitchFamily="34" charset="0"/>
-              </a:rPr>
-              <a:t>siendo</a:t>
-            </a:r>
-            <a:r>
-              <a:rPr lang="en-US" sz="1200" dirty="0">
-                <a:latin typeface="Arial" panose="020B0604020202020204" pitchFamily="34" charset="0"/>
-                <a:cs typeface="Arial" panose="020B0604020202020204" pitchFamily="34" charset="0"/>
-              </a:rPr>
-              <a:t> m </a:t>
-            </a:r>
-            <a:r>
-              <a:rPr lang="en-US" sz="1200" dirty="0" err="1">
-                <a:latin typeface="Arial" panose="020B0604020202020204" pitchFamily="34" charset="0"/>
-                <a:cs typeface="Arial" panose="020B0604020202020204" pitchFamily="34" charset="0"/>
-              </a:rPr>
-              <a:t>valores</a:t>
-            </a:r>
-            <a:r>
-              <a:rPr lang="en-US" sz="1200" dirty="0">
-                <a:latin typeface="Arial" panose="020B0604020202020204" pitchFamily="34" charset="0"/>
-                <a:cs typeface="Arial" panose="020B0604020202020204" pitchFamily="34" charset="0"/>
-              </a:rPr>
-              <a:t> </a:t>
-            </a:r>
-            <a:r>
-              <a:rPr lang="en-US" sz="1200" dirty="0" err="1">
-                <a:latin typeface="Arial" panose="020B0604020202020204" pitchFamily="34" charset="0"/>
-                <a:cs typeface="Arial" panose="020B0604020202020204" pitchFamily="34" charset="0"/>
-              </a:rPr>
-              <a:t>enteros</a:t>
-            </a:r>
-            <a:r>
-              <a:rPr lang="en-US" sz="1200" dirty="0">
-                <a:latin typeface="Arial" panose="020B0604020202020204" pitchFamily="34" charset="0"/>
-                <a:cs typeface="Arial" panose="020B0604020202020204" pitchFamily="34" charset="0"/>
-              </a:rPr>
-              <a:t> </a:t>
-            </a:r>
-            <a:r>
-              <a:rPr lang="en-US" sz="1200" dirty="0" err="1">
-                <a:latin typeface="Arial" panose="020B0604020202020204" pitchFamily="34" charset="0"/>
-                <a:cs typeface="Arial" panose="020B0604020202020204" pitchFamily="34" charset="0"/>
-              </a:rPr>
-              <a:t>positivos</a:t>
-            </a:r>
-            <a:r>
-              <a:rPr lang="en-US" sz="1200" dirty="0">
-                <a:latin typeface="Arial" panose="020B0604020202020204" pitchFamily="34" charset="0"/>
-                <a:cs typeface="Arial" panose="020B0604020202020204" pitchFamily="34" charset="0"/>
-              </a:rPr>
-              <a:t> </a:t>
-            </a:r>
-            <a:r>
-              <a:rPr lang="en-US" sz="1200" dirty="0" err="1">
-                <a:latin typeface="Arial" panose="020B0604020202020204" pitchFamily="34" charset="0"/>
-                <a:cs typeface="Arial" panose="020B0604020202020204" pitchFamily="34" charset="0"/>
-              </a:rPr>
-              <a:t>impares</a:t>
-            </a:r>
-            <a:r>
-              <a:rPr lang="en-US" sz="1200" dirty="0">
-                <a:latin typeface="Arial" panose="020B0604020202020204" pitchFamily="34" charset="0"/>
-                <a:cs typeface="Arial" panose="020B0604020202020204" pitchFamily="34" charset="0"/>
-              </a:rPr>
-              <a:t> por 1 </a:t>
-            </a:r>
-            <a:r>
-              <a:rPr lang="en-US" sz="1200" dirty="0" err="1">
-                <a:latin typeface="Arial" panose="020B0604020202020204" pitchFamily="34" charset="0"/>
-                <a:cs typeface="Arial" panose="020B0604020202020204" pitchFamily="34" charset="0"/>
-              </a:rPr>
-              <a:t>obtenemos</a:t>
-            </a:r>
-            <a:r>
-              <a:rPr lang="en-US" sz="1200" dirty="0">
-                <a:latin typeface="Arial" panose="020B0604020202020204" pitchFamily="34" charset="0"/>
-                <a:cs typeface="Arial" panose="020B0604020202020204" pitchFamily="34" charset="0"/>
-              </a:rPr>
-              <a:t> una </a:t>
-            </a:r>
-            <a:r>
-              <a:rPr lang="en-US" sz="1200" dirty="0" err="1">
-                <a:latin typeface="Arial" panose="020B0604020202020204" pitchFamily="34" charset="0"/>
-                <a:cs typeface="Arial" panose="020B0604020202020204" pitchFamily="34" charset="0"/>
-              </a:rPr>
-              <a:t>transferencia</a:t>
-            </a:r>
-            <a:r>
-              <a:rPr lang="en-US" sz="1200" dirty="0">
-                <a:latin typeface="Arial" panose="020B0604020202020204" pitchFamily="34" charset="0"/>
-                <a:cs typeface="Arial" panose="020B0604020202020204" pitchFamily="34" charset="0"/>
-              </a:rPr>
-              <a:t> total de </a:t>
-            </a:r>
-            <a:r>
-              <a:rPr lang="en-US" sz="1200" dirty="0" err="1">
-                <a:latin typeface="Arial" panose="020B0604020202020204" pitchFamily="34" charset="0"/>
-                <a:cs typeface="Arial" panose="020B0604020202020204" pitchFamily="34" charset="0"/>
-              </a:rPr>
-              <a:t>energía</a:t>
-            </a:r>
-            <a:r>
-              <a:rPr lang="en-US" sz="1200" dirty="0">
-                <a:latin typeface="Arial" panose="020B0604020202020204" pitchFamily="34" charset="0"/>
-                <a:cs typeface="Arial" panose="020B0604020202020204" pitchFamily="34" charset="0"/>
-              </a:rPr>
-              <a:t> entre </a:t>
-            </a:r>
-            <a:r>
-              <a:rPr lang="en-US" sz="1200" dirty="0" err="1">
-                <a:latin typeface="Arial" panose="020B0604020202020204" pitchFamily="34" charset="0"/>
-                <a:cs typeface="Arial" panose="020B0604020202020204" pitchFamily="34" charset="0"/>
-              </a:rPr>
-              <a:t>guías</a:t>
-            </a:r>
-            <a:r>
-              <a:rPr lang="en-US" sz="1200" dirty="0">
-                <a:latin typeface="Arial" panose="020B0604020202020204" pitchFamily="34" charset="0"/>
-                <a:cs typeface="Arial" panose="020B0604020202020204" pitchFamily="34" charset="0"/>
-              </a:rPr>
-              <a:t> </a:t>
-            </a:r>
-            <a:r>
-              <a:rPr lang="en-US" sz="1200" dirty="0" err="1">
-                <a:latin typeface="Arial" panose="020B0604020202020204" pitchFamily="34" charset="0"/>
-                <a:cs typeface="Arial" panose="020B0604020202020204" pitchFamily="34" charset="0"/>
-              </a:rPr>
-              <a:t>ya</a:t>
-            </a:r>
-            <a:r>
-              <a:rPr lang="en-US" sz="1200" dirty="0">
-                <a:latin typeface="Arial" panose="020B0604020202020204" pitchFamily="34" charset="0"/>
-                <a:cs typeface="Arial" panose="020B0604020202020204" pitchFamily="34" charset="0"/>
-              </a:rPr>
-              <a:t> que K=1.</a:t>
-            </a:r>
-          </a:p>
-          <a:p>
-            <a:pPr algn="just"/>
-            <a:r>
-              <a:rPr lang="en-US" sz="1200" dirty="0">
-                <a:latin typeface="Arial" panose="020B0604020202020204" pitchFamily="34" charset="0"/>
-                <a:cs typeface="Arial" panose="020B0604020202020204" pitchFamily="34" charset="0"/>
-              </a:rPr>
-              <a:t>Para </a:t>
-            </a:r>
-            <a:r>
-              <a:rPr lang="en-US" sz="1200" dirty="0" err="1">
-                <a:latin typeface="Arial" panose="020B0604020202020204" pitchFamily="34" charset="0"/>
-                <a:cs typeface="Arial" panose="020B0604020202020204" pitchFamily="34" charset="0"/>
-              </a:rPr>
-              <a:t>obtener</a:t>
-            </a:r>
-            <a:r>
-              <a:rPr lang="en-US" sz="1200" dirty="0">
-                <a:latin typeface="Arial" panose="020B0604020202020204" pitchFamily="34" charset="0"/>
-                <a:cs typeface="Arial" panose="020B0604020202020204" pitchFamily="34" charset="0"/>
-              </a:rPr>
-              <a:t> la </a:t>
-            </a:r>
-            <a:r>
-              <a:rPr lang="en-US" sz="1200" dirty="0" err="1">
-                <a:latin typeface="Arial" panose="020B0604020202020204" pitchFamily="34" charset="0"/>
-                <a:cs typeface="Arial" panose="020B0604020202020204" pitchFamily="34" charset="0"/>
-              </a:rPr>
-              <a:t>potencia</a:t>
-            </a:r>
-            <a:r>
-              <a:rPr lang="en-US" sz="1200" dirty="0">
-                <a:latin typeface="Arial" panose="020B0604020202020204" pitchFamily="34" charset="0"/>
-                <a:cs typeface="Arial" panose="020B0604020202020204" pitchFamily="34" charset="0"/>
-              </a:rPr>
-              <a:t> </a:t>
-            </a:r>
-            <a:r>
-              <a:rPr lang="en-US" sz="1200" dirty="0" err="1">
-                <a:latin typeface="Arial" panose="020B0604020202020204" pitchFamily="34" charset="0"/>
-                <a:cs typeface="Arial" panose="020B0604020202020204" pitchFamily="34" charset="0"/>
-              </a:rPr>
-              <a:t>dividida</a:t>
-            </a:r>
-            <a:r>
-              <a:rPr lang="en-US" sz="1200" dirty="0">
-                <a:latin typeface="Arial" panose="020B0604020202020204" pitchFamily="34" charset="0"/>
-                <a:cs typeface="Arial" panose="020B0604020202020204" pitchFamily="34" charset="0"/>
-              </a:rPr>
-              <a:t> entre los dos </a:t>
-            </a:r>
-            <a:r>
-              <a:rPr lang="en-US" sz="1200" dirty="0" err="1">
-                <a:latin typeface="Arial" panose="020B0604020202020204" pitchFamily="34" charset="0"/>
-                <a:cs typeface="Arial" panose="020B0604020202020204" pitchFamily="34" charset="0"/>
-              </a:rPr>
-              <a:t>puertos</a:t>
-            </a:r>
-            <a:r>
-              <a:rPr lang="en-US" sz="1200" dirty="0">
-                <a:latin typeface="Arial" panose="020B0604020202020204" pitchFamily="34" charset="0"/>
-                <a:cs typeface="Arial" panose="020B0604020202020204" pitchFamily="34" charset="0"/>
-              </a:rPr>
-              <a:t> de </a:t>
-            </a:r>
-            <a:r>
-              <a:rPr lang="en-US" sz="1200" dirty="0" err="1">
-                <a:latin typeface="Arial" panose="020B0604020202020204" pitchFamily="34" charset="0"/>
-                <a:cs typeface="Arial" panose="020B0604020202020204" pitchFamily="34" charset="0"/>
-              </a:rPr>
-              <a:t>salida</a:t>
-            </a:r>
-            <a:r>
-              <a:rPr lang="en-US" sz="1200" dirty="0">
-                <a:latin typeface="Arial" panose="020B0604020202020204" pitchFamily="34" charset="0"/>
-                <a:cs typeface="Arial" panose="020B0604020202020204" pitchFamily="34" charset="0"/>
-              </a:rPr>
-              <a:t> L = m*</a:t>
-            </a:r>
-            <a:r>
-              <a:rPr lang="en-US" sz="1200" dirty="0" err="1">
-                <a:latin typeface="Arial" panose="020B0604020202020204" pitchFamily="34" charset="0"/>
-                <a:cs typeface="Arial" panose="020B0604020202020204" pitchFamily="34" charset="0"/>
-              </a:rPr>
-              <a:t>L_pi</a:t>
-            </a:r>
-            <a:r>
-              <a:rPr lang="en-US" sz="1200" dirty="0">
-                <a:latin typeface="Arial" panose="020B0604020202020204" pitchFamily="34" charset="0"/>
-                <a:cs typeface="Arial" panose="020B0604020202020204" pitchFamily="34" charset="0"/>
-              </a:rPr>
-              <a:t>/2 para </a:t>
-            </a:r>
-            <a:r>
-              <a:rPr lang="en-US" sz="1200" dirty="0" err="1">
-                <a:latin typeface="Arial" panose="020B0604020202020204" pitchFamily="34" charset="0"/>
-                <a:cs typeface="Arial" panose="020B0604020202020204" pitchFamily="34" charset="0"/>
-              </a:rPr>
-              <a:t>valores</a:t>
-            </a:r>
-            <a:r>
-              <a:rPr lang="en-US" sz="1200" dirty="0">
-                <a:latin typeface="Arial" panose="020B0604020202020204" pitchFamily="34" charset="0"/>
-                <a:cs typeface="Arial" panose="020B0604020202020204" pitchFamily="34" charset="0"/>
-              </a:rPr>
-              <a:t> de m </a:t>
-            </a:r>
-            <a:r>
-              <a:rPr lang="en-US" sz="1200" dirty="0" err="1">
-                <a:latin typeface="Arial" panose="020B0604020202020204" pitchFamily="34" charset="0"/>
-                <a:cs typeface="Arial" panose="020B0604020202020204" pitchFamily="34" charset="0"/>
-              </a:rPr>
-              <a:t>impares</a:t>
-            </a:r>
-            <a:r>
-              <a:rPr lang="en-US" sz="1200" dirty="0">
-                <a:latin typeface="Arial" panose="020B0604020202020204" pitchFamily="34" charset="0"/>
-                <a:cs typeface="Arial" panose="020B0604020202020204" pitchFamily="34" charset="0"/>
-              </a:rPr>
-              <a:t>.</a:t>
-            </a:r>
-          </a:p>
-          <a:p>
-            <a:pPr algn="just"/>
-            <a:r>
-              <a:rPr lang="en-US" sz="1200" dirty="0">
-                <a:latin typeface="Arial" panose="020B0604020202020204" pitchFamily="34" charset="0"/>
-                <a:cs typeface="Arial" panose="020B0604020202020204" pitchFamily="34" charset="0"/>
-              </a:rPr>
-              <a:t>Por ultimo, para </a:t>
-            </a:r>
-            <a:r>
-              <a:rPr lang="en-US" sz="1200" dirty="0" err="1">
-                <a:latin typeface="Arial" panose="020B0604020202020204" pitchFamily="34" charset="0"/>
-                <a:cs typeface="Arial" panose="020B0604020202020204" pitchFamily="34" charset="0"/>
-              </a:rPr>
-              <a:t>tener</a:t>
-            </a:r>
-            <a:r>
-              <a:rPr lang="en-US" sz="1200" dirty="0">
-                <a:latin typeface="Arial" panose="020B0604020202020204" pitchFamily="34" charset="0"/>
-                <a:cs typeface="Arial" panose="020B0604020202020204" pitchFamily="34" charset="0"/>
-              </a:rPr>
-              <a:t> K=0 </a:t>
-            </a:r>
-            <a:r>
-              <a:rPr lang="en-US" sz="1200" dirty="0" err="1">
-                <a:latin typeface="Arial" panose="020B0604020202020204" pitchFamily="34" charset="0"/>
-                <a:cs typeface="Arial" panose="020B0604020202020204" pitchFamily="34" charset="0"/>
-              </a:rPr>
-              <a:t>hemos</a:t>
-            </a:r>
-            <a:r>
-              <a:rPr lang="en-US" sz="1200" dirty="0">
-                <a:latin typeface="Arial" panose="020B0604020202020204" pitchFamily="34" charset="0"/>
-                <a:cs typeface="Arial" panose="020B0604020202020204" pitchFamily="34" charset="0"/>
-              </a:rPr>
-              <a:t> de </a:t>
-            </a:r>
-            <a:r>
-              <a:rPr lang="en-US" sz="1200" dirty="0" err="1">
-                <a:latin typeface="Arial" panose="020B0604020202020204" pitchFamily="34" charset="0"/>
-                <a:cs typeface="Arial" panose="020B0604020202020204" pitchFamily="34" charset="0"/>
-              </a:rPr>
-              <a:t>poner</a:t>
-            </a:r>
-            <a:r>
-              <a:rPr lang="en-US" sz="1200" dirty="0">
-                <a:latin typeface="Arial" panose="020B0604020202020204" pitchFamily="34" charset="0"/>
-                <a:cs typeface="Arial" panose="020B0604020202020204" pitchFamily="34" charset="0"/>
-              </a:rPr>
-              <a:t> una </a:t>
-            </a:r>
-            <a:r>
-              <a:rPr lang="en-US" sz="1200" dirty="0" err="1">
-                <a:latin typeface="Arial" panose="020B0604020202020204" pitchFamily="34" charset="0"/>
-                <a:cs typeface="Arial" panose="020B0604020202020204" pitchFamily="34" charset="0"/>
-              </a:rPr>
-              <a:t>distancia</a:t>
-            </a:r>
-            <a:r>
-              <a:rPr lang="en-US" sz="1200" dirty="0">
-                <a:latin typeface="Arial" panose="020B0604020202020204" pitchFamily="34" charset="0"/>
-                <a:cs typeface="Arial" panose="020B0604020202020204" pitchFamily="34" charset="0"/>
-              </a:rPr>
-              <a:t> L=m*</a:t>
-            </a:r>
-            <a:r>
-              <a:rPr lang="en-US" sz="1200" dirty="0" err="1">
-                <a:latin typeface="Arial" panose="020B0604020202020204" pitchFamily="34" charset="0"/>
-                <a:cs typeface="Arial" panose="020B0604020202020204" pitchFamily="34" charset="0"/>
-              </a:rPr>
-              <a:t>L_pi</a:t>
-            </a:r>
-            <a:r>
-              <a:rPr lang="en-US" sz="1200" dirty="0">
-                <a:latin typeface="Arial" panose="020B0604020202020204" pitchFamily="34" charset="0"/>
-                <a:cs typeface="Arial" panose="020B0604020202020204" pitchFamily="34" charset="0"/>
-              </a:rPr>
-              <a:t> para m pares.</a:t>
-            </a:r>
-          </a:p>
-          <a:p>
-            <a:pPr algn="just"/>
+            <a:pPr eaLnBrk="0" fontAlgn="base" hangingPunct="0">
+              <a:spcBef>
+                <a:spcPct val="0"/>
+              </a:spcBef>
+              <a:spcAft>
+                <a:spcPct val="0"/>
+              </a:spcAft>
+              <a:buFontTx/>
+              <a:buChar char="•"/>
+            </a:pPr>
+            <a:r>
+              <a:rPr kumimoji="0" lang="es-ES" altLang="es-ES" sz="1200" i="0" u="none" strike="noStrike" cap="none" normalizeH="0" baseline="0" dirty="0">
+                <a:ln>
+                  <a:noFill/>
+                </a:ln>
+                <a:solidFill>
+                  <a:schemeClr val="tx1"/>
+                </a:solidFill>
+                <a:effectLst/>
+                <a:latin typeface="Arial" panose="020B0604020202020204" pitchFamily="34" charset="0"/>
+              </a:rPr>
+              <a:t>Para dividir la potencia en dos (K=0.5), la longitud debe ser L=</a:t>
+            </a:r>
+            <a:r>
+              <a:rPr kumimoji="0" lang="es-ES" altLang="es-ES" sz="1200" i="0" u="none" strike="noStrike" cap="none" normalizeH="0" baseline="0" dirty="0" err="1">
+                <a:ln>
+                  <a:noFill/>
+                </a:ln>
+                <a:solidFill>
+                  <a:schemeClr val="tx1"/>
+                </a:solidFill>
+                <a:effectLst/>
+                <a:latin typeface="Arial" panose="020B0604020202020204" pitchFamily="34" charset="0"/>
+              </a:rPr>
+              <a:t>m⋅L</a:t>
+            </a:r>
+            <a:r>
+              <a:rPr kumimoji="0" lang="es-ES" altLang="es-ES" sz="1200" i="0" u="none" strike="noStrike" cap="none" normalizeH="0" baseline="0" dirty="0">
+                <a:ln>
+                  <a:noFill/>
+                </a:ln>
+                <a:solidFill>
+                  <a:schemeClr val="tx1"/>
+                </a:solidFill>
+                <a:effectLst/>
+                <a:latin typeface="Arial" panose="020B0604020202020204" pitchFamily="34" charset="0"/>
+              </a:rPr>
+              <a:t>π/2 con m impar.</a:t>
+            </a:r>
+          </a:p>
+          <a:p>
+            <a:pPr eaLnBrk="0" fontAlgn="base" hangingPunct="0">
+              <a:spcBef>
+                <a:spcPct val="0"/>
+              </a:spcBef>
+              <a:spcAft>
+                <a:spcPct val="0"/>
+              </a:spcAft>
+              <a:buFontTx/>
+              <a:buChar char="•"/>
+            </a:pPr>
+            <a:r>
+              <a:rPr lang="es-ES" altLang="es-ES" sz="1200" dirty="0">
+                <a:latin typeface="Arial" panose="020B0604020202020204" pitchFamily="34" charset="0"/>
+              </a:rPr>
+              <a:t>Si L=</a:t>
+            </a:r>
+            <a:r>
+              <a:rPr lang="es-ES" altLang="es-ES" sz="1200" dirty="0" err="1">
+                <a:latin typeface="Arial" panose="020B0604020202020204" pitchFamily="34" charset="0"/>
+              </a:rPr>
+              <a:t>m⋅L</a:t>
+            </a:r>
+            <a:r>
+              <a:rPr lang="es-ES" altLang="es-ES" sz="1200" dirty="0">
+                <a:latin typeface="Arial" panose="020B0604020202020204" pitchFamily="34" charset="0"/>
+              </a:rPr>
+              <a:t>π​ y m es impar, hay transferencia completa de energía entre guías → K=1.</a:t>
+            </a:r>
+          </a:p>
+          <a:p>
+            <a:pPr marL="0" marR="0" lvl="0" indent="0" algn="l" defTabSz="914400" rtl="0" eaLnBrk="0" fontAlgn="base" latinLnBrk="0" hangingPunct="0">
+              <a:lnSpc>
+                <a:spcPct val="100000"/>
+              </a:lnSpc>
+              <a:spcBef>
+                <a:spcPct val="0"/>
+              </a:spcBef>
+              <a:spcAft>
+                <a:spcPct val="0"/>
+              </a:spcAft>
+              <a:buClrTx/>
+              <a:buSzTx/>
+              <a:buFontTx/>
+              <a:buChar char="•"/>
+              <a:tabLst/>
+            </a:pPr>
+            <a:r>
+              <a:rPr kumimoji="0" lang="es-ES" altLang="es-ES" sz="1200" i="0" u="none" strike="noStrike" cap="none" normalizeH="0" baseline="0" dirty="0">
+                <a:ln>
+                  <a:noFill/>
+                </a:ln>
+                <a:solidFill>
+                  <a:schemeClr val="tx1"/>
+                </a:solidFill>
+                <a:effectLst/>
+                <a:latin typeface="Arial" panose="020B0604020202020204" pitchFamily="34" charset="0"/>
+              </a:rPr>
+              <a:t>Si L=</a:t>
+            </a:r>
+            <a:r>
+              <a:rPr kumimoji="0" lang="es-ES" altLang="es-ES" sz="1200" i="0" u="none" strike="noStrike" cap="none" normalizeH="0" baseline="0" dirty="0" err="1">
+                <a:ln>
+                  <a:noFill/>
+                </a:ln>
+                <a:solidFill>
+                  <a:schemeClr val="tx1"/>
+                </a:solidFill>
+                <a:effectLst/>
+                <a:latin typeface="Arial" panose="020B0604020202020204" pitchFamily="34" charset="0"/>
+              </a:rPr>
+              <a:t>m⋅L</a:t>
+            </a:r>
+            <a:r>
+              <a:rPr kumimoji="0" lang="es-ES" altLang="es-ES" sz="1200" i="0" u="none" strike="noStrike" cap="none" normalizeH="0" baseline="0" dirty="0">
+                <a:ln>
+                  <a:noFill/>
+                </a:ln>
+                <a:solidFill>
+                  <a:schemeClr val="tx1"/>
+                </a:solidFill>
+                <a:effectLst/>
+                <a:latin typeface="Arial" panose="020B0604020202020204" pitchFamily="34" charset="0"/>
+              </a:rPr>
+              <a:t>π​ y m es par, no hay transferencia de potencia → K=0.</a:t>
+            </a:r>
             <a:endParaRPr lang="en-US" sz="1200" dirty="0">
               <a:latin typeface="Arial" panose="020B0604020202020204" pitchFamily="34" charset="0"/>
               <a:cs typeface="Arial" panose="020B0604020202020204" pitchFamily="34" charset="0"/>
@@ -11685,6 +12555,95 @@
           </a:prstGeom>
         </p:spPr>
       </p:pic>
+      <p:sp>
+        <p:nvSpPr>
+          <p:cNvPr id="4" name="Rectangle 1">
+            <a:extLst>
+              <a:ext uri="{FF2B5EF4-FFF2-40B4-BE49-F238E27FC236}">
+                <a16:creationId xmlns:a16="http://schemas.microsoft.com/office/drawing/2014/main" id="{837B67DF-37A6-443B-923E-1C3CDAD350F0}"/>
+              </a:ext>
+            </a:extLst>
+          </p:cNvPr>
+          <p:cNvSpPr>
+            <a:spLocks noChangeArrowheads="1"/>
+          </p:cNvSpPr>
+          <p:nvPr/>
+        </p:nvSpPr>
+        <p:spPr bwMode="auto">
+          <a:xfrm>
+            <a:off x="0" y="-184666"/>
+            <a:ext cx="248786" cy="369332"/>
+          </a:xfrm>
+          <a:prstGeom prst="rect">
+            <a:avLst/>
+          </a:prstGeom>
+          <a:noFill/>
+          <a:ln>
+            <a:noFill/>
+          </a:ln>
+          <a:effectLst/>
+          <a:extLst>
+            <a:ext uri="{909E8E84-426E-40DD-AFC4-6F175D3DCCD1}">
+              <a14:hiddenFill xmlns:a14="http://schemas.microsoft.com/office/drawing/2010/main">
+                <a:solidFill>
+                  <a:schemeClr val="accent1"/>
+                </a:solidFill>
+              </a14:hiddenFill>
+            </a:ext>
+            <a:ext uri="{91240B29-F687-4F45-9708-019B960494DF}">
+              <a14:hiddenLine xmlns:a14="http://schemas.microsoft.com/office/drawing/2010/main" w="9525">
+                <a:solidFill>
+                  <a:schemeClr val="tx1"/>
+                </a:solidFill>
+                <a:miter lim="800000"/>
+                <a:headEnd/>
+                <a:tailEnd/>
+              </a14:hiddenLine>
+            </a:ext>
+            <a:ext uri="{AF507438-7753-43E0-B8FC-AC1667EBCBE1}">
+              <a14:hiddenEffects xmlns:a14="http://schemas.microsoft.com/office/drawing/2010/main">
+                <a:effectLst>
+                  <a:outerShdw dist="35921" dir="2700000" algn="ctr" rotWithShape="0">
+                    <a:schemeClr val="bg2"/>
+                  </a:outerShdw>
+                </a:effectLst>
+              </a14:hiddenEffects>
+            </a:ext>
+          </a:extLst>
+        </p:spPr>
+        <p:txBody>
+          <a:bodyPr vert="horz" wrap="none" lIns="91440" tIns="45720" rIns="91440" bIns="45720" numCol="1" anchor="ctr" anchorCtr="0" compatLnSpc="1">
+            <a:prstTxWarp prst="textNoShape">
+              <a:avLst/>
+            </a:prstTxWarp>
+            <a:spAutoFit/>
+          </a:bodyPr>
+          <a:lstStyle/>
+          <a:p>
+            <a:pPr eaLnBrk="0" fontAlgn="base" hangingPunct="0">
+              <a:spcBef>
+                <a:spcPct val="0"/>
+              </a:spcBef>
+              <a:spcAft>
+                <a:spcPct val="0"/>
+              </a:spcAft>
+            </a:pPr>
+            <a:r>
+              <a:rPr kumimoji="0" lang="es-ES" altLang="es-ES" sz="1800" b="0" i="0" u="none" strike="noStrike" cap="none" normalizeH="0" baseline="0" dirty="0">
+                <a:ln>
+                  <a:noFill/>
+                </a:ln>
+                <a:solidFill>
+                  <a:schemeClr val="tx1"/>
+                </a:solidFill>
+                <a:effectLst/>
+                <a:latin typeface="Arial" panose="020B0604020202020204" pitchFamily="34" charset="0"/>
+              </a:rPr>
+              <a:t>.</a:t>
+            </a:r>
+          </a:p>
+        </p:txBody>
+      </p:sp>
     </p:spTree>
     <p:extLst>
       <p:ext uri="{BB962C8B-B14F-4D97-AF65-F5344CB8AC3E}">
@@ -11895,7 +12854,7 @@
         <p:spPr>
           <a:xfrm>
             <a:off x="609441" y="4860334"/>
-            <a:ext cx="11199971" cy="1200329"/>
+            <a:ext cx="11199971" cy="1015663"/>
           </a:xfrm>
           <a:prstGeom prst="rect">
             <a:avLst/>
@@ -11917,612 +12876,151 @@
           </a:bodyPr>
           <a:lstStyle/>
           <a:p>
-            <a:pPr algn="just"/>
-            <a:r>
-              <a:rPr lang="en-US" sz="1200" dirty="0" err="1">
-                <a:latin typeface="Arial" panose="020B0604020202020204" pitchFamily="34" charset="0"/>
-                <a:cs typeface="Arial" panose="020B0604020202020204" pitchFamily="34" charset="0"/>
-              </a:rPr>
-              <a:t>En</a:t>
-            </a:r>
-            <a:r>
-              <a:rPr lang="en-US" sz="1200" dirty="0">
-                <a:latin typeface="Arial" panose="020B0604020202020204" pitchFamily="34" charset="0"/>
-                <a:cs typeface="Arial" panose="020B0604020202020204" pitchFamily="34" charset="0"/>
-              </a:rPr>
-              <a:t> </a:t>
-            </a:r>
-            <a:r>
-              <a:rPr lang="en-US" sz="1200" dirty="0" err="1">
-                <a:latin typeface="Arial" panose="020B0604020202020204" pitchFamily="34" charset="0"/>
-                <a:cs typeface="Arial" panose="020B0604020202020204" pitchFamily="34" charset="0"/>
-              </a:rPr>
-              <a:t>el</a:t>
-            </a:r>
-            <a:r>
-              <a:rPr lang="en-US" sz="1200" dirty="0">
-                <a:latin typeface="Arial" panose="020B0604020202020204" pitchFamily="34" charset="0"/>
-                <a:cs typeface="Arial" panose="020B0604020202020204" pitchFamily="34" charset="0"/>
-              </a:rPr>
-              <a:t> </a:t>
-            </a:r>
-            <a:r>
-              <a:rPr lang="en-US" sz="1200" dirty="0" err="1">
-                <a:latin typeface="Arial" panose="020B0604020202020204" pitchFamily="34" charset="0"/>
-                <a:cs typeface="Arial" panose="020B0604020202020204" pitchFamily="34" charset="0"/>
-              </a:rPr>
-              <a:t>caso</a:t>
-            </a:r>
-            <a:r>
-              <a:rPr lang="en-US" sz="1200" dirty="0">
-                <a:latin typeface="Arial" panose="020B0604020202020204" pitchFamily="34" charset="0"/>
-                <a:cs typeface="Arial" panose="020B0604020202020204" pitchFamily="34" charset="0"/>
-              </a:rPr>
-              <a:t> de la </a:t>
-            </a:r>
-            <a:r>
-              <a:rPr lang="en-US" sz="1200" dirty="0" err="1">
-                <a:latin typeface="Arial" panose="020B0604020202020204" pitchFamily="34" charset="0"/>
-                <a:cs typeface="Arial" panose="020B0604020202020204" pitchFamily="34" charset="0"/>
-              </a:rPr>
-              <a:t>izquierda</a:t>
-            </a:r>
-            <a:r>
-              <a:rPr lang="en-US" sz="1200" dirty="0">
-                <a:latin typeface="Arial" panose="020B0604020202020204" pitchFamily="34" charset="0"/>
-                <a:cs typeface="Arial" panose="020B0604020202020204" pitchFamily="34" charset="0"/>
-              </a:rPr>
-              <a:t> L=</a:t>
-            </a:r>
-            <a:r>
-              <a:rPr lang="en-US" sz="1200" dirty="0" err="1">
-                <a:latin typeface="Arial" panose="020B0604020202020204" pitchFamily="34" charset="0"/>
-                <a:cs typeface="Arial" panose="020B0604020202020204" pitchFamily="34" charset="0"/>
-              </a:rPr>
-              <a:t>L_pi</a:t>
-            </a:r>
-            <a:r>
-              <a:rPr lang="en-US" sz="1200" dirty="0">
-                <a:latin typeface="Arial" panose="020B0604020202020204" pitchFamily="34" charset="0"/>
-                <a:cs typeface="Arial" panose="020B0604020202020204" pitchFamily="34" charset="0"/>
-              </a:rPr>
-              <a:t> por tanto se </a:t>
-            </a:r>
-            <a:r>
-              <a:rPr lang="en-US" sz="1200" dirty="0" err="1">
-                <a:latin typeface="Arial" panose="020B0604020202020204" pitchFamily="34" charset="0"/>
-                <a:cs typeface="Arial" panose="020B0604020202020204" pitchFamily="34" charset="0"/>
-              </a:rPr>
-              <a:t>obtiene</a:t>
-            </a:r>
-            <a:r>
-              <a:rPr lang="en-US" sz="1200" dirty="0">
-                <a:latin typeface="Arial" panose="020B0604020202020204" pitchFamily="34" charset="0"/>
-                <a:cs typeface="Arial" panose="020B0604020202020204" pitchFamily="34" charset="0"/>
-              </a:rPr>
-              <a:t> la mayor </a:t>
-            </a:r>
-            <a:r>
-              <a:rPr lang="en-US" sz="1200" dirty="0" err="1">
-                <a:latin typeface="Arial" panose="020B0604020202020204" pitchFamily="34" charset="0"/>
-                <a:cs typeface="Arial" panose="020B0604020202020204" pitchFamily="34" charset="0"/>
-              </a:rPr>
-              <a:t>parte</a:t>
-            </a:r>
-            <a:r>
-              <a:rPr lang="en-US" sz="1200" dirty="0">
-                <a:latin typeface="Arial" panose="020B0604020202020204" pitchFamily="34" charset="0"/>
-                <a:cs typeface="Arial" panose="020B0604020202020204" pitchFamily="34" charset="0"/>
-              </a:rPr>
-              <a:t> de la </a:t>
-            </a:r>
-            <a:r>
-              <a:rPr lang="en-US" sz="1200" dirty="0" err="1">
-                <a:latin typeface="Arial" panose="020B0604020202020204" pitchFamily="34" charset="0"/>
-                <a:cs typeface="Arial" panose="020B0604020202020204" pitchFamily="34" charset="0"/>
-              </a:rPr>
-              <a:t>potencia</a:t>
-            </a:r>
-            <a:r>
-              <a:rPr lang="en-US" sz="1200" dirty="0">
-                <a:latin typeface="Arial" panose="020B0604020202020204" pitchFamily="34" charset="0"/>
-                <a:cs typeface="Arial" panose="020B0604020202020204" pitchFamily="34" charset="0"/>
-              </a:rPr>
-              <a:t> </a:t>
-            </a:r>
-            <a:r>
-              <a:rPr lang="en-US" sz="1200" dirty="0" err="1">
-                <a:latin typeface="Arial" panose="020B0604020202020204" pitchFamily="34" charset="0"/>
-                <a:cs typeface="Arial" panose="020B0604020202020204" pitchFamily="34" charset="0"/>
-              </a:rPr>
-              <a:t>en</a:t>
-            </a:r>
-            <a:r>
-              <a:rPr lang="en-US" sz="1200" dirty="0">
-                <a:latin typeface="Arial" panose="020B0604020202020204" pitchFamily="34" charset="0"/>
-                <a:cs typeface="Arial" panose="020B0604020202020204" pitchFamily="34" charset="0"/>
-              </a:rPr>
-              <a:t> la </a:t>
-            </a:r>
-            <a:r>
-              <a:rPr lang="en-US" sz="1200" dirty="0" err="1">
-                <a:latin typeface="Arial" panose="020B0604020202020204" pitchFamily="34" charset="0"/>
-                <a:cs typeface="Arial" panose="020B0604020202020204" pitchFamily="34" charset="0"/>
-              </a:rPr>
-              <a:t>salida</a:t>
-            </a:r>
-            <a:r>
-              <a:rPr lang="en-US" sz="1200" dirty="0">
-                <a:latin typeface="Arial" panose="020B0604020202020204" pitchFamily="34" charset="0"/>
-                <a:cs typeface="Arial" panose="020B0604020202020204" pitchFamily="34" charset="0"/>
-              </a:rPr>
-              <a:t> </a:t>
-            </a:r>
-            <a:r>
-              <a:rPr lang="en-US" sz="1200" dirty="0" err="1">
-                <a:latin typeface="Arial" panose="020B0604020202020204" pitchFamily="34" charset="0"/>
-                <a:cs typeface="Arial" panose="020B0604020202020204" pitchFamily="34" charset="0"/>
-              </a:rPr>
-              <a:t>contraria</a:t>
-            </a:r>
-            <a:r>
-              <a:rPr lang="en-US" sz="1200" dirty="0">
-                <a:latin typeface="Arial" panose="020B0604020202020204" pitchFamily="34" charset="0"/>
-                <a:cs typeface="Arial" panose="020B0604020202020204" pitchFamily="34" charset="0"/>
-              </a:rPr>
-              <a:t> al </a:t>
-            </a:r>
-            <a:r>
-              <a:rPr lang="en-US" sz="1200" dirty="0" err="1">
-                <a:latin typeface="Arial" panose="020B0604020202020204" pitchFamily="34" charset="0"/>
-                <a:cs typeface="Arial" panose="020B0604020202020204" pitchFamily="34" charset="0"/>
-              </a:rPr>
-              <a:t>puerto</a:t>
-            </a:r>
-            <a:r>
-              <a:rPr lang="en-US" sz="1200" dirty="0">
-                <a:latin typeface="Arial" panose="020B0604020202020204" pitchFamily="34" charset="0"/>
-                <a:cs typeface="Arial" panose="020B0604020202020204" pitchFamily="34" charset="0"/>
-              </a:rPr>
-              <a:t> de entrada </a:t>
-            </a:r>
-            <a:r>
-              <a:rPr lang="en-US" sz="1200" dirty="0" err="1">
-                <a:latin typeface="Arial" panose="020B0604020202020204" pitchFamily="34" charset="0"/>
-                <a:cs typeface="Arial" panose="020B0604020202020204" pitchFamily="34" charset="0"/>
-              </a:rPr>
-              <a:t>como</a:t>
-            </a:r>
-            <a:r>
-              <a:rPr lang="en-US" sz="1200" dirty="0">
-                <a:latin typeface="Arial" panose="020B0604020202020204" pitchFamily="34" charset="0"/>
-                <a:cs typeface="Arial" panose="020B0604020202020204" pitchFamily="34" charset="0"/>
-              </a:rPr>
-              <a:t> se </a:t>
-            </a:r>
-            <a:r>
-              <a:rPr lang="en-US" sz="1200" dirty="0" err="1">
-                <a:latin typeface="Arial" panose="020B0604020202020204" pitchFamily="34" charset="0"/>
-                <a:cs typeface="Arial" panose="020B0604020202020204" pitchFamily="34" charset="0"/>
-              </a:rPr>
-              <a:t>puede</a:t>
-            </a:r>
-            <a:r>
-              <a:rPr lang="en-US" sz="1200" dirty="0">
-                <a:latin typeface="Arial" panose="020B0604020202020204" pitchFamily="34" charset="0"/>
-                <a:cs typeface="Arial" panose="020B0604020202020204" pitchFamily="34" charset="0"/>
-              </a:rPr>
-              <a:t> </a:t>
-            </a:r>
-            <a:r>
-              <a:rPr lang="en-US" sz="1200" dirty="0" err="1">
-                <a:latin typeface="Arial" panose="020B0604020202020204" pitchFamily="34" charset="0"/>
-                <a:cs typeface="Arial" panose="020B0604020202020204" pitchFamily="34" charset="0"/>
-              </a:rPr>
-              <a:t>observar</a:t>
-            </a:r>
-            <a:r>
-              <a:rPr lang="en-US" sz="1200" dirty="0">
-                <a:latin typeface="Arial" panose="020B0604020202020204" pitchFamily="34" charset="0"/>
-                <a:cs typeface="Arial" panose="020B0604020202020204" pitchFamily="34" charset="0"/>
-              </a:rPr>
-              <a:t> </a:t>
-            </a:r>
-            <a:r>
-              <a:rPr lang="en-US" sz="1200" dirty="0" err="1">
-                <a:latin typeface="Arial" panose="020B0604020202020204" pitchFamily="34" charset="0"/>
-                <a:cs typeface="Arial" panose="020B0604020202020204" pitchFamily="34" charset="0"/>
-              </a:rPr>
-              <a:t>en</a:t>
-            </a:r>
-            <a:r>
-              <a:rPr lang="en-US" sz="1200" dirty="0">
-                <a:latin typeface="Arial" panose="020B0604020202020204" pitchFamily="34" charset="0"/>
-                <a:cs typeface="Arial" panose="020B0604020202020204" pitchFamily="34" charset="0"/>
-              </a:rPr>
-              <a:t> los ratios de </a:t>
-            </a:r>
-            <a:r>
-              <a:rPr lang="en-US" sz="1200" dirty="0" err="1">
-                <a:latin typeface="Arial" panose="020B0604020202020204" pitchFamily="34" charset="0"/>
-                <a:cs typeface="Arial" panose="020B0604020202020204" pitchFamily="34" charset="0"/>
-              </a:rPr>
-              <a:t>salida</a:t>
-            </a:r>
-            <a:r>
-              <a:rPr lang="en-US" sz="1200" dirty="0">
-                <a:latin typeface="Arial" panose="020B0604020202020204" pitchFamily="34" charset="0"/>
-                <a:cs typeface="Arial" panose="020B0604020202020204" pitchFamily="34" charset="0"/>
-              </a:rPr>
-              <a:t>.</a:t>
-            </a:r>
-          </a:p>
-          <a:p>
-            <a:pPr algn="just"/>
-            <a:r>
-              <a:rPr lang="en-US" sz="1200" dirty="0" err="1">
-                <a:latin typeface="Arial" panose="020B0604020202020204" pitchFamily="34" charset="0"/>
-                <a:cs typeface="Arial" panose="020B0604020202020204" pitchFamily="34" charset="0"/>
-              </a:rPr>
-              <a:t>En</a:t>
-            </a:r>
-            <a:r>
-              <a:rPr lang="en-US" sz="1200" dirty="0">
-                <a:latin typeface="Arial" panose="020B0604020202020204" pitchFamily="34" charset="0"/>
-                <a:cs typeface="Arial" panose="020B0604020202020204" pitchFamily="34" charset="0"/>
-              </a:rPr>
-              <a:t> </a:t>
-            </a:r>
-            <a:r>
-              <a:rPr lang="en-US" sz="1200" dirty="0" err="1">
-                <a:latin typeface="Arial" panose="020B0604020202020204" pitchFamily="34" charset="0"/>
-                <a:cs typeface="Arial" panose="020B0604020202020204" pitchFamily="34" charset="0"/>
-              </a:rPr>
-              <a:t>el</a:t>
-            </a:r>
-            <a:r>
-              <a:rPr lang="en-US" sz="1200" dirty="0">
-                <a:latin typeface="Arial" panose="020B0604020202020204" pitchFamily="34" charset="0"/>
-                <a:cs typeface="Arial" panose="020B0604020202020204" pitchFamily="34" charset="0"/>
-              </a:rPr>
-              <a:t> </a:t>
-            </a:r>
-            <a:r>
-              <a:rPr lang="en-US" sz="1200" dirty="0" err="1">
-                <a:latin typeface="Arial" panose="020B0604020202020204" pitchFamily="34" charset="0"/>
-                <a:cs typeface="Arial" panose="020B0604020202020204" pitchFamily="34" charset="0"/>
-              </a:rPr>
-              <a:t>caso</a:t>
-            </a:r>
-            <a:r>
-              <a:rPr lang="en-US" sz="1200" dirty="0">
-                <a:latin typeface="Arial" panose="020B0604020202020204" pitchFamily="34" charset="0"/>
-                <a:cs typeface="Arial" panose="020B0604020202020204" pitchFamily="34" charset="0"/>
-              </a:rPr>
-              <a:t> de la </a:t>
-            </a:r>
-            <a:r>
-              <a:rPr lang="en-US" sz="1200" dirty="0" err="1">
-                <a:latin typeface="Arial" panose="020B0604020202020204" pitchFamily="34" charset="0"/>
-                <a:cs typeface="Arial" panose="020B0604020202020204" pitchFamily="34" charset="0"/>
-              </a:rPr>
-              <a:t>derecha</a:t>
-            </a:r>
-            <a:r>
-              <a:rPr lang="en-US" sz="1200" dirty="0">
-                <a:latin typeface="Arial" panose="020B0604020202020204" pitchFamily="34" charset="0"/>
-                <a:cs typeface="Arial" panose="020B0604020202020204" pitchFamily="34" charset="0"/>
-              </a:rPr>
-              <a:t> L=</a:t>
-            </a:r>
-            <a:r>
-              <a:rPr lang="en-US" sz="1200" dirty="0" err="1">
-                <a:latin typeface="Arial" panose="020B0604020202020204" pitchFamily="34" charset="0"/>
-                <a:cs typeface="Arial" panose="020B0604020202020204" pitchFamily="34" charset="0"/>
-              </a:rPr>
-              <a:t>L_pi</a:t>
-            </a:r>
-            <a:r>
-              <a:rPr lang="en-US" sz="1200" dirty="0">
-                <a:latin typeface="Arial" panose="020B0604020202020204" pitchFamily="34" charset="0"/>
-                <a:cs typeface="Arial" panose="020B0604020202020204" pitchFamily="34" charset="0"/>
-              </a:rPr>
-              <a:t>/2 por tanto la </a:t>
-            </a:r>
-            <a:r>
-              <a:rPr lang="en-US" sz="1200" dirty="0" err="1">
-                <a:latin typeface="Arial" panose="020B0604020202020204" pitchFamily="34" charset="0"/>
-                <a:cs typeface="Arial" panose="020B0604020202020204" pitchFamily="34" charset="0"/>
-              </a:rPr>
-              <a:t>potencia</a:t>
-            </a:r>
-            <a:r>
-              <a:rPr lang="en-US" sz="1200" dirty="0">
-                <a:latin typeface="Arial" panose="020B0604020202020204" pitchFamily="34" charset="0"/>
-                <a:cs typeface="Arial" panose="020B0604020202020204" pitchFamily="34" charset="0"/>
-              </a:rPr>
-              <a:t> de entrada se divide a la </a:t>
-            </a:r>
-            <a:r>
-              <a:rPr lang="en-US" sz="1200" dirty="0" err="1">
-                <a:latin typeface="Arial" panose="020B0604020202020204" pitchFamily="34" charset="0"/>
-                <a:cs typeface="Arial" panose="020B0604020202020204" pitchFamily="34" charset="0"/>
-              </a:rPr>
-              <a:t>mitad</a:t>
-            </a:r>
-            <a:r>
-              <a:rPr lang="en-US" sz="1200" dirty="0">
-                <a:latin typeface="Arial" panose="020B0604020202020204" pitchFamily="34" charset="0"/>
-                <a:cs typeface="Arial" panose="020B0604020202020204" pitchFamily="34" charset="0"/>
-              </a:rPr>
-              <a:t> </a:t>
-            </a:r>
-            <a:r>
-              <a:rPr lang="en-US" sz="1200" dirty="0" err="1">
-                <a:latin typeface="Arial" panose="020B0604020202020204" pitchFamily="34" charset="0"/>
-                <a:cs typeface="Arial" panose="020B0604020202020204" pitchFamily="34" charset="0"/>
-              </a:rPr>
-              <a:t>en</a:t>
-            </a:r>
-            <a:r>
-              <a:rPr lang="en-US" sz="1200" dirty="0">
-                <a:latin typeface="Arial" panose="020B0604020202020204" pitchFamily="34" charset="0"/>
-                <a:cs typeface="Arial" panose="020B0604020202020204" pitchFamily="34" charset="0"/>
-              </a:rPr>
-              <a:t> </a:t>
-            </a:r>
-            <a:r>
-              <a:rPr lang="en-US" sz="1200" dirty="0" err="1">
-                <a:latin typeface="Arial" panose="020B0604020202020204" pitchFamily="34" charset="0"/>
-                <a:cs typeface="Arial" panose="020B0604020202020204" pitchFamily="34" charset="0"/>
-              </a:rPr>
-              <a:t>cada</a:t>
-            </a:r>
-            <a:r>
-              <a:rPr lang="en-US" sz="1200" dirty="0">
-                <a:latin typeface="Arial" panose="020B0604020202020204" pitchFamily="34" charset="0"/>
-                <a:cs typeface="Arial" panose="020B0604020202020204" pitchFamily="34" charset="0"/>
-              </a:rPr>
-              <a:t> </a:t>
-            </a:r>
-            <a:r>
-              <a:rPr lang="en-US" sz="1200" dirty="0" err="1">
-                <a:latin typeface="Arial" panose="020B0604020202020204" pitchFamily="34" charset="0"/>
-                <a:cs typeface="Arial" panose="020B0604020202020204" pitchFamily="34" charset="0"/>
-              </a:rPr>
-              <a:t>puerto</a:t>
-            </a:r>
-            <a:r>
-              <a:rPr lang="en-US" sz="1200" dirty="0">
-                <a:latin typeface="Arial" panose="020B0604020202020204" pitchFamily="34" charset="0"/>
-                <a:cs typeface="Arial" panose="020B0604020202020204" pitchFamily="34" charset="0"/>
-              </a:rPr>
-              <a:t> de </a:t>
-            </a:r>
-            <a:r>
-              <a:rPr lang="en-US" sz="1200" dirty="0" err="1">
-                <a:latin typeface="Arial" panose="020B0604020202020204" pitchFamily="34" charset="0"/>
-                <a:cs typeface="Arial" panose="020B0604020202020204" pitchFamily="34" charset="0"/>
-              </a:rPr>
-              <a:t>salida</a:t>
-            </a:r>
-            <a:r>
-              <a:rPr lang="en-US" sz="1200" dirty="0">
-                <a:latin typeface="Arial" panose="020B0604020202020204" pitchFamily="34" charset="0"/>
-                <a:cs typeface="Arial" panose="020B0604020202020204" pitchFamily="34" charset="0"/>
-              </a:rPr>
-              <a:t>. Como se </a:t>
-            </a:r>
-            <a:r>
-              <a:rPr lang="en-US" sz="1200" dirty="0" err="1">
-                <a:latin typeface="Arial" panose="020B0604020202020204" pitchFamily="34" charset="0"/>
-                <a:cs typeface="Arial" panose="020B0604020202020204" pitchFamily="34" charset="0"/>
-              </a:rPr>
-              <a:t>aprecia</a:t>
-            </a:r>
-            <a:r>
-              <a:rPr lang="en-US" sz="1200" dirty="0">
-                <a:latin typeface="Arial" panose="020B0604020202020204" pitchFamily="34" charset="0"/>
-                <a:cs typeface="Arial" panose="020B0604020202020204" pitchFamily="34" charset="0"/>
-              </a:rPr>
-              <a:t> </a:t>
-            </a:r>
-            <a:r>
-              <a:rPr lang="en-US" sz="1200" dirty="0" err="1">
-                <a:latin typeface="Arial" panose="020B0604020202020204" pitchFamily="34" charset="0"/>
-                <a:cs typeface="Arial" panose="020B0604020202020204" pitchFamily="34" charset="0"/>
-              </a:rPr>
-              <a:t>en</a:t>
-            </a:r>
-            <a:r>
-              <a:rPr lang="en-US" sz="1200" dirty="0">
-                <a:latin typeface="Arial" panose="020B0604020202020204" pitchFamily="34" charset="0"/>
-                <a:cs typeface="Arial" panose="020B0604020202020204" pitchFamily="34" charset="0"/>
-              </a:rPr>
-              <a:t> la imagen, los ratios de </a:t>
-            </a:r>
-            <a:r>
-              <a:rPr lang="en-US" sz="1200" dirty="0" err="1">
-                <a:latin typeface="Arial" panose="020B0604020202020204" pitchFamily="34" charset="0"/>
-                <a:cs typeface="Arial" panose="020B0604020202020204" pitchFamily="34" charset="0"/>
-              </a:rPr>
-              <a:t>salida</a:t>
-            </a:r>
-            <a:r>
-              <a:rPr lang="en-US" sz="1200" dirty="0">
-                <a:latin typeface="Arial" panose="020B0604020202020204" pitchFamily="34" charset="0"/>
-                <a:cs typeface="Arial" panose="020B0604020202020204" pitchFamily="34" charset="0"/>
-              </a:rPr>
-              <a:t> son 0.5 </a:t>
-            </a:r>
-            <a:r>
-              <a:rPr lang="en-US" sz="1200" dirty="0" err="1">
-                <a:latin typeface="Arial" panose="020B0604020202020204" pitchFamily="34" charset="0"/>
-                <a:cs typeface="Arial" panose="020B0604020202020204" pitchFamily="34" charset="0"/>
-              </a:rPr>
-              <a:t>en</a:t>
-            </a:r>
-            <a:r>
-              <a:rPr lang="en-US" sz="1200" dirty="0">
-                <a:latin typeface="Arial" panose="020B0604020202020204" pitchFamily="34" charset="0"/>
-                <a:cs typeface="Arial" panose="020B0604020202020204" pitchFamily="34" charset="0"/>
-              </a:rPr>
-              <a:t> </a:t>
-            </a:r>
-            <a:r>
-              <a:rPr lang="en-US" sz="1200" dirty="0" err="1">
-                <a:latin typeface="Arial" panose="020B0604020202020204" pitchFamily="34" charset="0"/>
-                <a:cs typeface="Arial" panose="020B0604020202020204" pitchFamily="34" charset="0"/>
-              </a:rPr>
-              <a:t>el</a:t>
-            </a:r>
-            <a:r>
-              <a:rPr lang="en-US" sz="1200" dirty="0">
-                <a:latin typeface="Arial" panose="020B0604020202020204" pitchFamily="34" charset="0"/>
-                <a:cs typeface="Arial" panose="020B0604020202020204" pitchFamily="34" charset="0"/>
-              </a:rPr>
-              <a:t> </a:t>
-            </a:r>
-            <a:r>
-              <a:rPr lang="en-US" sz="1200" dirty="0" err="1">
-                <a:latin typeface="Arial" panose="020B0604020202020204" pitchFamily="34" charset="0"/>
-                <a:cs typeface="Arial" panose="020B0604020202020204" pitchFamily="34" charset="0"/>
-              </a:rPr>
-              <a:t>puerto</a:t>
-            </a:r>
-            <a:r>
-              <a:rPr lang="en-US" sz="1200" dirty="0">
-                <a:latin typeface="Arial" panose="020B0604020202020204" pitchFamily="34" charset="0"/>
-                <a:cs typeface="Arial" panose="020B0604020202020204" pitchFamily="34" charset="0"/>
-              </a:rPr>
-              <a:t> de </a:t>
-            </a:r>
-            <a:r>
-              <a:rPr lang="en-US" sz="1200" dirty="0" err="1">
-                <a:latin typeface="Arial" panose="020B0604020202020204" pitchFamily="34" charset="0"/>
-                <a:cs typeface="Arial" panose="020B0604020202020204" pitchFamily="34" charset="0"/>
-              </a:rPr>
-              <a:t>arriba</a:t>
-            </a:r>
-            <a:r>
-              <a:rPr lang="en-US" sz="1200" dirty="0">
-                <a:latin typeface="Arial" panose="020B0604020202020204" pitchFamily="34" charset="0"/>
-                <a:cs typeface="Arial" panose="020B0604020202020204" pitchFamily="34" charset="0"/>
-              </a:rPr>
-              <a:t> y 0.5 </a:t>
-            </a:r>
-            <a:r>
-              <a:rPr lang="en-US" sz="1200" dirty="0" err="1">
-                <a:latin typeface="Arial" panose="020B0604020202020204" pitchFamily="34" charset="0"/>
-                <a:cs typeface="Arial" panose="020B0604020202020204" pitchFamily="34" charset="0"/>
-              </a:rPr>
-              <a:t>en</a:t>
-            </a:r>
-            <a:r>
-              <a:rPr lang="en-US" sz="1200" dirty="0">
-                <a:latin typeface="Arial" panose="020B0604020202020204" pitchFamily="34" charset="0"/>
-                <a:cs typeface="Arial" panose="020B0604020202020204" pitchFamily="34" charset="0"/>
-              </a:rPr>
-              <a:t> </a:t>
-            </a:r>
-            <a:r>
-              <a:rPr lang="en-US" sz="1200" dirty="0" err="1">
-                <a:latin typeface="Arial" panose="020B0604020202020204" pitchFamily="34" charset="0"/>
-                <a:cs typeface="Arial" panose="020B0604020202020204" pitchFamily="34" charset="0"/>
-              </a:rPr>
-              <a:t>el</a:t>
-            </a:r>
-            <a:r>
-              <a:rPr lang="en-US" sz="1200" dirty="0">
-                <a:latin typeface="Arial" panose="020B0604020202020204" pitchFamily="34" charset="0"/>
-                <a:cs typeface="Arial" panose="020B0604020202020204" pitchFamily="34" charset="0"/>
-              </a:rPr>
-              <a:t> de </a:t>
-            </a:r>
-            <a:r>
-              <a:rPr lang="en-US" sz="1200" dirty="0" err="1">
-                <a:latin typeface="Arial" panose="020B0604020202020204" pitchFamily="34" charset="0"/>
-                <a:cs typeface="Arial" panose="020B0604020202020204" pitchFamily="34" charset="0"/>
-              </a:rPr>
-              <a:t>abajo</a:t>
-            </a:r>
-            <a:r>
-              <a:rPr lang="en-US" sz="1200" dirty="0">
-                <a:latin typeface="Arial" panose="020B0604020202020204" pitchFamily="34" charset="0"/>
-                <a:cs typeface="Arial" panose="020B0604020202020204" pitchFamily="34" charset="0"/>
-              </a:rPr>
-              <a:t>.</a:t>
-            </a:r>
-          </a:p>
-          <a:p>
-            <a:pPr algn="just"/>
-            <a:endParaRPr lang="en-US" sz="1200" dirty="0">
+            <a:pPr marL="0" marR="0" lvl="0" indent="0" algn="l" defTabSz="914400" rtl="0" eaLnBrk="0" fontAlgn="base" latinLnBrk="0" hangingPunct="0">
+              <a:lnSpc>
+                <a:spcPct val="100000"/>
+              </a:lnSpc>
+              <a:spcBef>
+                <a:spcPct val="0"/>
+              </a:spcBef>
+              <a:spcAft>
+                <a:spcPct val="0"/>
+              </a:spcAft>
+              <a:buClrTx/>
+              <a:buSzTx/>
+              <a:buFontTx/>
+              <a:buChar char="•"/>
+              <a:tabLst/>
+            </a:pPr>
+            <a:r>
+              <a:rPr kumimoji="0" lang="es-ES" altLang="es-ES" sz="1200" i="0" u="none" strike="noStrike" cap="none" normalizeH="0" baseline="0" dirty="0">
+                <a:ln>
+                  <a:noFill/>
+                </a:ln>
+                <a:solidFill>
+                  <a:schemeClr val="tx1"/>
+                </a:solidFill>
+                <a:effectLst/>
+                <a:latin typeface="Arial" panose="020B0604020202020204" pitchFamily="34" charset="0"/>
+              </a:rPr>
+              <a:t>Caso izquierdo: L=Lπ. La mayor parte de la potencia sale por el puerto opuesto al de entrada.</a:t>
+            </a:r>
+          </a:p>
+          <a:p>
+            <a:pPr marL="0" marR="0" lvl="0" indent="0" algn="l" defTabSz="914400" rtl="0" eaLnBrk="0" fontAlgn="base" latinLnBrk="0" hangingPunct="0">
+              <a:lnSpc>
+                <a:spcPct val="100000"/>
+              </a:lnSpc>
+              <a:spcBef>
+                <a:spcPct val="0"/>
+              </a:spcBef>
+              <a:spcAft>
+                <a:spcPct val="0"/>
+              </a:spcAft>
+              <a:buClrTx/>
+              <a:buSzTx/>
+              <a:buFontTx/>
+              <a:buChar char="•"/>
+              <a:tabLst/>
+            </a:pPr>
+            <a:endParaRPr kumimoji="0" lang="es-ES" altLang="es-ES" sz="1200" i="0" u="none" strike="noStrike" cap="none" normalizeH="0" baseline="0" dirty="0">
+              <a:ln>
+                <a:noFill/>
+              </a:ln>
+              <a:solidFill>
+                <a:schemeClr val="tx1"/>
+              </a:solidFill>
+              <a:effectLst/>
               <a:latin typeface="Arial" panose="020B0604020202020204" pitchFamily="34" charset="0"/>
-              <a:cs typeface="Arial" panose="020B0604020202020204" pitchFamily="34" charset="0"/>
             </a:endParaRPr>
           </a:p>
           <a:p>
-            <a:pPr algn="just"/>
-            <a:r>
-              <a:rPr lang="en-US" sz="1200" dirty="0">
-                <a:latin typeface="Arial" panose="020B0604020202020204" pitchFamily="34" charset="0"/>
-                <a:cs typeface="Arial" panose="020B0604020202020204" pitchFamily="34" charset="0"/>
-              </a:rPr>
-              <a:t>Ambos </a:t>
-            </a:r>
-            <a:r>
-              <a:rPr lang="en-US" sz="1200" dirty="0" err="1">
-                <a:latin typeface="Arial" panose="020B0604020202020204" pitchFamily="34" charset="0"/>
-                <a:cs typeface="Arial" panose="020B0604020202020204" pitchFamily="34" charset="0"/>
-              </a:rPr>
-              <a:t>casos</a:t>
-            </a:r>
-            <a:r>
-              <a:rPr lang="en-US" sz="1200" dirty="0">
-                <a:latin typeface="Arial" panose="020B0604020202020204" pitchFamily="34" charset="0"/>
-                <a:cs typeface="Arial" panose="020B0604020202020204" pitchFamily="34" charset="0"/>
-              </a:rPr>
-              <a:t> </a:t>
-            </a:r>
-            <a:r>
-              <a:rPr lang="en-US" sz="1200" dirty="0" err="1">
-                <a:latin typeface="Arial" panose="020B0604020202020204" pitchFamily="34" charset="0"/>
-                <a:cs typeface="Arial" panose="020B0604020202020204" pitchFamily="34" charset="0"/>
-              </a:rPr>
-              <a:t>presentan</a:t>
-            </a:r>
-            <a:r>
-              <a:rPr lang="en-US" sz="1200" dirty="0">
-                <a:latin typeface="Arial" panose="020B0604020202020204" pitchFamily="34" charset="0"/>
-                <a:cs typeface="Arial" panose="020B0604020202020204" pitchFamily="34" charset="0"/>
-              </a:rPr>
-              <a:t> una </a:t>
-            </a:r>
-            <a:r>
-              <a:rPr lang="en-US" sz="1200" dirty="0" err="1">
-                <a:latin typeface="Arial" panose="020B0604020202020204" pitchFamily="34" charset="0"/>
-                <a:cs typeface="Arial" panose="020B0604020202020204" pitchFamily="34" charset="0"/>
-              </a:rPr>
-              <a:t>pérdidas</a:t>
-            </a:r>
-            <a:r>
-              <a:rPr lang="en-US" sz="1200" dirty="0">
-                <a:latin typeface="Arial" panose="020B0604020202020204" pitchFamily="34" charset="0"/>
-                <a:cs typeface="Arial" panose="020B0604020202020204" pitchFamily="34" charset="0"/>
-              </a:rPr>
-              <a:t> de 0.18 </a:t>
-            </a:r>
-            <a:r>
-              <a:rPr lang="en-US" sz="1200" dirty="0" err="1">
-                <a:latin typeface="Arial" panose="020B0604020202020204" pitchFamily="34" charset="0"/>
-                <a:cs typeface="Arial" panose="020B0604020202020204" pitchFamily="34" charset="0"/>
-              </a:rPr>
-              <a:t>dB.</a:t>
-            </a:r>
-            <a:endParaRPr lang="en-US" sz="1200" dirty="0">
+            <a:pPr marL="0" marR="0" lvl="0" indent="0" algn="l" defTabSz="914400" rtl="0" eaLnBrk="0" fontAlgn="base" latinLnBrk="0" hangingPunct="0">
+              <a:lnSpc>
+                <a:spcPct val="100000"/>
+              </a:lnSpc>
+              <a:spcBef>
+                <a:spcPct val="0"/>
+              </a:spcBef>
+              <a:spcAft>
+                <a:spcPct val="0"/>
+              </a:spcAft>
+              <a:buClrTx/>
+              <a:buSzTx/>
+              <a:buFontTx/>
+              <a:buChar char="•"/>
+              <a:tabLst/>
+            </a:pPr>
+            <a:r>
+              <a:rPr kumimoji="0" lang="es-ES" altLang="es-ES" sz="1200" i="0" u="none" strike="noStrike" cap="none" normalizeH="0" baseline="0" dirty="0">
+                <a:ln>
+                  <a:noFill/>
+                </a:ln>
+                <a:solidFill>
+                  <a:schemeClr val="tx1"/>
+                </a:solidFill>
+                <a:effectLst/>
+                <a:latin typeface="Arial" panose="020B0604020202020204" pitchFamily="34" charset="0"/>
+              </a:rPr>
+              <a:t>Caso derecho: L=Lπ/2. La potencia de entrada se divide por igual entre los dos puertos de salida (≈ 0.5 y 0.5)</a:t>
+            </a:r>
+          </a:p>
+          <a:p>
+            <a:pPr marL="0" marR="0" lvl="0" indent="0" algn="l" defTabSz="914400" rtl="0" eaLnBrk="0" fontAlgn="base" latinLnBrk="0" hangingPunct="0">
+              <a:lnSpc>
+                <a:spcPct val="100000"/>
+              </a:lnSpc>
+              <a:spcBef>
+                <a:spcPct val="0"/>
+              </a:spcBef>
+              <a:spcAft>
+                <a:spcPct val="0"/>
+              </a:spcAft>
+              <a:buClrTx/>
+              <a:buSzTx/>
+              <a:tabLst/>
+            </a:pPr>
+            <a:endParaRPr kumimoji="0" lang="es-ES" altLang="es-ES" sz="1200" i="0" u="none" strike="noStrike" cap="none" normalizeH="0" baseline="0" dirty="0">
+              <a:ln>
+                <a:noFill/>
+              </a:ln>
+              <a:solidFill>
+                <a:schemeClr val="tx1"/>
+              </a:solidFill>
+              <a:effectLst/>
               <a:latin typeface="Arial" panose="020B0604020202020204" pitchFamily="34" charset="0"/>
-              <a:cs typeface="Arial" panose="020B0604020202020204" pitchFamily="34" charset="0"/>
             </a:endParaRPr>
+          </a:p>
+          <a:p>
+            <a:pPr marL="0" marR="0" lvl="0" indent="0" algn="l" defTabSz="914400" rtl="0" eaLnBrk="0" fontAlgn="base" latinLnBrk="0" hangingPunct="0">
+              <a:lnSpc>
+                <a:spcPct val="100000"/>
+              </a:lnSpc>
+              <a:spcBef>
+                <a:spcPct val="0"/>
+              </a:spcBef>
+              <a:spcAft>
+                <a:spcPct val="0"/>
+              </a:spcAft>
+              <a:buClrTx/>
+              <a:buSzTx/>
+              <a:buFontTx/>
+              <a:buChar char="•"/>
+              <a:tabLst/>
+            </a:pPr>
+            <a:r>
+              <a:rPr kumimoji="0" lang="es-ES" altLang="es-ES" sz="1200" i="0" u="none" strike="noStrike" cap="none" normalizeH="0" baseline="0" dirty="0">
+                <a:ln>
+                  <a:noFill/>
+                </a:ln>
+                <a:solidFill>
+                  <a:schemeClr val="tx1"/>
+                </a:solidFill>
+                <a:effectLst/>
+                <a:latin typeface="Arial" panose="020B0604020202020204" pitchFamily="34" charset="0"/>
+              </a:rPr>
+              <a:t>En ambos casos, la pérdida es aproximadamente 0.18 dB.</a:t>
+            </a:r>
           </a:p>
         </p:txBody>
       </p:sp>
@@ -14785,14 +15283,21 @@
                 <a:latin typeface="Arial" panose="020B0604020202020204" pitchFamily="34" charset="0"/>
                 <a:cs typeface="Arial" panose="020B0604020202020204" pitchFamily="34" charset="0"/>
               </a:rPr>
-              <a:t>, he cambiado la función eme.py porque no calculaba para casos </a:t>
+              <a:t>, he intentado cambiar la función DC.EME() y no he conseguido repetir el </a:t>
             </a:r>
             <a:r>
               <a:rPr lang="es-ES" sz="1200" dirty="0" err="1">
                 <a:latin typeface="Arial" panose="020B0604020202020204" pitchFamily="34" charset="0"/>
                 <a:cs typeface="Arial" panose="020B0604020202020204" pitchFamily="34" charset="0"/>
               </a:rPr>
-              <a:t>shallow</a:t>
+              <a:t>proces</a:t>
+            </a:r>
+            <a:r>
+              <a:rPr lang="es-ES" sz="1200" dirty="0">
+                <a:latin typeface="Arial" panose="020B0604020202020204" pitchFamily="34" charset="0"/>
+                <a:cs typeface="Arial" panose="020B0604020202020204" pitchFamily="34" charset="0"/>
+              </a:rPr>
+              <a:t>.</a:t>
             </a:r>
             <a:endParaRPr lang="en-US" sz="1200" dirty="0">
               <a:latin typeface="Arial" panose="020B0604020202020204" pitchFamily="34" charset="0"/>
